--- a/assets/libreoffice_impr_njc/d6ba6b61-5ce3-46c0-90c0-f635d3a1a8eb/Tencent Holdings Limited - 2025 Interim Report.pptx
+++ b/assets/libreoffice_impr_njc/d6ba6b61-5ce3-46c0-90c0-f635d3a1a8eb/Tencent Holdings Limited - 2025 Interim Report.pptx
@@ -118,7 +118,19 @@
               <a:rPr b="0" lang="en-HK" sz="2000" spc="-1" strike="noStrike">
                 <a:latin typeface="Arial"/>
               </a:rPr>
-              <a:t>Click to edit the notes format</a:t>
+              <a:t>Click to edit </a:t>
+            </a:r>
+            <a:r>
+              <a:rPr b="0" lang="en-HK" sz="2000" spc="-1" strike="noStrike">
+                <a:latin typeface="Arial"/>
+              </a:rPr>
+              <a:t>the notes </a:t>
+            </a:r>
+            <a:r>
+              <a:rPr b="0" lang="en-HK" sz="2000" spc="-1" strike="noStrike">
+                <a:latin typeface="Arial"/>
+              </a:rPr>
+              <a:t>format</a:t>
             </a:r>
             <a:endParaRPr b="0" lang="en-HK" sz="2000" spc="-1" strike="noStrike">
               <a:latin typeface="Arial"/>
@@ -303,7 +315,7 @@
             <a:pPr algn="r">
               <a:buNone/>
             </a:pPr>
-            <a:fld id="{48E23D3D-EE6F-40DD-9F50-39DEF2EF892B}" type="slidenum">
+            <a:fld id="{EDCE77B1-C971-4F5D-AAE8-FB677A96CD8B}" type="slidenum">
               <a:rPr b="0" lang="en-HK" sz="1400" spc="-1" strike="noStrike">
                 <a:latin typeface="Times New Roman"/>
               </a:rPr>
@@ -351,7 +363,7 @@
         <p:spPr>
           <a:xfrm>
             <a:off x="685800" y="1143000"/>
-            <a:ext cx="5485680" cy="3085560"/>
+            <a:ext cx="5484240" cy="3084120"/>
           </a:xfrm>
           <a:prstGeom prst="rect">
             <a:avLst/>
@@ -374,7 +386,7 @@
         <p:spPr>
           <a:xfrm>
             <a:off x="685800" y="4400640"/>
-            <a:ext cx="5485680" cy="3599640"/>
+            <a:ext cx="5484240" cy="3598200"/>
           </a:xfrm>
           <a:prstGeom prst="rect">
             <a:avLst/>
@@ -408,7 +420,7 @@
         <p:spPr>
           <a:xfrm>
             <a:off x="3884760" y="8685360"/>
-            <a:ext cx="2971080" cy="457920"/>
+            <a:ext cx="2969640" cy="456480"/>
           </a:xfrm>
           <a:prstGeom prst="rect">
             <a:avLst/>
@@ -440,7 +452,7 @@
               </a:lnSpc>
               <a:buNone/>
             </a:pPr>
-            <a:fld id="{76C7D359-910C-4DE4-AF33-D4511BB2F970}" type="slidenum">
+            <a:fld id="{B53120F8-1F4A-4088-8B45-180D631CC90E}" type="slidenum">
               <a:rPr b="0" lang="en-US" sz="1200" spc="-1" strike="noStrike">
                 <a:latin typeface="Times New Roman"/>
               </a:rPr>
@@ -487,7 +499,7 @@
         <p:spPr>
           <a:xfrm>
             <a:off x="685800" y="1143000"/>
-            <a:ext cx="5485680" cy="3085560"/>
+            <a:ext cx="5484240" cy="3084120"/>
           </a:xfrm>
           <a:prstGeom prst="rect">
             <a:avLst/>
@@ -510,7 +522,7 @@
         <p:spPr>
           <a:xfrm>
             <a:off x="685800" y="4400640"/>
-            <a:ext cx="5485680" cy="3599640"/>
+            <a:ext cx="5484240" cy="3598200"/>
           </a:xfrm>
           <a:prstGeom prst="rect">
             <a:avLst/>
@@ -544,7 +556,7 @@
         <p:spPr>
           <a:xfrm>
             <a:off x="3884760" y="8685360"/>
-            <a:ext cx="2971080" cy="457920"/>
+            <a:ext cx="2969640" cy="456480"/>
           </a:xfrm>
           <a:prstGeom prst="rect">
             <a:avLst/>
@@ -576,7 +588,7 @@
               </a:lnSpc>
               <a:buNone/>
             </a:pPr>
-            <a:fld id="{4F897DDA-A985-4310-B194-4408979EF36A}" type="slidenum">
+            <a:fld id="{B02DD3B6-984C-4682-B8A8-FB48787FE8C1}" type="slidenum">
               <a:rPr b="0" lang="en-US" sz="1200" spc="-1" strike="noStrike">
                 <a:latin typeface="Times New Roman"/>
               </a:rPr>
@@ -623,7 +635,7 @@
         <p:spPr>
           <a:xfrm>
             <a:off x="685800" y="1143000"/>
-            <a:ext cx="5485680" cy="3085560"/>
+            <a:ext cx="5484240" cy="3084120"/>
           </a:xfrm>
           <a:prstGeom prst="rect">
             <a:avLst/>
@@ -646,7 +658,7 @@
         <p:spPr>
           <a:xfrm>
             <a:off x="685800" y="4400640"/>
-            <a:ext cx="5485680" cy="3599640"/>
+            <a:ext cx="5484240" cy="3598200"/>
           </a:xfrm>
           <a:prstGeom prst="rect">
             <a:avLst/>
@@ -680,7 +692,7 @@
         <p:spPr>
           <a:xfrm>
             <a:off x="3884760" y="8685360"/>
-            <a:ext cx="2971080" cy="457920"/>
+            <a:ext cx="2969640" cy="456480"/>
           </a:xfrm>
           <a:prstGeom prst="rect">
             <a:avLst/>
@@ -712,7 +724,7 @@
               </a:lnSpc>
               <a:buNone/>
             </a:pPr>
-            <a:fld id="{77D87203-A44C-4EDC-8865-B6CD4686B839}" type="slidenum">
+            <a:fld id="{F38FD578-CD2E-404E-973D-8229B0F0DCA6}" type="slidenum">
               <a:rPr b="0" lang="en-US" sz="1200" spc="-1" strike="noStrike">
                 <a:latin typeface="Times New Roman"/>
               </a:rPr>
@@ -759,7 +771,7 @@
         <p:spPr>
           <a:xfrm>
             <a:off x="685800" y="1143000"/>
-            <a:ext cx="5485680" cy="3085560"/>
+            <a:ext cx="5484240" cy="3084120"/>
           </a:xfrm>
           <a:prstGeom prst="rect">
             <a:avLst/>
@@ -782,7 +794,7 @@
         <p:spPr>
           <a:xfrm>
             <a:off x="685800" y="4400640"/>
-            <a:ext cx="5485680" cy="3599640"/>
+            <a:ext cx="5484240" cy="3598200"/>
           </a:xfrm>
           <a:prstGeom prst="rect">
             <a:avLst/>
@@ -816,7 +828,7 @@
         <p:spPr>
           <a:xfrm>
             <a:off x="3884760" y="8685360"/>
-            <a:ext cx="2971080" cy="457920"/>
+            <a:ext cx="2969640" cy="456480"/>
           </a:xfrm>
           <a:prstGeom prst="rect">
             <a:avLst/>
@@ -848,7 +860,7 @@
               </a:lnSpc>
               <a:buNone/>
             </a:pPr>
-            <a:fld id="{300D7DE5-7166-4D72-BBCE-120A150A2401}" type="slidenum">
+            <a:fld id="{53AC3357-066F-4B58-8BBF-C3DB6CFB7421}" type="slidenum">
               <a:rPr b="0" lang="en-US" sz="1200" spc="-1" strike="noStrike">
                 <a:latin typeface="Times New Roman"/>
               </a:rPr>
@@ -895,7 +907,7 @@
         <p:spPr>
           <a:xfrm>
             <a:off x="685800" y="1143000"/>
-            <a:ext cx="5485680" cy="3085560"/>
+            <a:ext cx="5484240" cy="3084120"/>
           </a:xfrm>
           <a:prstGeom prst="rect">
             <a:avLst/>
@@ -918,7 +930,7 @@
         <p:spPr>
           <a:xfrm>
             <a:off x="685800" y="4400640"/>
-            <a:ext cx="5485680" cy="3599640"/>
+            <a:ext cx="5484240" cy="3598200"/>
           </a:xfrm>
           <a:prstGeom prst="rect">
             <a:avLst/>
@@ -952,7 +964,7 @@
         <p:spPr>
           <a:xfrm>
             <a:off x="3884760" y="8685360"/>
-            <a:ext cx="2971080" cy="457920"/>
+            <a:ext cx="2969640" cy="456480"/>
           </a:xfrm>
           <a:prstGeom prst="rect">
             <a:avLst/>
@@ -984,7 +996,7 @@
               </a:lnSpc>
               <a:buNone/>
             </a:pPr>
-            <a:fld id="{C7A32446-50AF-43B8-98B1-DBB5AED5B3AE}" type="slidenum">
+            <a:fld id="{611A111C-B279-43E8-B0AE-2BA9E1CEDA50}" type="slidenum">
               <a:rPr b="0" lang="en-US" sz="1200" spc="-1" strike="noStrike">
                 <a:latin typeface="Times New Roman"/>
               </a:rPr>
@@ -1031,7 +1043,7 @@
         <p:spPr>
           <a:xfrm>
             <a:off x="685800" y="1143000"/>
-            <a:ext cx="5485680" cy="3085560"/>
+            <a:ext cx="5484240" cy="3084120"/>
           </a:xfrm>
           <a:prstGeom prst="rect">
             <a:avLst/>
@@ -1054,7 +1066,7 @@
         <p:spPr>
           <a:xfrm>
             <a:off x="685800" y="4400640"/>
-            <a:ext cx="5485680" cy="3599640"/>
+            <a:ext cx="5484240" cy="3598200"/>
           </a:xfrm>
           <a:prstGeom prst="rect">
             <a:avLst/>
@@ -1082,55 +1094,7 @@
               <a:rPr b="0" lang="en-HK" sz="1800" spc="-1" strike="noStrike">
                 <a:latin typeface="Arial"/>
               </a:rPr>
-              <a:t>Emphasis: 15% </a:t>
-            </a:r>
-            <a:r>
-              <a:rPr b="0" lang="en-HK" sz="1800" spc="-1" strike="noStrike">
-                <a:latin typeface="Arial"/>
-              </a:rPr>
-              <a:t>revenue growth </a:t>
-            </a:r>
-            <a:r>
-              <a:rPr b="0" lang="en-HK" sz="1800" spc="-1" strike="noStrike">
-                <a:latin typeface="Arial"/>
-              </a:rPr>
-              <a:t>demonstrates </a:t>
-            </a:r>
-            <a:r>
-              <a:rPr b="0" lang="en-HK" sz="1800" spc="-1" strike="noStrike">
-                <a:latin typeface="Arial"/>
-              </a:rPr>
-              <a:t>continued </a:t>
-            </a:r>
-            <a:r>
-              <a:rPr b="0" lang="en-HK" sz="1800" spc="-1" strike="noStrike">
-                <a:latin typeface="Arial"/>
-              </a:rPr>
-              <a:t>monetization </a:t>
-            </a:r>
-            <a:r>
-              <a:rPr b="0" lang="en-HK" sz="1800" spc="-1" strike="noStrike">
-                <a:latin typeface="Arial"/>
-              </a:rPr>
-              <a:t>strength. WeChat </a:t>
-            </a:r>
-            <a:r>
-              <a:rPr b="0" lang="en-HK" sz="1800" spc="-1" strike="noStrike">
-                <a:latin typeface="Arial"/>
-              </a:rPr>
-              <a:t>MAU milestone </a:t>
-            </a:r>
-            <a:r>
-              <a:rPr b="0" lang="en-HK" sz="1800" spc="-1" strike="noStrike">
-                <a:latin typeface="Arial"/>
-              </a:rPr>
-              <a:t>of 1.41 billion </a:t>
-            </a:r>
-            <a:r>
-              <a:rPr b="0" lang="en-HK" sz="1800" spc="-1" strike="noStrike">
-                <a:latin typeface="Arial"/>
-              </a:rPr>
-              <a:t>users.</a:t>
+              <a:t>Emphasis: 15% revenue growth demonstrates continued monetization strength. WeChat MAU milestone of 1.41 billion users.</a:t>
             </a:r>
             <a:endParaRPr b="0" lang="en-HK" sz="1800" spc="-1" strike="noStrike">
               <a:latin typeface="Arial"/>
@@ -1151,7 +1115,7 @@
         <p:spPr>
           <a:xfrm>
             <a:off x="3884760" y="8685360"/>
-            <a:ext cx="2971080" cy="457920"/>
+            <a:ext cx="2969640" cy="456480"/>
           </a:xfrm>
           <a:prstGeom prst="rect">
             <a:avLst/>
@@ -1183,7 +1147,7 @@
               </a:lnSpc>
               <a:buNone/>
             </a:pPr>
-            <a:fld id="{8ECD6D43-B68B-4794-B2B4-43CFD83D0164}" type="slidenum">
+            <a:fld id="{E0C0E2BC-D2BD-408C-B272-AA08FB178C2E}" type="slidenum">
               <a:rPr b="0" lang="en-US" sz="1200" spc="-1" strike="noStrike">
                 <a:latin typeface="Times New Roman"/>
               </a:rPr>
@@ -1230,7 +1194,7 @@
         <p:spPr>
           <a:xfrm>
             <a:off x="685800" y="1143000"/>
-            <a:ext cx="5485680" cy="3085560"/>
+            <a:ext cx="5484240" cy="3084120"/>
           </a:xfrm>
           <a:prstGeom prst="rect">
             <a:avLst/>
@@ -1253,7 +1217,7 @@
         <p:spPr>
           <a:xfrm>
             <a:off x="685800" y="4400640"/>
-            <a:ext cx="5485680" cy="3599640"/>
+            <a:ext cx="5484240" cy="3598200"/>
           </a:xfrm>
           <a:prstGeom prst="rect">
             <a:avLst/>
@@ -1287,7 +1251,7 @@
         <p:spPr>
           <a:xfrm>
             <a:off x="3884760" y="8685360"/>
-            <a:ext cx="2971080" cy="457920"/>
+            <a:ext cx="2969640" cy="456480"/>
           </a:xfrm>
           <a:prstGeom prst="rect">
             <a:avLst/>
@@ -1319,7 +1283,7 @@
               </a:lnSpc>
               <a:buNone/>
             </a:pPr>
-            <a:fld id="{3CAC0819-47FC-411B-9896-25E5E13304E5}" type="slidenum">
+            <a:fld id="{50CF1DBD-2215-42D6-9F90-D1470F61084B}" type="slidenum">
               <a:rPr b="0" lang="en-US" sz="1200" spc="-1" strike="noStrike">
                 <a:latin typeface="Times New Roman"/>
               </a:rPr>
@@ -1366,7 +1330,7 @@
         <p:spPr>
           <a:xfrm>
             <a:off x="685800" y="1143000"/>
-            <a:ext cx="5485680" cy="3085560"/>
+            <a:ext cx="5484240" cy="3084120"/>
           </a:xfrm>
           <a:prstGeom prst="rect">
             <a:avLst/>
@@ -1389,7 +1353,7 @@
         <p:spPr>
           <a:xfrm>
             <a:off x="685800" y="4400640"/>
-            <a:ext cx="5485680" cy="3599640"/>
+            <a:ext cx="5484240" cy="3598200"/>
           </a:xfrm>
           <a:prstGeom prst="rect">
             <a:avLst/>
@@ -1423,7 +1387,7 @@
         <p:spPr>
           <a:xfrm>
             <a:off x="3884760" y="8685360"/>
-            <a:ext cx="2971080" cy="457920"/>
+            <a:ext cx="2969640" cy="456480"/>
           </a:xfrm>
           <a:prstGeom prst="rect">
             <a:avLst/>
@@ -1455,7 +1419,7 @@
               </a:lnSpc>
               <a:buNone/>
             </a:pPr>
-            <a:fld id="{442B09C2-E555-409C-8560-9F27BF09A8AD}" type="slidenum">
+            <a:fld id="{E13946DD-1C37-4C62-BAE3-2C996B683A52}" type="slidenum">
               <a:rPr b="0" lang="en-US" sz="1200" spc="-1" strike="noStrike">
                 <a:latin typeface="Times New Roman"/>
               </a:rPr>
@@ -1502,7 +1466,7 @@
         <p:spPr>
           <a:xfrm>
             <a:off x="685800" y="1143000"/>
-            <a:ext cx="5485680" cy="3085560"/>
+            <a:ext cx="5484240" cy="3084120"/>
           </a:xfrm>
           <a:prstGeom prst="rect">
             <a:avLst/>
@@ -1525,7 +1489,7 @@
         <p:spPr>
           <a:xfrm>
             <a:off x="685800" y="4400640"/>
-            <a:ext cx="5485680" cy="3599640"/>
+            <a:ext cx="5484240" cy="3598200"/>
           </a:xfrm>
           <a:prstGeom prst="rect">
             <a:avLst/>
@@ -1559,7 +1523,7 @@
         <p:spPr>
           <a:xfrm>
             <a:off x="3884760" y="8685360"/>
-            <a:ext cx="2971080" cy="457920"/>
+            <a:ext cx="2969640" cy="456480"/>
           </a:xfrm>
           <a:prstGeom prst="rect">
             <a:avLst/>
@@ -1591,7 +1555,7 @@
               </a:lnSpc>
               <a:buNone/>
             </a:pPr>
-            <a:fld id="{12E37781-2DD9-405C-BC3E-FAA5A978A033}" type="slidenum">
+            <a:fld id="{ACF3C0C5-DE02-4C90-9EC3-12F239F9193A}" type="slidenum">
               <a:rPr b="0" lang="en-US" sz="1200" spc="-1" strike="noStrike">
                 <a:latin typeface="Times New Roman"/>
               </a:rPr>
@@ -1638,7 +1602,7 @@
         <p:spPr>
           <a:xfrm>
             <a:off x="685800" y="1143000"/>
-            <a:ext cx="5485680" cy="3085560"/>
+            <a:ext cx="5484240" cy="3084120"/>
           </a:xfrm>
           <a:prstGeom prst="rect">
             <a:avLst/>
@@ -1661,7 +1625,7 @@
         <p:spPr>
           <a:xfrm>
             <a:off x="685800" y="4400640"/>
-            <a:ext cx="5485680" cy="3599640"/>
+            <a:ext cx="5484240" cy="3598200"/>
           </a:xfrm>
           <a:prstGeom prst="rect">
             <a:avLst/>
@@ -1695,7 +1659,7 @@
         <p:spPr>
           <a:xfrm>
             <a:off x="3884760" y="8685360"/>
-            <a:ext cx="2971080" cy="457920"/>
+            <a:ext cx="2969640" cy="456480"/>
           </a:xfrm>
           <a:prstGeom prst="rect">
             <a:avLst/>
@@ -1727,7 +1691,7 @@
               </a:lnSpc>
               <a:buNone/>
             </a:pPr>
-            <a:fld id="{0FD6E249-CCC3-41C3-8D81-2F8882F690F1}" type="slidenum">
+            <a:fld id="{47CC4896-F137-4F61-8A9C-EB89A35390AA}" type="slidenum">
               <a:rPr b="0" lang="en-US" sz="1200" spc="-1" strike="noStrike">
                 <a:latin typeface="Times New Roman"/>
               </a:rPr>
@@ -1774,7 +1738,7 @@
         <p:spPr>
           <a:xfrm>
             <a:off x="685800" y="1143000"/>
-            <a:ext cx="5485680" cy="3085560"/>
+            <a:ext cx="5484240" cy="3084120"/>
           </a:xfrm>
           <a:prstGeom prst="rect">
             <a:avLst/>
@@ -1797,7 +1761,7 @@
         <p:spPr>
           <a:xfrm>
             <a:off x="685800" y="4400640"/>
-            <a:ext cx="5485680" cy="3599640"/>
+            <a:ext cx="5484240" cy="3598200"/>
           </a:xfrm>
           <a:prstGeom prst="rect">
             <a:avLst/>
@@ -1831,7 +1795,7 @@
         <p:spPr>
           <a:xfrm>
             <a:off x="3884760" y="8685360"/>
-            <a:ext cx="2971080" cy="457920"/>
+            <a:ext cx="2969640" cy="456480"/>
           </a:xfrm>
           <a:prstGeom prst="rect">
             <a:avLst/>
@@ -1863,7 +1827,7 @@
               </a:lnSpc>
               <a:buNone/>
             </a:pPr>
-            <a:fld id="{11FA547C-D153-4205-9571-4E38B5DCFC9D}" type="slidenum">
+            <a:fld id="{4AC3A390-8DEE-4637-9B03-F0D5E782CF60}" type="slidenum">
               <a:rPr b="0" lang="en-US" sz="1200" spc="-1" strike="noStrike">
                 <a:latin typeface="Times New Roman"/>
               </a:rPr>
@@ -1910,7 +1874,7 @@
         <p:spPr>
           <a:xfrm>
             <a:off x="685800" y="1143000"/>
-            <a:ext cx="5485680" cy="3085560"/>
+            <a:ext cx="5484240" cy="3084120"/>
           </a:xfrm>
           <a:prstGeom prst="rect">
             <a:avLst/>
@@ -1933,7 +1897,7 @@
         <p:spPr>
           <a:xfrm>
             <a:off x="685800" y="4400640"/>
-            <a:ext cx="5485680" cy="3599640"/>
+            <a:ext cx="5484240" cy="3598200"/>
           </a:xfrm>
           <a:prstGeom prst="rect">
             <a:avLst/>
@@ -1967,7 +1931,7 @@
         <p:spPr>
           <a:xfrm>
             <a:off x="3884760" y="8685360"/>
-            <a:ext cx="2971080" cy="457920"/>
+            <a:ext cx="2969640" cy="456480"/>
           </a:xfrm>
           <a:prstGeom prst="rect">
             <a:avLst/>
@@ -1999,7 +1963,7 @@
               </a:lnSpc>
               <a:buNone/>
             </a:pPr>
-            <a:fld id="{D0346A98-14F3-42B2-B79A-2F19E7F10CA7}" type="slidenum">
+            <a:fld id="{92FE6A5C-A0E5-4670-9A98-476B657F555B}" type="slidenum">
               <a:rPr b="0" lang="en-US" sz="1200" spc="-1" strike="noStrike">
                 <a:latin typeface="Times New Roman"/>
               </a:rPr>
@@ -3599,13 +3563,7 @@
               <a:rPr b="0" lang="en-HK" sz="4400" spc="-1" strike="noStrike">
                 <a:latin typeface="Arial"/>
               </a:rPr>
-              <a:t>Click to edit the title </a:t>
-            </a:r>
-            <a:r>
-              <a:rPr b="0" lang="en-HK" sz="4400" spc="-1" strike="noStrike">
-                <a:latin typeface="Arial"/>
-              </a:rPr>
-              <a:t>text format</a:t>
+              <a:t>Click to edit the title text format</a:t>
             </a:r>
             <a:endParaRPr b="0" lang="en-HK" sz="4400" spc="-1" strike="noStrike">
               <a:latin typeface="Arial"/>
@@ -3849,7 +3807,7 @@
         <p:spPr>
           <a:xfrm>
             <a:off x="0" y="0"/>
-            <a:ext cx="12191400" cy="6857280"/>
+            <a:ext cx="12189960" cy="6855840"/>
           </a:xfrm>
           <a:prstGeom prst="roundRect">
             <a:avLst>
@@ -3881,7 +3839,7 @@
         <p:spPr>
           <a:xfrm>
             <a:off x="0" y="0"/>
-            <a:ext cx="12191400" cy="6857280"/>
+            <a:ext cx="12189960" cy="6855840"/>
           </a:xfrm>
           <a:custGeom>
             <a:avLst/>
@@ -3944,7 +3902,7 @@
         <p:spPr>
           <a:xfrm>
             <a:off x="380880" y="380880"/>
-            <a:ext cx="456480" cy="456480"/>
+            <a:ext cx="455040" cy="455040"/>
           </a:xfrm>
           <a:custGeom>
             <a:avLst/>
@@ -4015,7 +3973,7 @@
         <p:spPr>
           <a:xfrm>
             <a:off x="495360" y="495360"/>
-            <a:ext cx="227880" cy="227880"/>
+            <a:ext cx="226440" cy="226440"/>
           </a:xfrm>
           <a:custGeom>
             <a:avLst/>
@@ -4148,7 +4106,7 @@
         <p:spPr>
           <a:xfrm>
             <a:off x="952560" y="514440"/>
-            <a:ext cx="1990080" cy="189720"/>
+            <a:ext cx="1988640" cy="188280"/>
           </a:xfrm>
           <a:prstGeom prst="rect">
             <a:avLst/>
@@ -4176,16 +4134,19 @@
               <a:buNone/>
             </a:pPr>
             <a:r>
-              <a:rPr b="1" lang="en-US" sz="1050" spc="49" strike="noStrike">
+              <a:rPr b="1" lang="en-US" sz="4400" spc="38" strike="noStrike">
                 <a:solidFill>
-                  <a:srgbClr val="8f8f8f"/>
+                  <a:srgbClr val="00008b"/>
                 </a:solidFill>
                 <a:latin typeface="Liter"/>
                 <a:ea typeface="Liter"/>
               </a:rPr>
               <a:t>INTERIM FINANCIAL REPORT</a:t>
             </a:r>
-            <a:endParaRPr b="0" lang="en-HK" sz="1050" spc="-1" strike="noStrike">
+            <a:endParaRPr b="0" lang="en-HK" sz="4400" spc="-1" strike="noStrike">
+              <a:solidFill>
+                <a:srgbClr val="00008b"/>
+              </a:solidFill>
               <a:latin typeface="Arial"/>
             </a:endParaRPr>
           </a:p>
@@ -4200,7 +4161,7 @@
         <p:spPr>
           <a:xfrm>
             <a:off x="380880" y="2057400"/>
-            <a:ext cx="11772360" cy="1713960"/>
+            <a:ext cx="11770920" cy="1712520"/>
           </a:xfrm>
           <a:prstGeom prst="rect">
             <a:avLst/>
@@ -4228,7 +4189,7 @@
               <a:buNone/>
             </a:pPr>
             <a:r>
-              <a:rPr b="0" lang="en-US" sz="4400" spc="-1" strike="noStrike">
+              <a:rPr b="1" lang="en-US" sz="4400" spc="-1" strike="noStrike">
                 <a:solidFill>
                   <a:srgbClr val="00008b"/>
                 </a:solidFill>
@@ -4252,7 +4213,7 @@
               <a:buNone/>
             </a:pPr>
             <a:r>
-              <a:rPr b="0" lang="en-US" sz="4400" spc="-1" strike="noStrike">
+              <a:rPr b="1" lang="en-US" sz="4400" spc="-1" strike="noStrike">
                 <a:solidFill>
                   <a:srgbClr val="00008b"/>
                 </a:solidFill>
@@ -4279,7 +4240,7 @@
         <p:spPr>
           <a:xfrm>
             <a:off x="380880" y="4000680"/>
-            <a:ext cx="913680" cy="37440"/>
+            <a:ext cx="912240" cy="36000"/>
           </a:xfrm>
           <a:custGeom>
             <a:avLst/>
@@ -4330,7 +4291,7 @@
         <p:spPr>
           <a:xfrm>
             <a:off x="380880" y="4267080"/>
-            <a:ext cx="11543760" cy="304200"/>
+            <a:ext cx="11542320" cy="302760"/>
           </a:xfrm>
           <a:prstGeom prst="rect">
             <a:avLst/>
@@ -4382,7 +4343,7 @@
         <p:spPr>
           <a:xfrm>
             <a:off x="380880" y="4800600"/>
-            <a:ext cx="11514960" cy="266040"/>
+            <a:ext cx="11513520" cy="264600"/>
           </a:xfrm>
           <a:prstGeom prst="rect">
             <a:avLst/>
@@ -4412,7 +4373,7 @@
             <a:r>
               <a:rPr b="0" lang="en-US" sz="4400" spc="-1" strike="noStrike">
                 <a:solidFill>
-                  <a:srgbClr val="7a97ef"/>
+                  <a:srgbClr val="00008b"/>
                 </a:solidFill>
                 <a:latin typeface="Liter"/>
                 <a:ea typeface="Liter"/>
@@ -4420,9 +4381,6 @@
               <a:t>Three and Six Months Ended 30 June 2025</a:t>
             </a:r>
             <a:endParaRPr b="0" lang="en-HK" sz="4400" spc="-1" strike="noStrike">
-              <a:solidFill>
-                <a:srgbClr val="7a97ef"/>
-              </a:solidFill>
               <a:latin typeface="Arial"/>
             </a:endParaRPr>
           </a:p>
@@ -4437,7 +4395,7 @@
         <p:spPr>
           <a:xfrm>
             <a:off x="409680" y="6305400"/>
-            <a:ext cx="132480" cy="151560"/>
+            <a:ext cx="131040" cy="150120"/>
           </a:xfrm>
           <a:custGeom>
             <a:avLst/>
@@ -4762,7 +4720,7 @@
         <p:spPr>
           <a:xfrm>
             <a:off x="647640" y="6286680"/>
-            <a:ext cx="828000" cy="189720"/>
+            <a:ext cx="826560" cy="188280"/>
           </a:xfrm>
           <a:prstGeom prst="rect">
             <a:avLst/>
@@ -4790,16 +4748,19 @@
               <a:buNone/>
             </a:pPr>
             <a:r>
-              <a:rPr b="0" lang="en-US" sz="1050" spc="-1" strike="noStrike">
+              <a:rPr b="0" lang="en-US" sz="4400" spc="-1" strike="noStrike">
                 <a:solidFill>
-                  <a:srgbClr val="8f8f8f"/>
+                  <a:srgbClr val="00008b"/>
                 </a:solidFill>
                 <a:latin typeface="Liter"/>
                 <a:ea typeface="Liter"/>
               </a:rPr>
               <a:t>August 2025</a:t>
             </a:r>
-            <a:endParaRPr b="0" lang="en-HK" sz="1050" spc="-1" strike="noStrike">
+            <a:endParaRPr b="0" lang="en-HK" sz="4400" spc="-1" strike="noStrike">
+              <a:solidFill>
+                <a:srgbClr val="00008b"/>
+              </a:solidFill>
               <a:latin typeface="Arial"/>
             </a:endParaRPr>
           </a:p>
@@ -4814,7 +4775,7 @@
         <p:spPr>
           <a:xfrm>
             <a:off x="1757160" y="6305400"/>
-            <a:ext cx="113760" cy="151560"/>
+            <a:ext cx="112320" cy="150120"/>
           </a:xfrm>
           <a:custGeom>
             <a:avLst/>
@@ -5055,7 +5016,7 @@
         <p:spPr>
           <a:xfrm>
             <a:off x="1985760" y="6286680"/>
-            <a:ext cx="789840" cy="189720"/>
+            <a:ext cx="788400" cy="188280"/>
           </a:xfrm>
           <a:prstGeom prst="rect">
             <a:avLst/>
@@ -5144,7 +5105,7 @@
         <p:spPr>
           <a:xfrm>
             <a:off x="339480" y="339480"/>
-            <a:ext cx="11571480" cy="169200"/>
+            <a:ext cx="11570040" cy="167760"/>
           </a:xfrm>
           <a:prstGeom prst="rect">
             <a:avLst/>
@@ -5172,7 +5133,7 @@
               <a:buNone/>
             </a:pPr>
             <a:r>
-              <a:rPr b="1" lang="en-US" sz="939" spc="43" strike="noStrike">
+              <a:rPr b="1" lang="en-US" sz="939" spc="32" strike="noStrike">
                 <a:solidFill>
                   <a:srgbClr val="6366f1"/>
                 </a:solidFill>
@@ -5196,7 +5157,7 @@
         <p:spPr>
           <a:xfrm>
             <a:off x="339480" y="577440"/>
-            <a:ext cx="11664720" cy="338760"/>
+            <a:ext cx="11663280" cy="337320"/>
           </a:xfrm>
           <a:prstGeom prst="rect">
             <a:avLst/>
@@ -5248,7 +5209,7 @@
         <p:spPr>
           <a:xfrm>
             <a:off x="339480" y="984960"/>
-            <a:ext cx="11580120" cy="203040"/>
+            <a:ext cx="11578680" cy="201600"/>
           </a:xfrm>
           <a:prstGeom prst="rect">
             <a:avLst/>
@@ -5300,7 +5261,7 @@
         <p:spPr>
           <a:xfrm>
             <a:off x="343800" y="1328760"/>
-            <a:ext cx="5645160" cy="1646280"/>
+            <a:ext cx="5643720" cy="1644840"/>
           </a:xfrm>
           <a:custGeom>
             <a:avLst/>
@@ -5374,7 +5335,7 @@
         <p:spPr>
           <a:xfrm>
             <a:off x="551880" y="1536840"/>
-            <a:ext cx="406800" cy="406800"/>
+            <a:ext cx="405360" cy="405360"/>
           </a:xfrm>
           <a:custGeom>
             <a:avLst/>
@@ -5447,7 +5408,7 @@
         <p:spPr>
           <a:xfrm>
             <a:off x="641160" y="1638720"/>
-            <a:ext cx="228600" cy="203040"/>
+            <a:ext cx="227160" cy="201600"/>
           </a:xfrm>
           <a:custGeom>
             <a:avLst/>
@@ -5663,7 +5624,7 @@
         <p:spPr>
           <a:xfrm>
             <a:off x="1061280" y="1536840"/>
-            <a:ext cx="1408680" cy="236880"/>
+            <a:ext cx="1407240" cy="235440"/>
           </a:xfrm>
           <a:prstGeom prst="rect">
             <a:avLst/>
@@ -5715,7 +5676,7 @@
         <p:spPr>
           <a:xfrm>
             <a:off x="1061280" y="1774440"/>
-            <a:ext cx="1383120" cy="169200"/>
+            <a:ext cx="1381680" cy="167760"/>
           </a:xfrm>
           <a:prstGeom prst="rect">
             <a:avLst/>
@@ -5767,7 +5728,7 @@
         <p:spPr>
           <a:xfrm>
             <a:off x="551880" y="2080080"/>
-            <a:ext cx="1281240" cy="406800"/>
+            <a:ext cx="1279800" cy="405360"/>
           </a:xfrm>
           <a:prstGeom prst="rect">
             <a:avLst/>
@@ -5819,7 +5780,7 @@
         <p:spPr>
           <a:xfrm>
             <a:off x="1730160" y="2254320"/>
-            <a:ext cx="601920" cy="236880"/>
+            <a:ext cx="600480" cy="235440"/>
           </a:xfrm>
           <a:custGeom>
             <a:avLst/>
@@ -5892,7 +5853,7 @@
         <p:spPr>
           <a:xfrm>
             <a:off x="1730160" y="2254320"/>
-            <a:ext cx="661680" cy="236880"/>
+            <a:ext cx="660240" cy="235440"/>
           </a:xfrm>
           <a:prstGeom prst="rect">
             <a:avLst/>
@@ -5944,7 +5905,7 @@
         <p:spPr>
           <a:xfrm>
             <a:off x="551880" y="2593800"/>
-            <a:ext cx="5288760" cy="169200"/>
+            <a:ext cx="5287320" cy="167760"/>
           </a:xfrm>
           <a:prstGeom prst="rect">
             <a:avLst/>
@@ -5996,7 +5957,7 @@
         <p:spPr>
           <a:xfrm>
             <a:off x="343800" y="3115800"/>
-            <a:ext cx="5645160" cy="1646280"/>
+            <a:ext cx="5643720" cy="1644840"/>
           </a:xfrm>
           <a:custGeom>
             <a:avLst/>
@@ -6070,7 +6031,7 @@
         <p:spPr>
           <a:xfrm>
             <a:off x="551880" y="3323880"/>
-            <a:ext cx="406800" cy="406800"/>
+            <a:ext cx="405360" cy="405360"/>
           </a:xfrm>
           <a:custGeom>
             <a:avLst/>
@@ -6143,7 +6104,7 @@
         <p:spPr>
           <a:xfrm>
             <a:off x="666360" y="3425760"/>
-            <a:ext cx="177480" cy="203040"/>
+            <a:ext cx="176040" cy="201600"/>
           </a:xfrm>
           <a:custGeom>
             <a:avLst/>
@@ -6252,7 +6213,7 @@
         <p:spPr>
           <a:xfrm>
             <a:off x="1061280" y="3323880"/>
-            <a:ext cx="1111680" cy="236880"/>
+            <a:ext cx="1110240" cy="235440"/>
           </a:xfrm>
           <a:prstGeom prst="rect">
             <a:avLst/>
@@ -6304,7 +6265,7 @@
         <p:spPr>
           <a:xfrm>
             <a:off x="1061280" y="3561840"/>
-            <a:ext cx="1086120" cy="169200"/>
+            <a:ext cx="1084680" cy="167760"/>
           </a:xfrm>
           <a:prstGeom prst="rect">
             <a:avLst/>
@@ -6356,7 +6317,7 @@
         <p:spPr>
           <a:xfrm>
             <a:off x="551880" y="3867480"/>
-            <a:ext cx="1281240" cy="406800"/>
+            <a:ext cx="1279800" cy="405360"/>
           </a:xfrm>
           <a:prstGeom prst="rect">
             <a:avLst/>
@@ -6408,7 +6369,7 @@
         <p:spPr>
           <a:xfrm>
             <a:off x="1729440" y="4041360"/>
-            <a:ext cx="576720" cy="236880"/>
+            <a:ext cx="575280" cy="235440"/>
           </a:xfrm>
           <a:custGeom>
             <a:avLst/>
@@ -6481,7 +6442,7 @@
         <p:spPr>
           <a:xfrm>
             <a:off x="1729440" y="4041360"/>
-            <a:ext cx="636120" cy="236880"/>
+            <a:ext cx="634680" cy="235440"/>
           </a:xfrm>
           <a:prstGeom prst="rect">
             <a:avLst/>
@@ -6533,7 +6494,7 @@
         <p:spPr>
           <a:xfrm>
             <a:off x="551880" y="4380840"/>
-            <a:ext cx="5288760" cy="169200"/>
+            <a:ext cx="5287320" cy="167760"/>
           </a:xfrm>
           <a:prstGeom prst="rect">
             <a:avLst/>
@@ -6585,7 +6546,7 @@
         <p:spPr>
           <a:xfrm>
             <a:off x="343800" y="4903200"/>
-            <a:ext cx="5645160" cy="1646280"/>
+            <a:ext cx="5643720" cy="1644840"/>
           </a:xfrm>
           <a:custGeom>
             <a:avLst/>
@@ -6659,7 +6620,7 @@
         <p:spPr>
           <a:xfrm>
             <a:off x="551880" y="5111280"/>
-            <a:ext cx="406800" cy="406800"/>
+            <a:ext cx="405360" cy="405360"/>
           </a:xfrm>
           <a:custGeom>
             <a:avLst/>
@@ -6732,7 +6693,7 @@
         <p:spPr>
           <a:xfrm>
             <a:off x="641160" y="5213160"/>
-            <a:ext cx="228600" cy="203040"/>
+            <a:ext cx="227160" cy="201600"/>
           </a:xfrm>
           <a:custGeom>
             <a:avLst/>
@@ -6872,7 +6833,7 @@
         <p:spPr>
           <a:xfrm>
             <a:off x="1061280" y="5111280"/>
-            <a:ext cx="1247400" cy="236880"/>
+            <a:ext cx="1245960" cy="235440"/>
           </a:xfrm>
           <a:prstGeom prst="rect">
             <a:avLst/>
@@ -6924,7 +6885,7 @@
         <p:spPr>
           <a:xfrm>
             <a:off x="1061280" y="5348880"/>
-            <a:ext cx="1221840" cy="169200"/>
+            <a:ext cx="1220400" cy="167760"/>
           </a:xfrm>
           <a:prstGeom prst="rect">
             <a:avLst/>
@@ -6976,7 +6937,7 @@
         <p:spPr>
           <a:xfrm>
             <a:off x="551880" y="5654520"/>
-            <a:ext cx="1289880" cy="406800"/>
+            <a:ext cx="1288440" cy="405360"/>
           </a:xfrm>
           <a:prstGeom prst="rect">
             <a:avLst/>
@@ -7028,7 +6989,7 @@
         <p:spPr>
           <a:xfrm>
             <a:off x="1737720" y="5828400"/>
-            <a:ext cx="703800" cy="236880"/>
+            <a:ext cx="702360" cy="235440"/>
           </a:xfrm>
           <a:custGeom>
             <a:avLst/>
@@ -7101,7 +7062,7 @@
         <p:spPr>
           <a:xfrm>
             <a:off x="1737720" y="5828400"/>
-            <a:ext cx="763560" cy="236880"/>
+            <a:ext cx="762120" cy="235440"/>
           </a:xfrm>
           <a:prstGeom prst="rect">
             <a:avLst/>
@@ -7153,7 +7114,7 @@
         <p:spPr>
           <a:xfrm>
             <a:off x="551880" y="6168240"/>
-            <a:ext cx="5288760" cy="169200"/>
+            <a:ext cx="5287320" cy="167760"/>
           </a:xfrm>
           <a:prstGeom prst="rect">
             <a:avLst/>
@@ -7205,7 +7166,7 @@
         <p:spPr>
           <a:xfrm>
             <a:off x="6203880" y="1328760"/>
-            <a:ext cx="5645160" cy="2826360"/>
+            <a:ext cx="5643720" cy="2824920"/>
           </a:xfrm>
           <a:custGeom>
             <a:avLst/>
@@ -7279,7 +7240,7 @@
         <p:spPr>
           <a:xfrm>
             <a:off x="6411960" y="1536840"/>
-            <a:ext cx="5314320" cy="236880"/>
+            <a:ext cx="5312880" cy="235440"/>
           </a:xfrm>
           <a:prstGeom prst="rect">
             <a:avLst/>
@@ -7331,7 +7292,7 @@
         <p:spPr>
           <a:xfrm>
             <a:off x="6411960" y="1910160"/>
-            <a:ext cx="5229360" cy="950040"/>
+            <a:ext cx="5227920" cy="948600"/>
           </a:xfrm>
           <a:custGeom>
             <a:avLst/>
@@ -7402,7 +7363,7 @@
         <p:spPr>
           <a:xfrm>
             <a:off x="6568920" y="2097000"/>
-            <a:ext cx="169200" cy="169200"/>
+            <a:ext cx="167760" cy="167760"/>
           </a:xfrm>
           <a:custGeom>
             <a:avLst/>
@@ -7504,7 +7465,7 @@
         <p:spPr>
           <a:xfrm>
             <a:off x="6861960" y="2080080"/>
-            <a:ext cx="941760" cy="203040"/>
+            <a:ext cx="940320" cy="201600"/>
           </a:xfrm>
           <a:prstGeom prst="rect">
             <a:avLst/>
@@ -7556,7 +7517,7 @@
         <p:spPr>
           <a:xfrm>
             <a:off x="11043000" y="2046240"/>
-            <a:ext cx="568080" cy="271080"/>
+            <a:ext cx="566640" cy="269640"/>
           </a:xfrm>
           <a:prstGeom prst="rect">
             <a:avLst/>
@@ -7608,7 +7569,7 @@
         <p:spPr>
           <a:xfrm>
             <a:off x="6547680" y="2385720"/>
-            <a:ext cx="5016960" cy="169200"/>
+            <a:ext cx="5015520" cy="167760"/>
           </a:xfrm>
           <a:prstGeom prst="rect">
             <a:avLst/>
@@ -7660,7 +7621,7 @@
         <p:spPr>
           <a:xfrm>
             <a:off x="6547680" y="2589480"/>
-            <a:ext cx="5008680" cy="135000"/>
+            <a:ext cx="5007240" cy="133560"/>
           </a:xfrm>
           <a:prstGeom prst="rect">
             <a:avLst/>
@@ -7712,7 +7673,7 @@
         <p:spPr>
           <a:xfrm>
             <a:off x="6411960" y="2997000"/>
-            <a:ext cx="5229360" cy="950040"/>
+            <a:ext cx="5227920" cy="948600"/>
           </a:xfrm>
           <a:custGeom>
             <a:avLst/>
@@ -7783,7 +7744,7 @@
         <p:spPr>
           <a:xfrm>
             <a:off x="6568920" y="3183840"/>
-            <a:ext cx="169200" cy="169200"/>
+            <a:ext cx="167760" cy="167760"/>
           </a:xfrm>
           <a:custGeom>
             <a:avLst/>
@@ -7895,7 +7856,7 @@
         <p:spPr>
           <a:xfrm>
             <a:off x="6861960" y="3166920"/>
-            <a:ext cx="958680" cy="203040"/>
+            <a:ext cx="957240" cy="201600"/>
           </a:xfrm>
           <a:prstGeom prst="rect">
             <a:avLst/>
@@ -7947,7 +7908,7 @@
         <p:spPr>
           <a:xfrm>
             <a:off x="11006280" y="3133080"/>
-            <a:ext cx="601920" cy="271080"/>
+            <a:ext cx="600480" cy="269640"/>
           </a:xfrm>
           <a:prstGeom prst="rect">
             <a:avLst/>
@@ -7999,7 +7960,7 @@
         <p:spPr>
           <a:xfrm>
             <a:off x="6547680" y="3472560"/>
-            <a:ext cx="5016960" cy="169200"/>
+            <a:ext cx="5015520" cy="167760"/>
           </a:xfrm>
           <a:prstGeom prst="rect">
             <a:avLst/>
@@ -8051,7 +8012,7 @@
         <p:spPr>
           <a:xfrm>
             <a:off x="6547680" y="3676320"/>
-            <a:ext cx="5008680" cy="135000"/>
+            <a:ext cx="5007240" cy="133560"/>
           </a:xfrm>
           <a:prstGeom prst="rect">
             <a:avLst/>
@@ -8103,7 +8064,7 @@
         <p:spPr>
           <a:xfrm>
             <a:off x="6203880" y="4300200"/>
-            <a:ext cx="5645160" cy="2554920"/>
+            <a:ext cx="5643720" cy="2553480"/>
           </a:xfrm>
           <a:custGeom>
             <a:avLst/>
@@ -8177,7 +8138,7 @@
         <p:spPr>
           <a:xfrm>
             <a:off x="6411960" y="4508280"/>
-            <a:ext cx="5314320" cy="236880"/>
+            <a:ext cx="5312880" cy="235440"/>
           </a:xfrm>
           <a:prstGeom prst="rect">
             <a:avLst/>
@@ -8229,7 +8190,7 @@
         <p:spPr>
           <a:xfrm>
             <a:off x="6411960" y="4881960"/>
-            <a:ext cx="5229360" cy="1765080"/>
+            <a:ext cx="5227920" cy="1763640"/>
           </a:xfrm>
           <a:custGeom>
             <a:avLst/>
@@ -8300,7 +8261,7 @@
         <p:spPr>
           <a:xfrm>
             <a:off x="6581880" y="5102640"/>
-            <a:ext cx="542520" cy="542520"/>
+            <a:ext cx="541080" cy="541080"/>
           </a:xfrm>
           <a:custGeom>
             <a:avLst/>
@@ -8373,7 +8334,7 @@
         <p:spPr>
           <a:xfrm>
             <a:off x="6728400" y="5247000"/>
-            <a:ext cx="254160" cy="254160"/>
+            <a:ext cx="252720" cy="252720"/>
           </a:xfrm>
           <a:custGeom>
             <a:avLst/>
@@ -8497,7 +8458,7 @@
         <p:spPr>
           <a:xfrm>
             <a:off x="7261200" y="5051520"/>
-            <a:ext cx="1255680" cy="169200"/>
+            <a:ext cx="1254240" cy="167760"/>
           </a:xfrm>
           <a:prstGeom prst="rect">
             <a:avLst/>
@@ -8549,7 +8510,7 @@
         <p:spPr>
           <a:xfrm>
             <a:off x="7261200" y="5221440"/>
-            <a:ext cx="1349280" cy="338760"/>
+            <a:ext cx="1347840" cy="337320"/>
           </a:xfrm>
           <a:prstGeom prst="rect">
             <a:avLst/>
@@ -8601,7 +8562,7 @@
         <p:spPr>
           <a:xfrm>
             <a:off x="7261200" y="5561280"/>
-            <a:ext cx="1247400" cy="135000"/>
+            <a:ext cx="1245960" cy="133560"/>
           </a:xfrm>
           <a:prstGeom prst="rect">
             <a:avLst/>
@@ -8653,7 +8614,7 @@
         <p:spPr>
           <a:xfrm>
             <a:off x="6598800" y="5858280"/>
-            <a:ext cx="118080" cy="118080"/>
+            <a:ext cx="116640" cy="116640"/>
           </a:xfrm>
           <a:custGeom>
             <a:avLst/>
@@ -8758,7 +8719,7 @@
         <p:spPr>
           <a:xfrm>
             <a:off x="6798240" y="5832720"/>
-            <a:ext cx="1986120" cy="169200"/>
+            <a:ext cx="1984680" cy="167760"/>
           </a:xfrm>
           <a:prstGeom prst="rect">
             <a:avLst/>
@@ -8810,7 +8771,7 @@
         <p:spPr>
           <a:xfrm>
             <a:off x="6598800" y="6095880"/>
-            <a:ext cx="118080" cy="118080"/>
+            <a:ext cx="116640" cy="116640"/>
           </a:xfrm>
           <a:custGeom>
             <a:avLst/>
@@ -8915,7 +8876,7 @@
         <p:spPr>
           <a:xfrm>
             <a:off x="6798240" y="6070680"/>
-            <a:ext cx="1586880" cy="169200"/>
+            <a:ext cx="1585440" cy="167760"/>
           </a:xfrm>
           <a:prstGeom prst="rect">
             <a:avLst/>
@@ -8967,7 +8928,7 @@
         <p:spPr>
           <a:xfrm>
             <a:off x="6598800" y="6333840"/>
-            <a:ext cx="118080" cy="118080"/>
+            <a:ext cx="116640" cy="116640"/>
           </a:xfrm>
           <a:custGeom>
             <a:avLst/>
@@ -9072,7 +9033,7 @@
         <p:spPr>
           <a:xfrm>
             <a:off x="6798240" y="6308280"/>
-            <a:ext cx="1026720" cy="169200"/>
+            <a:ext cx="1025280" cy="167760"/>
           </a:xfrm>
           <a:prstGeom prst="rect">
             <a:avLst/>
@@ -9161,7 +9122,7 @@
         <p:spPr>
           <a:xfrm>
             <a:off x="317520" y="317520"/>
-            <a:ext cx="11611800" cy="158040"/>
+            <a:ext cx="11610360" cy="156600"/>
           </a:xfrm>
           <a:prstGeom prst="rect">
             <a:avLst/>
@@ -9189,7 +9150,7 @@
               <a:buNone/>
             </a:pPr>
             <a:r>
-              <a:rPr b="1" lang="en-US" sz="880" spc="41" strike="noStrike">
+              <a:rPr b="1" lang="en-US" sz="880" spc="29" strike="noStrike">
                 <a:solidFill>
                   <a:srgbClr val="6366f1"/>
                 </a:solidFill>
@@ -9213,7 +9174,7 @@
         <p:spPr>
           <a:xfrm>
             <a:off x="317520" y="539640"/>
-            <a:ext cx="11699280" cy="316800"/>
+            <a:ext cx="11697840" cy="315360"/>
           </a:xfrm>
           <a:prstGeom prst="rect">
             <a:avLst/>
@@ -9265,7 +9226,7 @@
         <p:spPr>
           <a:xfrm>
             <a:off x="317520" y="920880"/>
-            <a:ext cx="11619720" cy="189720"/>
+            <a:ext cx="11618280" cy="188280"/>
           </a:xfrm>
           <a:prstGeom prst="rect">
             <a:avLst/>
@@ -9317,7 +9278,7 @@
         <p:spPr>
           <a:xfrm>
             <a:off x="321480" y="1178640"/>
-            <a:ext cx="6095160" cy="2642400"/>
+            <a:ext cx="6093720" cy="2640960"/>
           </a:xfrm>
           <a:custGeom>
             <a:avLst/>
@@ -9391,7 +9352,7 @@
         <p:spPr>
           <a:xfrm>
             <a:off x="484200" y="1341360"/>
-            <a:ext cx="5849280" cy="221400"/>
+            <a:ext cx="5847840" cy="219960"/>
           </a:xfrm>
           <a:prstGeom prst="rect">
             <a:avLst/>
@@ -9443,7 +9404,7 @@
         <p:spPr>
           <a:xfrm>
             <a:off x="484200" y="1690560"/>
-            <a:ext cx="2817000" cy="920160"/>
+            <a:ext cx="2815560" cy="918720"/>
           </a:xfrm>
           <a:custGeom>
             <a:avLst/>
@@ -9514,7 +9475,7 @@
         <p:spPr>
           <a:xfrm>
             <a:off x="611280" y="1817640"/>
-            <a:ext cx="2618640" cy="158040"/>
+            <a:ext cx="2617200" cy="156600"/>
           </a:xfrm>
           <a:prstGeom prst="rect">
             <a:avLst/>
@@ -9566,7 +9527,7 @@
         <p:spPr>
           <a:xfrm>
             <a:off x="611280" y="2039760"/>
-            <a:ext cx="2682000" cy="285120"/>
+            <a:ext cx="2680560" cy="283680"/>
           </a:xfrm>
           <a:prstGeom prst="rect">
             <a:avLst/>
@@ -9618,7 +9579,7 @@
         <p:spPr>
           <a:xfrm>
             <a:off x="611280" y="2357280"/>
-            <a:ext cx="2610720" cy="126360"/>
+            <a:ext cx="2609280" cy="124920"/>
           </a:xfrm>
           <a:prstGeom prst="rect">
             <a:avLst/>
@@ -9670,7 +9631,7 @@
         <p:spPr>
           <a:xfrm>
             <a:off x="3432600" y="1690560"/>
-            <a:ext cx="2817000" cy="920160"/>
+            <a:ext cx="2815560" cy="918720"/>
           </a:xfrm>
           <a:custGeom>
             <a:avLst/>
@@ -9741,7 +9702,7 @@
         <p:spPr>
           <a:xfrm>
             <a:off x="3559680" y="1817640"/>
-            <a:ext cx="2618640" cy="158040"/>
+            <a:ext cx="2617200" cy="156600"/>
           </a:xfrm>
           <a:prstGeom prst="rect">
             <a:avLst/>
@@ -9793,7 +9754,7 @@
         <p:spPr>
           <a:xfrm>
             <a:off x="3559680" y="2039760"/>
-            <a:ext cx="2682000" cy="285120"/>
+            <a:ext cx="2680560" cy="283680"/>
           </a:xfrm>
           <a:prstGeom prst="rect">
             <a:avLst/>
@@ -9845,7 +9806,7 @@
         <p:spPr>
           <a:xfrm>
             <a:off x="3559680" y="2357280"/>
-            <a:ext cx="2610720" cy="126360"/>
+            <a:ext cx="2609280" cy="124920"/>
           </a:xfrm>
           <a:prstGeom prst="rect">
             <a:avLst/>
@@ -9897,7 +9858,7 @@
         <p:spPr>
           <a:xfrm>
             <a:off x="484200" y="2738520"/>
-            <a:ext cx="2817000" cy="920160"/>
+            <a:ext cx="2815560" cy="918720"/>
           </a:xfrm>
           <a:custGeom>
             <a:avLst/>
@@ -9968,7 +9929,7 @@
         <p:spPr>
           <a:xfrm>
             <a:off x="611280" y="2865600"/>
-            <a:ext cx="2618640" cy="158040"/>
+            <a:ext cx="2617200" cy="156600"/>
           </a:xfrm>
           <a:prstGeom prst="rect">
             <a:avLst/>
@@ -10020,7 +9981,7 @@
         <p:spPr>
           <a:xfrm>
             <a:off x="611280" y="3087720"/>
-            <a:ext cx="2682000" cy="285120"/>
+            <a:ext cx="2680560" cy="283680"/>
           </a:xfrm>
           <a:prstGeom prst="rect">
             <a:avLst/>
@@ -10072,7 +10033,7 @@
         <p:spPr>
           <a:xfrm>
             <a:off x="611280" y="3405240"/>
-            <a:ext cx="2610720" cy="126360"/>
+            <a:ext cx="2609280" cy="124920"/>
           </a:xfrm>
           <a:prstGeom prst="rect">
             <a:avLst/>
@@ -10124,7 +10085,7 @@
         <p:spPr>
           <a:xfrm>
             <a:off x="3432600" y="2738520"/>
-            <a:ext cx="2817000" cy="920160"/>
+            <a:ext cx="2815560" cy="918720"/>
           </a:xfrm>
           <a:custGeom>
             <a:avLst/>
@@ -10195,7 +10156,7 @@
         <p:spPr>
           <a:xfrm>
             <a:off x="3559680" y="2865600"/>
-            <a:ext cx="2618640" cy="158040"/>
+            <a:ext cx="2617200" cy="156600"/>
           </a:xfrm>
           <a:prstGeom prst="rect">
             <a:avLst/>
@@ -10247,7 +10208,7 @@
         <p:spPr>
           <a:xfrm>
             <a:off x="3559680" y="3087720"/>
-            <a:ext cx="2682000" cy="285120"/>
+            <a:ext cx="2680560" cy="283680"/>
           </a:xfrm>
           <a:prstGeom prst="rect">
             <a:avLst/>
@@ -10299,7 +10260,7 @@
         <p:spPr>
           <a:xfrm>
             <a:off x="3559680" y="3405240"/>
-            <a:ext cx="2610720" cy="126360"/>
+            <a:ext cx="2609280" cy="124920"/>
           </a:xfrm>
           <a:prstGeom prst="rect">
             <a:avLst/>
@@ -10351,7 +10312,7 @@
         <p:spPr>
           <a:xfrm>
             <a:off x="321480" y="3956760"/>
-            <a:ext cx="6095160" cy="3372840"/>
+            <a:ext cx="6093720" cy="3371400"/>
           </a:xfrm>
           <a:custGeom>
             <a:avLst/>
@@ -10425,7 +10386,7 @@
         <p:spPr>
           <a:xfrm>
             <a:off x="484200" y="4119480"/>
-            <a:ext cx="5849280" cy="221400"/>
+            <a:ext cx="5847840" cy="219960"/>
           </a:xfrm>
           <a:prstGeom prst="rect">
             <a:avLst/>
@@ -10477,7 +10438,7 @@
         <p:spPr>
           <a:xfrm>
             <a:off x="484200" y="4468680"/>
-            <a:ext cx="5769720" cy="888120"/>
+            <a:ext cx="5768280" cy="886680"/>
           </a:xfrm>
           <a:custGeom>
             <a:avLst/>
@@ -10548,7 +10509,7 @@
         <p:spPr>
           <a:xfrm>
             <a:off x="611280" y="4627440"/>
-            <a:ext cx="1054800" cy="189720"/>
+            <a:ext cx="1053360" cy="188280"/>
           </a:xfrm>
           <a:prstGeom prst="rect">
             <a:avLst/>
@@ -10600,7 +10561,7 @@
         <p:spPr>
           <a:xfrm>
             <a:off x="5196600" y="4595760"/>
-            <a:ext cx="1023120" cy="253440"/>
+            <a:ext cx="1021680" cy="252000"/>
           </a:xfrm>
           <a:prstGeom prst="rect">
             <a:avLst/>
@@ -10652,7 +10613,7 @@
         <p:spPr>
           <a:xfrm>
             <a:off x="611280" y="4913280"/>
-            <a:ext cx="5571360" cy="158040"/>
+            <a:ext cx="5569920" cy="156600"/>
           </a:xfrm>
           <a:prstGeom prst="rect">
             <a:avLst/>
@@ -10704,7 +10665,7 @@
         <p:spPr>
           <a:xfrm>
             <a:off x="611280" y="5103720"/>
-            <a:ext cx="5563440" cy="126360"/>
+            <a:ext cx="5562000" cy="124920"/>
           </a:xfrm>
           <a:prstGeom prst="rect">
             <a:avLst/>
@@ -10756,7 +10717,7 @@
         <p:spPr>
           <a:xfrm>
             <a:off x="484200" y="5452920"/>
-            <a:ext cx="5769720" cy="729360"/>
+            <a:ext cx="5768280" cy="727920"/>
           </a:xfrm>
           <a:custGeom>
             <a:avLst/>
@@ -10827,7 +10788,7 @@
         <p:spPr>
           <a:xfrm>
             <a:off x="611280" y="5611680"/>
-            <a:ext cx="1110600" cy="189720"/>
+            <a:ext cx="1109160" cy="188280"/>
           </a:xfrm>
           <a:prstGeom prst="rect">
             <a:avLst/>
@@ -10879,7 +10840,7 @@
         <p:spPr>
           <a:xfrm>
             <a:off x="5174280" y="5580000"/>
-            <a:ext cx="1046880" cy="253440"/>
+            <a:ext cx="1045440" cy="252000"/>
           </a:xfrm>
           <a:prstGeom prst="rect">
             <a:avLst/>
@@ -10931,7 +10892,7 @@
         <p:spPr>
           <a:xfrm>
             <a:off x="611280" y="5897520"/>
-            <a:ext cx="5571360" cy="158040"/>
+            <a:ext cx="5569920" cy="156600"/>
           </a:xfrm>
           <a:prstGeom prst="rect">
             <a:avLst/>
@@ -10983,7 +10944,7 @@
         <p:spPr>
           <a:xfrm>
             <a:off x="484200" y="6278400"/>
-            <a:ext cx="5769720" cy="888120"/>
+            <a:ext cx="5768280" cy="886680"/>
           </a:xfrm>
           <a:custGeom>
             <a:avLst/>
@@ -11054,7 +11015,7 @@
         <p:spPr>
           <a:xfrm>
             <a:off x="611280" y="6437160"/>
-            <a:ext cx="1388520" cy="189720"/>
+            <a:ext cx="1387080" cy="188280"/>
           </a:xfrm>
           <a:prstGeom prst="rect">
             <a:avLst/>
@@ -11106,7 +11067,7 @@
         <p:spPr>
           <a:xfrm>
             <a:off x="5180400" y="6405480"/>
-            <a:ext cx="1038960" cy="253440"/>
+            <a:ext cx="1037520" cy="252000"/>
           </a:xfrm>
           <a:prstGeom prst="rect">
             <a:avLst/>
@@ -11158,7 +11119,7 @@
         <p:spPr>
           <a:xfrm>
             <a:off x="611280" y="6723000"/>
-            <a:ext cx="5571360" cy="158040"/>
+            <a:ext cx="5569920" cy="156600"/>
           </a:xfrm>
           <a:prstGeom prst="rect">
             <a:avLst/>
@@ -11210,7 +11171,7 @@
         <p:spPr>
           <a:xfrm>
             <a:off x="611280" y="6913440"/>
-            <a:ext cx="5563440" cy="126360"/>
+            <a:ext cx="5562000" cy="124920"/>
           </a:xfrm>
           <a:prstGeom prst="rect">
             <a:avLst/>
@@ -11262,7 +11223,7 @@
         <p:spPr>
           <a:xfrm>
             <a:off x="6551640" y="1178640"/>
-            <a:ext cx="5317560" cy="6150960"/>
+            <a:ext cx="5316120" cy="6149520"/>
           </a:xfrm>
           <a:custGeom>
             <a:avLst/>
@@ -11336,7 +11297,7 @@
         <p:spPr>
           <a:xfrm>
             <a:off x="6714360" y="1341360"/>
-            <a:ext cx="5071320" cy="221400"/>
+            <a:ext cx="5069880" cy="219960"/>
           </a:xfrm>
           <a:prstGeom prst="rect">
             <a:avLst/>
@@ -11388,7 +11349,7 @@
         <p:spPr>
           <a:xfrm>
             <a:off x="6714360" y="1690560"/>
-            <a:ext cx="4992120" cy="2801160"/>
+            <a:ext cx="4990680" cy="2799720"/>
           </a:xfrm>
           <a:custGeom>
             <a:avLst/>
@@ -11459,7 +11420,7 @@
         <p:spPr>
           <a:xfrm>
             <a:off x="6873120" y="1849320"/>
-            <a:ext cx="380160" cy="380160"/>
+            <a:ext cx="378720" cy="378720"/>
           </a:xfrm>
           <a:custGeom>
             <a:avLst/>
@@ -11532,7 +11493,7 @@
         <p:spPr>
           <a:xfrm>
             <a:off x="7004160" y="1960560"/>
-            <a:ext cx="118440" cy="158040"/>
+            <a:ext cx="117000" cy="156600"/>
           </a:xfrm>
           <a:custGeom>
             <a:avLst/>
@@ -11773,7 +11734,7 @@
         <p:spPr>
           <a:xfrm>
             <a:off x="7349400" y="1865160"/>
-            <a:ext cx="3015360" cy="189720"/>
+            <a:ext cx="3013920" cy="188280"/>
           </a:xfrm>
           <a:prstGeom prst="rect">
             <a:avLst/>
@@ -11825,7 +11786,7 @@
         <p:spPr>
           <a:xfrm>
             <a:off x="7349400" y="2055960"/>
-            <a:ext cx="3007440" cy="158040"/>
+            <a:ext cx="3006000" cy="156600"/>
           </a:xfrm>
           <a:prstGeom prst="rect">
             <a:avLst/>
@@ -11877,7 +11838,7 @@
         <p:spPr>
           <a:xfrm>
             <a:off x="6873120" y="2373480"/>
-            <a:ext cx="705600" cy="158040"/>
+            <a:ext cx="704160" cy="156600"/>
           </a:xfrm>
           <a:prstGeom prst="rect">
             <a:avLst/>
@@ -11929,7 +11890,7 @@
         <p:spPr>
           <a:xfrm>
             <a:off x="10321560" y="2357280"/>
-            <a:ext cx="1293120" cy="189720"/>
+            <a:ext cx="1291680" cy="188280"/>
           </a:xfrm>
           <a:prstGeom prst="rect">
             <a:avLst/>
@@ -11981,7 +11942,7 @@
         <p:spPr>
           <a:xfrm>
             <a:off x="6873120" y="2674800"/>
-            <a:ext cx="777240" cy="158040"/>
+            <a:ext cx="775800" cy="156600"/>
           </a:xfrm>
           <a:prstGeom prst="rect">
             <a:avLst/>
@@ -12033,7 +11994,7 @@
         <p:spPr>
           <a:xfrm>
             <a:off x="10810080" y="2643120"/>
-            <a:ext cx="808920" cy="221400"/>
+            <a:ext cx="807480" cy="219960"/>
           </a:xfrm>
           <a:prstGeom prst="rect">
             <a:avLst/>
@@ -12085,7 +12046,7 @@
         <p:spPr>
           <a:xfrm>
             <a:off x="6873120" y="2976480"/>
-            <a:ext cx="554760" cy="158040"/>
+            <a:ext cx="553320" cy="156600"/>
           </a:xfrm>
           <a:prstGeom prst="rect">
             <a:avLst/>
@@ -12137,7 +12098,7 @@
         <p:spPr>
           <a:xfrm>
             <a:off x="11028960" y="2960640"/>
-            <a:ext cx="586800" cy="189720"/>
+            <a:ext cx="585360" cy="188280"/>
           </a:xfrm>
           <a:prstGeom prst="rect">
             <a:avLst/>
@@ -12189,7 +12150,7 @@
         <p:spPr>
           <a:xfrm>
             <a:off x="6873120" y="3262320"/>
-            <a:ext cx="896040" cy="158040"/>
+            <a:ext cx="894600" cy="156600"/>
           </a:xfrm>
           <a:prstGeom prst="rect">
             <a:avLst/>
@@ -12241,7 +12202,7 @@
         <p:spPr>
           <a:xfrm>
             <a:off x="11202840" y="3246480"/>
-            <a:ext cx="412200" cy="189720"/>
+            <a:ext cx="410760" cy="188280"/>
           </a:xfrm>
           <a:prstGeom prst="rect">
             <a:avLst/>
@@ -12293,7 +12254,7 @@
         <p:spPr>
           <a:xfrm>
             <a:off x="6873120" y="3567960"/>
-            <a:ext cx="4674600" cy="7200"/>
+            <a:ext cx="4673160" cy="5760"/>
           </a:xfrm>
           <a:custGeom>
             <a:avLst/>
@@ -12344,7 +12305,7 @@
         <p:spPr>
           <a:xfrm>
             <a:off x="6873120" y="3699000"/>
-            <a:ext cx="4730040" cy="158040"/>
+            <a:ext cx="4728600" cy="156600"/>
           </a:xfrm>
           <a:prstGeom prst="rect">
             <a:avLst/>
@@ -12396,7 +12357,7 @@
         <p:spPr>
           <a:xfrm>
             <a:off x="6873120" y="3921120"/>
-            <a:ext cx="4769640" cy="253440"/>
+            <a:ext cx="4768200" cy="252000"/>
           </a:xfrm>
           <a:prstGeom prst="rect">
             <a:avLst/>
@@ -12448,7 +12409,7 @@
         <p:spPr>
           <a:xfrm>
             <a:off x="6873120" y="4206960"/>
-            <a:ext cx="4722120" cy="126360"/>
+            <a:ext cx="4720680" cy="124920"/>
           </a:xfrm>
           <a:prstGeom prst="rect">
             <a:avLst/>
@@ -12500,7 +12461,7 @@
         <p:spPr>
           <a:xfrm>
             <a:off x="6718320" y="4623480"/>
-            <a:ext cx="4984200" cy="1181880"/>
+            <a:ext cx="4982760" cy="1180440"/>
           </a:xfrm>
           <a:custGeom>
             <a:avLst/>
@@ -12574,7 +12535,7 @@
         <p:spPr>
           <a:xfrm>
             <a:off x="6849360" y="4754520"/>
-            <a:ext cx="4793400" cy="221400"/>
+            <a:ext cx="4791960" cy="219960"/>
           </a:xfrm>
           <a:prstGeom prst="rect">
             <a:avLst/>
@@ -12626,7 +12587,7 @@
         <p:spPr>
           <a:xfrm>
             <a:off x="6849360" y="5072040"/>
-            <a:ext cx="2316960" cy="602640"/>
+            <a:ext cx="2315520" cy="601200"/>
           </a:xfrm>
           <a:custGeom>
             <a:avLst/>
@@ -12697,7 +12658,7 @@
         <p:spPr>
           <a:xfrm>
             <a:off x="6920640" y="5167440"/>
-            <a:ext cx="2174040" cy="126360"/>
+            <a:ext cx="2172600" cy="124920"/>
           </a:xfrm>
           <a:prstGeom prst="rect">
             <a:avLst/>
@@ -12749,7 +12710,7 @@
         <p:spPr>
           <a:xfrm>
             <a:off x="6896880" y="5326200"/>
-            <a:ext cx="2221920" cy="253440"/>
+            <a:ext cx="2220480" cy="252000"/>
           </a:xfrm>
           <a:prstGeom prst="rect">
             <a:avLst/>
@@ -12801,7 +12762,7 @@
         <p:spPr>
           <a:xfrm>
             <a:off x="9258840" y="5072040"/>
-            <a:ext cx="2316960" cy="602640"/>
+            <a:ext cx="2315520" cy="601200"/>
           </a:xfrm>
           <a:custGeom>
             <a:avLst/>
@@ -12872,7 +12833,7 @@
         <p:spPr>
           <a:xfrm>
             <a:off x="9330120" y="5167440"/>
-            <a:ext cx="2174040" cy="126360"/>
+            <a:ext cx="2172600" cy="124920"/>
           </a:xfrm>
           <a:prstGeom prst="rect">
             <a:avLst/>
@@ -12924,7 +12885,7 @@
         <p:spPr>
           <a:xfrm>
             <a:off x="9306360" y="5326200"/>
-            <a:ext cx="2221920" cy="253440"/>
+            <a:ext cx="2220480" cy="252000"/>
           </a:xfrm>
           <a:prstGeom prst="rect">
             <a:avLst/>
@@ -13013,7 +12974,7 @@
         <p:spPr>
           <a:xfrm>
             <a:off x="0" y="0"/>
-            <a:ext cx="12191400" cy="6857280"/>
+            <a:ext cx="12189960" cy="6855840"/>
           </a:xfrm>
           <a:prstGeom prst="roundRect">
             <a:avLst>
@@ -13045,7 +13006,7 @@
         <p:spPr>
           <a:xfrm>
             <a:off x="0" y="0"/>
-            <a:ext cx="12191400" cy="6857280"/>
+            <a:ext cx="12189960" cy="6855840"/>
           </a:xfrm>
           <a:custGeom>
             <a:avLst/>
@@ -13108,7 +13069,7 @@
         <p:spPr>
           <a:xfrm>
             <a:off x="380880" y="380880"/>
-            <a:ext cx="11495880" cy="189720"/>
+            <a:ext cx="11494440" cy="188280"/>
           </a:xfrm>
           <a:prstGeom prst="rect">
             <a:avLst/>
@@ -13136,7 +13097,7 @@
               <a:buNone/>
             </a:pPr>
             <a:r>
-              <a:rPr b="1" lang="en-US" sz="1050" spc="49" strike="noStrike">
+              <a:rPr b="1" lang="en-US" sz="1050" spc="38" strike="noStrike">
                 <a:solidFill>
                   <a:srgbClr val="6366f1"/>
                 </a:solidFill>
@@ -13160,7 +13121,7 @@
         <p:spPr>
           <a:xfrm>
             <a:off x="380880" y="647640"/>
-            <a:ext cx="11657880" cy="456480"/>
+            <a:ext cx="11656440" cy="455040"/>
           </a:xfrm>
           <a:prstGeom prst="rect">
             <a:avLst/>
@@ -13212,7 +13173,7 @@
         <p:spPr>
           <a:xfrm>
             <a:off x="380880" y="1219320"/>
-            <a:ext cx="11514960" cy="266040"/>
+            <a:ext cx="11513520" cy="264600"/>
           </a:xfrm>
           <a:prstGeom prst="rect">
             <a:avLst/>
@@ -13264,7 +13225,7 @@
         <p:spPr>
           <a:xfrm>
             <a:off x="385920" y="1643040"/>
-            <a:ext cx="3276000" cy="1751760"/>
+            <a:ext cx="3274560" cy="1750320"/>
           </a:xfrm>
           <a:custGeom>
             <a:avLst/>
@@ -13340,7 +13301,7 @@
         <p:spPr>
           <a:xfrm>
             <a:off x="581040" y="1838160"/>
-            <a:ext cx="380160" cy="380160"/>
+            <a:ext cx="378720" cy="378720"/>
           </a:xfrm>
           <a:custGeom>
             <a:avLst/>
@@ -13413,7 +13374,7 @@
         <p:spPr>
           <a:xfrm>
             <a:off x="695160" y="1952640"/>
-            <a:ext cx="151560" cy="151560"/>
+            <a:ext cx="150120" cy="150120"/>
           </a:xfrm>
           <a:custGeom>
             <a:avLst/>
@@ -13590,7 +13551,7 @@
         <p:spPr>
           <a:xfrm>
             <a:off x="1076400" y="1895400"/>
-            <a:ext cx="1123200" cy="266040"/>
+            <a:ext cx="1121760" cy="264600"/>
           </a:xfrm>
           <a:prstGeom prst="rect">
             <a:avLst/>
@@ -13642,7 +13603,7 @@
         <p:spPr>
           <a:xfrm>
             <a:off x="581040" y="2333520"/>
-            <a:ext cx="2952000" cy="866160"/>
+            <a:ext cx="2950560" cy="864720"/>
           </a:xfrm>
           <a:prstGeom prst="rect">
             <a:avLst/>
@@ -13694,7 +13655,7 @@
         <p:spPr>
           <a:xfrm>
             <a:off x="3822480" y="1643040"/>
-            <a:ext cx="3276000" cy="1751760"/>
+            <a:ext cx="3274560" cy="1750320"/>
           </a:xfrm>
           <a:custGeom>
             <a:avLst/>
@@ -13770,7 +13731,7 @@
         <p:spPr>
           <a:xfrm>
             <a:off x="4017600" y="1838160"/>
-            <a:ext cx="380160" cy="380160"/>
+            <a:ext cx="378720" cy="378720"/>
           </a:xfrm>
           <a:custGeom>
             <a:avLst/>
@@ -13843,7 +13804,7 @@
         <p:spPr>
           <a:xfrm>
             <a:off x="4113000" y="1952640"/>
-            <a:ext cx="189720" cy="151560"/>
+            <a:ext cx="188280" cy="150120"/>
           </a:xfrm>
           <a:custGeom>
             <a:avLst/>
@@ -14024,7 +13985,7 @@
         <p:spPr>
           <a:xfrm>
             <a:off x="4512960" y="1895400"/>
-            <a:ext cx="1466280" cy="266040"/>
+            <a:ext cx="1464840" cy="264600"/>
           </a:xfrm>
           <a:prstGeom prst="rect">
             <a:avLst/>
@@ -14076,7 +14037,7 @@
         <p:spPr>
           <a:xfrm>
             <a:off x="4017600" y="2333520"/>
-            <a:ext cx="2952000" cy="866160"/>
+            <a:ext cx="2950560" cy="864720"/>
           </a:xfrm>
           <a:prstGeom prst="rect">
             <a:avLst/>
@@ -14128,7 +14089,7 @@
         <p:spPr>
           <a:xfrm>
             <a:off x="385920" y="3557520"/>
-            <a:ext cx="3276000" cy="1751760"/>
+            <a:ext cx="3274560" cy="1750320"/>
           </a:xfrm>
           <a:custGeom>
             <a:avLst/>
@@ -14204,7 +14165,7 @@
         <p:spPr>
           <a:xfrm>
             <a:off x="581040" y="3753000"/>
-            <a:ext cx="380160" cy="380160"/>
+            <a:ext cx="378720" cy="378720"/>
           </a:xfrm>
           <a:custGeom>
             <a:avLst/>
@@ -14277,7 +14238,7 @@
         <p:spPr>
           <a:xfrm>
             <a:off x="695160" y="3867120"/>
-            <a:ext cx="151560" cy="151560"/>
+            <a:ext cx="150120" cy="150120"/>
           </a:xfrm>
           <a:custGeom>
             <a:avLst/>
@@ -14500,7 +14461,7 @@
         <p:spPr>
           <a:xfrm>
             <a:off x="1076400" y="3809880"/>
-            <a:ext cx="1542240" cy="266040"/>
+            <a:ext cx="1540800" cy="264600"/>
           </a:xfrm>
           <a:prstGeom prst="rect">
             <a:avLst/>
@@ -14552,7 +14513,7 @@
         <p:spPr>
           <a:xfrm>
             <a:off x="581040" y="4248000"/>
-            <a:ext cx="2952000" cy="866160"/>
+            <a:ext cx="2950560" cy="864720"/>
           </a:xfrm>
           <a:prstGeom prst="rect">
             <a:avLst/>
@@ -14604,7 +14565,7 @@
         <p:spPr>
           <a:xfrm>
             <a:off x="3822480" y="3557520"/>
-            <a:ext cx="3276000" cy="1751760"/>
+            <a:ext cx="3274560" cy="1750320"/>
           </a:xfrm>
           <a:custGeom>
             <a:avLst/>
@@ -14680,7 +14641,7 @@
         <p:spPr>
           <a:xfrm>
             <a:off x="4017600" y="3753000"/>
-            <a:ext cx="380160" cy="380160"/>
+            <a:ext cx="378720" cy="378720"/>
           </a:xfrm>
           <a:custGeom>
             <a:avLst/>
@@ -14753,7 +14714,7 @@
         <p:spPr>
           <a:xfrm>
             <a:off x="4122360" y="3867120"/>
-            <a:ext cx="170640" cy="151560"/>
+            <a:ext cx="169200" cy="150120"/>
           </a:xfrm>
           <a:custGeom>
             <a:avLst/>
@@ -14845,7 +14806,7 @@
         <p:spPr>
           <a:xfrm>
             <a:off x="4512960" y="3809880"/>
-            <a:ext cx="1342440" cy="266040"/>
+            <a:ext cx="1341000" cy="264600"/>
           </a:xfrm>
           <a:prstGeom prst="rect">
             <a:avLst/>
@@ -14897,7 +14858,7 @@
         <p:spPr>
           <a:xfrm>
             <a:off x="4017600" y="4248000"/>
-            <a:ext cx="2952000" cy="866160"/>
+            <a:ext cx="2950560" cy="864720"/>
           </a:xfrm>
           <a:prstGeom prst="rect">
             <a:avLst/>
@@ -14949,7 +14910,7 @@
         <p:spPr>
           <a:xfrm>
             <a:off x="385920" y="5472000"/>
-            <a:ext cx="6714360" cy="1323360"/>
+            <a:ext cx="6712920" cy="1321920"/>
           </a:xfrm>
           <a:custGeom>
             <a:avLst/>
@@ -15025,7 +14986,7 @@
         <p:spPr>
           <a:xfrm>
             <a:off x="581040" y="5667480"/>
-            <a:ext cx="380160" cy="380160"/>
+            <a:ext cx="378720" cy="378720"/>
           </a:xfrm>
           <a:custGeom>
             <a:avLst/>
@@ -15098,7 +15059,7 @@
         <p:spPr>
           <a:xfrm>
             <a:off x="714240" y="5781600"/>
-            <a:ext cx="113760" cy="151560"/>
+            <a:ext cx="112320" cy="150120"/>
           </a:xfrm>
           <a:custGeom>
             <a:avLst/>
@@ -15209,7 +15170,7 @@
         <p:spPr>
           <a:xfrm>
             <a:off x="1076400" y="5724360"/>
-            <a:ext cx="2056680" cy="266040"/>
+            <a:ext cx="2055240" cy="264600"/>
           </a:xfrm>
           <a:prstGeom prst="rect">
             <a:avLst/>
@@ -15261,7 +15222,7 @@
         <p:spPr>
           <a:xfrm>
             <a:off x="581040" y="6162840"/>
-            <a:ext cx="6390720" cy="437400"/>
+            <a:ext cx="6389280" cy="435960"/>
           </a:xfrm>
           <a:prstGeom prst="rect">
             <a:avLst/>
@@ -15313,7 +15274,7 @@
         <p:spPr>
           <a:xfrm>
             <a:off x="7335360" y="1643040"/>
-            <a:ext cx="4466520" cy="3876120"/>
+            <a:ext cx="4465080" cy="3874680"/>
           </a:xfrm>
           <a:custGeom>
             <a:avLst/>
@@ -15389,7 +15350,7 @@
         <p:spPr>
           <a:xfrm>
             <a:off x="7611480" y="1895400"/>
-            <a:ext cx="199440" cy="227880"/>
+            <a:ext cx="198000" cy="226440"/>
           </a:xfrm>
           <a:custGeom>
             <a:avLst/>
@@ -15544,7 +15505,7 @@
         <p:spPr>
           <a:xfrm>
             <a:off x="7968600" y="1876320"/>
-            <a:ext cx="1542240" cy="266040"/>
+            <a:ext cx="1540800" cy="264600"/>
           </a:xfrm>
           <a:prstGeom prst="rect">
             <a:avLst/>
@@ -15596,7 +15557,7 @@
         <p:spPr>
           <a:xfrm>
             <a:off x="7587720" y="2295360"/>
-            <a:ext cx="3980880" cy="1085040"/>
+            <a:ext cx="3979440" cy="1083600"/>
           </a:xfrm>
           <a:custGeom>
             <a:avLst/>
@@ -15667,7 +15628,7 @@
         <p:spPr>
           <a:xfrm>
             <a:off x="7587720" y="2295360"/>
-            <a:ext cx="37440" cy="1085040"/>
+            <a:ext cx="36000" cy="1083600"/>
           </a:xfrm>
           <a:custGeom>
             <a:avLst/>
@@ -15728,7 +15689,7 @@
         <p:spPr>
           <a:xfrm>
             <a:off x="7759080" y="2448000"/>
-            <a:ext cx="3742560" cy="266040"/>
+            <a:ext cx="3741120" cy="264600"/>
           </a:xfrm>
           <a:prstGeom prst="rect">
             <a:avLst/>
@@ -15780,7 +15741,7 @@
         <p:spPr>
           <a:xfrm>
             <a:off x="7759080" y="2790720"/>
-            <a:ext cx="3723480" cy="437400"/>
+            <a:ext cx="3722040" cy="435960"/>
           </a:xfrm>
           <a:prstGeom prst="rect">
             <a:avLst/>
@@ -15832,7 +15793,7 @@
         <p:spPr>
           <a:xfrm>
             <a:off x="7568640" y="3529080"/>
-            <a:ext cx="304200" cy="304200"/>
+            <a:ext cx="302760" cy="302760"/>
           </a:xfrm>
           <a:custGeom>
             <a:avLst/>
@@ -15905,7 +15866,7 @@
         <p:spPr>
           <a:xfrm>
             <a:off x="7673400" y="3614760"/>
-            <a:ext cx="99360" cy="132480"/>
+            <a:ext cx="97920" cy="131040"/>
           </a:xfrm>
           <a:custGeom>
             <a:avLst/>
@@ -16037,7 +15998,7 @@
         <p:spPr>
           <a:xfrm>
             <a:off x="7987680" y="3586320"/>
-            <a:ext cx="1018440" cy="189720"/>
+            <a:ext cx="1017000" cy="188280"/>
           </a:xfrm>
           <a:prstGeom prst="rect">
             <a:avLst/>
@@ -16089,7 +16050,7 @@
         <p:spPr>
           <a:xfrm>
             <a:off x="7568640" y="3948120"/>
-            <a:ext cx="304200" cy="304200"/>
+            <a:ext cx="302760" cy="302760"/>
           </a:xfrm>
           <a:custGeom>
             <a:avLst/>
@@ -16162,7 +16123,7 @@
         <p:spPr>
           <a:xfrm>
             <a:off x="7639920" y="4033800"/>
-            <a:ext cx="165960" cy="132480"/>
+            <a:ext cx="164520" cy="131040"/>
           </a:xfrm>
           <a:custGeom>
             <a:avLst/>
@@ -16378,7 +16339,7 @@
         <p:spPr>
           <a:xfrm>
             <a:off x="7987680" y="4005360"/>
-            <a:ext cx="2161440" cy="189720"/>
+            <a:ext cx="2160000" cy="188280"/>
           </a:xfrm>
           <a:prstGeom prst="rect">
             <a:avLst/>
@@ -16430,7 +16391,7 @@
         <p:spPr>
           <a:xfrm>
             <a:off x="7568640" y="4367160"/>
-            <a:ext cx="304200" cy="304200"/>
+            <a:ext cx="302760" cy="302760"/>
           </a:xfrm>
           <a:custGeom>
             <a:avLst/>
@@ -16503,7 +16464,7 @@
         <p:spPr>
           <a:xfrm>
             <a:off x="7656840" y="4452840"/>
-            <a:ext cx="132480" cy="132480"/>
+            <a:ext cx="131040" cy="131040"/>
           </a:xfrm>
           <a:custGeom>
             <a:avLst/>
@@ -16680,7 +16641,7 @@
         <p:spPr>
           <a:xfrm>
             <a:off x="7987680" y="4424400"/>
-            <a:ext cx="2494800" cy="189720"/>
+            <a:ext cx="2493360" cy="188280"/>
           </a:xfrm>
           <a:prstGeom prst="rect">
             <a:avLst/>
@@ -16732,7 +16693,7 @@
         <p:spPr>
           <a:xfrm>
             <a:off x="7335360" y="5676840"/>
-            <a:ext cx="4466520" cy="1113840"/>
+            <a:ext cx="4465080" cy="1112400"/>
           </a:xfrm>
           <a:custGeom>
             <a:avLst/>
@@ -16808,7 +16769,7 @@
         <p:spPr>
           <a:xfrm>
             <a:off x="7497000" y="5872320"/>
-            <a:ext cx="4142520" cy="189720"/>
+            <a:ext cx="4141080" cy="188280"/>
           </a:xfrm>
           <a:prstGeom prst="rect">
             <a:avLst/>
@@ -16860,7 +16821,7 @@
         <p:spPr>
           <a:xfrm>
             <a:off x="7492320" y="6138720"/>
-            <a:ext cx="4152240" cy="227880"/>
+            <a:ext cx="4150800" cy="226440"/>
           </a:xfrm>
           <a:prstGeom prst="rect">
             <a:avLst/>
@@ -16912,7 +16873,7 @@
         <p:spPr>
           <a:xfrm>
             <a:off x="7497000" y="6405480"/>
-            <a:ext cx="4142520" cy="189720"/>
+            <a:ext cx="4141080" cy="188280"/>
           </a:xfrm>
           <a:prstGeom prst="rect">
             <a:avLst/>
@@ -17001,7 +16962,7 @@
         <p:spPr>
           <a:xfrm>
             <a:off x="380880" y="380880"/>
-            <a:ext cx="11495880" cy="189720"/>
+            <a:ext cx="11494440" cy="188280"/>
           </a:xfrm>
           <a:prstGeom prst="rect">
             <a:avLst/>
@@ -17029,7 +16990,7 @@
               <a:buNone/>
             </a:pPr>
             <a:r>
-              <a:rPr b="1" lang="en-US" sz="1050" spc="49" strike="noStrike">
+              <a:rPr b="1" lang="en-US" sz="1050" spc="38" strike="noStrike">
                 <a:solidFill>
                   <a:srgbClr val="6366f1"/>
                 </a:solidFill>
@@ -17053,7 +17014,7 @@
         <p:spPr>
           <a:xfrm>
             <a:off x="380880" y="647640"/>
-            <a:ext cx="11657880" cy="456480"/>
+            <a:ext cx="11656440" cy="455040"/>
           </a:xfrm>
           <a:prstGeom prst="rect">
             <a:avLst/>
@@ -17105,7 +17066,7 @@
         <p:spPr>
           <a:xfrm>
             <a:off x="385920" y="1414440"/>
-            <a:ext cx="3675960" cy="1799640"/>
+            <a:ext cx="3674520" cy="1798200"/>
           </a:xfrm>
           <a:custGeom>
             <a:avLst/>
@@ -17179,7 +17140,7 @@
         <p:spPr>
           <a:xfrm>
             <a:off x="619200" y="1647720"/>
-            <a:ext cx="456480" cy="456480"/>
+            <a:ext cx="455040" cy="455040"/>
           </a:xfrm>
           <a:custGeom>
             <a:avLst/>
@@ -17252,7 +17213,7 @@
         <p:spPr>
           <a:xfrm>
             <a:off x="748800" y="1743120"/>
-            <a:ext cx="294480" cy="266040"/>
+            <a:ext cx="293040" cy="264600"/>
           </a:xfrm>
           <a:prstGeom prst="rect">
             <a:avLst/>
@@ -17304,7 +17265,7 @@
         <p:spPr>
           <a:xfrm>
             <a:off x="619200" y="2257560"/>
-            <a:ext cx="3304440" cy="266040"/>
+            <a:ext cx="3303000" cy="264600"/>
           </a:xfrm>
           <a:prstGeom prst="rect">
             <a:avLst/>
@@ -17356,7 +17317,7 @@
         <p:spPr>
           <a:xfrm>
             <a:off x="619200" y="2600280"/>
-            <a:ext cx="3276000" cy="380160"/>
+            <a:ext cx="3274560" cy="378720"/>
           </a:xfrm>
           <a:prstGeom prst="rect">
             <a:avLst/>
@@ -17408,7 +17369,7 @@
         <p:spPr>
           <a:xfrm>
             <a:off x="4259160" y="1414440"/>
-            <a:ext cx="3675960" cy="1799640"/>
+            <a:ext cx="3674520" cy="1798200"/>
           </a:xfrm>
           <a:custGeom>
             <a:avLst/>
@@ -17482,7 +17443,7 @@
         <p:spPr>
           <a:xfrm>
             <a:off x="4492440" y="1647720"/>
-            <a:ext cx="456480" cy="456480"/>
+            <a:ext cx="455040" cy="455040"/>
           </a:xfrm>
           <a:custGeom>
             <a:avLst/>
@@ -17555,7 +17516,7 @@
         <p:spPr>
           <a:xfrm>
             <a:off x="4605120" y="1743120"/>
-            <a:ext cx="323280" cy="266040"/>
+            <a:ext cx="321840" cy="264600"/>
           </a:xfrm>
           <a:prstGeom prst="rect">
             <a:avLst/>
@@ -17607,7 +17568,7 @@
         <p:spPr>
           <a:xfrm>
             <a:off x="4492440" y="2257560"/>
-            <a:ext cx="3304440" cy="266040"/>
+            <a:ext cx="3303000" cy="264600"/>
           </a:xfrm>
           <a:prstGeom prst="rect">
             <a:avLst/>
@@ -17659,7 +17620,7 @@
         <p:spPr>
           <a:xfrm>
             <a:off x="4492440" y="2600280"/>
-            <a:ext cx="3276000" cy="189720"/>
+            <a:ext cx="3274560" cy="188280"/>
           </a:xfrm>
           <a:prstGeom prst="rect">
             <a:avLst/>
@@ -17711,7 +17672,7 @@
         <p:spPr>
           <a:xfrm>
             <a:off x="8132760" y="1414440"/>
-            <a:ext cx="3675960" cy="1799640"/>
+            <a:ext cx="3674520" cy="1798200"/>
           </a:xfrm>
           <a:custGeom>
             <a:avLst/>
@@ -17785,7 +17746,7 @@
         <p:spPr>
           <a:xfrm>
             <a:off x="8366040" y="1647720"/>
-            <a:ext cx="456480" cy="456480"/>
+            <a:ext cx="455040" cy="455040"/>
           </a:xfrm>
           <a:custGeom>
             <a:avLst/>
@@ -17858,7 +17819,7 @@
         <p:spPr>
           <a:xfrm>
             <a:off x="8477640" y="1743120"/>
-            <a:ext cx="332640" cy="266040"/>
+            <a:ext cx="331200" cy="264600"/>
           </a:xfrm>
           <a:prstGeom prst="rect">
             <a:avLst/>
@@ -17910,7 +17871,7 @@
         <p:spPr>
           <a:xfrm>
             <a:off x="8366040" y="2257560"/>
-            <a:ext cx="3304440" cy="266040"/>
+            <a:ext cx="3303000" cy="264600"/>
           </a:xfrm>
           <a:prstGeom prst="rect">
             <a:avLst/>
@@ -17962,7 +17923,7 @@
         <p:spPr>
           <a:xfrm>
             <a:off x="8366040" y="2600280"/>
-            <a:ext cx="3276000" cy="189720"/>
+            <a:ext cx="3274560" cy="188280"/>
           </a:xfrm>
           <a:prstGeom prst="rect">
             <a:avLst/>
@@ -18014,7 +17975,7 @@
         <p:spPr>
           <a:xfrm>
             <a:off x="385920" y="3414600"/>
-            <a:ext cx="3675960" cy="1608840"/>
+            <a:ext cx="3674520" cy="1607400"/>
           </a:xfrm>
           <a:custGeom>
             <a:avLst/>
@@ -18088,7 +18049,7 @@
         <p:spPr>
           <a:xfrm>
             <a:off x="619200" y="3648240"/>
-            <a:ext cx="456480" cy="456480"/>
+            <a:ext cx="455040" cy="455040"/>
           </a:xfrm>
           <a:custGeom>
             <a:avLst/>
@@ -18161,7 +18122,7 @@
         <p:spPr>
           <a:xfrm>
             <a:off x="730800" y="3743280"/>
-            <a:ext cx="332640" cy="266040"/>
+            <a:ext cx="331200" cy="264600"/>
           </a:xfrm>
           <a:prstGeom prst="rect">
             <a:avLst/>
@@ -18213,7 +18174,7 @@
         <p:spPr>
           <a:xfrm>
             <a:off x="619200" y="4257720"/>
-            <a:ext cx="3304440" cy="266040"/>
+            <a:ext cx="3303000" cy="264600"/>
           </a:xfrm>
           <a:prstGeom prst="rect">
             <a:avLst/>
@@ -18265,7 +18226,7 @@
         <p:spPr>
           <a:xfrm>
             <a:off x="619200" y="4600440"/>
-            <a:ext cx="3276000" cy="189720"/>
+            <a:ext cx="3274560" cy="188280"/>
           </a:xfrm>
           <a:prstGeom prst="rect">
             <a:avLst/>
@@ -18317,7 +18278,7 @@
         <p:spPr>
           <a:xfrm>
             <a:off x="4259160" y="3414600"/>
-            <a:ext cx="3675960" cy="1608840"/>
+            <a:ext cx="3674520" cy="1607400"/>
           </a:xfrm>
           <a:custGeom>
             <a:avLst/>
@@ -18391,7 +18352,7 @@
         <p:spPr>
           <a:xfrm>
             <a:off x="4492440" y="3648240"/>
-            <a:ext cx="456480" cy="456480"/>
+            <a:ext cx="455040" cy="455040"/>
           </a:xfrm>
           <a:custGeom>
             <a:avLst/>
@@ -18464,7 +18425,7 @@
         <p:spPr>
           <a:xfrm>
             <a:off x="4605480" y="3743280"/>
-            <a:ext cx="323280" cy="266040"/>
+            <a:ext cx="321840" cy="264600"/>
           </a:xfrm>
           <a:prstGeom prst="rect">
             <a:avLst/>
@@ -18516,7 +18477,7 @@
         <p:spPr>
           <a:xfrm>
             <a:off x="4492440" y="4257720"/>
-            <a:ext cx="3304440" cy="266040"/>
+            <a:ext cx="3303000" cy="264600"/>
           </a:xfrm>
           <a:prstGeom prst="rect">
             <a:avLst/>
@@ -18568,7 +18529,7 @@
         <p:spPr>
           <a:xfrm>
             <a:off x="4492440" y="4600440"/>
-            <a:ext cx="3276000" cy="189720"/>
+            <a:ext cx="3274560" cy="188280"/>
           </a:xfrm>
           <a:prstGeom prst="rect">
             <a:avLst/>
@@ -18620,7 +18581,7 @@
         <p:spPr>
           <a:xfrm>
             <a:off x="8132760" y="3414600"/>
-            <a:ext cx="3675960" cy="1608840"/>
+            <a:ext cx="3674520" cy="1607400"/>
           </a:xfrm>
           <a:custGeom>
             <a:avLst/>
@@ -18694,7 +18655,7 @@
         <p:spPr>
           <a:xfrm>
             <a:off x="8366040" y="3648240"/>
-            <a:ext cx="456480" cy="456480"/>
+            <a:ext cx="455040" cy="455040"/>
           </a:xfrm>
           <a:custGeom>
             <a:avLst/>
@@ -18767,7 +18728,7 @@
         <p:spPr>
           <a:xfrm>
             <a:off x="8476920" y="3743280"/>
-            <a:ext cx="332640" cy="266040"/>
+            <a:ext cx="331200" cy="264600"/>
           </a:xfrm>
           <a:prstGeom prst="rect">
             <a:avLst/>
@@ -18819,7 +18780,7 @@
         <p:spPr>
           <a:xfrm>
             <a:off x="8366040" y="4257720"/>
-            <a:ext cx="3304440" cy="266040"/>
+            <a:ext cx="3303000" cy="264600"/>
           </a:xfrm>
           <a:prstGeom prst="rect">
             <a:avLst/>
@@ -18871,7 +18832,7 @@
         <p:spPr>
           <a:xfrm>
             <a:off x="8366040" y="4600440"/>
-            <a:ext cx="3276000" cy="189720"/>
+            <a:ext cx="3274560" cy="188280"/>
           </a:xfrm>
           <a:prstGeom prst="rect">
             <a:avLst/>
@@ -18923,7 +18884,7 @@
         <p:spPr>
           <a:xfrm>
             <a:off x="385920" y="5224320"/>
-            <a:ext cx="3675960" cy="1608840"/>
+            <a:ext cx="3674520" cy="1607400"/>
           </a:xfrm>
           <a:custGeom>
             <a:avLst/>
@@ -18997,7 +18958,7 @@
         <p:spPr>
           <a:xfrm>
             <a:off x="619200" y="5457960"/>
-            <a:ext cx="456480" cy="456480"/>
+            <a:ext cx="455040" cy="455040"/>
           </a:xfrm>
           <a:custGeom>
             <a:avLst/>
@@ -19070,7 +19031,7 @@
         <p:spPr>
           <a:xfrm>
             <a:off x="738360" y="5553000"/>
-            <a:ext cx="313560" cy="266040"/>
+            <a:ext cx="312120" cy="264600"/>
           </a:xfrm>
           <a:prstGeom prst="rect">
             <a:avLst/>
@@ -19122,7 +19083,7 @@
         <p:spPr>
           <a:xfrm>
             <a:off x="619200" y="6067440"/>
-            <a:ext cx="3304440" cy="266040"/>
+            <a:ext cx="3303000" cy="264600"/>
           </a:xfrm>
           <a:prstGeom prst="rect">
             <a:avLst/>
@@ -19174,7 +19135,7 @@
         <p:spPr>
           <a:xfrm>
             <a:off x="619200" y="6410160"/>
-            <a:ext cx="3276000" cy="189720"/>
+            <a:ext cx="3274560" cy="188280"/>
           </a:xfrm>
           <a:prstGeom prst="rect">
             <a:avLst/>
@@ -19226,7 +19187,7 @@
         <p:spPr>
           <a:xfrm>
             <a:off x="4259160" y="5224320"/>
-            <a:ext cx="3675960" cy="1608840"/>
+            <a:ext cx="3674520" cy="1607400"/>
           </a:xfrm>
           <a:custGeom>
             <a:avLst/>
@@ -19300,7 +19261,7 @@
         <p:spPr>
           <a:xfrm>
             <a:off x="4492440" y="5457960"/>
-            <a:ext cx="456480" cy="456480"/>
+            <a:ext cx="455040" cy="455040"/>
           </a:xfrm>
           <a:custGeom>
             <a:avLst/>
@@ -19373,7 +19334,7 @@
         <p:spPr>
           <a:xfrm>
             <a:off x="4601880" y="5553000"/>
-            <a:ext cx="332640" cy="266040"/>
+            <a:ext cx="331200" cy="264600"/>
           </a:xfrm>
           <a:prstGeom prst="rect">
             <a:avLst/>
@@ -19425,7 +19386,7 @@
         <p:spPr>
           <a:xfrm>
             <a:off x="4492440" y="6067440"/>
-            <a:ext cx="3304440" cy="266040"/>
+            <a:ext cx="3303000" cy="264600"/>
           </a:xfrm>
           <a:prstGeom prst="rect">
             <a:avLst/>
@@ -19477,7 +19438,7 @@
         <p:spPr>
           <a:xfrm>
             <a:off x="4492440" y="6410160"/>
-            <a:ext cx="3276000" cy="189720"/>
+            <a:ext cx="3274560" cy="188280"/>
           </a:xfrm>
           <a:prstGeom prst="rect">
             <a:avLst/>
@@ -19529,7 +19490,7 @@
         <p:spPr>
           <a:xfrm>
             <a:off x="8132760" y="5224320"/>
-            <a:ext cx="3675960" cy="1608840"/>
+            <a:ext cx="3674520" cy="1607400"/>
           </a:xfrm>
           <a:custGeom>
             <a:avLst/>
@@ -19603,7 +19564,7 @@
         <p:spPr>
           <a:xfrm>
             <a:off x="8366040" y="5457960"/>
-            <a:ext cx="456480" cy="456480"/>
+            <a:ext cx="455040" cy="455040"/>
           </a:xfrm>
           <a:custGeom>
             <a:avLst/>
@@ -19676,7 +19637,7 @@
         <p:spPr>
           <a:xfrm>
             <a:off x="8476920" y="5553000"/>
-            <a:ext cx="332640" cy="266040"/>
+            <a:ext cx="331200" cy="264600"/>
           </a:xfrm>
           <a:prstGeom prst="rect">
             <a:avLst/>
@@ -19728,7 +19689,7 @@
         <p:spPr>
           <a:xfrm>
             <a:off x="8366040" y="6067440"/>
-            <a:ext cx="3304440" cy="266040"/>
+            <a:ext cx="3303000" cy="264600"/>
           </a:xfrm>
           <a:prstGeom prst="rect">
             <a:avLst/>
@@ -19780,7 +19741,7 @@
         <p:spPr>
           <a:xfrm>
             <a:off x="8366040" y="6410160"/>
-            <a:ext cx="3276000" cy="189720"/>
+            <a:ext cx="3274560" cy="188280"/>
           </a:xfrm>
           <a:prstGeom prst="rect">
             <a:avLst/>
@@ -19869,7 +19830,7 @@
         <p:spPr>
           <a:xfrm>
             <a:off x="379080" y="379080"/>
-            <a:ext cx="11499840" cy="188640"/>
+            <a:ext cx="11498400" cy="187200"/>
           </a:xfrm>
           <a:prstGeom prst="rect">
             <a:avLst/>
@@ -19897,7 +19858,7 @@
               <a:buNone/>
             </a:pPr>
             <a:r>
-              <a:rPr b="1" lang="en-US" sz="1050" spc="46" strike="noStrike">
+              <a:rPr b="1" lang="en-US" sz="1050" spc="35" strike="noStrike">
                 <a:solidFill>
                   <a:srgbClr val="6366f1"/>
                 </a:solidFill>
@@ -19921,7 +19882,7 @@
         <p:spPr>
           <a:xfrm>
             <a:off x="379080" y="644040"/>
-            <a:ext cx="11603880" cy="378360"/>
+            <a:ext cx="11602440" cy="376920"/>
           </a:xfrm>
           <a:prstGeom prst="rect">
             <a:avLst/>
@@ -19973,7 +19934,7 @@
         <p:spPr>
           <a:xfrm>
             <a:off x="383760" y="1255320"/>
-            <a:ext cx="6649560" cy="1733040"/>
+            <a:ext cx="6648120" cy="1731600"/>
           </a:xfrm>
           <a:custGeom>
             <a:avLst/>
@@ -20047,7 +20008,7 @@
         <p:spPr>
           <a:xfrm>
             <a:off x="615600" y="1487160"/>
-            <a:ext cx="378360" cy="378360"/>
+            <a:ext cx="376920" cy="376920"/>
           </a:xfrm>
           <a:custGeom>
             <a:avLst/>
@@ -20120,7 +20081,7 @@
         <p:spPr>
           <a:xfrm>
             <a:off x="729360" y="1600920"/>
-            <a:ext cx="150840" cy="150840"/>
+            <a:ext cx="149400" cy="149400"/>
           </a:xfrm>
           <a:custGeom>
             <a:avLst/>
@@ -20244,7 +20205,7 @@
         <p:spPr>
           <a:xfrm>
             <a:off x="1108440" y="1544040"/>
-            <a:ext cx="2414880" cy="264600"/>
+            <a:ext cx="2413440" cy="263160"/>
           </a:xfrm>
           <a:prstGeom prst="rect">
             <a:avLst/>
@@ -20296,7 +20257,7 @@
         <p:spPr>
           <a:xfrm>
             <a:off x="615600" y="2017800"/>
-            <a:ext cx="6261120" cy="738360"/>
+            <a:ext cx="6259680" cy="736920"/>
           </a:xfrm>
           <a:prstGeom prst="rect">
             <a:avLst/>
@@ -20388,7 +20349,7 @@
         <p:spPr>
           <a:xfrm>
             <a:off x="383760" y="3187800"/>
-            <a:ext cx="6649560" cy="1733040"/>
+            <a:ext cx="6648120" cy="1731600"/>
           </a:xfrm>
           <a:custGeom>
             <a:avLst/>
@@ -20462,7 +20423,7 @@
         <p:spPr>
           <a:xfrm>
             <a:off x="615600" y="3420000"/>
-            <a:ext cx="378360" cy="378360"/>
+            <a:ext cx="376920" cy="376920"/>
           </a:xfrm>
           <a:custGeom>
             <a:avLst/>
@@ -20535,7 +20496,7 @@
         <p:spPr>
           <a:xfrm>
             <a:off x="710640" y="3533400"/>
-            <a:ext cx="188640" cy="150840"/>
+            <a:ext cx="187200" cy="149400"/>
           </a:xfrm>
           <a:custGeom>
             <a:avLst/>
@@ -20716,7 +20677,7 @@
         <p:spPr>
           <a:xfrm>
             <a:off x="1108440" y="3476520"/>
-            <a:ext cx="1647720" cy="264600"/>
+            <a:ext cx="1646280" cy="263160"/>
           </a:xfrm>
           <a:prstGeom prst="rect">
             <a:avLst/>
@@ -20768,7 +20729,7 @@
         <p:spPr>
           <a:xfrm>
             <a:off x="615600" y="3950280"/>
-            <a:ext cx="6261120" cy="738360"/>
+            <a:ext cx="6259680" cy="736920"/>
           </a:xfrm>
           <a:prstGeom prst="rect">
             <a:avLst/>
@@ -20860,7 +20821,7 @@
         <p:spPr>
           <a:xfrm>
             <a:off x="383760" y="5120280"/>
-            <a:ext cx="6649560" cy="1733040"/>
+            <a:ext cx="6648120" cy="1731600"/>
           </a:xfrm>
           <a:custGeom>
             <a:avLst/>
@@ -20934,7 +20895,7 @@
         <p:spPr>
           <a:xfrm>
             <a:off x="615600" y="5352480"/>
-            <a:ext cx="378360" cy="378360"/>
+            <a:ext cx="376920" cy="376920"/>
           </a:xfrm>
           <a:custGeom>
             <a:avLst/>
@@ -21007,7 +20968,7 @@
         <p:spPr>
           <a:xfrm>
             <a:off x="729360" y="5465880"/>
-            <a:ext cx="150840" cy="150840"/>
+            <a:ext cx="149400" cy="149400"/>
           </a:xfrm>
           <a:custGeom>
             <a:avLst/>
@@ -21230,7 +21191,7 @@
         <p:spPr>
           <a:xfrm>
             <a:off x="1108440" y="5409360"/>
-            <a:ext cx="1979280" cy="264600"/>
+            <a:ext cx="1977840" cy="263160"/>
           </a:xfrm>
           <a:prstGeom prst="rect">
             <a:avLst/>
@@ -21282,7 +21243,7 @@
         <p:spPr>
           <a:xfrm>
             <a:off x="615600" y="5882760"/>
-            <a:ext cx="6261120" cy="738360"/>
+            <a:ext cx="6259680" cy="736920"/>
           </a:xfrm>
           <a:prstGeom prst="rect">
             <a:avLst/>
@@ -21354,7 +21315,7 @@
         <p:spPr>
           <a:xfrm>
             <a:off x="7271640" y="1255320"/>
-            <a:ext cx="4537080" cy="5598000"/>
+            <a:ext cx="4535640" cy="5596560"/>
           </a:xfrm>
           <a:custGeom>
             <a:avLst/>
@@ -21428,7 +21389,7 @@
         <p:spPr>
           <a:xfrm>
             <a:off x="7503840" y="1487160"/>
-            <a:ext cx="378360" cy="378360"/>
+            <a:ext cx="376920" cy="376920"/>
           </a:xfrm>
           <a:custGeom>
             <a:avLst/>
@@ -21501,7 +21462,7 @@
         <p:spPr>
           <a:xfrm>
             <a:off x="7626960" y="1600920"/>
-            <a:ext cx="131760" cy="150840"/>
+            <a:ext cx="130320" cy="149400"/>
           </a:xfrm>
           <a:custGeom>
             <a:avLst/>
@@ -21656,7 +21617,7 @@
         <p:spPr>
           <a:xfrm>
             <a:off x="7996320" y="1544040"/>
-            <a:ext cx="1941120" cy="264600"/>
+            <a:ext cx="1939680" cy="263160"/>
           </a:xfrm>
           <a:prstGeom prst="rect">
             <a:avLst/>
@@ -21708,7 +21669,7 @@
         <p:spPr>
           <a:xfrm>
             <a:off x="7522920" y="2017800"/>
-            <a:ext cx="4053960" cy="3333960"/>
+            <a:ext cx="4052520" cy="3332520"/>
           </a:xfrm>
           <a:custGeom>
             <a:avLst/>
@@ -21779,7 +21740,7 @@
         <p:spPr>
           <a:xfrm>
             <a:off x="7522920" y="2017800"/>
-            <a:ext cx="37080" cy="3333960"/>
+            <a:ext cx="35640" cy="3332520"/>
           </a:xfrm>
           <a:custGeom>
             <a:avLst/>
@@ -21840,7 +21801,7 @@
         <p:spPr>
           <a:xfrm>
             <a:off x="7731000" y="2821680"/>
-            <a:ext cx="3741120" cy="1382400"/>
+            <a:ext cx="3739680" cy="1380960"/>
           </a:xfrm>
           <a:prstGeom prst="rect">
             <a:avLst/>
@@ -21892,7 +21853,7 @@
         <p:spPr>
           <a:xfrm>
             <a:off x="7731000" y="4358880"/>
-            <a:ext cx="3722400" cy="188640"/>
+            <a:ext cx="3720960" cy="187200"/>
           </a:xfrm>
           <a:prstGeom prst="rect">
             <a:avLst/>
@@ -21954,7 +21915,7 @@
         <p:spPr>
           <a:xfrm>
             <a:off x="7508520" y="5546520"/>
-            <a:ext cx="1950840" cy="1069920"/>
+            <a:ext cx="1949400" cy="1068480"/>
           </a:xfrm>
           <a:custGeom>
             <a:avLst/>
@@ -22028,7 +21989,7 @@
         <p:spPr>
           <a:xfrm>
             <a:off x="7631640" y="5702760"/>
-            <a:ext cx="1704600" cy="188640"/>
+            <a:ext cx="1703160" cy="187200"/>
           </a:xfrm>
           <a:prstGeom prst="rect">
             <a:avLst/>
@@ -22080,7 +22041,7 @@
         <p:spPr>
           <a:xfrm>
             <a:off x="7593840" y="5930280"/>
-            <a:ext cx="1780200" cy="340200"/>
+            <a:ext cx="1778760" cy="338760"/>
           </a:xfrm>
           <a:prstGeom prst="rect">
             <a:avLst/>
@@ -22132,7 +22093,7 @@
         <p:spPr>
           <a:xfrm>
             <a:off x="7636320" y="6309000"/>
-            <a:ext cx="1694880" cy="150840"/>
+            <a:ext cx="1693440" cy="149400"/>
           </a:xfrm>
           <a:prstGeom prst="rect">
             <a:avLst/>
@@ -22184,7 +22145,7 @@
         <p:spPr>
           <a:xfrm>
             <a:off x="9621000" y="5546520"/>
-            <a:ext cx="1950840" cy="1069920"/>
+            <a:ext cx="1949400" cy="1068480"/>
           </a:xfrm>
           <a:custGeom>
             <a:avLst/>
@@ -22258,7 +22219,7 @@
         <p:spPr>
           <a:xfrm>
             <a:off x="9744120" y="5702760"/>
-            <a:ext cx="1704600" cy="188640"/>
+            <a:ext cx="1703160" cy="187200"/>
           </a:xfrm>
           <a:prstGeom prst="rect">
             <a:avLst/>
@@ -22310,7 +22271,7 @@
         <p:spPr>
           <a:xfrm>
             <a:off x="9706320" y="5930280"/>
-            <a:ext cx="1780200" cy="340200"/>
+            <a:ext cx="1778760" cy="338760"/>
           </a:xfrm>
           <a:prstGeom prst="rect">
             <a:avLst/>
@@ -22362,7 +22323,7 @@
         <p:spPr>
           <a:xfrm>
             <a:off x="9748800" y="6309000"/>
-            <a:ext cx="1694880" cy="150840"/>
+            <a:ext cx="1693440" cy="149400"/>
           </a:xfrm>
           <a:prstGeom prst="rect">
             <a:avLst/>
@@ -22451,7 +22412,7 @@
         <p:spPr>
           <a:xfrm>
             <a:off x="365400" y="365400"/>
-            <a:ext cx="11524680" cy="181800"/>
+            <a:ext cx="11523240" cy="180360"/>
           </a:xfrm>
           <a:prstGeom prst="rect">
             <a:avLst/>
@@ -22479,7 +22440,7 @@
               <a:buNone/>
             </a:pPr>
             <a:r>
-              <a:rPr b="1" lang="en-US" sz="1010" spc="46" strike="noStrike">
+              <a:rPr b="1" lang="en-US" sz="1010" spc="35" strike="noStrike">
                 <a:solidFill>
                   <a:srgbClr val="6366f1"/>
                 </a:solidFill>
@@ -22503,7 +22464,7 @@
         <p:spPr>
           <a:xfrm>
             <a:off x="365400" y="621000"/>
-            <a:ext cx="11625120" cy="364680"/>
+            <a:ext cx="11623680" cy="363240"/>
           </a:xfrm>
           <a:prstGeom prst="rect">
             <a:avLst/>
@@ -22555,7 +22516,7 @@
         <p:spPr>
           <a:xfrm>
             <a:off x="365400" y="1059480"/>
-            <a:ext cx="11533680" cy="218520"/>
+            <a:ext cx="11532240" cy="217080"/>
           </a:xfrm>
           <a:prstGeom prst="rect">
             <a:avLst/>
@@ -22607,7 +22568,7 @@
         <p:spPr>
           <a:xfrm>
             <a:off x="369720" y="1356120"/>
-            <a:ext cx="3177360" cy="1250280"/>
+            <a:ext cx="3175920" cy="1248840"/>
           </a:xfrm>
           <a:custGeom>
             <a:avLst/>
@@ -22681,7 +22642,7 @@
         <p:spPr>
           <a:xfrm>
             <a:off x="556920" y="1561680"/>
-            <a:ext cx="611280" cy="181800"/>
+            <a:ext cx="609840" cy="180360"/>
           </a:xfrm>
           <a:prstGeom prst="rect">
             <a:avLst/>
@@ -22733,7 +22694,7 @@
         <p:spPr>
           <a:xfrm>
             <a:off x="2957760" y="1543320"/>
-            <a:ext cx="401040" cy="218520"/>
+            <a:ext cx="399600" cy="217080"/>
           </a:xfrm>
           <a:custGeom>
             <a:avLst/>
@@ -22806,7 +22767,7 @@
         <p:spPr>
           <a:xfrm>
             <a:off x="2957760" y="1543320"/>
-            <a:ext cx="455760" cy="218520"/>
+            <a:ext cx="454320" cy="217080"/>
           </a:xfrm>
           <a:prstGeom prst="rect">
             <a:avLst/>
@@ -22858,7 +22819,7 @@
         <p:spPr>
           <a:xfrm>
             <a:off x="556920" y="1872360"/>
-            <a:ext cx="2967480" cy="364680"/>
+            <a:ext cx="2966040" cy="363240"/>
           </a:xfrm>
           <a:prstGeom prst="rect">
             <a:avLst/>
@@ -22910,7 +22871,7 @@
         <p:spPr>
           <a:xfrm>
             <a:off x="556920" y="2274120"/>
-            <a:ext cx="2857680" cy="145440"/>
+            <a:ext cx="2856240" cy="144000"/>
           </a:xfrm>
           <a:prstGeom prst="rect">
             <a:avLst/>
@@ -22962,7 +22923,7 @@
         <p:spPr>
           <a:xfrm>
             <a:off x="3700800" y="1356120"/>
-            <a:ext cx="3177360" cy="1250280"/>
+            <a:ext cx="3175920" cy="1248840"/>
           </a:xfrm>
           <a:custGeom>
             <a:avLst/>
@@ -23036,7 +22997,7 @@
         <p:spPr>
           <a:xfrm>
             <a:off x="3888000" y="1561680"/>
-            <a:ext cx="729720" cy="181800"/>
+            <a:ext cx="728280" cy="180360"/>
           </a:xfrm>
           <a:prstGeom prst="rect">
             <a:avLst/>
@@ -23088,7 +23049,7 @@
         <p:spPr>
           <a:xfrm>
             <a:off x="6268320" y="1543320"/>
-            <a:ext cx="419400" cy="218520"/>
+            <a:ext cx="417960" cy="217080"/>
           </a:xfrm>
           <a:custGeom>
             <a:avLst/>
@@ -23161,7 +23122,7 @@
         <p:spPr>
           <a:xfrm>
             <a:off x="6268320" y="1543320"/>
-            <a:ext cx="474120" cy="218520"/>
+            <a:ext cx="472680" cy="217080"/>
           </a:xfrm>
           <a:prstGeom prst="rect">
             <a:avLst/>
@@ -23213,7 +23174,7 @@
         <p:spPr>
           <a:xfrm>
             <a:off x="3888000" y="1872360"/>
-            <a:ext cx="2967480" cy="364680"/>
+            <a:ext cx="2966040" cy="363240"/>
           </a:xfrm>
           <a:prstGeom prst="rect">
             <a:avLst/>
@@ -23265,7 +23226,7 @@
         <p:spPr>
           <a:xfrm>
             <a:off x="3888000" y="2274120"/>
-            <a:ext cx="2857680" cy="145440"/>
+            <a:ext cx="2856240" cy="144000"/>
           </a:xfrm>
           <a:prstGeom prst="rect">
             <a:avLst/>
@@ -23317,7 +23278,7 @@
         <p:spPr>
           <a:xfrm>
             <a:off x="369720" y="2762640"/>
-            <a:ext cx="3177360" cy="1250280"/>
+            <a:ext cx="3175920" cy="1248840"/>
           </a:xfrm>
           <a:custGeom>
             <a:avLst/>
@@ -23391,7 +23352,7 @@
         <p:spPr>
           <a:xfrm>
             <a:off x="556920" y="2968200"/>
-            <a:ext cx="967320" cy="181800"/>
+            <a:ext cx="965880" cy="180360"/>
           </a:xfrm>
           <a:prstGeom prst="rect">
             <a:avLst/>
@@ -23443,7 +23404,7 @@
         <p:spPr>
           <a:xfrm>
             <a:off x="2953440" y="2949840"/>
-            <a:ext cx="401040" cy="218520"/>
+            <a:ext cx="399600" cy="217080"/>
           </a:xfrm>
           <a:custGeom>
             <a:avLst/>
@@ -23516,7 +23477,7 @@
         <p:spPr>
           <a:xfrm>
             <a:off x="2953440" y="2949840"/>
-            <a:ext cx="455760" cy="218520"/>
+            <a:ext cx="454320" cy="217080"/>
           </a:xfrm>
           <a:prstGeom prst="rect">
             <a:avLst/>
@@ -23568,7 +23529,7 @@
         <p:spPr>
           <a:xfrm>
             <a:off x="556920" y="3278520"/>
-            <a:ext cx="2967480" cy="364680"/>
+            <a:ext cx="2966040" cy="363240"/>
           </a:xfrm>
           <a:prstGeom prst="rect">
             <a:avLst/>
@@ -23620,7 +23581,7 @@
         <p:spPr>
           <a:xfrm>
             <a:off x="556920" y="3680280"/>
-            <a:ext cx="2857680" cy="145440"/>
+            <a:ext cx="2856240" cy="144000"/>
           </a:xfrm>
           <a:prstGeom prst="rect">
             <a:avLst/>
@@ -23672,7 +23633,7 @@
         <p:spPr>
           <a:xfrm>
             <a:off x="3700800" y="2762640"/>
-            <a:ext cx="3177360" cy="1250280"/>
+            <a:ext cx="3175920" cy="1248840"/>
           </a:xfrm>
           <a:custGeom>
             <a:avLst/>
@@ -23746,7 +23707,7 @@
         <p:spPr>
           <a:xfrm>
             <a:off x="3888000" y="2968200"/>
-            <a:ext cx="1067760" cy="181800"/>
+            <a:ext cx="1066320" cy="180360"/>
           </a:xfrm>
           <a:prstGeom prst="rect">
             <a:avLst/>
@@ -23798,7 +23759,7 @@
         <p:spPr>
           <a:xfrm>
             <a:off x="6295680" y="2949840"/>
-            <a:ext cx="392040" cy="218520"/>
+            <a:ext cx="390600" cy="217080"/>
           </a:xfrm>
           <a:custGeom>
             <a:avLst/>
@@ -23871,7 +23832,7 @@
         <p:spPr>
           <a:xfrm>
             <a:off x="6295680" y="2949840"/>
-            <a:ext cx="446760" cy="218520"/>
+            <a:ext cx="445320" cy="217080"/>
           </a:xfrm>
           <a:prstGeom prst="rect">
             <a:avLst/>
@@ -23923,7 +23884,7 @@
         <p:spPr>
           <a:xfrm>
             <a:off x="3888000" y="3278520"/>
-            <a:ext cx="2967480" cy="364680"/>
+            <a:ext cx="2966040" cy="363240"/>
           </a:xfrm>
           <a:prstGeom prst="rect">
             <a:avLst/>
@@ -23975,7 +23936,7 @@
         <p:spPr>
           <a:xfrm>
             <a:off x="3888000" y="3680280"/>
-            <a:ext cx="2857680" cy="145440"/>
+            <a:ext cx="2856240" cy="144000"/>
           </a:xfrm>
           <a:prstGeom prst="rect">
             <a:avLst/>
@@ -24027,7 +23988,7 @@
         <p:spPr>
           <a:xfrm>
             <a:off x="369720" y="4169160"/>
-            <a:ext cx="6501600" cy="2684160"/>
+            <a:ext cx="6500160" cy="2682720"/>
           </a:xfrm>
           <a:custGeom>
             <a:avLst/>
@@ -24101,7 +24062,7 @@
         <p:spPr>
           <a:xfrm>
             <a:off x="556920" y="4356360"/>
-            <a:ext cx="6209280" cy="254880"/>
+            <a:ext cx="6207840" cy="253440"/>
           </a:xfrm>
           <a:prstGeom prst="rect">
             <a:avLst/>
@@ -24153,7 +24114,7 @@
         <p:spPr>
           <a:xfrm>
             <a:off x="556920" y="4721400"/>
-            <a:ext cx="2994840" cy="1058760"/>
+            <a:ext cx="2993400" cy="1057320"/>
           </a:xfrm>
           <a:custGeom>
             <a:avLst/>
@@ -24224,7 +24185,7 @@
         <p:spPr>
           <a:xfrm>
             <a:off x="703080" y="4867560"/>
-            <a:ext cx="2766600" cy="181800"/>
+            <a:ext cx="2765160" cy="180360"/>
           </a:xfrm>
           <a:prstGeom prst="rect">
             <a:avLst/>
@@ -24276,7 +24237,7 @@
         <p:spPr>
           <a:xfrm>
             <a:off x="703080" y="5123520"/>
-            <a:ext cx="2811960" cy="291600"/>
+            <a:ext cx="2810520" cy="290160"/>
           </a:xfrm>
           <a:prstGeom prst="rect">
             <a:avLst/>
@@ -24328,7 +24289,7 @@
         <p:spPr>
           <a:xfrm>
             <a:off x="703080" y="5452200"/>
-            <a:ext cx="2766600" cy="181800"/>
+            <a:ext cx="2765160" cy="180360"/>
           </a:xfrm>
           <a:prstGeom prst="rect">
             <a:avLst/>
@@ -24380,7 +24341,7 @@
         <p:spPr>
           <a:xfrm>
             <a:off x="3696120" y="4721400"/>
-            <a:ext cx="2994840" cy="1058760"/>
+            <a:ext cx="2993400" cy="1057320"/>
           </a:xfrm>
           <a:custGeom>
             <a:avLst/>
@@ -24451,7 +24412,7 @@
         <p:spPr>
           <a:xfrm>
             <a:off x="3842280" y="4867560"/>
-            <a:ext cx="2766600" cy="181800"/>
+            <a:ext cx="2765160" cy="180360"/>
           </a:xfrm>
           <a:prstGeom prst="rect">
             <a:avLst/>
@@ -24503,7 +24464,7 @@
         <p:spPr>
           <a:xfrm>
             <a:off x="3842280" y="5123520"/>
-            <a:ext cx="2811960" cy="291600"/>
+            <a:ext cx="2810520" cy="290160"/>
           </a:xfrm>
           <a:prstGeom prst="rect">
             <a:avLst/>
@@ -24555,7 +24516,7 @@
         <p:spPr>
           <a:xfrm>
             <a:off x="3842280" y="5452200"/>
-            <a:ext cx="2766600" cy="181800"/>
+            <a:ext cx="2765160" cy="180360"/>
           </a:xfrm>
           <a:prstGeom prst="rect">
             <a:avLst/>
@@ -24607,7 +24568,7 @@
         <p:spPr>
           <a:xfrm>
             <a:off x="556920" y="5931720"/>
-            <a:ext cx="6127200" cy="8280"/>
+            <a:ext cx="6125760" cy="6840"/>
           </a:xfrm>
           <a:custGeom>
             <a:avLst/>
@@ -24658,7 +24619,7 @@
         <p:spPr>
           <a:xfrm>
             <a:off x="556920" y="6082200"/>
-            <a:ext cx="6191280" cy="181800"/>
+            <a:ext cx="6189840" cy="180360"/>
           </a:xfrm>
           <a:prstGeom prst="rect">
             <a:avLst/>
@@ -24710,7 +24671,7 @@
         <p:spPr>
           <a:xfrm>
             <a:off x="556920" y="6338160"/>
-            <a:ext cx="1442160" cy="327960"/>
+            <a:ext cx="1440720" cy="326520"/>
           </a:xfrm>
           <a:prstGeom prst="rect">
             <a:avLst/>
@@ -24762,7 +24723,7 @@
         <p:spPr>
           <a:xfrm>
             <a:off x="1974240" y="6447600"/>
-            <a:ext cx="629280" cy="218520"/>
+            <a:ext cx="627840" cy="217080"/>
           </a:xfrm>
           <a:custGeom>
             <a:avLst/>
@@ -24835,7 +24796,7 @@
         <p:spPr>
           <a:xfrm>
             <a:off x="1974240" y="6447600"/>
-            <a:ext cx="684360" cy="218520"/>
+            <a:ext cx="682920" cy="217080"/>
           </a:xfrm>
           <a:prstGeom prst="rect">
             <a:avLst/>
@@ -24887,7 +24848,7 @@
         <p:spPr>
           <a:xfrm>
             <a:off x="7104960" y="1356120"/>
-            <a:ext cx="4720680" cy="5497200"/>
+            <a:ext cx="4719240" cy="5495760"/>
           </a:xfrm>
           <a:custGeom>
             <a:avLst/>
@@ -24961,7 +24922,7 @@
         <p:spPr>
           <a:xfrm>
             <a:off x="7292160" y="1543320"/>
-            <a:ext cx="4428720" cy="254880"/>
+            <a:ext cx="4427280" cy="253440"/>
           </a:xfrm>
           <a:prstGeom prst="rect">
             <a:avLst/>
@@ -25013,7 +24974,7 @@
         <p:spPr>
           <a:xfrm>
             <a:off x="7292160" y="1945080"/>
-            <a:ext cx="4346280" cy="985680"/>
+            <a:ext cx="4344840" cy="984240"/>
           </a:xfrm>
           <a:custGeom>
             <a:avLst/>
@@ -25084,7 +25045,7 @@
         <p:spPr>
           <a:xfrm>
             <a:off x="7438320" y="2091240"/>
-            <a:ext cx="611280" cy="181800"/>
+            <a:ext cx="609840" cy="180360"/>
           </a:xfrm>
           <a:prstGeom prst="rect">
             <a:avLst/>
@@ -25136,7 +25097,7 @@
         <p:spPr>
           <a:xfrm>
             <a:off x="11243160" y="2091240"/>
-            <a:ext cx="309960" cy="181800"/>
+            <a:ext cx="308520" cy="180360"/>
           </a:xfrm>
           <a:prstGeom prst="rect">
             <a:avLst/>
@@ -25188,7 +25149,7 @@
         <p:spPr>
           <a:xfrm>
             <a:off x="7438320" y="2347200"/>
-            <a:ext cx="4145400" cy="254880"/>
+            <a:ext cx="4143960" cy="253440"/>
           </a:xfrm>
           <a:prstGeom prst="rect">
             <a:avLst/>
@@ -25240,7 +25201,7 @@
         <p:spPr>
           <a:xfrm>
             <a:off x="7438320" y="2639160"/>
-            <a:ext cx="4109040" cy="145440"/>
+            <a:ext cx="4107600" cy="144000"/>
           </a:xfrm>
           <a:prstGeom prst="rect">
             <a:avLst/>
@@ -25292,7 +25253,7 @@
         <p:spPr>
           <a:xfrm>
             <a:off x="7292160" y="3077640"/>
-            <a:ext cx="4346280" cy="985680"/>
+            <a:ext cx="4344840" cy="984240"/>
           </a:xfrm>
           <a:custGeom>
             <a:avLst/>
@@ -25363,7 +25324,7 @@
         <p:spPr>
           <a:xfrm>
             <a:off x="7438320" y="3223800"/>
-            <a:ext cx="729720" cy="181800"/>
+            <a:ext cx="728280" cy="180360"/>
           </a:xfrm>
           <a:prstGeom prst="rect">
             <a:avLst/>
@@ -25415,7 +25376,7 @@
         <p:spPr>
           <a:xfrm>
             <a:off x="11242080" y="3223800"/>
-            <a:ext cx="309960" cy="181800"/>
+            <a:ext cx="308520" cy="180360"/>
           </a:xfrm>
           <a:prstGeom prst="rect">
             <a:avLst/>
@@ -25467,7 +25428,7 @@
         <p:spPr>
           <a:xfrm>
             <a:off x="7438320" y="3479400"/>
-            <a:ext cx="4145400" cy="254880"/>
+            <a:ext cx="4143960" cy="253440"/>
           </a:xfrm>
           <a:prstGeom prst="rect">
             <a:avLst/>
@@ -25519,7 +25480,7 @@
         <p:spPr>
           <a:xfrm>
             <a:off x="7438320" y="3771720"/>
-            <a:ext cx="4109040" cy="145440"/>
+            <a:ext cx="4107600" cy="144000"/>
           </a:xfrm>
           <a:prstGeom prst="rect">
             <a:avLst/>
@@ -25571,7 +25532,7 @@
         <p:spPr>
           <a:xfrm>
             <a:off x="7292160" y="4210200"/>
-            <a:ext cx="4346280" cy="985680"/>
+            <a:ext cx="4344840" cy="984240"/>
           </a:xfrm>
           <a:custGeom>
             <a:avLst/>
@@ -25642,7 +25603,7 @@
         <p:spPr>
           <a:xfrm>
             <a:off x="7438320" y="4356360"/>
-            <a:ext cx="967320" cy="181800"/>
+            <a:ext cx="965880" cy="180360"/>
           </a:xfrm>
           <a:prstGeom prst="rect">
             <a:avLst/>
@@ -25694,7 +25655,7 @@
         <p:spPr>
           <a:xfrm>
             <a:off x="11242080" y="4356360"/>
-            <a:ext cx="309960" cy="181800"/>
+            <a:ext cx="308520" cy="180360"/>
           </a:xfrm>
           <a:prstGeom prst="rect">
             <a:avLst/>
@@ -25746,7 +25707,7 @@
         <p:spPr>
           <a:xfrm>
             <a:off x="7438320" y="4611960"/>
-            <a:ext cx="4145400" cy="254880"/>
+            <a:ext cx="4143960" cy="253440"/>
           </a:xfrm>
           <a:prstGeom prst="rect">
             <a:avLst/>
@@ -25798,7 +25759,7 @@
         <p:spPr>
           <a:xfrm>
             <a:off x="7438320" y="4904280"/>
-            <a:ext cx="4109040" cy="145440"/>
+            <a:ext cx="4107600" cy="144000"/>
           </a:xfrm>
           <a:prstGeom prst="rect">
             <a:avLst/>
@@ -25850,7 +25811,7 @@
         <p:spPr>
           <a:xfrm>
             <a:off x="7292160" y="5342400"/>
-            <a:ext cx="4346280" cy="985680"/>
+            <a:ext cx="4344840" cy="984240"/>
           </a:xfrm>
           <a:custGeom>
             <a:avLst/>
@@ -25921,7 +25882,7 @@
         <p:spPr>
           <a:xfrm>
             <a:off x="7438320" y="5488560"/>
-            <a:ext cx="1067760" cy="181800"/>
+            <a:ext cx="1066320" cy="180360"/>
           </a:xfrm>
           <a:prstGeom prst="rect">
             <a:avLst/>
@@ -25973,7 +25934,7 @@
         <p:spPr>
           <a:xfrm>
             <a:off x="11189880" y="5488560"/>
-            <a:ext cx="364680" cy="181800"/>
+            <a:ext cx="363240" cy="180360"/>
           </a:xfrm>
           <a:prstGeom prst="rect">
             <a:avLst/>
@@ -26025,7 +25986,7 @@
         <p:spPr>
           <a:xfrm>
             <a:off x="7438320" y="5744520"/>
-            <a:ext cx="4145400" cy="254880"/>
+            <a:ext cx="4143960" cy="253440"/>
           </a:xfrm>
           <a:prstGeom prst="rect">
             <a:avLst/>
@@ -26077,7 +26038,7 @@
         <p:spPr>
           <a:xfrm>
             <a:off x="7438320" y="6036480"/>
-            <a:ext cx="4109040" cy="145440"/>
+            <a:ext cx="4107600" cy="144000"/>
           </a:xfrm>
           <a:prstGeom prst="rect">
             <a:avLst/>
@@ -26166,7 +26127,7 @@
         <p:spPr>
           <a:xfrm>
             <a:off x="331200" y="331200"/>
-            <a:ext cx="11586600" cy="164880"/>
+            <a:ext cx="11585160" cy="163440"/>
           </a:xfrm>
           <a:prstGeom prst="rect">
             <a:avLst/>
@@ -26194,7 +26155,7 @@
               <a:buNone/>
             </a:pPr>
             <a:r>
-              <a:rPr b="1" lang="en-US" sz="920" spc="41" strike="noStrike">
+              <a:rPr b="1" lang="en-US" sz="920" spc="29" strike="noStrike">
                 <a:solidFill>
                   <a:srgbClr val="6366f1"/>
                 </a:solidFill>
@@ -26218,7 +26179,7 @@
         <p:spPr>
           <a:xfrm>
             <a:off x="331200" y="563040"/>
-            <a:ext cx="11677680" cy="330480"/>
+            <a:ext cx="11676240" cy="329040"/>
           </a:xfrm>
           <a:prstGeom prst="rect">
             <a:avLst/>
@@ -26270,7 +26231,7 @@
         <p:spPr>
           <a:xfrm>
             <a:off x="331200" y="960840"/>
-            <a:ext cx="11594880" cy="198000"/>
+            <a:ext cx="11593440" cy="196560"/>
           </a:xfrm>
           <a:prstGeom prst="rect">
             <a:avLst/>
@@ -26322,7 +26283,7 @@
         <p:spPr>
           <a:xfrm>
             <a:off x="335520" y="1296360"/>
-            <a:ext cx="6219360" cy="5556960"/>
+            <a:ext cx="6217920" cy="5555520"/>
           </a:xfrm>
           <a:custGeom>
             <a:avLst/>
@@ -26396,7 +26357,7 @@
         <p:spPr>
           <a:xfrm>
             <a:off x="538200" y="1499040"/>
-            <a:ext cx="4943880" cy="5151240"/>
+            <a:ext cx="4942440" cy="5149800"/>
           </a:xfrm>
           <a:prstGeom prst="roundRect">
             <a:avLst>
@@ -26428,7 +26389,7 @@
         <p:spPr>
           <a:xfrm>
             <a:off x="6766200" y="1296360"/>
-            <a:ext cx="2475720" cy="1299600"/>
+            <a:ext cx="2474280" cy="1298160"/>
           </a:xfrm>
           <a:custGeom>
             <a:avLst/>
@@ -26502,7 +26463,7 @@
         <p:spPr>
           <a:xfrm>
             <a:off x="6935760" y="1465920"/>
-            <a:ext cx="2194200" cy="164880"/>
+            <a:ext cx="2192760" cy="163440"/>
           </a:xfrm>
           <a:prstGeom prst="rect">
             <a:avLst/>
@@ -26554,7 +26515,7 @@
         <p:spPr>
           <a:xfrm>
             <a:off x="6935760" y="1697760"/>
-            <a:ext cx="2260440" cy="297360"/>
+            <a:ext cx="2259000" cy="295920"/>
           </a:xfrm>
           <a:prstGeom prst="rect">
             <a:avLst/>
@@ -26606,7 +26567,7 @@
         <p:spPr>
           <a:xfrm>
             <a:off x="6935760" y="2062440"/>
-            <a:ext cx="363600" cy="198000"/>
+            <a:ext cx="362160" cy="196560"/>
           </a:xfrm>
           <a:custGeom>
             <a:avLst/>
@@ -26679,7 +26640,7 @@
         <p:spPr>
           <a:xfrm>
             <a:off x="6935760" y="2062440"/>
-            <a:ext cx="413280" cy="198000"/>
+            <a:ext cx="411840" cy="196560"/>
           </a:xfrm>
           <a:prstGeom prst="rect">
             <a:avLst/>
@@ -26731,7 +26692,7 @@
         <p:spPr>
           <a:xfrm>
             <a:off x="7367040" y="2095560"/>
-            <a:ext cx="231120" cy="131760"/>
+            <a:ext cx="229680" cy="130320"/>
           </a:xfrm>
           <a:prstGeom prst="rect">
             <a:avLst/>
@@ -26783,7 +26744,7 @@
         <p:spPr>
           <a:xfrm>
             <a:off x="6935760" y="2294280"/>
-            <a:ext cx="2185920" cy="131760"/>
+            <a:ext cx="2184480" cy="130320"/>
           </a:xfrm>
           <a:prstGeom prst="rect">
             <a:avLst/>
@@ -26835,7 +26796,7 @@
         <p:spPr>
           <a:xfrm>
             <a:off x="9381600" y="1296360"/>
-            <a:ext cx="2475720" cy="1299600"/>
+            <a:ext cx="2474280" cy="1298160"/>
           </a:xfrm>
           <a:custGeom>
             <a:avLst/>
@@ -26909,7 +26870,7 @@
         <p:spPr>
           <a:xfrm>
             <a:off x="9551520" y="1465920"/>
-            <a:ext cx="2194200" cy="164880"/>
+            <a:ext cx="2192760" cy="163440"/>
           </a:xfrm>
           <a:prstGeom prst="rect">
             <a:avLst/>
@@ -26961,7 +26922,7 @@
         <p:spPr>
           <a:xfrm>
             <a:off x="9551520" y="1697760"/>
-            <a:ext cx="2260440" cy="297360"/>
+            <a:ext cx="2259000" cy="295920"/>
           </a:xfrm>
           <a:prstGeom prst="rect">
             <a:avLst/>
@@ -27013,7 +26974,7 @@
         <p:spPr>
           <a:xfrm>
             <a:off x="9551520" y="2062440"/>
-            <a:ext cx="363600" cy="198000"/>
+            <a:ext cx="362160" cy="196560"/>
           </a:xfrm>
           <a:custGeom>
             <a:avLst/>
@@ -27086,7 +27047,7 @@
         <p:spPr>
           <a:xfrm>
             <a:off x="9551520" y="2062440"/>
-            <a:ext cx="413280" cy="198000"/>
+            <a:ext cx="411840" cy="196560"/>
           </a:xfrm>
           <a:prstGeom prst="rect">
             <a:avLst/>
@@ -27138,7 +27099,7 @@
         <p:spPr>
           <a:xfrm>
             <a:off x="9981720" y="2095560"/>
-            <a:ext cx="231120" cy="131760"/>
+            <a:ext cx="229680" cy="130320"/>
           </a:xfrm>
           <a:prstGeom prst="rect">
             <a:avLst/>
@@ -27190,7 +27151,7 @@
         <p:spPr>
           <a:xfrm>
             <a:off x="9551520" y="2294280"/>
-            <a:ext cx="2185920" cy="131760"/>
+            <a:ext cx="2184480" cy="130320"/>
           </a:xfrm>
           <a:prstGeom prst="rect">
             <a:avLst/>
@@ -27242,7 +27203,7 @@
         <p:spPr>
           <a:xfrm>
             <a:off x="6766200" y="2737440"/>
-            <a:ext cx="5092920" cy="1299600"/>
+            <a:ext cx="5091480" cy="1298160"/>
           </a:xfrm>
           <a:custGeom>
             <a:avLst/>
@@ -27316,7 +27277,7 @@
         <p:spPr>
           <a:xfrm>
             <a:off x="6935760" y="2907360"/>
-            <a:ext cx="4811400" cy="164880"/>
+            <a:ext cx="4809960" cy="163440"/>
           </a:xfrm>
           <a:prstGeom prst="rect">
             <a:avLst/>
@@ -27368,7 +27329,7 @@
         <p:spPr>
           <a:xfrm>
             <a:off x="6935760" y="3139200"/>
-            <a:ext cx="4877640" cy="297360"/>
+            <a:ext cx="4876200" cy="295920"/>
           </a:xfrm>
           <a:prstGeom prst="rect">
             <a:avLst/>
@@ -27420,7 +27381,7 @@
         <p:spPr>
           <a:xfrm>
             <a:off x="6935760" y="3503520"/>
-            <a:ext cx="363600" cy="198000"/>
+            <a:ext cx="362160" cy="196560"/>
           </a:xfrm>
           <a:custGeom>
             <a:avLst/>
@@ -27493,7 +27454,7 @@
         <p:spPr>
           <a:xfrm>
             <a:off x="6935760" y="3503520"/>
-            <a:ext cx="413280" cy="198000"/>
+            <a:ext cx="411840" cy="196560"/>
           </a:xfrm>
           <a:prstGeom prst="rect">
             <a:avLst/>
@@ -27545,7 +27506,7 @@
         <p:spPr>
           <a:xfrm>
             <a:off x="7367040" y="3536640"/>
-            <a:ext cx="231120" cy="131760"/>
+            <a:ext cx="229680" cy="130320"/>
           </a:xfrm>
           <a:prstGeom prst="rect">
             <a:avLst/>
@@ -27597,7 +27558,7 @@
         <p:spPr>
           <a:xfrm>
             <a:off x="6935760" y="3735360"/>
-            <a:ext cx="4803120" cy="131760"/>
+            <a:ext cx="4801680" cy="130320"/>
           </a:xfrm>
           <a:prstGeom prst="rect">
             <a:avLst/>
@@ -27649,7 +27610,7 @@
         <p:spPr>
           <a:xfrm>
             <a:off x="6766200" y="4178520"/>
-            <a:ext cx="5092920" cy="1299600"/>
+            <a:ext cx="5091480" cy="1298160"/>
           </a:xfrm>
           <a:custGeom>
             <a:avLst/>
@@ -27723,7 +27684,7 @@
         <p:spPr>
           <a:xfrm>
             <a:off x="6935760" y="4348440"/>
-            <a:ext cx="4811400" cy="164880"/>
+            <a:ext cx="4809960" cy="163440"/>
           </a:xfrm>
           <a:prstGeom prst="rect">
             <a:avLst/>
@@ -27775,7 +27736,7 @@
         <p:spPr>
           <a:xfrm>
             <a:off x="6935760" y="4580280"/>
-            <a:ext cx="4877640" cy="297360"/>
+            <a:ext cx="4876200" cy="295920"/>
           </a:xfrm>
           <a:prstGeom prst="rect">
             <a:avLst/>
@@ -27827,7 +27788,7 @@
         <p:spPr>
           <a:xfrm>
             <a:off x="6935760" y="4944600"/>
-            <a:ext cx="363600" cy="198000"/>
+            <a:ext cx="362160" cy="196560"/>
           </a:xfrm>
           <a:custGeom>
             <a:avLst/>
@@ -27900,7 +27861,7 @@
         <p:spPr>
           <a:xfrm>
             <a:off x="6935760" y="4944600"/>
-            <a:ext cx="413280" cy="198000"/>
+            <a:ext cx="411840" cy="196560"/>
           </a:xfrm>
           <a:prstGeom prst="rect">
             <a:avLst/>
@@ -27952,7 +27913,7 @@
         <p:spPr>
           <a:xfrm>
             <a:off x="7367760" y="4977720"/>
-            <a:ext cx="231120" cy="131760"/>
+            <a:ext cx="229680" cy="130320"/>
           </a:xfrm>
           <a:prstGeom prst="rect">
             <a:avLst/>
@@ -28004,7 +27965,7 @@
         <p:spPr>
           <a:xfrm>
             <a:off x="6935760" y="5176800"/>
-            <a:ext cx="4803120" cy="131760"/>
+            <a:ext cx="4801680" cy="130320"/>
           </a:xfrm>
           <a:prstGeom prst="rect">
             <a:avLst/>
@@ -28056,7 +28017,7 @@
         <p:spPr>
           <a:xfrm>
             <a:off x="6766200" y="5619600"/>
-            <a:ext cx="5092920" cy="1233360"/>
+            <a:ext cx="5091480" cy="1231920"/>
           </a:xfrm>
           <a:custGeom>
             <a:avLst/>
@@ -28130,7 +28091,7 @@
         <p:spPr>
           <a:xfrm>
             <a:off x="6935760" y="5789520"/>
-            <a:ext cx="4827960" cy="231120"/>
+            <a:ext cx="4826520" cy="229680"/>
           </a:xfrm>
           <a:prstGeom prst="rect">
             <a:avLst/>
@@ -28182,7 +28143,7 @@
         <p:spPr>
           <a:xfrm>
             <a:off x="6935760" y="6120720"/>
-            <a:ext cx="1059480" cy="164880"/>
+            <a:ext cx="1058040" cy="163440"/>
           </a:xfrm>
           <a:prstGeom prst="rect">
             <a:avLst/>
@@ -28234,7 +28195,7 @@
         <p:spPr>
           <a:xfrm>
             <a:off x="6935760" y="6286680"/>
-            <a:ext cx="1100880" cy="264240"/>
+            <a:ext cx="1099440" cy="262800"/>
           </a:xfrm>
           <a:prstGeom prst="rect">
             <a:avLst/>
@@ -28286,7 +28247,7 @@
         <p:spPr>
           <a:xfrm>
             <a:off x="6935760" y="6551640"/>
-            <a:ext cx="1051200" cy="131760"/>
+            <a:ext cx="1049760" cy="130320"/>
           </a:xfrm>
           <a:prstGeom prst="rect">
             <a:avLst/>
@@ -28338,7 +28299,7 @@
         <p:spPr>
           <a:xfrm>
             <a:off x="10646640" y="6120720"/>
-            <a:ext cx="1042920" cy="164880"/>
+            <a:ext cx="1041480" cy="163440"/>
           </a:xfrm>
           <a:prstGeom prst="rect">
             <a:avLst/>
@@ -28390,7 +28351,7 @@
         <p:spPr>
           <a:xfrm>
             <a:off x="10605240" y="6286680"/>
-            <a:ext cx="1084320" cy="264240"/>
+            <a:ext cx="1082880" cy="262800"/>
           </a:xfrm>
           <a:prstGeom prst="rect">
             <a:avLst/>
@@ -28442,7 +28403,7 @@
         <p:spPr>
           <a:xfrm>
             <a:off x="10654920" y="6551640"/>
-            <a:ext cx="1034640" cy="131760"/>
+            <a:ext cx="1033200" cy="130320"/>
           </a:xfrm>
           <a:prstGeom prst="rect">
             <a:avLst/>
@@ -28531,7 +28492,7 @@
         <p:spPr>
           <a:xfrm>
             <a:off x="380880" y="380880"/>
-            <a:ext cx="11495880" cy="189720"/>
+            <a:ext cx="11494440" cy="188280"/>
           </a:xfrm>
           <a:prstGeom prst="rect">
             <a:avLst/>
@@ -28559,7 +28520,7 @@
               <a:buNone/>
             </a:pPr>
             <a:r>
-              <a:rPr b="1" lang="en-US" sz="1050" spc="49" strike="noStrike">
+              <a:rPr b="1" lang="en-US" sz="1050" spc="38" strike="noStrike">
                 <a:solidFill>
                   <a:srgbClr val="6366f1"/>
                 </a:solidFill>
@@ -28583,7 +28544,7 @@
         <p:spPr>
           <a:xfrm>
             <a:off x="380880" y="647640"/>
-            <a:ext cx="11600640" cy="380160"/>
+            <a:ext cx="11599200" cy="378720"/>
           </a:xfrm>
           <a:prstGeom prst="rect">
             <a:avLst/>
@@ -28635,7 +28596,7 @@
         <p:spPr>
           <a:xfrm>
             <a:off x="380880" y="1104840"/>
-            <a:ext cx="11505600" cy="227880"/>
+            <a:ext cx="11504160" cy="226440"/>
           </a:xfrm>
           <a:prstGeom prst="rect">
             <a:avLst/>
@@ -28687,7 +28648,7 @@
         <p:spPr>
           <a:xfrm>
             <a:off x="385920" y="1414440"/>
-            <a:ext cx="5790600" cy="5056920"/>
+            <a:ext cx="5789160" cy="5055480"/>
           </a:xfrm>
           <a:custGeom>
             <a:avLst/>
@@ -28761,7 +28722,7 @@
         <p:spPr>
           <a:xfrm>
             <a:off x="581040" y="1609560"/>
-            <a:ext cx="5400000" cy="4666680"/>
+            <a:ext cx="5398560" cy="4665240"/>
           </a:xfrm>
           <a:prstGeom prst="roundRect">
             <a:avLst>
@@ -28793,7 +28754,7 @@
         <p:spPr>
           <a:xfrm>
             <a:off x="6429240" y="1414440"/>
-            <a:ext cx="5376240" cy="2037600"/>
+            <a:ext cx="5374800" cy="2036160"/>
           </a:xfrm>
           <a:custGeom>
             <a:avLst/>
@@ -28867,7 +28828,7 @@
         <p:spPr>
           <a:xfrm>
             <a:off x="6600960" y="1571760"/>
-            <a:ext cx="1770840" cy="266040"/>
+            <a:ext cx="1769400" cy="264600"/>
           </a:xfrm>
           <a:prstGeom prst="rect">
             <a:avLst/>
@@ -28919,7 +28880,7 @@
         <p:spPr>
           <a:xfrm>
             <a:off x="11267280" y="1590840"/>
-            <a:ext cx="380160" cy="227880"/>
+            <a:ext cx="378720" cy="226440"/>
           </a:xfrm>
           <a:custGeom>
             <a:avLst/>
@@ -28992,7 +28953,7 @@
         <p:spPr>
           <a:xfrm>
             <a:off x="11267280" y="1590840"/>
-            <a:ext cx="437400" cy="227880"/>
+            <a:ext cx="435960" cy="226440"/>
           </a:xfrm>
           <a:prstGeom prst="rect">
             <a:avLst/>
@@ -29044,7 +29005,7 @@
         <p:spPr>
           <a:xfrm>
             <a:off x="6600960" y="1914480"/>
-            <a:ext cx="5190480" cy="342360"/>
+            <a:ext cx="5189040" cy="340920"/>
           </a:xfrm>
           <a:prstGeom prst="rect">
             <a:avLst/>
@@ -29096,7 +29057,7 @@
         <p:spPr>
           <a:xfrm>
             <a:off x="6600960" y="2295360"/>
-            <a:ext cx="646920" cy="189720"/>
+            <a:ext cx="645480" cy="188280"/>
           </a:xfrm>
           <a:prstGeom prst="rect">
             <a:avLst/>
@@ -29148,7 +29109,7 @@
         <p:spPr>
           <a:xfrm>
             <a:off x="7255440" y="2314440"/>
-            <a:ext cx="1332720" cy="151560"/>
+            <a:ext cx="1331280" cy="150120"/>
           </a:xfrm>
           <a:prstGeom prst="rect">
             <a:avLst/>
@@ -29200,7 +29161,7 @@
         <p:spPr>
           <a:xfrm>
             <a:off x="6600960" y="2604960"/>
-            <a:ext cx="5047560" cy="8640"/>
+            <a:ext cx="5046120" cy="7200"/>
           </a:xfrm>
           <a:custGeom>
             <a:avLst/>
@@ -29251,7 +29212,7 @@
         <p:spPr>
           <a:xfrm>
             <a:off x="6600960" y="2724120"/>
-            <a:ext cx="2523240" cy="151560"/>
+            <a:ext cx="2521800" cy="150120"/>
           </a:xfrm>
           <a:prstGeom prst="rect">
             <a:avLst/>
@@ -29303,7 +29264,7 @@
         <p:spPr>
           <a:xfrm>
             <a:off x="6600960" y="2876400"/>
-            <a:ext cx="2552040" cy="266040"/>
+            <a:ext cx="2550600" cy="264600"/>
           </a:xfrm>
           <a:prstGeom prst="rect">
             <a:avLst/>
@@ -29355,7 +29316,7 @@
         <p:spPr>
           <a:xfrm>
             <a:off x="6600960" y="3143160"/>
-            <a:ext cx="2523240" cy="151560"/>
+            <a:ext cx="2521800" cy="150120"/>
           </a:xfrm>
           <a:prstGeom prst="rect">
             <a:avLst/>
@@ -29407,7 +29368,7 @@
         <p:spPr>
           <a:xfrm>
             <a:off x="9182160" y="2724120"/>
-            <a:ext cx="2523240" cy="151560"/>
+            <a:ext cx="2521800" cy="150120"/>
           </a:xfrm>
           <a:prstGeom prst="rect">
             <a:avLst/>
@@ -29459,7 +29420,7 @@
         <p:spPr>
           <a:xfrm>
             <a:off x="9182160" y="2876400"/>
-            <a:ext cx="2552040" cy="266040"/>
+            <a:ext cx="2550600" cy="264600"/>
           </a:xfrm>
           <a:prstGeom prst="rect">
             <a:avLst/>
@@ -29511,7 +29472,7 @@
         <p:spPr>
           <a:xfrm>
             <a:off x="9182160" y="3143160"/>
-            <a:ext cx="2523240" cy="151560"/>
+            <a:ext cx="2521800" cy="150120"/>
           </a:xfrm>
           <a:prstGeom prst="rect">
             <a:avLst/>
@@ -29563,7 +29524,7 @@
         <p:spPr>
           <a:xfrm>
             <a:off x="6429240" y="3538440"/>
-            <a:ext cx="5376240" cy="1227960"/>
+            <a:ext cx="5374800" cy="1226520"/>
           </a:xfrm>
           <a:custGeom>
             <a:avLst/>
@@ -29637,7 +29598,7 @@
         <p:spPr>
           <a:xfrm>
             <a:off x="6600960" y="3695760"/>
-            <a:ext cx="1542240" cy="266040"/>
+            <a:ext cx="1540800" cy="264600"/>
           </a:xfrm>
           <a:prstGeom prst="rect">
             <a:avLst/>
@@ -29689,7 +29650,7 @@
         <p:spPr>
           <a:xfrm>
             <a:off x="11292120" y="3714840"/>
-            <a:ext cx="351720" cy="227880"/>
+            <a:ext cx="350280" cy="226440"/>
           </a:xfrm>
           <a:custGeom>
             <a:avLst/>
@@ -29762,7 +29723,7 @@
         <p:spPr>
           <a:xfrm>
             <a:off x="11292120" y="3714840"/>
-            <a:ext cx="408960" cy="227880"/>
+            <a:ext cx="407520" cy="226440"/>
           </a:xfrm>
           <a:prstGeom prst="rect">
             <a:avLst/>
@@ -29814,7 +29775,7 @@
         <p:spPr>
           <a:xfrm>
             <a:off x="6600960" y="4038480"/>
-            <a:ext cx="5190480" cy="342360"/>
+            <a:ext cx="5189040" cy="340920"/>
           </a:xfrm>
           <a:prstGeom prst="rect">
             <a:avLst/>
@@ -29866,7 +29827,7 @@
         <p:spPr>
           <a:xfrm>
             <a:off x="6600960" y="4419720"/>
-            <a:ext cx="675720" cy="189720"/>
+            <a:ext cx="674280" cy="188280"/>
           </a:xfrm>
           <a:prstGeom prst="rect">
             <a:avLst/>
@@ -29918,7 +29879,7 @@
         <p:spPr>
           <a:xfrm>
             <a:off x="7284960" y="4438800"/>
-            <a:ext cx="1685160" cy="151560"/>
+            <a:ext cx="1683720" cy="150120"/>
           </a:xfrm>
           <a:prstGeom prst="rect">
             <a:avLst/>
@@ -29970,7 +29931,7 @@
         <p:spPr>
           <a:xfrm>
             <a:off x="6429240" y="4853160"/>
-            <a:ext cx="5376240" cy="1227960"/>
+            <a:ext cx="5374800" cy="1226520"/>
           </a:xfrm>
           <a:custGeom>
             <a:avLst/>
@@ -30044,7 +30005,7 @@
         <p:spPr>
           <a:xfrm>
             <a:off x="6600960" y="5010120"/>
-            <a:ext cx="2256840" cy="266040"/>
+            <a:ext cx="2255400" cy="264600"/>
           </a:xfrm>
           <a:prstGeom prst="rect">
             <a:avLst/>
@@ -30096,7 +30057,7 @@
         <p:spPr>
           <a:xfrm>
             <a:off x="11265480" y="5029200"/>
-            <a:ext cx="380160" cy="227880"/>
+            <a:ext cx="378720" cy="226440"/>
           </a:xfrm>
           <a:custGeom>
             <a:avLst/>
@@ -30169,7 +30130,7 @@
         <p:spPr>
           <a:xfrm>
             <a:off x="11265480" y="5029200"/>
-            <a:ext cx="437400" cy="227880"/>
+            <a:ext cx="435960" cy="226440"/>
           </a:xfrm>
           <a:prstGeom prst="rect">
             <a:avLst/>
@@ -30221,7 +30182,7 @@
         <p:spPr>
           <a:xfrm>
             <a:off x="6600960" y="5353200"/>
-            <a:ext cx="5190480" cy="342360"/>
+            <a:ext cx="5189040" cy="340920"/>
           </a:xfrm>
           <a:prstGeom prst="rect">
             <a:avLst/>
@@ -30273,7 +30234,7 @@
         <p:spPr>
           <a:xfrm>
             <a:off x="6600960" y="5734080"/>
-            <a:ext cx="646920" cy="189720"/>
+            <a:ext cx="645480" cy="188280"/>
           </a:xfrm>
           <a:prstGeom prst="rect">
             <a:avLst/>
@@ -30325,7 +30286,7 @@
         <p:spPr>
           <a:xfrm>
             <a:off x="7260840" y="5753160"/>
-            <a:ext cx="1571040" cy="151560"/>
+            <a:ext cx="1569600" cy="150120"/>
           </a:xfrm>
           <a:prstGeom prst="rect">
             <a:avLst/>
@@ -30414,7 +30375,7 @@
         <p:spPr>
           <a:xfrm>
             <a:off x="380880" y="380880"/>
-            <a:ext cx="11495880" cy="189720"/>
+            <a:ext cx="11494440" cy="188280"/>
           </a:xfrm>
           <a:prstGeom prst="rect">
             <a:avLst/>
@@ -30442,7 +30403,7 @@
               <a:buNone/>
             </a:pPr>
             <a:r>
-              <a:rPr b="1" lang="en-US" sz="1050" spc="49" strike="noStrike">
+              <a:rPr b="1" lang="en-US" sz="1050" spc="38" strike="noStrike">
                 <a:solidFill>
                   <a:srgbClr val="6366f1"/>
                 </a:solidFill>
@@ -30466,7 +30427,7 @@
         <p:spPr>
           <a:xfrm>
             <a:off x="380880" y="647640"/>
-            <a:ext cx="11600640" cy="380160"/>
+            <a:ext cx="11599200" cy="378720"/>
           </a:xfrm>
           <a:prstGeom prst="rect">
             <a:avLst/>
@@ -30518,7 +30479,7 @@
         <p:spPr>
           <a:xfrm>
             <a:off x="380880" y="1104840"/>
-            <a:ext cx="11505600" cy="227880"/>
+            <a:ext cx="11504160" cy="226440"/>
           </a:xfrm>
           <a:prstGeom prst="rect">
             <a:avLst/>
@@ -30570,7 +30531,7 @@
         <p:spPr>
           <a:xfrm>
             <a:off x="385920" y="1414440"/>
-            <a:ext cx="6333480" cy="5314320"/>
+            <a:ext cx="6332040" cy="5312880"/>
           </a:xfrm>
           <a:custGeom>
             <a:avLst/>
@@ -30644,7 +30605,7 @@
         <p:spPr>
           <a:xfrm>
             <a:off x="581040" y="1609560"/>
-            <a:ext cx="5942880" cy="4923720"/>
+            <a:ext cx="5941440" cy="4922280"/>
           </a:xfrm>
           <a:prstGeom prst="roundRect">
             <a:avLst>
@@ -30676,7 +30637,7 @@
         <p:spPr>
           <a:xfrm>
             <a:off x="6958080" y="1414440"/>
-            <a:ext cx="4847400" cy="2580480"/>
+            <a:ext cx="4845960" cy="2579040"/>
           </a:xfrm>
           <a:custGeom>
             <a:avLst/>
@@ -30750,7 +30711,7 @@
         <p:spPr>
           <a:xfrm>
             <a:off x="7153200" y="1609560"/>
-            <a:ext cx="380160" cy="380160"/>
+            <a:ext cx="378720" cy="378720"/>
           </a:xfrm>
           <a:custGeom>
             <a:avLst/>
@@ -30823,7 +30784,7 @@
         <p:spPr>
           <a:xfrm>
             <a:off x="7267680" y="1724040"/>
-            <a:ext cx="151560" cy="151560"/>
+            <a:ext cx="150120" cy="150120"/>
           </a:xfrm>
           <a:custGeom>
             <a:avLst/>
@@ -30956,7 +30917,7 @@
         <p:spPr>
           <a:xfrm>
             <a:off x="7648560" y="1666800"/>
-            <a:ext cx="1847160" cy="266040"/>
+            <a:ext cx="1845720" cy="264600"/>
           </a:xfrm>
           <a:prstGeom prst="rect">
             <a:avLst/>
@@ -31008,7 +30969,7 @@
         <p:spPr>
           <a:xfrm>
             <a:off x="7153200" y="2104920"/>
-            <a:ext cx="1085040" cy="456480"/>
+            <a:ext cx="1083600" cy="455040"/>
           </a:xfrm>
           <a:prstGeom prst="rect">
             <a:avLst/>
@@ -31060,7 +31021,7 @@
         <p:spPr>
           <a:xfrm>
             <a:off x="8127720" y="2300400"/>
-            <a:ext cx="456480" cy="266040"/>
+            <a:ext cx="455040" cy="264600"/>
           </a:xfrm>
           <a:custGeom>
             <a:avLst/>
@@ -31133,7 +31094,7 @@
         <p:spPr>
           <a:xfrm>
             <a:off x="8127720" y="2300400"/>
-            <a:ext cx="523080" cy="266040"/>
+            <a:ext cx="521640" cy="264600"/>
           </a:xfrm>
           <a:prstGeom prst="rect">
             <a:avLst/>
@@ -31185,7 +31146,7 @@
         <p:spPr>
           <a:xfrm>
             <a:off x="7153200" y="2643120"/>
-            <a:ext cx="4523760" cy="189720"/>
+            <a:ext cx="4522320" cy="188280"/>
           </a:xfrm>
           <a:prstGeom prst="rect">
             <a:avLst/>
@@ -31237,7 +31198,7 @@
         <p:spPr>
           <a:xfrm>
             <a:off x="7153200" y="2990880"/>
-            <a:ext cx="4457160" cy="8640"/>
+            <a:ext cx="4455720" cy="7200"/>
           </a:xfrm>
           <a:custGeom>
             <a:avLst/>
@@ -31288,7 +31249,7 @@
         <p:spPr>
           <a:xfrm>
             <a:off x="7153200" y="3147840"/>
-            <a:ext cx="4523760" cy="646920"/>
+            <a:ext cx="4522320" cy="645480"/>
           </a:xfrm>
           <a:prstGeom prst="rect">
             <a:avLst/>
@@ -31340,7 +31301,7 @@
         <p:spPr>
           <a:xfrm>
             <a:off x="6958080" y="4079160"/>
-            <a:ext cx="4847400" cy="2637720"/>
+            <a:ext cx="4845960" cy="2636280"/>
           </a:xfrm>
           <a:custGeom>
             <a:avLst/>
@@ -31414,7 +31375,7 @@
         <p:spPr>
           <a:xfrm>
             <a:off x="7153200" y="4274280"/>
-            <a:ext cx="4542840" cy="266040"/>
+            <a:ext cx="4541400" cy="264600"/>
           </a:xfrm>
           <a:prstGeom prst="rect">
             <a:avLst/>
@@ -31466,7 +31427,7 @@
         <p:spPr>
           <a:xfrm>
             <a:off x="7153200" y="4712400"/>
-            <a:ext cx="323280" cy="189720"/>
+            <a:ext cx="321840" cy="188280"/>
           </a:xfrm>
           <a:prstGeom prst="rect">
             <a:avLst/>
@@ -31518,7 +31479,7 @@
         <p:spPr>
           <a:xfrm>
             <a:off x="11301840" y="4693320"/>
-            <a:ext cx="380160" cy="227880"/>
+            <a:ext cx="378720" cy="226440"/>
           </a:xfrm>
           <a:prstGeom prst="rect">
             <a:avLst/>
@@ -31570,7 +31531,7 @@
         <p:spPr>
           <a:xfrm>
             <a:off x="7153200" y="4960080"/>
-            <a:ext cx="4457160" cy="75600"/>
+            <a:ext cx="4455720" cy="74160"/>
           </a:xfrm>
           <a:custGeom>
             <a:avLst/>
@@ -31641,7 +31602,7 @@
         <p:spPr>
           <a:xfrm>
             <a:off x="7153200" y="4960080"/>
-            <a:ext cx="2675880" cy="75600"/>
+            <a:ext cx="2674440" cy="74160"/>
           </a:xfrm>
           <a:custGeom>
             <a:avLst/>
@@ -31712,7 +31673,7 @@
         <p:spPr>
           <a:xfrm>
             <a:off x="7153200" y="5074560"/>
-            <a:ext cx="4514040" cy="151560"/>
+            <a:ext cx="4512600" cy="150120"/>
           </a:xfrm>
           <a:prstGeom prst="rect">
             <a:avLst/>
@@ -31764,7 +31725,7 @@
         <p:spPr>
           <a:xfrm>
             <a:off x="7153200" y="5360040"/>
-            <a:ext cx="1199520" cy="189720"/>
+            <a:ext cx="1198080" cy="188280"/>
           </a:xfrm>
           <a:prstGeom prst="rect">
             <a:avLst/>
@@ -31816,7 +31777,7 @@
         <p:spPr>
           <a:xfrm>
             <a:off x="11308680" y="5341320"/>
-            <a:ext cx="380160" cy="227880"/>
+            <a:ext cx="378720" cy="226440"/>
           </a:xfrm>
           <a:prstGeom prst="rect">
             <a:avLst/>
@@ -31868,7 +31829,7 @@
         <p:spPr>
           <a:xfrm>
             <a:off x="7153200" y="5607720"/>
-            <a:ext cx="4457160" cy="75600"/>
+            <a:ext cx="4455720" cy="74160"/>
           </a:xfrm>
           <a:custGeom>
             <a:avLst/>
@@ -31939,7 +31900,7 @@
         <p:spPr>
           <a:xfrm>
             <a:off x="7153200" y="5607720"/>
-            <a:ext cx="2580480" cy="75600"/>
+            <a:ext cx="2579040" cy="74160"/>
           </a:xfrm>
           <a:custGeom>
             <a:avLst/>
@@ -32010,7 +31971,7 @@
         <p:spPr>
           <a:xfrm>
             <a:off x="7153200" y="5722200"/>
-            <a:ext cx="4514040" cy="151560"/>
+            <a:ext cx="4512600" cy="150120"/>
           </a:xfrm>
           <a:prstGeom prst="rect">
             <a:avLst/>
@@ -32062,7 +32023,7 @@
         <p:spPr>
           <a:xfrm>
             <a:off x="7153200" y="6008040"/>
-            <a:ext cx="1218600" cy="189720"/>
+            <a:ext cx="1217160" cy="188280"/>
           </a:xfrm>
           <a:prstGeom prst="rect">
             <a:avLst/>
@@ -32114,7 +32075,7 @@
         <p:spPr>
           <a:xfrm>
             <a:off x="11313720" y="5988960"/>
-            <a:ext cx="370800" cy="227880"/>
+            <a:ext cx="369360" cy="226440"/>
           </a:xfrm>
           <a:prstGeom prst="rect">
             <a:avLst/>
@@ -32166,7 +32127,7 @@
         <p:spPr>
           <a:xfrm>
             <a:off x="7153200" y="6255720"/>
-            <a:ext cx="4457160" cy="75600"/>
+            <a:ext cx="4455720" cy="74160"/>
           </a:xfrm>
           <a:custGeom>
             <a:avLst/>
@@ -32237,7 +32198,7 @@
         <p:spPr>
           <a:xfrm>
             <a:off x="7153200" y="6255720"/>
-            <a:ext cx="2313720" cy="75600"/>
+            <a:ext cx="2312280" cy="74160"/>
           </a:xfrm>
           <a:custGeom>
             <a:avLst/>
@@ -32308,7 +32269,7 @@
         <p:spPr>
           <a:xfrm>
             <a:off x="7153200" y="6369840"/>
-            <a:ext cx="4514040" cy="151560"/>
+            <a:ext cx="4512600" cy="150120"/>
           </a:xfrm>
           <a:prstGeom prst="rect">
             <a:avLst/>
@@ -32397,7 +32358,7 @@
         <p:spPr>
           <a:xfrm>
             <a:off x="370440" y="370440"/>
-            <a:ext cx="11515320" cy="184320"/>
+            <a:ext cx="11513880" cy="182880"/>
           </a:xfrm>
           <a:prstGeom prst="rect">
             <a:avLst/>
@@ -32425,7 +32386,7 @@
               <a:buNone/>
             </a:pPr>
             <a:r>
-              <a:rPr b="1" lang="en-US" sz="1020" spc="46" strike="noStrike">
+              <a:rPr b="1" lang="en-US" sz="1020" spc="35" strike="noStrike">
                 <a:solidFill>
                   <a:srgbClr val="6366f1"/>
                 </a:solidFill>
@@ -32449,7 +32410,7 @@
         <p:spPr>
           <a:xfrm>
             <a:off x="370440" y="629640"/>
-            <a:ext cx="11617200" cy="369720"/>
+            <a:ext cx="11615760" cy="368280"/>
           </a:xfrm>
           <a:prstGeom prst="rect">
             <a:avLst/>
@@ -32501,7 +32462,7 @@
         <p:spPr>
           <a:xfrm>
             <a:off x="370440" y="1073880"/>
-            <a:ext cx="11524680" cy="221400"/>
+            <a:ext cx="11523240" cy="219960"/>
           </a:xfrm>
           <a:prstGeom prst="rect">
             <a:avLst/>
@@ -32553,7 +32514,7 @@
         <p:spPr>
           <a:xfrm>
             <a:off x="388800" y="1374840"/>
-            <a:ext cx="5632560" cy="3757680"/>
+            <a:ext cx="5631120" cy="3756240"/>
           </a:xfrm>
           <a:custGeom>
             <a:avLst/>
@@ -32627,7 +32588,7 @@
         <p:spPr>
           <a:xfrm>
             <a:off x="592560" y="1564560"/>
-            <a:ext cx="443520" cy="443520"/>
+            <a:ext cx="442080" cy="442080"/>
           </a:xfrm>
           <a:custGeom>
             <a:avLst/>
@@ -32700,7 +32661,7 @@
         <p:spPr>
           <a:xfrm>
             <a:off x="722160" y="1694160"/>
-            <a:ext cx="184320" cy="184320"/>
+            <a:ext cx="182880" cy="182880"/>
           </a:xfrm>
           <a:custGeom>
             <a:avLst/>
@@ -32821,7 +32782,7 @@
         <p:spPr>
           <a:xfrm>
             <a:off x="1148040" y="1564560"/>
-            <a:ext cx="1480320" cy="258480"/>
+            <a:ext cx="1478880" cy="257040"/>
           </a:xfrm>
           <a:prstGeom prst="rect">
             <a:avLst/>
@@ -32873,7 +32834,7 @@
         <p:spPr>
           <a:xfrm>
             <a:off x="1148040" y="1823760"/>
-            <a:ext cx="1452600" cy="184320"/>
+            <a:ext cx="1451160" cy="182880"/>
           </a:xfrm>
           <a:prstGeom prst="rect">
             <a:avLst/>
@@ -32925,7 +32886,7 @@
         <p:spPr>
           <a:xfrm>
             <a:off x="592560" y="2157120"/>
-            <a:ext cx="5303880" cy="184320"/>
+            <a:ext cx="5302440" cy="182880"/>
           </a:xfrm>
           <a:prstGeom prst="rect">
             <a:avLst/>
@@ -32977,7 +32938,7 @@
         <p:spPr>
           <a:xfrm>
             <a:off x="592560" y="2379240"/>
-            <a:ext cx="1832400" cy="369720"/>
+            <a:ext cx="1830960" cy="368280"/>
           </a:xfrm>
           <a:prstGeom prst="rect">
             <a:avLst/>
@@ -33029,7 +32990,7 @@
         <p:spPr>
           <a:xfrm>
             <a:off x="2369880" y="2494800"/>
-            <a:ext cx="702720" cy="258480"/>
+            <a:ext cx="701280" cy="257040"/>
           </a:xfrm>
           <a:custGeom>
             <a:avLst/>
@@ -33102,7 +33063,7 @@
         <p:spPr>
           <a:xfrm>
             <a:off x="2369880" y="2494800"/>
-            <a:ext cx="767520" cy="258480"/>
+            <a:ext cx="766080" cy="257040"/>
           </a:xfrm>
           <a:prstGeom prst="rect">
             <a:avLst/>
@@ -33154,7 +33115,7 @@
         <p:spPr>
           <a:xfrm>
             <a:off x="592560" y="2902320"/>
-            <a:ext cx="5239080" cy="1147320"/>
+            <a:ext cx="5237640" cy="1145880"/>
           </a:xfrm>
           <a:custGeom>
             <a:avLst/>
@@ -33225,7 +33186,7 @@
         <p:spPr>
           <a:xfrm>
             <a:off x="703440" y="3013200"/>
-            <a:ext cx="5090760" cy="221400"/>
+            <a:ext cx="5089320" cy="219960"/>
           </a:xfrm>
           <a:prstGeom prst="rect">
             <a:avLst/>
@@ -33277,7 +33238,7 @@
         <p:spPr>
           <a:xfrm>
             <a:off x="703440" y="3272400"/>
-            <a:ext cx="5081760" cy="184320"/>
+            <a:ext cx="5080320" cy="182880"/>
           </a:xfrm>
           <a:prstGeom prst="rect">
             <a:avLst/>
@@ -33329,7 +33290,7 @@
         <p:spPr>
           <a:xfrm>
             <a:off x="703440" y="3531600"/>
-            <a:ext cx="749160" cy="258480"/>
+            <a:ext cx="747720" cy="257040"/>
           </a:xfrm>
           <a:prstGeom prst="rect">
             <a:avLst/>
@@ -33381,7 +33342,7 @@
         <p:spPr>
           <a:xfrm>
             <a:off x="703440" y="3790800"/>
-            <a:ext cx="712080" cy="147240"/>
+            <a:ext cx="710640" cy="145800"/>
           </a:xfrm>
           <a:prstGeom prst="rect">
             <a:avLst/>
@@ -33433,7 +33394,7 @@
         <p:spPr>
           <a:xfrm>
             <a:off x="1508040" y="3531600"/>
-            <a:ext cx="1008360" cy="258480"/>
+            <a:ext cx="1006920" cy="257040"/>
           </a:xfrm>
           <a:prstGeom prst="rect">
             <a:avLst/>
@@ -33485,7 +33446,7 @@
         <p:spPr>
           <a:xfrm>
             <a:off x="1508040" y="3790800"/>
-            <a:ext cx="971280" cy="147240"/>
+            <a:ext cx="969840" cy="145800"/>
           </a:xfrm>
           <a:prstGeom prst="rect">
             <a:avLst/>
@@ -33537,7 +33498,7 @@
         <p:spPr>
           <a:xfrm>
             <a:off x="2575800" y="3531600"/>
-            <a:ext cx="1091520" cy="258480"/>
+            <a:ext cx="1090080" cy="257040"/>
           </a:xfrm>
           <a:prstGeom prst="rect">
             <a:avLst/>
@@ -33589,7 +33550,7 @@
         <p:spPr>
           <a:xfrm>
             <a:off x="2575800" y="3790800"/>
-            <a:ext cx="1054800" cy="147240"/>
+            <a:ext cx="1053360" cy="145800"/>
           </a:xfrm>
           <a:prstGeom prst="rect">
             <a:avLst/>
@@ -33641,7 +33602,7 @@
         <p:spPr>
           <a:xfrm>
             <a:off x="592560" y="4161240"/>
-            <a:ext cx="5239080" cy="776880"/>
+            <a:ext cx="5237640" cy="775440"/>
           </a:xfrm>
           <a:custGeom>
             <a:avLst/>
@@ -33712,7 +33673,7 @@
         <p:spPr>
           <a:xfrm>
             <a:off x="703440" y="4272120"/>
-            <a:ext cx="5090760" cy="221400"/>
+            <a:ext cx="5089320" cy="219960"/>
           </a:xfrm>
           <a:prstGeom prst="rect">
             <a:avLst/>
@@ -33764,7 +33725,7 @@
         <p:spPr>
           <a:xfrm>
             <a:off x="703440" y="4568400"/>
-            <a:ext cx="1063800" cy="258480"/>
+            <a:ext cx="1062360" cy="257040"/>
           </a:xfrm>
           <a:custGeom>
             <a:avLst/>
@@ -33837,7 +33798,7 @@
         <p:spPr>
           <a:xfrm>
             <a:off x="703440" y="4568400"/>
-            <a:ext cx="1128600" cy="258480"/>
+            <a:ext cx="1127160" cy="257040"/>
           </a:xfrm>
           <a:prstGeom prst="rect">
             <a:avLst/>
@@ -33889,7 +33850,7 @@
         <p:spPr>
           <a:xfrm>
             <a:off x="1843560" y="4568400"/>
-            <a:ext cx="1239840" cy="258480"/>
+            <a:ext cx="1238400" cy="257040"/>
           </a:xfrm>
           <a:custGeom>
             <a:avLst/>
@@ -33962,7 +33923,7 @@
         <p:spPr>
           <a:xfrm>
             <a:off x="1843560" y="4568400"/>
-            <a:ext cx="1304640" cy="258480"/>
+            <a:ext cx="1303200" cy="257040"/>
           </a:xfrm>
           <a:prstGeom prst="rect">
             <a:avLst/>
@@ -34014,7 +33975,7 @@
         <p:spPr>
           <a:xfrm>
             <a:off x="3161880" y="4568400"/>
-            <a:ext cx="897120" cy="258480"/>
+            <a:ext cx="895680" cy="257040"/>
           </a:xfrm>
           <a:custGeom>
             <a:avLst/>
@@ -34087,7 +34048,7 @@
         <p:spPr>
           <a:xfrm>
             <a:off x="3161880" y="4568400"/>
-            <a:ext cx="961920" cy="258480"/>
+            <a:ext cx="960480" cy="257040"/>
           </a:xfrm>
           <a:prstGeom prst="rect">
             <a:avLst/>
@@ -34139,7 +34100,7 @@
         <p:spPr>
           <a:xfrm>
             <a:off x="6190200" y="1374840"/>
-            <a:ext cx="5632560" cy="4128120"/>
+            <a:ext cx="5631120" cy="4126680"/>
           </a:xfrm>
           <a:custGeom>
             <a:avLst/>
@@ -34213,7 +34174,7 @@
         <p:spPr>
           <a:xfrm>
             <a:off x="6393600" y="1564560"/>
-            <a:ext cx="443520" cy="443520"/>
+            <a:ext cx="442080" cy="442080"/>
           </a:xfrm>
           <a:custGeom>
             <a:avLst/>
@@ -34286,7 +34247,7 @@
         <p:spPr>
           <a:xfrm>
             <a:off x="6523200" y="1694160"/>
-            <a:ext cx="184320" cy="184320"/>
+            <a:ext cx="182880" cy="182880"/>
           </a:xfrm>
           <a:custGeom>
             <a:avLst/>
@@ -34463,7 +34424,7 @@
         <p:spPr>
           <a:xfrm>
             <a:off x="6949080" y="1564560"/>
-            <a:ext cx="1721160" cy="258480"/>
+            <a:ext cx="1719720" cy="257040"/>
           </a:xfrm>
           <a:prstGeom prst="rect">
             <a:avLst/>
@@ -34515,7 +34476,7 @@
         <p:spPr>
           <a:xfrm>
             <a:off x="6949080" y="1823760"/>
-            <a:ext cx="1693440" cy="184320"/>
+            <a:ext cx="1692000" cy="182880"/>
           </a:xfrm>
           <a:prstGeom prst="rect">
             <a:avLst/>
@@ -34567,7 +34528,7 @@
         <p:spPr>
           <a:xfrm>
             <a:off x="6393600" y="2157120"/>
-            <a:ext cx="5303880" cy="184320"/>
+            <a:ext cx="5302440" cy="182880"/>
           </a:xfrm>
           <a:prstGeom prst="rect">
             <a:avLst/>
@@ -34619,7 +34580,7 @@
         <p:spPr>
           <a:xfrm>
             <a:off x="6393600" y="2379240"/>
-            <a:ext cx="1767600" cy="369720"/>
+            <a:ext cx="1766160" cy="368280"/>
           </a:xfrm>
           <a:prstGeom prst="rect">
             <a:avLst/>
@@ -34671,7 +34632,7 @@
         <p:spPr>
           <a:xfrm>
             <a:off x="8108640" y="2494800"/>
-            <a:ext cx="730440" cy="258480"/>
+            <a:ext cx="729000" cy="257040"/>
           </a:xfrm>
           <a:custGeom>
             <a:avLst/>
@@ -34744,7 +34705,7 @@
         <p:spPr>
           <a:xfrm>
             <a:off x="8108640" y="2494800"/>
-            <a:ext cx="795240" cy="258480"/>
+            <a:ext cx="793800" cy="257040"/>
           </a:xfrm>
           <a:prstGeom prst="rect">
             <a:avLst/>
@@ -34796,7 +34757,7 @@
         <p:spPr>
           <a:xfrm>
             <a:off x="6393600" y="2791080"/>
-            <a:ext cx="5294520" cy="147240"/>
+            <a:ext cx="5293080" cy="145800"/>
           </a:xfrm>
           <a:prstGeom prst="rect">
             <a:avLst/>
@@ -34848,7 +34809,7 @@
         <p:spPr>
           <a:xfrm>
             <a:off x="6393600" y="3087360"/>
-            <a:ext cx="5239080" cy="1221120"/>
+            <a:ext cx="5237640" cy="1219680"/>
           </a:xfrm>
           <a:custGeom>
             <a:avLst/>
@@ -34919,7 +34880,7 @@
         <p:spPr>
           <a:xfrm>
             <a:off x="6504840" y="3198600"/>
-            <a:ext cx="5090760" cy="221400"/>
+            <a:ext cx="5089320" cy="219960"/>
           </a:xfrm>
           <a:prstGeom prst="rect">
             <a:avLst/>
@@ -34971,7 +34932,7 @@
         <p:spPr>
           <a:xfrm>
             <a:off x="6523200" y="3513240"/>
-            <a:ext cx="147240" cy="147240"/>
+            <a:ext cx="145800" cy="145800"/>
           </a:xfrm>
           <a:custGeom>
             <a:avLst/>
@@ -35076,7 +35037,7 @@
         <p:spPr>
           <a:xfrm>
             <a:off x="6764040" y="3494520"/>
-            <a:ext cx="1776600" cy="184320"/>
+            <a:ext cx="1775160" cy="182880"/>
           </a:xfrm>
           <a:prstGeom prst="rect">
             <a:avLst/>
@@ -35128,7 +35089,7 @@
         <p:spPr>
           <a:xfrm>
             <a:off x="6523200" y="3772440"/>
-            <a:ext cx="147240" cy="147240"/>
+            <a:ext cx="145800" cy="145800"/>
           </a:xfrm>
           <a:custGeom>
             <a:avLst/>
@@ -35233,7 +35194,7 @@
         <p:spPr>
           <a:xfrm>
             <a:off x="6764040" y="3753720"/>
-            <a:ext cx="1332360" cy="184320"/>
+            <a:ext cx="1330920" cy="182880"/>
           </a:xfrm>
           <a:prstGeom prst="rect">
             <a:avLst/>
@@ -35285,7 +35246,7 @@
         <p:spPr>
           <a:xfrm>
             <a:off x="6523200" y="4031640"/>
-            <a:ext cx="147240" cy="147240"/>
+            <a:ext cx="145800" cy="145800"/>
           </a:xfrm>
           <a:custGeom>
             <a:avLst/>
@@ -35390,7 +35351,7 @@
         <p:spPr>
           <a:xfrm>
             <a:off x="6764040" y="4012920"/>
-            <a:ext cx="1776600" cy="184320"/>
+            <a:ext cx="1775160" cy="182880"/>
           </a:xfrm>
           <a:prstGeom prst="rect">
             <a:avLst/>
@@ -35442,7 +35403,7 @@
         <p:spPr>
           <a:xfrm>
             <a:off x="6393600" y="4420440"/>
-            <a:ext cx="5239080" cy="888120"/>
+            <a:ext cx="5237640" cy="886680"/>
           </a:xfrm>
           <a:custGeom>
             <a:avLst/>
@@ -35513,7 +35474,7 @@
         <p:spPr>
           <a:xfrm>
             <a:off x="6504840" y="4531320"/>
-            <a:ext cx="5090760" cy="221400"/>
+            <a:ext cx="5089320" cy="219960"/>
           </a:xfrm>
           <a:prstGeom prst="rect">
             <a:avLst/>
@@ -35565,7 +35526,7 @@
         <p:spPr>
           <a:xfrm>
             <a:off x="6504840" y="4827600"/>
-            <a:ext cx="5081760" cy="369720"/>
+            <a:ext cx="5080320" cy="368280"/>
           </a:xfrm>
           <a:prstGeom prst="rect">
             <a:avLst/>
@@ -35637,7 +35598,7 @@
         <p:spPr>
           <a:xfrm>
             <a:off x="374760" y="5582160"/>
-            <a:ext cx="3711600" cy="1267560"/>
+            <a:ext cx="3710160" cy="1266120"/>
           </a:xfrm>
           <a:custGeom>
             <a:avLst/>
@@ -35711,7 +35672,7 @@
         <p:spPr>
           <a:xfrm>
             <a:off x="2091240" y="5734800"/>
-            <a:ext cx="276840" cy="221400"/>
+            <a:ext cx="275400" cy="219960"/>
           </a:xfrm>
           <a:custGeom>
             <a:avLst/>
@@ -35892,7 +35853,7 @@
         <p:spPr>
           <a:xfrm>
             <a:off x="495360" y="6031080"/>
-            <a:ext cx="3470760" cy="184320"/>
+            <a:ext cx="3469320" cy="182880"/>
           </a:xfrm>
           <a:prstGeom prst="rect">
             <a:avLst/>
@@ -35944,7 +35905,7 @@
         <p:spPr>
           <a:xfrm>
             <a:off x="471960" y="6216480"/>
-            <a:ext cx="3517200" cy="295560"/>
+            <a:ext cx="3515760" cy="294120"/>
           </a:xfrm>
           <a:prstGeom prst="rect">
             <a:avLst/>
@@ -35996,7 +35957,7 @@
         <p:spPr>
           <a:xfrm>
             <a:off x="495360" y="6512760"/>
-            <a:ext cx="3470760" cy="184320"/>
+            <a:ext cx="3469320" cy="182880"/>
           </a:xfrm>
           <a:prstGeom prst="rect">
             <a:avLst/>
@@ -36048,7 +36009,7 @@
         <p:spPr>
           <a:xfrm>
             <a:off x="4242600" y="5582160"/>
-            <a:ext cx="3711600" cy="1267560"/>
+            <a:ext cx="3710160" cy="1266120"/>
           </a:xfrm>
           <a:custGeom>
             <a:avLst/>
@@ -36122,7 +36083,7 @@
         <p:spPr>
           <a:xfrm>
             <a:off x="6014160" y="5734800"/>
-            <a:ext cx="165960" cy="221400"/>
+            <a:ext cx="164520" cy="219960"/>
           </a:xfrm>
           <a:custGeom>
             <a:avLst/>
@@ -36233,7 +36194,7 @@
         <p:spPr>
           <a:xfrm>
             <a:off x="4362840" y="6031080"/>
-            <a:ext cx="3470760" cy="184320"/>
+            <a:ext cx="3469320" cy="182880"/>
           </a:xfrm>
           <a:prstGeom prst="rect">
             <a:avLst/>
@@ -36285,7 +36246,7 @@
         <p:spPr>
           <a:xfrm>
             <a:off x="4339800" y="6216480"/>
-            <a:ext cx="3517200" cy="295560"/>
+            <a:ext cx="3515760" cy="294120"/>
           </a:xfrm>
           <a:prstGeom prst="rect">
             <a:avLst/>
@@ -36337,7 +36298,7 @@
         <p:spPr>
           <a:xfrm>
             <a:off x="4362840" y="6512760"/>
-            <a:ext cx="3470760" cy="184320"/>
+            <a:ext cx="3469320" cy="182880"/>
           </a:xfrm>
           <a:prstGeom prst="rect">
             <a:avLst/>
@@ -36389,7 +36350,7 @@
         <p:spPr>
           <a:xfrm>
             <a:off x="8110080" y="5582160"/>
-            <a:ext cx="3711600" cy="1267560"/>
+            <a:ext cx="3710160" cy="1266120"/>
           </a:xfrm>
           <a:custGeom>
             <a:avLst/>
@@ -36463,7 +36424,7 @@
         <p:spPr>
           <a:xfrm>
             <a:off x="9826200" y="5734800"/>
-            <a:ext cx="276840" cy="221400"/>
+            <a:ext cx="275400" cy="219960"/>
           </a:xfrm>
           <a:custGeom>
             <a:avLst/>
@@ -36751,7 +36712,7 @@
         <p:spPr>
           <a:xfrm>
             <a:off x="8230320" y="6031080"/>
-            <a:ext cx="3470760" cy="184320"/>
+            <a:ext cx="3469320" cy="182880"/>
           </a:xfrm>
           <a:prstGeom prst="rect">
             <a:avLst/>
@@ -36803,7 +36764,7 @@
         <p:spPr>
           <a:xfrm>
             <a:off x="8207280" y="6216480"/>
-            <a:ext cx="3517200" cy="295560"/>
+            <a:ext cx="3515760" cy="294120"/>
           </a:xfrm>
           <a:prstGeom prst="rect">
             <a:avLst/>
@@ -36855,7 +36816,7 @@
         <p:spPr>
           <a:xfrm>
             <a:off x="8230320" y="6512760"/>
-            <a:ext cx="3470760" cy="184320"/>
+            <a:ext cx="3469320" cy="182880"/>
           </a:xfrm>
           <a:prstGeom prst="rect">
             <a:avLst/>
@@ -36944,7 +36905,7 @@
         <p:spPr>
           <a:xfrm>
             <a:off x="0" y="0"/>
-            <a:ext cx="12191400" cy="6857640"/>
+            <a:ext cx="12189960" cy="6856200"/>
           </a:xfrm>
           <a:prstGeom prst="roundRect">
             <a:avLst>
@@ -36976,7 +36937,7 @@
         <p:spPr>
           <a:xfrm>
             <a:off x="0" y="0"/>
-            <a:ext cx="12191400" cy="6857640"/>
+            <a:ext cx="12189960" cy="6856200"/>
           </a:xfrm>
           <a:custGeom>
             <a:avLst/>
@@ -37039,7 +37000,7 @@
         <p:spPr>
           <a:xfrm>
             <a:off x="344520" y="344520"/>
-            <a:ext cx="11562120" cy="171720"/>
+            <a:ext cx="11560680" cy="170280"/>
           </a:xfrm>
           <a:prstGeom prst="rect">
             <a:avLst/>
@@ -37067,7 +37028,7 @@
               <a:buNone/>
             </a:pPr>
             <a:r>
-              <a:rPr b="1" lang="en-US" sz="950" spc="43" strike="noStrike">
+              <a:rPr b="1" lang="en-US" sz="950" spc="32" strike="noStrike">
                 <a:solidFill>
                   <a:srgbClr val="6366f1"/>
                 </a:solidFill>
@@ -37091,7 +37052,7 @@
         <p:spPr>
           <a:xfrm>
             <a:off x="344520" y="586080"/>
-            <a:ext cx="11657160" cy="343800"/>
+            <a:ext cx="11655720" cy="342360"/>
           </a:xfrm>
           <a:prstGeom prst="rect">
             <a:avLst/>
@@ -37143,7 +37104,7 @@
         <p:spPr>
           <a:xfrm>
             <a:off x="344520" y="999360"/>
-            <a:ext cx="11570760" cy="205920"/>
+            <a:ext cx="11569320" cy="204480"/>
           </a:xfrm>
           <a:prstGeom prst="rect">
             <a:avLst/>
@@ -37195,7 +37156,7 @@
         <p:spPr>
           <a:xfrm>
             <a:off x="348840" y="1348560"/>
-            <a:ext cx="5677560" cy="2765160"/>
+            <a:ext cx="5676120" cy="2763720"/>
           </a:xfrm>
           <a:custGeom>
             <a:avLst/>
@@ -37271,7 +37232,7 @@
         <p:spPr>
           <a:xfrm>
             <a:off x="525600" y="1524960"/>
-            <a:ext cx="412920" cy="412920"/>
+            <a:ext cx="411480" cy="411480"/>
           </a:xfrm>
           <a:custGeom>
             <a:avLst/>
@@ -37344,7 +37305,7 @@
         <p:spPr>
           <a:xfrm>
             <a:off x="635400" y="1645560"/>
-            <a:ext cx="193320" cy="171720"/>
+            <a:ext cx="191880" cy="170280"/>
           </a:xfrm>
           <a:custGeom>
             <a:avLst/>
@@ -37469,7 +37430,7 @@
         <p:spPr>
           <a:xfrm>
             <a:off x="1042560" y="1611360"/>
-            <a:ext cx="1506960" cy="240480"/>
+            <a:ext cx="1505520" cy="239040"/>
           </a:xfrm>
           <a:prstGeom prst="rect">
             <a:avLst/>
@@ -37521,7 +37482,7 @@
         <p:spPr>
           <a:xfrm>
             <a:off x="525600" y="2076480"/>
-            <a:ext cx="5324040" cy="550800"/>
+            <a:ext cx="5322600" cy="549360"/>
           </a:xfrm>
           <a:custGeom>
             <a:avLst/>
@@ -37592,7 +37553,7 @@
         <p:spPr>
           <a:xfrm>
             <a:off x="654840" y="2214360"/>
-            <a:ext cx="119880" cy="137160"/>
+            <a:ext cx="118440" cy="135720"/>
           </a:xfrm>
           <a:custGeom>
             <a:avLst/>
@@ -37747,7 +37708,7 @@
         <p:spPr>
           <a:xfrm>
             <a:off x="904680" y="2179800"/>
-            <a:ext cx="3264840" cy="171720"/>
+            <a:ext cx="3263400" cy="170280"/>
           </a:xfrm>
           <a:prstGeom prst="rect">
             <a:avLst/>
@@ -37799,7 +37760,7 @@
         <p:spPr>
           <a:xfrm>
             <a:off x="904680" y="2352240"/>
-            <a:ext cx="3264840" cy="171720"/>
+            <a:ext cx="3263400" cy="170280"/>
           </a:xfrm>
           <a:prstGeom prst="rect">
             <a:avLst/>
@@ -37851,7 +37812,7 @@
         <p:spPr>
           <a:xfrm>
             <a:off x="525600" y="2731320"/>
-            <a:ext cx="5324040" cy="550800"/>
+            <a:ext cx="5322600" cy="549360"/>
           </a:xfrm>
           <a:custGeom>
             <a:avLst/>
@@ -37922,7 +37883,7 @@
         <p:spPr>
           <a:xfrm>
             <a:off x="646200" y="2869200"/>
-            <a:ext cx="137160" cy="137160"/>
+            <a:ext cx="135720" cy="135720"/>
           </a:xfrm>
           <a:custGeom>
             <a:avLst/>
@@ -38072,7 +38033,7 @@
         <p:spPr>
           <a:xfrm>
             <a:off x="904680" y="2834640"/>
-            <a:ext cx="3170160" cy="171720"/>
+            <a:ext cx="3168720" cy="170280"/>
           </a:xfrm>
           <a:prstGeom prst="rect">
             <a:avLst/>
@@ -38124,7 +38085,7 @@
         <p:spPr>
           <a:xfrm>
             <a:off x="904680" y="3007080"/>
-            <a:ext cx="3170160" cy="171720"/>
+            <a:ext cx="3168720" cy="170280"/>
           </a:xfrm>
           <a:prstGeom prst="rect">
             <a:avLst/>
@@ -38176,7 +38137,7 @@
         <p:spPr>
           <a:xfrm>
             <a:off x="525600" y="3386160"/>
-            <a:ext cx="5324040" cy="550800"/>
+            <a:ext cx="5322600" cy="549360"/>
           </a:xfrm>
           <a:custGeom>
             <a:avLst/>
@@ -38247,7 +38208,7 @@
         <p:spPr>
           <a:xfrm>
             <a:off x="637560" y="3524040"/>
-            <a:ext cx="154440" cy="137160"/>
+            <a:ext cx="153000" cy="135720"/>
           </a:xfrm>
           <a:custGeom>
             <a:avLst/>
@@ -38354,7 +38315,7 @@
         <p:spPr>
           <a:xfrm>
             <a:off x="904680" y="3489480"/>
-            <a:ext cx="2808000" cy="171720"/>
+            <a:ext cx="2806560" cy="170280"/>
           </a:xfrm>
           <a:prstGeom prst="rect">
             <a:avLst/>
@@ -38406,7 +38367,7 @@
         <p:spPr>
           <a:xfrm>
             <a:off x="904680" y="3661920"/>
-            <a:ext cx="2808000" cy="171720"/>
+            <a:ext cx="2806560" cy="170280"/>
           </a:xfrm>
           <a:prstGeom prst="rect">
             <a:avLst/>
@@ -38458,7 +38419,7 @@
         <p:spPr>
           <a:xfrm>
             <a:off x="6169680" y="1348560"/>
-            <a:ext cx="5677560" cy="2765160"/>
+            <a:ext cx="5676120" cy="2763720"/>
           </a:xfrm>
           <a:custGeom>
             <a:avLst/>
@@ -38534,7 +38495,7 @@
         <p:spPr>
           <a:xfrm>
             <a:off x="6346440" y="1524960"/>
-            <a:ext cx="412920" cy="412920"/>
+            <a:ext cx="411480" cy="411480"/>
           </a:xfrm>
           <a:custGeom>
             <a:avLst/>
@@ -38607,7 +38568,7 @@
         <p:spPr>
           <a:xfrm>
             <a:off x="6445440" y="1645560"/>
-            <a:ext cx="214560" cy="171720"/>
+            <a:ext cx="213120" cy="170280"/>
           </a:xfrm>
           <a:custGeom>
             <a:avLst/>
@@ -38788,7 +38749,7 @@
         <p:spPr>
           <a:xfrm>
             <a:off x="6863400" y="1611360"/>
-            <a:ext cx="1179720" cy="240480"/>
+            <a:ext cx="1178280" cy="239040"/>
           </a:xfrm>
           <a:prstGeom prst="rect">
             <a:avLst/>
@@ -38840,7 +38801,7 @@
         <p:spPr>
           <a:xfrm>
             <a:off x="6346440" y="2076480"/>
-            <a:ext cx="5324040" cy="550800"/>
+            <a:ext cx="5322600" cy="549360"/>
           </a:xfrm>
           <a:custGeom>
             <a:avLst/>
@@ -38911,7 +38872,7 @@
         <p:spPr>
           <a:xfrm>
             <a:off x="6475680" y="2214360"/>
-            <a:ext cx="119880" cy="137160"/>
+            <a:ext cx="118440" cy="135720"/>
           </a:xfrm>
           <a:custGeom>
             <a:avLst/>
@@ -39008,7 +38969,7 @@
         <p:spPr>
           <a:xfrm>
             <a:off x="6725520" y="2179800"/>
-            <a:ext cx="2799720" cy="171720"/>
+            <a:ext cx="2798280" cy="170280"/>
           </a:xfrm>
           <a:prstGeom prst="rect">
             <a:avLst/>
@@ -39060,7 +39021,7 @@
         <p:spPr>
           <a:xfrm>
             <a:off x="6725520" y="2352240"/>
-            <a:ext cx="2799720" cy="171720"/>
+            <a:ext cx="2798280" cy="170280"/>
           </a:xfrm>
           <a:prstGeom prst="rect">
             <a:avLst/>
@@ -39112,7 +39073,7 @@
         <p:spPr>
           <a:xfrm>
             <a:off x="6346440" y="2731320"/>
-            <a:ext cx="5324040" cy="550800"/>
+            <a:ext cx="5322600" cy="549360"/>
           </a:xfrm>
           <a:custGeom>
             <a:avLst/>
@@ -39183,7 +39144,7 @@
         <p:spPr>
           <a:xfrm>
             <a:off x="6449760" y="2869200"/>
-            <a:ext cx="171720" cy="137160"/>
+            <a:ext cx="170280" cy="135720"/>
           </a:xfrm>
           <a:custGeom>
             <a:avLst/>
@@ -39399,7 +39360,7 @@
         <p:spPr>
           <a:xfrm>
             <a:off x="6725520" y="2834640"/>
-            <a:ext cx="2877120" cy="171720"/>
+            <a:ext cx="2875680" cy="170280"/>
           </a:xfrm>
           <a:prstGeom prst="rect">
             <a:avLst/>
@@ -39451,7 +39412,7 @@
         <p:spPr>
           <a:xfrm>
             <a:off x="6725520" y="3007080"/>
-            <a:ext cx="2877120" cy="171720"/>
+            <a:ext cx="2875680" cy="170280"/>
           </a:xfrm>
           <a:prstGeom prst="rect">
             <a:avLst/>
@@ -39503,7 +39464,7 @@
         <p:spPr>
           <a:xfrm>
             <a:off x="6346440" y="3386160"/>
-            <a:ext cx="5324040" cy="550800"/>
+            <a:ext cx="5322600" cy="549360"/>
           </a:xfrm>
           <a:custGeom>
             <a:avLst/>
@@ -39574,7 +39535,7 @@
         <p:spPr>
           <a:xfrm>
             <a:off x="6467040" y="3524040"/>
-            <a:ext cx="137160" cy="137160"/>
+            <a:ext cx="135720" cy="135720"/>
           </a:xfrm>
           <a:custGeom>
             <a:avLst/>
@@ -39707,7 +39668,7 @@
         <p:spPr>
           <a:xfrm>
             <a:off x="6725520" y="3489480"/>
-            <a:ext cx="2437560" cy="171720"/>
+            <a:ext cx="2436120" cy="170280"/>
           </a:xfrm>
           <a:prstGeom prst="rect">
             <a:avLst/>
@@ -39759,7 +39720,7 @@
         <p:spPr>
           <a:xfrm>
             <a:off x="6725520" y="3661920"/>
-            <a:ext cx="2437560" cy="171720"/>
+            <a:ext cx="2436120" cy="170280"/>
           </a:xfrm>
           <a:prstGeom prst="rect">
             <a:avLst/>
@@ -39811,7 +39772,7 @@
         <p:spPr>
           <a:xfrm>
             <a:off x="348840" y="4260600"/>
-            <a:ext cx="5677560" cy="2592720"/>
+            <a:ext cx="5676120" cy="2591280"/>
           </a:xfrm>
           <a:custGeom>
             <a:avLst/>
@@ -39887,7 +39848,7 @@
         <p:spPr>
           <a:xfrm>
             <a:off x="525600" y="4437360"/>
-            <a:ext cx="412920" cy="412920"/>
+            <a:ext cx="411480" cy="411480"/>
           </a:xfrm>
           <a:custGeom>
             <a:avLst/>
@@ -39960,7 +39921,7 @@
         <p:spPr>
           <a:xfrm>
             <a:off x="646200" y="4557960"/>
-            <a:ext cx="171720" cy="171720"/>
+            <a:ext cx="170280" cy="170280"/>
           </a:xfrm>
           <a:custGeom>
             <a:avLst/>
@@ -40183,7 +40144,7 @@
         <p:spPr>
           <a:xfrm>
             <a:off x="1042560" y="4523400"/>
-            <a:ext cx="1644840" cy="240480"/>
+            <a:ext cx="1643400" cy="239040"/>
           </a:xfrm>
           <a:prstGeom prst="rect">
             <a:avLst/>
@@ -40235,7 +40196,7 @@
         <p:spPr>
           <a:xfrm>
             <a:off x="525600" y="4988880"/>
-            <a:ext cx="5324040" cy="619560"/>
+            <a:ext cx="5322600" cy="618120"/>
           </a:xfrm>
           <a:custGeom>
             <a:avLst/>
@@ -40306,7 +40267,7 @@
         <p:spPr>
           <a:xfrm>
             <a:off x="628920" y="5092200"/>
-            <a:ext cx="5177520" cy="171720"/>
+            <a:ext cx="5176080" cy="170280"/>
           </a:xfrm>
           <a:prstGeom prst="rect">
             <a:avLst/>
@@ -40358,7 +40319,7 @@
         <p:spPr>
           <a:xfrm>
             <a:off x="628920" y="5333400"/>
-            <a:ext cx="5177520" cy="171720"/>
+            <a:ext cx="5176080" cy="170280"/>
           </a:xfrm>
           <a:prstGeom prst="rect">
             <a:avLst/>
@@ -40410,7 +40371,7 @@
         <p:spPr>
           <a:xfrm>
             <a:off x="525600" y="5712480"/>
-            <a:ext cx="2610000" cy="619560"/>
+            <a:ext cx="2608560" cy="618120"/>
           </a:xfrm>
           <a:custGeom>
             <a:avLst/>
@@ -40481,7 +40442,7 @@
         <p:spPr>
           <a:xfrm>
             <a:off x="577440" y="5815800"/>
-            <a:ext cx="2506680" cy="275040"/>
+            <a:ext cx="2505240" cy="273600"/>
           </a:xfrm>
           <a:prstGeom prst="rect">
             <a:avLst/>
@@ -40533,7 +40494,7 @@
         <p:spPr>
           <a:xfrm>
             <a:off x="603000" y="6091560"/>
-            <a:ext cx="2454840" cy="137160"/>
+            <a:ext cx="2453400" cy="135720"/>
           </a:xfrm>
           <a:prstGeom prst="rect">
             <a:avLst/>
@@ -40585,7 +40546,7 @@
         <p:spPr>
           <a:xfrm>
             <a:off x="3237840" y="5712480"/>
-            <a:ext cx="2610000" cy="619560"/>
+            <a:ext cx="2608560" cy="618120"/>
           </a:xfrm>
           <a:custGeom>
             <a:avLst/>
@@ -40656,7 +40617,7 @@
         <p:spPr>
           <a:xfrm>
             <a:off x="3289320" y="5815800"/>
-            <a:ext cx="2506680" cy="275040"/>
+            <a:ext cx="2505240" cy="273600"/>
           </a:xfrm>
           <a:prstGeom prst="rect">
             <a:avLst/>
@@ -40708,7 +40669,7 @@
         <p:spPr>
           <a:xfrm>
             <a:off x="3315240" y="6091560"/>
-            <a:ext cx="2454840" cy="137160"/>
+            <a:ext cx="2453400" cy="135720"/>
           </a:xfrm>
           <a:prstGeom prst="rect">
             <a:avLst/>
@@ -40760,7 +40721,7 @@
         <p:spPr>
           <a:xfrm>
             <a:off x="6169680" y="4260600"/>
-            <a:ext cx="5677560" cy="2592720"/>
+            <a:ext cx="5676120" cy="2591280"/>
           </a:xfrm>
           <a:custGeom>
             <a:avLst/>
@@ -40836,7 +40797,7 @@
         <p:spPr>
           <a:xfrm>
             <a:off x="6346440" y="4437360"/>
-            <a:ext cx="412920" cy="412920"/>
+            <a:ext cx="411480" cy="411480"/>
           </a:xfrm>
           <a:custGeom>
             <a:avLst/>
@@ -40909,7 +40870,7 @@
         <p:spPr>
           <a:xfrm>
             <a:off x="6467040" y="4557960"/>
-            <a:ext cx="171720" cy="171720"/>
+            <a:ext cx="170280" cy="170280"/>
           </a:xfrm>
           <a:custGeom>
             <a:avLst/>
@@ -41012,7 +40973,7 @@
         <p:spPr>
           <a:xfrm>
             <a:off x="6863400" y="4523400"/>
-            <a:ext cx="1386360" cy="240480"/>
+            <a:ext cx="1384920" cy="239040"/>
           </a:xfrm>
           <a:prstGeom prst="rect">
             <a:avLst/>
@@ -41064,7 +41025,7 @@
         <p:spPr>
           <a:xfrm>
             <a:off x="6346440" y="4988880"/>
-            <a:ext cx="5324040" cy="792000"/>
+            <a:ext cx="5322600" cy="790560"/>
           </a:xfrm>
           <a:custGeom>
             <a:avLst/>
@@ -41135,7 +41096,7 @@
         <p:spPr>
           <a:xfrm>
             <a:off x="6467040" y="5109480"/>
-            <a:ext cx="137160" cy="137160"/>
+            <a:ext cx="135720" cy="135720"/>
           </a:xfrm>
           <a:custGeom>
             <a:avLst/>
@@ -41312,7 +41273,7 @@
         <p:spPr>
           <a:xfrm>
             <a:off x="6690960" y="5092200"/>
-            <a:ext cx="1739880" cy="171720"/>
+            <a:ext cx="1738440" cy="170280"/>
           </a:xfrm>
           <a:prstGeom prst="rect">
             <a:avLst/>
@@ -41364,7 +41325,7 @@
         <p:spPr>
           <a:xfrm>
             <a:off x="6449760" y="5333400"/>
-            <a:ext cx="5177520" cy="343800"/>
+            <a:ext cx="5176080" cy="342360"/>
           </a:xfrm>
           <a:prstGeom prst="rect">
             <a:avLst/>
@@ -41416,7 +41377,7 @@
         <p:spPr>
           <a:xfrm>
             <a:off x="6346440" y="5884920"/>
-            <a:ext cx="5324040" cy="792000"/>
+            <a:ext cx="5322600" cy="790560"/>
           </a:xfrm>
           <a:custGeom>
             <a:avLst/>
@@ -41487,7 +41448,7 @@
         <p:spPr>
           <a:xfrm>
             <a:off x="6449760" y="5988240"/>
-            <a:ext cx="5177520" cy="171720"/>
+            <a:ext cx="5176080" cy="170280"/>
           </a:xfrm>
           <a:prstGeom prst="rect">
             <a:avLst/>
@@ -41539,7 +41500,7 @@
         <p:spPr>
           <a:xfrm>
             <a:off x="6449760" y="6229440"/>
-            <a:ext cx="5177520" cy="343800"/>
+            <a:ext cx="5176080" cy="342360"/>
           </a:xfrm>
           <a:prstGeom prst="rect">
             <a:avLst/>

--- a/assets/libreoffice_impr_njc/d6ba6b61-5ce3-46c0-90c0-f635d3a1a8eb/Tencent Holdings Limited - 2025 Interim Report.pptx
+++ b/assets/libreoffice_impr_njc/d6ba6b61-5ce3-46c0-90c0-f635d3a1a8eb/Tencent Holdings Limited - 2025 Interim Report.pptx
@@ -118,19 +118,7 @@
               <a:rPr b="0" lang="en-HK" sz="2000" spc="-1" strike="noStrike">
                 <a:latin typeface="Arial"/>
               </a:rPr>
-              <a:t>Click to edit </a:t>
-            </a:r>
-            <a:r>
-              <a:rPr b="0" lang="en-HK" sz="2000" spc="-1" strike="noStrike">
-                <a:latin typeface="Arial"/>
-              </a:rPr>
-              <a:t>the notes </a:t>
-            </a:r>
-            <a:r>
-              <a:rPr b="0" lang="en-HK" sz="2000" spc="-1" strike="noStrike">
-                <a:latin typeface="Arial"/>
-              </a:rPr>
-              <a:t>format</a:t>
+              <a:t>Click to edit the notes format</a:t>
             </a:r>
             <a:endParaRPr b="0" lang="en-HK" sz="2000" spc="-1" strike="noStrike">
               <a:latin typeface="Arial"/>
@@ -315,7 +303,7 @@
             <a:pPr algn="r">
               <a:buNone/>
             </a:pPr>
-            <a:fld id="{EDCE77B1-C971-4F5D-AAE8-FB677A96CD8B}" type="slidenum">
+            <a:fld id="{4612FA19-D787-4806-B6C5-D40AF2B52FF8}" type="slidenum">
               <a:rPr b="0" lang="en-HK" sz="1400" spc="-1" strike="noStrike">
                 <a:latin typeface="Times New Roman"/>
               </a:rPr>
@@ -363,7 +351,7 @@
         <p:spPr>
           <a:xfrm>
             <a:off x="685800" y="1143000"/>
-            <a:ext cx="5484240" cy="3084120"/>
+            <a:ext cx="5483880" cy="3083760"/>
           </a:xfrm>
           <a:prstGeom prst="rect">
             <a:avLst/>
@@ -386,7 +374,7 @@
         <p:spPr>
           <a:xfrm>
             <a:off x="685800" y="4400640"/>
-            <a:ext cx="5484240" cy="3598200"/>
+            <a:ext cx="5483880" cy="3597840"/>
           </a:xfrm>
           <a:prstGeom prst="rect">
             <a:avLst/>
@@ -420,7 +408,7 @@
         <p:spPr>
           <a:xfrm>
             <a:off x="3884760" y="8685360"/>
-            <a:ext cx="2969640" cy="456480"/>
+            <a:ext cx="2969280" cy="456120"/>
           </a:xfrm>
           <a:prstGeom prst="rect">
             <a:avLst/>
@@ -452,7 +440,7 @@
               </a:lnSpc>
               <a:buNone/>
             </a:pPr>
-            <a:fld id="{B53120F8-1F4A-4088-8B45-180D631CC90E}" type="slidenum">
+            <a:fld id="{DF080EB4-AC59-4859-9E9B-B654929638A1}" type="slidenum">
               <a:rPr b="0" lang="en-US" sz="1200" spc="-1" strike="noStrike">
                 <a:latin typeface="Times New Roman"/>
               </a:rPr>
@@ -499,7 +487,7 @@
         <p:spPr>
           <a:xfrm>
             <a:off x="685800" y="1143000"/>
-            <a:ext cx="5484240" cy="3084120"/>
+            <a:ext cx="5483880" cy="3083760"/>
           </a:xfrm>
           <a:prstGeom prst="rect">
             <a:avLst/>
@@ -522,7 +510,7 @@
         <p:spPr>
           <a:xfrm>
             <a:off x="685800" y="4400640"/>
-            <a:ext cx="5484240" cy="3598200"/>
+            <a:ext cx="5483880" cy="3597840"/>
           </a:xfrm>
           <a:prstGeom prst="rect">
             <a:avLst/>
@@ -556,7 +544,7 @@
         <p:spPr>
           <a:xfrm>
             <a:off x="3884760" y="8685360"/>
-            <a:ext cx="2969640" cy="456480"/>
+            <a:ext cx="2969280" cy="456120"/>
           </a:xfrm>
           <a:prstGeom prst="rect">
             <a:avLst/>
@@ -588,7 +576,7 @@
               </a:lnSpc>
               <a:buNone/>
             </a:pPr>
-            <a:fld id="{B02DD3B6-984C-4682-B8A8-FB48787FE8C1}" type="slidenum">
+            <a:fld id="{0DACE583-959D-43AD-8B4E-7D23B11F9005}" type="slidenum">
               <a:rPr b="0" lang="en-US" sz="1200" spc="-1" strike="noStrike">
                 <a:latin typeface="Times New Roman"/>
               </a:rPr>
@@ -635,7 +623,7 @@
         <p:spPr>
           <a:xfrm>
             <a:off x="685800" y="1143000"/>
-            <a:ext cx="5484240" cy="3084120"/>
+            <a:ext cx="5483880" cy="3083760"/>
           </a:xfrm>
           <a:prstGeom prst="rect">
             <a:avLst/>
@@ -658,7 +646,7 @@
         <p:spPr>
           <a:xfrm>
             <a:off x="685800" y="4400640"/>
-            <a:ext cx="5484240" cy="3598200"/>
+            <a:ext cx="5483880" cy="3597840"/>
           </a:xfrm>
           <a:prstGeom prst="rect">
             <a:avLst/>
@@ -692,7 +680,7 @@
         <p:spPr>
           <a:xfrm>
             <a:off x="3884760" y="8685360"/>
-            <a:ext cx="2969640" cy="456480"/>
+            <a:ext cx="2969280" cy="456120"/>
           </a:xfrm>
           <a:prstGeom prst="rect">
             <a:avLst/>
@@ -724,7 +712,7 @@
               </a:lnSpc>
               <a:buNone/>
             </a:pPr>
-            <a:fld id="{F38FD578-CD2E-404E-973D-8229B0F0DCA6}" type="slidenum">
+            <a:fld id="{13943423-B309-4276-B7F7-5BCE99C058A2}" type="slidenum">
               <a:rPr b="0" lang="en-US" sz="1200" spc="-1" strike="noStrike">
                 <a:latin typeface="Times New Roman"/>
               </a:rPr>
@@ -771,7 +759,7 @@
         <p:spPr>
           <a:xfrm>
             <a:off x="685800" y="1143000"/>
-            <a:ext cx="5484240" cy="3084120"/>
+            <a:ext cx="5483880" cy="3083760"/>
           </a:xfrm>
           <a:prstGeom prst="rect">
             <a:avLst/>
@@ -794,7 +782,7 @@
         <p:spPr>
           <a:xfrm>
             <a:off x="685800" y="4400640"/>
-            <a:ext cx="5484240" cy="3598200"/>
+            <a:ext cx="5483880" cy="3597840"/>
           </a:xfrm>
           <a:prstGeom prst="rect">
             <a:avLst/>
@@ -828,7 +816,7 @@
         <p:spPr>
           <a:xfrm>
             <a:off x="3884760" y="8685360"/>
-            <a:ext cx="2969640" cy="456480"/>
+            <a:ext cx="2969280" cy="456120"/>
           </a:xfrm>
           <a:prstGeom prst="rect">
             <a:avLst/>
@@ -860,7 +848,7 @@
               </a:lnSpc>
               <a:buNone/>
             </a:pPr>
-            <a:fld id="{53AC3357-066F-4B58-8BBF-C3DB6CFB7421}" type="slidenum">
+            <a:fld id="{0D5FE24B-3E7B-4D12-9961-4B2A41F0EA95}" type="slidenum">
               <a:rPr b="0" lang="en-US" sz="1200" spc="-1" strike="noStrike">
                 <a:latin typeface="Times New Roman"/>
               </a:rPr>
@@ -907,7 +895,7 @@
         <p:spPr>
           <a:xfrm>
             <a:off x="685800" y="1143000"/>
-            <a:ext cx="5484240" cy="3084120"/>
+            <a:ext cx="5483880" cy="3083760"/>
           </a:xfrm>
           <a:prstGeom prst="rect">
             <a:avLst/>
@@ -930,7 +918,7 @@
         <p:spPr>
           <a:xfrm>
             <a:off x="685800" y="4400640"/>
-            <a:ext cx="5484240" cy="3598200"/>
+            <a:ext cx="5483880" cy="3597840"/>
           </a:xfrm>
           <a:prstGeom prst="rect">
             <a:avLst/>
@@ -964,7 +952,7 @@
         <p:spPr>
           <a:xfrm>
             <a:off x="3884760" y="8685360"/>
-            <a:ext cx="2969640" cy="456480"/>
+            <a:ext cx="2969280" cy="456120"/>
           </a:xfrm>
           <a:prstGeom prst="rect">
             <a:avLst/>
@@ -996,7 +984,7 @@
               </a:lnSpc>
               <a:buNone/>
             </a:pPr>
-            <a:fld id="{611A111C-B279-43E8-B0AE-2BA9E1CEDA50}" type="slidenum">
+            <a:fld id="{F320CB1A-6242-4BF0-8661-97031681E781}" type="slidenum">
               <a:rPr b="0" lang="en-US" sz="1200" spc="-1" strike="noStrike">
                 <a:latin typeface="Times New Roman"/>
               </a:rPr>
@@ -1043,7 +1031,7 @@
         <p:spPr>
           <a:xfrm>
             <a:off x="685800" y="1143000"/>
-            <a:ext cx="5484240" cy="3084120"/>
+            <a:ext cx="5483880" cy="3083760"/>
           </a:xfrm>
           <a:prstGeom prst="rect">
             <a:avLst/>
@@ -1066,7 +1054,7 @@
         <p:spPr>
           <a:xfrm>
             <a:off x="685800" y="4400640"/>
-            <a:ext cx="5484240" cy="3598200"/>
+            <a:ext cx="5483880" cy="3597840"/>
           </a:xfrm>
           <a:prstGeom prst="rect">
             <a:avLst/>
@@ -1115,7 +1103,7 @@
         <p:spPr>
           <a:xfrm>
             <a:off x="3884760" y="8685360"/>
-            <a:ext cx="2969640" cy="456480"/>
+            <a:ext cx="2969280" cy="456120"/>
           </a:xfrm>
           <a:prstGeom prst="rect">
             <a:avLst/>
@@ -1147,7 +1135,7 @@
               </a:lnSpc>
               <a:buNone/>
             </a:pPr>
-            <a:fld id="{E0C0E2BC-D2BD-408C-B272-AA08FB178C2E}" type="slidenum">
+            <a:fld id="{CA5502B0-7377-4D4B-B39C-505923BA1FB3}" type="slidenum">
               <a:rPr b="0" lang="en-US" sz="1200" spc="-1" strike="noStrike">
                 <a:latin typeface="Times New Roman"/>
               </a:rPr>
@@ -1194,7 +1182,7 @@
         <p:spPr>
           <a:xfrm>
             <a:off x="685800" y="1143000"/>
-            <a:ext cx="5484240" cy="3084120"/>
+            <a:ext cx="5483880" cy="3083760"/>
           </a:xfrm>
           <a:prstGeom prst="rect">
             <a:avLst/>
@@ -1217,7 +1205,7 @@
         <p:spPr>
           <a:xfrm>
             <a:off x="685800" y="4400640"/>
-            <a:ext cx="5484240" cy="3598200"/>
+            <a:ext cx="5483880" cy="3597840"/>
           </a:xfrm>
           <a:prstGeom prst="rect">
             <a:avLst/>
@@ -1251,7 +1239,7 @@
         <p:spPr>
           <a:xfrm>
             <a:off x="3884760" y="8685360"/>
-            <a:ext cx="2969640" cy="456480"/>
+            <a:ext cx="2969280" cy="456120"/>
           </a:xfrm>
           <a:prstGeom prst="rect">
             <a:avLst/>
@@ -1283,7 +1271,7 @@
               </a:lnSpc>
               <a:buNone/>
             </a:pPr>
-            <a:fld id="{50CF1DBD-2215-42D6-9F90-D1470F61084B}" type="slidenum">
+            <a:fld id="{FB392BE4-AC4B-405F-B350-28FE37846C00}" type="slidenum">
               <a:rPr b="0" lang="en-US" sz="1200" spc="-1" strike="noStrike">
                 <a:latin typeface="Times New Roman"/>
               </a:rPr>
@@ -1330,7 +1318,7 @@
         <p:spPr>
           <a:xfrm>
             <a:off x="685800" y="1143000"/>
-            <a:ext cx="5484240" cy="3084120"/>
+            <a:ext cx="5483880" cy="3083760"/>
           </a:xfrm>
           <a:prstGeom prst="rect">
             <a:avLst/>
@@ -1353,7 +1341,7 @@
         <p:spPr>
           <a:xfrm>
             <a:off x="685800" y="4400640"/>
-            <a:ext cx="5484240" cy="3598200"/>
+            <a:ext cx="5483880" cy="3597840"/>
           </a:xfrm>
           <a:prstGeom prst="rect">
             <a:avLst/>
@@ -1387,7 +1375,7 @@
         <p:spPr>
           <a:xfrm>
             <a:off x="3884760" y="8685360"/>
-            <a:ext cx="2969640" cy="456480"/>
+            <a:ext cx="2969280" cy="456120"/>
           </a:xfrm>
           <a:prstGeom prst="rect">
             <a:avLst/>
@@ -1419,7 +1407,7 @@
               </a:lnSpc>
               <a:buNone/>
             </a:pPr>
-            <a:fld id="{E13946DD-1C37-4C62-BAE3-2C996B683A52}" type="slidenum">
+            <a:fld id="{6B20CE03-1267-4EDE-B11A-E4CCCA88216C}" type="slidenum">
               <a:rPr b="0" lang="en-US" sz="1200" spc="-1" strike="noStrike">
                 <a:latin typeface="Times New Roman"/>
               </a:rPr>
@@ -1466,7 +1454,7 @@
         <p:spPr>
           <a:xfrm>
             <a:off x="685800" y="1143000"/>
-            <a:ext cx="5484240" cy="3084120"/>
+            <a:ext cx="5483880" cy="3083760"/>
           </a:xfrm>
           <a:prstGeom prst="rect">
             <a:avLst/>
@@ -1489,7 +1477,7 @@
         <p:spPr>
           <a:xfrm>
             <a:off x="685800" y="4400640"/>
-            <a:ext cx="5484240" cy="3598200"/>
+            <a:ext cx="5483880" cy="3597840"/>
           </a:xfrm>
           <a:prstGeom prst="rect">
             <a:avLst/>
@@ -1523,7 +1511,7 @@
         <p:spPr>
           <a:xfrm>
             <a:off x="3884760" y="8685360"/>
-            <a:ext cx="2969640" cy="456480"/>
+            <a:ext cx="2969280" cy="456120"/>
           </a:xfrm>
           <a:prstGeom prst="rect">
             <a:avLst/>
@@ -1555,7 +1543,7 @@
               </a:lnSpc>
               <a:buNone/>
             </a:pPr>
-            <a:fld id="{ACF3C0C5-DE02-4C90-9EC3-12F239F9193A}" type="slidenum">
+            <a:fld id="{D4C8C8E6-070F-490F-AEA2-2CBF279B9485}" type="slidenum">
               <a:rPr b="0" lang="en-US" sz="1200" spc="-1" strike="noStrike">
                 <a:latin typeface="Times New Roman"/>
               </a:rPr>
@@ -1602,7 +1590,7 @@
         <p:spPr>
           <a:xfrm>
             <a:off x="685800" y="1143000"/>
-            <a:ext cx="5484240" cy="3084120"/>
+            <a:ext cx="5483880" cy="3083760"/>
           </a:xfrm>
           <a:prstGeom prst="rect">
             <a:avLst/>
@@ -1625,7 +1613,7 @@
         <p:spPr>
           <a:xfrm>
             <a:off x="685800" y="4400640"/>
-            <a:ext cx="5484240" cy="3598200"/>
+            <a:ext cx="5483880" cy="3597840"/>
           </a:xfrm>
           <a:prstGeom prst="rect">
             <a:avLst/>
@@ -1659,7 +1647,7 @@
         <p:spPr>
           <a:xfrm>
             <a:off x="3884760" y="8685360"/>
-            <a:ext cx="2969640" cy="456480"/>
+            <a:ext cx="2969280" cy="456120"/>
           </a:xfrm>
           <a:prstGeom prst="rect">
             <a:avLst/>
@@ -1691,7 +1679,7 @@
               </a:lnSpc>
               <a:buNone/>
             </a:pPr>
-            <a:fld id="{47CC4896-F137-4F61-8A9C-EB89A35390AA}" type="slidenum">
+            <a:fld id="{BF7BDB54-5F72-4881-8692-793506DB30F0}" type="slidenum">
               <a:rPr b="0" lang="en-US" sz="1200" spc="-1" strike="noStrike">
                 <a:latin typeface="Times New Roman"/>
               </a:rPr>
@@ -1738,7 +1726,7 @@
         <p:spPr>
           <a:xfrm>
             <a:off x="685800" y="1143000"/>
-            <a:ext cx="5484240" cy="3084120"/>
+            <a:ext cx="5483880" cy="3083760"/>
           </a:xfrm>
           <a:prstGeom prst="rect">
             <a:avLst/>
@@ -1761,7 +1749,7 @@
         <p:spPr>
           <a:xfrm>
             <a:off x="685800" y="4400640"/>
-            <a:ext cx="5484240" cy="3598200"/>
+            <a:ext cx="5483880" cy="3597840"/>
           </a:xfrm>
           <a:prstGeom prst="rect">
             <a:avLst/>
@@ -1795,7 +1783,7 @@
         <p:spPr>
           <a:xfrm>
             <a:off x="3884760" y="8685360"/>
-            <a:ext cx="2969640" cy="456480"/>
+            <a:ext cx="2969280" cy="456120"/>
           </a:xfrm>
           <a:prstGeom prst="rect">
             <a:avLst/>
@@ -1827,7 +1815,7 @@
               </a:lnSpc>
               <a:buNone/>
             </a:pPr>
-            <a:fld id="{4AC3A390-8DEE-4637-9B03-F0D5E782CF60}" type="slidenum">
+            <a:fld id="{6BD5848E-93C3-4D50-923C-01349CE5E420}" type="slidenum">
               <a:rPr b="0" lang="en-US" sz="1200" spc="-1" strike="noStrike">
                 <a:latin typeface="Times New Roman"/>
               </a:rPr>
@@ -1874,7 +1862,7 @@
         <p:spPr>
           <a:xfrm>
             <a:off x="685800" y="1143000"/>
-            <a:ext cx="5484240" cy="3084120"/>
+            <a:ext cx="5483880" cy="3083760"/>
           </a:xfrm>
           <a:prstGeom prst="rect">
             <a:avLst/>
@@ -1897,7 +1885,7 @@
         <p:spPr>
           <a:xfrm>
             <a:off x="685800" y="4400640"/>
-            <a:ext cx="5484240" cy="3598200"/>
+            <a:ext cx="5483880" cy="3597840"/>
           </a:xfrm>
           <a:prstGeom prst="rect">
             <a:avLst/>
@@ -1931,7 +1919,7 @@
         <p:spPr>
           <a:xfrm>
             <a:off x="3884760" y="8685360"/>
-            <a:ext cx="2969640" cy="456480"/>
+            <a:ext cx="2969280" cy="456120"/>
           </a:xfrm>
           <a:prstGeom prst="rect">
             <a:avLst/>
@@ -1963,7 +1951,7 @@
               </a:lnSpc>
               <a:buNone/>
             </a:pPr>
-            <a:fld id="{92FE6A5C-A0E5-4670-9A98-476B657F555B}" type="slidenum">
+            <a:fld id="{3DE458D4-2E94-4D35-8C7D-497A1A286BB0}" type="slidenum">
               <a:rPr b="0" lang="en-US" sz="1200" spc="-1" strike="noStrike">
                 <a:latin typeface="Times New Roman"/>
               </a:rPr>
@@ -3807,7 +3795,7 @@
         <p:spPr>
           <a:xfrm>
             <a:off x="0" y="0"/>
-            <a:ext cx="12189960" cy="6855840"/>
+            <a:ext cx="12189600" cy="6855480"/>
           </a:xfrm>
           <a:prstGeom prst="roundRect">
             <a:avLst>
@@ -3839,7 +3827,7 @@
         <p:spPr>
           <a:xfrm>
             <a:off x="0" y="0"/>
-            <a:ext cx="12189960" cy="6855840"/>
+            <a:ext cx="12189600" cy="6855480"/>
           </a:xfrm>
           <a:custGeom>
             <a:avLst/>
@@ -3902,7 +3890,7 @@
         <p:spPr>
           <a:xfrm>
             <a:off x="380880" y="380880"/>
-            <a:ext cx="455040" cy="455040"/>
+            <a:ext cx="454680" cy="454680"/>
           </a:xfrm>
           <a:custGeom>
             <a:avLst/>
@@ -3973,7 +3961,7 @@
         <p:spPr>
           <a:xfrm>
             <a:off x="495360" y="495360"/>
-            <a:ext cx="226440" cy="226440"/>
+            <a:ext cx="226080" cy="226080"/>
           </a:xfrm>
           <a:custGeom>
             <a:avLst/>
@@ -4106,7 +4094,7 @@
         <p:spPr>
           <a:xfrm>
             <a:off x="952560" y="514440"/>
-            <a:ext cx="1988640" cy="188280"/>
+            <a:ext cx="1988280" cy="187920"/>
           </a:xfrm>
           <a:prstGeom prst="rect">
             <a:avLst/>
@@ -4134,7 +4122,7 @@
               <a:buNone/>
             </a:pPr>
             <a:r>
-              <a:rPr b="1" lang="en-US" sz="4400" spc="38" strike="noStrike">
+              <a:rPr b="1" lang="en-US" sz="4400" spc="35" strike="noStrike">
                 <a:solidFill>
                   <a:srgbClr val="00008b"/>
                 </a:solidFill>
@@ -4143,7 +4131,7 @@
               </a:rPr>
               <a:t>INTERIM FINANCIAL REPORT</a:t>
             </a:r>
-            <a:endParaRPr b="0" lang="en-HK" sz="4400" spc="-1" strike="noStrike">
+            <a:endParaRPr b="1" lang="en-HK" sz="4400" spc="-1" strike="noStrike">
               <a:solidFill>
                 <a:srgbClr val="00008b"/>
               </a:solidFill>
@@ -4161,7 +4149,7 @@
         <p:spPr>
           <a:xfrm>
             <a:off x="380880" y="2057400"/>
-            <a:ext cx="11770920" cy="1712520"/>
+            <a:ext cx="11770560" cy="1712160"/>
           </a:xfrm>
           <a:prstGeom prst="rect">
             <a:avLst/>
@@ -4198,7 +4186,7 @@
               </a:rPr>
               <a:t>Tencent Holdings</a:t>
             </a:r>
-            <a:endParaRPr b="0" lang="en-HK" sz="4400" spc="-1" strike="noStrike">
+            <a:endParaRPr b="1" lang="en-HK" sz="4400" spc="-1" strike="noStrike">
               <a:solidFill>
                 <a:srgbClr val="00008b"/>
               </a:solidFill>
@@ -4222,7 +4210,7 @@
               </a:rPr>
               <a:t>Limited</a:t>
             </a:r>
-            <a:endParaRPr b="0" lang="en-HK" sz="4400" spc="-1" strike="noStrike">
+            <a:endParaRPr b="1" lang="en-HK" sz="4400" spc="-1" strike="noStrike">
               <a:solidFill>
                 <a:srgbClr val="00008b"/>
               </a:solidFill>
@@ -4240,7 +4228,7 @@
         <p:spPr>
           <a:xfrm>
             <a:off x="380880" y="4000680"/>
-            <a:ext cx="912240" cy="36000"/>
+            <a:ext cx="911880" cy="35640"/>
           </a:xfrm>
           <a:custGeom>
             <a:avLst/>
@@ -4291,7 +4279,7 @@
         <p:spPr>
           <a:xfrm>
             <a:off x="380880" y="4267080"/>
-            <a:ext cx="11542320" cy="302760"/>
+            <a:ext cx="11541960" cy="302400"/>
           </a:xfrm>
           <a:prstGeom prst="rect">
             <a:avLst/>
@@ -4321,14 +4309,17 @@
             <a:r>
               <a:rPr b="1" lang="en-US" sz="4400" spc="-1" strike="noStrike">
                 <a:solidFill>
-                  <a:srgbClr val="7a97ef"/>
+                  <a:srgbClr val="00008b"/>
                 </a:solidFill>
                 <a:latin typeface="Liter"/>
                 <a:ea typeface="Liter"/>
               </a:rPr>
               <a:t>2025 Interim Report</a:t>
             </a:r>
-            <a:endParaRPr b="0" lang="en-HK" sz="4400" spc="-1" strike="noStrike">
+            <a:endParaRPr b="1" lang="en-HK" sz="4400" spc="-1" strike="noStrike">
+              <a:solidFill>
+                <a:srgbClr val="00008b"/>
+              </a:solidFill>
               <a:latin typeface="Arial"/>
             </a:endParaRPr>
           </a:p>
@@ -4343,7 +4334,7 @@
         <p:spPr>
           <a:xfrm>
             <a:off x="380880" y="4800600"/>
-            <a:ext cx="11513520" cy="264600"/>
+            <a:ext cx="11513160" cy="264240"/>
           </a:xfrm>
           <a:prstGeom prst="rect">
             <a:avLst/>
@@ -4371,7 +4362,7 @@
               <a:buNone/>
             </a:pPr>
             <a:r>
-              <a:rPr b="0" lang="en-US" sz="4400" spc="-1" strike="noStrike">
+              <a:rPr b="1" lang="en-US" sz="4400" spc="-1" strike="noStrike">
                 <a:solidFill>
                   <a:srgbClr val="00008b"/>
                 </a:solidFill>
@@ -4380,7 +4371,10 @@
               </a:rPr>
               <a:t>Three and Six Months Ended 30 June 2025</a:t>
             </a:r>
-            <a:endParaRPr b="0" lang="en-HK" sz="4400" spc="-1" strike="noStrike">
+            <a:endParaRPr b="1" lang="en-HK" sz="4400" spc="-1" strike="noStrike">
+              <a:solidFill>
+                <a:srgbClr val="00008b"/>
+              </a:solidFill>
               <a:latin typeface="Arial"/>
             </a:endParaRPr>
           </a:p>
@@ -4395,7 +4389,7 @@
         <p:spPr>
           <a:xfrm>
             <a:off x="409680" y="6305400"/>
-            <a:ext cx="131040" cy="150120"/>
+            <a:ext cx="130680" cy="149760"/>
           </a:xfrm>
           <a:custGeom>
             <a:avLst/>
@@ -4720,7 +4714,7 @@
         <p:spPr>
           <a:xfrm>
             <a:off x="647640" y="6286680"/>
-            <a:ext cx="826560" cy="188280"/>
+            <a:ext cx="826200" cy="187920"/>
           </a:xfrm>
           <a:prstGeom prst="rect">
             <a:avLst/>
@@ -4748,7 +4742,7 @@
               <a:buNone/>
             </a:pPr>
             <a:r>
-              <a:rPr b="0" lang="en-US" sz="4400" spc="-1" strike="noStrike">
+              <a:rPr b="1" lang="en-US" sz="4400" spc="-1" strike="noStrike">
                 <a:solidFill>
                   <a:srgbClr val="00008b"/>
                 </a:solidFill>
@@ -4757,7 +4751,7 @@
               </a:rPr>
               <a:t>August 2025</a:t>
             </a:r>
-            <a:endParaRPr b="0" lang="en-HK" sz="4400" spc="-1" strike="noStrike">
+            <a:endParaRPr b="1" lang="en-HK" sz="4400" spc="-1" strike="noStrike">
               <a:solidFill>
                 <a:srgbClr val="00008b"/>
               </a:solidFill>
@@ -4775,7 +4769,7 @@
         <p:spPr>
           <a:xfrm>
             <a:off x="1757160" y="6305400"/>
-            <a:ext cx="112320" cy="150120"/>
+            <a:ext cx="111960" cy="149760"/>
           </a:xfrm>
           <a:custGeom>
             <a:avLst/>
@@ -5016,7 +5010,7 @@
         <p:spPr>
           <a:xfrm>
             <a:off x="1985760" y="6286680"/>
-            <a:ext cx="788400" cy="188280"/>
+            <a:ext cx="788040" cy="187920"/>
           </a:xfrm>
           <a:prstGeom prst="rect">
             <a:avLst/>
@@ -5044,16 +5038,19 @@
               <a:buNone/>
             </a:pPr>
             <a:r>
-              <a:rPr b="0" lang="en-US" sz="1050" spc="-1" strike="noStrike">
+              <a:rPr b="1" lang="en-US" sz="4400" spc="-1" strike="noStrike">
                 <a:solidFill>
-                  <a:srgbClr val="8f8f8f"/>
+                  <a:srgbClr val="00008b"/>
                 </a:solidFill>
                 <a:latin typeface="Liter"/>
                 <a:ea typeface="Liter"/>
               </a:rPr>
               <a:t>HKEX: 0700</a:t>
             </a:r>
-            <a:endParaRPr b="0" lang="en-HK" sz="1050" spc="-1" strike="noStrike">
+            <a:endParaRPr b="1" lang="en-HK" sz="4400" spc="-1" strike="noStrike">
+              <a:solidFill>
+                <a:srgbClr val="00008b"/>
+              </a:solidFill>
               <a:latin typeface="Arial"/>
             </a:endParaRPr>
           </a:p>
@@ -5105,7 +5102,7 @@
         <p:spPr>
           <a:xfrm>
             <a:off x="339480" y="339480"/>
-            <a:ext cx="11570040" cy="167760"/>
+            <a:ext cx="11569680" cy="167400"/>
           </a:xfrm>
           <a:prstGeom prst="rect">
             <a:avLst/>
@@ -5133,7 +5130,7 @@
               <a:buNone/>
             </a:pPr>
             <a:r>
-              <a:rPr b="1" lang="en-US" sz="939" spc="32" strike="noStrike">
+              <a:rPr b="1" lang="en-US" sz="939" spc="29" strike="noStrike">
                 <a:solidFill>
                   <a:srgbClr val="6366f1"/>
                 </a:solidFill>
@@ -5157,7 +5154,7 @@
         <p:spPr>
           <a:xfrm>
             <a:off x="339480" y="577440"/>
-            <a:ext cx="11663280" cy="337320"/>
+            <a:ext cx="11662920" cy="336960"/>
           </a:xfrm>
           <a:prstGeom prst="rect">
             <a:avLst/>
@@ -5209,7 +5206,7 @@
         <p:spPr>
           <a:xfrm>
             <a:off x="339480" y="984960"/>
-            <a:ext cx="11578680" cy="201600"/>
+            <a:ext cx="11578320" cy="201240"/>
           </a:xfrm>
           <a:prstGeom prst="rect">
             <a:avLst/>
@@ -5261,7 +5258,7 @@
         <p:spPr>
           <a:xfrm>
             <a:off x="343800" y="1328760"/>
-            <a:ext cx="5643720" cy="1644840"/>
+            <a:ext cx="5643360" cy="1644480"/>
           </a:xfrm>
           <a:custGeom>
             <a:avLst/>
@@ -5335,7 +5332,7 @@
         <p:spPr>
           <a:xfrm>
             <a:off x="551880" y="1536840"/>
-            <a:ext cx="405360" cy="405360"/>
+            <a:ext cx="405000" cy="405000"/>
           </a:xfrm>
           <a:custGeom>
             <a:avLst/>
@@ -5408,7 +5405,7 @@
         <p:spPr>
           <a:xfrm>
             <a:off x="641160" y="1638720"/>
-            <a:ext cx="227160" cy="201600"/>
+            <a:ext cx="226800" cy="201240"/>
           </a:xfrm>
           <a:custGeom>
             <a:avLst/>
@@ -5624,7 +5621,7 @@
         <p:spPr>
           <a:xfrm>
             <a:off x="1061280" y="1536840"/>
-            <a:ext cx="1407240" cy="235440"/>
+            <a:ext cx="1406880" cy="235080"/>
           </a:xfrm>
           <a:prstGeom prst="rect">
             <a:avLst/>
@@ -5676,7 +5673,7 @@
         <p:spPr>
           <a:xfrm>
             <a:off x="1061280" y="1774440"/>
-            <a:ext cx="1381680" cy="167760"/>
+            <a:ext cx="1381320" cy="167400"/>
           </a:xfrm>
           <a:prstGeom prst="rect">
             <a:avLst/>
@@ -5728,7 +5725,7 @@
         <p:spPr>
           <a:xfrm>
             <a:off x="551880" y="2080080"/>
-            <a:ext cx="1279800" cy="405360"/>
+            <a:ext cx="1279440" cy="405000"/>
           </a:xfrm>
           <a:prstGeom prst="rect">
             <a:avLst/>
@@ -5780,7 +5777,7 @@
         <p:spPr>
           <a:xfrm>
             <a:off x="1730160" y="2254320"/>
-            <a:ext cx="600480" cy="235440"/>
+            <a:ext cx="600120" cy="235080"/>
           </a:xfrm>
           <a:custGeom>
             <a:avLst/>
@@ -5853,7 +5850,7 @@
         <p:spPr>
           <a:xfrm>
             <a:off x="1730160" y="2254320"/>
-            <a:ext cx="660240" cy="235440"/>
+            <a:ext cx="659880" cy="235080"/>
           </a:xfrm>
           <a:prstGeom prst="rect">
             <a:avLst/>
@@ -5905,7 +5902,7 @@
         <p:spPr>
           <a:xfrm>
             <a:off x="551880" y="2593800"/>
-            <a:ext cx="5287320" cy="167760"/>
+            <a:ext cx="5286960" cy="167400"/>
           </a:xfrm>
           <a:prstGeom prst="rect">
             <a:avLst/>
@@ -5957,7 +5954,7 @@
         <p:spPr>
           <a:xfrm>
             <a:off x="343800" y="3115800"/>
-            <a:ext cx="5643720" cy="1644840"/>
+            <a:ext cx="5643360" cy="1644480"/>
           </a:xfrm>
           <a:custGeom>
             <a:avLst/>
@@ -6031,7 +6028,7 @@
         <p:spPr>
           <a:xfrm>
             <a:off x="551880" y="3323880"/>
-            <a:ext cx="405360" cy="405360"/>
+            <a:ext cx="405000" cy="405000"/>
           </a:xfrm>
           <a:custGeom>
             <a:avLst/>
@@ -6104,7 +6101,7 @@
         <p:spPr>
           <a:xfrm>
             <a:off x="666360" y="3425760"/>
-            <a:ext cx="176040" cy="201600"/>
+            <a:ext cx="175680" cy="201240"/>
           </a:xfrm>
           <a:custGeom>
             <a:avLst/>
@@ -6213,7 +6210,7 @@
         <p:spPr>
           <a:xfrm>
             <a:off x="1061280" y="3323880"/>
-            <a:ext cx="1110240" cy="235440"/>
+            <a:ext cx="1109880" cy="235080"/>
           </a:xfrm>
           <a:prstGeom prst="rect">
             <a:avLst/>
@@ -6265,7 +6262,7 @@
         <p:spPr>
           <a:xfrm>
             <a:off x="1061280" y="3561840"/>
-            <a:ext cx="1084680" cy="167760"/>
+            <a:ext cx="1084320" cy="167400"/>
           </a:xfrm>
           <a:prstGeom prst="rect">
             <a:avLst/>
@@ -6317,7 +6314,7 @@
         <p:spPr>
           <a:xfrm>
             <a:off x="551880" y="3867480"/>
-            <a:ext cx="1279800" cy="405360"/>
+            <a:ext cx="1279440" cy="405000"/>
           </a:xfrm>
           <a:prstGeom prst="rect">
             <a:avLst/>
@@ -6369,7 +6366,7 @@
         <p:spPr>
           <a:xfrm>
             <a:off x="1729440" y="4041360"/>
-            <a:ext cx="575280" cy="235440"/>
+            <a:ext cx="574920" cy="235080"/>
           </a:xfrm>
           <a:custGeom>
             <a:avLst/>
@@ -6442,7 +6439,7 @@
         <p:spPr>
           <a:xfrm>
             <a:off x="1729440" y="4041360"/>
-            <a:ext cx="634680" cy="235440"/>
+            <a:ext cx="634320" cy="235080"/>
           </a:xfrm>
           <a:prstGeom prst="rect">
             <a:avLst/>
@@ -6494,7 +6491,7 @@
         <p:spPr>
           <a:xfrm>
             <a:off x="551880" y="4380840"/>
-            <a:ext cx="5287320" cy="167760"/>
+            <a:ext cx="5286960" cy="167400"/>
           </a:xfrm>
           <a:prstGeom prst="rect">
             <a:avLst/>
@@ -6546,7 +6543,7 @@
         <p:spPr>
           <a:xfrm>
             <a:off x="343800" y="4903200"/>
-            <a:ext cx="5643720" cy="1644840"/>
+            <a:ext cx="5643360" cy="1644480"/>
           </a:xfrm>
           <a:custGeom>
             <a:avLst/>
@@ -6620,7 +6617,7 @@
         <p:spPr>
           <a:xfrm>
             <a:off x="551880" y="5111280"/>
-            <a:ext cx="405360" cy="405360"/>
+            <a:ext cx="405000" cy="405000"/>
           </a:xfrm>
           <a:custGeom>
             <a:avLst/>
@@ -6693,7 +6690,7 @@
         <p:spPr>
           <a:xfrm>
             <a:off x="641160" y="5213160"/>
-            <a:ext cx="227160" cy="201600"/>
+            <a:ext cx="226800" cy="201240"/>
           </a:xfrm>
           <a:custGeom>
             <a:avLst/>
@@ -6833,7 +6830,7 @@
         <p:spPr>
           <a:xfrm>
             <a:off x="1061280" y="5111280"/>
-            <a:ext cx="1245960" cy="235440"/>
+            <a:ext cx="1245600" cy="235080"/>
           </a:xfrm>
           <a:prstGeom prst="rect">
             <a:avLst/>
@@ -6885,7 +6882,7 @@
         <p:spPr>
           <a:xfrm>
             <a:off x="1061280" y="5348880"/>
-            <a:ext cx="1220400" cy="167760"/>
+            <a:ext cx="1220040" cy="167400"/>
           </a:xfrm>
           <a:prstGeom prst="rect">
             <a:avLst/>
@@ -6937,7 +6934,7 @@
         <p:spPr>
           <a:xfrm>
             <a:off x="551880" y="5654520"/>
-            <a:ext cx="1288440" cy="405360"/>
+            <a:ext cx="1288080" cy="405000"/>
           </a:xfrm>
           <a:prstGeom prst="rect">
             <a:avLst/>
@@ -6989,7 +6986,7 @@
         <p:spPr>
           <a:xfrm>
             <a:off x="1737720" y="5828400"/>
-            <a:ext cx="702360" cy="235440"/>
+            <a:ext cx="702000" cy="235080"/>
           </a:xfrm>
           <a:custGeom>
             <a:avLst/>
@@ -7062,7 +7059,7 @@
         <p:spPr>
           <a:xfrm>
             <a:off x="1737720" y="5828400"/>
-            <a:ext cx="762120" cy="235440"/>
+            <a:ext cx="761760" cy="235080"/>
           </a:xfrm>
           <a:prstGeom prst="rect">
             <a:avLst/>
@@ -7114,7 +7111,7 @@
         <p:spPr>
           <a:xfrm>
             <a:off x="551880" y="6168240"/>
-            <a:ext cx="5287320" cy="167760"/>
+            <a:ext cx="5286960" cy="167400"/>
           </a:xfrm>
           <a:prstGeom prst="rect">
             <a:avLst/>
@@ -7166,7 +7163,7 @@
         <p:spPr>
           <a:xfrm>
             <a:off x="6203880" y="1328760"/>
-            <a:ext cx="5643720" cy="2824920"/>
+            <a:ext cx="5643360" cy="2824560"/>
           </a:xfrm>
           <a:custGeom>
             <a:avLst/>
@@ -7240,7 +7237,7 @@
         <p:spPr>
           <a:xfrm>
             <a:off x="6411960" y="1536840"/>
-            <a:ext cx="5312880" cy="235440"/>
+            <a:ext cx="5312520" cy="235080"/>
           </a:xfrm>
           <a:prstGeom prst="rect">
             <a:avLst/>
@@ -7292,7 +7289,7 @@
         <p:spPr>
           <a:xfrm>
             <a:off x="6411960" y="1910160"/>
-            <a:ext cx="5227920" cy="948600"/>
+            <a:ext cx="5227560" cy="948240"/>
           </a:xfrm>
           <a:custGeom>
             <a:avLst/>
@@ -7363,7 +7360,7 @@
         <p:spPr>
           <a:xfrm>
             <a:off x="6568920" y="2097000"/>
-            <a:ext cx="167760" cy="167760"/>
+            <a:ext cx="167400" cy="167400"/>
           </a:xfrm>
           <a:custGeom>
             <a:avLst/>
@@ -7465,7 +7462,7 @@
         <p:spPr>
           <a:xfrm>
             <a:off x="6861960" y="2080080"/>
-            <a:ext cx="940320" cy="201600"/>
+            <a:ext cx="939960" cy="201240"/>
           </a:xfrm>
           <a:prstGeom prst="rect">
             <a:avLst/>
@@ -7517,7 +7514,7 @@
         <p:spPr>
           <a:xfrm>
             <a:off x="11043000" y="2046240"/>
-            <a:ext cx="566640" cy="269640"/>
+            <a:ext cx="566280" cy="269280"/>
           </a:xfrm>
           <a:prstGeom prst="rect">
             <a:avLst/>
@@ -7569,7 +7566,7 @@
         <p:spPr>
           <a:xfrm>
             <a:off x="6547680" y="2385720"/>
-            <a:ext cx="5015520" cy="167760"/>
+            <a:ext cx="5015160" cy="167400"/>
           </a:xfrm>
           <a:prstGeom prst="rect">
             <a:avLst/>
@@ -7621,7 +7618,7 @@
         <p:spPr>
           <a:xfrm>
             <a:off x="6547680" y="2589480"/>
-            <a:ext cx="5007240" cy="133560"/>
+            <a:ext cx="5006880" cy="133200"/>
           </a:xfrm>
           <a:prstGeom prst="rect">
             <a:avLst/>
@@ -7673,7 +7670,7 @@
         <p:spPr>
           <a:xfrm>
             <a:off x="6411960" y="2997000"/>
-            <a:ext cx="5227920" cy="948600"/>
+            <a:ext cx="5227560" cy="948240"/>
           </a:xfrm>
           <a:custGeom>
             <a:avLst/>
@@ -7744,7 +7741,7 @@
         <p:spPr>
           <a:xfrm>
             <a:off x="6568920" y="3183840"/>
-            <a:ext cx="167760" cy="167760"/>
+            <a:ext cx="167400" cy="167400"/>
           </a:xfrm>
           <a:custGeom>
             <a:avLst/>
@@ -7856,7 +7853,7 @@
         <p:spPr>
           <a:xfrm>
             <a:off x="6861960" y="3166920"/>
-            <a:ext cx="957240" cy="201600"/>
+            <a:ext cx="956880" cy="201240"/>
           </a:xfrm>
           <a:prstGeom prst="rect">
             <a:avLst/>
@@ -7908,7 +7905,7 @@
         <p:spPr>
           <a:xfrm>
             <a:off x="11006280" y="3133080"/>
-            <a:ext cx="600480" cy="269640"/>
+            <a:ext cx="600120" cy="269280"/>
           </a:xfrm>
           <a:prstGeom prst="rect">
             <a:avLst/>
@@ -7960,7 +7957,7 @@
         <p:spPr>
           <a:xfrm>
             <a:off x="6547680" y="3472560"/>
-            <a:ext cx="5015520" cy="167760"/>
+            <a:ext cx="5015160" cy="167400"/>
           </a:xfrm>
           <a:prstGeom prst="rect">
             <a:avLst/>
@@ -8012,7 +8009,7 @@
         <p:spPr>
           <a:xfrm>
             <a:off x="6547680" y="3676320"/>
-            <a:ext cx="5007240" cy="133560"/>
+            <a:ext cx="5006880" cy="133200"/>
           </a:xfrm>
           <a:prstGeom prst="rect">
             <a:avLst/>
@@ -8064,7 +8061,7 @@
         <p:spPr>
           <a:xfrm>
             <a:off x="6203880" y="4300200"/>
-            <a:ext cx="5643720" cy="2553480"/>
+            <a:ext cx="5643360" cy="2553120"/>
           </a:xfrm>
           <a:custGeom>
             <a:avLst/>
@@ -8138,7 +8135,7 @@
         <p:spPr>
           <a:xfrm>
             <a:off x="6411960" y="4508280"/>
-            <a:ext cx="5312880" cy="235440"/>
+            <a:ext cx="5312520" cy="235080"/>
           </a:xfrm>
           <a:prstGeom prst="rect">
             <a:avLst/>
@@ -8190,7 +8187,7 @@
         <p:spPr>
           <a:xfrm>
             <a:off x="6411960" y="4881960"/>
-            <a:ext cx="5227920" cy="1763640"/>
+            <a:ext cx="5227560" cy="1763280"/>
           </a:xfrm>
           <a:custGeom>
             <a:avLst/>
@@ -8261,7 +8258,7 @@
         <p:spPr>
           <a:xfrm>
             <a:off x="6581880" y="5102640"/>
-            <a:ext cx="541080" cy="541080"/>
+            <a:ext cx="540720" cy="540720"/>
           </a:xfrm>
           <a:custGeom>
             <a:avLst/>
@@ -8334,7 +8331,7 @@
         <p:spPr>
           <a:xfrm>
             <a:off x="6728400" y="5247000"/>
-            <a:ext cx="252720" cy="252720"/>
+            <a:ext cx="252360" cy="252360"/>
           </a:xfrm>
           <a:custGeom>
             <a:avLst/>
@@ -8458,7 +8455,7 @@
         <p:spPr>
           <a:xfrm>
             <a:off x="7261200" y="5051520"/>
-            <a:ext cx="1254240" cy="167760"/>
+            <a:ext cx="1253880" cy="167400"/>
           </a:xfrm>
           <a:prstGeom prst="rect">
             <a:avLst/>
@@ -8510,7 +8507,7 @@
         <p:spPr>
           <a:xfrm>
             <a:off x="7261200" y="5221440"/>
-            <a:ext cx="1347840" cy="337320"/>
+            <a:ext cx="1347480" cy="336960"/>
           </a:xfrm>
           <a:prstGeom prst="rect">
             <a:avLst/>
@@ -8562,7 +8559,7 @@
         <p:spPr>
           <a:xfrm>
             <a:off x="7261200" y="5561280"/>
-            <a:ext cx="1245960" cy="133560"/>
+            <a:ext cx="1245600" cy="133200"/>
           </a:xfrm>
           <a:prstGeom prst="rect">
             <a:avLst/>
@@ -8614,7 +8611,7 @@
         <p:spPr>
           <a:xfrm>
             <a:off x="6598800" y="5858280"/>
-            <a:ext cx="116640" cy="116640"/>
+            <a:ext cx="116280" cy="116280"/>
           </a:xfrm>
           <a:custGeom>
             <a:avLst/>
@@ -8719,7 +8716,7 @@
         <p:spPr>
           <a:xfrm>
             <a:off x="6798240" y="5832720"/>
-            <a:ext cx="1984680" cy="167760"/>
+            <a:ext cx="1984320" cy="167400"/>
           </a:xfrm>
           <a:prstGeom prst="rect">
             <a:avLst/>
@@ -8771,7 +8768,7 @@
         <p:spPr>
           <a:xfrm>
             <a:off x="6598800" y="6095880"/>
-            <a:ext cx="116640" cy="116640"/>
+            <a:ext cx="116280" cy="116280"/>
           </a:xfrm>
           <a:custGeom>
             <a:avLst/>
@@ -8876,7 +8873,7 @@
         <p:spPr>
           <a:xfrm>
             <a:off x="6798240" y="6070680"/>
-            <a:ext cx="1585440" cy="167760"/>
+            <a:ext cx="1585080" cy="167400"/>
           </a:xfrm>
           <a:prstGeom prst="rect">
             <a:avLst/>
@@ -8928,7 +8925,7 @@
         <p:spPr>
           <a:xfrm>
             <a:off x="6598800" y="6333840"/>
-            <a:ext cx="116640" cy="116640"/>
+            <a:ext cx="116280" cy="116280"/>
           </a:xfrm>
           <a:custGeom>
             <a:avLst/>
@@ -9033,7 +9030,7 @@
         <p:spPr>
           <a:xfrm>
             <a:off x="6798240" y="6308280"/>
-            <a:ext cx="1025280" cy="167760"/>
+            <a:ext cx="1024920" cy="167400"/>
           </a:xfrm>
           <a:prstGeom prst="rect">
             <a:avLst/>
@@ -9122,7 +9119,7 @@
         <p:spPr>
           <a:xfrm>
             <a:off x="317520" y="317520"/>
-            <a:ext cx="11610360" cy="156600"/>
+            <a:ext cx="11610000" cy="156240"/>
           </a:xfrm>
           <a:prstGeom prst="rect">
             <a:avLst/>
@@ -9150,7 +9147,7 @@
               <a:buNone/>
             </a:pPr>
             <a:r>
-              <a:rPr b="1" lang="en-US" sz="880" spc="29" strike="noStrike">
+              <a:rPr b="1" lang="en-US" sz="880" spc="26" strike="noStrike">
                 <a:solidFill>
                   <a:srgbClr val="6366f1"/>
                 </a:solidFill>
@@ -9174,7 +9171,7 @@
         <p:spPr>
           <a:xfrm>
             <a:off x="317520" y="539640"/>
-            <a:ext cx="11697840" cy="315360"/>
+            <a:ext cx="11697480" cy="315000"/>
           </a:xfrm>
           <a:prstGeom prst="rect">
             <a:avLst/>
@@ -9226,7 +9223,7 @@
         <p:spPr>
           <a:xfrm>
             <a:off x="317520" y="920880"/>
-            <a:ext cx="11618280" cy="188280"/>
+            <a:ext cx="11617920" cy="187920"/>
           </a:xfrm>
           <a:prstGeom prst="rect">
             <a:avLst/>
@@ -9278,7 +9275,7 @@
         <p:spPr>
           <a:xfrm>
             <a:off x="321480" y="1178640"/>
-            <a:ext cx="6093720" cy="2640960"/>
+            <a:ext cx="6093360" cy="2640600"/>
           </a:xfrm>
           <a:custGeom>
             <a:avLst/>
@@ -9352,7 +9349,7 @@
         <p:spPr>
           <a:xfrm>
             <a:off x="484200" y="1341360"/>
-            <a:ext cx="5847840" cy="219960"/>
+            <a:ext cx="5847480" cy="219600"/>
           </a:xfrm>
           <a:prstGeom prst="rect">
             <a:avLst/>
@@ -9404,7 +9401,7 @@
         <p:spPr>
           <a:xfrm>
             <a:off x="484200" y="1690560"/>
-            <a:ext cx="2815560" cy="918720"/>
+            <a:ext cx="2815200" cy="918360"/>
           </a:xfrm>
           <a:custGeom>
             <a:avLst/>
@@ -9475,7 +9472,7 @@
         <p:spPr>
           <a:xfrm>
             <a:off x="611280" y="1817640"/>
-            <a:ext cx="2617200" cy="156600"/>
+            <a:ext cx="2616840" cy="156240"/>
           </a:xfrm>
           <a:prstGeom prst="rect">
             <a:avLst/>
@@ -9527,7 +9524,7 @@
         <p:spPr>
           <a:xfrm>
             <a:off x="611280" y="2039760"/>
-            <a:ext cx="2680560" cy="283680"/>
+            <a:ext cx="2680200" cy="283320"/>
           </a:xfrm>
           <a:prstGeom prst="rect">
             <a:avLst/>
@@ -9579,7 +9576,7 @@
         <p:spPr>
           <a:xfrm>
             <a:off x="611280" y="2357280"/>
-            <a:ext cx="2609280" cy="124920"/>
+            <a:ext cx="2608920" cy="124560"/>
           </a:xfrm>
           <a:prstGeom prst="rect">
             <a:avLst/>
@@ -9631,7 +9628,7 @@
         <p:spPr>
           <a:xfrm>
             <a:off x="3432600" y="1690560"/>
-            <a:ext cx="2815560" cy="918720"/>
+            <a:ext cx="2815200" cy="918360"/>
           </a:xfrm>
           <a:custGeom>
             <a:avLst/>
@@ -9702,7 +9699,7 @@
         <p:spPr>
           <a:xfrm>
             <a:off x="3559680" y="1817640"/>
-            <a:ext cx="2617200" cy="156600"/>
+            <a:ext cx="2616840" cy="156240"/>
           </a:xfrm>
           <a:prstGeom prst="rect">
             <a:avLst/>
@@ -9754,7 +9751,7 @@
         <p:spPr>
           <a:xfrm>
             <a:off x="3559680" y="2039760"/>
-            <a:ext cx="2680560" cy="283680"/>
+            <a:ext cx="2680200" cy="283320"/>
           </a:xfrm>
           <a:prstGeom prst="rect">
             <a:avLst/>
@@ -9806,7 +9803,7 @@
         <p:spPr>
           <a:xfrm>
             <a:off x="3559680" y="2357280"/>
-            <a:ext cx="2609280" cy="124920"/>
+            <a:ext cx="2608920" cy="124560"/>
           </a:xfrm>
           <a:prstGeom prst="rect">
             <a:avLst/>
@@ -9858,7 +9855,7 @@
         <p:spPr>
           <a:xfrm>
             <a:off x="484200" y="2738520"/>
-            <a:ext cx="2815560" cy="918720"/>
+            <a:ext cx="2815200" cy="918360"/>
           </a:xfrm>
           <a:custGeom>
             <a:avLst/>
@@ -9929,7 +9926,7 @@
         <p:spPr>
           <a:xfrm>
             <a:off x="611280" y="2865600"/>
-            <a:ext cx="2617200" cy="156600"/>
+            <a:ext cx="2616840" cy="156240"/>
           </a:xfrm>
           <a:prstGeom prst="rect">
             <a:avLst/>
@@ -9981,7 +9978,7 @@
         <p:spPr>
           <a:xfrm>
             <a:off x="611280" y="3087720"/>
-            <a:ext cx="2680560" cy="283680"/>
+            <a:ext cx="2680200" cy="283320"/>
           </a:xfrm>
           <a:prstGeom prst="rect">
             <a:avLst/>
@@ -10033,7 +10030,7 @@
         <p:spPr>
           <a:xfrm>
             <a:off x="611280" y="3405240"/>
-            <a:ext cx="2609280" cy="124920"/>
+            <a:ext cx="2608920" cy="124560"/>
           </a:xfrm>
           <a:prstGeom prst="rect">
             <a:avLst/>
@@ -10085,7 +10082,7 @@
         <p:spPr>
           <a:xfrm>
             <a:off x="3432600" y="2738520"/>
-            <a:ext cx="2815560" cy="918720"/>
+            <a:ext cx="2815200" cy="918360"/>
           </a:xfrm>
           <a:custGeom>
             <a:avLst/>
@@ -10156,7 +10153,7 @@
         <p:spPr>
           <a:xfrm>
             <a:off x="3559680" y="2865600"/>
-            <a:ext cx="2617200" cy="156600"/>
+            <a:ext cx="2616840" cy="156240"/>
           </a:xfrm>
           <a:prstGeom prst="rect">
             <a:avLst/>
@@ -10208,7 +10205,7 @@
         <p:spPr>
           <a:xfrm>
             <a:off x="3559680" y="3087720"/>
-            <a:ext cx="2680560" cy="283680"/>
+            <a:ext cx="2680200" cy="283320"/>
           </a:xfrm>
           <a:prstGeom prst="rect">
             <a:avLst/>
@@ -10260,7 +10257,7 @@
         <p:spPr>
           <a:xfrm>
             <a:off x="3559680" y="3405240"/>
-            <a:ext cx="2609280" cy="124920"/>
+            <a:ext cx="2608920" cy="124560"/>
           </a:xfrm>
           <a:prstGeom prst="rect">
             <a:avLst/>
@@ -10312,7 +10309,7 @@
         <p:spPr>
           <a:xfrm>
             <a:off x="321480" y="3956760"/>
-            <a:ext cx="6093720" cy="3371400"/>
+            <a:ext cx="6093360" cy="3371040"/>
           </a:xfrm>
           <a:custGeom>
             <a:avLst/>
@@ -10386,7 +10383,7 @@
         <p:spPr>
           <a:xfrm>
             <a:off x="484200" y="4119480"/>
-            <a:ext cx="5847840" cy="219960"/>
+            <a:ext cx="5847480" cy="219600"/>
           </a:xfrm>
           <a:prstGeom prst="rect">
             <a:avLst/>
@@ -10438,7 +10435,7 @@
         <p:spPr>
           <a:xfrm>
             <a:off x="484200" y="4468680"/>
-            <a:ext cx="5768280" cy="886680"/>
+            <a:ext cx="5767920" cy="886320"/>
           </a:xfrm>
           <a:custGeom>
             <a:avLst/>
@@ -10509,7 +10506,7 @@
         <p:spPr>
           <a:xfrm>
             <a:off x="611280" y="4627440"/>
-            <a:ext cx="1053360" cy="188280"/>
+            <a:ext cx="1053000" cy="187920"/>
           </a:xfrm>
           <a:prstGeom prst="rect">
             <a:avLst/>
@@ -10561,7 +10558,7 @@
         <p:spPr>
           <a:xfrm>
             <a:off x="5196600" y="4595760"/>
-            <a:ext cx="1021680" cy="252000"/>
+            <a:ext cx="1021320" cy="251640"/>
           </a:xfrm>
           <a:prstGeom prst="rect">
             <a:avLst/>
@@ -10613,7 +10610,7 @@
         <p:spPr>
           <a:xfrm>
             <a:off x="611280" y="4913280"/>
-            <a:ext cx="5569920" cy="156600"/>
+            <a:ext cx="5569560" cy="156240"/>
           </a:xfrm>
           <a:prstGeom prst="rect">
             <a:avLst/>
@@ -10665,7 +10662,7 @@
         <p:spPr>
           <a:xfrm>
             <a:off x="611280" y="5103720"/>
-            <a:ext cx="5562000" cy="124920"/>
+            <a:ext cx="5561640" cy="124560"/>
           </a:xfrm>
           <a:prstGeom prst="rect">
             <a:avLst/>
@@ -10717,7 +10714,7 @@
         <p:spPr>
           <a:xfrm>
             <a:off x="484200" y="5452920"/>
-            <a:ext cx="5768280" cy="727920"/>
+            <a:ext cx="5767920" cy="727560"/>
           </a:xfrm>
           <a:custGeom>
             <a:avLst/>
@@ -10788,7 +10785,7 @@
         <p:spPr>
           <a:xfrm>
             <a:off x="611280" y="5611680"/>
-            <a:ext cx="1109160" cy="188280"/>
+            <a:ext cx="1108800" cy="187920"/>
           </a:xfrm>
           <a:prstGeom prst="rect">
             <a:avLst/>
@@ -10840,7 +10837,7 @@
         <p:spPr>
           <a:xfrm>
             <a:off x="5174280" y="5580000"/>
-            <a:ext cx="1045440" cy="252000"/>
+            <a:ext cx="1045080" cy="251640"/>
           </a:xfrm>
           <a:prstGeom prst="rect">
             <a:avLst/>
@@ -10892,7 +10889,7 @@
         <p:spPr>
           <a:xfrm>
             <a:off x="611280" y="5897520"/>
-            <a:ext cx="5569920" cy="156600"/>
+            <a:ext cx="5569560" cy="156240"/>
           </a:xfrm>
           <a:prstGeom prst="rect">
             <a:avLst/>
@@ -10944,7 +10941,7 @@
         <p:spPr>
           <a:xfrm>
             <a:off x="484200" y="6278400"/>
-            <a:ext cx="5768280" cy="886680"/>
+            <a:ext cx="5767920" cy="886320"/>
           </a:xfrm>
           <a:custGeom>
             <a:avLst/>
@@ -11015,7 +11012,7 @@
         <p:spPr>
           <a:xfrm>
             <a:off x="611280" y="6437160"/>
-            <a:ext cx="1387080" cy="188280"/>
+            <a:ext cx="1386720" cy="187920"/>
           </a:xfrm>
           <a:prstGeom prst="rect">
             <a:avLst/>
@@ -11067,7 +11064,7 @@
         <p:spPr>
           <a:xfrm>
             <a:off x="5180400" y="6405480"/>
-            <a:ext cx="1037520" cy="252000"/>
+            <a:ext cx="1037160" cy="251640"/>
           </a:xfrm>
           <a:prstGeom prst="rect">
             <a:avLst/>
@@ -11119,7 +11116,7 @@
         <p:spPr>
           <a:xfrm>
             <a:off x="611280" y="6723000"/>
-            <a:ext cx="5569920" cy="156600"/>
+            <a:ext cx="5569560" cy="156240"/>
           </a:xfrm>
           <a:prstGeom prst="rect">
             <a:avLst/>
@@ -11171,7 +11168,7 @@
         <p:spPr>
           <a:xfrm>
             <a:off x="611280" y="6913440"/>
-            <a:ext cx="5562000" cy="124920"/>
+            <a:ext cx="5561640" cy="124560"/>
           </a:xfrm>
           <a:prstGeom prst="rect">
             <a:avLst/>
@@ -11223,7 +11220,7 @@
         <p:spPr>
           <a:xfrm>
             <a:off x="6551640" y="1178640"/>
-            <a:ext cx="5316120" cy="6149520"/>
+            <a:ext cx="5315760" cy="6149160"/>
           </a:xfrm>
           <a:custGeom>
             <a:avLst/>
@@ -11297,7 +11294,7 @@
         <p:spPr>
           <a:xfrm>
             <a:off x="6714360" y="1341360"/>
-            <a:ext cx="5069880" cy="219960"/>
+            <a:ext cx="5069520" cy="219600"/>
           </a:xfrm>
           <a:prstGeom prst="rect">
             <a:avLst/>
@@ -11349,7 +11346,7 @@
         <p:spPr>
           <a:xfrm>
             <a:off x="6714360" y="1690560"/>
-            <a:ext cx="4990680" cy="2799720"/>
+            <a:ext cx="4990320" cy="2799360"/>
           </a:xfrm>
           <a:custGeom>
             <a:avLst/>
@@ -11420,7 +11417,7 @@
         <p:spPr>
           <a:xfrm>
             <a:off x="6873120" y="1849320"/>
-            <a:ext cx="378720" cy="378720"/>
+            <a:ext cx="378360" cy="378360"/>
           </a:xfrm>
           <a:custGeom>
             <a:avLst/>
@@ -11493,7 +11490,7 @@
         <p:spPr>
           <a:xfrm>
             <a:off x="7004160" y="1960560"/>
-            <a:ext cx="117000" cy="156600"/>
+            <a:ext cx="116640" cy="156240"/>
           </a:xfrm>
           <a:custGeom>
             <a:avLst/>
@@ -11734,7 +11731,7 @@
         <p:spPr>
           <a:xfrm>
             <a:off x="7349400" y="1865160"/>
-            <a:ext cx="3013920" cy="188280"/>
+            <a:ext cx="3013560" cy="187920"/>
           </a:xfrm>
           <a:prstGeom prst="rect">
             <a:avLst/>
@@ -11786,7 +11783,7 @@
         <p:spPr>
           <a:xfrm>
             <a:off x="7349400" y="2055960"/>
-            <a:ext cx="3006000" cy="156600"/>
+            <a:ext cx="3005640" cy="156240"/>
           </a:xfrm>
           <a:prstGeom prst="rect">
             <a:avLst/>
@@ -11838,7 +11835,7 @@
         <p:spPr>
           <a:xfrm>
             <a:off x="6873120" y="2373480"/>
-            <a:ext cx="704160" cy="156600"/>
+            <a:ext cx="703800" cy="156240"/>
           </a:xfrm>
           <a:prstGeom prst="rect">
             <a:avLst/>
@@ -11890,7 +11887,7 @@
         <p:spPr>
           <a:xfrm>
             <a:off x="10321560" y="2357280"/>
-            <a:ext cx="1291680" cy="188280"/>
+            <a:ext cx="1291320" cy="187920"/>
           </a:xfrm>
           <a:prstGeom prst="rect">
             <a:avLst/>
@@ -11942,7 +11939,7 @@
         <p:spPr>
           <a:xfrm>
             <a:off x="6873120" y="2674800"/>
-            <a:ext cx="775800" cy="156600"/>
+            <a:ext cx="775440" cy="156240"/>
           </a:xfrm>
           <a:prstGeom prst="rect">
             <a:avLst/>
@@ -11994,7 +11991,7 @@
         <p:spPr>
           <a:xfrm>
             <a:off x="10810080" y="2643120"/>
-            <a:ext cx="807480" cy="219960"/>
+            <a:ext cx="807120" cy="219600"/>
           </a:xfrm>
           <a:prstGeom prst="rect">
             <a:avLst/>
@@ -12046,7 +12043,7 @@
         <p:spPr>
           <a:xfrm>
             <a:off x="6873120" y="2976480"/>
-            <a:ext cx="553320" cy="156600"/>
+            <a:ext cx="552960" cy="156240"/>
           </a:xfrm>
           <a:prstGeom prst="rect">
             <a:avLst/>
@@ -12098,7 +12095,7 @@
         <p:spPr>
           <a:xfrm>
             <a:off x="11028960" y="2960640"/>
-            <a:ext cx="585360" cy="188280"/>
+            <a:ext cx="585000" cy="187920"/>
           </a:xfrm>
           <a:prstGeom prst="rect">
             <a:avLst/>
@@ -12150,7 +12147,7 @@
         <p:spPr>
           <a:xfrm>
             <a:off x="6873120" y="3262320"/>
-            <a:ext cx="894600" cy="156600"/>
+            <a:ext cx="894240" cy="156240"/>
           </a:xfrm>
           <a:prstGeom prst="rect">
             <a:avLst/>
@@ -12202,7 +12199,7 @@
         <p:spPr>
           <a:xfrm>
             <a:off x="11202840" y="3246480"/>
-            <a:ext cx="410760" cy="188280"/>
+            <a:ext cx="410400" cy="187920"/>
           </a:xfrm>
           <a:prstGeom prst="rect">
             <a:avLst/>
@@ -12254,7 +12251,7 @@
         <p:spPr>
           <a:xfrm>
             <a:off x="6873120" y="3567960"/>
-            <a:ext cx="4673160" cy="5760"/>
+            <a:ext cx="4672800" cy="5400"/>
           </a:xfrm>
           <a:custGeom>
             <a:avLst/>
@@ -12305,7 +12302,7 @@
         <p:spPr>
           <a:xfrm>
             <a:off x="6873120" y="3699000"/>
-            <a:ext cx="4728600" cy="156600"/>
+            <a:ext cx="4728240" cy="156240"/>
           </a:xfrm>
           <a:prstGeom prst="rect">
             <a:avLst/>
@@ -12357,7 +12354,7 @@
         <p:spPr>
           <a:xfrm>
             <a:off x="6873120" y="3921120"/>
-            <a:ext cx="4768200" cy="252000"/>
+            <a:ext cx="4767840" cy="251640"/>
           </a:xfrm>
           <a:prstGeom prst="rect">
             <a:avLst/>
@@ -12409,7 +12406,7 @@
         <p:spPr>
           <a:xfrm>
             <a:off x="6873120" y="4206960"/>
-            <a:ext cx="4720680" cy="124920"/>
+            <a:ext cx="4720320" cy="124560"/>
           </a:xfrm>
           <a:prstGeom prst="rect">
             <a:avLst/>
@@ -12461,7 +12458,7 @@
         <p:spPr>
           <a:xfrm>
             <a:off x="6718320" y="4623480"/>
-            <a:ext cx="4982760" cy="1180440"/>
+            <a:ext cx="4982400" cy="1180080"/>
           </a:xfrm>
           <a:custGeom>
             <a:avLst/>
@@ -12535,7 +12532,7 @@
         <p:spPr>
           <a:xfrm>
             <a:off x="6849360" y="4754520"/>
-            <a:ext cx="4791960" cy="219960"/>
+            <a:ext cx="4791600" cy="219600"/>
           </a:xfrm>
           <a:prstGeom prst="rect">
             <a:avLst/>
@@ -12587,7 +12584,7 @@
         <p:spPr>
           <a:xfrm>
             <a:off x="6849360" y="5072040"/>
-            <a:ext cx="2315520" cy="601200"/>
+            <a:ext cx="2315160" cy="600840"/>
           </a:xfrm>
           <a:custGeom>
             <a:avLst/>
@@ -12658,7 +12655,7 @@
         <p:spPr>
           <a:xfrm>
             <a:off x="6920640" y="5167440"/>
-            <a:ext cx="2172600" cy="124920"/>
+            <a:ext cx="2172240" cy="124560"/>
           </a:xfrm>
           <a:prstGeom prst="rect">
             <a:avLst/>
@@ -12710,7 +12707,7 @@
         <p:spPr>
           <a:xfrm>
             <a:off x="6896880" y="5326200"/>
-            <a:ext cx="2220480" cy="252000"/>
+            <a:ext cx="2220120" cy="251640"/>
           </a:xfrm>
           <a:prstGeom prst="rect">
             <a:avLst/>
@@ -12762,7 +12759,7 @@
         <p:spPr>
           <a:xfrm>
             <a:off x="9258840" y="5072040"/>
-            <a:ext cx="2315520" cy="601200"/>
+            <a:ext cx="2315160" cy="600840"/>
           </a:xfrm>
           <a:custGeom>
             <a:avLst/>
@@ -12833,7 +12830,7 @@
         <p:spPr>
           <a:xfrm>
             <a:off x="9330120" y="5167440"/>
-            <a:ext cx="2172600" cy="124920"/>
+            <a:ext cx="2172240" cy="124560"/>
           </a:xfrm>
           <a:prstGeom prst="rect">
             <a:avLst/>
@@ -12885,7 +12882,7 @@
         <p:spPr>
           <a:xfrm>
             <a:off x="9306360" y="5326200"/>
-            <a:ext cx="2220480" cy="252000"/>
+            <a:ext cx="2220120" cy="251640"/>
           </a:xfrm>
           <a:prstGeom prst="rect">
             <a:avLst/>
@@ -12974,7 +12971,7 @@
         <p:spPr>
           <a:xfrm>
             <a:off x="0" y="0"/>
-            <a:ext cx="12189960" cy="6855840"/>
+            <a:ext cx="12189600" cy="6855480"/>
           </a:xfrm>
           <a:prstGeom prst="roundRect">
             <a:avLst>
@@ -13006,7 +13003,7 @@
         <p:spPr>
           <a:xfrm>
             <a:off x="0" y="0"/>
-            <a:ext cx="12189960" cy="6855840"/>
+            <a:ext cx="12189600" cy="6855480"/>
           </a:xfrm>
           <a:custGeom>
             <a:avLst/>
@@ -13069,7 +13066,7 @@
         <p:spPr>
           <a:xfrm>
             <a:off x="380880" y="380880"/>
-            <a:ext cx="11494440" cy="188280"/>
+            <a:ext cx="11494080" cy="187920"/>
           </a:xfrm>
           <a:prstGeom prst="rect">
             <a:avLst/>
@@ -13097,7 +13094,7 @@
               <a:buNone/>
             </a:pPr>
             <a:r>
-              <a:rPr b="1" lang="en-US" sz="1050" spc="38" strike="noStrike">
+              <a:rPr b="1" lang="en-US" sz="1050" spc="35" strike="noStrike">
                 <a:solidFill>
                   <a:srgbClr val="6366f1"/>
                 </a:solidFill>
@@ -13121,7 +13118,7 @@
         <p:spPr>
           <a:xfrm>
             <a:off x="380880" y="647640"/>
-            <a:ext cx="11656440" cy="455040"/>
+            <a:ext cx="11656080" cy="454680"/>
           </a:xfrm>
           <a:prstGeom prst="rect">
             <a:avLst/>
@@ -13173,7 +13170,7 @@
         <p:spPr>
           <a:xfrm>
             <a:off x="380880" y="1219320"/>
-            <a:ext cx="11513520" cy="264600"/>
+            <a:ext cx="11513160" cy="264240"/>
           </a:xfrm>
           <a:prstGeom prst="rect">
             <a:avLst/>
@@ -13225,7 +13222,7 @@
         <p:spPr>
           <a:xfrm>
             <a:off x="385920" y="1643040"/>
-            <a:ext cx="3274560" cy="1750320"/>
+            <a:ext cx="3274200" cy="1749960"/>
           </a:xfrm>
           <a:custGeom>
             <a:avLst/>
@@ -13301,7 +13298,7 @@
         <p:spPr>
           <a:xfrm>
             <a:off x="581040" y="1838160"/>
-            <a:ext cx="378720" cy="378720"/>
+            <a:ext cx="378360" cy="378360"/>
           </a:xfrm>
           <a:custGeom>
             <a:avLst/>
@@ -13374,7 +13371,7 @@
         <p:spPr>
           <a:xfrm>
             <a:off x="695160" y="1952640"/>
-            <a:ext cx="150120" cy="150120"/>
+            <a:ext cx="149760" cy="149760"/>
           </a:xfrm>
           <a:custGeom>
             <a:avLst/>
@@ -13551,7 +13548,7 @@
         <p:spPr>
           <a:xfrm>
             <a:off x="1076400" y="1895400"/>
-            <a:ext cx="1121760" cy="264600"/>
+            <a:ext cx="1121400" cy="264240"/>
           </a:xfrm>
           <a:prstGeom prst="rect">
             <a:avLst/>
@@ -13603,7 +13600,7 @@
         <p:spPr>
           <a:xfrm>
             <a:off x="581040" y="2333520"/>
-            <a:ext cx="2950560" cy="864720"/>
+            <a:ext cx="2950200" cy="864360"/>
           </a:xfrm>
           <a:prstGeom prst="rect">
             <a:avLst/>
@@ -13655,7 +13652,7 @@
         <p:spPr>
           <a:xfrm>
             <a:off x="3822480" y="1643040"/>
-            <a:ext cx="3274560" cy="1750320"/>
+            <a:ext cx="3274200" cy="1749960"/>
           </a:xfrm>
           <a:custGeom>
             <a:avLst/>
@@ -13731,7 +13728,7 @@
         <p:spPr>
           <a:xfrm>
             <a:off x="4017600" y="1838160"/>
-            <a:ext cx="378720" cy="378720"/>
+            <a:ext cx="378360" cy="378360"/>
           </a:xfrm>
           <a:custGeom>
             <a:avLst/>
@@ -13804,7 +13801,7 @@
         <p:spPr>
           <a:xfrm>
             <a:off x="4113000" y="1952640"/>
-            <a:ext cx="188280" cy="150120"/>
+            <a:ext cx="187920" cy="149760"/>
           </a:xfrm>
           <a:custGeom>
             <a:avLst/>
@@ -13985,7 +13982,7 @@
         <p:spPr>
           <a:xfrm>
             <a:off x="4512960" y="1895400"/>
-            <a:ext cx="1464840" cy="264600"/>
+            <a:ext cx="1464480" cy="264240"/>
           </a:xfrm>
           <a:prstGeom prst="rect">
             <a:avLst/>
@@ -14037,7 +14034,7 @@
         <p:spPr>
           <a:xfrm>
             <a:off x="4017600" y="2333520"/>
-            <a:ext cx="2950560" cy="864720"/>
+            <a:ext cx="2950200" cy="864360"/>
           </a:xfrm>
           <a:prstGeom prst="rect">
             <a:avLst/>
@@ -14089,7 +14086,7 @@
         <p:spPr>
           <a:xfrm>
             <a:off x="385920" y="3557520"/>
-            <a:ext cx="3274560" cy="1750320"/>
+            <a:ext cx="3274200" cy="1749960"/>
           </a:xfrm>
           <a:custGeom>
             <a:avLst/>
@@ -14165,7 +14162,7 @@
         <p:spPr>
           <a:xfrm>
             <a:off x="581040" y="3753000"/>
-            <a:ext cx="378720" cy="378720"/>
+            <a:ext cx="378360" cy="378360"/>
           </a:xfrm>
           <a:custGeom>
             <a:avLst/>
@@ -14238,7 +14235,7 @@
         <p:spPr>
           <a:xfrm>
             <a:off x="695160" y="3867120"/>
-            <a:ext cx="150120" cy="150120"/>
+            <a:ext cx="149760" cy="149760"/>
           </a:xfrm>
           <a:custGeom>
             <a:avLst/>
@@ -14461,7 +14458,7 @@
         <p:spPr>
           <a:xfrm>
             <a:off x="1076400" y="3809880"/>
-            <a:ext cx="1540800" cy="264600"/>
+            <a:ext cx="1540440" cy="264240"/>
           </a:xfrm>
           <a:prstGeom prst="rect">
             <a:avLst/>
@@ -14513,7 +14510,7 @@
         <p:spPr>
           <a:xfrm>
             <a:off x="581040" y="4248000"/>
-            <a:ext cx="2950560" cy="864720"/>
+            <a:ext cx="2950200" cy="864360"/>
           </a:xfrm>
           <a:prstGeom prst="rect">
             <a:avLst/>
@@ -14565,7 +14562,7 @@
         <p:spPr>
           <a:xfrm>
             <a:off x="3822480" y="3557520"/>
-            <a:ext cx="3274560" cy="1750320"/>
+            <a:ext cx="3274200" cy="1749960"/>
           </a:xfrm>
           <a:custGeom>
             <a:avLst/>
@@ -14641,7 +14638,7 @@
         <p:spPr>
           <a:xfrm>
             <a:off x="4017600" y="3753000"/>
-            <a:ext cx="378720" cy="378720"/>
+            <a:ext cx="378360" cy="378360"/>
           </a:xfrm>
           <a:custGeom>
             <a:avLst/>
@@ -14714,7 +14711,7 @@
         <p:spPr>
           <a:xfrm>
             <a:off x="4122360" y="3867120"/>
-            <a:ext cx="169200" cy="150120"/>
+            <a:ext cx="168840" cy="149760"/>
           </a:xfrm>
           <a:custGeom>
             <a:avLst/>
@@ -14806,7 +14803,7 @@
         <p:spPr>
           <a:xfrm>
             <a:off x="4512960" y="3809880"/>
-            <a:ext cx="1341000" cy="264600"/>
+            <a:ext cx="1340640" cy="264240"/>
           </a:xfrm>
           <a:prstGeom prst="rect">
             <a:avLst/>
@@ -14858,7 +14855,7 @@
         <p:spPr>
           <a:xfrm>
             <a:off x="4017600" y="4248000"/>
-            <a:ext cx="2950560" cy="864720"/>
+            <a:ext cx="2950200" cy="864360"/>
           </a:xfrm>
           <a:prstGeom prst="rect">
             <a:avLst/>
@@ -14910,7 +14907,7 @@
         <p:spPr>
           <a:xfrm>
             <a:off x="385920" y="5472000"/>
-            <a:ext cx="6712920" cy="1321920"/>
+            <a:ext cx="6712560" cy="1321560"/>
           </a:xfrm>
           <a:custGeom>
             <a:avLst/>
@@ -14986,7 +14983,7 @@
         <p:spPr>
           <a:xfrm>
             <a:off x="581040" y="5667480"/>
-            <a:ext cx="378720" cy="378720"/>
+            <a:ext cx="378360" cy="378360"/>
           </a:xfrm>
           <a:custGeom>
             <a:avLst/>
@@ -15059,7 +15056,7 @@
         <p:spPr>
           <a:xfrm>
             <a:off x="714240" y="5781600"/>
-            <a:ext cx="112320" cy="150120"/>
+            <a:ext cx="111960" cy="149760"/>
           </a:xfrm>
           <a:custGeom>
             <a:avLst/>
@@ -15170,7 +15167,7 @@
         <p:spPr>
           <a:xfrm>
             <a:off x="1076400" y="5724360"/>
-            <a:ext cx="2055240" cy="264600"/>
+            <a:ext cx="2054880" cy="264240"/>
           </a:xfrm>
           <a:prstGeom prst="rect">
             <a:avLst/>
@@ -15222,7 +15219,7 @@
         <p:spPr>
           <a:xfrm>
             <a:off x="581040" y="6162840"/>
-            <a:ext cx="6389280" cy="435960"/>
+            <a:ext cx="6388920" cy="435600"/>
           </a:xfrm>
           <a:prstGeom prst="rect">
             <a:avLst/>
@@ -15274,7 +15271,7 @@
         <p:spPr>
           <a:xfrm>
             <a:off x="7335360" y="1643040"/>
-            <a:ext cx="4465080" cy="3874680"/>
+            <a:ext cx="4464720" cy="3874320"/>
           </a:xfrm>
           <a:custGeom>
             <a:avLst/>
@@ -15350,7 +15347,7 @@
         <p:spPr>
           <a:xfrm>
             <a:off x="7611480" y="1895400"/>
-            <a:ext cx="198000" cy="226440"/>
+            <a:ext cx="197640" cy="226080"/>
           </a:xfrm>
           <a:custGeom>
             <a:avLst/>
@@ -15505,7 +15502,7 @@
         <p:spPr>
           <a:xfrm>
             <a:off x="7968600" y="1876320"/>
-            <a:ext cx="1540800" cy="264600"/>
+            <a:ext cx="1540440" cy="264240"/>
           </a:xfrm>
           <a:prstGeom prst="rect">
             <a:avLst/>
@@ -15557,7 +15554,7 @@
         <p:spPr>
           <a:xfrm>
             <a:off x="7587720" y="2295360"/>
-            <a:ext cx="3979440" cy="1083600"/>
+            <a:ext cx="3979080" cy="1083240"/>
           </a:xfrm>
           <a:custGeom>
             <a:avLst/>
@@ -15628,7 +15625,7 @@
         <p:spPr>
           <a:xfrm>
             <a:off x="7587720" y="2295360"/>
-            <a:ext cx="36000" cy="1083600"/>
+            <a:ext cx="35640" cy="1083240"/>
           </a:xfrm>
           <a:custGeom>
             <a:avLst/>
@@ -15689,7 +15686,7 @@
         <p:spPr>
           <a:xfrm>
             <a:off x="7759080" y="2448000"/>
-            <a:ext cx="3741120" cy="264600"/>
+            <a:ext cx="3740760" cy="264240"/>
           </a:xfrm>
           <a:prstGeom prst="rect">
             <a:avLst/>
@@ -15741,7 +15738,7 @@
         <p:spPr>
           <a:xfrm>
             <a:off x="7759080" y="2790720"/>
-            <a:ext cx="3722040" cy="435960"/>
+            <a:ext cx="3721680" cy="435600"/>
           </a:xfrm>
           <a:prstGeom prst="rect">
             <a:avLst/>
@@ -15793,7 +15790,7 @@
         <p:spPr>
           <a:xfrm>
             <a:off x="7568640" y="3529080"/>
-            <a:ext cx="302760" cy="302760"/>
+            <a:ext cx="302400" cy="302400"/>
           </a:xfrm>
           <a:custGeom>
             <a:avLst/>
@@ -15866,7 +15863,7 @@
         <p:spPr>
           <a:xfrm>
             <a:off x="7673400" y="3614760"/>
-            <a:ext cx="97920" cy="131040"/>
+            <a:ext cx="97560" cy="130680"/>
           </a:xfrm>
           <a:custGeom>
             <a:avLst/>
@@ -15998,7 +15995,7 @@
         <p:spPr>
           <a:xfrm>
             <a:off x="7987680" y="3586320"/>
-            <a:ext cx="1017000" cy="188280"/>
+            <a:ext cx="1016640" cy="187920"/>
           </a:xfrm>
           <a:prstGeom prst="rect">
             <a:avLst/>
@@ -16050,7 +16047,7 @@
         <p:spPr>
           <a:xfrm>
             <a:off x="7568640" y="3948120"/>
-            <a:ext cx="302760" cy="302760"/>
+            <a:ext cx="302400" cy="302400"/>
           </a:xfrm>
           <a:custGeom>
             <a:avLst/>
@@ -16123,7 +16120,7 @@
         <p:spPr>
           <a:xfrm>
             <a:off x="7639920" y="4033800"/>
-            <a:ext cx="164520" cy="131040"/>
+            <a:ext cx="164160" cy="130680"/>
           </a:xfrm>
           <a:custGeom>
             <a:avLst/>
@@ -16339,7 +16336,7 @@
         <p:spPr>
           <a:xfrm>
             <a:off x="7987680" y="4005360"/>
-            <a:ext cx="2160000" cy="188280"/>
+            <a:ext cx="2159640" cy="187920"/>
           </a:xfrm>
           <a:prstGeom prst="rect">
             <a:avLst/>
@@ -16391,7 +16388,7 @@
         <p:spPr>
           <a:xfrm>
             <a:off x="7568640" y="4367160"/>
-            <a:ext cx="302760" cy="302760"/>
+            <a:ext cx="302400" cy="302400"/>
           </a:xfrm>
           <a:custGeom>
             <a:avLst/>
@@ -16464,7 +16461,7 @@
         <p:spPr>
           <a:xfrm>
             <a:off x="7656840" y="4452840"/>
-            <a:ext cx="131040" cy="131040"/>
+            <a:ext cx="130680" cy="130680"/>
           </a:xfrm>
           <a:custGeom>
             <a:avLst/>
@@ -16641,7 +16638,7 @@
         <p:spPr>
           <a:xfrm>
             <a:off x="7987680" y="4424400"/>
-            <a:ext cx="2493360" cy="188280"/>
+            <a:ext cx="2493000" cy="187920"/>
           </a:xfrm>
           <a:prstGeom prst="rect">
             <a:avLst/>
@@ -16693,7 +16690,7 @@
         <p:spPr>
           <a:xfrm>
             <a:off x="7335360" y="5676840"/>
-            <a:ext cx="4465080" cy="1112400"/>
+            <a:ext cx="4464720" cy="1112040"/>
           </a:xfrm>
           <a:custGeom>
             <a:avLst/>
@@ -16769,7 +16766,7 @@
         <p:spPr>
           <a:xfrm>
             <a:off x="7497000" y="5872320"/>
-            <a:ext cx="4141080" cy="188280"/>
+            <a:ext cx="4140720" cy="187920"/>
           </a:xfrm>
           <a:prstGeom prst="rect">
             <a:avLst/>
@@ -16821,7 +16818,7 @@
         <p:spPr>
           <a:xfrm>
             <a:off x="7492320" y="6138720"/>
-            <a:ext cx="4150800" cy="226440"/>
+            <a:ext cx="4150440" cy="226080"/>
           </a:xfrm>
           <a:prstGeom prst="rect">
             <a:avLst/>
@@ -16873,7 +16870,7 @@
         <p:spPr>
           <a:xfrm>
             <a:off x="7497000" y="6405480"/>
-            <a:ext cx="4141080" cy="188280"/>
+            <a:ext cx="4140720" cy="187920"/>
           </a:xfrm>
           <a:prstGeom prst="rect">
             <a:avLst/>
@@ -16962,7 +16959,7 @@
         <p:spPr>
           <a:xfrm>
             <a:off x="380880" y="380880"/>
-            <a:ext cx="11494440" cy="188280"/>
+            <a:ext cx="11494080" cy="187920"/>
           </a:xfrm>
           <a:prstGeom prst="rect">
             <a:avLst/>
@@ -16990,7 +16987,7 @@
               <a:buNone/>
             </a:pPr>
             <a:r>
-              <a:rPr b="1" lang="en-US" sz="1050" spc="38" strike="noStrike">
+              <a:rPr b="1" lang="en-US" sz="1050" spc="35" strike="noStrike">
                 <a:solidFill>
                   <a:srgbClr val="6366f1"/>
                 </a:solidFill>
@@ -17014,7 +17011,7 @@
         <p:spPr>
           <a:xfrm>
             <a:off x="380880" y="647640"/>
-            <a:ext cx="11656440" cy="455040"/>
+            <a:ext cx="11656080" cy="454680"/>
           </a:xfrm>
           <a:prstGeom prst="rect">
             <a:avLst/>
@@ -17066,7 +17063,7 @@
         <p:spPr>
           <a:xfrm>
             <a:off x="385920" y="1414440"/>
-            <a:ext cx="3674520" cy="1798200"/>
+            <a:ext cx="3674160" cy="1797840"/>
           </a:xfrm>
           <a:custGeom>
             <a:avLst/>
@@ -17140,7 +17137,7 @@
         <p:spPr>
           <a:xfrm>
             <a:off x="619200" y="1647720"/>
-            <a:ext cx="455040" cy="455040"/>
+            <a:ext cx="454680" cy="454680"/>
           </a:xfrm>
           <a:custGeom>
             <a:avLst/>
@@ -17213,7 +17210,7 @@
         <p:spPr>
           <a:xfrm>
             <a:off x="748800" y="1743120"/>
-            <a:ext cx="293040" cy="264600"/>
+            <a:ext cx="292680" cy="264240"/>
           </a:xfrm>
           <a:prstGeom prst="rect">
             <a:avLst/>
@@ -17265,7 +17262,7 @@
         <p:spPr>
           <a:xfrm>
             <a:off x="619200" y="2257560"/>
-            <a:ext cx="3303000" cy="264600"/>
+            <a:ext cx="3302640" cy="264240"/>
           </a:xfrm>
           <a:prstGeom prst="rect">
             <a:avLst/>
@@ -17317,7 +17314,7 @@
         <p:spPr>
           <a:xfrm>
             <a:off x="619200" y="2600280"/>
-            <a:ext cx="3274560" cy="378720"/>
+            <a:ext cx="3274200" cy="378360"/>
           </a:xfrm>
           <a:prstGeom prst="rect">
             <a:avLst/>
@@ -17369,7 +17366,7 @@
         <p:spPr>
           <a:xfrm>
             <a:off x="4259160" y="1414440"/>
-            <a:ext cx="3674520" cy="1798200"/>
+            <a:ext cx="3674160" cy="1797840"/>
           </a:xfrm>
           <a:custGeom>
             <a:avLst/>
@@ -17443,7 +17440,7 @@
         <p:spPr>
           <a:xfrm>
             <a:off x="4492440" y="1647720"/>
-            <a:ext cx="455040" cy="455040"/>
+            <a:ext cx="454680" cy="454680"/>
           </a:xfrm>
           <a:custGeom>
             <a:avLst/>
@@ -17516,7 +17513,7 @@
         <p:spPr>
           <a:xfrm>
             <a:off x="4605120" y="1743120"/>
-            <a:ext cx="321840" cy="264600"/>
+            <a:ext cx="321480" cy="264240"/>
           </a:xfrm>
           <a:prstGeom prst="rect">
             <a:avLst/>
@@ -17568,7 +17565,7 @@
         <p:spPr>
           <a:xfrm>
             <a:off x="4492440" y="2257560"/>
-            <a:ext cx="3303000" cy="264600"/>
+            <a:ext cx="3302640" cy="264240"/>
           </a:xfrm>
           <a:prstGeom prst="rect">
             <a:avLst/>
@@ -17620,7 +17617,7 @@
         <p:spPr>
           <a:xfrm>
             <a:off x="4492440" y="2600280"/>
-            <a:ext cx="3274560" cy="188280"/>
+            <a:ext cx="3274200" cy="187920"/>
           </a:xfrm>
           <a:prstGeom prst="rect">
             <a:avLst/>
@@ -17672,7 +17669,7 @@
         <p:spPr>
           <a:xfrm>
             <a:off x="8132760" y="1414440"/>
-            <a:ext cx="3674520" cy="1798200"/>
+            <a:ext cx="3674160" cy="1797840"/>
           </a:xfrm>
           <a:custGeom>
             <a:avLst/>
@@ -17746,7 +17743,7 @@
         <p:spPr>
           <a:xfrm>
             <a:off x="8366040" y="1647720"/>
-            <a:ext cx="455040" cy="455040"/>
+            <a:ext cx="454680" cy="454680"/>
           </a:xfrm>
           <a:custGeom>
             <a:avLst/>
@@ -17819,7 +17816,7 @@
         <p:spPr>
           <a:xfrm>
             <a:off x="8477640" y="1743120"/>
-            <a:ext cx="331200" cy="264600"/>
+            <a:ext cx="330840" cy="264240"/>
           </a:xfrm>
           <a:prstGeom prst="rect">
             <a:avLst/>
@@ -17871,7 +17868,7 @@
         <p:spPr>
           <a:xfrm>
             <a:off x="8366040" y="2257560"/>
-            <a:ext cx="3303000" cy="264600"/>
+            <a:ext cx="3302640" cy="264240"/>
           </a:xfrm>
           <a:prstGeom prst="rect">
             <a:avLst/>
@@ -17923,7 +17920,7 @@
         <p:spPr>
           <a:xfrm>
             <a:off x="8366040" y="2600280"/>
-            <a:ext cx="3274560" cy="188280"/>
+            <a:ext cx="3274200" cy="187920"/>
           </a:xfrm>
           <a:prstGeom prst="rect">
             <a:avLst/>
@@ -17975,7 +17972,7 @@
         <p:spPr>
           <a:xfrm>
             <a:off x="385920" y="3414600"/>
-            <a:ext cx="3674520" cy="1607400"/>
+            <a:ext cx="3674160" cy="1607040"/>
           </a:xfrm>
           <a:custGeom>
             <a:avLst/>
@@ -18049,7 +18046,7 @@
         <p:spPr>
           <a:xfrm>
             <a:off x="619200" y="3648240"/>
-            <a:ext cx="455040" cy="455040"/>
+            <a:ext cx="454680" cy="454680"/>
           </a:xfrm>
           <a:custGeom>
             <a:avLst/>
@@ -18122,7 +18119,7 @@
         <p:spPr>
           <a:xfrm>
             <a:off x="730800" y="3743280"/>
-            <a:ext cx="331200" cy="264600"/>
+            <a:ext cx="330840" cy="264240"/>
           </a:xfrm>
           <a:prstGeom prst="rect">
             <a:avLst/>
@@ -18174,7 +18171,7 @@
         <p:spPr>
           <a:xfrm>
             <a:off x="619200" y="4257720"/>
-            <a:ext cx="3303000" cy="264600"/>
+            <a:ext cx="3302640" cy="264240"/>
           </a:xfrm>
           <a:prstGeom prst="rect">
             <a:avLst/>
@@ -18226,7 +18223,7 @@
         <p:spPr>
           <a:xfrm>
             <a:off x="619200" y="4600440"/>
-            <a:ext cx="3274560" cy="188280"/>
+            <a:ext cx="3274200" cy="187920"/>
           </a:xfrm>
           <a:prstGeom prst="rect">
             <a:avLst/>
@@ -18278,7 +18275,7 @@
         <p:spPr>
           <a:xfrm>
             <a:off x="4259160" y="3414600"/>
-            <a:ext cx="3674520" cy="1607400"/>
+            <a:ext cx="3674160" cy="1607040"/>
           </a:xfrm>
           <a:custGeom>
             <a:avLst/>
@@ -18352,7 +18349,7 @@
         <p:spPr>
           <a:xfrm>
             <a:off x="4492440" y="3648240"/>
-            <a:ext cx="455040" cy="455040"/>
+            <a:ext cx="454680" cy="454680"/>
           </a:xfrm>
           <a:custGeom>
             <a:avLst/>
@@ -18425,7 +18422,7 @@
         <p:spPr>
           <a:xfrm>
             <a:off x="4605480" y="3743280"/>
-            <a:ext cx="321840" cy="264600"/>
+            <a:ext cx="321480" cy="264240"/>
           </a:xfrm>
           <a:prstGeom prst="rect">
             <a:avLst/>
@@ -18477,7 +18474,7 @@
         <p:spPr>
           <a:xfrm>
             <a:off x="4492440" y="4257720"/>
-            <a:ext cx="3303000" cy="264600"/>
+            <a:ext cx="3302640" cy="264240"/>
           </a:xfrm>
           <a:prstGeom prst="rect">
             <a:avLst/>
@@ -18529,7 +18526,7 @@
         <p:spPr>
           <a:xfrm>
             <a:off x="4492440" y="4600440"/>
-            <a:ext cx="3274560" cy="188280"/>
+            <a:ext cx="3274200" cy="187920"/>
           </a:xfrm>
           <a:prstGeom prst="rect">
             <a:avLst/>
@@ -18581,7 +18578,7 @@
         <p:spPr>
           <a:xfrm>
             <a:off x="8132760" y="3414600"/>
-            <a:ext cx="3674520" cy="1607400"/>
+            <a:ext cx="3674160" cy="1607040"/>
           </a:xfrm>
           <a:custGeom>
             <a:avLst/>
@@ -18655,7 +18652,7 @@
         <p:spPr>
           <a:xfrm>
             <a:off x="8366040" y="3648240"/>
-            <a:ext cx="455040" cy="455040"/>
+            <a:ext cx="454680" cy="454680"/>
           </a:xfrm>
           <a:custGeom>
             <a:avLst/>
@@ -18728,7 +18725,7 @@
         <p:spPr>
           <a:xfrm>
             <a:off x="8476920" y="3743280"/>
-            <a:ext cx="331200" cy="264600"/>
+            <a:ext cx="330840" cy="264240"/>
           </a:xfrm>
           <a:prstGeom prst="rect">
             <a:avLst/>
@@ -18780,7 +18777,7 @@
         <p:spPr>
           <a:xfrm>
             <a:off x="8366040" y="4257720"/>
-            <a:ext cx="3303000" cy="264600"/>
+            <a:ext cx="3302640" cy="264240"/>
           </a:xfrm>
           <a:prstGeom prst="rect">
             <a:avLst/>
@@ -18832,7 +18829,7 @@
         <p:spPr>
           <a:xfrm>
             <a:off x="8366040" y="4600440"/>
-            <a:ext cx="3274560" cy="188280"/>
+            <a:ext cx="3274200" cy="187920"/>
           </a:xfrm>
           <a:prstGeom prst="rect">
             <a:avLst/>
@@ -18884,7 +18881,7 @@
         <p:spPr>
           <a:xfrm>
             <a:off x="385920" y="5224320"/>
-            <a:ext cx="3674520" cy="1607400"/>
+            <a:ext cx="3674160" cy="1607040"/>
           </a:xfrm>
           <a:custGeom>
             <a:avLst/>
@@ -18958,7 +18955,7 @@
         <p:spPr>
           <a:xfrm>
             <a:off x="619200" y="5457960"/>
-            <a:ext cx="455040" cy="455040"/>
+            <a:ext cx="454680" cy="454680"/>
           </a:xfrm>
           <a:custGeom>
             <a:avLst/>
@@ -19031,7 +19028,7 @@
         <p:spPr>
           <a:xfrm>
             <a:off x="738360" y="5553000"/>
-            <a:ext cx="312120" cy="264600"/>
+            <a:ext cx="311760" cy="264240"/>
           </a:xfrm>
           <a:prstGeom prst="rect">
             <a:avLst/>
@@ -19083,7 +19080,7 @@
         <p:spPr>
           <a:xfrm>
             <a:off x="619200" y="6067440"/>
-            <a:ext cx="3303000" cy="264600"/>
+            <a:ext cx="3302640" cy="264240"/>
           </a:xfrm>
           <a:prstGeom prst="rect">
             <a:avLst/>
@@ -19135,7 +19132,7 @@
         <p:spPr>
           <a:xfrm>
             <a:off x="619200" y="6410160"/>
-            <a:ext cx="3274560" cy="188280"/>
+            <a:ext cx="3274200" cy="187920"/>
           </a:xfrm>
           <a:prstGeom prst="rect">
             <a:avLst/>
@@ -19187,7 +19184,7 @@
         <p:spPr>
           <a:xfrm>
             <a:off x="4259160" y="5224320"/>
-            <a:ext cx="3674520" cy="1607400"/>
+            <a:ext cx="3674160" cy="1607040"/>
           </a:xfrm>
           <a:custGeom>
             <a:avLst/>
@@ -19261,7 +19258,7 @@
         <p:spPr>
           <a:xfrm>
             <a:off x="4492440" y="5457960"/>
-            <a:ext cx="455040" cy="455040"/>
+            <a:ext cx="454680" cy="454680"/>
           </a:xfrm>
           <a:custGeom>
             <a:avLst/>
@@ -19334,7 +19331,7 @@
         <p:spPr>
           <a:xfrm>
             <a:off x="4601880" y="5553000"/>
-            <a:ext cx="331200" cy="264600"/>
+            <a:ext cx="330840" cy="264240"/>
           </a:xfrm>
           <a:prstGeom prst="rect">
             <a:avLst/>
@@ -19386,7 +19383,7 @@
         <p:spPr>
           <a:xfrm>
             <a:off x="4492440" y="6067440"/>
-            <a:ext cx="3303000" cy="264600"/>
+            <a:ext cx="3302640" cy="264240"/>
           </a:xfrm>
           <a:prstGeom prst="rect">
             <a:avLst/>
@@ -19438,7 +19435,7 @@
         <p:spPr>
           <a:xfrm>
             <a:off x="4492440" y="6410160"/>
-            <a:ext cx="3274560" cy="188280"/>
+            <a:ext cx="3274200" cy="187920"/>
           </a:xfrm>
           <a:prstGeom prst="rect">
             <a:avLst/>
@@ -19490,7 +19487,7 @@
         <p:spPr>
           <a:xfrm>
             <a:off x="8132760" y="5224320"/>
-            <a:ext cx="3674520" cy="1607400"/>
+            <a:ext cx="3674160" cy="1607040"/>
           </a:xfrm>
           <a:custGeom>
             <a:avLst/>
@@ -19564,7 +19561,7 @@
         <p:spPr>
           <a:xfrm>
             <a:off x="8366040" y="5457960"/>
-            <a:ext cx="455040" cy="455040"/>
+            <a:ext cx="454680" cy="454680"/>
           </a:xfrm>
           <a:custGeom>
             <a:avLst/>
@@ -19637,7 +19634,7 @@
         <p:spPr>
           <a:xfrm>
             <a:off x="8476920" y="5553000"/>
-            <a:ext cx="331200" cy="264600"/>
+            <a:ext cx="330840" cy="264240"/>
           </a:xfrm>
           <a:prstGeom prst="rect">
             <a:avLst/>
@@ -19689,7 +19686,7 @@
         <p:spPr>
           <a:xfrm>
             <a:off x="8366040" y="6067440"/>
-            <a:ext cx="3303000" cy="264600"/>
+            <a:ext cx="3302640" cy="264240"/>
           </a:xfrm>
           <a:prstGeom prst="rect">
             <a:avLst/>
@@ -19741,7 +19738,7 @@
         <p:spPr>
           <a:xfrm>
             <a:off x="8366040" y="6410160"/>
-            <a:ext cx="3274560" cy="188280"/>
+            <a:ext cx="3274200" cy="187920"/>
           </a:xfrm>
           <a:prstGeom prst="rect">
             <a:avLst/>
@@ -19830,7 +19827,7 @@
         <p:spPr>
           <a:xfrm>
             <a:off x="379080" y="379080"/>
-            <a:ext cx="11498400" cy="187200"/>
+            <a:ext cx="11498040" cy="186840"/>
           </a:xfrm>
           <a:prstGeom prst="rect">
             <a:avLst/>
@@ -19858,7 +19855,7 @@
               <a:buNone/>
             </a:pPr>
             <a:r>
-              <a:rPr b="1" lang="en-US" sz="1050" spc="35" strike="noStrike">
+              <a:rPr b="1" lang="en-US" sz="1050" spc="32" strike="noStrike">
                 <a:solidFill>
                   <a:srgbClr val="6366f1"/>
                 </a:solidFill>
@@ -19882,7 +19879,7 @@
         <p:spPr>
           <a:xfrm>
             <a:off x="379080" y="644040"/>
-            <a:ext cx="11602440" cy="376920"/>
+            <a:ext cx="11602080" cy="376560"/>
           </a:xfrm>
           <a:prstGeom prst="rect">
             <a:avLst/>
@@ -19934,7 +19931,7 @@
         <p:spPr>
           <a:xfrm>
             <a:off x="383760" y="1255320"/>
-            <a:ext cx="6648120" cy="1731600"/>
+            <a:ext cx="6647760" cy="1731240"/>
           </a:xfrm>
           <a:custGeom>
             <a:avLst/>
@@ -20008,7 +20005,7 @@
         <p:spPr>
           <a:xfrm>
             <a:off x="615600" y="1487160"/>
-            <a:ext cx="376920" cy="376920"/>
+            <a:ext cx="376560" cy="376560"/>
           </a:xfrm>
           <a:custGeom>
             <a:avLst/>
@@ -20081,7 +20078,7 @@
         <p:spPr>
           <a:xfrm>
             <a:off x="729360" y="1600920"/>
-            <a:ext cx="149400" cy="149400"/>
+            <a:ext cx="149040" cy="149040"/>
           </a:xfrm>
           <a:custGeom>
             <a:avLst/>
@@ -20205,7 +20202,7 @@
         <p:spPr>
           <a:xfrm>
             <a:off x="1108440" y="1544040"/>
-            <a:ext cx="2413440" cy="263160"/>
+            <a:ext cx="2413080" cy="262800"/>
           </a:xfrm>
           <a:prstGeom prst="rect">
             <a:avLst/>
@@ -20257,7 +20254,7 @@
         <p:spPr>
           <a:xfrm>
             <a:off x="615600" y="2017800"/>
-            <a:ext cx="6259680" cy="736920"/>
+            <a:ext cx="6259320" cy="736560"/>
           </a:xfrm>
           <a:prstGeom prst="rect">
             <a:avLst/>
@@ -20349,7 +20346,7 @@
         <p:spPr>
           <a:xfrm>
             <a:off x="383760" y="3187800"/>
-            <a:ext cx="6648120" cy="1731600"/>
+            <a:ext cx="6647760" cy="1731240"/>
           </a:xfrm>
           <a:custGeom>
             <a:avLst/>
@@ -20423,7 +20420,7 @@
         <p:spPr>
           <a:xfrm>
             <a:off x="615600" y="3420000"/>
-            <a:ext cx="376920" cy="376920"/>
+            <a:ext cx="376560" cy="376560"/>
           </a:xfrm>
           <a:custGeom>
             <a:avLst/>
@@ -20496,7 +20493,7 @@
         <p:spPr>
           <a:xfrm>
             <a:off x="710640" y="3533400"/>
-            <a:ext cx="187200" cy="149400"/>
+            <a:ext cx="186840" cy="149040"/>
           </a:xfrm>
           <a:custGeom>
             <a:avLst/>
@@ -20677,7 +20674,7 @@
         <p:spPr>
           <a:xfrm>
             <a:off x="1108440" y="3476520"/>
-            <a:ext cx="1646280" cy="263160"/>
+            <a:ext cx="1645920" cy="262800"/>
           </a:xfrm>
           <a:prstGeom prst="rect">
             <a:avLst/>
@@ -20729,7 +20726,7 @@
         <p:spPr>
           <a:xfrm>
             <a:off x="615600" y="3950280"/>
-            <a:ext cx="6259680" cy="736920"/>
+            <a:ext cx="6259320" cy="736560"/>
           </a:xfrm>
           <a:prstGeom prst="rect">
             <a:avLst/>
@@ -20821,7 +20818,7 @@
         <p:spPr>
           <a:xfrm>
             <a:off x="383760" y="5120280"/>
-            <a:ext cx="6648120" cy="1731600"/>
+            <a:ext cx="6647760" cy="1731240"/>
           </a:xfrm>
           <a:custGeom>
             <a:avLst/>
@@ -20895,7 +20892,7 @@
         <p:spPr>
           <a:xfrm>
             <a:off x="615600" y="5352480"/>
-            <a:ext cx="376920" cy="376920"/>
+            <a:ext cx="376560" cy="376560"/>
           </a:xfrm>
           <a:custGeom>
             <a:avLst/>
@@ -20968,7 +20965,7 @@
         <p:spPr>
           <a:xfrm>
             <a:off x="729360" y="5465880"/>
-            <a:ext cx="149400" cy="149400"/>
+            <a:ext cx="149040" cy="149040"/>
           </a:xfrm>
           <a:custGeom>
             <a:avLst/>
@@ -21191,7 +21188,7 @@
         <p:spPr>
           <a:xfrm>
             <a:off x="1108440" y="5409360"/>
-            <a:ext cx="1977840" cy="263160"/>
+            <a:ext cx="1977480" cy="262800"/>
           </a:xfrm>
           <a:prstGeom prst="rect">
             <a:avLst/>
@@ -21243,7 +21240,7 @@
         <p:spPr>
           <a:xfrm>
             <a:off x="615600" y="5882760"/>
-            <a:ext cx="6259680" cy="736920"/>
+            <a:ext cx="6259320" cy="736560"/>
           </a:xfrm>
           <a:prstGeom prst="rect">
             <a:avLst/>
@@ -21315,7 +21312,7 @@
         <p:spPr>
           <a:xfrm>
             <a:off x="7271640" y="1255320"/>
-            <a:ext cx="4535640" cy="5596560"/>
+            <a:ext cx="4535280" cy="5596200"/>
           </a:xfrm>
           <a:custGeom>
             <a:avLst/>
@@ -21389,7 +21386,7 @@
         <p:spPr>
           <a:xfrm>
             <a:off x="7503840" y="1487160"/>
-            <a:ext cx="376920" cy="376920"/>
+            <a:ext cx="376560" cy="376560"/>
           </a:xfrm>
           <a:custGeom>
             <a:avLst/>
@@ -21462,7 +21459,7 @@
         <p:spPr>
           <a:xfrm>
             <a:off x="7626960" y="1600920"/>
-            <a:ext cx="130320" cy="149400"/>
+            <a:ext cx="129960" cy="149040"/>
           </a:xfrm>
           <a:custGeom>
             <a:avLst/>
@@ -21617,7 +21614,7 @@
         <p:spPr>
           <a:xfrm>
             <a:off x="7996320" y="1544040"/>
-            <a:ext cx="1939680" cy="263160"/>
+            <a:ext cx="1939320" cy="262800"/>
           </a:xfrm>
           <a:prstGeom prst="rect">
             <a:avLst/>
@@ -21669,7 +21666,7 @@
         <p:spPr>
           <a:xfrm>
             <a:off x="7522920" y="2017800"/>
-            <a:ext cx="4052520" cy="3332520"/>
+            <a:ext cx="4052160" cy="3332160"/>
           </a:xfrm>
           <a:custGeom>
             <a:avLst/>
@@ -21740,7 +21737,7 @@
         <p:spPr>
           <a:xfrm>
             <a:off x="7522920" y="2017800"/>
-            <a:ext cx="35640" cy="3332520"/>
+            <a:ext cx="35280" cy="3332160"/>
           </a:xfrm>
           <a:custGeom>
             <a:avLst/>
@@ -21801,7 +21798,7 @@
         <p:spPr>
           <a:xfrm>
             <a:off x="7731000" y="2821680"/>
-            <a:ext cx="3739680" cy="1380960"/>
+            <a:ext cx="3739320" cy="1380600"/>
           </a:xfrm>
           <a:prstGeom prst="rect">
             <a:avLst/>
@@ -21853,7 +21850,7 @@
         <p:spPr>
           <a:xfrm>
             <a:off x="7731000" y="4358880"/>
-            <a:ext cx="3720960" cy="187200"/>
+            <a:ext cx="3720600" cy="186840"/>
           </a:xfrm>
           <a:prstGeom prst="rect">
             <a:avLst/>
@@ -21915,7 +21912,7 @@
         <p:spPr>
           <a:xfrm>
             <a:off x="7508520" y="5546520"/>
-            <a:ext cx="1949400" cy="1068480"/>
+            <a:ext cx="1949040" cy="1068120"/>
           </a:xfrm>
           <a:custGeom>
             <a:avLst/>
@@ -21989,7 +21986,7 @@
         <p:spPr>
           <a:xfrm>
             <a:off x="7631640" y="5702760"/>
-            <a:ext cx="1703160" cy="187200"/>
+            <a:ext cx="1702800" cy="186840"/>
           </a:xfrm>
           <a:prstGeom prst="rect">
             <a:avLst/>
@@ -22041,7 +22038,7 @@
         <p:spPr>
           <a:xfrm>
             <a:off x="7593840" y="5930280"/>
-            <a:ext cx="1778760" cy="338760"/>
+            <a:ext cx="1778400" cy="338400"/>
           </a:xfrm>
           <a:prstGeom prst="rect">
             <a:avLst/>
@@ -22093,7 +22090,7 @@
         <p:spPr>
           <a:xfrm>
             <a:off x="7636320" y="6309000"/>
-            <a:ext cx="1693440" cy="149400"/>
+            <a:ext cx="1693080" cy="149040"/>
           </a:xfrm>
           <a:prstGeom prst="rect">
             <a:avLst/>
@@ -22145,7 +22142,7 @@
         <p:spPr>
           <a:xfrm>
             <a:off x="9621000" y="5546520"/>
-            <a:ext cx="1949400" cy="1068480"/>
+            <a:ext cx="1949040" cy="1068120"/>
           </a:xfrm>
           <a:custGeom>
             <a:avLst/>
@@ -22219,7 +22216,7 @@
         <p:spPr>
           <a:xfrm>
             <a:off x="9744120" y="5702760"/>
-            <a:ext cx="1703160" cy="187200"/>
+            <a:ext cx="1702800" cy="186840"/>
           </a:xfrm>
           <a:prstGeom prst="rect">
             <a:avLst/>
@@ -22271,7 +22268,7 @@
         <p:spPr>
           <a:xfrm>
             <a:off x="9706320" y="5930280"/>
-            <a:ext cx="1778760" cy="338760"/>
+            <a:ext cx="1778400" cy="338400"/>
           </a:xfrm>
           <a:prstGeom prst="rect">
             <a:avLst/>
@@ -22323,7 +22320,7 @@
         <p:spPr>
           <a:xfrm>
             <a:off x="9748800" y="6309000"/>
-            <a:ext cx="1693440" cy="149400"/>
+            <a:ext cx="1693080" cy="149040"/>
           </a:xfrm>
           <a:prstGeom prst="rect">
             <a:avLst/>
@@ -22412,7 +22409,7 @@
         <p:spPr>
           <a:xfrm>
             <a:off x="365400" y="365400"/>
-            <a:ext cx="11523240" cy="180360"/>
+            <a:ext cx="11522880" cy="180000"/>
           </a:xfrm>
           <a:prstGeom prst="rect">
             <a:avLst/>
@@ -22440,7 +22437,7 @@
               <a:buNone/>
             </a:pPr>
             <a:r>
-              <a:rPr b="1" lang="en-US" sz="1010" spc="35" strike="noStrike">
+              <a:rPr b="1" lang="en-US" sz="1010" spc="32" strike="noStrike">
                 <a:solidFill>
                   <a:srgbClr val="6366f1"/>
                 </a:solidFill>
@@ -22464,7 +22461,7 @@
         <p:spPr>
           <a:xfrm>
             <a:off x="365400" y="621000"/>
-            <a:ext cx="11623680" cy="363240"/>
+            <a:ext cx="11623320" cy="362880"/>
           </a:xfrm>
           <a:prstGeom prst="rect">
             <a:avLst/>
@@ -22516,7 +22513,7 @@
         <p:spPr>
           <a:xfrm>
             <a:off x="365400" y="1059480"/>
-            <a:ext cx="11532240" cy="217080"/>
+            <a:ext cx="11531880" cy="216720"/>
           </a:xfrm>
           <a:prstGeom prst="rect">
             <a:avLst/>
@@ -22568,7 +22565,7 @@
         <p:spPr>
           <a:xfrm>
             <a:off x="369720" y="1356120"/>
-            <a:ext cx="3175920" cy="1248840"/>
+            <a:ext cx="3175560" cy="1248480"/>
           </a:xfrm>
           <a:custGeom>
             <a:avLst/>
@@ -22642,7 +22639,7 @@
         <p:spPr>
           <a:xfrm>
             <a:off x="556920" y="1561680"/>
-            <a:ext cx="609840" cy="180360"/>
+            <a:ext cx="609480" cy="180000"/>
           </a:xfrm>
           <a:prstGeom prst="rect">
             <a:avLst/>
@@ -22694,7 +22691,7 @@
         <p:spPr>
           <a:xfrm>
             <a:off x="2957760" y="1543320"/>
-            <a:ext cx="399600" cy="217080"/>
+            <a:ext cx="399240" cy="216720"/>
           </a:xfrm>
           <a:custGeom>
             <a:avLst/>
@@ -22767,7 +22764,7 @@
         <p:spPr>
           <a:xfrm>
             <a:off x="2957760" y="1543320"/>
-            <a:ext cx="454320" cy="217080"/>
+            <a:ext cx="453960" cy="216720"/>
           </a:xfrm>
           <a:prstGeom prst="rect">
             <a:avLst/>
@@ -22819,7 +22816,7 @@
         <p:spPr>
           <a:xfrm>
             <a:off x="556920" y="1872360"/>
-            <a:ext cx="2966040" cy="363240"/>
+            <a:ext cx="2965680" cy="362880"/>
           </a:xfrm>
           <a:prstGeom prst="rect">
             <a:avLst/>
@@ -22871,7 +22868,7 @@
         <p:spPr>
           <a:xfrm>
             <a:off x="556920" y="2274120"/>
-            <a:ext cx="2856240" cy="144000"/>
+            <a:ext cx="2855880" cy="143640"/>
           </a:xfrm>
           <a:prstGeom prst="rect">
             <a:avLst/>
@@ -22923,7 +22920,7 @@
         <p:spPr>
           <a:xfrm>
             <a:off x="3700800" y="1356120"/>
-            <a:ext cx="3175920" cy="1248840"/>
+            <a:ext cx="3175560" cy="1248480"/>
           </a:xfrm>
           <a:custGeom>
             <a:avLst/>
@@ -22997,7 +22994,7 @@
         <p:spPr>
           <a:xfrm>
             <a:off x="3888000" y="1561680"/>
-            <a:ext cx="728280" cy="180360"/>
+            <a:ext cx="727920" cy="180000"/>
           </a:xfrm>
           <a:prstGeom prst="rect">
             <a:avLst/>
@@ -23049,7 +23046,7 @@
         <p:spPr>
           <a:xfrm>
             <a:off x="6268320" y="1543320"/>
-            <a:ext cx="417960" cy="217080"/>
+            <a:ext cx="417600" cy="216720"/>
           </a:xfrm>
           <a:custGeom>
             <a:avLst/>
@@ -23122,7 +23119,7 @@
         <p:spPr>
           <a:xfrm>
             <a:off x="6268320" y="1543320"/>
-            <a:ext cx="472680" cy="217080"/>
+            <a:ext cx="472320" cy="216720"/>
           </a:xfrm>
           <a:prstGeom prst="rect">
             <a:avLst/>
@@ -23174,7 +23171,7 @@
         <p:spPr>
           <a:xfrm>
             <a:off x="3888000" y="1872360"/>
-            <a:ext cx="2966040" cy="363240"/>
+            <a:ext cx="2965680" cy="362880"/>
           </a:xfrm>
           <a:prstGeom prst="rect">
             <a:avLst/>
@@ -23226,7 +23223,7 @@
         <p:spPr>
           <a:xfrm>
             <a:off x="3888000" y="2274120"/>
-            <a:ext cx="2856240" cy="144000"/>
+            <a:ext cx="2855880" cy="143640"/>
           </a:xfrm>
           <a:prstGeom prst="rect">
             <a:avLst/>
@@ -23278,7 +23275,7 @@
         <p:spPr>
           <a:xfrm>
             <a:off x="369720" y="2762640"/>
-            <a:ext cx="3175920" cy="1248840"/>
+            <a:ext cx="3175560" cy="1248480"/>
           </a:xfrm>
           <a:custGeom>
             <a:avLst/>
@@ -23352,7 +23349,7 @@
         <p:spPr>
           <a:xfrm>
             <a:off x="556920" y="2968200"/>
-            <a:ext cx="965880" cy="180360"/>
+            <a:ext cx="965520" cy="180000"/>
           </a:xfrm>
           <a:prstGeom prst="rect">
             <a:avLst/>
@@ -23404,7 +23401,7 @@
         <p:spPr>
           <a:xfrm>
             <a:off x="2953440" y="2949840"/>
-            <a:ext cx="399600" cy="217080"/>
+            <a:ext cx="399240" cy="216720"/>
           </a:xfrm>
           <a:custGeom>
             <a:avLst/>
@@ -23477,7 +23474,7 @@
         <p:spPr>
           <a:xfrm>
             <a:off x="2953440" y="2949840"/>
-            <a:ext cx="454320" cy="217080"/>
+            <a:ext cx="453960" cy="216720"/>
           </a:xfrm>
           <a:prstGeom prst="rect">
             <a:avLst/>
@@ -23529,7 +23526,7 @@
         <p:spPr>
           <a:xfrm>
             <a:off x="556920" y="3278520"/>
-            <a:ext cx="2966040" cy="363240"/>
+            <a:ext cx="2965680" cy="362880"/>
           </a:xfrm>
           <a:prstGeom prst="rect">
             <a:avLst/>
@@ -23581,7 +23578,7 @@
         <p:spPr>
           <a:xfrm>
             <a:off x="556920" y="3680280"/>
-            <a:ext cx="2856240" cy="144000"/>
+            <a:ext cx="2855880" cy="143640"/>
           </a:xfrm>
           <a:prstGeom prst="rect">
             <a:avLst/>
@@ -23633,7 +23630,7 @@
         <p:spPr>
           <a:xfrm>
             <a:off x="3700800" y="2762640"/>
-            <a:ext cx="3175920" cy="1248840"/>
+            <a:ext cx="3175560" cy="1248480"/>
           </a:xfrm>
           <a:custGeom>
             <a:avLst/>
@@ -23707,7 +23704,7 @@
         <p:spPr>
           <a:xfrm>
             <a:off x="3888000" y="2968200"/>
-            <a:ext cx="1066320" cy="180360"/>
+            <a:ext cx="1065960" cy="180000"/>
           </a:xfrm>
           <a:prstGeom prst="rect">
             <a:avLst/>
@@ -23759,7 +23756,7 @@
         <p:spPr>
           <a:xfrm>
             <a:off x="6295680" y="2949840"/>
-            <a:ext cx="390600" cy="217080"/>
+            <a:ext cx="390240" cy="216720"/>
           </a:xfrm>
           <a:custGeom>
             <a:avLst/>
@@ -23832,7 +23829,7 @@
         <p:spPr>
           <a:xfrm>
             <a:off x="6295680" y="2949840"/>
-            <a:ext cx="445320" cy="217080"/>
+            <a:ext cx="444960" cy="216720"/>
           </a:xfrm>
           <a:prstGeom prst="rect">
             <a:avLst/>
@@ -23884,7 +23881,7 @@
         <p:spPr>
           <a:xfrm>
             <a:off x="3888000" y="3278520"/>
-            <a:ext cx="2966040" cy="363240"/>
+            <a:ext cx="2965680" cy="362880"/>
           </a:xfrm>
           <a:prstGeom prst="rect">
             <a:avLst/>
@@ -23936,7 +23933,7 @@
         <p:spPr>
           <a:xfrm>
             <a:off x="3888000" y="3680280"/>
-            <a:ext cx="2856240" cy="144000"/>
+            <a:ext cx="2855880" cy="143640"/>
           </a:xfrm>
           <a:prstGeom prst="rect">
             <a:avLst/>
@@ -23988,7 +23985,7 @@
         <p:spPr>
           <a:xfrm>
             <a:off x="369720" y="4169160"/>
-            <a:ext cx="6500160" cy="2682720"/>
+            <a:ext cx="6499800" cy="2682360"/>
           </a:xfrm>
           <a:custGeom>
             <a:avLst/>
@@ -24062,7 +24059,7 @@
         <p:spPr>
           <a:xfrm>
             <a:off x="556920" y="4356360"/>
-            <a:ext cx="6207840" cy="253440"/>
+            <a:ext cx="6207480" cy="253080"/>
           </a:xfrm>
           <a:prstGeom prst="rect">
             <a:avLst/>
@@ -24114,7 +24111,7 @@
         <p:spPr>
           <a:xfrm>
             <a:off x="556920" y="4721400"/>
-            <a:ext cx="2993400" cy="1057320"/>
+            <a:ext cx="2993040" cy="1056960"/>
           </a:xfrm>
           <a:custGeom>
             <a:avLst/>
@@ -24185,7 +24182,7 @@
         <p:spPr>
           <a:xfrm>
             <a:off x="703080" y="4867560"/>
-            <a:ext cx="2765160" cy="180360"/>
+            <a:ext cx="2764800" cy="180000"/>
           </a:xfrm>
           <a:prstGeom prst="rect">
             <a:avLst/>
@@ -24237,7 +24234,7 @@
         <p:spPr>
           <a:xfrm>
             <a:off x="703080" y="5123520"/>
-            <a:ext cx="2810520" cy="290160"/>
+            <a:ext cx="2810160" cy="289800"/>
           </a:xfrm>
           <a:prstGeom prst="rect">
             <a:avLst/>
@@ -24289,7 +24286,7 @@
         <p:spPr>
           <a:xfrm>
             <a:off x="703080" y="5452200"/>
-            <a:ext cx="2765160" cy="180360"/>
+            <a:ext cx="2764800" cy="180000"/>
           </a:xfrm>
           <a:prstGeom prst="rect">
             <a:avLst/>
@@ -24341,7 +24338,7 @@
         <p:spPr>
           <a:xfrm>
             <a:off x="3696120" y="4721400"/>
-            <a:ext cx="2993400" cy="1057320"/>
+            <a:ext cx="2993040" cy="1056960"/>
           </a:xfrm>
           <a:custGeom>
             <a:avLst/>
@@ -24412,7 +24409,7 @@
         <p:spPr>
           <a:xfrm>
             <a:off x="3842280" y="4867560"/>
-            <a:ext cx="2765160" cy="180360"/>
+            <a:ext cx="2764800" cy="180000"/>
           </a:xfrm>
           <a:prstGeom prst="rect">
             <a:avLst/>
@@ -24464,7 +24461,7 @@
         <p:spPr>
           <a:xfrm>
             <a:off x="3842280" y="5123520"/>
-            <a:ext cx="2810520" cy="290160"/>
+            <a:ext cx="2810160" cy="289800"/>
           </a:xfrm>
           <a:prstGeom prst="rect">
             <a:avLst/>
@@ -24516,7 +24513,7 @@
         <p:spPr>
           <a:xfrm>
             <a:off x="3842280" y="5452200"/>
-            <a:ext cx="2765160" cy="180360"/>
+            <a:ext cx="2764800" cy="180000"/>
           </a:xfrm>
           <a:prstGeom prst="rect">
             <a:avLst/>
@@ -24568,7 +24565,7 @@
         <p:spPr>
           <a:xfrm>
             <a:off x="556920" y="5931720"/>
-            <a:ext cx="6125760" cy="6840"/>
+            <a:ext cx="6125400" cy="6480"/>
           </a:xfrm>
           <a:custGeom>
             <a:avLst/>
@@ -24619,7 +24616,7 @@
         <p:spPr>
           <a:xfrm>
             <a:off x="556920" y="6082200"/>
-            <a:ext cx="6189840" cy="180360"/>
+            <a:ext cx="6189480" cy="180000"/>
           </a:xfrm>
           <a:prstGeom prst="rect">
             <a:avLst/>
@@ -24671,7 +24668,7 @@
         <p:spPr>
           <a:xfrm>
             <a:off x="556920" y="6338160"/>
-            <a:ext cx="1440720" cy="326520"/>
+            <a:ext cx="1440360" cy="326160"/>
           </a:xfrm>
           <a:prstGeom prst="rect">
             <a:avLst/>
@@ -24723,7 +24720,7 @@
         <p:spPr>
           <a:xfrm>
             <a:off x="1974240" y="6447600"/>
-            <a:ext cx="627840" cy="217080"/>
+            <a:ext cx="627480" cy="216720"/>
           </a:xfrm>
           <a:custGeom>
             <a:avLst/>
@@ -24796,7 +24793,7 @@
         <p:spPr>
           <a:xfrm>
             <a:off x="1974240" y="6447600"/>
-            <a:ext cx="682920" cy="217080"/>
+            <a:ext cx="682560" cy="216720"/>
           </a:xfrm>
           <a:prstGeom prst="rect">
             <a:avLst/>
@@ -24848,7 +24845,7 @@
         <p:spPr>
           <a:xfrm>
             <a:off x="7104960" y="1356120"/>
-            <a:ext cx="4719240" cy="5495760"/>
+            <a:ext cx="4718880" cy="5495400"/>
           </a:xfrm>
           <a:custGeom>
             <a:avLst/>
@@ -24922,7 +24919,7 @@
         <p:spPr>
           <a:xfrm>
             <a:off x="7292160" y="1543320"/>
-            <a:ext cx="4427280" cy="253440"/>
+            <a:ext cx="4426920" cy="253080"/>
           </a:xfrm>
           <a:prstGeom prst="rect">
             <a:avLst/>
@@ -24974,7 +24971,7 @@
         <p:spPr>
           <a:xfrm>
             <a:off x="7292160" y="1945080"/>
-            <a:ext cx="4344840" cy="984240"/>
+            <a:ext cx="4344480" cy="983880"/>
           </a:xfrm>
           <a:custGeom>
             <a:avLst/>
@@ -25045,7 +25042,7 @@
         <p:spPr>
           <a:xfrm>
             <a:off x="7438320" y="2091240"/>
-            <a:ext cx="609840" cy="180360"/>
+            <a:ext cx="609480" cy="180000"/>
           </a:xfrm>
           <a:prstGeom prst="rect">
             <a:avLst/>
@@ -25097,7 +25094,7 @@
         <p:spPr>
           <a:xfrm>
             <a:off x="11243160" y="2091240"/>
-            <a:ext cx="308520" cy="180360"/>
+            <a:ext cx="308160" cy="180000"/>
           </a:xfrm>
           <a:prstGeom prst="rect">
             <a:avLst/>
@@ -25149,7 +25146,7 @@
         <p:spPr>
           <a:xfrm>
             <a:off x="7438320" y="2347200"/>
-            <a:ext cx="4143960" cy="253440"/>
+            <a:ext cx="4143600" cy="253080"/>
           </a:xfrm>
           <a:prstGeom prst="rect">
             <a:avLst/>
@@ -25201,7 +25198,7 @@
         <p:spPr>
           <a:xfrm>
             <a:off x="7438320" y="2639160"/>
-            <a:ext cx="4107600" cy="144000"/>
+            <a:ext cx="4107240" cy="143640"/>
           </a:xfrm>
           <a:prstGeom prst="rect">
             <a:avLst/>
@@ -25253,7 +25250,7 @@
         <p:spPr>
           <a:xfrm>
             <a:off x="7292160" y="3077640"/>
-            <a:ext cx="4344840" cy="984240"/>
+            <a:ext cx="4344480" cy="983880"/>
           </a:xfrm>
           <a:custGeom>
             <a:avLst/>
@@ -25324,7 +25321,7 @@
         <p:spPr>
           <a:xfrm>
             <a:off x="7438320" y="3223800"/>
-            <a:ext cx="728280" cy="180360"/>
+            <a:ext cx="727920" cy="180000"/>
           </a:xfrm>
           <a:prstGeom prst="rect">
             <a:avLst/>
@@ -25376,7 +25373,7 @@
         <p:spPr>
           <a:xfrm>
             <a:off x="11242080" y="3223800"/>
-            <a:ext cx="308520" cy="180360"/>
+            <a:ext cx="308160" cy="180000"/>
           </a:xfrm>
           <a:prstGeom prst="rect">
             <a:avLst/>
@@ -25428,7 +25425,7 @@
         <p:spPr>
           <a:xfrm>
             <a:off x="7438320" y="3479400"/>
-            <a:ext cx="4143960" cy="253440"/>
+            <a:ext cx="4143600" cy="253080"/>
           </a:xfrm>
           <a:prstGeom prst="rect">
             <a:avLst/>
@@ -25480,7 +25477,7 @@
         <p:spPr>
           <a:xfrm>
             <a:off x="7438320" y="3771720"/>
-            <a:ext cx="4107600" cy="144000"/>
+            <a:ext cx="4107240" cy="143640"/>
           </a:xfrm>
           <a:prstGeom prst="rect">
             <a:avLst/>
@@ -25532,7 +25529,7 @@
         <p:spPr>
           <a:xfrm>
             <a:off x="7292160" y="4210200"/>
-            <a:ext cx="4344840" cy="984240"/>
+            <a:ext cx="4344480" cy="983880"/>
           </a:xfrm>
           <a:custGeom>
             <a:avLst/>
@@ -25603,7 +25600,7 @@
         <p:spPr>
           <a:xfrm>
             <a:off x="7438320" y="4356360"/>
-            <a:ext cx="965880" cy="180360"/>
+            <a:ext cx="965520" cy="180000"/>
           </a:xfrm>
           <a:prstGeom prst="rect">
             <a:avLst/>
@@ -25655,7 +25652,7 @@
         <p:spPr>
           <a:xfrm>
             <a:off x="11242080" y="4356360"/>
-            <a:ext cx="308520" cy="180360"/>
+            <a:ext cx="308160" cy="180000"/>
           </a:xfrm>
           <a:prstGeom prst="rect">
             <a:avLst/>
@@ -25707,7 +25704,7 @@
         <p:spPr>
           <a:xfrm>
             <a:off x="7438320" y="4611960"/>
-            <a:ext cx="4143960" cy="253440"/>
+            <a:ext cx="4143600" cy="253080"/>
           </a:xfrm>
           <a:prstGeom prst="rect">
             <a:avLst/>
@@ -25759,7 +25756,7 @@
         <p:spPr>
           <a:xfrm>
             <a:off x="7438320" y="4904280"/>
-            <a:ext cx="4107600" cy="144000"/>
+            <a:ext cx="4107240" cy="143640"/>
           </a:xfrm>
           <a:prstGeom prst="rect">
             <a:avLst/>
@@ -25811,7 +25808,7 @@
         <p:spPr>
           <a:xfrm>
             <a:off x="7292160" y="5342400"/>
-            <a:ext cx="4344840" cy="984240"/>
+            <a:ext cx="4344480" cy="983880"/>
           </a:xfrm>
           <a:custGeom>
             <a:avLst/>
@@ -25882,7 +25879,7 @@
         <p:spPr>
           <a:xfrm>
             <a:off x="7438320" y="5488560"/>
-            <a:ext cx="1066320" cy="180360"/>
+            <a:ext cx="1065960" cy="180000"/>
           </a:xfrm>
           <a:prstGeom prst="rect">
             <a:avLst/>
@@ -25934,7 +25931,7 @@
         <p:spPr>
           <a:xfrm>
             <a:off x="11189880" y="5488560"/>
-            <a:ext cx="363240" cy="180360"/>
+            <a:ext cx="362880" cy="180000"/>
           </a:xfrm>
           <a:prstGeom prst="rect">
             <a:avLst/>
@@ -25986,7 +25983,7 @@
         <p:spPr>
           <a:xfrm>
             <a:off x="7438320" y="5744520"/>
-            <a:ext cx="4143960" cy="253440"/>
+            <a:ext cx="4143600" cy="253080"/>
           </a:xfrm>
           <a:prstGeom prst="rect">
             <a:avLst/>
@@ -26038,7 +26035,7 @@
         <p:spPr>
           <a:xfrm>
             <a:off x="7438320" y="6036480"/>
-            <a:ext cx="4107600" cy="144000"/>
+            <a:ext cx="4107240" cy="143640"/>
           </a:xfrm>
           <a:prstGeom prst="rect">
             <a:avLst/>
@@ -26127,7 +26124,7 @@
         <p:spPr>
           <a:xfrm>
             <a:off x="331200" y="331200"/>
-            <a:ext cx="11585160" cy="163440"/>
+            <a:ext cx="11584800" cy="163080"/>
           </a:xfrm>
           <a:prstGeom prst="rect">
             <a:avLst/>
@@ -26155,7 +26152,7 @@
               <a:buNone/>
             </a:pPr>
             <a:r>
-              <a:rPr b="1" lang="en-US" sz="920" spc="29" strike="noStrike">
+              <a:rPr b="1" lang="en-US" sz="920" spc="26" strike="noStrike">
                 <a:solidFill>
                   <a:srgbClr val="6366f1"/>
                 </a:solidFill>
@@ -26179,7 +26176,7 @@
         <p:spPr>
           <a:xfrm>
             <a:off x="331200" y="563040"/>
-            <a:ext cx="11676240" cy="329040"/>
+            <a:ext cx="11675880" cy="328680"/>
           </a:xfrm>
           <a:prstGeom prst="rect">
             <a:avLst/>
@@ -26231,7 +26228,7 @@
         <p:spPr>
           <a:xfrm>
             <a:off x="331200" y="960840"/>
-            <a:ext cx="11593440" cy="196560"/>
+            <a:ext cx="11593080" cy="196200"/>
           </a:xfrm>
           <a:prstGeom prst="rect">
             <a:avLst/>
@@ -26283,7 +26280,7 @@
         <p:spPr>
           <a:xfrm>
             <a:off x="335520" y="1296360"/>
-            <a:ext cx="6217920" cy="5555520"/>
+            <a:ext cx="6217560" cy="5555160"/>
           </a:xfrm>
           <a:custGeom>
             <a:avLst/>
@@ -26357,7 +26354,7 @@
         <p:spPr>
           <a:xfrm>
             <a:off x="538200" y="1499040"/>
-            <a:ext cx="4942440" cy="5149800"/>
+            <a:ext cx="4942080" cy="5149440"/>
           </a:xfrm>
           <a:prstGeom prst="roundRect">
             <a:avLst>
@@ -26389,7 +26386,7 @@
         <p:spPr>
           <a:xfrm>
             <a:off x="6766200" y="1296360"/>
-            <a:ext cx="2474280" cy="1298160"/>
+            <a:ext cx="2473920" cy="1297800"/>
           </a:xfrm>
           <a:custGeom>
             <a:avLst/>
@@ -26463,7 +26460,7 @@
         <p:spPr>
           <a:xfrm>
             <a:off x="6935760" y="1465920"/>
-            <a:ext cx="2192760" cy="163440"/>
+            <a:ext cx="2192400" cy="163080"/>
           </a:xfrm>
           <a:prstGeom prst="rect">
             <a:avLst/>
@@ -26515,7 +26512,7 @@
         <p:spPr>
           <a:xfrm>
             <a:off x="6935760" y="1697760"/>
-            <a:ext cx="2259000" cy="295920"/>
+            <a:ext cx="2258640" cy="295560"/>
           </a:xfrm>
           <a:prstGeom prst="rect">
             <a:avLst/>
@@ -26567,7 +26564,7 @@
         <p:spPr>
           <a:xfrm>
             <a:off x="6935760" y="2062440"/>
-            <a:ext cx="362160" cy="196560"/>
+            <a:ext cx="361800" cy="196200"/>
           </a:xfrm>
           <a:custGeom>
             <a:avLst/>
@@ -26640,7 +26637,7 @@
         <p:spPr>
           <a:xfrm>
             <a:off x="6935760" y="2062440"/>
-            <a:ext cx="411840" cy="196560"/>
+            <a:ext cx="411480" cy="196200"/>
           </a:xfrm>
           <a:prstGeom prst="rect">
             <a:avLst/>
@@ -26692,7 +26689,7 @@
         <p:spPr>
           <a:xfrm>
             <a:off x="7367040" y="2095560"/>
-            <a:ext cx="229680" cy="130320"/>
+            <a:ext cx="229320" cy="129960"/>
           </a:xfrm>
           <a:prstGeom prst="rect">
             <a:avLst/>
@@ -26744,7 +26741,7 @@
         <p:spPr>
           <a:xfrm>
             <a:off x="6935760" y="2294280"/>
-            <a:ext cx="2184480" cy="130320"/>
+            <a:ext cx="2184120" cy="129960"/>
           </a:xfrm>
           <a:prstGeom prst="rect">
             <a:avLst/>
@@ -26796,7 +26793,7 @@
         <p:spPr>
           <a:xfrm>
             <a:off x="9381600" y="1296360"/>
-            <a:ext cx="2474280" cy="1298160"/>
+            <a:ext cx="2473920" cy="1297800"/>
           </a:xfrm>
           <a:custGeom>
             <a:avLst/>
@@ -26870,7 +26867,7 @@
         <p:spPr>
           <a:xfrm>
             <a:off x="9551520" y="1465920"/>
-            <a:ext cx="2192760" cy="163440"/>
+            <a:ext cx="2192400" cy="163080"/>
           </a:xfrm>
           <a:prstGeom prst="rect">
             <a:avLst/>
@@ -26922,7 +26919,7 @@
         <p:spPr>
           <a:xfrm>
             <a:off x="9551520" y="1697760"/>
-            <a:ext cx="2259000" cy="295920"/>
+            <a:ext cx="2258640" cy="295560"/>
           </a:xfrm>
           <a:prstGeom prst="rect">
             <a:avLst/>
@@ -26974,7 +26971,7 @@
         <p:spPr>
           <a:xfrm>
             <a:off x="9551520" y="2062440"/>
-            <a:ext cx="362160" cy="196560"/>
+            <a:ext cx="361800" cy="196200"/>
           </a:xfrm>
           <a:custGeom>
             <a:avLst/>
@@ -27047,7 +27044,7 @@
         <p:spPr>
           <a:xfrm>
             <a:off x="9551520" y="2062440"/>
-            <a:ext cx="411840" cy="196560"/>
+            <a:ext cx="411480" cy="196200"/>
           </a:xfrm>
           <a:prstGeom prst="rect">
             <a:avLst/>
@@ -27099,7 +27096,7 @@
         <p:spPr>
           <a:xfrm>
             <a:off x="9981720" y="2095560"/>
-            <a:ext cx="229680" cy="130320"/>
+            <a:ext cx="229320" cy="129960"/>
           </a:xfrm>
           <a:prstGeom prst="rect">
             <a:avLst/>
@@ -27151,7 +27148,7 @@
         <p:spPr>
           <a:xfrm>
             <a:off x="9551520" y="2294280"/>
-            <a:ext cx="2184480" cy="130320"/>
+            <a:ext cx="2184120" cy="129960"/>
           </a:xfrm>
           <a:prstGeom prst="rect">
             <a:avLst/>
@@ -27203,7 +27200,7 @@
         <p:spPr>
           <a:xfrm>
             <a:off x="6766200" y="2737440"/>
-            <a:ext cx="5091480" cy="1298160"/>
+            <a:ext cx="5091120" cy="1297800"/>
           </a:xfrm>
           <a:custGeom>
             <a:avLst/>
@@ -27277,7 +27274,7 @@
         <p:spPr>
           <a:xfrm>
             <a:off x="6935760" y="2907360"/>
-            <a:ext cx="4809960" cy="163440"/>
+            <a:ext cx="4809600" cy="163080"/>
           </a:xfrm>
           <a:prstGeom prst="rect">
             <a:avLst/>
@@ -27329,7 +27326,7 @@
         <p:spPr>
           <a:xfrm>
             <a:off x="6935760" y="3139200"/>
-            <a:ext cx="4876200" cy="295920"/>
+            <a:ext cx="4875840" cy="295560"/>
           </a:xfrm>
           <a:prstGeom prst="rect">
             <a:avLst/>
@@ -27381,7 +27378,7 @@
         <p:spPr>
           <a:xfrm>
             <a:off x="6935760" y="3503520"/>
-            <a:ext cx="362160" cy="196560"/>
+            <a:ext cx="361800" cy="196200"/>
           </a:xfrm>
           <a:custGeom>
             <a:avLst/>
@@ -27454,7 +27451,7 @@
         <p:spPr>
           <a:xfrm>
             <a:off x="6935760" y="3503520"/>
-            <a:ext cx="411840" cy="196560"/>
+            <a:ext cx="411480" cy="196200"/>
           </a:xfrm>
           <a:prstGeom prst="rect">
             <a:avLst/>
@@ -27506,7 +27503,7 @@
         <p:spPr>
           <a:xfrm>
             <a:off x="7367040" y="3536640"/>
-            <a:ext cx="229680" cy="130320"/>
+            <a:ext cx="229320" cy="129960"/>
           </a:xfrm>
           <a:prstGeom prst="rect">
             <a:avLst/>
@@ -27558,7 +27555,7 @@
         <p:spPr>
           <a:xfrm>
             <a:off x="6935760" y="3735360"/>
-            <a:ext cx="4801680" cy="130320"/>
+            <a:ext cx="4801320" cy="129960"/>
           </a:xfrm>
           <a:prstGeom prst="rect">
             <a:avLst/>
@@ -27610,7 +27607,7 @@
         <p:spPr>
           <a:xfrm>
             <a:off x="6766200" y="4178520"/>
-            <a:ext cx="5091480" cy="1298160"/>
+            <a:ext cx="5091120" cy="1297800"/>
           </a:xfrm>
           <a:custGeom>
             <a:avLst/>
@@ -27684,7 +27681,7 @@
         <p:spPr>
           <a:xfrm>
             <a:off x="6935760" y="4348440"/>
-            <a:ext cx="4809960" cy="163440"/>
+            <a:ext cx="4809600" cy="163080"/>
           </a:xfrm>
           <a:prstGeom prst="rect">
             <a:avLst/>
@@ -27736,7 +27733,7 @@
         <p:spPr>
           <a:xfrm>
             <a:off x="6935760" y="4580280"/>
-            <a:ext cx="4876200" cy="295920"/>
+            <a:ext cx="4875840" cy="295560"/>
           </a:xfrm>
           <a:prstGeom prst="rect">
             <a:avLst/>
@@ -27788,7 +27785,7 @@
         <p:spPr>
           <a:xfrm>
             <a:off x="6935760" y="4944600"/>
-            <a:ext cx="362160" cy="196560"/>
+            <a:ext cx="361800" cy="196200"/>
           </a:xfrm>
           <a:custGeom>
             <a:avLst/>
@@ -27861,7 +27858,7 @@
         <p:spPr>
           <a:xfrm>
             <a:off x="6935760" y="4944600"/>
-            <a:ext cx="411840" cy="196560"/>
+            <a:ext cx="411480" cy="196200"/>
           </a:xfrm>
           <a:prstGeom prst="rect">
             <a:avLst/>
@@ -27913,7 +27910,7 @@
         <p:spPr>
           <a:xfrm>
             <a:off x="7367760" y="4977720"/>
-            <a:ext cx="229680" cy="130320"/>
+            <a:ext cx="229320" cy="129960"/>
           </a:xfrm>
           <a:prstGeom prst="rect">
             <a:avLst/>
@@ -27965,7 +27962,7 @@
         <p:spPr>
           <a:xfrm>
             <a:off x="6935760" y="5176800"/>
-            <a:ext cx="4801680" cy="130320"/>
+            <a:ext cx="4801320" cy="129960"/>
           </a:xfrm>
           <a:prstGeom prst="rect">
             <a:avLst/>
@@ -28017,7 +28014,7 @@
         <p:spPr>
           <a:xfrm>
             <a:off x="6766200" y="5619600"/>
-            <a:ext cx="5091480" cy="1231920"/>
+            <a:ext cx="5091120" cy="1231560"/>
           </a:xfrm>
           <a:custGeom>
             <a:avLst/>
@@ -28091,7 +28088,7 @@
         <p:spPr>
           <a:xfrm>
             <a:off x="6935760" y="5789520"/>
-            <a:ext cx="4826520" cy="229680"/>
+            <a:ext cx="4826160" cy="229320"/>
           </a:xfrm>
           <a:prstGeom prst="rect">
             <a:avLst/>
@@ -28143,7 +28140,7 @@
         <p:spPr>
           <a:xfrm>
             <a:off x="6935760" y="6120720"/>
-            <a:ext cx="1058040" cy="163440"/>
+            <a:ext cx="1057680" cy="163080"/>
           </a:xfrm>
           <a:prstGeom prst="rect">
             <a:avLst/>
@@ -28195,7 +28192,7 @@
         <p:spPr>
           <a:xfrm>
             <a:off x="6935760" y="6286680"/>
-            <a:ext cx="1099440" cy="262800"/>
+            <a:ext cx="1099080" cy="262440"/>
           </a:xfrm>
           <a:prstGeom prst="rect">
             <a:avLst/>
@@ -28247,7 +28244,7 @@
         <p:spPr>
           <a:xfrm>
             <a:off x="6935760" y="6551640"/>
-            <a:ext cx="1049760" cy="130320"/>
+            <a:ext cx="1049400" cy="129960"/>
           </a:xfrm>
           <a:prstGeom prst="rect">
             <a:avLst/>
@@ -28299,7 +28296,7 @@
         <p:spPr>
           <a:xfrm>
             <a:off x="10646640" y="6120720"/>
-            <a:ext cx="1041480" cy="163440"/>
+            <a:ext cx="1041120" cy="163080"/>
           </a:xfrm>
           <a:prstGeom prst="rect">
             <a:avLst/>
@@ -28351,7 +28348,7 @@
         <p:spPr>
           <a:xfrm>
             <a:off x="10605240" y="6286680"/>
-            <a:ext cx="1082880" cy="262800"/>
+            <a:ext cx="1082520" cy="262440"/>
           </a:xfrm>
           <a:prstGeom prst="rect">
             <a:avLst/>
@@ -28403,7 +28400,7 @@
         <p:spPr>
           <a:xfrm>
             <a:off x="10654920" y="6551640"/>
-            <a:ext cx="1033200" cy="130320"/>
+            <a:ext cx="1032840" cy="129960"/>
           </a:xfrm>
           <a:prstGeom prst="rect">
             <a:avLst/>
@@ -28492,7 +28489,7 @@
         <p:spPr>
           <a:xfrm>
             <a:off x="380880" y="380880"/>
-            <a:ext cx="11494440" cy="188280"/>
+            <a:ext cx="11494080" cy="187920"/>
           </a:xfrm>
           <a:prstGeom prst="rect">
             <a:avLst/>
@@ -28520,7 +28517,7 @@
               <a:buNone/>
             </a:pPr>
             <a:r>
-              <a:rPr b="1" lang="en-US" sz="1050" spc="38" strike="noStrike">
+              <a:rPr b="1" lang="en-US" sz="1050" spc="35" strike="noStrike">
                 <a:solidFill>
                   <a:srgbClr val="6366f1"/>
                 </a:solidFill>
@@ -28544,7 +28541,7 @@
         <p:spPr>
           <a:xfrm>
             <a:off x="380880" y="647640"/>
-            <a:ext cx="11599200" cy="378720"/>
+            <a:ext cx="11598840" cy="378360"/>
           </a:xfrm>
           <a:prstGeom prst="rect">
             <a:avLst/>
@@ -28596,7 +28593,7 @@
         <p:spPr>
           <a:xfrm>
             <a:off x="380880" y="1104840"/>
-            <a:ext cx="11504160" cy="226440"/>
+            <a:ext cx="11503800" cy="226080"/>
           </a:xfrm>
           <a:prstGeom prst="rect">
             <a:avLst/>
@@ -28648,7 +28645,7 @@
         <p:spPr>
           <a:xfrm>
             <a:off x="385920" y="1414440"/>
-            <a:ext cx="5789160" cy="5055480"/>
+            <a:ext cx="5788800" cy="5055120"/>
           </a:xfrm>
           <a:custGeom>
             <a:avLst/>
@@ -28722,7 +28719,7 @@
         <p:spPr>
           <a:xfrm>
             <a:off x="581040" y="1609560"/>
-            <a:ext cx="5398560" cy="4665240"/>
+            <a:ext cx="5398200" cy="4664880"/>
           </a:xfrm>
           <a:prstGeom prst="roundRect">
             <a:avLst>
@@ -28754,7 +28751,7 @@
         <p:spPr>
           <a:xfrm>
             <a:off x="6429240" y="1414440"/>
-            <a:ext cx="5374800" cy="2036160"/>
+            <a:ext cx="5374440" cy="2035800"/>
           </a:xfrm>
           <a:custGeom>
             <a:avLst/>
@@ -28828,7 +28825,7 @@
         <p:spPr>
           <a:xfrm>
             <a:off x="6600960" y="1571760"/>
-            <a:ext cx="1769400" cy="264600"/>
+            <a:ext cx="1769040" cy="264240"/>
           </a:xfrm>
           <a:prstGeom prst="rect">
             <a:avLst/>
@@ -28880,7 +28877,7 @@
         <p:spPr>
           <a:xfrm>
             <a:off x="11267280" y="1590840"/>
-            <a:ext cx="378720" cy="226440"/>
+            <a:ext cx="378360" cy="226080"/>
           </a:xfrm>
           <a:custGeom>
             <a:avLst/>
@@ -28953,7 +28950,7 @@
         <p:spPr>
           <a:xfrm>
             <a:off x="11267280" y="1590840"/>
-            <a:ext cx="435960" cy="226440"/>
+            <a:ext cx="435600" cy="226080"/>
           </a:xfrm>
           <a:prstGeom prst="rect">
             <a:avLst/>
@@ -29005,7 +29002,7 @@
         <p:spPr>
           <a:xfrm>
             <a:off x="6600960" y="1914480"/>
-            <a:ext cx="5189040" cy="340920"/>
+            <a:ext cx="5188680" cy="340560"/>
           </a:xfrm>
           <a:prstGeom prst="rect">
             <a:avLst/>
@@ -29057,7 +29054,7 @@
         <p:spPr>
           <a:xfrm>
             <a:off x="6600960" y="2295360"/>
-            <a:ext cx="645480" cy="188280"/>
+            <a:ext cx="645120" cy="187920"/>
           </a:xfrm>
           <a:prstGeom prst="rect">
             <a:avLst/>
@@ -29109,7 +29106,7 @@
         <p:spPr>
           <a:xfrm>
             <a:off x="7255440" y="2314440"/>
-            <a:ext cx="1331280" cy="150120"/>
+            <a:ext cx="1330920" cy="149760"/>
           </a:xfrm>
           <a:prstGeom prst="rect">
             <a:avLst/>
@@ -29161,7 +29158,7 @@
         <p:spPr>
           <a:xfrm>
             <a:off x="6600960" y="2604960"/>
-            <a:ext cx="5046120" cy="7200"/>
+            <a:ext cx="5045760" cy="6840"/>
           </a:xfrm>
           <a:custGeom>
             <a:avLst/>
@@ -29212,7 +29209,7 @@
         <p:spPr>
           <a:xfrm>
             <a:off x="6600960" y="2724120"/>
-            <a:ext cx="2521800" cy="150120"/>
+            <a:ext cx="2521440" cy="149760"/>
           </a:xfrm>
           <a:prstGeom prst="rect">
             <a:avLst/>
@@ -29264,7 +29261,7 @@
         <p:spPr>
           <a:xfrm>
             <a:off x="6600960" y="2876400"/>
-            <a:ext cx="2550600" cy="264600"/>
+            <a:ext cx="2550240" cy="264240"/>
           </a:xfrm>
           <a:prstGeom prst="rect">
             <a:avLst/>
@@ -29316,7 +29313,7 @@
         <p:spPr>
           <a:xfrm>
             <a:off x="6600960" y="3143160"/>
-            <a:ext cx="2521800" cy="150120"/>
+            <a:ext cx="2521440" cy="149760"/>
           </a:xfrm>
           <a:prstGeom prst="rect">
             <a:avLst/>
@@ -29368,7 +29365,7 @@
         <p:spPr>
           <a:xfrm>
             <a:off x="9182160" y="2724120"/>
-            <a:ext cx="2521800" cy="150120"/>
+            <a:ext cx="2521440" cy="149760"/>
           </a:xfrm>
           <a:prstGeom prst="rect">
             <a:avLst/>
@@ -29420,7 +29417,7 @@
         <p:spPr>
           <a:xfrm>
             <a:off x="9182160" y="2876400"/>
-            <a:ext cx="2550600" cy="264600"/>
+            <a:ext cx="2550240" cy="264240"/>
           </a:xfrm>
           <a:prstGeom prst="rect">
             <a:avLst/>
@@ -29472,7 +29469,7 @@
         <p:spPr>
           <a:xfrm>
             <a:off x="9182160" y="3143160"/>
-            <a:ext cx="2521800" cy="150120"/>
+            <a:ext cx="2521440" cy="149760"/>
           </a:xfrm>
           <a:prstGeom prst="rect">
             <a:avLst/>
@@ -29524,7 +29521,7 @@
         <p:spPr>
           <a:xfrm>
             <a:off x="6429240" y="3538440"/>
-            <a:ext cx="5374800" cy="1226520"/>
+            <a:ext cx="5374440" cy="1226160"/>
           </a:xfrm>
           <a:custGeom>
             <a:avLst/>
@@ -29598,7 +29595,7 @@
         <p:spPr>
           <a:xfrm>
             <a:off x="6600960" y="3695760"/>
-            <a:ext cx="1540800" cy="264600"/>
+            <a:ext cx="1540440" cy="264240"/>
           </a:xfrm>
           <a:prstGeom prst="rect">
             <a:avLst/>
@@ -29650,7 +29647,7 @@
         <p:spPr>
           <a:xfrm>
             <a:off x="11292120" y="3714840"/>
-            <a:ext cx="350280" cy="226440"/>
+            <a:ext cx="349920" cy="226080"/>
           </a:xfrm>
           <a:custGeom>
             <a:avLst/>
@@ -29723,7 +29720,7 @@
         <p:spPr>
           <a:xfrm>
             <a:off x="11292120" y="3714840"/>
-            <a:ext cx="407520" cy="226440"/>
+            <a:ext cx="407160" cy="226080"/>
           </a:xfrm>
           <a:prstGeom prst="rect">
             <a:avLst/>
@@ -29775,7 +29772,7 @@
         <p:spPr>
           <a:xfrm>
             <a:off x="6600960" y="4038480"/>
-            <a:ext cx="5189040" cy="340920"/>
+            <a:ext cx="5188680" cy="340560"/>
           </a:xfrm>
           <a:prstGeom prst="rect">
             <a:avLst/>
@@ -29827,7 +29824,7 @@
         <p:spPr>
           <a:xfrm>
             <a:off x="6600960" y="4419720"/>
-            <a:ext cx="674280" cy="188280"/>
+            <a:ext cx="673920" cy="187920"/>
           </a:xfrm>
           <a:prstGeom prst="rect">
             <a:avLst/>
@@ -29879,7 +29876,7 @@
         <p:spPr>
           <a:xfrm>
             <a:off x="7284960" y="4438800"/>
-            <a:ext cx="1683720" cy="150120"/>
+            <a:ext cx="1683360" cy="149760"/>
           </a:xfrm>
           <a:prstGeom prst="rect">
             <a:avLst/>
@@ -29931,7 +29928,7 @@
         <p:spPr>
           <a:xfrm>
             <a:off x="6429240" y="4853160"/>
-            <a:ext cx="5374800" cy="1226520"/>
+            <a:ext cx="5374440" cy="1226160"/>
           </a:xfrm>
           <a:custGeom>
             <a:avLst/>
@@ -30005,7 +30002,7 @@
         <p:spPr>
           <a:xfrm>
             <a:off x="6600960" y="5010120"/>
-            <a:ext cx="2255400" cy="264600"/>
+            <a:ext cx="2255040" cy="264240"/>
           </a:xfrm>
           <a:prstGeom prst="rect">
             <a:avLst/>
@@ -30057,7 +30054,7 @@
         <p:spPr>
           <a:xfrm>
             <a:off x="11265480" y="5029200"/>
-            <a:ext cx="378720" cy="226440"/>
+            <a:ext cx="378360" cy="226080"/>
           </a:xfrm>
           <a:custGeom>
             <a:avLst/>
@@ -30130,7 +30127,7 @@
         <p:spPr>
           <a:xfrm>
             <a:off x="11265480" y="5029200"/>
-            <a:ext cx="435960" cy="226440"/>
+            <a:ext cx="435600" cy="226080"/>
           </a:xfrm>
           <a:prstGeom prst="rect">
             <a:avLst/>
@@ -30182,7 +30179,7 @@
         <p:spPr>
           <a:xfrm>
             <a:off x="6600960" y="5353200"/>
-            <a:ext cx="5189040" cy="340920"/>
+            <a:ext cx="5188680" cy="340560"/>
           </a:xfrm>
           <a:prstGeom prst="rect">
             <a:avLst/>
@@ -30234,7 +30231,7 @@
         <p:spPr>
           <a:xfrm>
             <a:off x="6600960" y="5734080"/>
-            <a:ext cx="645480" cy="188280"/>
+            <a:ext cx="645120" cy="187920"/>
           </a:xfrm>
           <a:prstGeom prst="rect">
             <a:avLst/>
@@ -30286,7 +30283,7 @@
         <p:spPr>
           <a:xfrm>
             <a:off x="7260840" y="5753160"/>
-            <a:ext cx="1569600" cy="150120"/>
+            <a:ext cx="1569240" cy="149760"/>
           </a:xfrm>
           <a:prstGeom prst="rect">
             <a:avLst/>
@@ -30375,7 +30372,7 @@
         <p:spPr>
           <a:xfrm>
             <a:off x="380880" y="380880"/>
-            <a:ext cx="11494440" cy="188280"/>
+            <a:ext cx="11494080" cy="187920"/>
           </a:xfrm>
           <a:prstGeom prst="rect">
             <a:avLst/>
@@ -30403,7 +30400,7 @@
               <a:buNone/>
             </a:pPr>
             <a:r>
-              <a:rPr b="1" lang="en-US" sz="1050" spc="38" strike="noStrike">
+              <a:rPr b="1" lang="en-US" sz="1050" spc="35" strike="noStrike">
                 <a:solidFill>
                   <a:srgbClr val="6366f1"/>
                 </a:solidFill>
@@ -30427,7 +30424,7 @@
         <p:spPr>
           <a:xfrm>
             <a:off x="380880" y="647640"/>
-            <a:ext cx="11599200" cy="378720"/>
+            <a:ext cx="11598840" cy="378360"/>
           </a:xfrm>
           <a:prstGeom prst="rect">
             <a:avLst/>
@@ -30479,7 +30476,7 @@
         <p:spPr>
           <a:xfrm>
             <a:off x="380880" y="1104840"/>
-            <a:ext cx="11504160" cy="226440"/>
+            <a:ext cx="11503800" cy="226080"/>
           </a:xfrm>
           <a:prstGeom prst="rect">
             <a:avLst/>
@@ -30531,7 +30528,7 @@
         <p:spPr>
           <a:xfrm>
             <a:off x="385920" y="1414440"/>
-            <a:ext cx="6332040" cy="5312880"/>
+            <a:ext cx="6331680" cy="5312520"/>
           </a:xfrm>
           <a:custGeom>
             <a:avLst/>
@@ -30605,7 +30602,7 @@
         <p:spPr>
           <a:xfrm>
             <a:off x="581040" y="1609560"/>
-            <a:ext cx="5941440" cy="4922280"/>
+            <a:ext cx="5941080" cy="4921920"/>
           </a:xfrm>
           <a:prstGeom prst="roundRect">
             <a:avLst>
@@ -30637,7 +30634,7 @@
         <p:spPr>
           <a:xfrm>
             <a:off x="6958080" y="1414440"/>
-            <a:ext cx="4845960" cy="2579040"/>
+            <a:ext cx="4845600" cy="2578680"/>
           </a:xfrm>
           <a:custGeom>
             <a:avLst/>
@@ -30711,7 +30708,7 @@
         <p:spPr>
           <a:xfrm>
             <a:off x="7153200" y="1609560"/>
-            <a:ext cx="378720" cy="378720"/>
+            <a:ext cx="378360" cy="378360"/>
           </a:xfrm>
           <a:custGeom>
             <a:avLst/>
@@ -30784,7 +30781,7 @@
         <p:spPr>
           <a:xfrm>
             <a:off x="7267680" y="1724040"/>
-            <a:ext cx="150120" cy="150120"/>
+            <a:ext cx="149760" cy="149760"/>
           </a:xfrm>
           <a:custGeom>
             <a:avLst/>
@@ -30917,7 +30914,7 @@
         <p:spPr>
           <a:xfrm>
             <a:off x="7648560" y="1666800"/>
-            <a:ext cx="1845720" cy="264600"/>
+            <a:ext cx="1845360" cy="264240"/>
           </a:xfrm>
           <a:prstGeom prst="rect">
             <a:avLst/>
@@ -30969,7 +30966,7 @@
         <p:spPr>
           <a:xfrm>
             <a:off x="7153200" y="2104920"/>
-            <a:ext cx="1083600" cy="455040"/>
+            <a:ext cx="1083240" cy="454680"/>
           </a:xfrm>
           <a:prstGeom prst="rect">
             <a:avLst/>
@@ -31021,7 +31018,7 @@
         <p:spPr>
           <a:xfrm>
             <a:off x="8127720" y="2300400"/>
-            <a:ext cx="455040" cy="264600"/>
+            <a:ext cx="454680" cy="264240"/>
           </a:xfrm>
           <a:custGeom>
             <a:avLst/>
@@ -31094,7 +31091,7 @@
         <p:spPr>
           <a:xfrm>
             <a:off x="8127720" y="2300400"/>
-            <a:ext cx="521640" cy="264600"/>
+            <a:ext cx="521280" cy="264240"/>
           </a:xfrm>
           <a:prstGeom prst="rect">
             <a:avLst/>
@@ -31146,7 +31143,7 @@
         <p:spPr>
           <a:xfrm>
             <a:off x="7153200" y="2643120"/>
-            <a:ext cx="4522320" cy="188280"/>
+            <a:ext cx="4521960" cy="187920"/>
           </a:xfrm>
           <a:prstGeom prst="rect">
             <a:avLst/>
@@ -31198,7 +31195,7 @@
         <p:spPr>
           <a:xfrm>
             <a:off x="7153200" y="2990880"/>
-            <a:ext cx="4455720" cy="7200"/>
+            <a:ext cx="4455360" cy="6840"/>
           </a:xfrm>
           <a:custGeom>
             <a:avLst/>
@@ -31249,7 +31246,7 @@
         <p:spPr>
           <a:xfrm>
             <a:off x="7153200" y="3147840"/>
-            <a:ext cx="4522320" cy="645480"/>
+            <a:ext cx="4521960" cy="645120"/>
           </a:xfrm>
           <a:prstGeom prst="rect">
             <a:avLst/>
@@ -31301,7 +31298,7 @@
         <p:spPr>
           <a:xfrm>
             <a:off x="6958080" y="4079160"/>
-            <a:ext cx="4845960" cy="2636280"/>
+            <a:ext cx="4845600" cy="2635920"/>
           </a:xfrm>
           <a:custGeom>
             <a:avLst/>
@@ -31375,7 +31372,7 @@
         <p:spPr>
           <a:xfrm>
             <a:off x="7153200" y="4274280"/>
-            <a:ext cx="4541400" cy="264600"/>
+            <a:ext cx="4541040" cy="264240"/>
           </a:xfrm>
           <a:prstGeom prst="rect">
             <a:avLst/>
@@ -31427,7 +31424,7 @@
         <p:spPr>
           <a:xfrm>
             <a:off x="7153200" y="4712400"/>
-            <a:ext cx="321840" cy="188280"/>
+            <a:ext cx="321480" cy="187920"/>
           </a:xfrm>
           <a:prstGeom prst="rect">
             <a:avLst/>
@@ -31479,7 +31476,7 @@
         <p:spPr>
           <a:xfrm>
             <a:off x="11301840" y="4693320"/>
-            <a:ext cx="378720" cy="226440"/>
+            <a:ext cx="378360" cy="226080"/>
           </a:xfrm>
           <a:prstGeom prst="rect">
             <a:avLst/>
@@ -31531,7 +31528,7 @@
         <p:spPr>
           <a:xfrm>
             <a:off x="7153200" y="4960080"/>
-            <a:ext cx="4455720" cy="74160"/>
+            <a:ext cx="4455360" cy="73800"/>
           </a:xfrm>
           <a:custGeom>
             <a:avLst/>
@@ -31602,7 +31599,7 @@
         <p:spPr>
           <a:xfrm>
             <a:off x="7153200" y="4960080"/>
-            <a:ext cx="2674440" cy="74160"/>
+            <a:ext cx="2674080" cy="73800"/>
           </a:xfrm>
           <a:custGeom>
             <a:avLst/>
@@ -31673,7 +31670,7 @@
         <p:spPr>
           <a:xfrm>
             <a:off x="7153200" y="5074560"/>
-            <a:ext cx="4512600" cy="150120"/>
+            <a:ext cx="4512240" cy="149760"/>
           </a:xfrm>
           <a:prstGeom prst="rect">
             <a:avLst/>
@@ -31725,7 +31722,7 @@
         <p:spPr>
           <a:xfrm>
             <a:off x="7153200" y="5360040"/>
-            <a:ext cx="1198080" cy="188280"/>
+            <a:ext cx="1197720" cy="187920"/>
           </a:xfrm>
           <a:prstGeom prst="rect">
             <a:avLst/>
@@ -31777,7 +31774,7 @@
         <p:spPr>
           <a:xfrm>
             <a:off x="11308680" y="5341320"/>
-            <a:ext cx="378720" cy="226440"/>
+            <a:ext cx="378360" cy="226080"/>
           </a:xfrm>
           <a:prstGeom prst="rect">
             <a:avLst/>
@@ -31829,7 +31826,7 @@
         <p:spPr>
           <a:xfrm>
             <a:off x="7153200" y="5607720"/>
-            <a:ext cx="4455720" cy="74160"/>
+            <a:ext cx="4455360" cy="73800"/>
           </a:xfrm>
           <a:custGeom>
             <a:avLst/>
@@ -31900,7 +31897,7 @@
         <p:spPr>
           <a:xfrm>
             <a:off x="7153200" y="5607720"/>
-            <a:ext cx="2579040" cy="74160"/>
+            <a:ext cx="2578680" cy="73800"/>
           </a:xfrm>
           <a:custGeom>
             <a:avLst/>
@@ -31971,7 +31968,7 @@
         <p:spPr>
           <a:xfrm>
             <a:off x="7153200" y="5722200"/>
-            <a:ext cx="4512600" cy="150120"/>
+            <a:ext cx="4512240" cy="149760"/>
           </a:xfrm>
           <a:prstGeom prst="rect">
             <a:avLst/>
@@ -32023,7 +32020,7 @@
         <p:spPr>
           <a:xfrm>
             <a:off x="7153200" y="6008040"/>
-            <a:ext cx="1217160" cy="188280"/>
+            <a:ext cx="1216800" cy="187920"/>
           </a:xfrm>
           <a:prstGeom prst="rect">
             <a:avLst/>
@@ -32075,7 +32072,7 @@
         <p:spPr>
           <a:xfrm>
             <a:off x="11313720" y="5988960"/>
-            <a:ext cx="369360" cy="226440"/>
+            <a:ext cx="369000" cy="226080"/>
           </a:xfrm>
           <a:prstGeom prst="rect">
             <a:avLst/>
@@ -32127,7 +32124,7 @@
         <p:spPr>
           <a:xfrm>
             <a:off x="7153200" y="6255720"/>
-            <a:ext cx="4455720" cy="74160"/>
+            <a:ext cx="4455360" cy="73800"/>
           </a:xfrm>
           <a:custGeom>
             <a:avLst/>
@@ -32198,7 +32195,7 @@
         <p:spPr>
           <a:xfrm>
             <a:off x="7153200" y="6255720"/>
-            <a:ext cx="2312280" cy="74160"/>
+            <a:ext cx="2311920" cy="73800"/>
           </a:xfrm>
           <a:custGeom>
             <a:avLst/>
@@ -32269,7 +32266,7 @@
         <p:spPr>
           <a:xfrm>
             <a:off x="7153200" y="6369840"/>
-            <a:ext cx="4512600" cy="150120"/>
+            <a:ext cx="4512240" cy="149760"/>
           </a:xfrm>
           <a:prstGeom prst="rect">
             <a:avLst/>
@@ -32358,7 +32355,7 @@
         <p:spPr>
           <a:xfrm>
             <a:off x="370440" y="370440"/>
-            <a:ext cx="11513880" cy="182880"/>
+            <a:ext cx="11513520" cy="182520"/>
           </a:xfrm>
           <a:prstGeom prst="rect">
             <a:avLst/>
@@ -32386,7 +32383,7 @@
               <a:buNone/>
             </a:pPr>
             <a:r>
-              <a:rPr b="1" lang="en-US" sz="1020" spc="35" strike="noStrike">
+              <a:rPr b="1" lang="en-US" sz="1020" spc="32" strike="noStrike">
                 <a:solidFill>
                   <a:srgbClr val="6366f1"/>
                 </a:solidFill>
@@ -32410,7 +32407,7 @@
         <p:spPr>
           <a:xfrm>
             <a:off x="370440" y="629640"/>
-            <a:ext cx="11615760" cy="368280"/>
+            <a:ext cx="11615400" cy="367920"/>
           </a:xfrm>
           <a:prstGeom prst="rect">
             <a:avLst/>
@@ -32462,7 +32459,7 @@
         <p:spPr>
           <a:xfrm>
             <a:off x="370440" y="1073880"/>
-            <a:ext cx="11523240" cy="219960"/>
+            <a:ext cx="11522880" cy="219600"/>
           </a:xfrm>
           <a:prstGeom prst="rect">
             <a:avLst/>
@@ -32514,7 +32511,7 @@
         <p:spPr>
           <a:xfrm>
             <a:off x="388800" y="1374840"/>
-            <a:ext cx="5631120" cy="3756240"/>
+            <a:ext cx="5630760" cy="3755880"/>
           </a:xfrm>
           <a:custGeom>
             <a:avLst/>
@@ -32588,7 +32585,7 @@
         <p:spPr>
           <a:xfrm>
             <a:off x="592560" y="1564560"/>
-            <a:ext cx="442080" cy="442080"/>
+            <a:ext cx="441720" cy="441720"/>
           </a:xfrm>
           <a:custGeom>
             <a:avLst/>
@@ -32661,7 +32658,7 @@
         <p:spPr>
           <a:xfrm>
             <a:off x="722160" y="1694160"/>
-            <a:ext cx="182880" cy="182880"/>
+            <a:ext cx="182520" cy="182520"/>
           </a:xfrm>
           <a:custGeom>
             <a:avLst/>
@@ -32782,7 +32779,7 @@
         <p:spPr>
           <a:xfrm>
             <a:off x="1148040" y="1564560"/>
-            <a:ext cx="1478880" cy="257040"/>
+            <a:ext cx="1478520" cy="256680"/>
           </a:xfrm>
           <a:prstGeom prst="rect">
             <a:avLst/>
@@ -32834,7 +32831,7 @@
         <p:spPr>
           <a:xfrm>
             <a:off x="1148040" y="1823760"/>
-            <a:ext cx="1451160" cy="182880"/>
+            <a:ext cx="1450800" cy="182520"/>
           </a:xfrm>
           <a:prstGeom prst="rect">
             <a:avLst/>
@@ -32886,7 +32883,7 @@
         <p:spPr>
           <a:xfrm>
             <a:off x="592560" y="2157120"/>
-            <a:ext cx="5302440" cy="182880"/>
+            <a:ext cx="5302080" cy="182520"/>
           </a:xfrm>
           <a:prstGeom prst="rect">
             <a:avLst/>
@@ -32938,7 +32935,7 @@
         <p:spPr>
           <a:xfrm>
             <a:off x="592560" y="2379240"/>
-            <a:ext cx="1830960" cy="368280"/>
+            <a:ext cx="1830600" cy="367920"/>
           </a:xfrm>
           <a:prstGeom prst="rect">
             <a:avLst/>
@@ -32990,7 +32987,7 @@
         <p:spPr>
           <a:xfrm>
             <a:off x="2369880" y="2494800"/>
-            <a:ext cx="701280" cy="257040"/>
+            <a:ext cx="700920" cy="256680"/>
           </a:xfrm>
           <a:custGeom>
             <a:avLst/>
@@ -33063,7 +33060,7 @@
         <p:spPr>
           <a:xfrm>
             <a:off x="2369880" y="2494800"/>
-            <a:ext cx="766080" cy="257040"/>
+            <a:ext cx="765720" cy="256680"/>
           </a:xfrm>
           <a:prstGeom prst="rect">
             <a:avLst/>
@@ -33115,7 +33112,7 @@
         <p:spPr>
           <a:xfrm>
             <a:off x="592560" y="2902320"/>
-            <a:ext cx="5237640" cy="1145880"/>
+            <a:ext cx="5237280" cy="1145520"/>
           </a:xfrm>
           <a:custGeom>
             <a:avLst/>
@@ -33186,7 +33183,7 @@
         <p:spPr>
           <a:xfrm>
             <a:off x="703440" y="3013200"/>
-            <a:ext cx="5089320" cy="219960"/>
+            <a:ext cx="5088960" cy="219600"/>
           </a:xfrm>
           <a:prstGeom prst="rect">
             <a:avLst/>
@@ -33238,7 +33235,7 @@
         <p:spPr>
           <a:xfrm>
             <a:off x="703440" y="3272400"/>
-            <a:ext cx="5080320" cy="182880"/>
+            <a:ext cx="5079960" cy="182520"/>
           </a:xfrm>
           <a:prstGeom prst="rect">
             <a:avLst/>
@@ -33290,7 +33287,7 @@
         <p:spPr>
           <a:xfrm>
             <a:off x="703440" y="3531600"/>
-            <a:ext cx="747720" cy="257040"/>
+            <a:ext cx="747360" cy="256680"/>
           </a:xfrm>
           <a:prstGeom prst="rect">
             <a:avLst/>
@@ -33342,7 +33339,7 @@
         <p:spPr>
           <a:xfrm>
             <a:off x="703440" y="3790800"/>
-            <a:ext cx="710640" cy="145800"/>
+            <a:ext cx="710280" cy="145440"/>
           </a:xfrm>
           <a:prstGeom prst="rect">
             <a:avLst/>
@@ -33394,7 +33391,7 @@
         <p:spPr>
           <a:xfrm>
             <a:off x="1508040" y="3531600"/>
-            <a:ext cx="1006920" cy="257040"/>
+            <a:ext cx="1006560" cy="256680"/>
           </a:xfrm>
           <a:prstGeom prst="rect">
             <a:avLst/>
@@ -33446,7 +33443,7 @@
         <p:spPr>
           <a:xfrm>
             <a:off x="1508040" y="3790800"/>
-            <a:ext cx="969840" cy="145800"/>
+            <a:ext cx="969480" cy="145440"/>
           </a:xfrm>
           <a:prstGeom prst="rect">
             <a:avLst/>
@@ -33498,7 +33495,7 @@
         <p:spPr>
           <a:xfrm>
             <a:off x="2575800" y="3531600"/>
-            <a:ext cx="1090080" cy="257040"/>
+            <a:ext cx="1089720" cy="256680"/>
           </a:xfrm>
           <a:prstGeom prst="rect">
             <a:avLst/>
@@ -33550,7 +33547,7 @@
         <p:spPr>
           <a:xfrm>
             <a:off x="2575800" y="3790800"/>
-            <a:ext cx="1053360" cy="145800"/>
+            <a:ext cx="1053000" cy="145440"/>
           </a:xfrm>
           <a:prstGeom prst="rect">
             <a:avLst/>
@@ -33602,7 +33599,7 @@
         <p:spPr>
           <a:xfrm>
             <a:off x="592560" y="4161240"/>
-            <a:ext cx="5237640" cy="775440"/>
+            <a:ext cx="5237280" cy="775080"/>
           </a:xfrm>
           <a:custGeom>
             <a:avLst/>
@@ -33673,7 +33670,7 @@
         <p:spPr>
           <a:xfrm>
             <a:off x="703440" y="4272120"/>
-            <a:ext cx="5089320" cy="219960"/>
+            <a:ext cx="5088960" cy="219600"/>
           </a:xfrm>
           <a:prstGeom prst="rect">
             <a:avLst/>
@@ -33725,7 +33722,7 @@
         <p:spPr>
           <a:xfrm>
             <a:off x="703440" y="4568400"/>
-            <a:ext cx="1062360" cy="257040"/>
+            <a:ext cx="1062000" cy="256680"/>
           </a:xfrm>
           <a:custGeom>
             <a:avLst/>
@@ -33798,7 +33795,7 @@
         <p:spPr>
           <a:xfrm>
             <a:off x="703440" y="4568400"/>
-            <a:ext cx="1127160" cy="257040"/>
+            <a:ext cx="1126800" cy="256680"/>
           </a:xfrm>
           <a:prstGeom prst="rect">
             <a:avLst/>
@@ -33850,7 +33847,7 @@
         <p:spPr>
           <a:xfrm>
             <a:off x="1843560" y="4568400"/>
-            <a:ext cx="1238400" cy="257040"/>
+            <a:ext cx="1238040" cy="256680"/>
           </a:xfrm>
           <a:custGeom>
             <a:avLst/>
@@ -33923,7 +33920,7 @@
         <p:spPr>
           <a:xfrm>
             <a:off x="1843560" y="4568400"/>
-            <a:ext cx="1303200" cy="257040"/>
+            <a:ext cx="1302840" cy="256680"/>
           </a:xfrm>
           <a:prstGeom prst="rect">
             <a:avLst/>
@@ -33975,7 +33972,7 @@
         <p:spPr>
           <a:xfrm>
             <a:off x="3161880" y="4568400"/>
-            <a:ext cx="895680" cy="257040"/>
+            <a:ext cx="895320" cy="256680"/>
           </a:xfrm>
           <a:custGeom>
             <a:avLst/>
@@ -34048,7 +34045,7 @@
         <p:spPr>
           <a:xfrm>
             <a:off x="3161880" y="4568400"/>
-            <a:ext cx="960480" cy="257040"/>
+            <a:ext cx="960120" cy="256680"/>
           </a:xfrm>
           <a:prstGeom prst="rect">
             <a:avLst/>
@@ -34100,7 +34097,7 @@
         <p:spPr>
           <a:xfrm>
             <a:off x="6190200" y="1374840"/>
-            <a:ext cx="5631120" cy="4126680"/>
+            <a:ext cx="5630760" cy="4126320"/>
           </a:xfrm>
           <a:custGeom>
             <a:avLst/>
@@ -34174,7 +34171,7 @@
         <p:spPr>
           <a:xfrm>
             <a:off x="6393600" y="1564560"/>
-            <a:ext cx="442080" cy="442080"/>
+            <a:ext cx="441720" cy="441720"/>
           </a:xfrm>
           <a:custGeom>
             <a:avLst/>
@@ -34247,7 +34244,7 @@
         <p:spPr>
           <a:xfrm>
             <a:off x="6523200" y="1694160"/>
-            <a:ext cx="182880" cy="182880"/>
+            <a:ext cx="182520" cy="182520"/>
           </a:xfrm>
           <a:custGeom>
             <a:avLst/>
@@ -34424,7 +34421,7 @@
         <p:spPr>
           <a:xfrm>
             <a:off x="6949080" y="1564560"/>
-            <a:ext cx="1719720" cy="257040"/>
+            <a:ext cx="1719360" cy="256680"/>
           </a:xfrm>
           <a:prstGeom prst="rect">
             <a:avLst/>
@@ -34476,7 +34473,7 @@
         <p:spPr>
           <a:xfrm>
             <a:off x="6949080" y="1823760"/>
-            <a:ext cx="1692000" cy="182880"/>
+            <a:ext cx="1691640" cy="182520"/>
           </a:xfrm>
           <a:prstGeom prst="rect">
             <a:avLst/>
@@ -34528,7 +34525,7 @@
         <p:spPr>
           <a:xfrm>
             <a:off x="6393600" y="2157120"/>
-            <a:ext cx="5302440" cy="182880"/>
+            <a:ext cx="5302080" cy="182520"/>
           </a:xfrm>
           <a:prstGeom prst="rect">
             <a:avLst/>
@@ -34580,7 +34577,7 @@
         <p:spPr>
           <a:xfrm>
             <a:off x="6393600" y="2379240"/>
-            <a:ext cx="1766160" cy="368280"/>
+            <a:ext cx="1765800" cy="367920"/>
           </a:xfrm>
           <a:prstGeom prst="rect">
             <a:avLst/>
@@ -34632,7 +34629,7 @@
         <p:spPr>
           <a:xfrm>
             <a:off x="8108640" y="2494800"/>
-            <a:ext cx="729000" cy="257040"/>
+            <a:ext cx="728640" cy="256680"/>
           </a:xfrm>
           <a:custGeom>
             <a:avLst/>
@@ -34705,7 +34702,7 @@
         <p:spPr>
           <a:xfrm>
             <a:off x="8108640" y="2494800"/>
-            <a:ext cx="793800" cy="257040"/>
+            <a:ext cx="793440" cy="256680"/>
           </a:xfrm>
           <a:prstGeom prst="rect">
             <a:avLst/>
@@ -34757,7 +34754,7 @@
         <p:spPr>
           <a:xfrm>
             <a:off x="6393600" y="2791080"/>
-            <a:ext cx="5293080" cy="145800"/>
+            <a:ext cx="5292720" cy="145440"/>
           </a:xfrm>
           <a:prstGeom prst="rect">
             <a:avLst/>
@@ -34809,7 +34806,7 @@
         <p:spPr>
           <a:xfrm>
             <a:off x="6393600" y="3087360"/>
-            <a:ext cx="5237640" cy="1219680"/>
+            <a:ext cx="5237280" cy="1219320"/>
           </a:xfrm>
           <a:custGeom>
             <a:avLst/>
@@ -34880,7 +34877,7 @@
         <p:spPr>
           <a:xfrm>
             <a:off x="6504840" y="3198600"/>
-            <a:ext cx="5089320" cy="219960"/>
+            <a:ext cx="5088960" cy="219600"/>
           </a:xfrm>
           <a:prstGeom prst="rect">
             <a:avLst/>
@@ -34932,7 +34929,7 @@
         <p:spPr>
           <a:xfrm>
             <a:off x="6523200" y="3513240"/>
-            <a:ext cx="145800" cy="145800"/>
+            <a:ext cx="145440" cy="145440"/>
           </a:xfrm>
           <a:custGeom>
             <a:avLst/>
@@ -35037,7 +35034,7 @@
         <p:spPr>
           <a:xfrm>
             <a:off x="6764040" y="3494520"/>
-            <a:ext cx="1775160" cy="182880"/>
+            <a:ext cx="1774800" cy="182520"/>
           </a:xfrm>
           <a:prstGeom prst="rect">
             <a:avLst/>
@@ -35089,7 +35086,7 @@
         <p:spPr>
           <a:xfrm>
             <a:off x="6523200" y="3772440"/>
-            <a:ext cx="145800" cy="145800"/>
+            <a:ext cx="145440" cy="145440"/>
           </a:xfrm>
           <a:custGeom>
             <a:avLst/>
@@ -35194,7 +35191,7 @@
         <p:spPr>
           <a:xfrm>
             <a:off x="6764040" y="3753720"/>
-            <a:ext cx="1330920" cy="182880"/>
+            <a:ext cx="1330560" cy="182520"/>
           </a:xfrm>
           <a:prstGeom prst="rect">
             <a:avLst/>
@@ -35246,7 +35243,7 @@
         <p:spPr>
           <a:xfrm>
             <a:off x="6523200" y="4031640"/>
-            <a:ext cx="145800" cy="145800"/>
+            <a:ext cx="145440" cy="145440"/>
           </a:xfrm>
           <a:custGeom>
             <a:avLst/>
@@ -35351,7 +35348,7 @@
         <p:spPr>
           <a:xfrm>
             <a:off x="6764040" y="4012920"/>
-            <a:ext cx="1775160" cy="182880"/>
+            <a:ext cx="1774800" cy="182520"/>
           </a:xfrm>
           <a:prstGeom prst="rect">
             <a:avLst/>
@@ -35403,7 +35400,7 @@
         <p:spPr>
           <a:xfrm>
             <a:off x="6393600" y="4420440"/>
-            <a:ext cx="5237640" cy="886680"/>
+            <a:ext cx="5237280" cy="886320"/>
           </a:xfrm>
           <a:custGeom>
             <a:avLst/>
@@ -35474,7 +35471,7 @@
         <p:spPr>
           <a:xfrm>
             <a:off x="6504840" y="4531320"/>
-            <a:ext cx="5089320" cy="219960"/>
+            <a:ext cx="5088960" cy="219600"/>
           </a:xfrm>
           <a:prstGeom prst="rect">
             <a:avLst/>
@@ -35526,7 +35523,7 @@
         <p:spPr>
           <a:xfrm>
             <a:off x="6504840" y="4827600"/>
-            <a:ext cx="5080320" cy="368280"/>
+            <a:ext cx="5079960" cy="367920"/>
           </a:xfrm>
           <a:prstGeom prst="rect">
             <a:avLst/>
@@ -35598,7 +35595,7 @@
         <p:spPr>
           <a:xfrm>
             <a:off x="374760" y="5582160"/>
-            <a:ext cx="3710160" cy="1266120"/>
+            <a:ext cx="3709800" cy="1265760"/>
           </a:xfrm>
           <a:custGeom>
             <a:avLst/>
@@ -35672,7 +35669,7 @@
         <p:spPr>
           <a:xfrm>
             <a:off x="2091240" y="5734800"/>
-            <a:ext cx="275400" cy="219960"/>
+            <a:ext cx="275040" cy="219600"/>
           </a:xfrm>
           <a:custGeom>
             <a:avLst/>
@@ -35853,7 +35850,7 @@
         <p:spPr>
           <a:xfrm>
             <a:off x="495360" y="6031080"/>
-            <a:ext cx="3469320" cy="182880"/>
+            <a:ext cx="3468960" cy="182520"/>
           </a:xfrm>
           <a:prstGeom prst="rect">
             <a:avLst/>
@@ -35905,7 +35902,7 @@
         <p:spPr>
           <a:xfrm>
             <a:off x="471960" y="6216480"/>
-            <a:ext cx="3515760" cy="294120"/>
+            <a:ext cx="3515400" cy="293760"/>
           </a:xfrm>
           <a:prstGeom prst="rect">
             <a:avLst/>
@@ -35957,7 +35954,7 @@
         <p:spPr>
           <a:xfrm>
             <a:off x="495360" y="6512760"/>
-            <a:ext cx="3469320" cy="182880"/>
+            <a:ext cx="3468960" cy="182520"/>
           </a:xfrm>
           <a:prstGeom prst="rect">
             <a:avLst/>
@@ -36009,7 +36006,7 @@
         <p:spPr>
           <a:xfrm>
             <a:off x="4242600" y="5582160"/>
-            <a:ext cx="3710160" cy="1266120"/>
+            <a:ext cx="3709800" cy="1265760"/>
           </a:xfrm>
           <a:custGeom>
             <a:avLst/>
@@ -36083,7 +36080,7 @@
         <p:spPr>
           <a:xfrm>
             <a:off x="6014160" y="5734800"/>
-            <a:ext cx="164520" cy="219960"/>
+            <a:ext cx="164160" cy="219600"/>
           </a:xfrm>
           <a:custGeom>
             <a:avLst/>
@@ -36194,7 +36191,7 @@
         <p:spPr>
           <a:xfrm>
             <a:off x="4362840" y="6031080"/>
-            <a:ext cx="3469320" cy="182880"/>
+            <a:ext cx="3468960" cy="182520"/>
           </a:xfrm>
           <a:prstGeom prst="rect">
             <a:avLst/>
@@ -36246,7 +36243,7 @@
         <p:spPr>
           <a:xfrm>
             <a:off x="4339800" y="6216480"/>
-            <a:ext cx="3515760" cy="294120"/>
+            <a:ext cx="3515400" cy="293760"/>
           </a:xfrm>
           <a:prstGeom prst="rect">
             <a:avLst/>
@@ -36298,7 +36295,7 @@
         <p:spPr>
           <a:xfrm>
             <a:off x="4362840" y="6512760"/>
-            <a:ext cx="3469320" cy="182880"/>
+            <a:ext cx="3468960" cy="182520"/>
           </a:xfrm>
           <a:prstGeom prst="rect">
             <a:avLst/>
@@ -36350,7 +36347,7 @@
         <p:spPr>
           <a:xfrm>
             <a:off x="8110080" y="5582160"/>
-            <a:ext cx="3710160" cy="1266120"/>
+            <a:ext cx="3709800" cy="1265760"/>
           </a:xfrm>
           <a:custGeom>
             <a:avLst/>
@@ -36424,7 +36421,7 @@
         <p:spPr>
           <a:xfrm>
             <a:off x="9826200" y="5734800"/>
-            <a:ext cx="275400" cy="219960"/>
+            <a:ext cx="275040" cy="219600"/>
           </a:xfrm>
           <a:custGeom>
             <a:avLst/>
@@ -36712,7 +36709,7 @@
         <p:spPr>
           <a:xfrm>
             <a:off x="8230320" y="6031080"/>
-            <a:ext cx="3469320" cy="182880"/>
+            <a:ext cx="3468960" cy="182520"/>
           </a:xfrm>
           <a:prstGeom prst="rect">
             <a:avLst/>
@@ -36764,7 +36761,7 @@
         <p:spPr>
           <a:xfrm>
             <a:off x="8207280" y="6216480"/>
-            <a:ext cx="3515760" cy="294120"/>
+            <a:ext cx="3515400" cy="293760"/>
           </a:xfrm>
           <a:prstGeom prst="rect">
             <a:avLst/>
@@ -36816,7 +36813,7 @@
         <p:spPr>
           <a:xfrm>
             <a:off x="8230320" y="6512760"/>
-            <a:ext cx="3469320" cy="182880"/>
+            <a:ext cx="3468960" cy="182520"/>
           </a:xfrm>
           <a:prstGeom prst="rect">
             <a:avLst/>
@@ -36905,7 +36902,7 @@
         <p:spPr>
           <a:xfrm>
             <a:off x="0" y="0"/>
-            <a:ext cx="12189960" cy="6856200"/>
+            <a:ext cx="12189600" cy="6855840"/>
           </a:xfrm>
           <a:prstGeom prst="roundRect">
             <a:avLst>
@@ -36937,7 +36934,7 @@
         <p:spPr>
           <a:xfrm>
             <a:off x="0" y="0"/>
-            <a:ext cx="12189960" cy="6856200"/>
+            <a:ext cx="12189600" cy="6855840"/>
           </a:xfrm>
           <a:custGeom>
             <a:avLst/>
@@ -37000,7 +36997,7 @@
         <p:spPr>
           <a:xfrm>
             <a:off x="344520" y="344520"/>
-            <a:ext cx="11560680" cy="170280"/>
+            <a:ext cx="11560320" cy="169920"/>
           </a:xfrm>
           <a:prstGeom prst="rect">
             <a:avLst/>
@@ -37028,7 +37025,7 @@
               <a:buNone/>
             </a:pPr>
             <a:r>
-              <a:rPr b="1" lang="en-US" sz="950" spc="32" strike="noStrike">
+              <a:rPr b="1" lang="en-US" sz="950" spc="29" strike="noStrike">
                 <a:solidFill>
                   <a:srgbClr val="6366f1"/>
                 </a:solidFill>
@@ -37052,7 +37049,7 @@
         <p:spPr>
           <a:xfrm>
             <a:off x="344520" y="586080"/>
-            <a:ext cx="11655720" cy="342360"/>
+            <a:ext cx="11655360" cy="342000"/>
           </a:xfrm>
           <a:prstGeom prst="rect">
             <a:avLst/>
@@ -37104,7 +37101,7 @@
         <p:spPr>
           <a:xfrm>
             <a:off x="344520" y="999360"/>
-            <a:ext cx="11569320" cy="204480"/>
+            <a:ext cx="11568960" cy="204120"/>
           </a:xfrm>
           <a:prstGeom prst="rect">
             <a:avLst/>
@@ -37156,7 +37153,7 @@
         <p:spPr>
           <a:xfrm>
             <a:off x="348840" y="1348560"/>
-            <a:ext cx="5676120" cy="2763720"/>
+            <a:ext cx="5675760" cy="2763360"/>
           </a:xfrm>
           <a:custGeom>
             <a:avLst/>
@@ -37232,7 +37229,7 @@
         <p:spPr>
           <a:xfrm>
             <a:off x="525600" y="1524960"/>
-            <a:ext cx="411480" cy="411480"/>
+            <a:ext cx="411120" cy="411120"/>
           </a:xfrm>
           <a:custGeom>
             <a:avLst/>
@@ -37305,7 +37302,7 @@
         <p:spPr>
           <a:xfrm>
             <a:off x="635400" y="1645560"/>
-            <a:ext cx="191880" cy="170280"/>
+            <a:ext cx="191520" cy="169920"/>
           </a:xfrm>
           <a:custGeom>
             <a:avLst/>
@@ -37430,7 +37427,7 @@
         <p:spPr>
           <a:xfrm>
             <a:off x="1042560" y="1611360"/>
-            <a:ext cx="1505520" cy="239040"/>
+            <a:ext cx="1505160" cy="238680"/>
           </a:xfrm>
           <a:prstGeom prst="rect">
             <a:avLst/>
@@ -37482,7 +37479,7 @@
         <p:spPr>
           <a:xfrm>
             <a:off x="525600" y="2076480"/>
-            <a:ext cx="5322600" cy="549360"/>
+            <a:ext cx="5322240" cy="549000"/>
           </a:xfrm>
           <a:custGeom>
             <a:avLst/>
@@ -37553,7 +37550,7 @@
         <p:spPr>
           <a:xfrm>
             <a:off x="654840" y="2214360"/>
-            <a:ext cx="118440" cy="135720"/>
+            <a:ext cx="118080" cy="135360"/>
           </a:xfrm>
           <a:custGeom>
             <a:avLst/>
@@ -37708,7 +37705,7 @@
         <p:spPr>
           <a:xfrm>
             <a:off x="904680" y="2179800"/>
-            <a:ext cx="3263400" cy="170280"/>
+            <a:ext cx="3263040" cy="169920"/>
           </a:xfrm>
           <a:prstGeom prst="rect">
             <a:avLst/>
@@ -37760,7 +37757,7 @@
         <p:spPr>
           <a:xfrm>
             <a:off x="904680" y="2352240"/>
-            <a:ext cx="3263400" cy="170280"/>
+            <a:ext cx="3263040" cy="169920"/>
           </a:xfrm>
           <a:prstGeom prst="rect">
             <a:avLst/>
@@ -37812,7 +37809,7 @@
         <p:spPr>
           <a:xfrm>
             <a:off x="525600" y="2731320"/>
-            <a:ext cx="5322600" cy="549360"/>
+            <a:ext cx="5322240" cy="549000"/>
           </a:xfrm>
           <a:custGeom>
             <a:avLst/>
@@ -37883,7 +37880,7 @@
         <p:spPr>
           <a:xfrm>
             <a:off x="646200" y="2869200"/>
-            <a:ext cx="135720" cy="135720"/>
+            <a:ext cx="135360" cy="135360"/>
           </a:xfrm>
           <a:custGeom>
             <a:avLst/>
@@ -38033,7 +38030,7 @@
         <p:spPr>
           <a:xfrm>
             <a:off x="904680" y="2834640"/>
-            <a:ext cx="3168720" cy="170280"/>
+            <a:ext cx="3168360" cy="169920"/>
           </a:xfrm>
           <a:prstGeom prst="rect">
             <a:avLst/>
@@ -38085,7 +38082,7 @@
         <p:spPr>
           <a:xfrm>
             <a:off x="904680" y="3007080"/>
-            <a:ext cx="3168720" cy="170280"/>
+            <a:ext cx="3168360" cy="169920"/>
           </a:xfrm>
           <a:prstGeom prst="rect">
             <a:avLst/>
@@ -38137,7 +38134,7 @@
         <p:spPr>
           <a:xfrm>
             <a:off x="525600" y="3386160"/>
-            <a:ext cx="5322600" cy="549360"/>
+            <a:ext cx="5322240" cy="549000"/>
           </a:xfrm>
           <a:custGeom>
             <a:avLst/>
@@ -38208,7 +38205,7 @@
         <p:spPr>
           <a:xfrm>
             <a:off x="637560" y="3524040"/>
-            <a:ext cx="153000" cy="135720"/>
+            <a:ext cx="152640" cy="135360"/>
           </a:xfrm>
           <a:custGeom>
             <a:avLst/>
@@ -38315,7 +38312,7 @@
         <p:spPr>
           <a:xfrm>
             <a:off x="904680" y="3489480"/>
-            <a:ext cx="2806560" cy="170280"/>
+            <a:ext cx="2806200" cy="169920"/>
           </a:xfrm>
           <a:prstGeom prst="rect">
             <a:avLst/>
@@ -38367,7 +38364,7 @@
         <p:spPr>
           <a:xfrm>
             <a:off x="904680" y="3661920"/>
-            <a:ext cx="2806560" cy="170280"/>
+            <a:ext cx="2806200" cy="169920"/>
           </a:xfrm>
           <a:prstGeom prst="rect">
             <a:avLst/>
@@ -38419,7 +38416,7 @@
         <p:spPr>
           <a:xfrm>
             <a:off x="6169680" y="1348560"/>
-            <a:ext cx="5676120" cy="2763720"/>
+            <a:ext cx="5675760" cy="2763360"/>
           </a:xfrm>
           <a:custGeom>
             <a:avLst/>
@@ -38495,7 +38492,7 @@
         <p:spPr>
           <a:xfrm>
             <a:off x="6346440" y="1524960"/>
-            <a:ext cx="411480" cy="411480"/>
+            <a:ext cx="411120" cy="411120"/>
           </a:xfrm>
           <a:custGeom>
             <a:avLst/>
@@ -38568,7 +38565,7 @@
         <p:spPr>
           <a:xfrm>
             <a:off x="6445440" y="1645560"/>
-            <a:ext cx="213120" cy="170280"/>
+            <a:ext cx="212760" cy="169920"/>
           </a:xfrm>
           <a:custGeom>
             <a:avLst/>
@@ -38749,7 +38746,7 @@
         <p:spPr>
           <a:xfrm>
             <a:off x="6863400" y="1611360"/>
-            <a:ext cx="1178280" cy="239040"/>
+            <a:ext cx="1177920" cy="238680"/>
           </a:xfrm>
           <a:prstGeom prst="rect">
             <a:avLst/>
@@ -38801,7 +38798,7 @@
         <p:spPr>
           <a:xfrm>
             <a:off x="6346440" y="2076480"/>
-            <a:ext cx="5322600" cy="549360"/>
+            <a:ext cx="5322240" cy="549000"/>
           </a:xfrm>
           <a:custGeom>
             <a:avLst/>
@@ -38872,7 +38869,7 @@
         <p:spPr>
           <a:xfrm>
             <a:off x="6475680" y="2214360"/>
-            <a:ext cx="118440" cy="135720"/>
+            <a:ext cx="118080" cy="135360"/>
           </a:xfrm>
           <a:custGeom>
             <a:avLst/>
@@ -38969,7 +38966,7 @@
         <p:spPr>
           <a:xfrm>
             <a:off x="6725520" y="2179800"/>
-            <a:ext cx="2798280" cy="170280"/>
+            <a:ext cx="2797920" cy="169920"/>
           </a:xfrm>
           <a:prstGeom prst="rect">
             <a:avLst/>
@@ -39021,7 +39018,7 @@
         <p:spPr>
           <a:xfrm>
             <a:off x="6725520" y="2352240"/>
-            <a:ext cx="2798280" cy="170280"/>
+            <a:ext cx="2797920" cy="169920"/>
           </a:xfrm>
           <a:prstGeom prst="rect">
             <a:avLst/>
@@ -39073,7 +39070,7 @@
         <p:spPr>
           <a:xfrm>
             <a:off x="6346440" y="2731320"/>
-            <a:ext cx="5322600" cy="549360"/>
+            <a:ext cx="5322240" cy="549000"/>
           </a:xfrm>
           <a:custGeom>
             <a:avLst/>
@@ -39144,7 +39141,7 @@
         <p:spPr>
           <a:xfrm>
             <a:off x="6449760" y="2869200"/>
-            <a:ext cx="170280" cy="135720"/>
+            <a:ext cx="169920" cy="135360"/>
           </a:xfrm>
           <a:custGeom>
             <a:avLst/>
@@ -39360,7 +39357,7 @@
         <p:spPr>
           <a:xfrm>
             <a:off x="6725520" y="2834640"/>
-            <a:ext cx="2875680" cy="170280"/>
+            <a:ext cx="2875320" cy="169920"/>
           </a:xfrm>
           <a:prstGeom prst="rect">
             <a:avLst/>
@@ -39412,7 +39409,7 @@
         <p:spPr>
           <a:xfrm>
             <a:off x="6725520" y="3007080"/>
-            <a:ext cx="2875680" cy="170280"/>
+            <a:ext cx="2875320" cy="169920"/>
           </a:xfrm>
           <a:prstGeom prst="rect">
             <a:avLst/>
@@ -39464,7 +39461,7 @@
         <p:spPr>
           <a:xfrm>
             <a:off x="6346440" y="3386160"/>
-            <a:ext cx="5322600" cy="549360"/>
+            <a:ext cx="5322240" cy="549000"/>
           </a:xfrm>
           <a:custGeom>
             <a:avLst/>
@@ -39535,7 +39532,7 @@
         <p:spPr>
           <a:xfrm>
             <a:off x="6467040" y="3524040"/>
-            <a:ext cx="135720" cy="135720"/>
+            <a:ext cx="135360" cy="135360"/>
           </a:xfrm>
           <a:custGeom>
             <a:avLst/>
@@ -39668,7 +39665,7 @@
         <p:spPr>
           <a:xfrm>
             <a:off x="6725520" y="3489480"/>
-            <a:ext cx="2436120" cy="170280"/>
+            <a:ext cx="2435760" cy="169920"/>
           </a:xfrm>
           <a:prstGeom prst="rect">
             <a:avLst/>
@@ -39720,7 +39717,7 @@
         <p:spPr>
           <a:xfrm>
             <a:off x="6725520" y="3661920"/>
-            <a:ext cx="2436120" cy="170280"/>
+            <a:ext cx="2435760" cy="169920"/>
           </a:xfrm>
           <a:prstGeom prst="rect">
             <a:avLst/>
@@ -39772,7 +39769,7 @@
         <p:spPr>
           <a:xfrm>
             <a:off x="348840" y="4260600"/>
-            <a:ext cx="5676120" cy="2591280"/>
+            <a:ext cx="5675760" cy="2590920"/>
           </a:xfrm>
           <a:custGeom>
             <a:avLst/>
@@ -39848,7 +39845,7 @@
         <p:spPr>
           <a:xfrm>
             <a:off x="525600" y="4437360"/>
-            <a:ext cx="411480" cy="411480"/>
+            <a:ext cx="411120" cy="411120"/>
           </a:xfrm>
           <a:custGeom>
             <a:avLst/>
@@ -39921,7 +39918,7 @@
         <p:spPr>
           <a:xfrm>
             <a:off x="646200" y="4557960"/>
-            <a:ext cx="170280" cy="170280"/>
+            <a:ext cx="169920" cy="169920"/>
           </a:xfrm>
           <a:custGeom>
             <a:avLst/>
@@ -40144,7 +40141,7 @@
         <p:spPr>
           <a:xfrm>
             <a:off x="1042560" y="4523400"/>
-            <a:ext cx="1643400" cy="239040"/>
+            <a:ext cx="1643040" cy="238680"/>
           </a:xfrm>
           <a:prstGeom prst="rect">
             <a:avLst/>
@@ -40196,7 +40193,7 @@
         <p:spPr>
           <a:xfrm>
             <a:off x="525600" y="4988880"/>
-            <a:ext cx="5322600" cy="618120"/>
+            <a:ext cx="5322240" cy="617760"/>
           </a:xfrm>
           <a:custGeom>
             <a:avLst/>
@@ -40267,7 +40264,7 @@
         <p:spPr>
           <a:xfrm>
             <a:off x="628920" y="5092200"/>
-            <a:ext cx="5176080" cy="170280"/>
+            <a:ext cx="5175720" cy="169920"/>
           </a:xfrm>
           <a:prstGeom prst="rect">
             <a:avLst/>
@@ -40319,7 +40316,7 @@
         <p:spPr>
           <a:xfrm>
             <a:off x="628920" y="5333400"/>
-            <a:ext cx="5176080" cy="170280"/>
+            <a:ext cx="5175720" cy="169920"/>
           </a:xfrm>
           <a:prstGeom prst="rect">
             <a:avLst/>
@@ -40371,7 +40368,7 @@
         <p:spPr>
           <a:xfrm>
             <a:off x="525600" y="5712480"/>
-            <a:ext cx="2608560" cy="618120"/>
+            <a:ext cx="2608200" cy="617760"/>
           </a:xfrm>
           <a:custGeom>
             <a:avLst/>
@@ -40442,7 +40439,7 @@
         <p:spPr>
           <a:xfrm>
             <a:off x="577440" y="5815800"/>
-            <a:ext cx="2505240" cy="273600"/>
+            <a:ext cx="2504880" cy="273240"/>
           </a:xfrm>
           <a:prstGeom prst="rect">
             <a:avLst/>
@@ -40494,7 +40491,7 @@
         <p:spPr>
           <a:xfrm>
             <a:off x="603000" y="6091560"/>
-            <a:ext cx="2453400" cy="135720"/>
+            <a:ext cx="2453040" cy="135360"/>
           </a:xfrm>
           <a:prstGeom prst="rect">
             <a:avLst/>
@@ -40546,7 +40543,7 @@
         <p:spPr>
           <a:xfrm>
             <a:off x="3237840" y="5712480"/>
-            <a:ext cx="2608560" cy="618120"/>
+            <a:ext cx="2608200" cy="617760"/>
           </a:xfrm>
           <a:custGeom>
             <a:avLst/>
@@ -40617,7 +40614,7 @@
         <p:spPr>
           <a:xfrm>
             <a:off x="3289320" y="5815800"/>
-            <a:ext cx="2505240" cy="273600"/>
+            <a:ext cx="2504880" cy="273240"/>
           </a:xfrm>
           <a:prstGeom prst="rect">
             <a:avLst/>
@@ -40669,7 +40666,7 @@
         <p:spPr>
           <a:xfrm>
             <a:off x="3315240" y="6091560"/>
-            <a:ext cx="2453400" cy="135720"/>
+            <a:ext cx="2453040" cy="135360"/>
           </a:xfrm>
           <a:prstGeom prst="rect">
             <a:avLst/>
@@ -40721,7 +40718,7 @@
         <p:spPr>
           <a:xfrm>
             <a:off x="6169680" y="4260600"/>
-            <a:ext cx="5676120" cy="2591280"/>
+            <a:ext cx="5675760" cy="2590920"/>
           </a:xfrm>
           <a:custGeom>
             <a:avLst/>
@@ -40797,7 +40794,7 @@
         <p:spPr>
           <a:xfrm>
             <a:off x="6346440" y="4437360"/>
-            <a:ext cx="411480" cy="411480"/>
+            <a:ext cx="411120" cy="411120"/>
           </a:xfrm>
           <a:custGeom>
             <a:avLst/>
@@ -40870,7 +40867,7 @@
         <p:spPr>
           <a:xfrm>
             <a:off x="6467040" y="4557960"/>
-            <a:ext cx="170280" cy="170280"/>
+            <a:ext cx="169920" cy="169920"/>
           </a:xfrm>
           <a:custGeom>
             <a:avLst/>
@@ -40973,7 +40970,7 @@
         <p:spPr>
           <a:xfrm>
             <a:off x="6863400" y="4523400"/>
-            <a:ext cx="1384920" cy="239040"/>
+            <a:ext cx="1384560" cy="238680"/>
           </a:xfrm>
           <a:prstGeom prst="rect">
             <a:avLst/>
@@ -41025,7 +41022,7 @@
         <p:spPr>
           <a:xfrm>
             <a:off x="6346440" y="4988880"/>
-            <a:ext cx="5322600" cy="790560"/>
+            <a:ext cx="5322240" cy="790200"/>
           </a:xfrm>
           <a:custGeom>
             <a:avLst/>
@@ -41096,7 +41093,7 @@
         <p:spPr>
           <a:xfrm>
             <a:off x="6467040" y="5109480"/>
-            <a:ext cx="135720" cy="135720"/>
+            <a:ext cx="135360" cy="135360"/>
           </a:xfrm>
           <a:custGeom>
             <a:avLst/>
@@ -41273,7 +41270,7 @@
         <p:spPr>
           <a:xfrm>
             <a:off x="6690960" y="5092200"/>
-            <a:ext cx="1738440" cy="170280"/>
+            <a:ext cx="1738080" cy="169920"/>
           </a:xfrm>
           <a:prstGeom prst="rect">
             <a:avLst/>
@@ -41325,7 +41322,7 @@
         <p:spPr>
           <a:xfrm>
             <a:off x="6449760" y="5333400"/>
-            <a:ext cx="5176080" cy="342360"/>
+            <a:ext cx="5175720" cy="342000"/>
           </a:xfrm>
           <a:prstGeom prst="rect">
             <a:avLst/>
@@ -41377,7 +41374,7 @@
         <p:spPr>
           <a:xfrm>
             <a:off x="6346440" y="5884920"/>
-            <a:ext cx="5322600" cy="790560"/>
+            <a:ext cx="5322240" cy="790200"/>
           </a:xfrm>
           <a:custGeom>
             <a:avLst/>
@@ -41448,7 +41445,7 @@
         <p:spPr>
           <a:xfrm>
             <a:off x="6449760" y="5988240"/>
-            <a:ext cx="5176080" cy="170280"/>
+            <a:ext cx="5175720" cy="169920"/>
           </a:xfrm>
           <a:prstGeom prst="rect">
             <a:avLst/>
@@ -41500,7 +41497,7 @@
         <p:spPr>
           <a:xfrm>
             <a:off x="6449760" y="6229440"/>
-            <a:ext cx="5176080" cy="342360"/>
+            <a:ext cx="5175720" cy="342000"/>
           </a:xfrm>
           <a:prstGeom prst="rect">
             <a:avLst/>

--- a/assets/libreoffice_impr_njc/d6ba6b61-5ce3-46c0-90c0-f635d3a1a8eb/Tencent Holdings Limited - 2025 Interim Report.pptx
+++ b/assets/libreoffice_impr_njc/d6ba6b61-5ce3-46c0-90c0-f635d3a1a8eb/Tencent Holdings Limited - 2025 Interim Report.pptx
@@ -303,7 +303,7 @@
             <a:pPr algn="r">
               <a:buNone/>
             </a:pPr>
-            <a:fld id="{4612FA19-D787-4806-B6C5-D40AF2B52FF8}" type="slidenum">
+            <a:fld id="{72EC8996-DC00-43FA-AFF2-D32B025CB1DB}" type="slidenum">
               <a:rPr b="0" lang="en-HK" sz="1400" spc="-1" strike="noStrike">
                 <a:latin typeface="Times New Roman"/>
               </a:rPr>
@@ -351,7 +351,7 @@
         <p:spPr>
           <a:xfrm>
             <a:off x="685800" y="1143000"/>
-            <a:ext cx="5483880" cy="3083760"/>
+            <a:ext cx="5483520" cy="3083400"/>
           </a:xfrm>
           <a:prstGeom prst="rect">
             <a:avLst/>
@@ -374,7 +374,7 @@
         <p:spPr>
           <a:xfrm>
             <a:off x="685800" y="4400640"/>
-            <a:ext cx="5483880" cy="3597840"/>
+            <a:ext cx="5483520" cy="3597480"/>
           </a:xfrm>
           <a:prstGeom prst="rect">
             <a:avLst/>
@@ -408,7 +408,7 @@
         <p:spPr>
           <a:xfrm>
             <a:off x="3884760" y="8685360"/>
-            <a:ext cx="2969280" cy="456120"/>
+            <a:ext cx="2968920" cy="455760"/>
           </a:xfrm>
           <a:prstGeom prst="rect">
             <a:avLst/>
@@ -440,7 +440,7 @@
               </a:lnSpc>
               <a:buNone/>
             </a:pPr>
-            <a:fld id="{DF080EB4-AC59-4859-9E9B-B654929638A1}" type="slidenum">
+            <a:fld id="{2BA2D8EF-A60A-4CDF-A789-9BB5B4B9D0FF}" type="slidenum">
               <a:rPr b="0" lang="en-US" sz="1200" spc="-1" strike="noStrike">
                 <a:latin typeface="Times New Roman"/>
               </a:rPr>
@@ -487,7 +487,7 @@
         <p:spPr>
           <a:xfrm>
             <a:off x="685800" y="1143000"/>
-            <a:ext cx="5483880" cy="3083760"/>
+            <a:ext cx="5483520" cy="3083400"/>
           </a:xfrm>
           <a:prstGeom prst="rect">
             <a:avLst/>
@@ -510,7 +510,7 @@
         <p:spPr>
           <a:xfrm>
             <a:off x="685800" y="4400640"/>
-            <a:ext cx="5483880" cy="3597840"/>
+            <a:ext cx="5483520" cy="3597480"/>
           </a:xfrm>
           <a:prstGeom prst="rect">
             <a:avLst/>
@@ -544,7 +544,7 @@
         <p:spPr>
           <a:xfrm>
             <a:off x="3884760" y="8685360"/>
-            <a:ext cx="2969280" cy="456120"/>
+            <a:ext cx="2968920" cy="455760"/>
           </a:xfrm>
           <a:prstGeom prst="rect">
             <a:avLst/>
@@ -576,7 +576,7 @@
               </a:lnSpc>
               <a:buNone/>
             </a:pPr>
-            <a:fld id="{0DACE583-959D-43AD-8B4E-7D23B11F9005}" type="slidenum">
+            <a:fld id="{B987DFA8-8F39-4367-8BDE-53F50332EF86}" type="slidenum">
               <a:rPr b="0" lang="en-US" sz="1200" spc="-1" strike="noStrike">
                 <a:latin typeface="Times New Roman"/>
               </a:rPr>
@@ -623,7 +623,7 @@
         <p:spPr>
           <a:xfrm>
             <a:off x="685800" y="1143000"/>
-            <a:ext cx="5483880" cy="3083760"/>
+            <a:ext cx="5483520" cy="3083400"/>
           </a:xfrm>
           <a:prstGeom prst="rect">
             <a:avLst/>
@@ -646,7 +646,7 @@
         <p:spPr>
           <a:xfrm>
             <a:off x="685800" y="4400640"/>
-            <a:ext cx="5483880" cy="3597840"/>
+            <a:ext cx="5483520" cy="3597480"/>
           </a:xfrm>
           <a:prstGeom prst="rect">
             <a:avLst/>
@@ -680,7 +680,7 @@
         <p:spPr>
           <a:xfrm>
             <a:off x="3884760" y="8685360"/>
-            <a:ext cx="2969280" cy="456120"/>
+            <a:ext cx="2968920" cy="455760"/>
           </a:xfrm>
           <a:prstGeom prst="rect">
             <a:avLst/>
@@ -712,7 +712,7 @@
               </a:lnSpc>
               <a:buNone/>
             </a:pPr>
-            <a:fld id="{13943423-B309-4276-B7F7-5BCE99C058A2}" type="slidenum">
+            <a:fld id="{D238AB06-DB77-4AB0-874D-E1B17ADDAFD4}" type="slidenum">
               <a:rPr b="0" lang="en-US" sz="1200" spc="-1" strike="noStrike">
                 <a:latin typeface="Times New Roman"/>
               </a:rPr>
@@ -759,7 +759,7 @@
         <p:spPr>
           <a:xfrm>
             <a:off x="685800" y="1143000"/>
-            <a:ext cx="5483880" cy="3083760"/>
+            <a:ext cx="5483520" cy="3083400"/>
           </a:xfrm>
           <a:prstGeom prst="rect">
             <a:avLst/>
@@ -782,7 +782,7 @@
         <p:spPr>
           <a:xfrm>
             <a:off x="685800" y="4400640"/>
-            <a:ext cx="5483880" cy="3597840"/>
+            <a:ext cx="5483520" cy="3597480"/>
           </a:xfrm>
           <a:prstGeom prst="rect">
             <a:avLst/>
@@ -816,7 +816,7 @@
         <p:spPr>
           <a:xfrm>
             <a:off x="3884760" y="8685360"/>
-            <a:ext cx="2969280" cy="456120"/>
+            <a:ext cx="2968920" cy="455760"/>
           </a:xfrm>
           <a:prstGeom prst="rect">
             <a:avLst/>
@@ -848,7 +848,7 @@
               </a:lnSpc>
               <a:buNone/>
             </a:pPr>
-            <a:fld id="{0D5FE24B-3E7B-4D12-9961-4B2A41F0EA95}" type="slidenum">
+            <a:fld id="{FF4DA5C6-9095-4965-AA32-EFAA5230183D}" type="slidenum">
               <a:rPr b="0" lang="en-US" sz="1200" spc="-1" strike="noStrike">
                 <a:latin typeface="Times New Roman"/>
               </a:rPr>
@@ -895,7 +895,7 @@
         <p:spPr>
           <a:xfrm>
             <a:off x="685800" y="1143000"/>
-            <a:ext cx="5483880" cy="3083760"/>
+            <a:ext cx="5483520" cy="3083400"/>
           </a:xfrm>
           <a:prstGeom prst="rect">
             <a:avLst/>
@@ -918,7 +918,7 @@
         <p:spPr>
           <a:xfrm>
             <a:off x="685800" y="4400640"/>
-            <a:ext cx="5483880" cy="3597840"/>
+            <a:ext cx="5483520" cy="3597480"/>
           </a:xfrm>
           <a:prstGeom prst="rect">
             <a:avLst/>
@@ -952,7 +952,7 @@
         <p:spPr>
           <a:xfrm>
             <a:off x="3884760" y="8685360"/>
-            <a:ext cx="2969280" cy="456120"/>
+            <a:ext cx="2968920" cy="455760"/>
           </a:xfrm>
           <a:prstGeom prst="rect">
             <a:avLst/>
@@ -984,7 +984,7 @@
               </a:lnSpc>
               <a:buNone/>
             </a:pPr>
-            <a:fld id="{F320CB1A-6242-4BF0-8661-97031681E781}" type="slidenum">
+            <a:fld id="{29C7607C-DA96-40C1-B76F-7E7AE75EC58C}" type="slidenum">
               <a:rPr b="0" lang="en-US" sz="1200" spc="-1" strike="noStrike">
                 <a:latin typeface="Times New Roman"/>
               </a:rPr>
@@ -1031,7 +1031,7 @@
         <p:spPr>
           <a:xfrm>
             <a:off x="685800" y="1143000"/>
-            <a:ext cx="5483880" cy="3083760"/>
+            <a:ext cx="5483520" cy="3083400"/>
           </a:xfrm>
           <a:prstGeom prst="rect">
             <a:avLst/>
@@ -1054,7 +1054,7 @@
         <p:spPr>
           <a:xfrm>
             <a:off x="685800" y="4400640"/>
-            <a:ext cx="5483880" cy="3597840"/>
+            <a:ext cx="5483520" cy="3597480"/>
           </a:xfrm>
           <a:prstGeom prst="rect">
             <a:avLst/>
@@ -1080,11 +1080,107 @@
             </a:pPr>
             <a:r>
               <a:rPr b="0" lang="en-HK" sz="1800" spc="-1" strike="noStrike">
+                <a:solidFill>
+                  <a:srgbClr val="00008b"/>
+                </a:solidFill>
                 <a:latin typeface="Arial"/>
               </a:rPr>
-              <a:t>Emphasis: 15% revenue growth demonstrates continued monetization strength. WeChat MAU milestone of 1.41 billion users.</a:t>
+              <a:t>Emphasis: 15% </a:t>
+            </a:r>
+            <a:r>
+              <a:rPr b="0" lang="en-HK" sz="1800" spc="-1" strike="noStrike">
+                <a:solidFill>
+                  <a:srgbClr val="00008b"/>
+                </a:solidFill>
+                <a:latin typeface="Arial"/>
+              </a:rPr>
+              <a:t>revenue </a:t>
+            </a:r>
+            <a:r>
+              <a:rPr b="0" lang="en-HK" sz="1800" spc="-1" strike="noStrike">
+                <a:solidFill>
+                  <a:srgbClr val="00008b"/>
+                </a:solidFill>
+                <a:latin typeface="Arial"/>
+              </a:rPr>
+              <a:t>growth </a:t>
+            </a:r>
+            <a:r>
+              <a:rPr b="0" lang="en-HK" sz="1800" spc="-1" strike="noStrike">
+                <a:solidFill>
+                  <a:srgbClr val="00008b"/>
+                </a:solidFill>
+                <a:latin typeface="Arial"/>
+              </a:rPr>
+              <a:t>demonstrates </a:t>
+            </a:r>
+            <a:r>
+              <a:rPr b="0" lang="en-HK" sz="1800" spc="-1" strike="noStrike">
+                <a:solidFill>
+                  <a:srgbClr val="00008b"/>
+                </a:solidFill>
+                <a:latin typeface="Arial"/>
+              </a:rPr>
+              <a:t>continued </a:t>
+            </a:r>
+            <a:r>
+              <a:rPr b="0" lang="en-HK" sz="1800" spc="-1" strike="noStrike">
+                <a:solidFill>
+                  <a:srgbClr val="00008b"/>
+                </a:solidFill>
+                <a:latin typeface="Arial"/>
+              </a:rPr>
+              <a:t>monetiz.ation </a:t>
+            </a:r>
+            <a:r>
+              <a:rPr b="0" lang="en-HK" sz="1800" spc="-1" strike="noStrike">
+                <a:solidFill>
+                  <a:srgbClr val="00008b"/>
+                </a:solidFill>
+                <a:latin typeface="Arial"/>
+              </a:rPr>
+              <a:t>strength. </a:t>
+            </a:r>
+            <a:r>
+              <a:rPr b="0" lang="en-HK" sz="1800" spc="-1" strike="noStrike">
+                <a:solidFill>
+                  <a:srgbClr val="00008b"/>
+                </a:solidFill>
+                <a:latin typeface="Arial"/>
+              </a:rPr>
+              <a:t>WeChat MAU </a:t>
+            </a:r>
+            <a:r>
+              <a:rPr b="0" lang="en-HK" sz="1800" spc="-1" strike="noStrike">
+                <a:solidFill>
+                  <a:srgbClr val="00008b"/>
+                </a:solidFill>
+                <a:latin typeface="Arial"/>
+              </a:rPr>
+              <a:t>milestone of </a:t>
+            </a:r>
+            <a:r>
+              <a:rPr b="0" lang="en-HK" sz="1800" spc="-1" strike="noStrike">
+                <a:solidFill>
+                  <a:srgbClr val="00008b"/>
+                </a:solidFill>
+                <a:latin typeface="Arial"/>
+              </a:rPr>
+              <a:t>1.41 billion </a:t>
+            </a:r>
+            <a:r>
+              <a:rPr b="0" lang="en-HK" sz="1800" spc="-1" strike="noStrike">
+                <a:solidFill>
+                  <a:srgbClr val="00008b"/>
+                </a:solidFill>
+                <a:latin typeface="Arial"/>
+              </a:rPr>
+              <a:t>users.</a:t>
             </a:r>
             <a:endParaRPr b="0" lang="en-HK" sz="1800" spc="-1" strike="noStrike">
+              <a:solidFill>
+                <a:srgbClr val="00008b"/>
+              </a:solidFill>
               <a:latin typeface="Arial"/>
             </a:endParaRPr>
           </a:p>
@@ -1103,7 +1199,7 @@
         <p:spPr>
           <a:xfrm>
             <a:off x="3884760" y="8685360"/>
-            <a:ext cx="2969280" cy="456120"/>
+            <a:ext cx="2968920" cy="455760"/>
           </a:xfrm>
           <a:prstGeom prst="rect">
             <a:avLst/>
@@ -1135,7 +1231,7 @@
               </a:lnSpc>
               <a:buNone/>
             </a:pPr>
-            <a:fld id="{CA5502B0-7377-4D4B-B39C-505923BA1FB3}" type="slidenum">
+            <a:fld id="{C55E431C-8A8B-4C77-8FBB-05862E248652}" type="slidenum">
               <a:rPr b="0" lang="en-US" sz="1200" spc="-1" strike="noStrike">
                 <a:latin typeface="Times New Roman"/>
               </a:rPr>
@@ -1182,7 +1278,7 @@
         <p:spPr>
           <a:xfrm>
             <a:off x="685800" y="1143000"/>
-            <a:ext cx="5483880" cy="3083760"/>
+            <a:ext cx="5483520" cy="3083400"/>
           </a:xfrm>
           <a:prstGeom prst="rect">
             <a:avLst/>
@@ -1205,7 +1301,7 @@
         <p:spPr>
           <a:xfrm>
             <a:off x="685800" y="4400640"/>
-            <a:ext cx="5483880" cy="3597840"/>
+            <a:ext cx="5483520" cy="3597480"/>
           </a:xfrm>
           <a:prstGeom prst="rect">
             <a:avLst/>
@@ -1239,7 +1335,7 @@
         <p:spPr>
           <a:xfrm>
             <a:off x="3884760" y="8685360"/>
-            <a:ext cx="2969280" cy="456120"/>
+            <a:ext cx="2968920" cy="455760"/>
           </a:xfrm>
           <a:prstGeom prst="rect">
             <a:avLst/>
@@ -1271,7 +1367,7 @@
               </a:lnSpc>
               <a:buNone/>
             </a:pPr>
-            <a:fld id="{FB392BE4-AC4B-405F-B350-28FE37846C00}" type="slidenum">
+            <a:fld id="{3B0044DC-59AC-4E69-8675-7B685910C532}" type="slidenum">
               <a:rPr b="0" lang="en-US" sz="1200" spc="-1" strike="noStrike">
                 <a:latin typeface="Times New Roman"/>
               </a:rPr>
@@ -1318,7 +1414,7 @@
         <p:spPr>
           <a:xfrm>
             <a:off x="685800" y="1143000"/>
-            <a:ext cx="5483880" cy="3083760"/>
+            <a:ext cx="5483520" cy="3083400"/>
           </a:xfrm>
           <a:prstGeom prst="rect">
             <a:avLst/>
@@ -1341,7 +1437,7 @@
         <p:spPr>
           <a:xfrm>
             <a:off x="685800" y="4400640"/>
-            <a:ext cx="5483880" cy="3597840"/>
+            <a:ext cx="5483520" cy="3597480"/>
           </a:xfrm>
           <a:prstGeom prst="rect">
             <a:avLst/>
@@ -1375,7 +1471,7 @@
         <p:spPr>
           <a:xfrm>
             <a:off x="3884760" y="8685360"/>
-            <a:ext cx="2969280" cy="456120"/>
+            <a:ext cx="2968920" cy="455760"/>
           </a:xfrm>
           <a:prstGeom prst="rect">
             <a:avLst/>
@@ -1407,7 +1503,7 @@
               </a:lnSpc>
               <a:buNone/>
             </a:pPr>
-            <a:fld id="{6B20CE03-1267-4EDE-B11A-E4CCCA88216C}" type="slidenum">
+            <a:fld id="{F6F874AC-9BDD-41A9-BF7A-9C042FC27092}" type="slidenum">
               <a:rPr b="0" lang="en-US" sz="1200" spc="-1" strike="noStrike">
                 <a:latin typeface="Times New Roman"/>
               </a:rPr>
@@ -1454,7 +1550,7 @@
         <p:spPr>
           <a:xfrm>
             <a:off x="685800" y="1143000"/>
-            <a:ext cx="5483880" cy="3083760"/>
+            <a:ext cx="5483520" cy="3083400"/>
           </a:xfrm>
           <a:prstGeom prst="rect">
             <a:avLst/>
@@ -1477,7 +1573,7 @@
         <p:spPr>
           <a:xfrm>
             <a:off x="685800" y="4400640"/>
-            <a:ext cx="5483880" cy="3597840"/>
+            <a:ext cx="5483520" cy="3597480"/>
           </a:xfrm>
           <a:prstGeom prst="rect">
             <a:avLst/>
@@ -1511,7 +1607,7 @@
         <p:spPr>
           <a:xfrm>
             <a:off x="3884760" y="8685360"/>
-            <a:ext cx="2969280" cy="456120"/>
+            <a:ext cx="2968920" cy="455760"/>
           </a:xfrm>
           <a:prstGeom prst="rect">
             <a:avLst/>
@@ -1543,7 +1639,7 @@
               </a:lnSpc>
               <a:buNone/>
             </a:pPr>
-            <a:fld id="{D4C8C8E6-070F-490F-AEA2-2CBF279B9485}" type="slidenum">
+            <a:fld id="{DFF84905-C6E9-4C7A-92A7-9EF2E96FE084}" type="slidenum">
               <a:rPr b="0" lang="en-US" sz="1200" spc="-1" strike="noStrike">
                 <a:latin typeface="Times New Roman"/>
               </a:rPr>
@@ -1590,7 +1686,7 @@
         <p:spPr>
           <a:xfrm>
             <a:off x="685800" y="1143000"/>
-            <a:ext cx="5483880" cy="3083760"/>
+            <a:ext cx="5483520" cy="3083400"/>
           </a:xfrm>
           <a:prstGeom prst="rect">
             <a:avLst/>
@@ -1613,7 +1709,7 @@
         <p:spPr>
           <a:xfrm>
             <a:off x="685800" y="4400640"/>
-            <a:ext cx="5483880" cy="3597840"/>
+            <a:ext cx="5483520" cy="3597480"/>
           </a:xfrm>
           <a:prstGeom prst="rect">
             <a:avLst/>
@@ -1647,7 +1743,7 @@
         <p:spPr>
           <a:xfrm>
             <a:off x="3884760" y="8685360"/>
-            <a:ext cx="2969280" cy="456120"/>
+            <a:ext cx="2968920" cy="455760"/>
           </a:xfrm>
           <a:prstGeom prst="rect">
             <a:avLst/>
@@ -1679,7 +1775,7 @@
               </a:lnSpc>
               <a:buNone/>
             </a:pPr>
-            <a:fld id="{BF7BDB54-5F72-4881-8692-793506DB30F0}" type="slidenum">
+            <a:fld id="{306B95F6-3382-4EC5-9CAB-47D294F2E4B3}" type="slidenum">
               <a:rPr b="0" lang="en-US" sz="1200" spc="-1" strike="noStrike">
                 <a:latin typeface="Times New Roman"/>
               </a:rPr>
@@ -1726,7 +1822,7 @@
         <p:spPr>
           <a:xfrm>
             <a:off x="685800" y="1143000"/>
-            <a:ext cx="5483880" cy="3083760"/>
+            <a:ext cx="5483520" cy="3083400"/>
           </a:xfrm>
           <a:prstGeom prst="rect">
             <a:avLst/>
@@ -1749,7 +1845,7 @@
         <p:spPr>
           <a:xfrm>
             <a:off x="685800" y="4400640"/>
-            <a:ext cx="5483880" cy="3597840"/>
+            <a:ext cx="5483520" cy="3597480"/>
           </a:xfrm>
           <a:prstGeom prst="rect">
             <a:avLst/>
@@ -1783,7 +1879,7 @@
         <p:spPr>
           <a:xfrm>
             <a:off x="3884760" y="8685360"/>
-            <a:ext cx="2969280" cy="456120"/>
+            <a:ext cx="2968920" cy="455760"/>
           </a:xfrm>
           <a:prstGeom prst="rect">
             <a:avLst/>
@@ -1815,7 +1911,7 @@
               </a:lnSpc>
               <a:buNone/>
             </a:pPr>
-            <a:fld id="{6BD5848E-93C3-4D50-923C-01349CE5E420}" type="slidenum">
+            <a:fld id="{4093F253-D1FD-4564-AD47-196D04D8BF78}" type="slidenum">
               <a:rPr b="0" lang="en-US" sz="1200" spc="-1" strike="noStrike">
                 <a:latin typeface="Times New Roman"/>
               </a:rPr>
@@ -1862,7 +1958,7 @@
         <p:spPr>
           <a:xfrm>
             <a:off x="685800" y="1143000"/>
-            <a:ext cx="5483880" cy="3083760"/>
+            <a:ext cx="5483520" cy="3083400"/>
           </a:xfrm>
           <a:prstGeom prst="rect">
             <a:avLst/>
@@ -1885,7 +1981,7 @@
         <p:spPr>
           <a:xfrm>
             <a:off x="685800" y="4400640"/>
-            <a:ext cx="5483880" cy="3597840"/>
+            <a:ext cx="5483520" cy="3597480"/>
           </a:xfrm>
           <a:prstGeom prst="rect">
             <a:avLst/>
@@ -1919,7 +2015,7 @@
         <p:spPr>
           <a:xfrm>
             <a:off x="3884760" y="8685360"/>
-            <a:ext cx="2969280" cy="456120"/>
+            <a:ext cx="2968920" cy="455760"/>
           </a:xfrm>
           <a:prstGeom prst="rect">
             <a:avLst/>
@@ -1951,7 +2047,7 @@
               </a:lnSpc>
               <a:buNone/>
             </a:pPr>
-            <a:fld id="{3DE458D4-2E94-4D35-8C7D-497A1A286BB0}" type="slidenum">
+            <a:fld id="{E916CA39-30FF-4930-AF87-7E90D5D46054}" type="slidenum">
               <a:rPr b="0" lang="en-US" sz="1200" spc="-1" strike="noStrike">
                 <a:latin typeface="Times New Roman"/>
               </a:rPr>
@@ -3795,7 +3891,7 @@
         <p:spPr>
           <a:xfrm>
             <a:off x="0" y="0"/>
-            <a:ext cx="12189600" cy="6855480"/>
+            <a:ext cx="12189240" cy="6855120"/>
           </a:xfrm>
           <a:prstGeom prst="roundRect">
             <a:avLst>
@@ -3827,7 +3923,7 @@
         <p:spPr>
           <a:xfrm>
             <a:off x="0" y="0"/>
-            <a:ext cx="12189600" cy="6855480"/>
+            <a:ext cx="12189240" cy="6855120"/>
           </a:xfrm>
           <a:custGeom>
             <a:avLst/>
@@ -3890,7 +3986,7 @@
         <p:spPr>
           <a:xfrm>
             <a:off x="380880" y="380880"/>
-            <a:ext cx="454680" cy="454680"/>
+            <a:ext cx="454320" cy="454320"/>
           </a:xfrm>
           <a:custGeom>
             <a:avLst/>
@@ -3961,7 +4057,7 @@
         <p:spPr>
           <a:xfrm>
             <a:off x="495360" y="495360"/>
-            <a:ext cx="226080" cy="226080"/>
+            <a:ext cx="225720" cy="225720"/>
           </a:xfrm>
           <a:custGeom>
             <a:avLst/>
@@ -4094,7 +4190,7 @@
         <p:spPr>
           <a:xfrm>
             <a:off x="952560" y="514440"/>
-            <a:ext cx="1988280" cy="187920"/>
+            <a:ext cx="1987920" cy="187560"/>
           </a:xfrm>
           <a:prstGeom prst="rect">
             <a:avLst/>
@@ -4122,18 +4218,18 @@
               <a:buNone/>
             </a:pPr>
             <a:r>
-              <a:rPr b="1" lang="en-US" sz="4400" spc="35" strike="noStrike">
+              <a:rPr b="0" lang="en-US" sz="4400" spc="32" strike="noStrike">
                 <a:solidFill>
-                  <a:srgbClr val="00008b"/>
+                  <a:srgbClr val="2487cf"/>
                 </a:solidFill>
                 <a:latin typeface="Liter"/>
                 <a:ea typeface="Liter"/>
               </a:rPr>
               <a:t>INTERIM FINANCIAL REPORT</a:t>
             </a:r>
-            <a:endParaRPr b="1" lang="en-HK" sz="4400" spc="-1" strike="noStrike">
+            <a:endParaRPr b="0" lang="en-HK" sz="4400" spc="-1" strike="noStrike">
               <a:solidFill>
-                <a:srgbClr val="00008b"/>
+                <a:srgbClr val="2487cf"/>
               </a:solidFill>
               <a:latin typeface="Arial"/>
             </a:endParaRPr>
@@ -4149,7 +4245,7 @@
         <p:spPr>
           <a:xfrm>
             <a:off x="380880" y="2057400"/>
-            <a:ext cx="11770560" cy="1712160"/>
+            <a:ext cx="11770200" cy="1711800"/>
           </a:xfrm>
           <a:prstGeom prst="rect">
             <a:avLst/>
@@ -4186,10 +4282,7 @@
               </a:rPr>
               <a:t>Tencent Holdings</a:t>
             </a:r>
-            <a:endParaRPr b="1" lang="en-HK" sz="4400" spc="-1" strike="noStrike">
-              <a:solidFill>
-                <a:srgbClr val="00008b"/>
-              </a:solidFill>
+            <a:endParaRPr b="0" lang="en-HK" sz="4400" spc="-1" strike="noStrike">
               <a:latin typeface="Arial"/>
             </a:endParaRPr>
           </a:p>
@@ -4210,10 +4303,7 @@
               </a:rPr>
               <a:t>Limited</a:t>
             </a:r>
-            <a:endParaRPr b="1" lang="en-HK" sz="4400" spc="-1" strike="noStrike">
-              <a:solidFill>
-                <a:srgbClr val="00008b"/>
-              </a:solidFill>
+            <a:endParaRPr b="0" lang="en-HK" sz="4400" spc="-1" strike="noStrike">
               <a:latin typeface="Arial"/>
             </a:endParaRPr>
           </a:p>
@@ -4228,7 +4318,7 @@
         <p:spPr>
           <a:xfrm>
             <a:off x="380880" y="4000680"/>
-            <a:ext cx="911880" cy="35640"/>
+            <a:ext cx="911520" cy="35280"/>
           </a:xfrm>
           <a:custGeom>
             <a:avLst/>
@@ -4279,7 +4369,7 @@
         <p:spPr>
           <a:xfrm>
             <a:off x="380880" y="4267080"/>
-            <a:ext cx="11541960" cy="302400"/>
+            <a:ext cx="11541600" cy="302040"/>
           </a:xfrm>
           <a:prstGeom prst="rect">
             <a:avLst/>
@@ -4316,10 +4406,7 @@
               </a:rPr>
               <a:t>2025 Interim Report</a:t>
             </a:r>
-            <a:endParaRPr b="1" lang="en-HK" sz="4400" spc="-1" strike="noStrike">
-              <a:solidFill>
-                <a:srgbClr val="00008b"/>
-              </a:solidFill>
+            <a:endParaRPr b="0" lang="en-HK" sz="4400" spc="-1" strike="noStrike">
               <a:latin typeface="Arial"/>
             </a:endParaRPr>
           </a:p>
@@ -4334,7 +4421,7 @@
         <p:spPr>
           <a:xfrm>
             <a:off x="380880" y="4800600"/>
-            <a:ext cx="11513160" cy="264240"/>
+            <a:ext cx="11512800" cy="263880"/>
           </a:xfrm>
           <a:prstGeom prst="rect">
             <a:avLst/>
@@ -4371,10 +4458,7 @@
               </a:rPr>
               <a:t>Three and Six Months Ended 30 June 2025</a:t>
             </a:r>
-            <a:endParaRPr b="1" lang="en-HK" sz="4400" spc="-1" strike="noStrike">
-              <a:solidFill>
-                <a:srgbClr val="00008b"/>
-              </a:solidFill>
+            <a:endParaRPr b="0" lang="en-HK" sz="4400" spc="-1" strike="noStrike">
               <a:latin typeface="Arial"/>
             </a:endParaRPr>
           </a:p>
@@ -4389,7 +4473,7 @@
         <p:spPr>
           <a:xfrm>
             <a:off x="409680" y="6305400"/>
-            <a:ext cx="130680" cy="149760"/>
+            <a:ext cx="130320" cy="149400"/>
           </a:xfrm>
           <a:custGeom>
             <a:avLst/>
@@ -4714,7 +4798,7 @@
         <p:spPr>
           <a:xfrm>
             <a:off x="647640" y="6286680"/>
-            <a:ext cx="826200" cy="187920"/>
+            <a:ext cx="825840" cy="187560"/>
           </a:xfrm>
           <a:prstGeom prst="rect">
             <a:avLst/>
@@ -4751,10 +4835,7 @@
               </a:rPr>
               <a:t>August 2025</a:t>
             </a:r>
-            <a:endParaRPr b="1" lang="en-HK" sz="4400" spc="-1" strike="noStrike">
-              <a:solidFill>
-                <a:srgbClr val="00008b"/>
-              </a:solidFill>
+            <a:endParaRPr b="0" lang="en-HK" sz="4400" spc="-1" strike="noStrike">
               <a:latin typeface="Arial"/>
             </a:endParaRPr>
           </a:p>
@@ -4769,7 +4850,7 @@
         <p:spPr>
           <a:xfrm>
             <a:off x="1757160" y="6305400"/>
-            <a:ext cx="111960" cy="149760"/>
+            <a:ext cx="111600" cy="149400"/>
           </a:xfrm>
           <a:custGeom>
             <a:avLst/>
@@ -5010,7 +5091,7 @@
         <p:spPr>
           <a:xfrm>
             <a:off x="1985760" y="6286680"/>
-            <a:ext cx="788040" cy="187920"/>
+            <a:ext cx="787680" cy="187560"/>
           </a:xfrm>
           <a:prstGeom prst="rect">
             <a:avLst/>
@@ -5047,10 +5128,7 @@
               </a:rPr>
               <a:t>HKEX: 0700</a:t>
             </a:r>
-            <a:endParaRPr b="1" lang="en-HK" sz="4400" spc="-1" strike="noStrike">
-              <a:solidFill>
-                <a:srgbClr val="00008b"/>
-              </a:solidFill>
+            <a:endParaRPr b="0" lang="en-HK" sz="4400" spc="-1" strike="noStrike">
               <a:latin typeface="Arial"/>
             </a:endParaRPr>
           </a:p>
@@ -5102,7 +5180,7 @@
         <p:spPr>
           <a:xfrm>
             <a:off x="339480" y="339480"/>
-            <a:ext cx="11569680" cy="167400"/>
+            <a:ext cx="11569320" cy="167040"/>
           </a:xfrm>
           <a:prstGeom prst="rect">
             <a:avLst/>
@@ -5130,7 +5208,7 @@
               <a:buNone/>
             </a:pPr>
             <a:r>
-              <a:rPr b="1" lang="en-US" sz="939" spc="29" strike="noStrike">
+              <a:rPr b="1" lang="en-US" sz="939" spc="26" strike="noStrike">
                 <a:solidFill>
                   <a:srgbClr val="6366f1"/>
                 </a:solidFill>
@@ -5154,7 +5232,7 @@
         <p:spPr>
           <a:xfrm>
             <a:off x="339480" y="577440"/>
-            <a:ext cx="11662920" cy="336960"/>
+            <a:ext cx="11662560" cy="336600"/>
           </a:xfrm>
           <a:prstGeom prst="rect">
             <a:avLst/>
@@ -5206,7 +5284,7 @@
         <p:spPr>
           <a:xfrm>
             <a:off x="339480" y="984960"/>
-            <a:ext cx="11578320" cy="201240"/>
+            <a:ext cx="11577960" cy="200880"/>
           </a:xfrm>
           <a:prstGeom prst="rect">
             <a:avLst/>
@@ -5258,7 +5336,7 @@
         <p:spPr>
           <a:xfrm>
             <a:off x="343800" y="1328760"/>
-            <a:ext cx="5643360" cy="1644480"/>
+            <a:ext cx="5643000" cy="1644120"/>
           </a:xfrm>
           <a:custGeom>
             <a:avLst/>
@@ -5332,7 +5410,7 @@
         <p:spPr>
           <a:xfrm>
             <a:off x="551880" y="1536840"/>
-            <a:ext cx="405000" cy="405000"/>
+            <a:ext cx="404640" cy="404640"/>
           </a:xfrm>
           <a:custGeom>
             <a:avLst/>
@@ -5405,7 +5483,7 @@
         <p:spPr>
           <a:xfrm>
             <a:off x="641160" y="1638720"/>
-            <a:ext cx="226800" cy="201240"/>
+            <a:ext cx="226440" cy="200880"/>
           </a:xfrm>
           <a:custGeom>
             <a:avLst/>
@@ -5621,7 +5699,7 @@
         <p:spPr>
           <a:xfrm>
             <a:off x="1061280" y="1536840"/>
-            <a:ext cx="1406880" cy="235080"/>
+            <a:ext cx="1406520" cy="234720"/>
           </a:xfrm>
           <a:prstGeom prst="rect">
             <a:avLst/>
@@ -5673,7 +5751,7 @@
         <p:spPr>
           <a:xfrm>
             <a:off x="1061280" y="1774440"/>
-            <a:ext cx="1381320" cy="167400"/>
+            <a:ext cx="1380960" cy="167040"/>
           </a:xfrm>
           <a:prstGeom prst="rect">
             <a:avLst/>
@@ -5725,7 +5803,7 @@
         <p:spPr>
           <a:xfrm>
             <a:off x="551880" y="2080080"/>
-            <a:ext cx="1279440" cy="405000"/>
+            <a:ext cx="1279080" cy="404640"/>
           </a:xfrm>
           <a:prstGeom prst="rect">
             <a:avLst/>
@@ -5777,7 +5855,7 @@
         <p:spPr>
           <a:xfrm>
             <a:off x="1730160" y="2254320"/>
-            <a:ext cx="600120" cy="235080"/>
+            <a:ext cx="599760" cy="234720"/>
           </a:xfrm>
           <a:custGeom>
             <a:avLst/>
@@ -5850,7 +5928,7 @@
         <p:spPr>
           <a:xfrm>
             <a:off x="1730160" y="2254320"/>
-            <a:ext cx="659880" cy="235080"/>
+            <a:ext cx="659520" cy="234720"/>
           </a:xfrm>
           <a:prstGeom prst="rect">
             <a:avLst/>
@@ -5902,7 +5980,7 @@
         <p:spPr>
           <a:xfrm>
             <a:off x="551880" y="2593800"/>
-            <a:ext cx="5286960" cy="167400"/>
+            <a:ext cx="5286600" cy="167040"/>
           </a:xfrm>
           <a:prstGeom prst="rect">
             <a:avLst/>
@@ -5954,7 +6032,7 @@
         <p:spPr>
           <a:xfrm>
             <a:off x="343800" y="3115800"/>
-            <a:ext cx="5643360" cy="1644480"/>
+            <a:ext cx="5643000" cy="1644120"/>
           </a:xfrm>
           <a:custGeom>
             <a:avLst/>
@@ -6028,7 +6106,7 @@
         <p:spPr>
           <a:xfrm>
             <a:off x="551880" y="3323880"/>
-            <a:ext cx="405000" cy="405000"/>
+            <a:ext cx="404640" cy="404640"/>
           </a:xfrm>
           <a:custGeom>
             <a:avLst/>
@@ -6101,7 +6179,7 @@
         <p:spPr>
           <a:xfrm>
             <a:off x="666360" y="3425760"/>
-            <a:ext cx="175680" cy="201240"/>
+            <a:ext cx="175320" cy="200880"/>
           </a:xfrm>
           <a:custGeom>
             <a:avLst/>
@@ -6210,7 +6288,7 @@
         <p:spPr>
           <a:xfrm>
             <a:off x="1061280" y="3323880"/>
-            <a:ext cx="1109880" cy="235080"/>
+            <a:ext cx="1109520" cy="234720"/>
           </a:xfrm>
           <a:prstGeom prst="rect">
             <a:avLst/>
@@ -6262,7 +6340,7 @@
         <p:spPr>
           <a:xfrm>
             <a:off x="1061280" y="3561840"/>
-            <a:ext cx="1084320" cy="167400"/>
+            <a:ext cx="1083960" cy="167040"/>
           </a:xfrm>
           <a:prstGeom prst="rect">
             <a:avLst/>
@@ -6314,7 +6392,7 @@
         <p:spPr>
           <a:xfrm>
             <a:off x="551880" y="3867480"/>
-            <a:ext cx="1279440" cy="405000"/>
+            <a:ext cx="1279080" cy="404640"/>
           </a:xfrm>
           <a:prstGeom prst="rect">
             <a:avLst/>
@@ -6366,7 +6444,7 @@
         <p:spPr>
           <a:xfrm>
             <a:off x="1729440" y="4041360"/>
-            <a:ext cx="574920" cy="235080"/>
+            <a:ext cx="574560" cy="234720"/>
           </a:xfrm>
           <a:custGeom>
             <a:avLst/>
@@ -6439,7 +6517,7 @@
         <p:spPr>
           <a:xfrm>
             <a:off x="1729440" y="4041360"/>
-            <a:ext cx="634320" cy="235080"/>
+            <a:ext cx="633960" cy="234720"/>
           </a:xfrm>
           <a:prstGeom prst="rect">
             <a:avLst/>
@@ -6491,7 +6569,7 @@
         <p:spPr>
           <a:xfrm>
             <a:off x="551880" y="4380840"/>
-            <a:ext cx="5286960" cy="167400"/>
+            <a:ext cx="5286600" cy="167040"/>
           </a:xfrm>
           <a:prstGeom prst="rect">
             <a:avLst/>
@@ -6543,7 +6621,7 @@
         <p:spPr>
           <a:xfrm>
             <a:off x="343800" y="4903200"/>
-            <a:ext cx="5643360" cy="1644480"/>
+            <a:ext cx="5643000" cy="1644120"/>
           </a:xfrm>
           <a:custGeom>
             <a:avLst/>
@@ -6617,7 +6695,7 @@
         <p:spPr>
           <a:xfrm>
             <a:off x="551880" y="5111280"/>
-            <a:ext cx="405000" cy="405000"/>
+            <a:ext cx="404640" cy="404640"/>
           </a:xfrm>
           <a:custGeom>
             <a:avLst/>
@@ -6690,7 +6768,7 @@
         <p:spPr>
           <a:xfrm>
             <a:off x="641160" y="5213160"/>
-            <a:ext cx="226800" cy="201240"/>
+            <a:ext cx="226440" cy="200880"/>
           </a:xfrm>
           <a:custGeom>
             <a:avLst/>
@@ -6830,7 +6908,7 @@
         <p:spPr>
           <a:xfrm>
             <a:off x="1061280" y="5111280"/>
-            <a:ext cx="1245600" cy="235080"/>
+            <a:ext cx="1245240" cy="234720"/>
           </a:xfrm>
           <a:prstGeom prst="rect">
             <a:avLst/>
@@ -6882,7 +6960,7 @@
         <p:spPr>
           <a:xfrm>
             <a:off x="1061280" y="5348880"/>
-            <a:ext cx="1220040" cy="167400"/>
+            <a:ext cx="1219680" cy="167040"/>
           </a:xfrm>
           <a:prstGeom prst="rect">
             <a:avLst/>
@@ -6934,7 +7012,7 @@
         <p:spPr>
           <a:xfrm>
             <a:off x="551880" y="5654520"/>
-            <a:ext cx="1288080" cy="405000"/>
+            <a:ext cx="1287720" cy="404640"/>
           </a:xfrm>
           <a:prstGeom prst="rect">
             <a:avLst/>
@@ -6986,7 +7064,7 @@
         <p:spPr>
           <a:xfrm>
             <a:off x="1737720" y="5828400"/>
-            <a:ext cx="702000" cy="235080"/>
+            <a:ext cx="701640" cy="234720"/>
           </a:xfrm>
           <a:custGeom>
             <a:avLst/>
@@ -7059,7 +7137,7 @@
         <p:spPr>
           <a:xfrm>
             <a:off x="1737720" y="5828400"/>
-            <a:ext cx="761760" cy="235080"/>
+            <a:ext cx="761400" cy="234720"/>
           </a:xfrm>
           <a:prstGeom prst="rect">
             <a:avLst/>
@@ -7111,7 +7189,7 @@
         <p:spPr>
           <a:xfrm>
             <a:off x="551880" y="6168240"/>
-            <a:ext cx="5286960" cy="167400"/>
+            <a:ext cx="5286600" cy="167040"/>
           </a:xfrm>
           <a:prstGeom prst="rect">
             <a:avLst/>
@@ -7163,7 +7241,7 @@
         <p:spPr>
           <a:xfrm>
             <a:off x="6203880" y="1328760"/>
-            <a:ext cx="5643360" cy="2824560"/>
+            <a:ext cx="5643000" cy="2824200"/>
           </a:xfrm>
           <a:custGeom>
             <a:avLst/>
@@ -7237,7 +7315,7 @@
         <p:spPr>
           <a:xfrm>
             <a:off x="6411960" y="1536840"/>
-            <a:ext cx="5312520" cy="235080"/>
+            <a:ext cx="5312160" cy="234720"/>
           </a:xfrm>
           <a:prstGeom prst="rect">
             <a:avLst/>
@@ -7289,7 +7367,7 @@
         <p:spPr>
           <a:xfrm>
             <a:off x="6411960" y="1910160"/>
-            <a:ext cx="5227560" cy="948240"/>
+            <a:ext cx="5227200" cy="947880"/>
           </a:xfrm>
           <a:custGeom>
             <a:avLst/>
@@ -7360,7 +7438,7 @@
         <p:spPr>
           <a:xfrm>
             <a:off x="6568920" y="2097000"/>
-            <a:ext cx="167400" cy="167400"/>
+            <a:ext cx="167040" cy="167040"/>
           </a:xfrm>
           <a:custGeom>
             <a:avLst/>
@@ -7462,7 +7540,7 @@
         <p:spPr>
           <a:xfrm>
             <a:off x="6861960" y="2080080"/>
-            <a:ext cx="939960" cy="201240"/>
+            <a:ext cx="939600" cy="200880"/>
           </a:xfrm>
           <a:prstGeom prst="rect">
             <a:avLst/>
@@ -7514,7 +7592,7 @@
         <p:spPr>
           <a:xfrm>
             <a:off x="11043000" y="2046240"/>
-            <a:ext cx="566280" cy="269280"/>
+            <a:ext cx="565920" cy="268920"/>
           </a:xfrm>
           <a:prstGeom prst="rect">
             <a:avLst/>
@@ -7566,7 +7644,7 @@
         <p:spPr>
           <a:xfrm>
             <a:off x="6547680" y="2385720"/>
-            <a:ext cx="5015160" cy="167400"/>
+            <a:ext cx="5014800" cy="167040"/>
           </a:xfrm>
           <a:prstGeom prst="rect">
             <a:avLst/>
@@ -7618,7 +7696,7 @@
         <p:spPr>
           <a:xfrm>
             <a:off x="6547680" y="2589480"/>
-            <a:ext cx="5006880" cy="133200"/>
+            <a:ext cx="5006520" cy="132840"/>
           </a:xfrm>
           <a:prstGeom prst="rect">
             <a:avLst/>
@@ -7670,7 +7748,7 @@
         <p:spPr>
           <a:xfrm>
             <a:off x="6411960" y="2997000"/>
-            <a:ext cx="5227560" cy="948240"/>
+            <a:ext cx="5227200" cy="947880"/>
           </a:xfrm>
           <a:custGeom>
             <a:avLst/>
@@ -7741,7 +7819,7 @@
         <p:spPr>
           <a:xfrm>
             <a:off x="6568920" y="3183840"/>
-            <a:ext cx="167400" cy="167400"/>
+            <a:ext cx="167040" cy="167040"/>
           </a:xfrm>
           <a:custGeom>
             <a:avLst/>
@@ -7853,7 +7931,7 @@
         <p:spPr>
           <a:xfrm>
             <a:off x="6861960" y="3166920"/>
-            <a:ext cx="956880" cy="201240"/>
+            <a:ext cx="956520" cy="200880"/>
           </a:xfrm>
           <a:prstGeom prst="rect">
             <a:avLst/>
@@ -7905,7 +7983,7 @@
         <p:spPr>
           <a:xfrm>
             <a:off x="11006280" y="3133080"/>
-            <a:ext cx="600120" cy="269280"/>
+            <a:ext cx="599760" cy="268920"/>
           </a:xfrm>
           <a:prstGeom prst="rect">
             <a:avLst/>
@@ -7957,7 +8035,7 @@
         <p:spPr>
           <a:xfrm>
             <a:off x="6547680" y="3472560"/>
-            <a:ext cx="5015160" cy="167400"/>
+            <a:ext cx="5014800" cy="167040"/>
           </a:xfrm>
           <a:prstGeom prst="rect">
             <a:avLst/>
@@ -8009,7 +8087,7 @@
         <p:spPr>
           <a:xfrm>
             <a:off x="6547680" y="3676320"/>
-            <a:ext cx="5006880" cy="133200"/>
+            <a:ext cx="5006520" cy="132840"/>
           </a:xfrm>
           <a:prstGeom prst="rect">
             <a:avLst/>
@@ -8061,7 +8139,7 @@
         <p:spPr>
           <a:xfrm>
             <a:off x="6203880" y="4300200"/>
-            <a:ext cx="5643360" cy="2553120"/>
+            <a:ext cx="5643000" cy="2552760"/>
           </a:xfrm>
           <a:custGeom>
             <a:avLst/>
@@ -8135,7 +8213,7 @@
         <p:spPr>
           <a:xfrm>
             <a:off x="6411960" y="4508280"/>
-            <a:ext cx="5312520" cy="235080"/>
+            <a:ext cx="5312160" cy="234720"/>
           </a:xfrm>
           <a:prstGeom prst="rect">
             <a:avLst/>
@@ -8187,7 +8265,7 @@
         <p:spPr>
           <a:xfrm>
             <a:off x="6411960" y="4881960"/>
-            <a:ext cx="5227560" cy="1763280"/>
+            <a:ext cx="5227200" cy="1762920"/>
           </a:xfrm>
           <a:custGeom>
             <a:avLst/>
@@ -8258,7 +8336,7 @@
         <p:spPr>
           <a:xfrm>
             <a:off x="6581880" y="5102640"/>
-            <a:ext cx="540720" cy="540720"/>
+            <a:ext cx="540360" cy="540360"/>
           </a:xfrm>
           <a:custGeom>
             <a:avLst/>
@@ -8331,7 +8409,7 @@
         <p:spPr>
           <a:xfrm>
             <a:off x="6728400" y="5247000"/>
-            <a:ext cx="252360" cy="252360"/>
+            <a:ext cx="252000" cy="252000"/>
           </a:xfrm>
           <a:custGeom>
             <a:avLst/>
@@ -8455,7 +8533,7 @@
         <p:spPr>
           <a:xfrm>
             <a:off x="7261200" y="5051520"/>
-            <a:ext cx="1253880" cy="167400"/>
+            <a:ext cx="1253520" cy="167040"/>
           </a:xfrm>
           <a:prstGeom prst="rect">
             <a:avLst/>
@@ -8507,7 +8585,7 @@
         <p:spPr>
           <a:xfrm>
             <a:off x="7261200" y="5221440"/>
-            <a:ext cx="1347480" cy="336960"/>
+            <a:ext cx="1347120" cy="336600"/>
           </a:xfrm>
           <a:prstGeom prst="rect">
             <a:avLst/>
@@ -8559,7 +8637,7 @@
         <p:spPr>
           <a:xfrm>
             <a:off x="7261200" y="5561280"/>
-            <a:ext cx="1245600" cy="133200"/>
+            <a:ext cx="1245240" cy="132840"/>
           </a:xfrm>
           <a:prstGeom prst="rect">
             <a:avLst/>
@@ -8611,7 +8689,7 @@
         <p:spPr>
           <a:xfrm>
             <a:off x="6598800" y="5858280"/>
-            <a:ext cx="116280" cy="116280"/>
+            <a:ext cx="115920" cy="115920"/>
           </a:xfrm>
           <a:custGeom>
             <a:avLst/>
@@ -8716,7 +8794,7 @@
         <p:spPr>
           <a:xfrm>
             <a:off x="6798240" y="5832720"/>
-            <a:ext cx="1984320" cy="167400"/>
+            <a:ext cx="1983960" cy="167040"/>
           </a:xfrm>
           <a:prstGeom prst="rect">
             <a:avLst/>
@@ -8768,7 +8846,7 @@
         <p:spPr>
           <a:xfrm>
             <a:off x="6598800" y="6095880"/>
-            <a:ext cx="116280" cy="116280"/>
+            <a:ext cx="115920" cy="115920"/>
           </a:xfrm>
           <a:custGeom>
             <a:avLst/>
@@ -8873,7 +8951,7 @@
         <p:spPr>
           <a:xfrm>
             <a:off x="6798240" y="6070680"/>
-            <a:ext cx="1585080" cy="167400"/>
+            <a:ext cx="1584720" cy="167040"/>
           </a:xfrm>
           <a:prstGeom prst="rect">
             <a:avLst/>
@@ -8925,7 +9003,7 @@
         <p:spPr>
           <a:xfrm>
             <a:off x="6598800" y="6333840"/>
-            <a:ext cx="116280" cy="116280"/>
+            <a:ext cx="115920" cy="115920"/>
           </a:xfrm>
           <a:custGeom>
             <a:avLst/>
@@ -9030,7 +9108,7 @@
         <p:spPr>
           <a:xfrm>
             <a:off x="6798240" y="6308280"/>
-            <a:ext cx="1024920" cy="167400"/>
+            <a:ext cx="1024560" cy="167040"/>
           </a:xfrm>
           <a:prstGeom prst="rect">
             <a:avLst/>
@@ -9119,7 +9197,7 @@
         <p:spPr>
           <a:xfrm>
             <a:off x="317520" y="317520"/>
-            <a:ext cx="11610000" cy="156240"/>
+            <a:ext cx="11609640" cy="155880"/>
           </a:xfrm>
           <a:prstGeom prst="rect">
             <a:avLst/>
@@ -9147,7 +9225,7 @@
               <a:buNone/>
             </a:pPr>
             <a:r>
-              <a:rPr b="1" lang="en-US" sz="880" spc="26" strike="noStrike">
+              <a:rPr b="1" lang="en-US" sz="880" spc="24" strike="noStrike">
                 <a:solidFill>
                   <a:srgbClr val="6366f1"/>
                 </a:solidFill>
@@ -9171,7 +9249,7 @@
         <p:spPr>
           <a:xfrm>
             <a:off x="317520" y="539640"/>
-            <a:ext cx="11697480" cy="315000"/>
+            <a:ext cx="11697120" cy="314640"/>
           </a:xfrm>
           <a:prstGeom prst="rect">
             <a:avLst/>
@@ -9223,7 +9301,7 @@
         <p:spPr>
           <a:xfrm>
             <a:off x="317520" y="920880"/>
-            <a:ext cx="11617920" cy="187920"/>
+            <a:ext cx="11617560" cy="187560"/>
           </a:xfrm>
           <a:prstGeom prst="rect">
             <a:avLst/>
@@ -9275,7 +9353,7 @@
         <p:spPr>
           <a:xfrm>
             <a:off x="321480" y="1178640"/>
-            <a:ext cx="6093360" cy="2640600"/>
+            <a:ext cx="6093000" cy="2640240"/>
           </a:xfrm>
           <a:custGeom>
             <a:avLst/>
@@ -9349,7 +9427,7 @@
         <p:spPr>
           <a:xfrm>
             <a:off x="484200" y="1341360"/>
-            <a:ext cx="5847480" cy="219600"/>
+            <a:ext cx="5847120" cy="219240"/>
           </a:xfrm>
           <a:prstGeom prst="rect">
             <a:avLst/>
@@ -9401,7 +9479,7 @@
         <p:spPr>
           <a:xfrm>
             <a:off x="484200" y="1690560"/>
-            <a:ext cx="2815200" cy="918360"/>
+            <a:ext cx="2814840" cy="918000"/>
           </a:xfrm>
           <a:custGeom>
             <a:avLst/>
@@ -9472,7 +9550,7 @@
         <p:spPr>
           <a:xfrm>
             <a:off x="611280" y="1817640"/>
-            <a:ext cx="2616840" cy="156240"/>
+            <a:ext cx="2616480" cy="155880"/>
           </a:xfrm>
           <a:prstGeom prst="rect">
             <a:avLst/>
@@ -9524,7 +9602,7 @@
         <p:spPr>
           <a:xfrm>
             <a:off x="611280" y="2039760"/>
-            <a:ext cx="2680200" cy="283320"/>
+            <a:ext cx="2679840" cy="282960"/>
           </a:xfrm>
           <a:prstGeom prst="rect">
             <a:avLst/>
@@ -9576,7 +9654,7 @@
         <p:spPr>
           <a:xfrm>
             <a:off x="611280" y="2357280"/>
-            <a:ext cx="2608920" cy="124560"/>
+            <a:ext cx="2608560" cy="124200"/>
           </a:xfrm>
           <a:prstGeom prst="rect">
             <a:avLst/>
@@ -9628,7 +9706,7 @@
         <p:spPr>
           <a:xfrm>
             <a:off x="3432600" y="1690560"/>
-            <a:ext cx="2815200" cy="918360"/>
+            <a:ext cx="2814840" cy="918000"/>
           </a:xfrm>
           <a:custGeom>
             <a:avLst/>
@@ -9699,7 +9777,7 @@
         <p:spPr>
           <a:xfrm>
             <a:off x="3559680" y="1817640"/>
-            <a:ext cx="2616840" cy="156240"/>
+            <a:ext cx="2616480" cy="155880"/>
           </a:xfrm>
           <a:prstGeom prst="rect">
             <a:avLst/>
@@ -9751,7 +9829,7 @@
         <p:spPr>
           <a:xfrm>
             <a:off x="3559680" y="2039760"/>
-            <a:ext cx="2680200" cy="283320"/>
+            <a:ext cx="2679840" cy="282960"/>
           </a:xfrm>
           <a:prstGeom prst="rect">
             <a:avLst/>
@@ -9803,7 +9881,7 @@
         <p:spPr>
           <a:xfrm>
             <a:off x="3559680" y="2357280"/>
-            <a:ext cx="2608920" cy="124560"/>
+            <a:ext cx="2608560" cy="124200"/>
           </a:xfrm>
           <a:prstGeom prst="rect">
             <a:avLst/>
@@ -9855,7 +9933,7 @@
         <p:spPr>
           <a:xfrm>
             <a:off x="484200" y="2738520"/>
-            <a:ext cx="2815200" cy="918360"/>
+            <a:ext cx="2814840" cy="918000"/>
           </a:xfrm>
           <a:custGeom>
             <a:avLst/>
@@ -9926,7 +10004,7 @@
         <p:spPr>
           <a:xfrm>
             <a:off x="611280" y="2865600"/>
-            <a:ext cx="2616840" cy="156240"/>
+            <a:ext cx="2616480" cy="155880"/>
           </a:xfrm>
           <a:prstGeom prst="rect">
             <a:avLst/>
@@ -9978,7 +10056,7 @@
         <p:spPr>
           <a:xfrm>
             <a:off x="611280" y="3087720"/>
-            <a:ext cx="2680200" cy="283320"/>
+            <a:ext cx="2679840" cy="282960"/>
           </a:xfrm>
           <a:prstGeom prst="rect">
             <a:avLst/>
@@ -10030,7 +10108,7 @@
         <p:spPr>
           <a:xfrm>
             <a:off x="611280" y="3405240"/>
-            <a:ext cx="2608920" cy="124560"/>
+            <a:ext cx="2608560" cy="124200"/>
           </a:xfrm>
           <a:prstGeom prst="rect">
             <a:avLst/>
@@ -10082,7 +10160,7 @@
         <p:spPr>
           <a:xfrm>
             <a:off x="3432600" y="2738520"/>
-            <a:ext cx="2815200" cy="918360"/>
+            <a:ext cx="2814840" cy="918000"/>
           </a:xfrm>
           <a:custGeom>
             <a:avLst/>
@@ -10153,7 +10231,7 @@
         <p:spPr>
           <a:xfrm>
             <a:off x="3559680" y="2865600"/>
-            <a:ext cx="2616840" cy="156240"/>
+            <a:ext cx="2616480" cy="155880"/>
           </a:xfrm>
           <a:prstGeom prst="rect">
             <a:avLst/>
@@ -10205,7 +10283,7 @@
         <p:spPr>
           <a:xfrm>
             <a:off x="3559680" y="3087720"/>
-            <a:ext cx="2680200" cy="283320"/>
+            <a:ext cx="2679840" cy="282960"/>
           </a:xfrm>
           <a:prstGeom prst="rect">
             <a:avLst/>
@@ -10257,7 +10335,7 @@
         <p:spPr>
           <a:xfrm>
             <a:off x="3559680" y="3405240"/>
-            <a:ext cx="2608920" cy="124560"/>
+            <a:ext cx="2608560" cy="124200"/>
           </a:xfrm>
           <a:prstGeom prst="rect">
             <a:avLst/>
@@ -10309,7 +10387,7 @@
         <p:spPr>
           <a:xfrm>
             <a:off x="321480" y="3956760"/>
-            <a:ext cx="6093360" cy="3371040"/>
+            <a:ext cx="6093000" cy="3370680"/>
           </a:xfrm>
           <a:custGeom>
             <a:avLst/>
@@ -10383,7 +10461,7 @@
         <p:spPr>
           <a:xfrm>
             <a:off x="484200" y="4119480"/>
-            <a:ext cx="5847480" cy="219600"/>
+            <a:ext cx="5847120" cy="219240"/>
           </a:xfrm>
           <a:prstGeom prst="rect">
             <a:avLst/>
@@ -10435,7 +10513,7 @@
         <p:spPr>
           <a:xfrm>
             <a:off x="484200" y="4468680"/>
-            <a:ext cx="5767920" cy="886320"/>
+            <a:ext cx="5767560" cy="885960"/>
           </a:xfrm>
           <a:custGeom>
             <a:avLst/>
@@ -10506,7 +10584,7 @@
         <p:spPr>
           <a:xfrm>
             <a:off x="611280" y="4627440"/>
-            <a:ext cx="1053000" cy="187920"/>
+            <a:ext cx="1052640" cy="187560"/>
           </a:xfrm>
           <a:prstGeom prst="rect">
             <a:avLst/>
@@ -10558,7 +10636,7 @@
         <p:spPr>
           <a:xfrm>
             <a:off x="5196600" y="4595760"/>
-            <a:ext cx="1021320" cy="251640"/>
+            <a:ext cx="1020960" cy="251280"/>
           </a:xfrm>
           <a:prstGeom prst="rect">
             <a:avLst/>
@@ -10610,7 +10688,7 @@
         <p:spPr>
           <a:xfrm>
             <a:off x="611280" y="4913280"/>
-            <a:ext cx="5569560" cy="156240"/>
+            <a:ext cx="5569200" cy="155880"/>
           </a:xfrm>
           <a:prstGeom prst="rect">
             <a:avLst/>
@@ -10662,7 +10740,7 @@
         <p:spPr>
           <a:xfrm>
             <a:off x="611280" y="5103720"/>
-            <a:ext cx="5561640" cy="124560"/>
+            <a:ext cx="5561280" cy="124200"/>
           </a:xfrm>
           <a:prstGeom prst="rect">
             <a:avLst/>
@@ -10714,7 +10792,7 @@
         <p:spPr>
           <a:xfrm>
             <a:off x="484200" y="5452920"/>
-            <a:ext cx="5767920" cy="727560"/>
+            <a:ext cx="5767560" cy="727200"/>
           </a:xfrm>
           <a:custGeom>
             <a:avLst/>
@@ -10785,7 +10863,7 @@
         <p:spPr>
           <a:xfrm>
             <a:off x="611280" y="5611680"/>
-            <a:ext cx="1108800" cy="187920"/>
+            <a:ext cx="1108440" cy="187560"/>
           </a:xfrm>
           <a:prstGeom prst="rect">
             <a:avLst/>
@@ -10837,7 +10915,7 @@
         <p:spPr>
           <a:xfrm>
             <a:off x="5174280" y="5580000"/>
-            <a:ext cx="1045080" cy="251640"/>
+            <a:ext cx="1044720" cy="251280"/>
           </a:xfrm>
           <a:prstGeom prst="rect">
             <a:avLst/>
@@ -10889,7 +10967,7 @@
         <p:spPr>
           <a:xfrm>
             <a:off x="611280" y="5897520"/>
-            <a:ext cx="5569560" cy="156240"/>
+            <a:ext cx="5569200" cy="155880"/>
           </a:xfrm>
           <a:prstGeom prst="rect">
             <a:avLst/>
@@ -10941,7 +11019,7 @@
         <p:spPr>
           <a:xfrm>
             <a:off x="484200" y="6278400"/>
-            <a:ext cx="5767920" cy="886320"/>
+            <a:ext cx="5767560" cy="885960"/>
           </a:xfrm>
           <a:custGeom>
             <a:avLst/>
@@ -11012,7 +11090,7 @@
         <p:spPr>
           <a:xfrm>
             <a:off x="611280" y="6437160"/>
-            <a:ext cx="1386720" cy="187920"/>
+            <a:ext cx="1386360" cy="187560"/>
           </a:xfrm>
           <a:prstGeom prst="rect">
             <a:avLst/>
@@ -11064,7 +11142,7 @@
         <p:spPr>
           <a:xfrm>
             <a:off x="5180400" y="6405480"/>
-            <a:ext cx="1037160" cy="251640"/>
+            <a:ext cx="1036800" cy="251280"/>
           </a:xfrm>
           <a:prstGeom prst="rect">
             <a:avLst/>
@@ -11116,7 +11194,7 @@
         <p:spPr>
           <a:xfrm>
             <a:off x="611280" y="6723000"/>
-            <a:ext cx="5569560" cy="156240"/>
+            <a:ext cx="5569200" cy="155880"/>
           </a:xfrm>
           <a:prstGeom prst="rect">
             <a:avLst/>
@@ -11168,7 +11246,7 @@
         <p:spPr>
           <a:xfrm>
             <a:off x="611280" y="6913440"/>
-            <a:ext cx="5561640" cy="124560"/>
+            <a:ext cx="5561280" cy="124200"/>
           </a:xfrm>
           <a:prstGeom prst="rect">
             <a:avLst/>
@@ -11220,7 +11298,7 @@
         <p:spPr>
           <a:xfrm>
             <a:off x="6551640" y="1178640"/>
-            <a:ext cx="5315760" cy="6149160"/>
+            <a:ext cx="5315400" cy="6148800"/>
           </a:xfrm>
           <a:custGeom>
             <a:avLst/>
@@ -11294,7 +11372,7 @@
         <p:spPr>
           <a:xfrm>
             <a:off x="6714360" y="1341360"/>
-            <a:ext cx="5069520" cy="219600"/>
+            <a:ext cx="5069160" cy="219240"/>
           </a:xfrm>
           <a:prstGeom prst="rect">
             <a:avLst/>
@@ -11346,7 +11424,7 @@
         <p:spPr>
           <a:xfrm>
             <a:off x="6714360" y="1690560"/>
-            <a:ext cx="4990320" cy="2799360"/>
+            <a:ext cx="4989960" cy="2799000"/>
           </a:xfrm>
           <a:custGeom>
             <a:avLst/>
@@ -11417,7 +11495,7 @@
         <p:spPr>
           <a:xfrm>
             <a:off x="6873120" y="1849320"/>
-            <a:ext cx="378360" cy="378360"/>
+            <a:ext cx="378000" cy="378000"/>
           </a:xfrm>
           <a:custGeom>
             <a:avLst/>
@@ -11490,7 +11568,7 @@
         <p:spPr>
           <a:xfrm>
             <a:off x="7004160" y="1960560"/>
-            <a:ext cx="116640" cy="156240"/>
+            <a:ext cx="116280" cy="155880"/>
           </a:xfrm>
           <a:custGeom>
             <a:avLst/>
@@ -11731,7 +11809,7 @@
         <p:spPr>
           <a:xfrm>
             <a:off x="7349400" y="1865160"/>
-            <a:ext cx="3013560" cy="187920"/>
+            <a:ext cx="3013200" cy="187560"/>
           </a:xfrm>
           <a:prstGeom prst="rect">
             <a:avLst/>
@@ -11783,7 +11861,7 @@
         <p:spPr>
           <a:xfrm>
             <a:off x="7349400" y="2055960"/>
-            <a:ext cx="3005640" cy="156240"/>
+            <a:ext cx="3005280" cy="155880"/>
           </a:xfrm>
           <a:prstGeom prst="rect">
             <a:avLst/>
@@ -11835,7 +11913,7 @@
         <p:spPr>
           <a:xfrm>
             <a:off x="6873120" y="2373480"/>
-            <a:ext cx="703800" cy="156240"/>
+            <a:ext cx="703440" cy="155880"/>
           </a:xfrm>
           <a:prstGeom prst="rect">
             <a:avLst/>
@@ -11887,7 +11965,7 @@
         <p:spPr>
           <a:xfrm>
             <a:off x="10321560" y="2357280"/>
-            <a:ext cx="1291320" cy="187920"/>
+            <a:ext cx="1290960" cy="187560"/>
           </a:xfrm>
           <a:prstGeom prst="rect">
             <a:avLst/>
@@ -11939,7 +12017,7 @@
         <p:spPr>
           <a:xfrm>
             <a:off x="6873120" y="2674800"/>
-            <a:ext cx="775440" cy="156240"/>
+            <a:ext cx="775080" cy="155880"/>
           </a:xfrm>
           <a:prstGeom prst="rect">
             <a:avLst/>
@@ -11991,7 +12069,7 @@
         <p:spPr>
           <a:xfrm>
             <a:off x="10810080" y="2643120"/>
-            <a:ext cx="807120" cy="219600"/>
+            <a:ext cx="806760" cy="219240"/>
           </a:xfrm>
           <a:prstGeom prst="rect">
             <a:avLst/>
@@ -12043,7 +12121,7 @@
         <p:spPr>
           <a:xfrm>
             <a:off x="6873120" y="2976480"/>
-            <a:ext cx="552960" cy="156240"/>
+            <a:ext cx="552600" cy="155880"/>
           </a:xfrm>
           <a:prstGeom prst="rect">
             <a:avLst/>
@@ -12095,7 +12173,7 @@
         <p:spPr>
           <a:xfrm>
             <a:off x="11028960" y="2960640"/>
-            <a:ext cx="585000" cy="187920"/>
+            <a:ext cx="584640" cy="187560"/>
           </a:xfrm>
           <a:prstGeom prst="rect">
             <a:avLst/>
@@ -12147,7 +12225,7 @@
         <p:spPr>
           <a:xfrm>
             <a:off x="6873120" y="3262320"/>
-            <a:ext cx="894240" cy="156240"/>
+            <a:ext cx="893880" cy="155880"/>
           </a:xfrm>
           <a:prstGeom prst="rect">
             <a:avLst/>
@@ -12199,7 +12277,7 @@
         <p:spPr>
           <a:xfrm>
             <a:off x="11202840" y="3246480"/>
-            <a:ext cx="410400" cy="187920"/>
+            <a:ext cx="410040" cy="187560"/>
           </a:xfrm>
           <a:prstGeom prst="rect">
             <a:avLst/>
@@ -12251,7 +12329,7 @@
         <p:spPr>
           <a:xfrm>
             <a:off x="6873120" y="3567960"/>
-            <a:ext cx="4672800" cy="5400"/>
+            <a:ext cx="4672440" cy="5040"/>
           </a:xfrm>
           <a:custGeom>
             <a:avLst/>
@@ -12302,7 +12380,7 @@
         <p:spPr>
           <a:xfrm>
             <a:off x="6873120" y="3699000"/>
-            <a:ext cx="4728240" cy="156240"/>
+            <a:ext cx="4727880" cy="155880"/>
           </a:xfrm>
           <a:prstGeom prst="rect">
             <a:avLst/>
@@ -12354,7 +12432,7 @@
         <p:spPr>
           <a:xfrm>
             <a:off x="6873120" y="3921120"/>
-            <a:ext cx="4767840" cy="251640"/>
+            <a:ext cx="4767480" cy="251280"/>
           </a:xfrm>
           <a:prstGeom prst="rect">
             <a:avLst/>
@@ -12406,7 +12484,7 @@
         <p:spPr>
           <a:xfrm>
             <a:off x="6873120" y="4206960"/>
-            <a:ext cx="4720320" cy="124560"/>
+            <a:ext cx="4719960" cy="124200"/>
           </a:xfrm>
           <a:prstGeom prst="rect">
             <a:avLst/>
@@ -12458,7 +12536,7 @@
         <p:spPr>
           <a:xfrm>
             <a:off x="6718320" y="4623480"/>
-            <a:ext cx="4982400" cy="1180080"/>
+            <a:ext cx="4982040" cy="1179720"/>
           </a:xfrm>
           <a:custGeom>
             <a:avLst/>
@@ -12532,7 +12610,7 @@
         <p:spPr>
           <a:xfrm>
             <a:off x="6849360" y="4754520"/>
-            <a:ext cx="4791600" cy="219600"/>
+            <a:ext cx="4791240" cy="219240"/>
           </a:xfrm>
           <a:prstGeom prst="rect">
             <a:avLst/>
@@ -12584,7 +12662,7 @@
         <p:spPr>
           <a:xfrm>
             <a:off x="6849360" y="5072040"/>
-            <a:ext cx="2315160" cy="600840"/>
+            <a:ext cx="2314800" cy="600480"/>
           </a:xfrm>
           <a:custGeom>
             <a:avLst/>
@@ -12655,7 +12733,7 @@
         <p:spPr>
           <a:xfrm>
             <a:off x="6920640" y="5167440"/>
-            <a:ext cx="2172240" cy="124560"/>
+            <a:ext cx="2171880" cy="124200"/>
           </a:xfrm>
           <a:prstGeom prst="rect">
             <a:avLst/>
@@ -12707,7 +12785,7 @@
         <p:spPr>
           <a:xfrm>
             <a:off x="6896880" y="5326200"/>
-            <a:ext cx="2220120" cy="251640"/>
+            <a:ext cx="2219760" cy="251280"/>
           </a:xfrm>
           <a:prstGeom prst="rect">
             <a:avLst/>
@@ -12759,7 +12837,7 @@
         <p:spPr>
           <a:xfrm>
             <a:off x="9258840" y="5072040"/>
-            <a:ext cx="2315160" cy="600840"/>
+            <a:ext cx="2314800" cy="600480"/>
           </a:xfrm>
           <a:custGeom>
             <a:avLst/>
@@ -12830,7 +12908,7 @@
         <p:spPr>
           <a:xfrm>
             <a:off x="9330120" y="5167440"/>
-            <a:ext cx="2172240" cy="124560"/>
+            <a:ext cx="2171880" cy="124200"/>
           </a:xfrm>
           <a:prstGeom prst="rect">
             <a:avLst/>
@@ -12882,7 +12960,7 @@
         <p:spPr>
           <a:xfrm>
             <a:off x="9306360" y="5326200"/>
-            <a:ext cx="2220120" cy="251640"/>
+            <a:ext cx="2219760" cy="251280"/>
           </a:xfrm>
           <a:prstGeom prst="rect">
             <a:avLst/>
@@ -12971,7 +13049,7 @@
         <p:spPr>
           <a:xfrm>
             <a:off x="0" y="0"/>
-            <a:ext cx="12189600" cy="6855480"/>
+            <a:ext cx="12189240" cy="6855120"/>
           </a:xfrm>
           <a:prstGeom prst="roundRect">
             <a:avLst>
@@ -13003,7 +13081,7 @@
         <p:spPr>
           <a:xfrm>
             <a:off x="0" y="0"/>
-            <a:ext cx="12189600" cy="6855480"/>
+            <a:ext cx="12189240" cy="6855120"/>
           </a:xfrm>
           <a:custGeom>
             <a:avLst/>
@@ -13066,7 +13144,7 @@
         <p:spPr>
           <a:xfrm>
             <a:off x="380880" y="380880"/>
-            <a:ext cx="11494080" cy="187920"/>
+            <a:ext cx="11493720" cy="187560"/>
           </a:xfrm>
           <a:prstGeom prst="rect">
             <a:avLst/>
@@ -13094,7 +13172,7 @@
               <a:buNone/>
             </a:pPr>
             <a:r>
-              <a:rPr b="1" lang="en-US" sz="1050" spc="35" strike="noStrike">
+              <a:rPr b="1" lang="en-US" sz="1050" spc="32" strike="noStrike">
                 <a:solidFill>
                   <a:srgbClr val="6366f1"/>
                 </a:solidFill>
@@ -13118,7 +13196,7 @@
         <p:spPr>
           <a:xfrm>
             <a:off x="380880" y="647640"/>
-            <a:ext cx="11656080" cy="454680"/>
+            <a:ext cx="11655720" cy="454320"/>
           </a:xfrm>
           <a:prstGeom prst="rect">
             <a:avLst/>
@@ -13170,7 +13248,7 @@
         <p:spPr>
           <a:xfrm>
             <a:off x="380880" y="1219320"/>
-            <a:ext cx="11513160" cy="264240"/>
+            <a:ext cx="11512800" cy="263880"/>
           </a:xfrm>
           <a:prstGeom prst="rect">
             <a:avLst/>
@@ -13222,7 +13300,7 @@
         <p:spPr>
           <a:xfrm>
             <a:off x="385920" y="1643040"/>
-            <a:ext cx="3274200" cy="1749960"/>
+            <a:ext cx="3273840" cy="1749600"/>
           </a:xfrm>
           <a:custGeom>
             <a:avLst/>
@@ -13298,7 +13376,7 @@
         <p:spPr>
           <a:xfrm>
             <a:off x="581040" y="1838160"/>
-            <a:ext cx="378360" cy="378360"/>
+            <a:ext cx="378000" cy="378000"/>
           </a:xfrm>
           <a:custGeom>
             <a:avLst/>
@@ -13371,7 +13449,7 @@
         <p:spPr>
           <a:xfrm>
             <a:off x="695160" y="1952640"/>
-            <a:ext cx="149760" cy="149760"/>
+            <a:ext cx="149400" cy="149400"/>
           </a:xfrm>
           <a:custGeom>
             <a:avLst/>
@@ -13548,7 +13626,7 @@
         <p:spPr>
           <a:xfrm>
             <a:off x="1076400" y="1895400"/>
-            <a:ext cx="1121400" cy="264240"/>
+            <a:ext cx="1121040" cy="263880"/>
           </a:xfrm>
           <a:prstGeom prst="rect">
             <a:avLst/>
@@ -13600,7 +13678,7 @@
         <p:spPr>
           <a:xfrm>
             <a:off x="581040" y="2333520"/>
-            <a:ext cx="2950200" cy="864360"/>
+            <a:ext cx="2949840" cy="864000"/>
           </a:xfrm>
           <a:prstGeom prst="rect">
             <a:avLst/>
@@ -13652,7 +13730,7 @@
         <p:spPr>
           <a:xfrm>
             <a:off x="3822480" y="1643040"/>
-            <a:ext cx="3274200" cy="1749960"/>
+            <a:ext cx="3273840" cy="1749600"/>
           </a:xfrm>
           <a:custGeom>
             <a:avLst/>
@@ -13728,7 +13806,7 @@
         <p:spPr>
           <a:xfrm>
             <a:off x="4017600" y="1838160"/>
-            <a:ext cx="378360" cy="378360"/>
+            <a:ext cx="378000" cy="378000"/>
           </a:xfrm>
           <a:custGeom>
             <a:avLst/>
@@ -13801,7 +13879,7 @@
         <p:spPr>
           <a:xfrm>
             <a:off x="4113000" y="1952640"/>
-            <a:ext cx="187920" cy="149760"/>
+            <a:ext cx="187560" cy="149400"/>
           </a:xfrm>
           <a:custGeom>
             <a:avLst/>
@@ -13982,7 +14060,7 @@
         <p:spPr>
           <a:xfrm>
             <a:off x="4512960" y="1895400"/>
-            <a:ext cx="1464480" cy="264240"/>
+            <a:ext cx="1464120" cy="263880"/>
           </a:xfrm>
           <a:prstGeom prst="rect">
             <a:avLst/>
@@ -14034,7 +14112,7 @@
         <p:spPr>
           <a:xfrm>
             <a:off x="4017600" y="2333520"/>
-            <a:ext cx="2950200" cy="864360"/>
+            <a:ext cx="2949840" cy="864000"/>
           </a:xfrm>
           <a:prstGeom prst="rect">
             <a:avLst/>
@@ -14086,7 +14164,7 @@
         <p:spPr>
           <a:xfrm>
             <a:off x="385920" y="3557520"/>
-            <a:ext cx="3274200" cy="1749960"/>
+            <a:ext cx="3273840" cy="1749600"/>
           </a:xfrm>
           <a:custGeom>
             <a:avLst/>
@@ -14162,7 +14240,7 @@
         <p:spPr>
           <a:xfrm>
             <a:off x="581040" y="3753000"/>
-            <a:ext cx="378360" cy="378360"/>
+            <a:ext cx="378000" cy="378000"/>
           </a:xfrm>
           <a:custGeom>
             <a:avLst/>
@@ -14235,7 +14313,7 @@
         <p:spPr>
           <a:xfrm>
             <a:off x="695160" y="3867120"/>
-            <a:ext cx="149760" cy="149760"/>
+            <a:ext cx="149400" cy="149400"/>
           </a:xfrm>
           <a:custGeom>
             <a:avLst/>
@@ -14458,7 +14536,7 @@
         <p:spPr>
           <a:xfrm>
             <a:off x="1076400" y="3809880"/>
-            <a:ext cx="1540440" cy="264240"/>
+            <a:ext cx="1540080" cy="263880"/>
           </a:xfrm>
           <a:prstGeom prst="rect">
             <a:avLst/>
@@ -14510,7 +14588,7 @@
         <p:spPr>
           <a:xfrm>
             <a:off x="581040" y="4248000"/>
-            <a:ext cx="2950200" cy="864360"/>
+            <a:ext cx="2949840" cy="864000"/>
           </a:xfrm>
           <a:prstGeom prst="rect">
             <a:avLst/>
@@ -14562,7 +14640,7 @@
         <p:spPr>
           <a:xfrm>
             <a:off x="3822480" y="3557520"/>
-            <a:ext cx="3274200" cy="1749960"/>
+            <a:ext cx="3273840" cy="1749600"/>
           </a:xfrm>
           <a:custGeom>
             <a:avLst/>
@@ -14638,7 +14716,7 @@
         <p:spPr>
           <a:xfrm>
             <a:off x="4017600" y="3753000"/>
-            <a:ext cx="378360" cy="378360"/>
+            <a:ext cx="378000" cy="378000"/>
           </a:xfrm>
           <a:custGeom>
             <a:avLst/>
@@ -14711,7 +14789,7 @@
         <p:spPr>
           <a:xfrm>
             <a:off x="4122360" y="3867120"/>
-            <a:ext cx="168840" cy="149760"/>
+            <a:ext cx="168480" cy="149400"/>
           </a:xfrm>
           <a:custGeom>
             <a:avLst/>
@@ -14803,7 +14881,7 @@
         <p:spPr>
           <a:xfrm>
             <a:off x="4512960" y="3809880"/>
-            <a:ext cx="1340640" cy="264240"/>
+            <a:ext cx="1340280" cy="263880"/>
           </a:xfrm>
           <a:prstGeom prst="rect">
             <a:avLst/>
@@ -14855,7 +14933,7 @@
         <p:spPr>
           <a:xfrm>
             <a:off x="4017600" y="4248000"/>
-            <a:ext cx="2950200" cy="864360"/>
+            <a:ext cx="2949840" cy="864000"/>
           </a:xfrm>
           <a:prstGeom prst="rect">
             <a:avLst/>
@@ -14907,7 +14985,7 @@
         <p:spPr>
           <a:xfrm>
             <a:off x="385920" y="5472000"/>
-            <a:ext cx="6712560" cy="1321560"/>
+            <a:ext cx="6712200" cy="1321200"/>
           </a:xfrm>
           <a:custGeom>
             <a:avLst/>
@@ -14983,7 +15061,7 @@
         <p:spPr>
           <a:xfrm>
             <a:off x="581040" y="5667480"/>
-            <a:ext cx="378360" cy="378360"/>
+            <a:ext cx="378000" cy="378000"/>
           </a:xfrm>
           <a:custGeom>
             <a:avLst/>
@@ -15056,7 +15134,7 @@
         <p:spPr>
           <a:xfrm>
             <a:off x="714240" y="5781600"/>
-            <a:ext cx="111960" cy="149760"/>
+            <a:ext cx="111600" cy="149400"/>
           </a:xfrm>
           <a:custGeom>
             <a:avLst/>
@@ -15167,7 +15245,7 @@
         <p:spPr>
           <a:xfrm>
             <a:off x="1076400" y="5724360"/>
-            <a:ext cx="2054880" cy="264240"/>
+            <a:ext cx="2054520" cy="263880"/>
           </a:xfrm>
           <a:prstGeom prst="rect">
             <a:avLst/>
@@ -15219,7 +15297,7 @@
         <p:spPr>
           <a:xfrm>
             <a:off x="581040" y="6162840"/>
-            <a:ext cx="6388920" cy="435600"/>
+            <a:ext cx="6388560" cy="435240"/>
           </a:xfrm>
           <a:prstGeom prst="rect">
             <a:avLst/>
@@ -15271,7 +15349,7 @@
         <p:spPr>
           <a:xfrm>
             <a:off x="7335360" y="1643040"/>
-            <a:ext cx="4464720" cy="3874320"/>
+            <a:ext cx="4464360" cy="3873960"/>
           </a:xfrm>
           <a:custGeom>
             <a:avLst/>
@@ -15347,7 +15425,7 @@
         <p:spPr>
           <a:xfrm>
             <a:off x="7611480" y="1895400"/>
-            <a:ext cx="197640" cy="226080"/>
+            <a:ext cx="197280" cy="225720"/>
           </a:xfrm>
           <a:custGeom>
             <a:avLst/>
@@ -15502,7 +15580,7 @@
         <p:spPr>
           <a:xfrm>
             <a:off x="7968600" y="1876320"/>
-            <a:ext cx="1540440" cy="264240"/>
+            <a:ext cx="1540080" cy="263880"/>
           </a:xfrm>
           <a:prstGeom prst="rect">
             <a:avLst/>
@@ -15554,7 +15632,7 @@
         <p:spPr>
           <a:xfrm>
             <a:off x="7587720" y="2295360"/>
-            <a:ext cx="3979080" cy="1083240"/>
+            <a:ext cx="3978720" cy="1082880"/>
           </a:xfrm>
           <a:custGeom>
             <a:avLst/>
@@ -15625,7 +15703,7 @@
         <p:spPr>
           <a:xfrm>
             <a:off x="7587720" y="2295360"/>
-            <a:ext cx="35640" cy="1083240"/>
+            <a:ext cx="35280" cy="1082880"/>
           </a:xfrm>
           <a:custGeom>
             <a:avLst/>
@@ -15686,7 +15764,7 @@
         <p:spPr>
           <a:xfrm>
             <a:off x="7759080" y="2448000"/>
-            <a:ext cx="3740760" cy="264240"/>
+            <a:ext cx="3740400" cy="263880"/>
           </a:xfrm>
           <a:prstGeom prst="rect">
             <a:avLst/>
@@ -15738,7 +15816,7 @@
         <p:spPr>
           <a:xfrm>
             <a:off x="7759080" y="2790720"/>
-            <a:ext cx="3721680" cy="435600"/>
+            <a:ext cx="3721320" cy="435240"/>
           </a:xfrm>
           <a:prstGeom prst="rect">
             <a:avLst/>
@@ -15790,7 +15868,7 @@
         <p:spPr>
           <a:xfrm>
             <a:off x="7568640" y="3529080"/>
-            <a:ext cx="302400" cy="302400"/>
+            <a:ext cx="302040" cy="302040"/>
           </a:xfrm>
           <a:custGeom>
             <a:avLst/>
@@ -15863,7 +15941,7 @@
         <p:spPr>
           <a:xfrm>
             <a:off x="7673400" y="3614760"/>
-            <a:ext cx="97560" cy="130680"/>
+            <a:ext cx="97200" cy="130320"/>
           </a:xfrm>
           <a:custGeom>
             <a:avLst/>
@@ -15995,7 +16073,7 @@
         <p:spPr>
           <a:xfrm>
             <a:off x="7987680" y="3586320"/>
-            <a:ext cx="1016640" cy="187920"/>
+            <a:ext cx="1016280" cy="187560"/>
           </a:xfrm>
           <a:prstGeom prst="rect">
             <a:avLst/>
@@ -16047,7 +16125,7 @@
         <p:spPr>
           <a:xfrm>
             <a:off x="7568640" y="3948120"/>
-            <a:ext cx="302400" cy="302400"/>
+            <a:ext cx="302040" cy="302040"/>
           </a:xfrm>
           <a:custGeom>
             <a:avLst/>
@@ -16120,7 +16198,7 @@
         <p:spPr>
           <a:xfrm>
             <a:off x="7639920" y="4033800"/>
-            <a:ext cx="164160" cy="130680"/>
+            <a:ext cx="163800" cy="130320"/>
           </a:xfrm>
           <a:custGeom>
             <a:avLst/>
@@ -16336,7 +16414,7 @@
         <p:spPr>
           <a:xfrm>
             <a:off x="7987680" y="4005360"/>
-            <a:ext cx="2159640" cy="187920"/>
+            <a:ext cx="2159280" cy="187560"/>
           </a:xfrm>
           <a:prstGeom prst="rect">
             <a:avLst/>
@@ -16388,7 +16466,7 @@
         <p:spPr>
           <a:xfrm>
             <a:off x="7568640" y="4367160"/>
-            <a:ext cx="302400" cy="302400"/>
+            <a:ext cx="302040" cy="302040"/>
           </a:xfrm>
           <a:custGeom>
             <a:avLst/>
@@ -16461,7 +16539,7 @@
         <p:spPr>
           <a:xfrm>
             <a:off x="7656840" y="4452840"/>
-            <a:ext cx="130680" cy="130680"/>
+            <a:ext cx="130320" cy="130320"/>
           </a:xfrm>
           <a:custGeom>
             <a:avLst/>
@@ -16638,7 +16716,7 @@
         <p:spPr>
           <a:xfrm>
             <a:off x="7987680" y="4424400"/>
-            <a:ext cx="2493000" cy="187920"/>
+            <a:ext cx="2492640" cy="187560"/>
           </a:xfrm>
           <a:prstGeom prst="rect">
             <a:avLst/>
@@ -16690,7 +16768,7 @@
         <p:spPr>
           <a:xfrm>
             <a:off x="7335360" y="5676840"/>
-            <a:ext cx="4464720" cy="1112040"/>
+            <a:ext cx="4464360" cy="1111680"/>
           </a:xfrm>
           <a:custGeom>
             <a:avLst/>
@@ -16766,7 +16844,7 @@
         <p:spPr>
           <a:xfrm>
             <a:off x="7497000" y="5872320"/>
-            <a:ext cx="4140720" cy="187920"/>
+            <a:ext cx="4140360" cy="187560"/>
           </a:xfrm>
           <a:prstGeom prst="rect">
             <a:avLst/>
@@ -16818,7 +16896,7 @@
         <p:spPr>
           <a:xfrm>
             <a:off x="7492320" y="6138720"/>
-            <a:ext cx="4150440" cy="226080"/>
+            <a:ext cx="4150080" cy="225720"/>
           </a:xfrm>
           <a:prstGeom prst="rect">
             <a:avLst/>
@@ -16870,7 +16948,7 @@
         <p:spPr>
           <a:xfrm>
             <a:off x="7497000" y="6405480"/>
-            <a:ext cx="4140720" cy="187920"/>
+            <a:ext cx="4140360" cy="187560"/>
           </a:xfrm>
           <a:prstGeom prst="rect">
             <a:avLst/>
@@ -16959,7 +17037,7 @@
         <p:spPr>
           <a:xfrm>
             <a:off x="380880" y="380880"/>
-            <a:ext cx="11494080" cy="187920"/>
+            <a:ext cx="11493720" cy="187560"/>
           </a:xfrm>
           <a:prstGeom prst="rect">
             <a:avLst/>
@@ -16987,7 +17065,7 @@
               <a:buNone/>
             </a:pPr>
             <a:r>
-              <a:rPr b="1" lang="en-US" sz="1050" spc="35" strike="noStrike">
+              <a:rPr b="1" lang="en-US" sz="1050" spc="32" strike="noStrike">
                 <a:solidFill>
                   <a:srgbClr val="6366f1"/>
                 </a:solidFill>
@@ -17011,7 +17089,7 @@
         <p:spPr>
           <a:xfrm>
             <a:off x="380880" y="647640"/>
-            <a:ext cx="11656080" cy="454680"/>
+            <a:ext cx="11655720" cy="454320"/>
           </a:xfrm>
           <a:prstGeom prst="rect">
             <a:avLst/>
@@ -17063,7 +17141,7 @@
         <p:spPr>
           <a:xfrm>
             <a:off x="385920" y="1414440"/>
-            <a:ext cx="3674160" cy="1797840"/>
+            <a:ext cx="3673800" cy="1797480"/>
           </a:xfrm>
           <a:custGeom>
             <a:avLst/>
@@ -17137,7 +17215,7 @@
         <p:spPr>
           <a:xfrm>
             <a:off x="619200" y="1647720"/>
-            <a:ext cx="454680" cy="454680"/>
+            <a:ext cx="454320" cy="454320"/>
           </a:xfrm>
           <a:custGeom>
             <a:avLst/>
@@ -17210,7 +17288,7 @@
         <p:spPr>
           <a:xfrm>
             <a:off x="748800" y="1743120"/>
-            <a:ext cx="292680" cy="264240"/>
+            <a:ext cx="292320" cy="263880"/>
           </a:xfrm>
           <a:prstGeom prst="rect">
             <a:avLst/>
@@ -17262,7 +17340,7 @@
         <p:spPr>
           <a:xfrm>
             <a:off x="619200" y="2257560"/>
-            <a:ext cx="3302640" cy="264240"/>
+            <a:ext cx="3302280" cy="263880"/>
           </a:xfrm>
           <a:prstGeom prst="rect">
             <a:avLst/>
@@ -17314,7 +17392,7 @@
         <p:spPr>
           <a:xfrm>
             <a:off x="619200" y="2600280"/>
-            <a:ext cx="3274200" cy="378360"/>
+            <a:ext cx="3273840" cy="378000"/>
           </a:xfrm>
           <a:prstGeom prst="rect">
             <a:avLst/>
@@ -17366,7 +17444,7 @@
         <p:spPr>
           <a:xfrm>
             <a:off x="4259160" y="1414440"/>
-            <a:ext cx="3674160" cy="1797840"/>
+            <a:ext cx="3673800" cy="1797480"/>
           </a:xfrm>
           <a:custGeom>
             <a:avLst/>
@@ -17440,7 +17518,7 @@
         <p:spPr>
           <a:xfrm>
             <a:off x="4492440" y="1647720"/>
-            <a:ext cx="454680" cy="454680"/>
+            <a:ext cx="454320" cy="454320"/>
           </a:xfrm>
           <a:custGeom>
             <a:avLst/>
@@ -17513,7 +17591,7 @@
         <p:spPr>
           <a:xfrm>
             <a:off x="4605120" y="1743120"/>
-            <a:ext cx="321480" cy="264240"/>
+            <a:ext cx="321120" cy="263880"/>
           </a:xfrm>
           <a:prstGeom prst="rect">
             <a:avLst/>
@@ -17565,7 +17643,7 @@
         <p:spPr>
           <a:xfrm>
             <a:off x="4492440" y="2257560"/>
-            <a:ext cx="3302640" cy="264240"/>
+            <a:ext cx="3302280" cy="263880"/>
           </a:xfrm>
           <a:prstGeom prst="rect">
             <a:avLst/>
@@ -17617,7 +17695,7 @@
         <p:spPr>
           <a:xfrm>
             <a:off x="4492440" y="2600280"/>
-            <a:ext cx="3274200" cy="187920"/>
+            <a:ext cx="3273840" cy="187560"/>
           </a:xfrm>
           <a:prstGeom prst="rect">
             <a:avLst/>
@@ -17669,7 +17747,7 @@
         <p:spPr>
           <a:xfrm>
             <a:off x="8132760" y="1414440"/>
-            <a:ext cx="3674160" cy="1797840"/>
+            <a:ext cx="3673800" cy="1797480"/>
           </a:xfrm>
           <a:custGeom>
             <a:avLst/>
@@ -17743,7 +17821,7 @@
         <p:spPr>
           <a:xfrm>
             <a:off x="8366040" y="1647720"/>
-            <a:ext cx="454680" cy="454680"/>
+            <a:ext cx="454320" cy="454320"/>
           </a:xfrm>
           <a:custGeom>
             <a:avLst/>
@@ -17816,7 +17894,7 @@
         <p:spPr>
           <a:xfrm>
             <a:off x="8477640" y="1743120"/>
-            <a:ext cx="330840" cy="264240"/>
+            <a:ext cx="330480" cy="263880"/>
           </a:xfrm>
           <a:prstGeom prst="rect">
             <a:avLst/>
@@ -17868,7 +17946,7 @@
         <p:spPr>
           <a:xfrm>
             <a:off x="8366040" y="2257560"/>
-            <a:ext cx="3302640" cy="264240"/>
+            <a:ext cx="3302280" cy="263880"/>
           </a:xfrm>
           <a:prstGeom prst="rect">
             <a:avLst/>
@@ -17920,7 +17998,7 @@
         <p:spPr>
           <a:xfrm>
             <a:off x="8366040" y="2600280"/>
-            <a:ext cx="3274200" cy="187920"/>
+            <a:ext cx="3273840" cy="187560"/>
           </a:xfrm>
           <a:prstGeom prst="rect">
             <a:avLst/>
@@ -17972,7 +18050,7 @@
         <p:spPr>
           <a:xfrm>
             <a:off x="385920" y="3414600"/>
-            <a:ext cx="3674160" cy="1607040"/>
+            <a:ext cx="3673800" cy="1606680"/>
           </a:xfrm>
           <a:custGeom>
             <a:avLst/>
@@ -18046,7 +18124,7 @@
         <p:spPr>
           <a:xfrm>
             <a:off x="619200" y="3648240"/>
-            <a:ext cx="454680" cy="454680"/>
+            <a:ext cx="454320" cy="454320"/>
           </a:xfrm>
           <a:custGeom>
             <a:avLst/>
@@ -18119,7 +18197,7 @@
         <p:spPr>
           <a:xfrm>
             <a:off x="730800" y="3743280"/>
-            <a:ext cx="330840" cy="264240"/>
+            <a:ext cx="330480" cy="263880"/>
           </a:xfrm>
           <a:prstGeom prst="rect">
             <a:avLst/>
@@ -18171,7 +18249,7 @@
         <p:spPr>
           <a:xfrm>
             <a:off x="619200" y="4257720"/>
-            <a:ext cx="3302640" cy="264240"/>
+            <a:ext cx="3302280" cy="263880"/>
           </a:xfrm>
           <a:prstGeom prst="rect">
             <a:avLst/>
@@ -18223,7 +18301,7 @@
         <p:spPr>
           <a:xfrm>
             <a:off x="619200" y="4600440"/>
-            <a:ext cx="3274200" cy="187920"/>
+            <a:ext cx="3273840" cy="187560"/>
           </a:xfrm>
           <a:prstGeom prst="rect">
             <a:avLst/>
@@ -18275,7 +18353,7 @@
         <p:spPr>
           <a:xfrm>
             <a:off x="4259160" y="3414600"/>
-            <a:ext cx="3674160" cy="1607040"/>
+            <a:ext cx="3673800" cy="1606680"/>
           </a:xfrm>
           <a:custGeom>
             <a:avLst/>
@@ -18349,7 +18427,7 @@
         <p:spPr>
           <a:xfrm>
             <a:off x="4492440" y="3648240"/>
-            <a:ext cx="454680" cy="454680"/>
+            <a:ext cx="454320" cy="454320"/>
           </a:xfrm>
           <a:custGeom>
             <a:avLst/>
@@ -18422,7 +18500,7 @@
         <p:spPr>
           <a:xfrm>
             <a:off x="4605480" y="3743280"/>
-            <a:ext cx="321480" cy="264240"/>
+            <a:ext cx="321120" cy="263880"/>
           </a:xfrm>
           <a:prstGeom prst="rect">
             <a:avLst/>
@@ -18474,7 +18552,7 @@
         <p:spPr>
           <a:xfrm>
             <a:off x="4492440" y="4257720"/>
-            <a:ext cx="3302640" cy="264240"/>
+            <a:ext cx="3302280" cy="263880"/>
           </a:xfrm>
           <a:prstGeom prst="rect">
             <a:avLst/>
@@ -18526,7 +18604,7 @@
         <p:spPr>
           <a:xfrm>
             <a:off x="4492440" y="4600440"/>
-            <a:ext cx="3274200" cy="187920"/>
+            <a:ext cx="3273840" cy="187560"/>
           </a:xfrm>
           <a:prstGeom prst="rect">
             <a:avLst/>
@@ -18578,7 +18656,7 @@
         <p:spPr>
           <a:xfrm>
             <a:off x="8132760" y="3414600"/>
-            <a:ext cx="3674160" cy="1607040"/>
+            <a:ext cx="3673800" cy="1606680"/>
           </a:xfrm>
           <a:custGeom>
             <a:avLst/>
@@ -18652,7 +18730,7 @@
         <p:spPr>
           <a:xfrm>
             <a:off x="8366040" y="3648240"/>
-            <a:ext cx="454680" cy="454680"/>
+            <a:ext cx="454320" cy="454320"/>
           </a:xfrm>
           <a:custGeom>
             <a:avLst/>
@@ -18725,7 +18803,7 @@
         <p:spPr>
           <a:xfrm>
             <a:off x="8476920" y="3743280"/>
-            <a:ext cx="330840" cy="264240"/>
+            <a:ext cx="330480" cy="263880"/>
           </a:xfrm>
           <a:prstGeom prst="rect">
             <a:avLst/>
@@ -18777,7 +18855,7 @@
         <p:spPr>
           <a:xfrm>
             <a:off x="8366040" y="4257720"/>
-            <a:ext cx="3302640" cy="264240"/>
+            <a:ext cx="3302280" cy="263880"/>
           </a:xfrm>
           <a:prstGeom prst="rect">
             <a:avLst/>
@@ -18829,7 +18907,7 @@
         <p:spPr>
           <a:xfrm>
             <a:off x="8366040" y="4600440"/>
-            <a:ext cx="3274200" cy="187920"/>
+            <a:ext cx="3273840" cy="187560"/>
           </a:xfrm>
           <a:prstGeom prst="rect">
             <a:avLst/>
@@ -18881,7 +18959,7 @@
         <p:spPr>
           <a:xfrm>
             <a:off x="385920" y="5224320"/>
-            <a:ext cx="3674160" cy="1607040"/>
+            <a:ext cx="3673800" cy="1606680"/>
           </a:xfrm>
           <a:custGeom>
             <a:avLst/>
@@ -18955,7 +19033,7 @@
         <p:spPr>
           <a:xfrm>
             <a:off x="619200" y="5457960"/>
-            <a:ext cx="454680" cy="454680"/>
+            <a:ext cx="454320" cy="454320"/>
           </a:xfrm>
           <a:custGeom>
             <a:avLst/>
@@ -19028,7 +19106,7 @@
         <p:spPr>
           <a:xfrm>
             <a:off x="738360" y="5553000"/>
-            <a:ext cx="311760" cy="264240"/>
+            <a:ext cx="311400" cy="263880"/>
           </a:xfrm>
           <a:prstGeom prst="rect">
             <a:avLst/>
@@ -19080,7 +19158,7 @@
         <p:spPr>
           <a:xfrm>
             <a:off x="619200" y="6067440"/>
-            <a:ext cx="3302640" cy="264240"/>
+            <a:ext cx="3302280" cy="263880"/>
           </a:xfrm>
           <a:prstGeom prst="rect">
             <a:avLst/>
@@ -19132,7 +19210,7 @@
         <p:spPr>
           <a:xfrm>
             <a:off x="619200" y="6410160"/>
-            <a:ext cx="3274200" cy="187920"/>
+            <a:ext cx="3273840" cy="187560"/>
           </a:xfrm>
           <a:prstGeom prst="rect">
             <a:avLst/>
@@ -19184,7 +19262,7 @@
         <p:spPr>
           <a:xfrm>
             <a:off x="4259160" y="5224320"/>
-            <a:ext cx="3674160" cy="1607040"/>
+            <a:ext cx="3673800" cy="1606680"/>
           </a:xfrm>
           <a:custGeom>
             <a:avLst/>
@@ -19258,7 +19336,7 @@
         <p:spPr>
           <a:xfrm>
             <a:off x="4492440" y="5457960"/>
-            <a:ext cx="454680" cy="454680"/>
+            <a:ext cx="454320" cy="454320"/>
           </a:xfrm>
           <a:custGeom>
             <a:avLst/>
@@ -19331,7 +19409,7 @@
         <p:spPr>
           <a:xfrm>
             <a:off x="4601880" y="5553000"/>
-            <a:ext cx="330840" cy="264240"/>
+            <a:ext cx="330480" cy="263880"/>
           </a:xfrm>
           <a:prstGeom prst="rect">
             <a:avLst/>
@@ -19383,7 +19461,7 @@
         <p:spPr>
           <a:xfrm>
             <a:off x="4492440" y="6067440"/>
-            <a:ext cx="3302640" cy="264240"/>
+            <a:ext cx="3302280" cy="263880"/>
           </a:xfrm>
           <a:prstGeom prst="rect">
             <a:avLst/>
@@ -19435,7 +19513,7 @@
         <p:spPr>
           <a:xfrm>
             <a:off x="4492440" y="6410160"/>
-            <a:ext cx="3274200" cy="187920"/>
+            <a:ext cx="3273840" cy="187560"/>
           </a:xfrm>
           <a:prstGeom prst="rect">
             <a:avLst/>
@@ -19487,7 +19565,7 @@
         <p:spPr>
           <a:xfrm>
             <a:off x="8132760" y="5224320"/>
-            <a:ext cx="3674160" cy="1607040"/>
+            <a:ext cx="3673800" cy="1606680"/>
           </a:xfrm>
           <a:custGeom>
             <a:avLst/>
@@ -19561,7 +19639,7 @@
         <p:spPr>
           <a:xfrm>
             <a:off x="8366040" y="5457960"/>
-            <a:ext cx="454680" cy="454680"/>
+            <a:ext cx="454320" cy="454320"/>
           </a:xfrm>
           <a:custGeom>
             <a:avLst/>
@@ -19634,7 +19712,7 @@
         <p:spPr>
           <a:xfrm>
             <a:off x="8476920" y="5553000"/>
-            <a:ext cx="330840" cy="264240"/>
+            <a:ext cx="330480" cy="263880"/>
           </a:xfrm>
           <a:prstGeom prst="rect">
             <a:avLst/>
@@ -19686,7 +19764,7 @@
         <p:spPr>
           <a:xfrm>
             <a:off x="8366040" y="6067440"/>
-            <a:ext cx="3302640" cy="264240"/>
+            <a:ext cx="3302280" cy="263880"/>
           </a:xfrm>
           <a:prstGeom prst="rect">
             <a:avLst/>
@@ -19738,7 +19816,7 @@
         <p:spPr>
           <a:xfrm>
             <a:off x="8366040" y="6410160"/>
-            <a:ext cx="3274200" cy="187920"/>
+            <a:ext cx="3273840" cy="187560"/>
           </a:xfrm>
           <a:prstGeom prst="rect">
             <a:avLst/>
@@ -19827,7 +19905,7 @@
         <p:spPr>
           <a:xfrm>
             <a:off x="379080" y="379080"/>
-            <a:ext cx="11498040" cy="186840"/>
+            <a:ext cx="11497680" cy="186480"/>
           </a:xfrm>
           <a:prstGeom prst="rect">
             <a:avLst/>
@@ -19855,7 +19933,7 @@
               <a:buNone/>
             </a:pPr>
             <a:r>
-              <a:rPr b="1" lang="en-US" sz="1050" spc="32" strike="noStrike">
+              <a:rPr b="1" lang="en-US" sz="1050" spc="29" strike="noStrike">
                 <a:solidFill>
                   <a:srgbClr val="6366f1"/>
                 </a:solidFill>
@@ -19879,7 +19957,7 @@
         <p:spPr>
           <a:xfrm>
             <a:off x="379080" y="644040"/>
-            <a:ext cx="11602080" cy="376560"/>
+            <a:ext cx="11601720" cy="376200"/>
           </a:xfrm>
           <a:prstGeom prst="rect">
             <a:avLst/>
@@ -19931,7 +20009,7 @@
         <p:spPr>
           <a:xfrm>
             <a:off x="383760" y="1255320"/>
-            <a:ext cx="6647760" cy="1731240"/>
+            <a:ext cx="6647400" cy="1730880"/>
           </a:xfrm>
           <a:custGeom>
             <a:avLst/>
@@ -20005,7 +20083,7 @@
         <p:spPr>
           <a:xfrm>
             <a:off x="615600" y="1487160"/>
-            <a:ext cx="376560" cy="376560"/>
+            <a:ext cx="376200" cy="376200"/>
           </a:xfrm>
           <a:custGeom>
             <a:avLst/>
@@ -20078,7 +20156,7 @@
         <p:spPr>
           <a:xfrm>
             <a:off x="729360" y="1600920"/>
-            <a:ext cx="149040" cy="149040"/>
+            <a:ext cx="148680" cy="148680"/>
           </a:xfrm>
           <a:custGeom>
             <a:avLst/>
@@ -20202,7 +20280,7 @@
         <p:spPr>
           <a:xfrm>
             <a:off x="1108440" y="1544040"/>
-            <a:ext cx="2413080" cy="262800"/>
+            <a:ext cx="2412720" cy="262440"/>
           </a:xfrm>
           <a:prstGeom prst="rect">
             <a:avLst/>
@@ -20254,7 +20332,7 @@
         <p:spPr>
           <a:xfrm>
             <a:off x="615600" y="2017800"/>
-            <a:ext cx="6259320" cy="736560"/>
+            <a:ext cx="6258960" cy="736200"/>
           </a:xfrm>
           <a:prstGeom prst="rect">
             <a:avLst/>
@@ -20346,7 +20424,7 @@
         <p:spPr>
           <a:xfrm>
             <a:off x="383760" y="3187800"/>
-            <a:ext cx="6647760" cy="1731240"/>
+            <a:ext cx="6647400" cy="1730880"/>
           </a:xfrm>
           <a:custGeom>
             <a:avLst/>
@@ -20420,7 +20498,7 @@
         <p:spPr>
           <a:xfrm>
             <a:off x="615600" y="3420000"/>
-            <a:ext cx="376560" cy="376560"/>
+            <a:ext cx="376200" cy="376200"/>
           </a:xfrm>
           <a:custGeom>
             <a:avLst/>
@@ -20493,7 +20571,7 @@
         <p:spPr>
           <a:xfrm>
             <a:off x="710640" y="3533400"/>
-            <a:ext cx="186840" cy="149040"/>
+            <a:ext cx="186480" cy="148680"/>
           </a:xfrm>
           <a:custGeom>
             <a:avLst/>
@@ -20674,7 +20752,7 @@
         <p:spPr>
           <a:xfrm>
             <a:off x="1108440" y="3476520"/>
-            <a:ext cx="1645920" cy="262800"/>
+            <a:ext cx="1645560" cy="262440"/>
           </a:xfrm>
           <a:prstGeom prst="rect">
             <a:avLst/>
@@ -20726,7 +20804,7 @@
         <p:spPr>
           <a:xfrm>
             <a:off x="615600" y="3950280"/>
-            <a:ext cx="6259320" cy="736560"/>
+            <a:ext cx="6258960" cy="736200"/>
           </a:xfrm>
           <a:prstGeom prst="rect">
             <a:avLst/>
@@ -20818,7 +20896,7 @@
         <p:spPr>
           <a:xfrm>
             <a:off x="383760" y="5120280"/>
-            <a:ext cx="6647760" cy="1731240"/>
+            <a:ext cx="6647400" cy="1730880"/>
           </a:xfrm>
           <a:custGeom>
             <a:avLst/>
@@ -20892,7 +20970,7 @@
         <p:spPr>
           <a:xfrm>
             <a:off x="615600" y="5352480"/>
-            <a:ext cx="376560" cy="376560"/>
+            <a:ext cx="376200" cy="376200"/>
           </a:xfrm>
           <a:custGeom>
             <a:avLst/>
@@ -20965,7 +21043,7 @@
         <p:spPr>
           <a:xfrm>
             <a:off x="729360" y="5465880"/>
-            <a:ext cx="149040" cy="149040"/>
+            <a:ext cx="148680" cy="148680"/>
           </a:xfrm>
           <a:custGeom>
             <a:avLst/>
@@ -21188,7 +21266,7 @@
         <p:spPr>
           <a:xfrm>
             <a:off x="1108440" y="5409360"/>
-            <a:ext cx="1977480" cy="262800"/>
+            <a:ext cx="1977120" cy="262440"/>
           </a:xfrm>
           <a:prstGeom prst="rect">
             <a:avLst/>
@@ -21240,7 +21318,7 @@
         <p:spPr>
           <a:xfrm>
             <a:off x="615600" y="5882760"/>
-            <a:ext cx="6259320" cy="736560"/>
+            <a:ext cx="6258960" cy="736200"/>
           </a:xfrm>
           <a:prstGeom prst="rect">
             <a:avLst/>
@@ -21312,7 +21390,7 @@
         <p:spPr>
           <a:xfrm>
             <a:off x="7271640" y="1255320"/>
-            <a:ext cx="4535280" cy="5596200"/>
+            <a:ext cx="4534920" cy="5595840"/>
           </a:xfrm>
           <a:custGeom>
             <a:avLst/>
@@ -21386,7 +21464,7 @@
         <p:spPr>
           <a:xfrm>
             <a:off x="7503840" y="1487160"/>
-            <a:ext cx="376560" cy="376560"/>
+            <a:ext cx="376200" cy="376200"/>
           </a:xfrm>
           <a:custGeom>
             <a:avLst/>
@@ -21459,7 +21537,7 @@
         <p:spPr>
           <a:xfrm>
             <a:off x="7626960" y="1600920"/>
-            <a:ext cx="129960" cy="149040"/>
+            <a:ext cx="129600" cy="148680"/>
           </a:xfrm>
           <a:custGeom>
             <a:avLst/>
@@ -21614,7 +21692,7 @@
         <p:spPr>
           <a:xfrm>
             <a:off x="7996320" y="1544040"/>
-            <a:ext cx="1939320" cy="262800"/>
+            <a:ext cx="1938960" cy="262440"/>
           </a:xfrm>
           <a:prstGeom prst="rect">
             <a:avLst/>
@@ -21666,7 +21744,7 @@
         <p:spPr>
           <a:xfrm>
             <a:off x="7522920" y="2017800"/>
-            <a:ext cx="4052160" cy="3332160"/>
+            <a:ext cx="4051800" cy="3331800"/>
           </a:xfrm>
           <a:custGeom>
             <a:avLst/>
@@ -21737,7 +21815,7 @@
         <p:spPr>
           <a:xfrm>
             <a:off x="7522920" y="2017800"/>
-            <a:ext cx="35280" cy="3332160"/>
+            <a:ext cx="34920" cy="3331800"/>
           </a:xfrm>
           <a:custGeom>
             <a:avLst/>
@@ -21798,7 +21876,7 @@
         <p:spPr>
           <a:xfrm>
             <a:off x="7731000" y="2821680"/>
-            <a:ext cx="3739320" cy="1380600"/>
+            <a:ext cx="3738960" cy="1380240"/>
           </a:xfrm>
           <a:prstGeom prst="rect">
             <a:avLst/>
@@ -21850,7 +21928,7 @@
         <p:spPr>
           <a:xfrm>
             <a:off x="7731000" y="4358880"/>
-            <a:ext cx="3720600" cy="186840"/>
+            <a:ext cx="3720240" cy="186480"/>
           </a:xfrm>
           <a:prstGeom prst="rect">
             <a:avLst/>
@@ -21912,7 +21990,7 @@
         <p:spPr>
           <a:xfrm>
             <a:off x="7508520" y="5546520"/>
-            <a:ext cx="1949040" cy="1068120"/>
+            <a:ext cx="1948680" cy="1067760"/>
           </a:xfrm>
           <a:custGeom>
             <a:avLst/>
@@ -21986,7 +22064,7 @@
         <p:spPr>
           <a:xfrm>
             <a:off x="7631640" y="5702760"/>
-            <a:ext cx="1702800" cy="186840"/>
+            <a:ext cx="1702440" cy="186480"/>
           </a:xfrm>
           <a:prstGeom prst="rect">
             <a:avLst/>
@@ -22038,7 +22116,7 @@
         <p:spPr>
           <a:xfrm>
             <a:off x="7593840" y="5930280"/>
-            <a:ext cx="1778400" cy="338400"/>
+            <a:ext cx="1778040" cy="338040"/>
           </a:xfrm>
           <a:prstGeom prst="rect">
             <a:avLst/>
@@ -22090,7 +22168,7 @@
         <p:spPr>
           <a:xfrm>
             <a:off x="7636320" y="6309000"/>
-            <a:ext cx="1693080" cy="149040"/>
+            <a:ext cx="1692720" cy="148680"/>
           </a:xfrm>
           <a:prstGeom prst="rect">
             <a:avLst/>
@@ -22142,7 +22220,7 @@
         <p:spPr>
           <a:xfrm>
             <a:off x="9621000" y="5546520"/>
-            <a:ext cx="1949040" cy="1068120"/>
+            <a:ext cx="1948680" cy="1067760"/>
           </a:xfrm>
           <a:custGeom>
             <a:avLst/>
@@ -22216,7 +22294,7 @@
         <p:spPr>
           <a:xfrm>
             <a:off x="9744120" y="5702760"/>
-            <a:ext cx="1702800" cy="186840"/>
+            <a:ext cx="1702440" cy="186480"/>
           </a:xfrm>
           <a:prstGeom prst="rect">
             <a:avLst/>
@@ -22268,7 +22346,7 @@
         <p:spPr>
           <a:xfrm>
             <a:off x="9706320" y="5930280"/>
-            <a:ext cx="1778400" cy="338400"/>
+            <a:ext cx="1778040" cy="338040"/>
           </a:xfrm>
           <a:prstGeom prst="rect">
             <a:avLst/>
@@ -22320,7 +22398,7 @@
         <p:spPr>
           <a:xfrm>
             <a:off x="9748800" y="6309000"/>
-            <a:ext cx="1693080" cy="149040"/>
+            <a:ext cx="1692720" cy="148680"/>
           </a:xfrm>
           <a:prstGeom prst="rect">
             <a:avLst/>
@@ -22409,7 +22487,7 @@
         <p:spPr>
           <a:xfrm>
             <a:off x="365400" y="365400"/>
-            <a:ext cx="11522880" cy="180000"/>
+            <a:ext cx="11522520" cy="179640"/>
           </a:xfrm>
           <a:prstGeom prst="rect">
             <a:avLst/>
@@ -22437,7 +22515,7 @@
               <a:buNone/>
             </a:pPr>
             <a:r>
-              <a:rPr b="1" lang="en-US" sz="1010" spc="32" strike="noStrike">
+              <a:rPr b="1" lang="en-US" sz="1010" spc="29" strike="noStrike">
                 <a:solidFill>
                   <a:srgbClr val="6366f1"/>
                 </a:solidFill>
@@ -22461,7 +22539,7 @@
         <p:spPr>
           <a:xfrm>
             <a:off x="365400" y="621000"/>
-            <a:ext cx="11623320" cy="362880"/>
+            <a:ext cx="11622960" cy="362520"/>
           </a:xfrm>
           <a:prstGeom prst="rect">
             <a:avLst/>
@@ -22513,7 +22591,7 @@
         <p:spPr>
           <a:xfrm>
             <a:off x="365400" y="1059480"/>
-            <a:ext cx="11531880" cy="216720"/>
+            <a:ext cx="11531520" cy="216360"/>
           </a:xfrm>
           <a:prstGeom prst="rect">
             <a:avLst/>
@@ -22565,7 +22643,7 @@
         <p:spPr>
           <a:xfrm>
             <a:off x="369720" y="1356120"/>
-            <a:ext cx="3175560" cy="1248480"/>
+            <a:ext cx="3175200" cy="1248120"/>
           </a:xfrm>
           <a:custGeom>
             <a:avLst/>
@@ -22639,7 +22717,7 @@
         <p:spPr>
           <a:xfrm>
             <a:off x="556920" y="1561680"/>
-            <a:ext cx="609480" cy="180000"/>
+            <a:ext cx="609120" cy="179640"/>
           </a:xfrm>
           <a:prstGeom prst="rect">
             <a:avLst/>
@@ -22691,7 +22769,7 @@
         <p:spPr>
           <a:xfrm>
             <a:off x="2957760" y="1543320"/>
-            <a:ext cx="399240" cy="216720"/>
+            <a:ext cx="398880" cy="216360"/>
           </a:xfrm>
           <a:custGeom>
             <a:avLst/>
@@ -22764,7 +22842,7 @@
         <p:spPr>
           <a:xfrm>
             <a:off x="2957760" y="1543320"/>
-            <a:ext cx="453960" cy="216720"/>
+            <a:ext cx="453600" cy="216360"/>
           </a:xfrm>
           <a:prstGeom prst="rect">
             <a:avLst/>
@@ -22816,7 +22894,7 @@
         <p:spPr>
           <a:xfrm>
             <a:off x="556920" y="1872360"/>
-            <a:ext cx="2965680" cy="362880"/>
+            <a:ext cx="2965320" cy="362520"/>
           </a:xfrm>
           <a:prstGeom prst="rect">
             <a:avLst/>
@@ -22868,7 +22946,7 @@
         <p:spPr>
           <a:xfrm>
             <a:off x="556920" y="2274120"/>
-            <a:ext cx="2855880" cy="143640"/>
+            <a:ext cx="2855520" cy="143280"/>
           </a:xfrm>
           <a:prstGeom prst="rect">
             <a:avLst/>
@@ -22920,7 +22998,7 @@
         <p:spPr>
           <a:xfrm>
             <a:off x="3700800" y="1356120"/>
-            <a:ext cx="3175560" cy="1248480"/>
+            <a:ext cx="3175200" cy="1248120"/>
           </a:xfrm>
           <a:custGeom>
             <a:avLst/>
@@ -22994,7 +23072,7 @@
         <p:spPr>
           <a:xfrm>
             <a:off x="3888000" y="1561680"/>
-            <a:ext cx="727920" cy="180000"/>
+            <a:ext cx="727560" cy="179640"/>
           </a:xfrm>
           <a:prstGeom prst="rect">
             <a:avLst/>
@@ -23046,7 +23124,7 @@
         <p:spPr>
           <a:xfrm>
             <a:off x="6268320" y="1543320"/>
-            <a:ext cx="417600" cy="216720"/>
+            <a:ext cx="417240" cy="216360"/>
           </a:xfrm>
           <a:custGeom>
             <a:avLst/>
@@ -23119,7 +23197,7 @@
         <p:spPr>
           <a:xfrm>
             <a:off x="6268320" y="1543320"/>
-            <a:ext cx="472320" cy="216720"/>
+            <a:ext cx="471960" cy="216360"/>
           </a:xfrm>
           <a:prstGeom prst="rect">
             <a:avLst/>
@@ -23171,7 +23249,7 @@
         <p:spPr>
           <a:xfrm>
             <a:off x="3888000" y="1872360"/>
-            <a:ext cx="2965680" cy="362880"/>
+            <a:ext cx="2965320" cy="362520"/>
           </a:xfrm>
           <a:prstGeom prst="rect">
             <a:avLst/>
@@ -23223,7 +23301,7 @@
         <p:spPr>
           <a:xfrm>
             <a:off x="3888000" y="2274120"/>
-            <a:ext cx="2855880" cy="143640"/>
+            <a:ext cx="2855520" cy="143280"/>
           </a:xfrm>
           <a:prstGeom prst="rect">
             <a:avLst/>
@@ -23275,7 +23353,7 @@
         <p:spPr>
           <a:xfrm>
             <a:off x="369720" y="2762640"/>
-            <a:ext cx="3175560" cy="1248480"/>
+            <a:ext cx="3175200" cy="1248120"/>
           </a:xfrm>
           <a:custGeom>
             <a:avLst/>
@@ -23349,7 +23427,7 @@
         <p:spPr>
           <a:xfrm>
             <a:off x="556920" y="2968200"/>
-            <a:ext cx="965520" cy="180000"/>
+            <a:ext cx="965160" cy="179640"/>
           </a:xfrm>
           <a:prstGeom prst="rect">
             <a:avLst/>
@@ -23401,7 +23479,7 @@
         <p:spPr>
           <a:xfrm>
             <a:off x="2953440" y="2949840"/>
-            <a:ext cx="399240" cy="216720"/>
+            <a:ext cx="398880" cy="216360"/>
           </a:xfrm>
           <a:custGeom>
             <a:avLst/>
@@ -23474,7 +23552,7 @@
         <p:spPr>
           <a:xfrm>
             <a:off x="2953440" y="2949840"/>
-            <a:ext cx="453960" cy="216720"/>
+            <a:ext cx="453600" cy="216360"/>
           </a:xfrm>
           <a:prstGeom prst="rect">
             <a:avLst/>
@@ -23526,7 +23604,7 @@
         <p:spPr>
           <a:xfrm>
             <a:off x="556920" y="3278520"/>
-            <a:ext cx="2965680" cy="362880"/>
+            <a:ext cx="2965320" cy="362520"/>
           </a:xfrm>
           <a:prstGeom prst="rect">
             <a:avLst/>
@@ -23578,7 +23656,7 @@
         <p:spPr>
           <a:xfrm>
             <a:off x="556920" y="3680280"/>
-            <a:ext cx="2855880" cy="143640"/>
+            <a:ext cx="2855520" cy="143280"/>
           </a:xfrm>
           <a:prstGeom prst="rect">
             <a:avLst/>
@@ -23630,7 +23708,7 @@
         <p:spPr>
           <a:xfrm>
             <a:off x="3700800" y="2762640"/>
-            <a:ext cx="3175560" cy="1248480"/>
+            <a:ext cx="3175200" cy="1248120"/>
           </a:xfrm>
           <a:custGeom>
             <a:avLst/>
@@ -23704,7 +23782,7 @@
         <p:spPr>
           <a:xfrm>
             <a:off x="3888000" y="2968200"/>
-            <a:ext cx="1065960" cy="180000"/>
+            <a:ext cx="1065600" cy="179640"/>
           </a:xfrm>
           <a:prstGeom prst="rect">
             <a:avLst/>
@@ -23756,7 +23834,7 @@
         <p:spPr>
           <a:xfrm>
             <a:off x="6295680" y="2949840"/>
-            <a:ext cx="390240" cy="216720"/>
+            <a:ext cx="389880" cy="216360"/>
           </a:xfrm>
           <a:custGeom>
             <a:avLst/>
@@ -23829,7 +23907,7 @@
         <p:spPr>
           <a:xfrm>
             <a:off x="6295680" y="2949840"/>
-            <a:ext cx="444960" cy="216720"/>
+            <a:ext cx="444600" cy="216360"/>
           </a:xfrm>
           <a:prstGeom prst="rect">
             <a:avLst/>
@@ -23881,7 +23959,7 @@
         <p:spPr>
           <a:xfrm>
             <a:off x="3888000" y="3278520"/>
-            <a:ext cx="2965680" cy="362880"/>
+            <a:ext cx="2965320" cy="362520"/>
           </a:xfrm>
           <a:prstGeom prst="rect">
             <a:avLst/>
@@ -23933,7 +24011,7 @@
         <p:spPr>
           <a:xfrm>
             <a:off x="3888000" y="3680280"/>
-            <a:ext cx="2855880" cy="143640"/>
+            <a:ext cx="2855520" cy="143280"/>
           </a:xfrm>
           <a:prstGeom prst="rect">
             <a:avLst/>
@@ -23985,7 +24063,7 @@
         <p:spPr>
           <a:xfrm>
             <a:off x="369720" y="4169160"/>
-            <a:ext cx="6499800" cy="2682360"/>
+            <a:ext cx="6499440" cy="2682000"/>
           </a:xfrm>
           <a:custGeom>
             <a:avLst/>
@@ -24059,7 +24137,7 @@
         <p:spPr>
           <a:xfrm>
             <a:off x="556920" y="4356360"/>
-            <a:ext cx="6207480" cy="253080"/>
+            <a:ext cx="6207120" cy="252720"/>
           </a:xfrm>
           <a:prstGeom prst="rect">
             <a:avLst/>
@@ -24111,7 +24189,7 @@
         <p:spPr>
           <a:xfrm>
             <a:off x="556920" y="4721400"/>
-            <a:ext cx="2993040" cy="1056960"/>
+            <a:ext cx="2992680" cy="1056600"/>
           </a:xfrm>
           <a:custGeom>
             <a:avLst/>
@@ -24182,7 +24260,7 @@
         <p:spPr>
           <a:xfrm>
             <a:off x="703080" y="4867560"/>
-            <a:ext cx="2764800" cy="180000"/>
+            <a:ext cx="2764440" cy="179640"/>
           </a:xfrm>
           <a:prstGeom prst="rect">
             <a:avLst/>
@@ -24234,7 +24312,7 @@
         <p:spPr>
           <a:xfrm>
             <a:off x="703080" y="5123520"/>
-            <a:ext cx="2810160" cy="289800"/>
+            <a:ext cx="2809800" cy="289440"/>
           </a:xfrm>
           <a:prstGeom prst="rect">
             <a:avLst/>
@@ -24286,7 +24364,7 @@
         <p:spPr>
           <a:xfrm>
             <a:off x="703080" y="5452200"/>
-            <a:ext cx="2764800" cy="180000"/>
+            <a:ext cx="2764440" cy="179640"/>
           </a:xfrm>
           <a:prstGeom prst="rect">
             <a:avLst/>
@@ -24338,7 +24416,7 @@
         <p:spPr>
           <a:xfrm>
             <a:off x="3696120" y="4721400"/>
-            <a:ext cx="2993040" cy="1056960"/>
+            <a:ext cx="2992680" cy="1056600"/>
           </a:xfrm>
           <a:custGeom>
             <a:avLst/>
@@ -24409,7 +24487,7 @@
         <p:spPr>
           <a:xfrm>
             <a:off x="3842280" y="4867560"/>
-            <a:ext cx="2764800" cy="180000"/>
+            <a:ext cx="2764440" cy="179640"/>
           </a:xfrm>
           <a:prstGeom prst="rect">
             <a:avLst/>
@@ -24461,7 +24539,7 @@
         <p:spPr>
           <a:xfrm>
             <a:off x="3842280" y="5123520"/>
-            <a:ext cx="2810160" cy="289800"/>
+            <a:ext cx="2809800" cy="289440"/>
           </a:xfrm>
           <a:prstGeom prst="rect">
             <a:avLst/>
@@ -24513,7 +24591,7 @@
         <p:spPr>
           <a:xfrm>
             <a:off x="3842280" y="5452200"/>
-            <a:ext cx="2764800" cy="180000"/>
+            <a:ext cx="2764440" cy="179640"/>
           </a:xfrm>
           <a:prstGeom prst="rect">
             <a:avLst/>
@@ -24565,7 +24643,7 @@
         <p:spPr>
           <a:xfrm>
             <a:off x="556920" y="5931720"/>
-            <a:ext cx="6125400" cy="6480"/>
+            <a:ext cx="6125040" cy="6120"/>
           </a:xfrm>
           <a:custGeom>
             <a:avLst/>
@@ -24616,7 +24694,7 @@
         <p:spPr>
           <a:xfrm>
             <a:off x="556920" y="6082200"/>
-            <a:ext cx="6189480" cy="180000"/>
+            <a:ext cx="6189120" cy="179640"/>
           </a:xfrm>
           <a:prstGeom prst="rect">
             <a:avLst/>
@@ -24668,7 +24746,7 @@
         <p:spPr>
           <a:xfrm>
             <a:off x="556920" y="6338160"/>
-            <a:ext cx="1440360" cy="326160"/>
+            <a:ext cx="1440000" cy="325800"/>
           </a:xfrm>
           <a:prstGeom prst="rect">
             <a:avLst/>
@@ -24720,7 +24798,7 @@
         <p:spPr>
           <a:xfrm>
             <a:off x="1974240" y="6447600"/>
-            <a:ext cx="627480" cy="216720"/>
+            <a:ext cx="627120" cy="216360"/>
           </a:xfrm>
           <a:custGeom>
             <a:avLst/>
@@ -24793,7 +24871,7 @@
         <p:spPr>
           <a:xfrm>
             <a:off x="1974240" y="6447600"/>
-            <a:ext cx="682560" cy="216720"/>
+            <a:ext cx="682200" cy="216360"/>
           </a:xfrm>
           <a:prstGeom prst="rect">
             <a:avLst/>
@@ -24845,7 +24923,7 @@
         <p:spPr>
           <a:xfrm>
             <a:off x="7104960" y="1356120"/>
-            <a:ext cx="4718880" cy="5495400"/>
+            <a:ext cx="4718520" cy="5495040"/>
           </a:xfrm>
           <a:custGeom>
             <a:avLst/>
@@ -24919,7 +24997,7 @@
         <p:spPr>
           <a:xfrm>
             <a:off x="7292160" y="1543320"/>
-            <a:ext cx="4426920" cy="253080"/>
+            <a:ext cx="4426560" cy="252720"/>
           </a:xfrm>
           <a:prstGeom prst="rect">
             <a:avLst/>
@@ -24971,7 +25049,7 @@
         <p:spPr>
           <a:xfrm>
             <a:off x="7292160" y="1945080"/>
-            <a:ext cx="4344480" cy="983880"/>
+            <a:ext cx="4344120" cy="983520"/>
           </a:xfrm>
           <a:custGeom>
             <a:avLst/>
@@ -25042,7 +25120,7 @@
         <p:spPr>
           <a:xfrm>
             <a:off x="7438320" y="2091240"/>
-            <a:ext cx="609480" cy="180000"/>
+            <a:ext cx="609120" cy="179640"/>
           </a:xfrm>
           <a:prstGeom prst="rect">
             <a:avLst/>
@@ -25094,7 +25172,7 @@
         <p:spPr>
           <a:xfrm>
             <a:off x="11243160" y="2091240"/>
-            <a:ext cx="308160" cy="180000"/>
+            <a:ext cx="307800" cy="179640"/>
           </a:xfrm>
           <a:prstGeom prst="rect">
             <a:avLst/>
@@ -25146,7 +25224,7 @@
         <p:spPr>
           <a:xfrm>
             <a:off x="7438320" y="2347200"/>
-            <a:ext cx="4143600" cy="253080"/>
+            <a:ext cx="4143240" cy="252720"/>
           </a:xfrm>
           <a:prstGeom prst="rect">
             <a:avLst/>
@@ -25198,7 +25276,7 @@
         <p:spPr>
           <a:xfrm>
             <a:off x="7438320" y="2639160"/>
-            <a:ext cx="4107240" cy="143640"/>
+            <a:ext cx="4106880" cy="143280"/>
           </a:xfrm>
           <a:prstGeom prst="rect">
             <a:avLst/>
@@ -25250,7 +25328,7 @@
         <p:spPr>
           <a:xfrm>
             <a:off x="7292160" y="3077640"/>
-            <a:ext cx="4344480" cy="983880"/>
+            <a:ext cx="4344120" cy="983520"/>
           </a:xfrm>
           <a:custGeom>
             <a:avLst/>
@@ -25321,7 +25399,7 @@
         <p:spPr>
           <a:xfrm>
             <a:off x="7438320" y="3223800"/>
-            <a:ext cx="727920" cy="180000"/>
+            <a:ext cx="727560" cy="179640"/>
           </a:xfrm>
           <a:prstGeom prst="rect">
             <a:avLst/>
@@ -25373,7 +25451,7 @@
         <p:spPr>
           <a:xfrm>
             <a:off x="11242080" y="3223800"/>
-            <a:ext cx="308160" cy="180000"/>
+            <a:ext cx="307800" cy="179640"/>
           </a:xfrm>
           <a:prstGeom prst="rect">
             <a:avLst/>
@@ -25425,7 +25503,7 @@
         <p:spPr>
           <a:xfrm>
             <a:off x="7438320" y="3479400"/>
-            <a:ext cx="4143600" cy="253080"/>
+            <a:ext cx="4143240" cy="252720"/>
           </a:xfrm>
           <a:prstGeom prst="rect">
             <a:avLst/>
@@ -25477,7 +25555,7 @@
         <p:spPr>
           <a:xfrm>
             <a:off x="7438320" y="3771720"/>
-            <a:ext cx="4107240" cy="143640"/>
+            <a:ext cx="4106880" cy="143280"/>
           </a:xfrm>
           <a:prstGeom prst="rect">
             <a:avLst/>
@@ -25529,7 +25607,7 @@
         <p:spPr>
           <a:xfrm>
             <a:off x="7292160" y="4210200"/>
-            <a:ext cx="4344480" cy="983880"/>
+            <a:ext cx="4344120" cy="983520"/>
           </a:xfrm>
           <a:custGeom>
             <a:avLst/>
@@ -25600,7 +25678,7 @@
         <p:spPr>
           <a:xfrm>
             <a:off x="7438320" y="4356360"/>
-            <a:ext cx="965520" cy="180000"/>
+            <a:ext cx="965160" cy="179640"/>
           </a:xfrm>
           <a:prstGeom prst="rect">
             <a:avLst/>
@@ -25652,7 +25730,7 @@
         <p:spPr>
           <a:xfrm>
             <a:off x="11242080" y="4356360"/>
-            <a:ext cx="308160" cy="180000"/>
+            <a:ext cx="307800" cy="179640"/>
           </a:xfrm>
           <a:prstGeom prst="rect">
             <a:avLst/>
@@ -25704,7 +25782,7 @@
         <p:spPr>
           <a:xfrm>
             <a:off x="7438320" y="4611960"/>
-            <a:ext cx="4143600" cy="253080"/>
+            <a:ext cx="4143240" cy="252720"/>
           </a:xfrm>
           <a:prstGeom prst="rect">
             <a:avLst/>
@@ -25756,7 +25834,7 @@
         <p:spPr>
           <a:xfrm>
             <a:off x="7438320" y="4904280"/>
-            <a:ext cx="4107240" cy="143640"/>
+            <a:ext cx="4106880" cy="143280"/>
           </a:xfrm>
           <a:prstGeom prst="rect">
             <a:avLst/>
@@ -25808,7 +25886,7 @@
         <p:spPr>
           <a:xfrm>
             <a:off x="7292160" y="5342400"/>
-            <a:ext cx="4344480" cy="983880"/>
+            <a:ext cx="4344120" cy="983520"/>
           </a:xfrm>
           <a:custGeom>
             <a:avLst/>
@@ -25879,7 +25957,7 @@
         <p:spPr>
           <a:xfrm>
             <a:off x="7438320" y="5488560"/>
-            <a:ext cx="1065960" cy="180000"/>
+            <a:ext cx="1065600" cy="179640"/>
           </a:xfrm>
           <a:prstGeom prst="rect">
             <a:avLst/>
@@ -25931,7 +26009,7 @@
         <p:spPr>
           <a:xfrm>
             <a:off x="11189880" y="5488560"/>
-            <a:ext cx="362880" cy="180000"/>
+            <a:ext cx="362520" cy="179640"/>
           </a:xfrm>
           <a:prstGeom prst="rect">
             <a:avLst/>
@@ -25983,7 +26061,7 @@
         <p:spPr>
           <a:xfrm>
             <a:off x="7438320" y="5744520"/>
-            <a:ext cx="4143600" cy="253080"/>
+            <a:ext cx="4143240" cy="252720"/>
           </a:xfrm>
           <a:prstGeom prst="rect">
             <a:avLst/>
@@ -26035,7 +26113,7 @@
         <p:spPr>
           <a:xfrm>
             <a:off x="7438320" y="6036480"/>
-            <a:ext cx="4107240" cy="143640"/>
+            <a:ext cx="4106880" cy="143280"/>
           </a:xfrm>
           <a:prstGeom prst="rect">
             <a:avLst/>
@@ -26124,7 +26202,7 @@
         <p:spPr>
           <a:xfrm>
             <a:off x="331200" y="331200"/>
-            <a:ext cx="11584800" cy="163080"/>
+            <a:ext cx="11584440" cy="162720"/>
           </a:xfrm>
           <a:prstGeom prst="rect">
             <a:avLst/>
@@ -26152,7 +26230,7 @@
               <a:buNone/>
             </a:pPr>
             <a:r>
-              <a:rPr b="1" lang="en-US" sz="920" spc="26" strike="noStrike">
+              <a:rPr b="1" lang="en-US" sz="920" spc="24" strike="noStrike">
                 <a:solidFill>
                   <a:srgbClr val="6366f1"/>
                 </a:solidFill>
@@ -26176,7 +26254,7 @@
         <p:spPr>
           <a:xfrm>
             <a:off x="331200" y="563040"/>
-            <a:ext cx="11675880" cy="328680"/>
+            <a:ext cx="11675520" cy="328320"/>
           </a:xfrm>
           <a:prstGeom prst="rect">
             <a:avLst/>
@@ -26228,7 +26306,7 @@
         <p:spPr>
           <a:xfrm>
             <a:off x="331200" y="960840"/>
-            <a:ext cx="11593080" cy="196200"/>
+            <a:ext cx="11592720" cy="195840"/>
           </a:xfrm>
           <a:prstGeom prst="rect">
             <a:avLst/>
@@ -26280,7 +26358,7 @@
         <p:spPr>
           <a:xfrm>
             <a:off x="335520" y="1296360"/>
-            <a:ext cx="6217560" cy="5555160"/>
+            <a:ext cx="6217200" cy="5554800"/>
           </a:xfrm>
           <a:custGeom>
             <a:avLst/>
@@ -26354,7 +26432,7 @@
         <p:spPr>
           <a:xfrm>
             <a:off x="538200" y="1499040"/>
-            <a:ext cx="4942080" cy="5149440"/>
+            <a:ext cx="4941720" cy="5149080"/>
           </a:xfrm>
           <a:prstGeom prst="roundRect">
             <a:avLst>
@@ -26386,7 +26464,7 @@
         <p:spPr>
           <a:xfrm>
             <a:off x="6766200" y="1296360"/>
-            <a:ext cx="2473920" cy="1297800"/>
+            <a:ext cx="2473560" cy="1297440"/>
           </a:xfrm>
           <a:custGeom>
             <a:avLst/>
@@ -26460,7 +26538,7 @@
         <p:spPr>
           <a:xfrm>
             <a:off x="6935760" y="1465920"/>
-            <a:ext cx="2192400" cy="163080"/>
+            <a:ext cx="2192040" cy="162720"/>
           </a:xfrm>
           <a:prstGeom prst="rect">
             <a:avLst/>
@@ -26512,7 +26590,7 @@
         <p:spPr>
           <a:xfrm>
             <a:off x="6935760" y="1697760"/>
-            <a:ext cx="2258640" cy="295560"/>
+            <a:ext cx="2258280" cy="295200"/>
           </a:xfrm>
           <a:prstGeom prst="rect">
             <a:avLst/>
@@ -26564,7 +26642,7 @@
         <p:spPr>
           <a:xfrm>
             <a:off x="6935760" y="2062440"/>
-            <a:ext cx="361800" cy="196200"/>
+            <a:ext cx="361440" cy="195840"/>
           </a:xfrm>
           <a:custGeom>
             <a:avLst/>
@@ -26637,7 +26715,7 @@
         <p:spPr>
           <a:xfrm>
             <a:off x="6935760" y="2062440"/>
-            <a:ext cx="411480" cy="196200"/>
+            <a:ext cx="411120" cy="195840"/>
           </a:xfrm>
           <a:prstGeom prst="rect">
             <a:avLst/>
@@ -26689,7 +26767,7 @@
         <p:spPr>
           <a:xfrm>
             <a:off x="7367040" y="2095560"/>
-            <a:ext cx="229320" cy="129960"/>
+            <a:ext cx="228960" cy="129600"/>
           </a:xfrm>
           <a:prstGeom prst="rect">
             <a:avLst/>
@@ -26741,7 +26819,7 @@
         <p:spPr>
           <a:xfrm>
             <a:off x="6935760" y="2294280"/>
-            <a:ext cx="2184120" cy="129960"/>
+            <a:ext cx="2183760" cy="129600"/>
           </a:xfrm>
           <a:prstGeom prst="rect">
             <a:avLst/>
@@ -26793,7 +26871,7 @@
         <p:spPr>
           <a:xfrm>
             <a:off x="9381600" y="1296360"/>
-            <a:ext cx="2473920" cy="1297800"/>
+            <a:ext cx="2473560" cy="1297440"/>
           </a:xfrm>
           <a:custGeom>
             <a:avLst/>
@@ -26867,7 +26945,7 @@
         <p:spPr>
           <a:xfrm>
             <a:off x="9551520" y="1465920"/>
-            <a:ext cx="2192400" cy="163080"/>
+            <a:ext cx="2192040" cy="162720"/>
           </a:xfrm>
           <a:prstGeom prst="rect">
             <a:avLst/>
@@ -26919,7 +26997,7 @@
         <p:spPr>
           <a:xfrm>
             <a:off x="9551520" y="1697760"/>
-            <a:ext cx="2258640" cy="295560"/>
+            <a:ext cx="2258280" cy="295200"/>
           </a:xfrm>
           <a:prstGeom prst="rect">
             <a:avLst/>
@@ -26971,7 +27049,7 @@
         <p:spPr>
           <a:xfrm>
             <a:off x="9551520" y="2062440"/>
-            <a:ext cx="361800" cy="196200"/>
+            <a:ext cx="361440" cy="195840"/>
           </a:xfrm>
           <a:custGeom>
             <a:avLst/>
@@ -27044,7 +27122,7 @@
         <p:spPr>
           <a:xfrm>
             <a:off x="9551520" y="2062440"/>
-            <a:ext cx="411480" cy="196200"/>
+            <a:ext cx="411120" cy="195840"/>
           </a:xfrm>
           <a:prstGeom prst="rect">
             <a:avLst/>
@@ -27096,7 +27174,7 @@
         <p:spPr>
           <a:xfrm>
             <a:off x="9981720" y="2095560"/>
-            <a:ext cx="229320" cy="129960"/>
+            <a:ext cx="228960" cy="129600"/>
           </a:xfrm>
           <a:prstGeom prst="rect">
             <a:avLst/>
@@ -27148,7 +27226,7 @@
         <p:spPr>
           <a:xfrm>
             <a:off x="9551520" y="2294280"/>
-            <a:ext cx="2184120" cy="129960"/>
+            <a:ext cx="2183760" cy="129600"/>
           </a:xfrm>
           <a:prstGeom prst="rect">
             <a:avLst/>
@@ -27200,7 +27278,7 @@
         <p:spPr>
           <a:xfrm>
             <a:off x="6766200" y="2737440"/>
-            <a:ext cx="5091120" cy="1297800"/>
+            <a:ext cx="5090760" cy="1297440"/>
           </a:xfrm>
           <a:custGeom>
             <a:avLst/>
@@ -27274,7 +27352,7 @@
         <p:spPr>
           <a:xfrm>
             <a:off x="6935760" y="2907360"/>
-            <a:ext cx="4809600" cy="163080"/>
+            <a:ext cx="4809240" cy="162720"/>
           </a:xfrm>
           <a:prstGeom prst="rect">
             <a:avLst/>
@@ -27326,7 +27404,7 @@
         <p:spPr>
           <a:xfrm>
             <a:off x="6935760" y="3139200"/>
-            <a:ext cx="4875840" cy="295560"/>
+            <a:ext cx="4875480" cy="295200"/>
           </a:xfrm>
           <a:prstGeom prst="rect">
             <a:avLst/>
@@ -27378,7 +27456,7 @@
         <p:spPr>
           <a:xfrm>
             <a:off x="6935760" y="3503520"/>
-            <a:ext cx="361800" cy="196200"/>
+            <a:ext cx="361440" cy="195840"/>
           </a:xfrm>
           <a:custGeom>
             <a:avLst/>
@@ -27451,7 +27529,7 @@
         <p:spPr>
           <a:xfrm>
             <a:off x="6935760" y="3503520"/>
-            <a:ext cx="411480" cy="196200"/>
+            <a:ext cx="411120" cy="195840"/>
           </a:xfrm>
           <a:prstGeom prst="rect">
             <a:avLst/>
@@ -27503,7 +27581,7 @@
         <p:spPr>
           <a:xfrm>
             <a:off x="7367040" y="3536640"/>
-            <a:ext cx="229320" cy="129960"/>
+            <a:ext cx="228960" cy="129600"/>
           </a:xfrm>
           <a:prstGeom prst="rect">
             <a:avLst/>
@@ -27555,7 +27633,7 @@
         <p:spPr>
           <a:xfrm>
             <a:off x="6935760" y="3735360"/>
-            <a:ext cx="4801320" cy="129960"/>
+            <a:ext cx="4800960" cy="129600"/>
           </a:xfrm>
           <a:prstGeom prst="rect">
             <a:avLst/>
@@ -27607,7 +27685,7 @@
         <p:spPr>
           <a:xfrm>
             <a:off x="6766200" y="4178520"/>
-            <a:ext cx="5091120" cy="1297800"/>
+            <a:ext cx="5090760" cy="1297440"/>
           </a:xfrm>
           <a:custGeom>
             <a:avLst/>
@@ -27681,7 +27759,7 @@
         <p:spPr>
           <a:xfrm>
             <a:off x="6935760" y="4348440"/>
-            <a:ext cx="4809600" cy="163080"/>
+            <a:ext cx="4809240" cy="162720"/>
           </a:xfrm>
           <a:prstGeom prst="rect">
             <a:avLst/>
@@ -27733,7 +27811,7 @@
         <p:spPr>
           <a:xfrm>
             <a:off x="6935760" y="4580280"/>
-            <a:ext cx="4875840" cy="295560"/>
+            <a:ext cx="4875480" cy="295200"/>
           </a:xfrm>
           <a:prstGeom prst="rect">
             <a:avLst/>
@@ -27785,7 +27863,7 @@
         <p:spPr>
           <a:xfrm>
             <a:off x="6935760" y="4944600"/>
-            <a:ext cx="361800" cy="196200"/>
+            <a:ext cx="361440" cy="195840"/>
           </a:xfrm>
           <a:custGeom>
             <a:avLst/>
@@ -27858,7 +27936,7 @@
         <p:spPr>
           <a:xfrm>
             <a:off x="6935760" y="4944600"/>
-            <a:ext cx="411480" cy="196200"/>
+            <a:ext cx="411120" cy="195840"/>
           </a:xfrm>
           <a:prstGeom prst="rect">
             <a:avLst/>
@@ -27910,7 +27988,7 @@
         <p:spPr>
           <a:xfrm>
             <a:off x="7367760" y="4977720"/>
-            <a:ext cx="229320" cy="129960"/>
+            <a:ext cx="228960" cy="129600"/>
           </a:xfrm>
           <a:prstGeom prst="rect">
             <a:avLst/>
@@ -27962,7 +28040,7 @@
         <p:spPr>
           <a:xfrm>
             <a:off x="6935760" y="5176800"/>
-            <a:ext cx="4801320" cy="129960"/>
+            <a:ext cx="4800960" cy="129600"/>
           </a:xfrm>
           <a:prstGeom prst="rect">
             <a:avLst/>
@@ -28014,7 +28092,7 @@
         <p:spPr>
           <a:xfrm>
             <a:off x="6766200" y="5619600"/>
-            <a:ext cx="5091120" cy="1231560"/>
+            <a:ext cx="5090760" cy="1231200"/>
           </a:xfrm>
           <a:custGeom>
             <a:avLst/>
@@ -28088,7 +28166,7 @@
         <p:spPr>
           <a:xfrm>
             <a:off x="6935760" y="5789520"/>
-            <a:ext cx="4826160" cy="229320"/>
+            <a:ext cx="4825800" cy="228960"/>
           </a:xfrm>
           <a:prstGeom prst="rect">
             <a:avLst/>
@@ -28140,7 +28218,7 @@
         <p:spPr>
           <a:xfrm>
             <a:off x="6935760" y="6120720"/>
-            <a:ext cx="1057680" cy="163080"/>
+            <a:ext cx="1057320" cy="162720"/>
           </a:xfrm>
           <a:prstGeom prst="rect">
             <a:avLst/>
@@ -28192,7 +28270,7 @@
         <p:spPr>
           <a:xfrm>
             <a:off x="6935760" y="6286680"/>
-            <a:ext cx="1099080" cy="262440"/>
+            <a:ext cx="1098720" cy="262080"/>
           </a:xfrm>
           <a:prstGeom prst="rect">
             <a:avLst/>
@@ -28244,7 +28322,7 @@
         <p:spPr>
           <a:xfrm>
             <a:off x="6935760" y="6551640"/>
-            <a:ext cx="1049400" cy="129960"/>
+            <a:ext cx="1049040" cy="129600"/>
           </a:xfrm>
           <a:prstGeom prst="rect">
             <a:avLst/>
@@ -28296,7 +28374,7 @@
         <p:spPr>
           <a:xfrm>
             <a:off x="10646640" y="6120720"/>
-            <a:ext cx="1041120" cy="163080"/>
+            <a:ext cx="1040760" cy="162720"/>
           </a:xfrm>
           <a:prstGeom prst="rect">
             <a:avLst/>
@@ -28348,7 +28426,7 @@
         <p:spPr>
           <a:xfrm>
             <a:off x="10605240" y="6286680"/>
-            <a:ext cx="1082520" cy="262440"/>
+            <a:ext cx="1082160" cy="262080"/>
           </a:xfrm>
           <a:prstGeom prst="rect">
             <a:avLst/>
@@ -28400,7 +28478,7 @@
         <p:spPr>
           <a:xfrm>
             <a:off x="10654920" y="6551640"/>
-            <a:ext cx="1032840" cy="129960"/>
+            <a:ext cx="1032480" cy="129600"/>
           </a:xfrm>
           <a:prstGeom prst="rect">
             <a:avLst/>
@@ -28489,7 +28567,7 @@
         <p:spPr>
           <a:xfrm>
             <a:off x="380880" y="380880"/>
-            <a:ext cx="11494080" cy="187920"/>
+            <a:ext cx="11493720" cy="187560"/>
           </a:xfrm>
           <a:prstGeom prst="rect">
             <a:avLst/>
@@ -28517,7 +28595,7 @@
               <a:buNone/>
             </a:pPr>
             <a:r>
-              <a:rPr b="1" lang="en-US" sz="1050" spc="35" strike="noStrike">
+              <a:rPr b="1" lang="en-US" sz="1050" spc="32" strike="noStrike">
                 <a:solidFill>
                   <a:srgbClr val="6366f1"/>
                 </a:solidFill>
@@ -28541,7 +28619,7 @@
         <p:spPr>
           <a:xfrm>
             <a:off x="380880" y="647640"/>
-            <a:ext cx="11598840" cy="378360"/>
+            <a:ext cx="11598480" cy="378000"/>
           </a:xfrm>
           <a:prstGeom prst="rect">
             <a:avLst/>
@@ -28593,7 +28671,7 @@
         <p:spPr>
           <a:xfrm>
             <a:off x="380880" y="1104840"/>
-            <a:ext cx="11503800" cy="226080"/>
+            <a:ext cx="11503440" cy="225720"/>
           </a:xfrm>
           <a:prstGeom prst="rect">
             <a:avLst/>
@@ -28645,7 +28723,7 @@
         <p:spPr>
           <a:xfrm>
             <a:off x="385920" y="1414440"/>
-            <a:ext cx="5788800" cy="5055120"/>
+            <a:ext cx="5788440" cy="5054760"/>
           </a:xfrm>
           <a:custGeom>
             <a:avLst/>
@@ -28719,7 +28797,7 @@
         <p:spPr>
           <a:xfrm>
             <a:off x="581040" y="1609560"/>
-            <a:ext cx="5398200" cy="4664880"/>
+            <a:ext cx="5397840" cy="4664520"/>
           </a:xfrm>
           <a:prstGeom prst="roundRect">
             <a:avLst>
@@ -28751,7 +28829,7 @@
         <p:spPr>
           <a:xfrm>
             <a:off x="6429240" y="1414440"/>
-            <a:ext cx="5374440" cy="2035800"/>
+            <a:ext cx="5374080" cy="2035440"/>
           </a:xfrm>
           <a:custGeom>
             <a:avLst/>
@@ -28825,7 +28903,7 @@
         <p:spPr>
           <a:xfrm>
             <a:off x="6600960" y="1571760"/>
-            <a:ext cx="1769040" cy="264240"/>
+            <a:ext cx="1768680" cy="263880"/>
           </a:xfrm>
           <a:prstGeom prst="rect">
             <a:avLst/>
@@ -28877,7 +28955,7 @@
         <p:spPr>
           <a:xfrm>
             <a:off x="11267280" y="1590840"/>
-            <a:ext cx="378360" cy="226080"/>
+            <a:ext cx="378000" cy="225720"/>
           </a:xfrm>
           <a:custGeom>
             <a:avLst/>
@@ -28950,7 +29028,7 @@
         <p:spPr>
           <a:xfrm>
             <a:off x="11267280" y="1590840"/>
-            <a:ext cx="435600" cy="226080"/>
+            <a:ext cx="435240" cy="225720"/>
           </a:xfrm>
           <a:prstGeom prst="rect">
             <a:avLst/>
@@ -29002,7 +29080,7 @@
         <p:spPr>
           <a:xfrm>
             <a:off x="6600960" y="1914480"/>
-            <a:ext cx="5188680" cy="340560"/>
+            <a:ext cx="5188320" cy="340200"/>
           </a:xfrm>
           <a:prstGeom prst="rect">
             <a:avLst/>
@@ -29054,7 +29132,7 @@
         <p:spPr>
           <a:xfrm>
             <a:off x="6600960" y="2295360"/>
-            <a:ext cx="645120" cy="187920"/>
+            <a:ext cx="644760" cy="187560"/>
           </a:xfrm>
           <a:prstGeom prst="rect">
             <a:avLst/>
@@ -29106,7 +29184,7 @@
         <p:spPr>
           <a:xfrm>
             <a:off x="7255440" y="2314440"/>
-            <a:ext cx="1330920" cy="149760"/>
+            <a:ext cx="1330560" cy="149400"/>
           </a:xfrm>
           <a:prstGeom prst="rect">
             <a:avLst/>
@@ -29158,7 +29236,7 @@
         <p:spPr>
           <a:xfrm>
             <a:off x="6600960" y="2604960"/>
-            <a:ext cx="5045760" cy="6840"/>
+            <a:ext cx="5045400" cy="6480"/>
           </a:xfrm>
           <a:custGeom>
             <a:avLst/>
@@ -29209,7 +29287,7 @@
         <p:spPr>
           <a:xfrm>
             <a:off x="6600960" y="2724120"/>
-            <a:ext cx="2521440" cy="149760"/>
+            <a:ext cx="2521080" cy="149400"/>
           </a:xfrm>
           <a:prstGeom prst="rect">
             <a:avLst/>
@@ -29261,7 +29339,7 @@
         <p:spPr>
           <a:xfrm>
             <a:off x="6600960" y="2876400"/>
-            <a:ext cx="2550240" cy="264240"/>
+            <a:ext cx="2549880" cy="263880"/>
           </a:xfrm>
           <a:prstGeom prst="rect">
             <a:avLst/>
@@ -29313,7 +29391,7 @@
         <p:spPr>
           <a:xfrm>
             <a:off x="6600960" y="3143160"/>
-            <a:ext cx="2521440" cy="149760"/>
+            <a:ext cx="2521080" cy="149400"/>
           </a:xfrm>
           <a:prstGeom prst="rect">
             <a:avLst/>
@@ -29365,7 +29443,7 @@
         <p:spPr>
           <a:xfrm>
             <a:off x="9182160" y="2724120"/>
-            <a:ext cx="2521440" cy="149760"/>
+            <a:ext cx="2521080" cy="149400"/>
           </a:xfrm>
           <a:prstGeom prst="rect">
             <a:avLst/>
@@ -29417,7 +29495,7 @@
         <p:spPr>
           <a:xfrm>
             <a:off x="9182160" y="2876400"/>
-            <a:ext cx="2550240" cy="264240"/>
+            <a:ext cx="2549880" cy="263880"/>
           </a:xfrm>
           <a:prstGeom prst="rect">
             <a:avLst/>
@@ -29469,7 +29547,7 @@
         <p:spPr>
           <a:xfrm>
             <a:off x="9182160" y="3143160"/>
-            <a:ext cx="2521440" cy="149760"/>
+            <a:ext cx="2521080" cy="149400"/>
           </a:xfrm>
           <a:prstGeom prst="rect">
             <a:avLst/>
@@ -29521,7 +29599,7 @@
         <p:spPr>
           <a:xfrm>
             <a:off x="6429240" y="3538440"/>
-            <a:ext cx="5374440" cy="1226160"/>
+            <a:ext cx="5374080" cy="1225800"/>
           </a:xfrm>
           <a:custGeom>
             <a:avLst/>
@@ -29595,7 +29673,7 @@
         <p:spPr>
           <a:xfrm>
             <a:off x="6600960" y="3695760"/>
-            <a:ext cx="1540440" cy="264240"/>
+            <a:ext cx="1540080" cy="263880"/>
           </a:xfrm>
           <a:prstGeom prst="rect">
             <a:avLst/>
@@ -29647,7 +29725,7 @@
         <p:spPr>
           <a:xfrm>
             <a:off x="11292120" y="3714840"/>
-            <a:ext cx="349920" cy="226080"/>
+            <a:ext cx="349560" cy="225720"/>
           </a:xfrm>
           <a:custGeom>
             <a:avLst/>
@@ -29720,7 +29798,7 @@
         <p:spPr>
           <a:xfrm>
             <a:off x="11292120" y="3714840"/>
-            <a:ext cx="407160" cy="226080"/>
+            <a:ext cx="406800" cy="225720"/>
           </a:xfrm>
           <a:prstGeom prst="rect">
             <a:avLst/>
@@ -29772,7 +29850,7 @@
         <p:spPr>
           <a:xfrm>
             <a:off x="6600960" y="4038480"/>
-            <a:ext cx="5188680" cy="340560"/>
+            <a:ext cx="5188320" cy="340200"/>
           </a:xfrm>
           <a:prstGeom prst="rect">
             <a:avLst/>
@@ -29824,7 +29902,7 @@
         <p:spPr>
           <a:xfrm>
             <a:off x="6600960" y="4419720"/>
-            <a:ext cx="673920" cy="187920"/>
+            <a:ext cx="673560" cy="187560"/>
           </a:xfrm>
           <a:prstGeom prst="rect">
             <a:avLst/>
@@ -29876,7 +29954,7 @@
         <p:spPr>
           <a:xfrm>
             <a:off x="7284960" y="4438800"/>
-            <a:ext cx="1683360" cy="149760"/>
+            <a:ext cx="1683000" cy="149400"/>
           </a:xfrm>
           <a:prstGeom prst="rect">
             <a:avLst/>
@@ -29928,7 +30006,7 @@
         <p:spPr>
           <a:xfrm>
             <a:off x="6429240" y="4853160"/>
-            <a:ext cx="5374440" cy="1226160"/>
+            <a:ext cx="5374080" cy="1225800"/>
           </a:xfrm>
           <a:custGeom>
             <a:avLst/>
@@ -30002,7 +30080,7 @@
         <p:spPr>
           <a:xfrm>
             <a:off x="6600960" y="5010120"/>
-            <a:ext cx="2255040" cy="264240"/>
+            <a:ext cx="2254680" cy="263880"/>
           </a:xfrm>
           <a:prstGeom prst="rect">
             <a:avLst/>
@@ -30054,7 +30132,7 @@
         <p:spPr>
           <a:xfrm>
             <a:off x="11265480" y="5029200"/>
-            <a:ext cx="378360" cy="226080"/>
+            <a:ext cx="378000" cy="225720"/>
           </a:xfrm>
           <a:custGeom>
             <a:avLst/>
@@ -30127,7 +30205,7 @@
         <p:spPr>
           <a:xfrm>
             <a:off x="11265480" y="5029200"/>
-            <a:ext cx="435600" cy="226080"/>
+            <a:ext cx="435240" cy="225720"/>
           </a:xfrm>
           <a:prstGeom prst="rect">
             <a:avLst/>
@@ -30179,7 +30257,7 @@
         <p:spPr>
           <a:xfrm>
             <a:off x="6600960" y="5353200"/>
-            <a:ext cx="5188680" cy="340560"/>
+            <a:ext cx="5188320" cy="340200"/>
           </a:xfrm>
           <a:prstGeom prst="rect">
             <a:avLst/>
@@ -30231,7 +30309,7 @@
         <p:spPr>
           <a:xfrm>
             <a:off x="6600960" y="5734080"/>
-            <a:ext cx="645120" cy="187920"/>
+            <a:ext cx="644760" cy="187560"/>
           </a:xfrm>
           <a:prstGeom prst="rect">
             <a:avLst/>
@@ -30283,7 +30361,7 @@
         <p:spPr>
           <a:xfrm>
             <a:off x="7260840" y="5753160"/>
-            <a:ext cx="1569240" cy="149760"/>
+            <a:ext cx="1568880" cy="149400"/>
           </a:xfrm>
           <a:prstGeom prst="rect">
             <a:avLst/>
@@ -30372,7 +30450,7 @@
         <p:spPr>
           <a:xfrm>
             <a:off x="380880" y="380880"/>
-            <a:ext cx="11494080" cy="187920"/>
+            <a:ext cx="11493720" cy="187560"/>
           </a:xfrm>
           <a:prstGeom prst="rect">
             <a:avLst/>
@@ -30400,7 +30478,7 @@
               <a:buNone/>
             </a:pPr>
             <a:r>
-              <a:rPr b="1" lang="en-US" sz="1050" spc="35" strike="noStrike">
+              <a:rPr b="1" lang="en-US" sz="1050" spc="32" strike="noStrike">
                 <a:solidFill>
                   <a:srgbClr val="6366f1"/>
                 </a:solidFill>
@@ -30424,7 +30502,7 @@
         <p:spPr>
           <a:xfrm>
             <a:off x="380880" y="647640"/>
-            <a:ext cx="11598840" cy="378360"/>
+            <a:ext cx="11598480" cy="378000"/>
           </a:xfrm>
           <a:prstGeom prst="rect">
             <a:avLst/>
@@ -30476,7 +30554,7 @@
         <p:spPr>
           <a:xfrm>
             <a:off x="380880" y="1104840"/>
-            <a:ext cx="11503800" cy="226080"/>
+            <a:ext cx="11503440" cy="225720"/>
           </a:xfrm>
           <a:prstGeom prst="rect">
             <a:avLst/>
@@ -30528,7 +30606,7 @@
         <p:spPr>
           <a:xfrm>
             <a:off x="385920" y="1414440"/>
-            <a:ext cx="6331680" cy="5312520"/>
+            <a:ext cx="6331320" cy="5312160"/>
           </a:xfrm>
           <a:custGeom>
             <a:avLst/>
@@ -30602,7 +30680,7 @@
         <p:spPr>
           <a:xfrm>
             <a:off x="581040" y="1609560"/>
-            <a:ext cx="5941080" cy="4921920"/>
+            <a:ext cx="5940720" cy="4921560"/>
           </a:xfrm>
           <a:prstGeom prst="roundRect">
             <a:avLst>
@@ -30634,7 +30712,7 @@
         <p:spPr>
           <a:xfrm>
             <a:off x="6958080" y="1414440"/>
-            <a:ext cx="4845600" cy="2578680"/>
+            <a:ext cx="4845240" cy="2578320"/>
           </a:xfrm>
           <a:custGeom>
             <a:avLst/>
@@ -30708,7 +30786,7 @@
         <p:spPr>
           <a:xfrm>
             <a:off x="7153200" y="1609560"/>
-            <a:ext cx="378360" cy="378360"/>
+            <a:ext cx="378000" cy="378000"/>
           </a:xfrm>
           <a:custGeom>
             <a:avLst/>
@@ -30781,7 +30859,7 @@
         <p:spPr>
           <a:xfrm>
             <a:off x="7267680" y="1724040"/>
-            <a:ext cx="149760" cy="149760"/>
+            <a:ext cx="149400" cy="149400"/>
           </a:xfrm>
           <a:custGeom>
             <a:avLst/>
@@ -30914,7 +30992,7 @@
         <p:spPr>
           <a:xfrm>
             <a:off x="7648560" y="1666800"/>
-            <a:ext cx="1845360" cy="264240"/>
+            <a:ext cx="1845000" cy="263880"/>
           </a:xfrm>
           <a:prstGeom prst="rect">
             <a:avLst/>
@@ -30966,7 +31044,7 @@
         <p:spPr>
           <a:xfrm>
             <a:off x="7153200" y="2104920"/>
-            <a:ext cx="1083240" cy="454680"/>
+            <a:ext cx="1082880" cy="454320"/>
           </a:xfrm>
           <a:prstGeom prst="rect">
             <a:avLst/>
@@ -31018,7 +31096,7 @@
         <p:spPr>
           <a:xfrm>
             <a:off x="8127720" y="2300400"/>
-            <a:ext cx="454680" cy="264240"/>
+            <a:ext cx="454320" cy="263880"/>
           </a:xfrm>
           <a:custGeom>
             <a:avLst/>
@@ -31091,7 +31169,7 @@
         <p:spPr>
           <a:xfrm>
             <a:off x="8127720" y="2300400"/>
-            <a:ext cx="521280" cy="264240"/>
+            <a:ext cx="520920" cy="263880"/>
           </a:xfrm>
           <a:prstGeom prst="rect">
             <a:avLst/>
@@ -31143,7 +31221,7 @@
         <p:spPr>
           <a:xfrm>
             <a:off x="7153200" y="2643120"/>
-            <a:ext cx="4521960" cy="187920"/>
+            <a:ext cx="4521600" cy="187560"/>
           </a:xfrm>
           <a:prstGeom prst="rect">
             <a:avLst/>
@@ -31195,7 +31273,7 @@
         <p:spPr>
           <a:xfrm>
             <a:off x="7153200" y="2990880"/>
-            <a:ext cx="4455360" cy="6840"/>
+            <a:ext cx="4455000" cy="6480"/>
           </a:xfrm>
           <a:custGeom>
             <a:avLst/>
@@ -31246,7 +31324,7 @@
         <p:spPr>
           <a:xfrm>
             <a:off x="7153200" y="3147840"/>
-            <a:ext cx="4521960" cy="645120"/>
+            <a:ext cx="4521600" cy="644760"/>
           </a:xfrm>
           <a:prstGeom prst="rect">
             <a:avLst/>
@@ -31298,7 +31376,7 @@
         <p:spPr>
           <a:xfrm>
             <a:off x="6958080" y="4079160"/>
-            <a:ext cx="4845600" cy="2635920"/>
+            <a:ext cx="4845240" cy="2635560"/>
           </a:xfrm>
           <a:custGeom>
             <a:avLst/>
@@ -31372,7 +31450,7 @@
         <p:spPr>
           <a:xfrm>
             <a:off x="7153200" y="4274280"/>
-            <a:ext cx="4541040" cy="264240"/>
+            <a:ext cx="4540680" cy="263880"/>
           </a:xfrm>
           <a:prstGeom prst="rect">
             <a:avLst/>
@@ -31424,7 +31502,7 @@
         <p:spPr>
           <a:xfrm>
             <a:off x="7153200" y="4712400"/>
-            <a:ext cx="321480" cy="187920"/>
+            <a:ext cx="321120" cy="187560"/>
           </a:xfrm>
           <a:prstGeom prst="rect">
             <a:avLst/>
@@ -31476,7 +31554,7 @@
         <p:spPr>
           <a:xfrm>
             <a:off x="11301840" y="4693320"/>
-            <a:ext cx="378360" cy="226080"/>
+            <a:ext cx="378000" cy="225720"/>
           </a:xfrm>
           <a:prstGeom prst="rect">
             <a:avLst/>
@@ -31528,7 +31606,7 @@
         <p:spPr>
           <a:xfrm>
             <a:off x="7153200" y="4960080"/>
-            <a:ext cx="4455360" cy="73800"/>
+            <a:ext cx="4455000" cy="73440"/>
           </a:xfrm>
           <a:custGeom>
             <a:avLst/>
@@ -31599,7 +31677,7 @@
         <p:spPr>
           <a:xfrm>
             <a:off x="7153200" y="4960080"/>
-            <a:ext cx="2674080" cy="73800"/>
+            <a:ext cx="2673720" cy="73440"/>
           </a:xfrm>
           <a:custGeom>
             <a:avLst/>
@@ -31670,7 +31748,7 @@
         <p:spPr>
           <a:xfrm>
             <a:off x="7153200" y="5074560"/>
-            <a:ext cx="4512240" cy="149760"/>
+            <a:ext cx="4511880" cy="149400"/>
           </a:xfrm>
           <a:prstGeom prst="rect">
             <a:avLst/>
@@ -31722,7 +31800,7 @@
         <p:spPr>
           <a:xfrm>
             <a:off x="7153200" y="5360040"/>
-            <a:ext cx="1197720" cy="187920"/>
+            <a:ext cx="1197360" cy="187560"/>
           </a:xfrm>
           <a:prstGeom prst="rect">
             <a:avLst/>
@@ -31774,7 +31852,7 @@
         <p:spPr>
           <a:xfrm>
             <a:off x="11308680" y="5341320"/>
-            <a:ext cx="378360" cy="226080"/>
+            <a:ext cx="378000" cy="225720"/>
           </a:xfrm>
           <a:prstGeom prst="rect">
             <a:avLst/>
@@ -31826,7 +31904,7 @@
         <p:spPr>
           <a:xfrm>
             <a:off x="7153200" y="5607720"/>
-            <a:ext cx="4455360" cy="73800"/>
+            <a:ext cx="4455000" cy="73440"/>
           </a:xfrm>
           <a:custGeom>
             <a:avLst/>
@@ -31897,7 +31975,7 @@
         <p:spPr>
           <a:xfrm>
             <a:off x="7153200" y="5607720"/>
-            <a:ext cx="2578680" cy="73800"/>
+            <a:ext cx="2578320" cy="73440"/>
           </a:xfrm>
           <a:custGeom>
             <a:avLst/>
@@ -31968,7 +32046,7 @@
         <p:spPr>
           <a:xfrm>
             <a:off x="7153200" y="5722200"/>
-            <a:ext cx="4512240" cy="149760"/>
+            <a:ext cx="4511880" cy="149400"/>
           </a:xfrm>
           <a:prstGeom prst="rect">
             <a:avLst/>
@@ -32020,7 +32098,7 @@
         <p:spPr>
           <a:xfrm>
             <a:off x="7153200" y="6008040"/>
-            <a:ext cx="1216800" cy="187920"/>
+            <a:ext cx="1216440" cy="187560"/>
           </a:xfrm>
           <a:prstGeom prst="rect">
             <a:avLst/>
@@ -32072,7 +32150,7 @@
         <p:spPr>
           <a:xfrm>
             <a:off x="11313720" y="5988960"/>
-            <a:ext cx="369000" cy="226080"/>
+            <a:ext cx="368640" cy="225720"/>
           </a:xfrm>
           <a:prstGeom prst="rect">
             <a:avLst/>
@@ -32124,7 +32202,7 @@
         <p:spPr>
           <a:xfrm>
             <a:off x="7153200" y="6255720"/>
-            <a:ext cx="4455360" cy="73800"/>
+            <a:ext cx="4455000" cy="73440"/>
           </a:xfrm>
           <a:custGeom>
             <a:avLst/>
@@ -32195,7 +32273,7 @@
         <p:spPr>
           <a:xfrm>
             <a:off x="7153200" y="6255720"/>
-            <a:ext cx="2311920" cy="73800"/>
+            <a:ext cx="2311560" cy="73440"/>
           </a:xfrm>
           <a:custGeom>
             <a:avLst/>
@@ -32266,7 +32344,7 @@
         <p:spPr>
           <a:xfrm>
             <a:off x="7153200" y="6369840"/>
-            <a:ext cx="4512240" cy="149760"/>
+            <a:ext cx="4511880" cy="149400"/>
           </a:xfrm>
           <a:prstGeom prst="rect">
             <a:avLst/>
@@ -32355,7 +32433,7 @@
         <p:spPr>
           <a:xfrm>
             <a:off x="370440" y="370440"/>
-            <a:ext cx="11513520" cy="182520"/>
+            <a:ext cx="11513160" cy="182160"/>
           </a:xfrm>
           <a:prstGeom prst="rect">
             <a:avLst/>
@@ -32383,7 +32461,7 @@
               <a:buNone/>
             </a:pPr>
             <a:r>
-              <a:rPr b="1" lang="en-US" sz="1020" spc="32" strike="noStrike">
+              <a:rPr b="1" lang="en-US" sz="1020" spc="29" strike="noStrike">
                 <a:solidFill>
                   <a:srgbClr val="6366f1"/>
                 </a:solidFill>
@@ -32407,7 +32485,7 @@
         <p:spPr>
           <a:xfrm>
             <a:off x="370440" y="629640"/>
-            <a:ext cx="11615400" cy="367920"/>
+            <a:ext cx="11615040" cy="367560"/>
           </a:xfrm>
           <a:prstGeom prst="rect">
             <a:avLst/>
@@ -32459,7 +32537,7 @@
         <p:spPr>
           <a:xfrm>
             <a:off x="370440" y="1073880"/>
-            <a:ext cx="11522880" cy="219600"/>
+            <a:ext cx="11522520" cy="219240"/>
           </a:xfrm>
           <a:prstGeom prst="rect">
             <a:avLst/>
@@ -32511,7 +32589,7 @@
         <p:spPr>
           <a:xfrm>
             <a:off x="388800" y="1374840"/>
-            <a:ext cx="5630760" cy="3755880"/>
+            <a:ext cx="5630400" cy="3755520"/>
           </a:xfrm>
           <a:custGeom>
             <a:avLst/>
@@ -32585,7 +32663,7 @@
         <p:spPr>
           <a:xfrm>
             <a:off x="592560" y="1564560"/>
-            <a:ext cx="441720" cy="441720"/>
+            <a:ext cx="441360" cy="441360"/>
           </a:xfrm>
           <a:custGeom>
             <a:avLst/>
@@ -32658,7 +32736,7 @@
         <p:spPr>
           <a:xfrm>
             <a:off x="722160" y="1694160"/>
-            <a:ext cx="182520" cy="182520"/>
+            <a:ext cx="182160" cy="182160"/>
           </a:xfrm>
           <a:custGeom>
             <a:avLst/>
@@ -32779,7 +32857,7 @@
         <p:spPr>
           <a:xfrm>
             <a:off x="1148040" y="1564560"/>
-            <a:ext cx="1478520" cy="256680"/>
+            <a:ext cx="1478160" cy="256320"/>
           </a:xfrm>
           <a:prstGeom prst="rect">
             <a:avLst/>
@@ -32831,7 +32909,7 @@
         <p:spPr>
           <a:xfrm>
             <a:off x="1148040" y="1823760"/>
-            <a:ext cx="1450800" cy="182520"/>
+            <a:ext cx="1450440" cy="182160"/>
           </a:xfrm>
           <a:prstGeom prst="rect">
             <a:avLst/>
@@ -32883,7 +32961,7 @@
         <p:spPr>
           <a:xfrm>
             <a:off x="592560" y="2157120"/>
-            <a:ext cx="5302080" cy="182520"/>
+            <a:ext cx="5301720" cy="182160"/>
           </a:xfrm>
           <a:prstGeom prst="rect">
             <a:avLst/>
@@ -32935,7 +33013,7 @@
         <p:spPr>
           <a:xfrm>
             <a:off x="592560" y="2379240"/>
-            <a:ext cx="1830600" cy="367920"/>
+            <a:ext cx="1830240" cy="367560"/>
           </a:xfrm>
           <a:prstGeom prst="rect">
             <a:avLst/>
@@ -32987,7 +33065,7 @@
         <p:spPr>
           <a:xfrm>
             <a:off x="2369880" y="2494800"/>
-            <a:ext cx="700920" cy="256680"/>
+            <a:ext cx="700560" cy="256320"/>
           </a:xfrm>
           <a:custGeom>
             <a:avLst/>
@@ -33060,7 +33138,7 @@
         <p:spPr>
           <a:xfrm>
             <a:off x="2369880" y="2494800"/>
-            <a:ext cx="765720" cy="256680"/>
+            <a:ext cx="765360" cy="256320"/>
           </a:xfrm>
           <a:prstGeom prst="rect">
             <a:avLst/>
@@ -33112,7 +33190,7 @@
         <p:spPr>
           <a:xfrm>
             <a:off x="592560" y="2902320"/>
-            <a:ext cx="5237280" cy="1145520"/>
+            <a:ext cx="5236920" cy="1145160"/>
           </a:xfrm>
           <a:custGeom>
             <a:avLst/>
@@ -33183,7 +33261,7 @@
         <p:spPr>
           <a:xfrm>
             <a:off x="703440" y="3013200"/>
-            <a:ext cx="5088960" cy="219600"/>
+            <a:ext cx="5088600" cy="219240"/>
           </a:xfrm>
           <a:prstGeom prst="rect">
             <a:avLst/>
@@ -33235,7 +33313,7 @@
         <p:spPr>
           <a:xfrm>
             <a:off x="703440" y="3272400"/>
-            <a:ext cx="5079960" cy="182520"/>
+            <a:ext cx="5079600" cy="182160"/>
           </a:xfrm>
           <a:prstGeom prst="rect">
             <a:avLst/>
@@ -33287,7 +33365,7 @@
         <p:spPr>
           <a:xfrm>
             <a:off x="703440" y="3531600"/>
-            <a:ext cx="747360" cy="256680"/>
+            <a:ext cx="747000" cy="256320"/>
           </a:xfrm>
           <a:prstGeom prst="rect">
             <a:avLst/>
@@ -33339,7 +33417,7 @@
         <p:spPr>
           <a:xfrm>
             <a:off x="703440" y="3790800"/>
-            <a:ext cx="710280" cy="145440"/>
+            <a:ext cx="709920" cy="145080"/>
           </a:xfrm>
           <a:prstGeom prst="rect">
             <a:avLst/>
@@ -33391,7 +33469,7 @@
         <p:spPr>
           <a:xfrm>
             <a:off x="1508040" y="3531600"/>
-            <a:ext cx="1006560" cy="256680"/>
+            <a:ext cx="1006200" cy="256320"/>
           </a:xfrm>
           <a:prstGeom prst="rect">
             <a:avLst/>
@@ -33443,7 +33521,7 @@
         <p:spPr>
           <a:xfrm>
             <a:off x="1508040" y="3790800"/>
-            <a:ext cx="969480" cy="145440"/>
+            <a:ext cx="969120" cy="145080"/>
           </a:xfrm>
           <a:prstGeom prst="rect">
             <a:avLst/>
@@ -33495,7 +33573,7 @@
         <p:spPr>
           <a:xfrm>
             <a:off x="2575800" y="3531600"/>
-            <a:ext cx="1089720" cy="256680"/>
+            <a:ext cx="1089360" cy="256320"/>
           </a:xfrm>
           <a:prstGeom prst="rect">
             <a:avLst/>
@@ -33547,7 +33625,7 @@
         <p:spPr>
           <a:xfrm>
             <a:off x="2575800" y="3790800"/>
-            <a:ext cx="1053000" cy="145440"/>
+            <a:ext cx="1052640" cy="145080"/>
           </a:xfrm>
           <a:prstGeom prst="rect">
             <a:avLst/>
@@ -33599,7 +33677,7 @@
         <p:spPr>
           <a:xfrm>
             <a:off x="592560" y="4161240"/>
-            <a:ext cx="5237280" cy="775080"/>
+            <a:ext cx="5236920" cy="774720"/>
           </a:xfrm>
           <a:custGeom>
             <a:avLst/>
@@ -33670,7 +33748,7 @@
         <p:spPr>
           <a:xfrm>
             <a:off x="703440" y="4272120"/>
-            <a:ext cx="5088960" cy="219600"/>
+            <a:ext cx="5088600" cy="219240"/>
           </a:xfrm>
           <a:prstGeom prst="rect">
             <a:avLst/>
@@ -33722,7 +33800,7 @@
         <p:spPr>
           <a:xfrm>
             <a:off x="703440" y="4568400"/>
-            <a:ext cx="1062000" cy="256680"/>
+            <a:ext cx="1061640" cy="256320"/>
           </a:xfrm>
           <a:custGeom>
             <a:avLst/>
@@ -33795,7 +33873,7 @@
         <p:spPr>
           <a:xfrm>
             <a:off x="703440" y="4568400"/>
-            <a:ext cx="1126800" cy="256680"/>
+            <a:ext cx="1126440" cy="256320"/>
           </a:xfrm>
           <a:prstGeom prst="rect">
             <a:avLst/>
@@ -33847,7 +33925,7 @@
         <p:spPr>
           <a:xfrm>
             <a:off x="1843560" y="4568400"/>
-            <a:ext cx="1238040" cy="256680"/>
+            <a:ext cx="1237680" cy="256320"/>
           </a:xfrm>
           <a:custGeom>
             <a:avLst/>
@@ -33920,7 +33998,7 @@
         <p:spPr>
           <a:xfrm>
             <a:off x="1843560" y="4568400"/>
-            <a:ext cx="1302840" cy="256680"/>
+            <a:ext cx="1302480" cy="256320"/>
           </a:xfrm>
           <a:prstGeom prst="rect">
             <a:avLst/>
@@ -33972,7 +34050,7 @@
         <p:spPr>
           <a:xfrm>
             <a:off x="3161880" y="4568400"/>
-            <a:ext cx="895320" cy="256680"/>
+            <a:ext cx="894960" cy="256320"/>
           </a:xfrm>
           <a:custGeom>
             <a:avLst/>
@@ -34045,7 +34123,7 @@
         <p:spPr>
           <a:xfrm>
             <a:off x="3161880" y="4568400"/>
-            <a:ext cx="960120" cy="256680"/>
+            <a:ext cx="959760" cy="256320"/>
           </a:xfrm>
           <a:prstGeom prst="rect">
             <a:avLst/>
@@ -34097,7 +34175,7 @@
         <p:spPr>
           <a:xfrm>
             <a:off x="6190200" y="1374840"/>
-            <a:ext cx="5630760" cy="4126320"/>
+            <a:ext cx="5630400" cy="4125960"/>
           </a:xfrm>
           <a:custGeom>
             <a:avLst/>
@@ -34171,7 +34249,7 @@
         <p:spPr>
           <a:xfrm>
             <a:off x="6393600" y="1564560"/>
-            <a:ext cx="441720" cy="441720"/>
+            <a:ext cx="441360" cy="441360"/>
           </a:xfrm>
           <a:custGeom>
             <a:avLst/>
@@ -34244,7 +34322,7 @@
         <p:spPr>
           <a:xfrm>
             <a:off x="6523200" y="1694160"/>
-            <a:ext cx="182520" cy="182520"/>
+            <a:ext cx="182160" cy="182160"/>
           </a:xfrm>
           <a:custGeom>
             <a:avLst/>
@@ -34421,7 +34499,7 @@
         <p:spPr>
           <a:xfrm>
             <a:off x="6949080" y="1564560"/>
-            <a:ext cx="1719360" cy="256680"/>
+            <a:ext cx="1719000" cy="256320"/>
           </a:xfrm>
           <a:prstGeom prst="rect">
             <a:avLst/>
@@ -34473,7 +34551,7 @@
         <p:spPr>
           <a:xfrm>
             <a:off x="6949080" y="1823760"/>
-            <a:ext cx="1691640" cy="182520"/>
+            <a:ext cx="1691280" cy="182160"/>
           </a:xfrm>
           <a:prstGeom prst="rect">
             <a:avLst/>
@@ -34525,7 +34603,7 @@
         <p:spPr>
           <a:xfrm>
             <a:off x="6393600" y="2157120"/>
-            <a:ext cx="5302080" cy="182520"/>
+            <a:ext cx="5301720" cy="182160"/>
           </a:xfrm>
           <a:prstGeom prst="rect">
             <a:avLst/>
@@ -34577,7 +34655,7 @@
         <p:spPr>
           <a:xfrm>
             <a:off x="6393600" y="2379240"/>
-            <a:ext cx="1765800" cy="367920"/>
+            <a:ext cx="1765440" cy="367560"/>
           </a:xfrm>
           <a:prstGeom prst="rect">
             <a:avLst/>
@@ -34629,7 +34707,7 @@
         <p:spPr>
           <a:xfrm>
             <a:off x="8108640" y="2494800"/>
-            <a:ext cx="728640" cy="256680"/>
+            <a:ext cx="728280" cy="256320"/>
           </a:xfrm>
           <a:custGeom>
             <a:avLst/>
@@ -34702,7 +34780,7 @@
         <p:spPr>
           <a:xfrm>
             <a:off x="8108640" y="2494800"/>
-            <a:ext cx="793440" cy="256680"/>
+            <a:ext cx="793080" cy="256320"/>
           </a:xfrm>
           <a:prstGeom prst="rect">
             <a:avLst/>
@@ -34754,7 +34832,7 @@
         <p:spPr>
           <a:xfrm>
             <a:off x="6393600" y="2791080"/>
-            <a:ext cx="5292720" cy="145440"/>
+            <a:ext cx="5292360" cy="145080"/>
           </a:xfrm>
           <a:prstGeom prst="rect">
             <a:avLst/>
@@ -34806,7 +34884,7 @@
         <p:spPr>
           <a:xfrm>
             <a:off x="6393600" y="3087360"/>
-            <a:ext cx="5237280" cy="1219320"/>
+            <a:ext cx="5236920" cy="1218960"/>
           </a:xfrm>
           <a:custGeom>
             <a:avLst/>
@@ -34877,7 +34955,7 @@
         <p:spPr>
           <a:xfrm>
             <a:off x="6504840" y="3198600"/>
-            <a:ext cx="5088960" cy="219600"/>
+            <a:ext cx="5088600" cy="219240"/>
           </a:xfrm>
           <a:prstGeom prst="rect">
             <a:avLst/>
@@ -34929,7 +35007,7 @@
         <p:spPr>
           <a:xfrm>
             <a:off x="6523200" y="3513240"/>
-            <a:ext cx="145440" cy="145440"/>
+            <a:ext cx="145080" cy="145080"/>
           </a:xfrm>
           <a:custGeom>
             <a:avLst/>
@@ -35034,7 +35112,7 @@
         <p:spPr>
           <a:xfrm>
             <a:off x="6764040" y="3494520"/>
-            <a:ext cx="1774800" cy="182520"/>
+            <a:ext cx="1774440" cy="182160"/>
           </a:xfrm>
           <a:prstGeom prst="rect">
             <a:avLst/>
@@ -35086,7 +35164,7 @@
         <p:spPr>
           <a:xfrm>
             <a:off x="6523200" y="3772440"/>
-            <a:ext cx="145440" cy="145440"/>
+            <a:ext cx="145080" cy="145080"/>
           </a:xfrm>
           <a:custGeom>
             <a:avLst/>
@@ -35191,7 +35269,7 @@
         <p:spPr>
           <a:xfrm>
             <a:off x="6764040" y="3753720"/>
-            <a:ext cx="1330560" cy="182520"/>
+            <a:ext cx="1330200" cy="182160"/>
           </a:xfrm>
           <a:prstGeom prst="rect">
             <a:avLst/>
@@ -35243,7 +35321,7 @@
         <p:spPr>
           <a:xfrm>
             <a:off x="6523200" y="4031640"/>
-            <a:ext cx="145440" cy="145440"/>
+            <a:ext cx="145080" cy="145080"/>
           </a:xfrm>
           <a:custGeom>
             <a:avLst/>
@@ -35348,7 +35426,7 @@
         <p:spPr>
           <a:xfrm>
             <a:off x="6764040" y="4012920"/>
-            <a:ext cx="1774800" cy="182520"/>
+            <a:ext cx="1774440" cy="182160"/>
           </a:xfrm>
           <a:prstGeom prst="rect">
             <a:avLst/>
@@ -35400,7 +35478,7 @@
         <p:spPr>
           <a:xfrm>
             <a:off x="6393600" y="4420440"/>
-            <a:ext cx="5237280" cy="886320"/>
+            <a:ext cx="5236920" cy="885960"/>
           </a:xfrm>
           <a:custGeom>
             <a:avLst/>
@@ -35471,7 +35549,7 @@
         <p:spPr>
           <a:xfrm>
             <a:off x="6504840" y="4531320"/>
-            <a:ext cx="5088960" cy="219600"/>
+            <a:ext cx="5088600" cy="219240"/>
           </a:xfrm>
           <a:prstGeom prst="rect">
             <a:avLst/>
@@ -35523,7 +35601,7 @@
         <p:spPr>
           <a:xfrm>
             <a:off x="6504840" y="4827600"/>
-            <a:ext cx="5079960" cy="367920"/>
+            <a:ext cx="5079600" cy="367560"/>
           </a:xfrm>
           <a:prstGeom prst="rect">
             <a:avLst/>
@@ -35595,7 +35673,7 @@
         <p:spPr>
           <a:xfrm>
             <a:off x="374760" y="5582160"/>
-            <a:ext cx="3709800" cy="1265760"/>
+            <a:ext cx="3709440" cy="1265400"/>
           </a:xfrm>
           <a:custGeom>
             <a:avLst/>
@@ -35669,7 +35747,7 @@
         <p:spPr>
           <a:xfrm>
             <a:off x="2091240" y="5734800"/>
-            <a:ext cx="275040" cy="219600"/>
+            <a:ext cx="274680" cy="219240"/>
           </a:xfrm>
           <a:custGeom>
             <a:avLst/>
@@ -35850,7 +35928,7 @@
         <p:spPr>
           <a:xfrm>
             <a:off x="495360" y="6031080"/>
-            <a:ext cx="3468960" cy="182520"/>
+            <a:ext cx="3468600" cy="182160"/>
           </a:xfrm>
           <a:prstGeom prst="rect">
             <a:avLst/>
@@ -35902,7 +35980,7 @@
         <p:spPr>
           <a:xfrm>
             <a:off x="471960" y="6216480"/>
-            <a:ext cx="3515400" cy="293760"/>
+            <a:ext cx="3515040" cy="293400"/>
           </a:xfrm>
           <a:prstGeom prst="rect">
             <a:avLst/>
@@ -35954,7 +36032,7 @@
         <p:spPr>
           <a:xfrm>
             <a:off x="495360" y="6512760"/>
-            <a:ext cx="3468960" cy="182520"/>
+            <a:ext cx="3468600" cy="182160"/>
           </a:xfrm>
           <a:prstGeom prst="rect">
             <a:avLst/>
@@ -36006,7 +36084,7 @@
         <p:spPr>
           <a:xfrm>
             <a:off x="4242600" y="5582160"/>
-            <a:ext cx="3709800" cy="1265760"/>
+            <a:ext cx="3709440" cy="1265400"/>
           </a:xfrm>
           <a:custGeom>
             <a:avLst/>
@@ -36080,7 +36158,7 @@
         <p:spPr>
           <a:xfrm>
             <a:off x="6014160" y="5734800"/>
-            <a:ext cx="164160" cy="219600"/>
+            <a:ext cx="163800" cy="219240"/>
           </a:xfrm>
           <a:custGeom>
             <a:avLst/>
@@ -36191,7 +36269,7 @@
         <p:spPr>
           <a:xfrm>
             <a:off x="4362840" y="6031080"/>
-            <a:ext cx="3468960" cy="182520"/>
+            <a:ext cx="3468600" cy="182160"/>
           </a:xfrm>
           <a:prstGeom prst="rect">
             <a:avLst/>
@@ -36243,7 +36321,7 @@
         <p:spPr>
           <a:xfrm>
             <a:off x="4339800" y="6216480"/>
-            <a:ext cx="3515400" cy="293760"/>
+            <a:ext cx="3515040" cy="293400"/>
           </a:xfrm>
           <a:prstGeom prst="rect">
             <a:avLst/>
@@ -36295,7 +36373,7 @@
         <p:spPr>
           <a:xfrm>
             <a:off x="4362840" y="6512760"/>
-            <a:ext cx="3468960" cy="182520"/>
+            <a:ext cx="3468600" cy="182160"/>
           </a:xfrm>
           <a:prstGeom prst="rect">
             <a:avLst/>
@@ -36347,7 +36425,7 @@
         <p:spPr>
           <a:xfrm>
             <a:off x="8110080" y="5582160"/>
-            <a:ext cx="3709800" cy="1265760"/>
+            <a:ext cx="3709440" cy="1265400"/>
           </a:xfrm>
           <a:custGeom>
             <a:avLst/>
@@ -36421,7 +36499,7 @@
         <p:spPr>
           <a:xfrm>
             <a:off x="9826200" y="5734800"/>
-            <a:ext cx="275040" cy="219600"/>
+            <a:ext cx="274680" cy="219240"/>
           </a:xfrm>
           <a:custGeom>
             <a:avLst/>
@@ -36709,7 +36787,7 @@
         <p:spPr>
           <a:xfrm>
             <a:off x="8230320" y="6031080"/>
-            <a:ext cx="3468960" cy="182520"/>
+            <a:ext cx="3468600" cy="182160"/>
           </a:xfrm>
           <a:prstGeom prst="rect">
             <a:avLst/>
@@ -36761,7 +36839,7 @@
         <p:spPr>
           <a:xfrm>
             <a:off x="8207280" y="6216480"/>
-            <a:ext cx="3515400" cy="293760"/>
+            <a:ext cx="3515040" cy="293400"/>
           </a:xfrm>
           <a:prstGeom prst="rect">
             <a:avLst/>
@@ -36813,7 +36891,7 @@
         <p:spPr>
           <a:xfrm>
             <a:off x="8230320" y="6512760"/>
-            <a:ext cx="3468960" cy="182520"/>
+            <a:ext cx="3468600" cy="182160"/>
           </a:xfrm>
           <a:prstGeom prst="rect">
             <a:avLst/>
@@ -36902,7 +36980,7 @@
         <p:spPr>
           <a:xfrm>
             <a:off x="0" y="0"/>
-            <a:ext cx="12189600" cy="6855840"/>
+            <a:ext cx="12189240" cy="6855480"/>
           </a:xfrm>
           <a:prstGeom prst="roundRect">
             <a:avLst>
@@ -36934,7 +37012,7 @@
         <p:spPr>
           <a:xfrm>
             <a:off x="0" y="0"/>
-            <a:ext cx="12189600" cy="6855840"/>
+            <a:ext cx="12189240" cy="6855480"/>
           </a:xfrm>
           <a:custGeom>
             <a:avLst/>
@@ -36997,7 +37075,7 @@
         <p:spPr>
           <a:xfrm>
             <a:off x="344520" y="344520"/>
-            <a:ext cx="11560320" cy="169920"/>
+            <a:ext cx="11559960" cy="169560"/>
           </a:xfrm>
           <a:prstGeom prst="rect">
             <a:avLst/>
@@ -37025,7 +37103,7 @@
               <a:buNone/>
             </a:pPr>
             <a:r>
-              <a:rPr b="1" lang="en-US" sz="950" spc="29" strike="noStrike">
+              <a:rPr b="1" lang="en-US" sz="950" spc="26" strike="noStrike">
                 <a:solidFill>
                   <a:srgbClr val="6366f1"/>
                 </a:solidFill>
@@ -37049,7 +37127,7 @@
         <p:spPr>
           <a:xfrm>
             <a:off x="344520" y="586080"/>
-            <a:ext cx="11655360" cy="342000"/>
+            <a:ext cx="11655000" cy="341640"/>
           </a:xfrm>
           <a:prstGeom prst="rect">
             <a:avLst/>
@@ -37101,7 +37179,7 @@
         <p:spPr>
           <a:xfrm>
             <a:off x="344520" y="999360"/>
-            <a:ext cx="11568960" cy="204120"/>
+            <a:ext cx="11568600" cy="203760"/>
           </a:xfrm>
           <a:prstGeom prst="rect">
             <a:avLst/>
@@ -37153,7 +37231,7 @@
         <p:spPr>
           <a:xfrm>
             <a:off x="348840" y="1348560"/>
-            <a:ext cx="5675760" cy="2763360"/>
+            <a:ext cx="5675400" cy="2763000"/>
           </a:xfrm>
           <a:custGeom>
             <a:avLst/>
@@ -37229,7 +37307,7 @@
         <p:spPr>
           <a:xfrm>
             <a:off x="525600" y="1524960"/>
-            <a:ext cx="411120" cy="411120"/>
+            <a:ext cx="410760" cy="410760"/>
           </a:xfrm>
           <a:custGeom>
             <a:avLst/>
@@ -37302,7 +37380,7 @@
         <p:spPr>
           <a:xfrm>
             <a:off x="635400" y="1645560"/>
-            <a:ext cx="191520" cy="169920"/>
+            <a:ext cx="191160" cy="169560"/>
           </a:xfrm>
           <a:custGeom>
             <a:avLst/>
@@ -37427,7 +37505,7 @@
         <p:spPr>
           <a:xfrm>
             <a:off x="1042560" y="1611360"/>
-            <a:ext cx="1505160" cy="238680"/>
+            <a:ext cx="1504800" cy="238320"/>
           </a:xfrm>
           <a:prstGeom prst="rect">
             <a:avLst/>
@@ -37479,7 +37557,7 @@
         <p:spPr>
           <a:xfrm>
             <a:off x="525600" y="2076480"/>
-            <a:ext cx="5322240" cy="549000"/>
+            <a:ext cx="5321880" cy="548640"/>
           </a:xfrm>
           <a:custGeom>
             <a:avLst/>
@@ -37550,7 +37628,7 @@
         <p:spPr>
           <a:xfrm>
             <a:off x="654840" y="2214360"/>
-            <a:ext cx="118080" cy="135360"/>
+            <a:ext cx="117720" cy="135000"/>
           </a:xfrm>
           <a:custGeom>
             <a:avLst/>
@@ -37705,7 +37783,7 @@
         <p:spPr>
           <a:xfrm>
             <a:off x="904680" y="2179800"/>
-            <a:ext cx="3263040" cy="169920"/>
+            <a:ext cx="3262680" cy="169560"/>
           </a:xfrm>
           <a:prstGeom prst="rect">
             <a:avLst/>
@@ -37757,7 +37835,7 @@
         <p:spPr>
           <a:xfrm>
             <a:off x="904680" y="2352240"/>
-            <a:ext cx="3263040" cy="169920"/>
+            <a:ext cx="3262680" cy="169560"/>
           </a:xfrm>
           <a:prstGeom prst="rect">
             <a:avLst/>
@@ -37809,7 +37887,7 @@
         <p:spPr>
           <a:xfrm>
             <a:off x="525600" y="2731320"/>
-            <a:ext cx="5322240" cy="549000"/>
+            <a:ext cx="5321880" cy="548640"/>
           </a:xfrm>
           <a:custGeom>
             <a:avLst/>
@@ -37880,7 +37958,7 @@
         <p:spPr>
           <a:xfrm>
             <a:off x="646200" y="2869200"/>
-            <a:ext cx="135360" cy="135360"/>
+            <a:ext cx="135000" cy="135000"/>
           </a:xfrm>
           <a:custGeom>
             <a:avLst/>
@@ -38030,7 +38108,7 @@
         <p:spPr>
           <a:xfrm>
             <a:off x="904680" y="2834640"/>
-            <a:ext cx="3168360" cy="169920"/>
+            <a:ext cx="3168000" cy="169560"/>
           </a:xfrm>
           <a:prstGeom prst="rect">
             <a:avLst/>
@@ -38082,7 +38160,7 @@
         <p:spPr>
           <a:xfrm>
             <a:off x="904680" y="3007080"/>
-            <a:ext cx="3168360" cy="169920"/>
+            <a:ext cx="3168000" cy="169560"/>
           </a:xfrm>
           <a:prstGeom prst="rect">
             <a:avLst/>
@@ -38134,7 +38212,7 @@
         <p:spPr>
           <a:xfrm>
             <a:off x="525600" y="3386160"/>
-            <a:ext cx="5322240" cy="549000"/>
+            <a:ext cx="5321880" cy="548640"/>
           </a:xfrm>
           <a:custGeom>
             <a:avLst/>
@@ -38205,7 +38283,7 @@
         <p:spPr>
           <a:xfrm>
             <a:off x="637560" y="3524040"/>
-            <a:ext cx="152640" cy="135360"/>
+            <a:ext cx="152280" cy="135000"/>
           </a:xfrm>
           <a:custGeom>
             <a:avLst/>
@@ -38312,7 +38390,7 @@
         <p:spPr>
           <a:xfrm>
             <a:off x="904680" y="3489480"/>
-            <a:ext cx="2806200" cy="169920"/>
+            <a:ext cx="2805840" cy="169560"/>
           </a:xfrm>
           <a:prstGeom prst="rect">
             <a:avLst/>
@@ -38364,7 +38442,7 @@
         <p:spPr>
           <a:xfrm>
             <a:off x="904680" y="3661920"/>
-            <a:ext cx="2806200" cy="169920"/>
+            <a:ext cx="2805840" cy="169560"/>
           </a:xfrm>
           <a:prstGeom prst="rect">
             <a:avLst/>
@@ -38416,7 +38494,7 @@
         <p:spPr>
           <a:xfrm>
             <a:off x="6169680" y="1348560"/>
-            <a:ext cx="5675760" cy="2763360"/>
+            <a:ext cx="5675400" cy="2763000"/>
           </a:xfrm>
           <a:custGeom>
             <a:avLst/>
@@ -38492,7 +38570,7 @@
         <p:spPr>
           <a:xfrm>
             <a:off x="6346440" y="1524960"/>
-            <a:ext cx="411120" cy="411120"/>
+            <a:ext cx="410760" cy="410760"/>
           </a:xfrm>
           <a:custGeom>
             <a:avLst/>
@@ -38565,7 +38643,7 @@
         <p:spPr>
           <a:xfrm>
             <a:off x="6445440" y="1645560"/>
-            <a:ext cx="212760" cy="169920"/>
+            <a:ext cx="212400" cy="169560"/>
           </a:xfrm>
           <a:custGeom>
             <a:avLst/>
@@ -38746,7 +38824,7 @@
         <p:spPr>
           <a:xfrm>
             <a:off x="6863400" y="1611360"/>
-            <a:ext cx="1177920" cy="238680"/>
+            <a:ext cx="1177560" cy="238320"/>
           </a:xfrm>
           <a:prstGeom prst="rect">
             <a:avLst/>
@@ -38798,7 +38876,7 @@
         <p:spPr>
           <a:xfrm>
             <a:off x="6346440" y="2076480"/>
-            <a:ext cx="5322240" cy="549000"/>
+            <a:ext cx="5321880" cy="548640"/>
           </a:xfrm>
           <a:custGeom>
             <a:avLst/>
@@ -38869,7 +38947,7 @@
         <p:spPr>
           <a:xfrm>
             <a:off x="6475680" y="2214360"/>
-            <a:ext cx="118080" cy="135360"/>
+            <a:ext cx="117720" cy="135000"/>
           </a:xfrm>
           <a:custGeom>
             <a:avLst/>
@@ -38966,7 +39044,7 @@
         <p:spPr>
           <a:xfrm>
             <a:off x="6725520" y="2179800"/>
-            <a:ext cx="2797920" cy="169920"/>
+            <a:ext cx="2797560" cy="169560"/>
           </a:xfrm>
           <a:prstGeom prst="rect">
             <a:avLst/>
@@ -39018,7 +39096,7 @@
         <p:spPr>
           <a:xfrm>
             <a:off x="6725520" y="2352240"/>
-            <a:ext cx="2797920" cy="169920"/>
+            <a:ext cx="2797560" cy="169560"/>
           </a:xfrm>
           <a:prstGeom prst="rect">
             <a:avLst/>
@@ -39070,7 +39148,7 @@
         <p:spPr>
           <a:xfrm>
             <a:off x="6346440" y="2731320"/>
-            <a:ext cx="5322240" cy="549000"/>
+            <a:ext cx="5321880" cy="548640"/>
           </a:xfrm>
           <a:custGeom>
             <a:avLst/>
@@ -39141,7 +39219,7 @@
         <p:spPr>
           <a:xfrm>
             <a:off x="6449760" y="2869200"/>
-            <a:ext cx="169920" cy="135360"/>
+            <a:ext cx="169560" cy="135000"/>
           </a:xfrm>
           <a:custGeom>
             <a:avLst/>
@@ -39357,7 +39435,7 @@
         <p:spPr>
           <a:xfrm>
             <a:off x="6725520" y="2834640"/>
-            <a:ext cx="2875320" cy="169920"/>
+            <a:ext cx="2874960" cy="169560"/>
           </a:xfrm>
           <a:prstGeom prst="rect">
             <a:avLst/>
@@ -39409,7 +39487,7 @@
         <p:spPr>
           <a:xfrm>
             <a:off x="6725520" y="3007080"/>
-            <a:ext cx="2875320" cy="169920"/>
+            <a:ext cx="2874960" cy="169560"/>
           </a:xfrm>
           <a:prstGeom prst="rect">
             <a:avLst/>
@@ -39461,7 +39539,7 @@
         <p:spPr>
           <a:xfrm>
             <a:off x="6346440" y="3386160"/>
-            <a:ext cx="5322240" cy="549000"/>
+            <a:ext cx="5321880" cy="548640"/>
           </a:xfrm>
           <a:custGeom>
             <a:avLst/>
@@ -39532,7 +39610,7 @@
         <p:spPr>
           <a:xfrm>
             <a:off x="6467040" y="3524040"/>
-            <a:ext cx="135360" cy="135360"/>
+            <a:ext cx="135000" cy="135000"/>
           </a:xfrm>
           <a:custGeom>
             <a:avLst/>
@@ -39665,7 +39743,7 @@
         <p:spPr>
           <a:xfrm>
             <a:off x="6725520" y="3489480"/>
-            <a:ext cx="2435760" cy="169920"/>
+            <a:ext cx="2435400" cy="169560"/>
           </a:xfrm>
           <a:prstGeom prst="rect">
             <a:avLst/>
@@ -39717,7 +39795,7 @@
         <p:spPr>
           <a:xfrm>
             <a:off x="6725520" y="3661920"/>
-            <a:ext cx="2435760" cy="169920"/>
+            <a:ext cx="2435400" cy="169560"/>
           </a:xfrm>
           <a:prstGeom prst="rect">
             <a:avLst/>
@@ -39769,7 +39847,7 @@
         <p:spPr>
           <a:xfrm>
             <a:off x="348840" y="4260600"/>
-            <a:ext cx="5675760" cy="2590920"/>
+            <a:ext cx="5675400" cy="2590560"/>
           </a:xfrm>
           <a:custGeom>
             <a:avLst/>
@@ -39845,7 +39923,7 @@
         <p:spPr>
           <a:xfrm>
             <a:off x="525600" y="4437360"/>
-            <a:ext cx="411120" cy="411120"/>
+            <a:ext cx="410760" cy="410760"/>
           </a:xfrm>
           <a:custGeom>
             <a:avLst/>
@@ -39918,7 +39996,7 @@
         <p:spPr>
           <a:xfrm>
             <a:off x="646200" y="4557960"/>
-            <a:ext cx="169920" cy="169920"/>
+            <a:ext cx="169560" cy="169560"/>
           </a:xfrm>
           <a:custGeom>
             <a:avLst/>
@@ -40141,7 +40219,7 @@
         <p:spPr>
           <a:xfrm>
             <a:off x="1042560" y="4523400"/>
-            <a:ext cx="1643040" cy="238680"/>
+            <a:ext cx="1642680" cy="238320"/>
           </a:xfrm>
           <a:prstGeom prst="rect">
             <a:avLst/>
@@ -40193,7 +40271,7 @@
         <p:spPr>
           <a:xfrm>
             <a:off x="525600" y="4988880"/>
-            <a:ext cx="5322240" cy="617760"/>
+            <a:ext cx="5321880" cy="617400"/>
           </a:xfrm>
           <a:custGeom>
             <a:avLst/>
@@ -40264,7 +40342,7 @@
         <p:spPr>
           <a:xfrm>
             <a:off x="628920" y="5092200"/>
-            <a:ext cx="5175720" cy="169920"/>
+            <a:ext cx="5175360" cy="169560"/>
           </a:xfrm>
           <a:prstGeom prst="rect">
             <a:avLst/>
@@ -40316,7 +40394,7 @@
         <p:spPr>
           <a:xfrm>
             <a:off x="628920" y="5333400"/>
-            <a:ext cx="5175720" cy="169920"/>
+            <a:ext cx="5175360" cy="169560"/>
           </a:xfrm>
           <a:prstGeom prst="rect">
             <a:avLst/>
@@ -40368,7 +40446,7 @@
         <p:spPr>
           <a:xfrm>
             <a:off x="525600" y="5712480"/>
-            <a:ext cx="2608200" cy="617760"/>
+            <a:ext cx="2607840" cy="617400"/>
           </a:xfrm>
           <a:custGeom>
             <a:avLst/>
@@ -40439,7 +40517,7 @@
         <p:spPr>
           <a:xfrm>
             <a:off x="577440" y="5815800"/>
-            <a:ext cx="2504880" cy="273240"/>
+            <a:ext cx="2504520" cy="272880"/>
           </a:xfrm>
           <a:prstGeom prst="rect">
             <a:avLst/>
@@ -40491,7 +40569,7 @@
         <p:spPr>
           <a:xfrm>
             <a:off x="603000" y="6091560"/>
-            <a:ext cx="2453040" cy="135360"/>
+            <a:ext cx="2452680" cy="135000"/>
           </a:xfrm>
           <a:prstGeom prst="rect">
             <a:avLst/>
@@ -40543,7 +40621,7 @@
         <p:spPr>
           <a:xfrm>
             <a:off x="3237840" y="5712480"/>
-            <a:ext cx="2608200" cy="617760"/>
+            <a:ext cx="2607840" cy="617400"/>
           </a:xfrm>
           <a:custGeom>
             <a:avLst/>
@@ -40614,7 +40692,7 @@
         <p:spPr>
           <a:xfrm>
             <a:off x="3289320" y="5815800"/>
-            <a:ext cx="2504880" cy="273240"/>
+            <a:ext cx="2504520" cy="272880"/>
           </a:xfrm>
           <a:prstGeom prst="rect">
             <a:avLst/>
@@ -40666,7 +40744,7 @@
         <p:spPr>
           <a:xfrm>
             <a:off x="3315240" y="6091560"/>
-            <a:ext cx="2453040" cy="135360"/>
+            <a:ext cx="2452680" cy="135000"/>
           </a:xfrm>
           <a:prstGeom prst="rect">
             <a:avLst/>
@@ -40718,7 +40796,7 @@
         <p:spPr>
           <a:xfrm>
             <a:off x="6169680" y="4260600"/>
-            <a:ext cx="5675760" cy="2590920"/>
+            <a:ext cx="5675400" cy="2590560"/>
           </a:xfrm>
           <a:custGeom>
             <a:avLst/>
@@ -40794,7 +40872,7 @@
         <p:spPr>
           <a:xfrm>
             <a:off x="6346440" y="4437360"/>
-            <a:ext cx="411120" cy="411120"/>
+            <a:ext cx="410760" cy="410760"/>
           </a:xfrm>
           <a:custGeom>
             <a:avLst/>
@@ -40867,7 +40945,7 @@
         <p:spPr>
           <a:xfrm>
             <a:off x="6467040" y="4557960"/>
-            <a:ext cx="169920" cy="169920"/>
+            <a:ext cx="169560" cy="169560"/>
           </a:xfrm>
           <a:custGeom>
             <a:avLst/>
@@ -40970,7 +41048,7 @@
         <p:spPr>
           <a:xfrm>
             <a:off x="6863400" y="4523400"/>
-            <a:ext cx="1384560" cy="238680"/>
+            <a:ext cx="1384200" cy="238320"/>
           </a:xfrm>
           <a:prstGeom prst="rect">
             <a:avLst/>
@@ -41022,7 +41100,7 @@
         <p:spPr>
           <a:xfrm>
             <a:off x="6346440" y="4988880"/>
-            <a:ext cx="5322240" cy="790200"/>
+            <a:ext cx="5321880" cy="789840"/>
           </a:xfrm>
           <a:custGeom>
             <a:avLst/>
@@ -41093,7 +41171,7 @@
         <p:spPr>
           <a:xfrm>
             <a:off x="6467040" y="5109480"/>
-            <a:ext cx="135360" cy="135360"/>
+            <a:ext cx="135000" cy="135000"/>
           </a:xfrm>
           <a:custGeom>
             <a:avLst/>
@@ -41270,7 +41348,7 @@
         <p:spPr>
           <a:xfrm>
             <a:off x="6690960" y="5092200"/>
-            <a:ext cx="1738080" cy="169920"/>
+            <a:ext cx="1737720" cy="169560"/>
           </a:xfrm>
           <a:prstGeom prst="rect">
             <a:avLst/>
@@ -41322,7 +41400,7 @@
         <p:spPr>
           <a:xfrm>
             <a:off x="6449760" y="5333400"/>
-            <a:ext cx="5175720" cy="342000"/>
+            <a:ext cx="5175360" cy="341640"/>
           </a:xfrm>
           <a:prstGeom prst="rect">
             <a:avLst/>
@@ -41374,7 +41452,7 @@
         <p:spPr>
           <a:xfrm>
             <a:off x="6346440" y="5884920"/>
-            <a:ext cx="5322240" cy="790200"/>
+            <a:ext cx="5321880" cy="789840"/>
           </a:xfrm>
           <a:custGeom>
             <a:avLst/>
@@ -41445,7 +41523,7 @@
         <p:spPr>
           <a:xfrm>
             <a:off x="6449760" y="5988240"/>
-            <a:ext cx="5175720" cy="169920"/>
+            <a:ext cx="5175360" cy="169560"/>
           </a:xfrm>
           <a:prstGeom prst="rect">
             <a:avLst/>
@@ -41497,7 +41575,7 @@
         <p:spPr>
           <a:xfrm>
             <a:off x="6449760" y="6229440"/>
-            <a:ext cx="5175720" cy="342000"/>
+            <a:ext cx="5175360" cy="341640"/>
           </a:xfrm>
           <a:prstGeom prst="rect">
             <a:avLst/>

--- a/assets/libreoffice_impr_njc/d6ba6b61-5ce3-46c0-90c0-f635d3a1a8eb/Tencent Holdings Limited - 2025 Interim Report.pptx
+++ b/assets/libreoffice_impr_njc/d6ba6b61-5ce3-46c0-90c0-f635d3a1a8eb/Tencent Holdings Limited - 2025 Interim Report.pptx
@@ -303,7 +303,7 @@
             <a:pPr algn="r">
               <a:buNone/>
             </a:pPr>
-            <a:fld id="{72EC8996-DC00-43FA-AFF2-D32B025CB1DB}" type="slidenum">
+            <a:fld id="{04F589DF-CA1D-4F8A-8FC2-E190E73F66DF}" type="slidenum">
               <a:rPr b="0" lang="en-HK" sz="1400" spc="-1" strike="noStrike">
                 <a:latin typeface="Times New Roman"/>
               </a:rPr>
@@ -340,7 +340,7 @@
       </p:grpSpPr>
       <p:sp>
         <p:nvSpPr>
-          <p:cNvPr id="605" name="PlaceHolder 1"/>
+          <p:cNvPr id="606" name="PlaceHolder 1"/>
           <p:cNvSpPr>
             <a:spLocks noGrp="1"/>
           </p:cNvSpPr>
@@ -351,19 +351,19 @@
         <p:spPr>
           <a:xfrm>
             <a:off x="685800" y="1143000"/>
-            <a:ext cx="5483520" cy="3083400"/>
-          </a:xfrm>
-          <a:prstGeom prst="rect">
-            <a:avLst/>
-          </a:prstGeom>
-          <a:ln w="0">
-            <a:noFill/>
-          </a:ln>
-        </p:spPr>
-      </p:sp>
-      <p:sp>
-        <p:nvSpPr>
-          <p:cNvPr id="606" name="PlaceHolder 2"/>
+            <a:ext cx="5481720" cy="3081600"/>
+          </a:xfrm>
+          <a:prstGeom prst="rect">
+            <a:avLst/>
+          </a:prstGeom>
+          <a:ln w="0">
+            <a:noFill/>
+          </a:ln>
+        </p:spPr>
+      </p:sp>
+      <p:sp>
+        <p:nvSpPr>
+          <p:cNvPr id="607" name="PlaceHolder 2"/>
           <p:cNvSpPr>
             <a:spLocks noGrp="1"/>
           </p:cNvSpPr>
@@ -374,7 +374,7 @@
         <p:spPr>
           <a:xfrm>
             <a:off x="685800" y="4400640"/>
-            <a:ext cx="5483520" cy="3597480"/>
+            <a:ext cx="5481720" cy="3595680"/>
           </a:xfrm>
           <a:prstGeom prst="rect">
             <a:avLst/>
@@ -397,7 +397,7 @@
       </p:sp>
       <p:sp>
         <p:nvSpPr>
-          <p:cNvPr id="607" name="PlaceHolder 3"/>
+          <p:cNvPr id="608" name="PlaceHolder 3"/>
           <p:cNvSpPr>
             <a:spLocks noGrp="1"/>
           </p:cNvSpPr>
@@ -408,7 +408,7 @@
         <p:spPr>
           <a:xfrm>
             <a:off x="3884760" y="8685360"/>
-            <a:ext cx="2968920" cy="455760"/>
+            <a:ext cx="2967120" cy="453960"/>
           </a:xfrm>
           <a:prstGeom prst="rect">
             <a:avLst/>
@@ -440,7 +440,7 @@
               </a:lnSpc>
               <a:buNone/>
             </a:pPr>
-            <a:fld id="{2BA2D8EF-A60A-4CDF-A789-9BB5B4B9D0FF}" type="slidenum">
+            <a:fld id="{3EEEC97D-496C-4673-918C-36E7ACCB164C}" type="slidenum">
               <a:rPr b="0" lang="en-US" sz="1200" spc="-1" strike="noStrike">
                 <a:latin typeface="Times New Roman"/>
               </a:rPr>
@@ -487,7 +487,7 @@
         <p:spPr>
           <a:xfrm>
             <a:off x="685800" y="1143000"/>
-            <a:ext cx="5483520" cy="3083400"/>
+            <a:ext cx="5481720" cy="3081600"/>
           </a:xfrm>
           <a:prstGeom prst="rect">
             <a:avLst/>
@@ -510,7 +510,7 @@
         <p:spPr>
           <a:xfrm>
             <a:off x="685800" y="4400640"/>
-            <a:ext cx="5483520" cy="3597480"/>
+            <a:ext cx="5481720" cy="3595680"/>
           </a:xfrm>
           <a:prstGeom prst="rect">
             <a:avLst/>
@@ -544,7 +544,7 @@
         <p:spPr>
           <a:xfrm>
             <a:off x="3884760" y="8685360"/>
-            <a:ext cx="2968920" cy="455760"/>
+            <a:ext cx="2967120" cy="453960"/>
           </a:xfrm>
           <a:prstGeom prst="rect">
             <a:avLst/>
@@ -576,7 +576,7 @@
               </a:lnSpc>
               <a:buNone/>
             </a:pPr>
-            <a:fld id="{B987DFA8-8F39-4367-8BDE-53F50332EF86}" type="slidenum">
+            <a:fld id="{0483A2A6-1459-48CF-9D21-E04EDEA92AA0}" type="slidenum">
               <a:rPr b="0" lang="en-US" sz="1200" spc="-1" strike="noStrike">
                 <a:latin typeface="Times New Roman"/>
               </a:rPr>
@@ -623,7 +623,7 @@
         <p:spPr>
           <a:xfrm>
             <a:off x="685800" y="1143000"/>
-            <a:ext cx="5483520" cy="3083400"/>
+            <a:ext cx="5481720" cy="3081600"/>
           </a:xfrm>
           <a:prstGeom prst="rect">
             <a:avLst/>
@@ -646,7 +646,7 @@
         <p:spPr>
           <a:xfrm>
             <a:off x="685800" y="4400640"/>
-            <a:ext cx="5483520" cy="3597480"/>
+            <a:ext cx="5481720" cy="3595680"/>
           </a:xfrm>
           <a:prstGeom prst="rect">
             <a:avLst/>
@@ -680,7 +680,7 @@
         <p:spPr>
           <a:xfrm>
             <a:off x="3884760" y="8685360"/>
-            <a:ext cx="2968920" cy="455760"/>
+            <a:ext cx="2967120" cy="453960"/>
           </a:xfrm>
           <a:prstGeom prst="rect">
             <a:avLst/>
@@ -712,7 +712,7 @@
               </a:lnSpc>
               <a:buNone/>
             </a:pPr>
-            <a:fld id="{D238AB06-DB77-4AB0-874D-E1B17ADDAFD4}" type="slidenum">
+            <a:fld id="{A6AE666C-AB63-498A-BB52-914F1BF9A6C8}" type="slidenum">
               <a:rPr b="0" lang="en-US" sz="1200" spc="-1" strike="noStrike">
                 <a:latin typeface="Times New Roman"/>
               </a:rPr>
@@ -759,7 +759,7 @@
         <p:spPr>
           <a:xfrm>
             <a:off x="685800" y="1143000"/>
-            <a:ext cx="5483520" cy="3083400"/>
+            <a:ext cx="5481720" cy="3081600"/>
           </a:xfrm>
           <a:prstGeom prst="rect">
             <a:avLst/>
@@ -782,7 +782,7 @@
         <p:spPr>
           <a:xfrm>
             <a:off x="685800" y="4400640"/>
-            <a:ext cx="5483520" cy="3597480"/>
+            <a:ext cx="5481720" cy="3595680"/>
           </a:xfrm>
           <a:prstGeom prst="rect">
             <a:avLst/>
@@ -816,7 +816,7 @@
         <p:spPr>
           <a:xfrm>
             <a:off x="3884760" y="8685360"/>
-            <a:ext cx="2968920" cy="455760"/>
+            <a:ext cx="2967120" cy="453960"/>
           </a:xfrm>
           <a:prstGeom prst="rect">
             <a:avLst/>
@@ -848,7 +848,7 @@
               </a:lnSpc>
               <a:buNone/>
             </a:pPr>
-            <a:fld id="{FF4DA5C6-9095-4965-AA32-EFAA5230183D}" type="slidenum">
+            <a:fld id="{8491A957-D579-43DF-ADF0-6D136C159F5F}" type="slidenum">
               <a:rPr b="0" lang="en-US" sz="1200" spc="-1" strike="noStrike">
                 <a:latin typeface="Times New Roman"/>
               </a:rPr>
@@ -884,7 +884,7 @@
       </p:grpSpPr>
       <p:sp>
         <p:nvSpPr>
-          <p:cNvPr id="608" name="PlaceHolder 1"/>
+          <p:cNvPr id="609" name="PlaceHolder 1"/>
           <p:cNvSpPr>
             <a:spLocks noGrp="1"/>
           </p:cNvSpPr>
@@ -895,19 +895,19 @@
         <p:spPr>
           <a:xfrm>
             <a:off x="685800" y="1143000"/>
-            <a:ext cx="5483520" cy="3083400"/>
-          </a:xfrm>
-          <a:prstGeom prst="rect">
-            <a:avLst/>
-          </a:prstGeom>
-          <a:ln w="0">
-            <a:noFill/>
-          </a:ln>
-        </p:spPr>
-      </p:sp>
-      <p:sp>
-        <p:nvSpPr>
-          <p:cNvPr id="609" name="PlaceHolder 2"/>
+            <a:ext cx="5481720" cy="3081600"/>
+          </a:xfrm>
+          <a:prstGeom prst="rect">
+            <a:avLst/>
+          </a:prstGeom>
+          <a:ln w="0">
+            <a:noFill/>
+          </a:ln>
+        </p:spPr>
+      </p:sp>
+      <p:sp>
+        <p:nvSpPr>
+          <p:cNvPr id="610" name="PlaceHolder 2"/>
           <p:cNvSpPr>
             <a:spLocks noGrp="1"/>
           </p:cNvSpPr>
@@ -918,7 +918,7 @@
         <p:spPr>
           <a:xfrm>
             <a:off x="685800" y="4400640"/>
-            <a:ext cx="5483520" cy="3597480"/>
+            <a:ext cx="5481720" cy="3595680"/>
           </a:xfrm>
           <a:prstGeom prst="rect">
             <a:avLst/>
@@ -941,7 +941,7 @@
       </p:sp>
       <p:sp>
         <p:nvSpPr>
-          <p:cNvPr id="610" name="PlaceHolder 3"/>
+          <p:cNvPr id="611" name="PlaceHolder 3"/>
           <p:cNvSpPr>
             <a:spLocks noGrp="1"/>
           </p:cNvSpPr>
@@ -952,7 +952,7 @@
         <p:spPr>
           <a:xfrm>
             <a:off x="3884760" y="8685360"/>
-            <a:ext cx="2968920" cy="455760"/>
+            <a:ext cx="2967120" cy="453960"/>
           </a:xfrm>
           <a:prstGeom prst="rect">
             <a:avLst/>
@@ -984,7 +984,7 @@
               </a:lnSpc>
               <a:buNone/>
             </a:pPr>
-            <a:fld id="{29C7607C-DA96-40C1-B76F-7E7AE75EC58C}" type="slidenum">
+            <a:fld id="{6FEDCC25-CF9B-4B6F-A090-F7E7CAD11BAB}" type="slidenum">
               <a:rPr b="0" lang="en-US" sz="1200" spc="-1" strike="noStrike">
                 <a:latin typeface="Times New Roman"/>
               </a:rPr>
@@ -1020,7 +1020,7 @@
       </p:grpSpPr>
       <p:sp>
         <p:nvSpPr>
-          <p:cNvPr id="611" name="PlaceHolder 1"/>
+          <p:cNvPr id="612" name="PlaceHolder 1"/>
           <p:cNvSpPr>
             <a:spLocks noGrp="1"/>
           </p:cNvSpPr>
@@ -1031,164 +1031,19 @@
         <p:spPr>
           <a:xfrm>
             <a:off x="685800" y="1143000"/>
-            <a:ext cx="5483520" cy="3083400"/>
-          </a:xfrm>
-          <a:prstGeom prst="rect">
-            <a:avLst/>
-          </a:prstGeom>
-          <a:ln w="0">
-            <a:noFill/>
-          </a:ln>
-        </p:spPr>
-      </p:sp>
-      <p:sp>
-        <p:nvSpPr>
-          <p:cNvPr id="612" name="PlaceHolder 2"/>
-          <p:cNvSpPr>
-            <a:spLocks noGrp="1"/>
-          </p:cNvSpPr>
-          <p:nvPr>
-            <p:ph type="body"/>
-          </p:nvPr>
-        </p:nvSpPr>
-        <p:spPr>
-          <a:xfrm>
-            <a:off x="685800" y="4400640"/>
-            <a:ext cx="5483520" cy="3597480"/>
-          </a:xfrm>
-          <a:prstGeom prst="rect">
-            <a:avLst/>
-          </a:prstGeom>
-          <a:noFill/>
-          <a:ln w="0">
-            <a:noFill/>
-          </a:ln>
-        </p:spPr>
-        <p:txBody>
-          <a:bodyPr lIns="0" rIns="0" tIns="0" bIns="0" anchor="t">
-            <a:noAutofit/>
-          </a:bodyPr>
-          <a:p>
-            <a:pPr marL="216000" indent="-216000">
-              <a:lnSpc>
-                <a:spcPct val="100000"/>
-              </a:lnSpc>
-              <a:buNone/>
-              <a:tabLst>
-                <a:tab algn="l" pos="0"/>
-              </a:tabLst>
-            </a:pPr>
-            <a:r>
-              <a:rPr b="0" lang="en-HK" sz="1800" spc="-1" strike="noStrike">
-                <a:solidFill>
-                  <a:srgbClr val="00008b"/>
-                </a:solidFill>
-                <a:latin typeface="Arial"/>
-              </a:rPr>
-              <a:t>Emphasis: 15% </a:t>
-            </a:r>
-            <a:r>
-              <a:rPr b="0" lang="en-HK" sz="1800" spc="-1" strike="noStrike">
-                <a:solidFill>
-                  <a:srgbClr val="00008b"/>
-                </a:solidFill>
-                <a:latin typeface="Arial"/>
-              </a:rPr>
-              <a:t>revenue </a:t>
-            </a:r>
-            <a:r>
-              <a:rPr b="0" lang="en-HK" sz="1800" spc="-1" strike="noStrike">
-                <a:solidFill>
-                  <a:srgbClr val="00008b"/>
-                </a:solidFill>
-                <a:latin typeface="Arial"/>
-              </a:rPr>
-              <a:t>growth </a:t>
-            </a:r>
-            <a:r>
-              <a:rPr b="0" lang="en-HK" sz="1800" spc="-1" strike="noStrike">
-                <a:solidFill>
-                  <a:srgbClr val="00008b"/>
-                </a:solidFill>
-                <a:latin typeface="Arial"/>
-              </a:rPr>
-              <a:t>demonstrates </a:t>
-            </a:r>
-            <a:r>
-              <a:rPr b="0" lang="en-HK" sz="1800" spc="-1" strike="noStrike">
-                <a:solidFill>
-                  <a:srgbClr val="00008b"/>
-                </a:solidFill>
-                <a:latin typeface="Arial"/>
-              </a:rPr>
-              <a:t>continued </a:t>
-            </a:r>
-            <a:r>
-              <a:rPr b="0" lang="en-HK" sz="1800" spc="-1" strike="noStrike">
-                <a:solidFill>
-                  <a:srgbClr val="00008b"/>
-                </a:solidFill>
-                <a:latin typeface="Arial"/>
-              </a:rPr>
-              <a:t>monetiz.ation </a:t>
-            </a:r>
-            <a:r>
-              <a:rPr b="0" lang="en-HK" sz="1800" spc="-1" strike="noStrike">
-                <a:solidFill>
-                  <a:srgbClr val="00008b"/>
-                </a:solidFill>
-                <a:latin typeface="Arial"/>
-              </a:rPr>
-              <a:t>strength. </a:t>
-            </a:r>
-            <a:r>
-              <a:rPr b="0" lang="en-HK" sz="1800" spc="-1" strike="noStrike">
-                <a:solidFill>
-                  <a:srgbClr val="00008b"/>
-                </a:solidFill>
-                <a:latin typeface="Arial"/>
-              </a:rPr>
-              <a:t>WeChat MAU </a:t>
-            </a:r>
-            <a:r>
-              <a:rPr b="0" lang="en-HK" sz="1800" spc="-1" strike="noStrike">
-                <a:solidFill>
-                  <a:srgbClr val="00008b"/>
-                </a:solidFill>
-                <a:latin typeface="Arial"/>
-              </a:rPr>
-              <a:t>milestone of </a:t>
-            </a:r>
-            <a:r>
-              <a:rPr b="0" lang="en-HK" sz="1800" spc="-1" strike="noStrike">
-                <a:solidFill>
-                  <a:srgbClr val="00008b"/>
-                </a:solidFill>
-                <a:latin typeface="Arial"/>
-              </a:rPr>
-              <a:t>1.41 billion </a:t>
-            </a:r>
-            <a:r>
-              <a:rPr b="0" lang="en-HK" sz="1800" spc="-1" strike="noStrike">
-                <a:solidFill>
-                  <a:srgbClr val="00008b"/>
-                </a:solidFill>
-                <a:latin typeface="Arial"/>
-              </a:rPr>
-              <a:t>users.</a:t>
-            </a:r>
-            <a:endParaRPr b="0" lang="en-HK" sz="1800" spc="-1" strike="noStrike">
-              <a:solidFill>
-                <a:srgbClr val="00008b"/>
-              </a:solidFill>
-              <a:latin typeface="Arial"/>
-            </a:endParaRPr>
-          </a:p>
-        </p:txBody>
-      </p:sp>
-      <p:sp>
-        <p:nvSpPr>
-          <p:cNvPr id="613" name="PlaceHolder 3"/>
+            <a:ext cx="5481720" cy="3081600"/>
+          </a:xfrm>
+          <a:prstGeom prst="rect">
+            <a:avLst/>
+          </a:prstGeom>
+          <a:ln w="0">
+            <a:noFill/>
+          </a:ln>
+        </p:spPr>
+      </p:sp>
+      <p:sp>
+        <p:nvSpPr>
+          <p:cNvPr id="613" name="PlaceHolder 2"/>
           <p:cNvSpPr>
             <a:spLocks noGrp="1"/>
           </p:cNvSpPr>
@@ -1199,7 +1054,7 @@
         <p:spPr>
           <a:xfrm>
             <a:off x="3884760" y="8685360"/>
-            <a:ext cx="2968920" cy="455760"/>
+            <a:ext cx="2967120" cy="453960"/>
           </a:xfrm>
           <a:prstGeom prst="rect">
             <a:avLst/>
@@ -1231,12 +1086,18 @@
               </a:lnSpc>
               <a:buNone/>
             </a:pPr>
-            <a:fld id="{C55E431C-8A8B-4C77-8FBB-05862E248652}" type="slidenum">
+            <a:fld id="{E2F105AF-CB6D-4D9E-BDD9-323001B67025}" type="slidenum">
               <a:rPr b="0" lang="en-US" sz="1200" spc="-1" strike="noStrike">
                 <a:latin typeface="Times New Roman"/>
               </a:rPr>
               <a:t>&lt;number&gt;</a:t>
             </a:fld>
+            <a:r>
+              <a:rPr b="0" lang="en-US" sz="1200" spc="-1" strike="noStrike">
+                <a:latin typeface="Times New Roman"/>
+              </a:rPr>
+              <a:t>Es: 15% revenue growth demonstrates continued monetization Emphasis: 15% revenue growth demonstrates continued monetization strength. WeChat MAU milestone of 1.41 billion users.strength. WeChat MAU milestone of 1.41 billion users.mphasi</a:t>
+            </a:r>
             <a:endParaRPr b="0" lang="en-HK" sz="1200" spc="-1" strike="noStrike">
               <a:latin typeface="Times New Roman"/>
             </a:endParaRPr>
@@ -1278,7 +1139,7 @@
         <p:spPr>
           <a:xfrm>
             <a:off x="685800" y="1143000"/>
-            <a:ext cx="5483520" cy="3083400"/>
+            <a:ext cx="5481720" cy="3081600"/>
           </a:xfrm>
           <a:prstGeom prst="rect">
             <a:avLst/>
@@ -1301,7 +1162,7 @@
         <p:spPr>
           <a:xfrm>
             <a:off x="685800" y="4400640"/>
-            <a:ext cx="5483520" cy="3597480"/>
+            <a:ext cx="5481720" cy="3595680"/>
           </a:xfrm>
           <a:prstGeom prst="rect">
             <a:avLst/>
@@ -1335,7 +1196,7 @@
         <p:spPr>
           <a:xfrm>
             <a:off x="3884760" y="8685360"/>
-            <a:ext cx="2968920" cy="455760"/>
+            <a:ext cx="2967120" cy="453960"/>
           </a:xfrm>
           <a:prstGeom prst="rect">
             <a:avLst/>
@@ -1367,7 +1228,7 @@
               </a:lnSpc>
               <a:buNone/>
             </a:pPr>
-            <a:fld id="{3B0044DC-59AC-4E69-8675-7B685910C532}" type="slidenum">
+            <a:fld id="{7941029B-B4F6-4F7B-8334-A5127DA0E54B}" type="slidenum">
               <a:rPr b="0" lang="en-US" sz="1200" spc="-1" strike="noStrike">
                 <a:latin typeface="Times New Roman"/>
               </a:rPr>
@@ -1414,7 +1275,7 @@
         <p:spPr>
           <a:xfrm>
             <a:off x="685800" y="1143000"/>
-            <a:ext cx="5483520" cy="3083400"/>
+            <a:ext cx="5481720" cy="3081600"/>
           </a:xfrm>
           <a:prstGeom prst="rect">
             <a:avLst/>
@@ -1437,7 +1298,7 @@
         <p:spPr>
           <a:xfrm>
             <a:off x="685800" y="4400640"/>
-            <a:ext cx="5483520" cy="3597480"/>
+            <a:ext cx="5481720" cy="3595680"/>
           </a:xfrm>
           <a:prstGeom prst="rect">
             <a:avLst/>
@@ -1471,7 +1332,7 @@
         <p:spPr>
           <a:xfrm>
             <a:off x="3884760" y="8685360"/>
-            <a:ext cx="2968920" cy="455760"/>
+            <a:ext cx="2967120" cy="453960"/>
           </a:xfrm>
           <a:prstGeom prst="rect">
             <a:avLst/>
@@ -1503,7 +1364,7 @@
               </a:lnSpc>
               <a:buNone/>
             </a:pPr>
-            <a:fld id="{F6F874AC-9BDD-41A9-BF7A-9C042FC27092}" type="slidenum">
+            <a:fld id="{6BF77BB2-5E08-4C46-994D-3B618E6D2123}" type="slidenum">
               <a:rPr b="0" lang="en-US" sz="1200" spc="-1" strike="noStrike">
                 <a:latin typeface="Times New Roman"/>
               </a:rPr>
@@ -1550,7 +1411,7 @@
         <p:spPr>
           <a:xfrm>
             <a:off x="685800" y="1143000"/>
-            <a:ext cx="5483520" cy="3083400"/>
+            <a:ext cx="5481720" cy="3081600"/>
           </a:xfrm>
           <a:prstGeom prst="rect">
             <a:avLst/>
@@ -1573,7 +1434,7 @@
         <p:spPr>
           <a:xfrm>
             <a:off x="685800" y="4400640"/>
-            <a:ext cx="5483520" cy="3597480"/>
+            <a:ext cx="5481720" cy="3595680"/>
           </a:xfrm>
           <a:prstGeom prst="rect">
             <a:avLst/>
@@ -1607,7 +1468,7 @@
         <p:spPr>
           <a:xfrm>
             <a:off x="3884760" y="8685360"/>
-            <a:ext cx="2968920" cy="455760"/>
+            <a:ext cx="2967120" cy="453960"/>
           </a:xfrm>
           <a:prstGeom prst="rect">
             <a:avLst/>
@@ -1639,7 +1500,7 @@
               </a:lnSpc>
               <a:buNone/>
             </a:pPr>
-            <a:fld id="{DFF84905-C6E9-4C7A-92A7-9EF2E96FE084}" type="slidenum">
+            <a:fld id="{AE334B2E-FC5B-452E-96A3-1E855E3C0551}" type="slidenum">
               <a:rPr b="0" lang="en-US" sz="1200" spc="-1" strike="noStrike">
                 <a:latin typeface="Times New Roman"/>
               </a:rPr>
@@ -1686,7 +1547,7 @@
         <p:spPr>
           <a:xfrm>
             <a:off x="685800" y="1143000"/>
-            <a:ext cx="5483520" cy="3083400"/>
+            <a:ext cx="5481720" cy="3081600"/>
           </a:xfrm>
           <a:prstGeom prst="rect">
             <a:avLst/>
@@ -1709,7 +1570,7 @@
         <p:spPr>
           <a:xfrm>
             <a:off x="685800" y="4400640"/>
-            <a:ext cx="5483520" cy="3597480"/>
+            <a:ext cx="5481720" cy="3595680"/>
           </a:xfrm>
           <a:prstGeom prst="rect">
             <a:avLst/>
@@ -1743,7 +1604,7 @@
         <p:spPr>
           <a:xfrm>
             <a:off x="3884760" y="8685360"/>
-            <a:ext cx="2968920" cy="455760"/>
+            <a:ext cx="2967120" cy="453960"/>
           </a:xfrm>
           <a:prstGeom prst="rect">
             <a:avLst/>
@@ -1775,7 +1636,7 @@
               </a:lnSpc>
               <a:buNone/>
             </a:pPr>
-            <a:fld id="{306B95F6-3382-4EC5-9CAB-47D294F2E4B3}" type="slidenum">
+            <a:fld id="{B9B878C9-DCEE-416E-AE4C-A801F050115E}" type="slidenum">
               <a:rPr b="0" lang="en-US" sz="1200" spc="-1" strike="noStrike">
                 <a:latin typeface="Times New Roman"/>
               </a:rPr>
@@ -1822,7 +1683,7 @@
         <p:spPr>
           <a:xfrm>
             <a:off x="685800" y="1143000"/>
-            <a:ext cx="5483520" cy="3083400"/>
+            <a:ext cx="5481720" cy="3081600"/>
           </a:xfrm>
           <a:prstGeom prst="rect">
             <a:avLst/>
@@ -1845,7 +1706,7 @@
         <p:spPr>
           <a:xfrm>
             <a:off x="685800" y="4400640"/>
-            <a:ext cx="5483520" cy="3597480"/>
+            <a:ext cx="5481720" cy="3595680"/>
           </a:xfrm>
           <a:prstGeom prst="rect">
             <a:avLst/>
@@ -1879,7 +1740,7 @@
         <p:spPr>
           <a:xfrm>
             <a:off x="3884760" y="8685360"/>
-            <a:ext cx="2968920" cy="455760"/>
+            <a:ext cx="2967120" cy="453960"/>
           </a:xfrm>
           <a:prstGeom prst="rect">
             <a:avLst/>
@@ -1911,7 +1772,7 @@
               </a:lnSpc>
               <a:buNone/>
             </a:pPr>
-            <a:fld id="{4093F253-D1FD-4564-AD47-196D04D8BF78}" type="slidenum">
+            <a:fld id="{EAD92219-5F24-4EA2-B4E6-39F80E4E314C}" type="slidenum">
               <a:rPr b="0" lang="en-US" sz="1200" spc="-1" strike="noStrike">
                 <a:latin typeface="Times New Roman"/>
               </a:rPr>
@@ -1958,7 +1819,7 @@
         <p:spPr>
           <a:xfrm>
             <a:off x="685800" y="1143000"/>
-            <a:ext cx="5483520" cy="3083400"/>
+            <a:ext cx="5481720" cy="3081600"/>
           </a:xfrm>
           <a:prstGeom prst="rect">
             <a:avLst/>
@@ -1981,7 +1842,7 @@
         <p:spPr>
           <a:xfrm>
             <a:off x="685800" y="4400640"/>
-            <a:ext cx="5483520" cy="3597480"/>
+            <a:ext cx="5481720" cy="3595680"/>
           </a:xfrm>
           <a:prstGeom prst="rect">
             <a:avLst/>
@@ -2015,7 +1876,7 @@
         <p:spPr>
           <a:xfrm>
             <a:off x="3884760" y="8685360"/>
-            <a:ext cx="2968920" cy="455760"/>
+            <a:ext cx="2967120" cy="453960"/>
           </a:xfrm>
           <a:prstGeom prst="rect">
             <a:avLst/>
@@ -2047,7 +1908,7 @@
               </a:lnSpc>
               <a:buNone/>
             </a:pPr>
-            <a:fld id="{E916CA39-30FF-4930-AF87-7E90D5D46054}" type="slidenum">
+            <a:fld id="{6C46752F-E6D3-4676-9BF3-2438473D7FEF}" type="slidenum">
               <a:rPr b="0" lang="en-US" sz="1200" spc="-1" strike="noStrike">
                 <a:latin typeface="Times New Roman"/>
               </a:rPr>
@@ -3891,7 +3752,7 @@
         <p:spPr>
           <a:xfrm>
             <a:off x="0" y="0"/>
-            <a:ext cx="12189240" cy="6855120"/>
+            <a:ext cx="12187440" cy="6853320"/>
           </a:xfrm>
           <a:prstGeom prst="roundRect">
             <a:avLst>
@@ -3922,8 +3783,8 @@
         </p:nvSpPr>
         <p:spPr>
           <a:xfrm>
-            <a:off x="0" y="0"/>
-            <a:ext cx="12189240" cy="6855120"/>
+            <a:off x="2340000" y="3431520"/>
+            <a:ext cx="12187440" cy="6853320"/>
           </a:xfrm>
           <a:custGeom>
             <a:avLst/>
@@ -3986,7 +3847,7 @@
         <p:spPr>
           <a:xfrm>
             <a:off x="380880" y="380880"/>
-            <a:ext cx="454320" cy="454320"/>
+            <a:ext cx="452520" cy="452520"/>
           </a:xfrm>
           <a:custGeom>
             <a:avLst/>
@@ -4057,7 +3918,7 @@
         <p:spPr>
           <a:xfrm>
             <a:off x="495360" y="495360"/>
-            <a:ext cx="225720" cy="225720"/>
+            <a:ext cx="223920" cy="223920"/>
           </a:xfrm>
           <a:custGeom>
             <a:avLst/>
@@ -4190,7 +4051,7 @@
         <p:spPr>
           <a:xfrm>
             <a:off x="952560" y="514440"/>
-            <a:ext cx="1987920" cy="187560"/>
+            <a:ext cx="1986120" cy="185760"/>
           </a:xfrm>
           <a:prstGeom prst="rect">
             <a:avLst/>
@@ -4218,9 +4079,9 @@
               <a:buNone/>
             </a:pPr>
             <a:r>
-              <a:rPr b="0" lang="en-US" sz="4400" spc="32" strike="noStrike">
+              <a:rPr b="1" lang="en-US" sz="4400" spc="18" strike="noStrike">
                 <a:solidFill>
-                  <a:srgbClr val="2487cf"/>
+                  <a:srgbClr val="2a6099"/>
                 </a:solidFill>
                 <a:latin typeface="Liter"/>
                 <a:ea typeface="Liter"/>
@@ -4228,9 +4089,6 @@
               <a:t>INTERIM FINANCIAL REPORT</a:t>
             </a:r>
             <a:endParaRPr b="0" lang="en-HK" sz="4400" spc="-1" strike="noStrike">
-              <a:solidFill>
-                <a:srgbClr val="2487cf"/>
-              </a:solidFill>
               <a:latin typeface="Arial"/>
             </a:endParaRPr>
           </a:p>
@@ -4245,7 +4103,7 @@
         <p:spPr>
           <a:xfrm>
             <a:off x="380880" y="2057400"/>
-            <a:ext cx="11770200" cy="1711800"/>
+            <a:ext cx="11768400" cy="1710000"/>
           </a:xfrm>
           <a:prstGeom prst="rect">
             <a:avLst/>
@@ -4275,7 +4133,7 @@
             <a:r>
               <a:rPr b="1" lang="en-US" sz="4400" spc="-1" strike="noStrike">
                 <a:solidFill>
-                  <a:srgbClr val="00008b"/>
+                  <a:srgbClr val="2a6099"/>
                 </a:solidFill>
                 <a:latin typeface="Liter"/>
                 <a:ea typeface="Liter"/>
@@ -4296,7 +4154,7 @@
             <a:r>
               <a:rPr b="1" lang="en-US" sz="4400" spc="-1" strike="noStrike">
                 <a:solidFill>
-                  <a:srgbClr val="00008b"/>
+                  <a:srgbClr val="2a6099"/>
                 </a:solidFill>
                 <a:latin typeface="Liter"/>
                 <a:ea typeface="Liter"/>
@@ -4318,7 +4176,7 @@
         <p:spPr>
           <a:xfrm>
             <a:off x="380880" y="4000680"/>
-            <a:ext cx="911520" cy="35280"/>
+            <a:ext cx="909720" cy="33480"/>
           </a:xfrm>
           <a:custGeom>
             <a:avLst/>
@@ -4369,7 +4227,7 @@
         <p:spPr>
           <a:xfrm>
             <a:off x="380880" y="4267080"/>
-            <a:ext cx="11541600" cy="302040"/>
+            <a:ext cx="11539800" cy="300240"/>
           </a:xfrm>
           <a:prstGeom prst="rect">
             <a:avLst/>
@@ -4399,7 +4257,7 @@
             <a:r>
               <a:rPr b="1" lang="en-US" sz="4400" spc="-1" strike="noStrike">
                 <a:solidFill>
-                  <a:srgbClr val="00008b"/>
+                  <a:srgbClr val="2a6099"/>
                 </a:solidFill>
                 <a:latin typeface="Liter"/>
                 <a:ea typeface="Liter"/>
@@ -4421,7 +4279,7 @@
         <p:spPr>
           <a:xfrm>
             <a:off x="380880" y="4800600"/>
-            <a:ext cx="11512800" cy="263880"/>
+            <a:ext cx="11511000" cy="262080"/>
           </a:xfrm>
           <a:prstGeom prst="rect">
             <a:avLst/>
@@ -4451,7 +4309,7 @@
             <a:r>
               <a:rPr b="1" lang="en-US" sz="4400" spc="-1" strike="noStrike">
                 <a:solidFill>
-                  <a:srgbClr val="00008b"/>
+                  <a:srgbClr val="2a6099"/>
                 </a:solidFill>
                 <a:latin typeface="Liter"/>
                 <a:ea typeface="Liter"/>
@@ -4473,7 +4331,7 @@
         <p:spPr>
           <a:xfrm>
             <a:off x="409680" y="6305400"/>
-            <a:ext cx="130320" cy="149400"/>
+            <a:ext cx="128520" cy="147600"/>
           </a:xfrm>
           <a:custGeom>
             <a:avLst/>
@@ -4798,7 +4656,7 @@
         <p:spPr>
           <a:xfrm>
             <a:off x="647640" y="6286680"/>
-            <a:ext cx="825840" cy="187560"/>
+            <a:ext cx="824040" cy="185760"/>
           </a:xfrm>
           <a:prstGeom prst="rect">
             <a:avLst/>
@@ -4828,7 +4686,7 @@
             <a:r>
               <a:rPr b="1" lang="en-US" sz="4400" spc="-1" strike="noStrike">
                 <a:solidFill>
-                  <a:srgbClr val="00008b"/>
+                  <a:srgbClr val="2a6099"/>
                 </a:solidFill>
                 <a:latin typeface="Liter"/>
                 <a:ea typeface="Liter"/>
@@ -4850,7 +4708,7 @@
         <p:spPr>
           <a:xfrm>
             <a:off x="1757160" y="6305400"/>
-            <a:ext cx="111600" cy="149400"/>
+            <a:ext cx="109800" cy="147600"/>
           </a:xfrm>
           <a:custGeom>
             <a:avLst/>
@@ -5091,7 +4949,7 @@
         <p:spPr>
           <a:xfrm>
             <a:off x="1985760" y="6286680"/>
-            <a:ext cx="787680" cy="187560"/>
+            <a:ext cx="785880" cy="185760"/>
           </a:xfrm>
           <a:prstGeom prst="rect">
             <a:avLst/>
@@ -5121,7 +4979,7 @@
             <a:r>
               <a:rPr b="1" lang="en-US" sz="4400" spc="-1" strike="noStrike">
                 <a:solidFill>
-                  <a:srgbClr val="00008b"/>
+                  <a:srgbClr val="2a6099"/>
                 </a:solidFill>
                 <a:latin typeface="Liter"/>
                 <a:ea typeface="Liter"/>
@@ -5173,14 +5031,14 @@
       </p:grpSpPr>
       <p:sp>
         <p:nvSpPr>
-          <p:cNvPr id="433" name="Text 0"/>
+          <p:cNvPr id="434" name="Text 0"/>
           <p:cNvSpPr/>
           <p:nvPr/>
         </p:nvSpPr>
         <p:spPr>
           <a:xfrm>
             <a:off x="339480" y="339480"/>
-            <a:ext cx="11569320" cy="167040"/>
+            <a:ext cx="11567520" cy="165240"/>
           </a:xfrm>
           <a:prstGeom prst="rect">
             <a:avLst/>
@@ -5208,7 +5066,7 @@
               <a:buNone/>
             </a:pPr>
             <a:r>
-              <a:rPr b="1" lang="en-US" sz="939" spc="26" strike="noStrike">
+              <a:rPr b="1" lang="en-US" sz="939" spc="12" strike="noStrike">
                 <a:solidFill>
                   <a:srgbClr val="6366f1"/>
                 </a:solidFill>
@@ -5225,14 +5083,14 @@
       </p:sp>
       <p:sp>
         <p:nvSpPr>
-          <p:cNvPr id="434" name="Text 1"/>
+          <p:cNvPr id="435" name="Text 1"/>
           <p:cNvSpPr/>
           <p:nvPr/>
         </p:nvSpPr>
         <p:spPr>
           <a:xfrm>
             <a:off x="339480" y="577440"/>
-            <a:ext cx="11662560" cy="336600"/>
+            <a:ext cx="11660760" cy="334800"/>
           </a:xfrm>
           <a:prstGeom prst="rect">
             <a:avLst/>
@@ -5277,14 +5135,14 @@
       </p:sp>
       <p:sp>
         <p:nvSpPr>
-          <p:cNvPr id="435" name="Text 2"/>
+          <p:cNvPr id="436" name="Text 2"/>
           <p:cNvSpPr/>
           <p:nvPr/>
         </p:nvSpPr>
         <p:spPr>
           <a:xfrm>
             <a:off x="339480" y="984960"/>
-            <a:ext cx="11577960" cy="200880"/>
+            <a:ext cx="11576160" cy="199080"/>
           </a:xfrm>
           <a:prstGeom prst="rect">
             <a:avLst/>
@@ -5329,14 +5187,14 @@
       </p:sp>
       <p:sp>
         <p:nvSpPr>
-          <p:cNvPr id="436" name="Shape 3"/>
+          <p:cNvPr id="437" name="Shape 3"/>
           <p:cNvSpPr/>
           <p:nvPr/>
         </p:nvSpPr>
         <p:spPr>
           <a:xfrm>
             <a:off x="343800" y="1328760"/>
-            <a:ext cx="5643000" cy="1644120"/>
+            <a:ext cx="5641200" cy="1642320"/>
           </a:xfrm>
           <a:custGeom>
             <a:avLst/>
@@ -5403,14 +5261,14 @@
       </p:sp>
       <p:sp>
         <p:nvSpPr>
-          <p:cNvPr id="437" name="Shape 4"/>
+          <p:cNvPr id="438" name="Shape 4"/>
           <p:cNvSpPr/>
           <p:nvPr/>
         </p:nvSpPr>
         <p:spPr>
           <a:xfrm>
             <a:off x="551880" y="1536840"/>
-            <a:ext cx="404640" cy="404640"/>
+            <a:ext cx="402840" cy="402840"/>
           </a:xfrm>
           <a:custGeom>
             <a:avLst/>
@@ -5476,14 +5334,14 @@
       </p:sp>
       <p:sp>
         <p:nvSpPr>
-          <p:cNvPr id="438" name="Shape 5"/>
+          <p:cNvPr id="439" name="Shape 5"/>
           <p:cNvSpPr/>
           <p:nvPr/>
         </p:nvSpPr>
         <p:spPr>
           <a:xfrm>
             <a:off x="641160" y="1638720"/>
-            <a:ext cx="226440" cy="200880"/>
+            <a:ext cx="224640" cy="199080"/>
           </a:xfrm>
           <a:custGeom>
             <a:avLst/>
@@ -5692,14 +5550,14 @@
       </p:sp>
       <p:sp>
         <p:nvSpPr>
-          <p:cNvPr id="439" name="Text 6"/>
+          <p:cNvPr id="440" name="Text 6"/>
           <p:cNvSpPr/>
           <p:nvPr/>
         </p:nvSpPr>
         <p:spPr>
           <a:xfrm>
             <a:off x="1061280" y="1536840"/>
-            <a:ext cx="1406520" cy="234720"/>
+            <a:ext cx="1404720" cy="232920"/>
           </a:xfrm>
           <a:prstGeom prst="rect">
             <a:avLst/>
@@ -5744,14 +5602,14 @@
       </p:sp>
       <p:sp>
         <p:nvSpPr>
-          <p:cNvPr id="440" name="Text 7"/>
+          <p:cNvPr id="441" name="Text 7"/>
           <p:cNvSpPr/>
           <p:nvPr/>
         </p:nvSpPr>
         <p:spPr>
           <a:xfrm>
             <a:off x="1061280" y="1774440"/>
-            <a:ext cx="1380960" cy="167040"/>
+            <a:ext cx="1379160" cy="165240"/>
           </a:xfrm>
           <a:prstGeom prst="rect">
             <a:avLst/>
@@ -5796,14 +5654,14 @@
       </p:sp>
       <p:sp>
         <p:nvSpPr>
-          <p:cNvPr id="441" name="Text 8"/>
+          <p:cNvPr id="442" name="Text 8"/>
           <p:cNvSpPr/>
           <p:nvPr/>
         </p:nvSpPr>
         <p:spPr>
           <a:xfrm>
             <a:off x="551880" y="2080080"/>
-            <a:ext cx="1279080" cy="404640"/>
+            <a:ext cx="1277280" cy="402840"/>
           </a:xfrm>
           <a:prstGeom prst="rect">
             <a:avLst/>
@@ -5848,14 +5706,14 @@
       </p:sp>
       <p:sp>
         <p:nvSpPr>
-          <p:cNvPr id="442" name="Shape 9"/>
+          <p:cNvPr id="443" name="Shape 9"/>
           <p:cNvSpPr/>
           <p:nvPr/>
         </p:nvSpPr>
         <p:spPr>
           <a:xfrm>
             <a:off x="1730160" y="2254320"/>
-            <a:ext cx="599760" cy="234720"/>
+            <a:ext cx="597960" cy="232920"/>
           </a:xfrm>
           <a:custGeom>
             <a:avLst/>
@@ -5921,14 +5779,14 @@
       </p:sp>
       <p:sp>
         <p:nvSpPr>
-          <p:cNvPr id="443" name="Text 10"/>
+          <p:cNvPr id="444" name="Text 10"/>
           <p:cNvSpPr/>
           <p:nvPr/>
         </p:nvSpPr>
         <p:spPr>
           <a:xfrm>
             <a:off x="1730160" y="2254320"/>
-            <a:ext cx="659520" cy="234720"/>
+            <a:ext cx="657720" cy="232920"/>
           </a:xfrm>
           <a:prstGeom prst="rect">
             <a:avLst/>
@@ -5973,14 +5831,14 @@
       </p:sp>
       <p:sp>
         <p:nvSpPr>
-          <p:cNvPr id="444" name="Text 11"/>
+          <p:cNvPr id="445" name="Text 11"/>
           <p:cNvSpPr/>
           <p:nvPr/>
         </p:nvSpPr>
         <p:spPr>
           <a:xfrm>
             <a:off x="551880" y="2593800"/>
-            <a:ext cx="5286600" cy="167040"/>
+            <a:ext cx="5284800" cy="165240"/>
           </a:xfrm>
           <a:prstGeom prst="rect">
             <a:avLst/>
@@ -6025,14 +5883,14 @@
       </p:sp>
       <p:sp>
         <p:nvSpPr>
-          <p:cNvPr id="445" name="Shape 12"/>
+          <p:cNvPr id="446" name="Shape 12"/>
           <p:cNvSpPr/>
           <p:nvPr/>
         </p:nvSpPr>
         <p:spPr>
           <a:xfrm>
             <a:off x="343800" y="3115800"/>
-            <a:ext cx="5643000" cy="1644120"/>
+            <a:ext cx="5641200" cy="1642320"/>
           </a:xfrm>
           <a:custGeom>
             <a:avLst/>
@@ -6099,14 +5957,14 @@
       </p:sp>
       <p:sp>
         <p:nvSpPr>
-          <p:cNvPr id="446" name="Shape 13"/>
+          <p:cNvPr id="447" name="Shape 13"/>
           <p:cNvSpPr/>
           <p:nvPr/>
         </p:nvSpPr>
         <p:spPr>
           <a:xfrm>
             <a:off x="551880" y="3323880"/>
-            <a:ext cx="404640" cy="404640"/>
+            <a:ext cx="402840" cy="402840"/>
           </a:xfrm>
           <a:custGeom>
             <a:avLst/>
@@ -6172,14 +6030,14 @@
       </p:sp>
       <p:sp>
         <p:nvSpPr>
-          <p:cNvPr id="447" name="Shape 14"/>
+          <p:cNvPr id="448" name="Shape 14"/>
           <p:cNvSpPr/>
           <p:nvPr/>
         </p:nvSpPr>
         <p:spPr>
           <a:xfrm>
             <a:off x="666360" y="3425760"/>
-            <a:ext cx="175320" cy="200880"/>
+            <a:ext cx="173520" cy="199080"/>
           </a:xfrm>
           <a:custGeom>
             <a:avLst/>
@@ -6281,14 +6139,14 @@
       </p:sp>
       <p:sp>
         <p:nvSpPr>
-          <p:cNvPr id="448" name="Text 15"/>
+          <p:cNvPr id="449" name="Text 15"/>
           <p:cNvSpPr/>
           <p:nvPr/>
         </p:nvSpPr>
         <p:spPr>
           <a:xfrm>
             <a:off x="1061280" y="3323880"/>
-            <a:ext cx="1109520" cy="234720"/>
+            <a:ext cx="1107720" cy="232920"/>
           </a:xfrm>
           <a:prstGeom prst="rect">
             <a:avLst/>
@@ -6333,14 +6191,14 @@
       </p:sp>
       <p:sp>
         <p:nvSpPr>
-          <p:cNvPr id="449" name="Text 16"/>
+          <p:cNvPr id="450" name="Text 16"/>
           <p:cNvSpPr/>
           <p:nvPr/>
         </p:nvSpPr>
         <p:spPr>
           <a:xfrm>
             <a:off x="1061280" y="3561840"/>
-            <a:ext cx="1083960" cy="167040"/>
+            <a:ext cx="1082160" cy="165240"/>
           </a:xfrm>
           <a:prstGeom prst="rect">
             <a:avLst/>
@@ -6385,14 +6243,14 @@
       </p:sp>
       <p:sp>
         <p:nvSpPr>
-          <p:cNvPr id="450" name="Text 17"/>
+          <p:cNvPr id="451" name="Text 17"/>
           <p:cNvSpPr/>
           <p:nvPr/>
         </p:nvSpPr>
         <p:spPr>
           <a:xfrm>
             <a:off x="551880" y="3867480"/>
-            <a:ext cx="1279080" cy="404640"/>
+            <a:ext cx="1277280" cy="402840"/>
           </a:xfrm>
           <a:prstGeom prst="rect">
             <a:avLst/>
@@ -6437,14 +6295,14 @@
       </p:sp>
       <p:sp>
         <p:nvSpPr>
-          <p:cNvPr id="451" name="Shape 18"/>
+          <p:cNvPr id="452" name="Shape 18"/>
           <p:cNvSpPr/>
           <p:nvPr/>
         </p:nvSpPr>
         <p:spPr>
           <a:xfrm>
             <a:off x="1729440" y="4041360"/>
-            <a:ext cx="574560" cy="234720"/>
+            <a:ext cx="572760" cy="232920"/>
           </a:xfrm>
           <a:custGeom>
             <a:avLst/>
@@ -6510,14 +6368,14 @@
       </p:sp>
       <p:sp>
         <p:nvSpPr>
-          <p:cNvPr id="452" name="Text 19"/>
+          <p:cNvPr id="453" name="Text 19"/>
           <p:cNvSpPr/>
           <p:nvPr/>
         </p:nvSpPr>
         <p:spPr>
           <a:xfrm>
             <a:off x="1729440" y="4041360"/>
-            <a:ext cx="633960" cy="234720"/>
+            <a:ext cx="632160" cy="232920"/>
           </a:xfrm>
           <a:prstGeom prst="rect">
             <a:avLst/>
@@ -6562,14 +6420,14 @@
       </p:sp>
       <p:sp>
         <p:nvSpPr>
-          <p:cNvPr id="453" name="Text 20"/>
+          <p:cNvPr id="454" name="Text 20"/>
           <p:cNvSpPr/>
           <p:nvPr/>
         </p:nvSpPr>
         <p:spPr>
           <a:xfrm>
             <a:off x="551880" y="4380840"/>
-            <a:ext cx="5286600" cy="167040"/>
+            <a:ext cx="5284800" cy="165240"/>
           </a:xfrm>
           <a:prstGeom prst="rect">
             <a:avLst/>
@@ -6614,14 +6472,14 @@
       </p:sp>
       <p:sp>
         <p:nvSpPr>
-          <p:cNvPr id="454" name="Shape 21"/>
+          <p:cNvPr id="455" name="Shape 21"/>
           <p:cNvSpPr/>
           <p:nvPr/>
         </p:nvSpPr>
         <p:spPr>
           <a:xfrm>
             <a:off x="343800" y="4903200"/>
-            <a:ext cx="5643000" cy="1644120"/>
+            <a:ext cx="5641200" cy="1642320"/>
           </a:xfrm>
           <a:custGeom>
             <a:avLst/>
@@ -6688,14 +6546,14 @@
       </p:sp>
       <p:sp>
         <p:nvSpPr>
-          <p:cNvPr id="455" name="Shape 22"/>
+          <p:cNvPr id="456" name="Shape 22"/>
           <p:cNvSpPr/>
           <p:nvPr/>
         </p:nvSpPr>
         <p:spPr>
           <a:xfrm>
             <a:off x="551880" y="5111280"/>
-            <a:ext cx="404640" cy="404640"/>
+            <a:ext cx="402840" cy="402840"/>
           </a:xfrm>
           <a:custGeom>
             <a:avLst/>
@@ -6761,14 +6619,14 @@
       </p:sp>
       <p:sp>
         <p:nvSpPr>
-          <p:cNvPr id="456" name="Shape 23"/>
+          <p:cNvPr id="457" name="Shape 23"/>
           <p:cNvSpPr/>
           <p:nvPr/>
         </p:nvSpPr>
         <p:spPr>
           <a:xfrm>
             <a:off x="641160" y="5213160"/>
-            <a:ext cx="226440" cy="200880"/>
+            <a:ext cx="224640" cy="199080"/>
           </a:xfrm>
           <a:custGeom>
             <a:avLst/>
@@ -6901,14 +6759,14 @@
       </p:sp>
       <p:sp>
         <p:nvSpPr>
-          <p:cNvPr id="457" name="Text 24"/>
+          <p:cNvPr id="458" name="Text 24"/>
           <p:cNvSpPr/>
           <p:nvPr/>
         </p:nvSpPr>
         <p:spPr>
           <a:xfrm>
             <a:off x="1061280" y="5111280"/>
-            <a:ext cx="1245240" cy="234720"/>
+            <a:ext cx="1243440" cy="232920"/>
           </a:xfrm>
           <a:prstGeom prst="rect">
             <a:avLst/>
@@ -6953,14 +6811,14 @@
       </p:sp>
       <p:sp>
         <p:nvSpPr>
-          <p:cNvPr id="458" name="Text 25"/>
+          <p:cNvPr id="459" name="Text 25"/>
           <p:cNvSpPr/>
           <p:nvPr/>
         </p:nvSpPr>
         <p:spPr>
           <a:xfrm>
             <a:off x="1061280" y="5348880"/>
-            <a:ext cx="1219680" cy="167040"/>
+            <a:ext cx="1217880" cy="165240"/>
           </a:xfrm>
           <a:prstGeom prst="rect">
             <a:avLst/>
@@ -7005,14 +6863,14 @@
       </p:sp>
       <p:sp>
         <p:nvSpPr>
-          <p:cNvPr id="459" name="Text 26"/>
+          <p:cNvPr id="460" name="Text 26"/>
           <p:cNvSpPr/>
           <p:nvPr/>
         </p:nvSpPr>
         <p:spPr>
           <a:xfrm>
             <a:off x="551880" y="5654520"/>
-            <a:ext cx="1287720" cy="404640"/>
+            <a:ext cx="1285920" cy="402840"/>
           </a:xfrm>
           <a:prstGeom prst="rect">
             <a:avLst/>
@@ -7057,14 +6915,14 @@
       </p:sp>
       <p:sp>
         <p:nvSpPr>
-          <p:cNvPr id="460" name="Shape 27"/>
+          <p:cNvPr id="461" name="Shape 27"/>
           <p:cNvSpPr/>
           <p:nvPr/>
         </p:nvSpPr>
         <p:spPr>
           <a:xfrm>
             <a:off x="1737720" y="5828400"/>
-            <a:ext cx="701640" cy="234720"/>
+            <a:ext cx="699840" cy="232920"/>
           </a:xfrm>
           <a:custGeom>
             <a:avLst/>
@@ -7130,14 +6988,14 @@
       </p:sp>
       <p:sp>
         <p:nvSpPr>
-          <p:cNvPr id="461" name="Text 28"/>
+          <p:cNvPr id="462" name="Text 28"/>
           <p:cNvSpPr/>
           <p:nvPr/>
         </p:nvSpPr>
         <p:spPr>
           <a:xfrm>
             <a:off x="1737720" y="5828400"/>
-            <a:ext cx="761400" cy="234720"/>
+            <a:ext cx="759600" cy="232920"/>
           </a:xfrm>
           <a:prstGeom prst="rect">
             <a:avLst/>
@@ -7182,14 +7040,14 @@
       </p:sp>
       <p:sp>
         <p:nvSpPr>
-          <p:cNvPr id="462" name="Text 29"/>
+          <p:cNvPr id="463" name="Text 29"/>
           <p:cNvSpPr/>
           <p:nvPr/>
         </p:nvSpPr>
         <p:spPr>
           <a:xfrm>
             <a:off x="551880" y="6168240"/>
-            <a:ext cx="5286600" cy="167040"/>
+            <a:ext cx="5284800" cy="165240"/>
           </a:xfrm>
           <a:prstGeom prst="rect">
             <a:avLst/>
@@ -7234,14 +7092,14 @@
       </p:sp>
       <p:sp>
         <p:nvSpPr>
-          <p:cNvPr id="463" name="Shape 30"/>
+          <p:cNvPr id="464" name="Shape 30"/>
           <p:cNvSpPr/>
           <p:nvPr/>
         </p:nvSpPr>
         <p:spPr>
           <a:xfrm>
             <a:off x="6203880" y="1328760"/>
-            <a:ext cx="5643000" cy="2824200"/>
+            <a:ext cx="5641200" cy="2822400"/>
           </a:xfrm>
           <a:custGeom>
             <a:avLst/>
@@ -7308,14 +7166,14 @@
       </p:sp>
       <p:sp>
         <p:nvSpPr>
-          <p:cNvPr id="464" name="Text 31"/>
+          <p:cNvPr id="465" name="Text 31"/>
           <p:cNvSpPr/>
           <p:nvPr/>
         </p:nvSpPr>
         <p:spPr>
           <a:xfrm>
             <a:off x="6411960" y="1536840"/>
-            <a:ext cx="5312160" cy="234720"/>
+            <a:ext cx="5310360" cy="232920"/>
           </a:xfrm>
           <a:prstGeom prst="rect">
             <a:avLst/>
@@ -7360,14 +7218,14 @@
       </p:sp>
       <p:sp>
         <p:nvSpPr>
-          <p:cNvPr id="465" name="Shape 32"/>
+          <p:cNvPr id="466" name="Shape 32"/>
           <p:cNvSpPr/>
           <p:nvPr/>
         </p:nvSpPr>
         <p:spPr>
           <a:xfrm>
             <a:off x="6411960" y="1910160"/>
-            <a:ext cx="5227200" cy="947880"/>
+            <a:ext cx="5225400" cy="946080"/>
           </a:xfrm>
           <a:custGeom>
             <a:avLst/>
@@ -7431,14 +7289,14 @@
       </p:sp>
       <p:sp>
         <p:nvSpPr>
-          <p:cNvPr id="466" name="Shape 33"/>
+          <p:cNvPr id="467" name="Shape 33"/>
           <p:cNvSpPr/>
           <p:nvPr/>
         </p:nvSpPr>
         <p:spPr>
           <a:xfrm>
             <a:off x="6568920" y="2097000"/>
-            <a:ext cx="167040" cy="167040"/>
+            <a:ext cx="165240" cy="165240"/>
           </a:xfrm>
           <a:custGeom>
             <a:avLst/>
@@ -7533,14 +7391,14 @@
       </p:sp>
       <p:sp>
         <p:nvSpPr>
-          <p:cNvPr id="467" name="Text 34"/>
+          <p:cNvPr id="468" name="Text 34"/>
           <p:cNvSpPr/>
           <p:nvPr/>
         </p:nvSpPr>
         <p:spPr>
           <a:xfrm>
             <a:off x="6861960" y="2080080"/>
-            <a:ext cx="939600" cy="200880"/>
+            <a:ext cx="937800" cy="199080"/>
           </a:xfrm>
           <a:prstGeom prst="rect">
             <a:avLst/>
@@ -7585,14 +7443,14 @@
       </p:sp>
       <p:sp>
         <p:nvSpPr>
-          <p:cNvPr id="468" name="Text 35"/>
+          <p:cNvPr id="469" name="Text 35"/>
           <p:cNvSpPr/>
           <p:nvPr/>
         </p:nvSpPr>
         <p:spPr>
           <a:xfrm>
             <a:off x="11043000" y="2046240"/>
-            <a:ext cx="565920" cy="268920"/>
+            <a:ext cx="564120" cy="267120"/>
           </a:xfrm>
           <a:prstGeom prst="rect">
             <a:avLst/>
@@ -7637,14 +7495,14 @@
       </p:sp>
       <p:sp>
         <p:nvSpPr>
-          <p:cNvPr id="469" name="Text 36"/>
+          <p:cNvPr id="470" name="Text 36"/>
           <p:cNvSpPr/>
           <p:nvPr/>
         </p:nvSpPr>
         <p:spPr>
           <a:xfrm>
             <a:off x="6547680" y="2385720"/>
-            <a:ext cx="5014800" cy="167040"/>
+            <a:ext cx="5013000" cy="165240"/>
           </a:xfrm>
           <a:prstGeom prst="rect">
             <a:avLst/>
@@ -7689,14 +7547,14 @@
       </p:sp>
       <p:sp>
         <p:nvSpPr>
-          <p:cNvPr id="470" name="Text 37"/>
+          <p:cNvPr id="471" name="Text 37"/>
           <p:cNvSpPr/>
           <p:nvPr/>
         </p:nvSpPr>
         <p:spPr>
           <a:xfrm>
             <a:off x="6547680" y="2589480"/>
-            <a:ext cx="5006520" cy="132840"/>
+            <a:ext cx="5004720" cy="131040"/>
           </a:xfrm>
           <a:prstGeom prst="rect">
             <a:avLst/>
@@ -7741,14 +7599,14 @@
       </p:sp>
       <p:sp>
         <p:nvSpPr>
-          <p:cNvPr id="471" name="Shape 38"/>
+          <p:cNvPr id="472" name="Shape 38"/>
           <p:cNvSpPr/>
           <p:nvPr/>
         </p:nvSpPr>
         <p:spPr>
           <a:xfrm>
             <a:off x="6411960" y="2997000"/>
-            <a:ext cx="5227200" cy="947880"/>
+            <a:ext cx="5225400" cy="946080"/>
           </a:xfrm>
           <a:custGeom>
             <a:avLst/>
@@ -7812,14 +7670,14 @@
       </p:sp>
       <p:sp>
         <p:nvSpPr>
-          <p:cNvPr id="472" name="Shape 39"/>
+          <p:cNvPr id="473" name="Shape 39"/>
           <p:cNvSpPr/>
           <p:nvPr/>
         </p:nvSpPr>
         <p:spPr>
           <a:xfrm>
             <a:off x="6568920" y="3183840"/>
-            <a:ext cx="167040" cy="167040"/>
+            <a:ext cx="165240" cy="165240"/>
           </a:xfrm>
           <a:custGeom>
             <a:avLst/>
@@ -7924,14 +7782,14 @@
       </p:sp>
       <p:sp>
         <p:nvSpPr>
-          <p:cNvPr id="473" name="Text 40"/>
+          <p:cNvPr id="474" name="Text 40"/>
           <p:cNvSpPr/>
           <p:nvPr/>
         </p:nvSpPr>
         <p:spPr>
           <a:xfrm>
             <a:off x="6861960" y="3166920"/>
-            <a:ext cx="956520" cy="200880"/>
+            <a:ext cx="954720" cy="199080"/>
           </a:xfrm>
           <a:prstGeom prst="rect">
             <a:avLst/>
@@ -7976,14 +7834,14 @@
       </p:sp>
       <p:sp>
         <p:nvSpPr>
-          <p:cNvPr id="474" name="Text 41"/>
+          <p:cNvPr id="475" name="Text 41"/>
           <p:cNvSpPr/>
           <p:nvPr/>
         </p:nvSpPr>
         <p:spPr>
           <a:xfrm>
             <a:off x="11006280" y="3133080"/>
-            <a:ext cx="599760" cy="268920"/>
+            <a:ext cx="597960" cy="267120"/>
           </a:xfrm>
           <a:prstGeom prst="rect">
             <a:avLst/>
@@ -8028,14 +7886,14 @@
       </p:sp>
       <p:sp>
         <p:nvSpPr>
-          <p:cNvPr id="475" name="Text 42"/>
+          <p:cNvPr id="476" name="Text 42"/>
           <p:cNvSpPr/>
           <p:nvPr/>
         </p:nvSpPr>
         <p:spPr>
           <a:xfrm>
             <a:off x="6547680" y="3472560"/>
-            <a:ext cx="5014800" cy="167040"/>
+            <a:ext cx="5013000" cy="165240"/>
           </a:xfrm>
           <a:prstGeom prst="rect">
             <a:avLst/>
@@ -8080,14 +7938,14 @@
       </p:sp>
       <p:sp>
         <p:nvSpPr>
-          <p:cNvPr id="476" name="Text 43"/>
+          <p:cNvPr id="477" name="Text 43"/>
           <p:cNvSpPr/>
           <p:nvPr/>
         </p:nvSpPr>
         <p:spPr>
           <a:xfrm>
             <a:off x="6547680" y="3676320"/>
-            <a:ext cx="5006520" cy="132840"/>
+            <a:ext cx="5004720" cy="131040"/>
           </a:xfrm>
           <a:prstGeom prst="rect">
             <a:avLst/>
@@ -8132,14 +7990,14 @@
       </p:sp>
       <p:sp>
         <p:nvSpPr>
-          <p:cNvPr id="477" name="Shape 44"/>
+          <p:cNvPr id="478" name="Shape 44"/>
           <p:cNvSpPr/>
           <p:nvPr/>
         </p:nvSpPr>
         <p:spPr>
           <a:xfrm>
             <a:off x="6203880" y="4300200"/>
-            <a:ext cx="5643000" cy="2552760"/>
+            <a:ext cx="5641200" cy="2550960"/>
           </a:xfrm>
           <a:custGeom>
             <a:avLst/>
@@ -8206,14 +8064,14 @@
       </p:sp>
       <p:sp>
         <p:nvSpPr>
-          <p:cNvPr id="478" name="Text 45"/>
+          <p:cNvPr id="479" name="Text 45"/>
           <p:cNvSpPr/>
           <p:nvPr/>
         </p:nvSpPr>
         <p:spPr>
           <a:xfrm>
             <a:off x="6411960" y="4508280"/>
-            <a:ext cx="5312160" cy="234720"/>
+            <a:ext cx="5310360" cy="232920"/>
           </a:xfrm>
           <a:prstGeom prst="rect">
             <a:avLst/>
@@ -8258,14 +8116,14 @@
       </p:sp>
       <p:sp>
         <p:nvSpPr>
-          <p:cNvPr id="479" name="Shape 46"/>
+          <p:cNvPr id="480" name="Shape 46"/>
           <p:cNvSpPr/>
           <p:nvPr/>
         </p:nvSpPr>
         <p:spPr>
           <a:xfrm>
             <a:off x="6411960" y="4881960"/>
-            <a:ext cx="5227200" cy="1762920"/>
+            <a:ext cx="5225400" cy="1761120"/>
           </a:xfrm>
           <a:custGeom>
             <a:avLst/>
@@ -8329,14 +8187,14 @@
       </p:sp>
       <p:sp>
         <p:nvSpPr>
-          <p:cNvPr id="480" name="Shape 47"/>
+          <p:cNvPr id="481" name="Shape 47"/>
           <p:cNvSpPr/>
           <p:nvPr/>
         </p:nvSpPr>
         <p:spPr>
           <a:xfrm>
             <a:off x="6581880" y="5102640"/>
-            <a:ext cx="540360" cy="540360"/>
+            <a:ext cx="538560" cy="538560"/>
           </a:xfrm>
           <a:custGeom>
             <a:avLst/>
@@ -8402,14 +8260,14 @@
       </p:sp>
       <p:sp>
         <p:nvSpPr>
-          <p:cNvPr id="481" name="Shape 48"/>
+          <p:cNvPr id="482" name="Shape 48"/>
           <p:cNvSpPr/>
           <p:nvPr/>
         </p:nvSpPr>
         <p:spPr>
           <a:xfrm>
             <a:off x="6728400" y="5247000"/>
-            <a:ext cx="252000" cy="252000"/>
+            <a:ext cx="250200" cy="250200"/>
           </a:xfrm>
           <a:custGeom>
             <a:avLst/>
@@ -8526,14 +8384,14 @@
       </p:sp>
       <p:sp>
         <p:nvSpPr>
-          <p:cNvPr id="482" name="Text 49"/>
+          <p:cNvPr id="483" name="Text 49"/>
           <p:cNvSpPr/>
           <p:nvPr/>
         </p:nvSpPr>
         <p:spPr>
           <a:xfrm>
             <a:off x="7261200" y="5051520"/>
-            <a:ext cx="1253520" cy="167040"/>
+            <a:ext cx="1251720" cy="165240"/>
           </a:xfrm>
           <a:prstGeom prst="rect">
             <a:avLst/>
@@ -8578,14 +8436,14 @@
       </p:sp>
       <p:sp>
         <p:nvSpPr>
-          <p:cNvPr id="483" name="Text 50"/>
+          <p:cNvPr id="484" name="Text 50"/>
           <p:cNvSpPr/>
           <p:nvPr/>
         </p:nvSpPr>
         <p:spPr>
           <a:xfrm>
             <a:off x="7261200" y="5221440"/>
-            <a:ext cx="1347120" cy="336600"/>
+            <a:ext cx="1345320" cy="334800"/>
           </a:xfrm>
           <a:prstGeom prst="rect">
             <a:avLst/>
@@ -8630,14 +8488,14 @@
       </p:sp>
       <p:sp>
         <p:nvSpPr>
-          <p:cNvPr id="484" name="Text 51"/>
+          <p:cNvPr id="485" name="Text 51"/>
           <p:cNvSpPr/>
           <p:nvPr/>
         </p:nvSpPr>
         <p:spPr>
           <a:xfrm>
             <a:off x="7261200" y="5561280"/>
-            <a:ext cx="1245240" cy="132840"/>
+            <a:ext cx="1243440" cy="131040"/>
           </a:xfrm>
           <a:prstGeom prst="rect">
             <a:avLst/>
@@ -8682,14 +8540,14 @@
       </p:sp>
       <p:sp>
         <p:nvSpPr>
-          <p:cNvPr id="485" name="Shape 52"/>
+          <p:cNvPr id="486" name="Shape 52"/>
           <p:cNvSpPr/>
           <p:nvPr/>
         </p:nvSpPr>
         <p:spPr>
           <a:xfrm>
             <a:off x="6598800" y="5858280"/>
-            <a:ext cx="115920" cy="115920"/>
+            <a:ext cx="114120" cy="114120"/>
           </a:xfrm>
           <a:custGeom>
             <a:avLst/>
@@ -8787,14 +8645,14 @@
       </p:sp>
       <p:sp>
         <p:nvSpPr>
-          <p:cNvPr id="486" name="Text 53"/>
+          <p:cNvPr id="487" name="Text 53"/>
           <p:cNvSpPr/>
           <p:nvPr/>
         </p:nvSpPr>
         <p:spPr>
           <a:xfrm>
             <a:off x="6798240" y="5832720"/>
-            <a:ext cx="1983960" cy="167040"/>
+            <a:ext cx="1982160" cy="165240"/>
           </a:xfrm>
           <a:prstGeom prst="rect">
             <a:avLst/>
@@ -8839,14 +8697,14 @@
       </p:sp>
       <p:sp>
         <p:nvSpPr>
-          <p:cNvPr id="487" name="Shape 54"/>
+          <p:cNvPr id="488" name="Shape 54"/>
           <p:cNvSpPr/>
           <p:nvPr/>
         </p:nvSpPr>
         <p:spPr>
           <a:xfrm>
             <a:off x="6598800" y="6095880"/>
-            <a:ext cx="115920" cy="115920"/>
+            <a:ext cx="114120" cy="114120"/>
           </a:xfrm>
           <a:custGeom>
             <a:avLst/>
@@ -8944,14 +8802,14 @@
       </p:sp>
       <p:sp>
         <p:nvSpPr>
-          <p:cNvPr id="488" name="Text 55"/>
+          <p:cNvPr id="489" name="Text 55"/>
           <p:cNvSpPr/>
           <p:nvPr/>
         </p:nvSpPr>
         <p:spPr>
           <a:xfrm>
             <a:off x="6798240" y="6070680"/>
-            <a:ext cx="1584720" cy="167040"/>
+            <a:ext cx="1582920" cy="165240"/>
           </a:xfrm>
           <a:prstGeom prst="rect">
             <a:avLst/>
@@ -8996,14 +8854,14 @@
       </p:sp>
       <p:sp>
         <p:nvSpPr>
-          <p:cNvPr id="489" name="Shape 56"/>
+          <p:cNvPr id="490" name="Shape 56"/>
           <p:cNvSpPr/>
           <p:nvPr/>
         </p:nvSpPr>
         <p:spPr>
           <a:xfrm>
             <a:off x="6598800" y="6333840"/>
-            <a:ext cx="115920" cy="115920"/>
+            <a:ext cx="114120" cy="114120"/>
           </a:xfrm>
           <a:custGeom>
             <a:avLst/>
@@ -9101,14 +8959,14 @@
       </p:sp>
       <p:sp>
         <p:nvSpPr>
-          <p:cNvPr id="490" name="Text 57"/>
+          <p:cNvPr id="491" name="Text 57"/>
           <p:cNvSpPr/>
           <p:nvPr/>
         </p:nvSpPr>
         <p:spPr>
           <a:xfrm>
             <a:off x="6798240" y="6308280"/>
-            <a:ext cx="1024560" cy="167040"/>
+            <a:ext cx="1022760" cy="165240"/>
           </a:xfrm>
           <a:prstGeom prst="rect">
             <a:avLst/>
@@ -9190,14 +9048,14 @@
       </p:grpSpPr>
       <p:sp>
         <p:nvSpPr>
-          <p:cNvPr id="491" name="Text 0"/>
+          <p:cNvPr id="492" name="Text 0"/>
           <p:cNvSpPr/>
           <p:nvPr/>
         </p:nvSpPr>
         <p:spPr>
           <a:xfrm>
             <a:off x="317520" y="317520"/>
-            <a:ext cx="11609640" cy="155880"/>
+            <a:ext cx="11607840" cy="154080"/>
           </a:xfrm>
           <a:prstGeom prst="rect">
             <a:avLst/>
@@ -9225,7 +9083,7 @@
               <a:buNone/>
             </a:pPr>
             <a:r>
-              <a:rPr b="1" lang="en-US" sz="880" spc="24" strike="noStrike">
+              <a:rPr b="1" lang="en-US" sz="880" spc="9" strike="noStrike">
                 <a:solidFill>
                   <a:srgbClr val="6366f1"/>
                 </a:solidFill>
@@ -9242,14 +9100,14 @@
       </p:sp>
       <p:sp>
         <p:nvSpPr>
-          <p:cNvPr id="492" name="Text 1"/>
+          <p:cNvPr id="493" name="Text 1"/>
           <p:cNvSpPr/>
           <p:nvPr/>
         </p:nvSpPr>
         <p:spPr>
           <a:xfrm>
             <a:off x="317520" y="539640"/>
-            <a:ext cx="11697120" cy="314640"/>
+            <a:ext cx="11695320" cy="312840"/>
           </a:xfrm>
           <a:prstGeom prst="rect">
             <a:avLst/>
@@ -9294,14 +9152,14 @@
       </p:sp>
       <p:sp>
         <p:nvSpPr>
-          <p:cNvPr id="493" name="Text 2"/>
+          <p:cNvPr id="494" name="Text 2"/>
           <p:cNvSpPr/>
           <p:nvPr/>
         </p:nvSpPr>
         <p:spPr>
           <a:xfrm>
             <a:off x="317520" y="920880"/>
-            <a:ext cx="11617560" cy="187560"/>
+            <a:ext cx="11615760" cy="185760"/>
           </a:xfrm>
           <a:prstGeom prst="rect">
             <a:avLst/>
@@ -9346,14 +9204,14 @@
       </p:sp>
       <p:sp>
         <p:nvSpPr>
-          <p:cNvPr id="494" name="Shape 3"/>
+          <p:cNvPr id="495" name="Shape 3"/>
           <p:cNvSpPr/>
           <p:nvPr/>
         </p:nvSpPr>
         <p:spPr>
           <a:xfrm>
             <a:off x="321480" y="1178640"/>
-            <a:ext cx="6093000" cy="2640240"/>
+            <a:ext cx="6091200" cy="2638440"/>
           </a:xfrm>
           <a:custGeom>
             <a:avLst/>
@@ -9420,14 +9278,14 @@
       </p:sp>
       <p:sp>
         <p:nvSpPr>
-          <p:cNvPr id="495" name="Text 4"/>
+          <p:cNvPr id="496" name="Text 4"/>
           <p:cNvSpPr/>
           <p:nvPr/>
         </p:nvSpPr>
         <p:spPr>
           <a:xfrm>
             <a:off x="484200" y="1341360"/>
-            <a:ext cx="5847120" cy="219240"/>
+            <a:ext cx="5845320" cy="217440"/>
           </a:xfrm>
           <a:prstGeom prst="rect">
             <a:avLst/>
@@ -9472,14 +9330,14 @@
       </p:sp>
       <p:sp>
         <p:nvSpPr>
-          <p:cNvPr id="496" name="Shape 5"/>
+          <p:cNvPr id="497" name="Shape 5"/>
           <p:cNvSpPr/>
           <p:nvPr/>
         </p:nvSpPr>
         <p:spPr>
           <a:xfrm>
             <a:off x="484200" y="1690560"/>
-            <a:ext cx="2814840" cy="918000"/>
+            <a:ext cx="2813040" cy="916200"/>
           </a:xfrm>
           <a:custGeom>
             <a:avLst/>
@@ -9543,14 +9401,14 @@
       </p:sp>
       <p:sp>
         <p:nvSpPr>
-          <p:cNvPr id="497" name="Text 6"/>
+          <p:cNvPr id="498" name="Text 6"/>
           <p:cNvSpPr/>
           <p:nvPr/>
         </p:nvSpPr>
         <p:spPr>
           <a:xfrm>
             <a:off x="611280" y="1817640"/>
-            <a:ext cx="2616480" cy="155880"/>
+            <a:ext cx="2614680" cy="154080"/>
           </a:xfrm>
           <a:prstGeom prst="rect">
             <a:avLst/>
@@ -9595,14 +9453,14 @@
       </p:sp>
       <p:sp>
         <p:nvSpPr>
-          <p:cNvPr id="498" name="Text 7"/>
+          <p:cNvPr id="499" name="Text 7"/>
           <p:cNvSpPr/>
           <p:nvPr/>
         </p:nvSpPr>
         <p:spPr>
           <a:xfrm>
             <a:off x="611280" y="2039760"/>
-            <a:ext cx="2679840" cy="282960"/>
+            <a:ext cx="2678040" cy="281160"/>
           </a:xfrm>
           <a:prstGeom prst="rect">
             <a:avLst/>
@@ -9647,14 +9505,14 @@
       </p:sp>
       <p:sp>
         <p:nvSpPr>
-          <p:cNvPr id="499" name="Text 8"/>
+          <p:cNvPr id="500" name="Text 8"/>
           <p:cNvSpPr/>
           <p:nvPr/>
         </p:nvSpPr>
         <p:spPr>
           <a:xfrm>
             <a:off x="611280" y="2357280"/>
-            <a:ext cx="2608560" cy="124200"/>
+            <a:ext cx="2606760" cy="122400"/>
           </a:xfrm>
           <a:prstGeom prst="rect">
             <a:avLst/>
@@ -9699,14 +9557,14 @@
       </p:sp>
       <p:sp>
         <p:nvSpPr>
-          <p:cNvPr id="500" name="Shape 9"/>
+          <p:cNvPr id="501" name="Shape 9"/>
           <p:cNvSpPr/>
           <p:nvPr/>
         </p:nvSpPr>
         <p:spPr>
           <a:xfrm>
             <a:off x="3432600" y="1690560"/>
-            <a:ext cx="2814840" cy="918000"/>
+            <a:ext cx="2813040" cy="916200"/>
           </a:xfrm>
           <a:custGeom>
             <a:avLst/>
@@ -9770,14 +9628,14 @@
       </p:sp>
       <p:sp>
         <p:nvSpPr>
-          <p:cNvPr id="501" name="Text 10"/>
+          <p:cNvPr id="502" name="Text 10"/>
           <p:cNvSpPr/>
           <p:nvPr/>
         </p:nvSpPr>
         <p:spPr>
           <a:xfrm>
             <a:off x="3559680" y="1817640"/>
-            <a:ext cx="2616480" cy="155880"/>
+            <a:ext cx="2614680" cy="154080"/>
           </a:xfrm>
           <a:prstGeom prst="rect">
             <a:avLst/>
@@ -9822,14 +9680,14 @@
       </p:sp>
       <p:sp>
         <p:nvSpPr>
-          <p:cNvPr id="502" name="Text 11"/>
+          <p:cNvPr id="503" name="Text 11"/>
           <p:cNvSpPr/>
           <p:nvPr/>
         </p:nvSpPr>
         <p:spPr>
           <a:xfrm>
             <a:off x="3559680" y="2039760"/>
-            <a:ext cx="2679840" cy="282960"/>
+            <a:ext cx="2678040" cy="281160"/>
           </a:xfrm>
           <a:prstGeom prst="rect">
             <a:avLst/>
@@ -9874,14 +9732,14 @@
       </p:sp>
       <p:sp>
         <p:nvSpPr>
-          <p:cNvPr id="503" name="Text 12"/>
+          <p:cNvPr id="504" name="Text 12"/>
           <p:cNvSpPr/>
           <p:nvPr/>
         </p:nvSpPr>
         <p:spPr>
           <a:xfrm>
             <a:off x="3559680" y="2357280"/>
-            <a:ext cx="2608560" cy="124200"/>
+            <a:ext cx="2606760" cy="122400"/>
           </a:xfrm>
           <a:prstGeom prst="rect">
             <a:avLst/>
@@ -9926,14 +9784,14 @@
       </p:sp>
       <p:sp>
         <p:nvSpPr>
-          <p:cNvPr id="504" name="Shape 13"/>
+          <p:cNvPr id="505" name="Shape 13"/>
           <p:cNvSpPr/>
           <p:nvPr/>
         </p:nvSpPr>
         <p:spPr>
           <a:xfrm>
             <a:off x="484200" y="2738520"/>
-            <a:ext cx="2814840" cy="918000"/>
+            <a:ext cx="2813040" cy="916200"/>
           </a:xfrm>
           <a:custGeom>
             <a:avLst/>
@@ -9997,14 +9855,14 @@
       </p:sp>
       <p:sp>
         <p:nvSpPr>
-          <p:cNvPr id="505" name="Text 14"/>
+          <p:cNvPr id="506" name="Text 14"/>
           <p:cNvSpPr/>
           <p:nvPr/>
         </p:nvSpPr>
         <p:spPr>
           <a:xfrm>
             <a:off x="611280" y="2865600"/>
-            <a:ext cx="2616480" cy="155880"/>
+            <a:ext cx="2614680" cy="154080"/>
           </a:xfrm>
           <a:prstGeom prst="rect">
             <a:avLst/>
@@ -10049,14 +9907,14 @@
       </p:sp>
       <p:sp>
         <p:nvSpPr>
-          <p:cNvPr id="506" name="Text 15"/>
+          <p:cNvPr id="507" name="Text 15"/>
           <p:cNvSpPr/>
           <p:nvPr/>
         </p:nvSpPr>
         <p:spPr>
           <a:xfrm>
             <a:off x="611280" y="3087720"/>
-            <a:ext cx="2679840" cy="282960"/>
+            <a:ext cx="2678040" cy="281160"/>
           </a:xfrm>
           <a:prstGeom prst="rect">
             <a:avLst/>
@@ -10101,14 +9959,14 @@
       </p:sp>
       <p:sp>
         <p:nvSpPr>
-          <p:cNvPr id="507" name="Text 16"/>
+          <p:cNvPr id="508" name="Text 16"/>
           <p:cNvSpPr/>
           <p:nvPr/>
         </p:nvSpPr>
         <p:spPr>
           <a:xfrm>
             <a:off x="611280" y="3405240"/>
-            <a:ext cx="2608560" cy="124200"/>
+            <a:ext cx="2606760" cy="122400"/>
           </a:xfrm>
           <a:prstGeom prst="rect">
             <a:avLst/>
@@ -10153,14 +10011,14 @@
       </p:sp>
       <p:sp>
         <p:nvSpPr>
-          <p:cNvPr id="508" name="Shape 17"/>
+          <p:cNvPr id="509" name="Shape 17"/>
           <p:cNvSpPr/>
           <p:nvPr/>
         </p:nvSpPr>
         <p:spPr>
           <a:xfrm>
             <a:off x="3432600" y="2738520"/>
-            <a:ext cx="2814840" cy="918000"/>
+            <a:ext cx="2813040" cy="916200"/>
           </a:xfrm>
           <a:custGeom>
             <a:avLst/>
@@ -10224,14 +10082,14 @@
       </p:sp>
       <p:sp>
         <p:nvSpPr>
-          <p:cNvPr id="509" name="Text 18"/>
+          <p:cNvPr id="510" name="Text 18"/>
           <p:cNvSpPr/>
           <p:nvPr/>
         </p:nvSpPr>
         <p:spPr>
           <a:xfrm>
             <a:off x="3559680" y="2865600"/>
-            <a:ext cx="2616480" cy="155880"/>
+            <a:ext cx="2614680" cy="154080"/>
           </a:xfrm>
           <a:prstGeom prst="rect">
             <a:avLst/>
@@ -10276,14 +10134,14 @@
       </p:sp>
       <p:sp>
         <p:nvSpPr>
-          <p:cNvPr id="510" name="Text 19"/>
+          <p:cNvPr id="511" name="Text 19"/>
           <p:cNvSpPr/>
           <p:nvPr/>
         </p:nvSpPr>
         <p:spPr>
           <a:xfrm>
             <a:off x="3559680" y="3087720"/>
-            <a:ext cx="2679840" cy="282960"/>
+            <a:ext cx="2678040" cy="281160"/>
           </a:xfrm>
           <a:prstGeom prst="rect">
             <a:avLst/>
@@ -10328,14 +10186,14 @@
       </p:sp>
       <p:sp>
         <p:nvSpPr>
-          <p:cNvPr id="511" name="Text 20"/>
+          <p:cNvPr id="512" name="Text 20"/>
           <p:cNvSpPr/>
           <p:nvPr/>
         </p:nvSpPr>
         <p:spPr>
           <a:xfrm>
             <a:off x="3559680" y="3405240"/>
-            <a:ext cx="2608560" cy="124200"/>
+            <a:ext cx="2606760" cy="122400"/>
           </a:xfrm>
           <a:prstGeom prst="rect">
             <a:avLst/>
@@ -10380,14 +10238,14 @@
       </p:sp>
       <p:sp>
         <p:nvSpPr>
-          <p:cNvPr id="512" name="Shape 21"/>
+          <p:cNvPr id="513" name="Shape 21"/>
           <p:cNvSpPr/>
           <p:nvPr/>
         </p:nvSpPr>
         <p:spPr>
           <a:xfrm>
             <a:off x="321480" y="3956760"/>
-            <a:ext cx="6093000" cy="3370680"/>
+            <a:ext cx="6091200" cy="3368880"/>
           </a:xfrm>
           <a:custGeom>
             <a:avLst/>
@@ -10454,14 +10312,14 @@
       </p:sp>
       <p:sp>
         <p:nvSpPr>
-          <p:cNvPr id="513" name="Text 22"/>
+          <p:cNvPr id="514" name="Text 22"/>
           <p:cNvSpPr/>
           <p:nvPr/>
         </p:nvSpPr>
         <p:spPr>
           <a:xfrm>
             <a:off x="484200" y="4119480"/>
-            <a:ext cx="5847120" cy="219240"/>
+            <a:ext cx="5845320" cy="217440"/>
           </a:xfrm>
           <a:prstGeom prst="rect">
             <a:avLst/>
@@ -10506,14 +10364,14 @@
       </p:sp>
       <p:sp>
         <p:nvSpPr>
-          <p:cNvPr id="514" name="Shape 23"/>
+          <p:cNvPr id="515" name="Shape 23"/>
           <p:cNvSpPr/>
           <p:nvPr/>
         </p:nvSpPr>
         <p:spPr>
           <a:xfrm>
             <a:off x="484200" y="4468680"/>
-            <a:ext cx="5767560" cy="885960"/>
+            <a:ext cx="5765760" cy="884160"/>
           </a:xfrm>
           <a:custGeom>
             <a:avLst/>
@@ -10577,14 +10435,14 @@
       </p:sp>
       <p:sp>
         <p:nvSpPr>
-          <p:cNvPr id="515" name="Text 24"/>
+          <p:cNvPr id="516" name="Text 24"/>
           <p:cNvSpPr/>
           <p:nvPr/>
         </p:nvSpPr>
         <p:spPr>
           <a:xfrm>
             <a:off x="611280" y="4627440"/>
-            <a:ext cx="1052640" cy="187560"/>
+            <a:ext cx="1050840" cy="185760"/>
           </a:xfrm>
           <a:prstGeom prst="rect">
             <a:avLst/>
@@ -10629,14 +10487,14 @@
       </p:sp>
       <p:sp>
         <p:nvSpPr>
-          <p:cNvPr id="516" name="Text 25"/>
+          <p:cNvPr id="517" name="Text 25"/>
           <p:cNvSpPr/>
           <p:nvPr/>
         </p:nvSpPr>
         <p:spPr>
           <a:xfrm>
             <a:off x="5196600" y="4595760"/>
-            <a:ext cx="1020960" cy="251280"/>
+            <a:ext cx="1019160" cy="249480"/>
           </a:xfrm>
           <a:prstGeom prst="rect">
             <a:avLst/>
@@ -10681,14 +10539,14 @@
       </p:sp>
       <p:sp>
         <p:nvSpPr>
-          <p:cNvPr id="517" name="Text 26"/>
+          <p:cNvPr id="518" name="Text 26"/>
           <p:cNvSpPr/>
           <p:nvPr/>
         </p:nvSpPr>
         <p:spPr>
           <a:xfrm>
             <a:off x="611280" y="4913280"/>
-            <a:ext cx="5569200" cy="155880"/>
+            <a:ext cx="5567400" cy="154080"/>
           </a:xfrm>
           <a:prstGeom prst="rect">
             <a:avLst/>
@@ -10733,14 +10591,14 @@
       </p:sp>
       <p:sp>
         <p:nvSpPr>
-          <p:cNvPr id="518" name="Text 27"/>
+          <p:cNvPr id="519" name="Text 27"/>
           <p:cNvSpPr/>
           <p:nvPr/>
         </p:nvSpPr>
         <p:spPr>
           <a:xfrm>
             <a:off x="611280" y="5103720"/>
-            <a:ext cx="5561280" cy="124200"/>
+            <a:ext cx="5559480" cy="122400"/>
           </a:xfrm>
           <a:prstGeom prst="rect">
             <a:avLst/>
@@ -10785,14 +10643,14 @@
       </p:sp>
       <p:sp>
         <p:nvSpPr>
-          <p:cNvPr id="519" name="Shape 28"/>
+          <p:cNvPr id="520" name="Shape 28"/>
           <p:cNvSpPr/>
           <p:nvPr/>
         </p:nvSpPr>
         <p:spPr>
           <a:xfrm>
             <a:off x="484200" y="5452920"/>
-            <a:ext cx="5767560" cy="727200"/>
+            <a:ext cx="5765760" cy="725400"/>
           </a:xfrm>
           <a:custGeom>
             <a:avLst/>
@@ -10856,14 +10714,14 @@
       </p:sp>
       <p:sp>
         <p:nvSpPr>
-          <p:cNvPr id="520" name="Text 29"/>
+          <p:cNvPr id="521" name="Text 29"/>
           <p:cNvSpPr/>
           <p:nvPr/>
         </p:nvSpPr>
         <p:spPr>
           <a:xfrm>
             <a:off x="611280" y="5611680"/>
-            <a:ext cx="1108440" cy="187560"/>
+            <a:ext cx="1106640" cy="185760"/>
           </a:xfrm>
           <a:prstGeom prst="rect">
             <a:avLst/>
@@ -10908,14 +10766,14 @@
       </p:sp>
       <p:sp>
         <p:nvSpPr>
-          <p:cNvPr id="521" name="Text 30"/>
+          <p:cNvPr id="522" name="Text 30"/>
           <p:cNvSpPr/>
           <p:nvPr/>
         </p:nvSpPr>
         <p:spPr>
           <a:xfrm>
             <a:off x="5174280" y="5580000"/>
-            <a:ext cx="1044720" cy="251280"/>
+            <a:ext cx="1042920" cy="249480"/>
           </a:xfrm>
           <a:prstGeom prst="rect">
             <a:avLst/>
@@ -10960,14 +10818,14 @@
       </p:sp>
       <p:sp>
         <p:nvSpPr>
-          <p:cNvPr id="522" name="Text 31"/>
+          <p:cNvPr id="523" name="Text 31"/>
           <p:cNvSpPr/>
           <p:nvPr/>
         </p:nvSpPr>
         <p:spPr>
           <a:xfrm>
             <a:off x="611280" y="5897520"/>
-            <a:ext cx="5569200" cy="155880"/>
+            <a:ext cx="5567400" cy="154080"/>
           </a:xfrm>
           <a:prstGeom prst="rect">
             <a:avLst/>
@@ -11012,14 +10870,14 @@
       </p:sp>
       <p:sp>
         <p:nvSpPr>
-          <p:cNvPr id="523" name="Shape 32"/>
+          <p:cNvPr id="524" name="Shape 32"/>
           <p:cNvSpPr/>
           <p:nvPr/>
         </p:nvSpPr>
         <p:spPr>
           <a:xfrm>
             <a:off x="484200" y="6278400"/>
-            <a:ext cx="5767560" cy="885960"/>
+            <a:ext cx="5765760" cy="884160"/>
           </a:xfrm>
           <a:custGeom>
             <a:avLst/>
@@ -11083,14 +10941,14 @@
       </p:sp>
       <p:sp>
         <p:nvSpPr>
-          <p:cNvPr id="524" name="Text 33"/>
+          <p:cNvPr id="525" name="Text 33"/>
           <p:cNvSpPr/>
           <p:nvPr/>
         </p:nvSpPr>
         <p:spPr>
           <a:xfrm>
             <a:off x="611280" y="6437160"/>
-            <a:ext cx="1386360" cy="187560"/>
+            <a:ext cx="1384560" cy="185760"/>
           </a:xfrm>
           <a:prstGeom prst="rect">
             <a:avLst/>
@@ -11135,14 +10993,14 @@
       </p:sp>
       <p:sp>
         <p:nvSpPr>
-          <p:cNvPr id="525" name="Text 34"/>
+          <p:cNvPr id="526" name="Text 34"/>
           <p:cNvSpPr/>
           <p:nvPr/>
         </p:nvSpPr>
         <p:spPr>
           <a:xfrm>
             <a:off x="5180400" y="6405480"/>
-            <a:ext cx="1036800" cy="251280"/>
+            <a:ext cx="1035000" cy="249480"/>
           </a:xfrm>
           <a:prstGeom prst="rect">
             <a:avLst/>
@@ -11187,14 +11045,14 @@
       </p:sp>
       <p:sp>
         <p:nvSpPr>
-          <p:cNvPr id="526" name="Text 35"/>
+          <p:cNvPr id="527" name="Text 35"/>
           <p:cNvSpPr/>
           <p:nvPr/>
         </p:nvSpPr>
         <p:spPr>
           <a:xfrm>
             <a:off x="611280" y="6723000"/>
-            <a:ext cx="5569200" cy="155880"/>
+            <a:ext cx="5567400" cy="154080"/>
           </a:xfrm>
           <a:prstGeom prst="rect">
             <a:avLst/>
@@ -11239,14 +11097,14 @@
       </p:sp>
       <p:sp>
         <p:nvSpPr>
-          <p:cNvPr id="527" name="Text 36"/>
+          <p:cNvPr id="528" name="Text 36"/>
           <p:cNvSpPr/>
           <p:nvPr/>
         </p:nvSpPr>
         <p:spPr>
           <a:xfrm>
             <a:off x="611280" y="6913440"/>
-            <a:ext cx="5561280" cy="124200"/>
+            <a:ext cx="5559480" cy="122400"/>
           </a:xfrm>
           <a:prstGeom prst="rect">
             <a:avLst/>
@@ -11291,14 +11149,14 @@
       </p:sp>
       <p:sp>
         <p:nvSpPr>
-          <p:cNvPr id="528" name="Shape 37"/>
+          <p:cNvPr id="529" name="Shape 37"/>
           <p:cNvSpPr/>
           <p:nvPr/>
         </p:nvSpPr>
         <p:spPr>
           <a:xfrm>
             <a:off x="6551640" y="1178640"/>
-            <a:ext cx="5315400" cy="6148800"/>
+            <a:ext cx="5313600" cy="6147000"/>
           </a:xfrm>
           <a:custGeom>
             <a:avLst/>
@@ -11365,14 +11223,14 @@
       </p:sp>
       <p:sp>
         <p:nvSpPr>
-          <p:cNvPr id="529" name="Text 38"/>
+          <p:cNvPr id="530" name="Text 38"/>
           <p:cNvSpPr/>
           <p:nvPr/>
         </p:nvSpPr>
         <p:spPr>
           <a:xfrm>
             <a:off x="6714360" y="1341360"/>
-            <a:ext cx="5069160" cy="219240"/>
+            <a:ext cx="5067360" cy="217440"/>
           </a:xfrm>
           <a:prstGeom prst="rect">
             <a:avLst/>
@@ -11417,14 +11275,14 @@
       </p:sp>
       <p:sp>
         <p:nvSpPr>
-          <p:cNvPr id="530" name="Shape 39"/>
+          <p:cNvPr id="531" name="Shape 39"/>
           <p:cNvSpPr/>
           <p:nvPr/>
         </p:nvSpPr>
         <p:spPr>
           <a:xfrm>
             <a:off x="6714360" y="1690560"/>
-            <a:ext cx="4989960" cy="2799000"/>
+            <a:ext cx="4988160" cy="2797200"/>
           </a:xfrm>
           <a:custGeom>
             <a:avLst/>
@@ -11488,14 +11346,14 @@
       </p:sp>
       <p:sp>
         <p:nvSpPr>
-          <p:cNvPr id="531" name="Shape 40"/>
+          <p:cNvPr id="532" name="Shape 40"/>
           <p:cNvSpPr/>
           <p:nvPr/>
         </p:nvSpPr>
         <p:spPr>
           <a:xfrm>
             <a:off x="6873120" y="1849320"/>
-            <a:ext cx="378000" cy="378000"/>
+            <a:ext cx="376200" cy="376200"/>
           </a:xfrm>
           <a:custGeom>
             <a:avLst/>
@@ -11561,14 +11419,14 @@
       </p:sp>
       <p:sp>
         <p:nvSpPr>
-          <p:cNvPr id="532" name="Shape 41"/>
+          <p:cNvPr id="533" name="Shape 41"/>
           <p:cNvSpPr/>
           <p:nvPr/>
         </p:nvSpPr>
         <p:spPr>
           <a:xfrm>
             <a:off x="7004160" y="1960560"/>
-            <a:ext cx="116280" cy="155880"/>
+            <a:ext cx="114480" cy="154080"/>
           </a:xfrm>
           <a:custGeom>
             <a:avLst/>
@@ -11802,14 +11660,14 @@
       </p:sp>
       <p:sp>
         <p:nvSpPr>
-          <p:cNvPr id="533" name="Text 42"/>
+          <p:cNvPr id="534" name="Text 42"/>
           <p:cNvSpPr/>
           <p:nvPr/>
         </p:nvSpPr>
         <p:spPr>
           <a:xfrm>
             <a:off x="7349400" y="1865160"/>
-            <a:ext cx="3013200" cy="187560"/>
+            <a:ext cx="3011400" cy="185760"/>
           </a:xfrm>
           <a:prstGeom prst="rect">
             <a:avLst/>
@@ -11854,14 +11712,14 @@
       </p:sp>
       <p:sp>
         <p:nvSpPr>
-          <p:cNvPr id="534" name="Text 43"/>
+          <p:cNvPr id="535" name="Text 43"/>
           <p:cNvSpPr/>
           <p:nvPr/>
         </p:nvSpPr>
         <p:spPr>
           <a:xfrm>
             <a:off x="7349400" y="2055960"/>
-            <a:ext cx="3005280" cy="155880"/>
+            <a:ext cx="3003480" cy="154080"/>
           </a:xfrm>
           <a:prstGeom prst="rect">
             <a:avLst/>
@@ -11906,14 +11764,14 @@
       </p:sp>
       <p:sp>
         <p:nvSpPr>
-          <p:cNvPr id="535" name="Text 44"/>
+          <p:cNvPr id="536" name="Text 44"/>
           <p:cNvSpPr/>
           <p:nvPr/>
         </p:nvSpPr>
         <p:spPr>
           <a:xfrm>
             <a:off x="6873120" y="2373480"/>
-            <a:ext cx="703440" cy="155880"/>
+            <a:ext cx="701640" cy="154080"/>
           </a:xfrm>
           <a:prstGeom prst="rect">
             <a:avLst/>
@@ -11958,14 +11816,14 @@
       </p:sp>
       <p:sp>
         <p:nvSpPr>
-          <p:cNvPr id="536" name="Text 45"/>
+          <p:cNvPr id="537" name="Text 45"/>
           <p:cNvSpPr/>
           <p:nvPr/>
         </p:nvSpPr>
         <p:spPr>
           <a:xfrm>
             <a:off x="10321560" y="2357280"/>
-            <a:ext cx="1290960" cy="187560"/>
+            <a:ext cx="1289160" cy="185760"/>
           </a:xfrm>
           <a:prstGeom prst="rect">
             <a:avLst/>
@@ -12010,14 +11868,14 @@
       </p:sp>
       <p:sp>
         <p:nvSpPr>
-          <p:cNvPr id="537" name="Text 46"/>
+          <p:cNvPr id="538" name="Text 46"/>
           <p:cNvSpPr/>
           <p:nvPr/>
         </p:nvSpPr>
         <p:spPr>
           <a:xfrm>
             <a:off x="6873120" y="2674800"/>
-            <a:ext cx="775080" cy="155880"/>
+            <a:ext cx="773280" cy="154080"/>
           </a:xfrm>
           <a:prstGeom prst="rect">
             <a:avLst/>
@@ -12062,14 +11920,14 @@
       </p:sp>
       <p:sp>
         <p:nvSpPr>
-          <p:cNvPr id="538" name="Text 47"/>
+          <p:cNvPr id="539" name="Text 47"/>
           <p:cNvSpPr/>
           <p:nvPr/>
         </p:nvSpPr>
         <p:spPr>
           <a:xfrm>
             <a:off x="10810080" y="2643120"/>
-            <a:ext cx="806760" cy="219240"/>
+            <a:ext cx="804960" cy="217440"/>
           </a:xfrm>
           <a:prstGeom prst="rect">
             <a:avLst/>
@@ -12114,14 +11972,14 @@
       </p:sp>
       <p:sp>
         <p:nvSpPr>
-          <p:cNvPr id="539" name="Text 48"/>
+          <p:cNvPr id="540" name="Text 48"/>
           <p:cNvSpPr/>
           <p:nvPr/>
         </p:nvSpPr>
         <p:spPr>
           <a:xfrm>
             <a:off x="6873120" y="2976480"/>
-            <a:ext cx="552600" cy="155880"/>
+            <a:ext cx="550800" cy="154080"/>
           </a:xfrm>
           <a:prstGeom prst="rect">
             <a:avLst/>
@@ -12166,14 +12024,14 @@
       </p:sp>
       <p:sp>
         <p:nvSpPr>
-          <p:cNvPr id="540" name="Text 49"/>
+          <p:cNvPr id="541" name="Text 49"/>
           <p:cNvSpPr/>
           <p:nvPr/>
         </p:nvSpPr>
         <p:spPr>
           <a:xfrm>
             <a:off x="11028960" y="2960640"/>
-            <a:ext cx="584640" cy="187560"/>
+            <a:ext cx="582840" cy="185760"/>
           </a:xfrm>
           <a:prstGeom prst="rect">
             <a:avLst/>
@@ -12218,14 +12076,14 @@
       </p:sp>
       <p:sp>
         <p:nvSpPr>
-          <p:cNvPr id="541" name="Text 50"/>
+          <p:cNvPr id="542" name="Text 50"/>
           <p:cNvSpPr/>
           <p:nvPr/>
         </p:nvSpPr>
         <p:spPr>
           <a:xfrm>
             <a:off x="6873120" y="3262320"/>
-            <a:ext cx="893880" cy="155880"/>
+            <a:ext cx="892080" cy="154080"/>
           </a:xfrm>
           <a:prstGeom prst="rect">
             <a:avLst/>
@@ -12270,14 +12128,14 @@
       </p:sp>
       <p:sp>
         <p:nvSpPr>
-          <p:cNvPr id="542" name="Text 51"/>
+          <p:cNvPr id="543" name="Text 51"/>
           <p:cNvSpPr/>
           <p:nvPr/>
         </p:nvSpPr>
         <p:spPr>
           <a:xfrm>
             <a:off x="11202840" y="3246480"/>
-            <a:ext cx="410040" cy="187560"/>
+            <a:ext cx="408240" cy="185760"/>
           </a:xfrm>
           <a:prstGeom prst="rect">
             <a:avLst/>
@@ -12322,14 +12180,14 @@
       </p:sp>
       <p:sp>
         <p:nvSpPr>
-          <p:cNvPr id="543" name="Shape 52"/>
+          <p:cNvPr id="544" name="Shape 52"/>
           <p:cNvSpPr/>
           <p:nvPr/>
         </p:nvSpPr>
         <p:spPr>
           <a:xfrm>
             <a:off x="6873120" y="3567960"/>
-            <a:ext cx="4672440" cy="5040"/>
+            <a:ext cx="4670640" cy="3240"/>
           </a:xfrm>
           <a:custGeom>
             <a:avLst/>
@@ -12373,14 +12231,14 @@
       </p:sp>
       <p:sp>
         <p:nvSpPr>
-          <p:cNvPr id="544" name="Text 53"/>
+          <p:cNvPr id="545" name="Text 53"/>
           <p:cNvSpPr/>
           <p:nvPr/>
         </p:nvSpPr>
         <p:spPr>
           <a:xfrm>
             <a:off x="6873120" y="3699000"/>
-            <a:ext cx="4727880" cy="155880"/>
+            <a:ext cx="4726080" cy="154080"/>
           </a:xfrm>
           <a:prstGeom prst="rect">
             <a:avLst/>
@@ -12425,14 +12283,14 @@
       </p:sp>
       <p:sp>
         <p:nvSpPr>
-          <p:cNvPr id="545" name="Text 54"/>
+          <p:cNvPr id="546" name="Text 54"/>
           <p:cNvSpPr/>
           <p:nvPr/>
         </p:nvSpPr>
         <p:spPr>
           <a:xfrm>
             <a:off x="6873120" y="3921120"/>
-            <a:ext cx="4767480" cy="251280"/>
+            <a:ext cx="4765680" cy="249480"/>
           </a:xfrm>
           <a:prstGeom prst="rect">
             <a:avLst/>
@@ -12477,14 +12335,14 @@
       </p:sp>
       <p:sp>
         <p:nvSpPr>
-          <p:cNvPr id="546" name="Text 55"/>
+          <p:cNvPr id="547" name="Text 55"/>
           <p:cNvSpPr/>
           <p:nvPr/>
         </p:nvSpPr>
         <p:spPr>
           <a:xfrm>
             <a:off x="6873120" y="4206960"/>
-            <a:ext cx="4719960" cy="124200"/>
+            <a:ext cx="4718160" cy="122400"/>
           </a:xfrm>
           <a:prstGeom prst="rect">
             <a:avLst/>
@@ -12529,14 +12387,14 @@
       </p:sp>
       <p:sp>
         <p:nvSpPr>
-          <p:cNvPr id="547" name="Shape 56"/>
+          <p:cNvPr id="548" name="Shape 56"/>
           <p:cNvSpPr/>
           <p:nvPr/>
         </p:nvSpPr>
         <p:spPr>
           <a:xfrm>
             <a:off x="6718320" y="4623480"/>
-            <a:ext cx="4982040" cy="1179720"/>
+            <a:ext cx="4980240" cy="1177920"/>
           </a:xfrm>
           <a:custGeom>
             <a:avLst/>
@@ -12603,14 +12461,14 @@
       </p:sp>
       <p:sp>
         <p:nvSpPr>
-          <p:cNvPr id="548" name="Text 57"/>
+          <p:cNvPr id="549" name="Text 57"/>
           <p:cNvSpPr/>
           <p:nvPr/>
         </p:nvSpPr>
         <p:spPr>
           <a:xfrm>
             <a:off x="6849360" y="4754520"/>
-            <a:ext cx="4791240" cy="219240"/>
+            <a:ext cx="4789440" cy="217440"/>
           </a:xfrm>
           <a:prstGeom prst="rect">
             <a:avLst/>
@@ -12655,14 +12513,14 @@
       </p:sp>
       <p:sp>
         <p:nvSpPr>
-          <p:cNvPr id="549" name="Shape 58"/>
+          <p:cNvPr id="550" name="Shape 58"/>
           <p:cNvSpPr/>
           <p:nvPr/>
         </p:nvSpPr>
         <p:spPr>
           <a:xfrm>
             <a:off x="6849360" y="5072040"/>
-            <a:ext cx="2314800" cy="600480"/>
+            <a:ext cx="2313000" cy="598680"/>
           </a:xfrm>
           <a:custGeom>
             <a:avLst/>
@@ -12726,14 +12584,14 @@
       </p:sp>
       <p:sp>
         <p:nvSpPr>
-          <p:cNvPr id="550" name="Text 59"/>
+          <p:cNvPr id="551" name="Text 59"/>
           <p:cNvSpPr/>
           <p:nvPr/>
         </p:nvSpPr>
         <p:spPr>
           <a:xfrm>
             <a:off x="6920640" y="5167440"/>
-            <a:ext cx="2171880" cy="124200"/>
+            <a:ext cx="2170080" cy="122400"/>
           </a:xfrm>
           <a:prstGeom prst="rect">
             <a:avLst/>
@@ -12778,14 +12636,14 @@
       </p:sp>
       <p:sp>
         <p:nvSpPr>
-          <p:cNvPr id="551" name="Text 60"/>
+          <p:cNvPr id="552" name="Text 60"/>
           <p:cNvSpPr/>
           <p:nvPr/>
         </p:nvSpPr>
         <p:spPr>
           <a:xfrm>
             <a:off x="6896880" y="5326200"/>
-            <a:ext cx="2219760" cy="251280"/>
+            <a:ext cx="2217960" cy="249480"/>
           </a:xfrm>
           <a:prstGeom prst="rect">
             <a:avLst/>
@@ -12830,14 +12688,14 @@
       </p:sp>
       <p:sp>
         <p:nvSpPr>
-          <p:cNvPr id="552" name="Shape 61"/>
+          <p:cNvPr id="553" name="Shape 61"/>
           <p:cNvSpPr/>
           <p:nvPr/>
         </p:nvSpPr>
         <p:spPr>
           <a:xfrm>
             <a:off x="9258840" y="5072040"/>
-            <a:ext cx="2314800" cy="600480"/>
+            <a:ext cx="2313000" cy="598680"/>
           </a:xfrm>
           <a:custGeom>
             <a:avLst/>
@@ -12901,14 +12759,14 @@
       </p:sp>
       <p:sp>
         <p:nvSpPr>
-          <p:cNvPr id="553" name="Text 62"/>
+          <p:cNvPr id="554" name="Text 62"/>
           <p:cNvSpPr/>
           <p:nvPr/>
         </p:nvSpPr>
         <p:spPr>
           <a:xfrm>
             <a:off x="9330120" y="5167440"/>
-            <a:ext cx="2171880" cy="124200"/>
+            <a:ext cx="2170080" cy="122400"/>
           </a:xfrm>
           <a:prstGeom prst="rect">
             <a:avLst/>
@@ -12953,14 +12811,14 @@
       </p:sp>
       <p:sp>
         <p:nvSpPr>
-          <p:cNvPr id="554" name="Text 63"/>
+          <p:cNvPr id="555" name="Text 63"/>
           <p:cNvSpPr/>
           <p:nvPr/>
         </p:nvSpPr>
         <p:spPr>
           <a:xfrm>
             <a:off x="9306360" y="5326200"/>
-            <a:ext cx="2219760" cy="251280"/>
+            <a:ext cx="2217960" cy="249480"/>
           </a:xfrm>
           <a:prstGeom prst="rect">
             <a:avLst/>
@@ -13042,14 +12900,14 @@
       </p:grpSpPr>
       <p:sp>
         <p:nvSpPr>
-          <p:cNvPr id="555" name="Image 0"/>
+          <p:cNvPr id="556" name="Image 0"/>
           <p:cNvSpPr/>
           <p:nvPr/>
         </p:nvSpPr>
         <p:spPr>
           <a:xfrm>
             <a:off x="0" y="0"/>
-            <a:ext cx="12189240" cy="6855120"/>
+            <a:ext cx="12187440" cy="6853320"/>
           </a:xfrm>
           <a:prstGeom prst="roundRect">
             <a:avLst>
@@ -13074,14 +12932,14 @@
       </p:sp>
       <p:sp>
         <p:nvSpPr>
-          <p:cNvPr id="556" name="Shape 0"/>
+          <p:cNvPr id="557" name="Shape 0"/>
           <p:cNvSpPr/>
           <p:nvPr/>
         </p:nvSpPr>
         <p:spPr>
           <a:xfrm>
             <a:off x="0" y="0"/>
-            <a:ext cx="12189240" cy="6855120"/>
+            <a:ext cx="12187440" cy="6853320"/>
           </a:xfrm>
           <a:custGeom>
             <a:avLst/>
@@ -13137,14 +12995,14 @@
       </p:sp>
       <p:sp>
         <p:nvSpPr>
-          <p:cNvPr id="557" name="Text 1"/>
+          <p:cNvPr id="558" name="Text 1"/>
           <p:cNvSpPr/>
           <p:nvPr/>
         </p:nvSpPr>
         <p:spPr>
           <a:xfrm>
             <a:off x="380880" y="380880"/>
-            <a:ext cx="11493720" cy="187560"/>
+            <a:ext cx="11491920" cy="185760"/>
           </a:xfrm>
           <a:prstGeom prst="rect">
             <a:avLst/>
@@ -13172,7 +13030,7 @@
               <a:buNone/>
             </a:pPr>
             <a:r>
-              <a:rPr b="1" lang="en-US" sz="1050" spc="32" strike="noStrike">
+              <a:rPr b="1" lang="en-US" sz="1050" spc="18" strike="noStrike">
                 <a:solidFill>
                   <a:srgbClr val="6366f1"/>
                 </a:solidFill>
@@ -13189,14 +13047,14 @@
       </p:sp>
       <p:sp>
         <p:nvSpPr>
-          <p:cNvPr id="558" name="Text 2"/>
+          <p:cNvPr id="559" name="Text 2"/>
           <p:cNvSpPr/>
           <p:nvPr/>
         </p:nvSpPr>
         <p:spPr>
           <a:xfrm>
             <a:off x="380880" y="647640"/>
-            <a:ext cx="11655720" cy="454320"/>
+            <a:ext cx="11653920" cy="452520"/>
           </a:xfrm>
           <a:prstGeom prst="rect">
             <a:avLst/>
@@ -13241,14 +13099,14 @@
       </p:sp>
       <p:sp>
         <p:nvSpPr>
-          <p:cNvPr id="559" name="Text 3"/>
+          <p:cNvPr id="560" name="Text 3"/>
           <p:cNvSpPr/>
           <p:nvPr/>
         </p:nvSpPr>
         <p:spPr>
           <a:xfrm>
             <a:off x="380880" y="1219320"/>
-            <a:ext cx="11512800" cy="263880"/>
+            <a:ext cx="11511000" cy="262080"/>
           </a:xfrm>
           <a:prstGeom prst="rect">
             <a:avLst/>
@@ -13293,14 +13151,14 @@
       </p:sp>
       <p:sp>
         <p:nvSpPr>
-          <p:cNvPr id="560" name="Shape 4"/>
+          <p:cNvPr id="561" name="Shape 4"/>
           <p:cNvSpPr/>
           <p:nvPr/>
         </p:nvSpPr>
         <p:spPr>
           <a:xfrm>
             <a:off x="385920" y="1643040"/>
-            <a:ext cx="3273840" cy="1749600"/>
+            <a:ext cx="3272040" cy="1747800"/>
           </a:xfrm>
           <a:custGeom>
             <a:avLst/>
@@ -13369,14 +13227,14 @@
       </p:sp>
       <p:sp>
         <p:nvSpPr>
-          <p:cNvPr id="561" name="Shape 5"/>
+          <p:cNvPr id="562" name="Shape 5"/>
           <p:cNvSpPr/>
           <p:nvPr/>
         </p:nvSpPr>
         <p:spPr>
           <a:xfrm>
             <a:off x="581040" y="1838160"/>
-            <a:ext cx="378000" cy="378000"/>
+            <a:ext cx="376200" cy="376200"/>
           </a:xfrm>
           <a:custGeom>
             <a:avLst/>
@@ -13442,14 +13300,14 @@
       </p:sp>
       <p:sp>
         <p:nvSpPr>
-          <p:cNvPr id="562" name="Shape 6"/>
+          <p:cNvPr id="563" name="Shape 6"/>
           <p:cNvSpPr/>
           <p:nvPr/>
         </p:nvSpPr>
         <p:spPr>
           <a:xfrm>
             <a:off x="695160" y="1952640"/>
-            <a:ext cx="149400" cy="149400"/>
+            <a:ext cx="147600" cy="147600"/>
           </a:xfrm>
           <a:custGeom>
             <a:avLst/>
@@ -13619,14 +13477,14 @@
       </p:sp>
       <p:sp>
         <p:nvSpPr>
-          <p:cNvPr id="563" name="Text 7"/>
+          <p:cNvPr id="564" name="Text 7"/>
           <p:cNvSpPr/>
           <p:nvPr/>
         </p:nvSpPr>
         <p:spPr>
           <a:xfrm>
             <a:off x="1076400" y="1895400"/>
-            <a:ext cx="1121040" cy="263880"/>
+            <a:ext cx="1119240" cy="262080"/>
           </a:xfrm>
           <a:prstGeom prst="rect">
             <a:avLst/>
@@ -13671,14 +13529,14 @@
       </p:sp>
       <p:sp>
         <p:nvSpPr>
-          <p:cNvPr id="564" name="Text 8"/>
+          <p:cNvPr id="565" name="Text 8"/>
           <p:cNvSpPr/>
           <p:nvPr/>
         </p:nvSpPr>
         <p:spPr>
           <a:xfrm>
             <a:off x="581040" y="2333520"/>
-            <a:ext cx="2949840" cy="864000"/>
+            <a:ext cx="2948040" cy="862200"/>
           </a:xfrm>
           <a:prstGeom prst="rect">
             <a:avLst/>
@@ -13723,14 +13581,14 @@
       </p:sp>
       <p:sp>
         <p:nvSpPr>
-          <p:cNvPr id="565" name="Shape 9"/>
+          <p:cNvPr id="566" name="Shape 9"/>
           <p:cNvSpPr/>
           <p:nvPr/>
         </p:nvSpPr>
         <p:spPr>
           <a:xfrm>
             <a:off x="3822480" y="1643040"/>
-            <a:ext cx="3273840" cy="1749600"/>
+            <a:ext cx="3272040" cy="1747800"/>
           </a:xfrm>
           <a:custGeom>
             <a:avLst/>
@@ -13799,14 +13657,14 @@
       </p:sp>
       <p:sp>
         <p:nvSpPr>
-          <p:cNvPr id="566" name="Shape 10"/>
+          <p:cNvPr id="567" name="Shape 10"/>
           <p:cNvSpPr/>
           <p:nvPr/>
         </p:nvSpPr>
         <p:spPr>
           <a:xfrm>
             <a:off x="4017600" y="1838160"/>
-            <a:ext cx="378000" cy="378000"/>
+            <a:ext cx="376200" cy="376200"/>
           </a:xfrm>
           <a:custGeom>
             <a:avLst/>
@@ -13872,14 +13730,14 @@
       </p:sp>
       <p:sp>
         <p:nvSpPr>
-          <p:cNvPr id="567" name="Shape 11"/>
+          <p:cNvPr id="568" name="Shape 11"/>
           <p:cNvSpPr/>
           <p:nvPr/>
         </p:nvSpPr>
         <p:spPr>
           <a:xfrm>
             <a:off x="4113000" y="1952640"/>
-            <a:ext cx="187560" cy="149400"/>
+            <a:ext cx="185760" cy="147600"/>
           </a:xfrm>
           <a:custGeom>
             <a:avLst/>
@@ -14053,14 +13911,14 @@
       </p:sp>
       <p:sp>
         <p:nvSpPr>
-          <p:cNvPr id="568" name="Text 12"/>
+          <p:cNvPr id="569" name="Text 12"/>
           <p:cNvSpPr/>
           <p:nvPr/>
         </p:nvSpPr>
         <p:spPr>
           <a:xfrm>
             <a:off x="4512960" y="1895400"/>
-            <a:ext cx="1464120" cy="263880"/>
+            <a:ext cx="1462320" cy="262080"/>
           </a:xfrm>
           <a:prstGeom prst="rect">
             <a:avLst/>
@@ -14105,14 +13963,14 @@
       </p:sp>
       <p:sp>
         <p:nvSpPr>
-          <p:cNvPr id="569" name="Text 13"/>
+          <p:cNvPr id="570" name="Text 13"/>
           <p:cNvSpPr/>
           <p:nvPr/>
         </p:nvSpPr>
         <p:spPr>
           <a:xfrm>
             <a:off x="4017600" y="2333520"/>
-            <a:ext cx="2949840" cy="864000"/>
+            <a:ext cx="2948040" cy="862200"/>
           </a:xfrm>
           <a:prstGeom prst="rect">
             <a:avLst/>
@@ -14157,14 +14015,14 @@
       </p:sp>
       <p:sp>
         <p:nvSpPr>
-          <p:cNvPr id="570" name="Shape 14"/>
+          <p:cNvPr id="571" name="Shape 14"/>
           <p:cNvSpPr/>
           <p:nvPr/>
         </p:nvSpPr>
         <p:spPr>
           <a:xfrm>
             <a:off x="385920" y="3557520"/>
-            <a:ext cx="3273840" cy="1749600"/>
+            <a:ext cx="3272040" cy="1747800"/>
           </a:xfrm>
           <a:custGeom>
             <a:avLst/>
@@ -14233,14 +14091,14 @@
       </p:sp>
       <p:sp>
         <p:nvSpPr>
-          <p:cNvPr id="571" name="Shape 15"/>
+          <p:cNvPr id="572" name="Shape 15"/>
           <p:cNvSpPr/>
           <p:nvPr/>
         </p:nvSpPr>
         <p:spPr>
           <a:xfrm>
             <a:off x="581040" y="3753000"/>
-            <a:ext cx="378000" cy="378000"/>
+            <a:ext cx="376200" cy="376200"/>
           </a:xfrm>
           <a:custGeom>
             <a:avLst/>
@@ -14306,14 +14164,14 @@
       </p:sp>
       <p:sp>
         <p:nvSpPr>
-          <p:cNvPr id="572" name="Shape 16"/>
+          <p:cNvPr id="573" name="Shape 16"/>
           <p:cNvSpPr/>
           <p:nvPr/>
         </p:nvSpPr>
         <p:spPr>
           <a:xfrm>
             <a:off x="695160" y="3867120"/>
-            <a:ext cx="149400" cy="149400"/>
+            <a:ext cx="147600" cy="147600"/>
           </a:xfrm>
           <a:custGeom>
             <a:avLst/>
@@ -14529,14 +14387,14 @@
       </p:sp>
       <p:sp>
         <p:nvSpPr>
-          <p:cNvPr id="573" name="Text 17"/>
+          <p:cNvPr id="574" name="Text 17"/>
           <p:cNvSpPr/>
           <p:nvPr/>
         </p:nvSpPr>
         <p:spPr>
           <a:xfrm>
             <a:off x="1076400" y="3809880"/>
-            <a:ext cx="1540080" cy="263880"/>
+            <a:ext cx="1538280" cy="262080"/>
           </a:xfrm>
           <a:prstGeom prst="rect">
             <a:avLst/>
@@ -14581,14 +14439,14 @@
       </p:sp>
       <p:sp>
         <p:nvSpPr>
-          <p:cNvPr id="574" name="Text 18"/>
+          <p:cNvPr id="575" name="Text 18"/>
           <p:cNvSpPr/>
           <p:nvPr/>
         </p:nvSpPr>
         <p:spPr>
           <a:xfrm>
             <a:off x="581040" y="4248000"/>
-            <a:ext cx="2949840" cy="864000"/>
+            <a:ext cx="2948040" cy="862200"/>
           </a:xfrm>
           <a:prstGeom prst="rect">
             <a:avLst/>
@@ -14633,14 +14491,14 @@
       </p:sp>
       <p:sp>
         <p:nvSpPr>
-          <p:cNvPr id="575" name="Shape 19"/>
+          <p:cNvPr id="576" name="Shape 19"/>
           <p:cNvSpPr/>
           <p:nvPr/>
         </p:nvSpPr>
         <p:spPr>
           <a:xfrm>
             <a:off x="3822480" y="3557520"/>
-            <a:ext cx="3273840" cy="1749600"/>
+            <a:ext cx="3272040" cy="1747800"/>
           </a:xfrm>
           <a:custGeom>
             <a:avLst/>
@@ -14709,14 +14567,14 @@
       </p:sp>
       <p:sp>
         <p:nvSpPr>
-          <p:cNvPr id="576" name="Shape 20"/>
+          <p:cNvPr id="577" name="Shape 20"/>
           <p:cNvSpPr/>
           <p:nvPr/>
         </p:nvSpPr>
         <p:spPr>
           <a:xfrm>
             <a:off x="4017600" y="3753000"/>
-            <a:ext cx="378000" cy="378000"/>
+            <a:ext cx="376200" cy="376200"/>
           </a:xfrm>
           <a:custGeom>
             <a:avLst/>
@@ -14782,14 +14640,14 @@
       </p:sp>
       <p:sp>
         <p:nvSpPr>
-          <p:cNvPr id="577" name="Shape 21"/>
+          <p:cNvPr id="578" name="Shape 21"/>
           <p:cNvSpPr/>
           <p:nvPr/>
         </p:nvSpPr>
         <p:spPr>
           <a:xfrm>
             <a:off x="4122360" y="3867120"/>
-            <a:ext cx="168480" cy="149400"/>
+            <a:ext cx="166680" cy="147600"/>
           </a:xfrm>
           <a:custGeom>
             <a:avLst/>
@@ -14874,14 +14732,14 @@
       </p:sp>
       <p:sp>
         <p:nvSpPr>
-          <p:cNvPr id="578" name="Text 22"/>
+          <p:cNvPr id="579" name="Text 22"/>
           <p:cNvSpPr/>
           <p:nvPr/>
         </p:nvSpPr>
         <p:spPr>
           <a:xfrm>
             <a:off x="4512960" y="3809880"/>
-            <a:ext cx="1340280" cy="263880"/>
+            <a:ext cx="1338480" cy="262080"/>
           </a:xfrm>
           <a:prstGeom prst="rect">
             <a:avLst/>
@@ -14926,14 +14784,14 @@
       </p:sp>
       <p:sp>
         <p:nvSpPr>
-          <p:cNvPr id="579" name="Text 23"/>
+          <p:cNvPr id="580" name="Text 23"/>
           <p:cNvSpPr/>
           <p:nvPr/>
         </p:nvSpPr>
         <p:spPr>
           <a:xfrm>
             <a:off x="4017600" y="4248000"/>
-            <a:ext cx="2949840" cy="864000"/>
+            <a:ext cx="2948040" cy="862200"/>
           </a:xfrm>
           <a:prstGeom prst="rect">
             <a:avLst/>
@@ -14978,14 +14836,14 @@
       </p:sp>
       <p:sp>
         <p:nvSpPr>
-          <p:cNvPr id="580" name="Shape 24"/>
+          <p:cNvPr id="581" name="Shape 24"/>
           <p:cNvSpPr/>
           <p:nvPr/>
         </p:nvSpPr>
         <p:spPr>
           <a:xfrm>
             <a:off x="385920" y="5472000"/>
-            <a:ext cx="6712200" cy="1321200"/>
+            <a:ext cx="6710400" cy="1319400"/>
           </a:xfrm>
           <a:custGeom>
             <a:avLst/>
@@ -15054,14 +14912,14 @@
       </p:sp>
       <p:sp>
         <p:nvSpPr>
-          <p:cNvPr id="581" name="Shape 25"/>
+          <p:cNvPr id="582" name="Shape 25"/>
           <p:cNvSpPr/>
           <p:nvPr/>
         </p:nvSpPr>
         <p:spPr>
           <a:xfrm>
             <a:off x="581040" y="5667480"/>
-            <a:ext cx="378000" cy="378000"/>
+            <a:ext cx="376200" cy="376200"/>
           </a:xfrm>
           <a:custGeom>
             <a:avLst/>
@@ -15127,14 +14985,14 @@
       </p:sp>
       <p:sp>
         <p:nvSpPr>
-          <p:cNvPr id="582" name="Shape 26"/>
+          <p:cNvPr id="583" name="Shape 26"/>
           <p:cNvSpPr/>
           <p:nvPr/>
         </p:nvSpPr>
         <p:spPr>
           <a:xfrm>
             <a:off x="714240" y="5781600"/>
-            <a:ext cx="111600" cy="149400"/>
+            <a:ext cx="109800" cy="147600"/>
           </a:xfrm>
           <a:custGeom>
             <a:avLst/>
@@ -15238,14 +15096,14 @@
       </p:sp>
       <p:sp>
         <p:nvSpPr>
-          <p:cNvPr id="583" name="Text 27"/>
+          <p:cNvPr id="584" name="Text 27"/>
           <p:cNvSpPr/>
           <p:nvPr/>
         </p:nvSpPr>
         <p:spPr>
           <a:xfrm>
             <a:off x="1076400" y="5724360"/>
-            <a:ext cx="2054520" cy="263880"/>
+            <a:ext cx="2052720" cy="262080"/>
           </a:xfrm>
           <a:prstGeom prst="rect">
             <a:avLst/>
@@ -15290,14 +15148,14 @@
       </p:sp>
       <p:sp>
         <p:nvSpPr>
-          <p:cNvPr id="584" name="Text 28"/>
+          <p:cNvPr id="585" name="Text 28"/>
           <p:cNvSpPr/>
           <p:nvPr/>
         </p:nvSpPr>
         <p:spPr>
           <a:xfrm>
             <a:off x="581040" y="6162840"/>
-            <a:ext cx="6388560" cy="435240"/>
+            <a:ext cx="6386760" cy="433440"/>
           </a:xfrm>
           <a:prstGeom prst="rect">
             <a:avLst/>
@@ -15342,14 +15200,14 @@
       </p:sp>
       <p:sp>
         <p:nvSpPr>
-          <p:cNvPr id="585" name="Shape 29"/>
+          <p:cNvPr id="586" name="Shape 29"/>
           <p:cNvSpPr/>
           <p:nvPr/>
         </p:nvSpPr>
         <p:spPr>
           <a:xfrm>
             <a:off x="7335360" y="1643040"/>
-            <a:ext cx="4464360" cy="3873960"/>
+            <a:ext cx="4462560" cy="3872160"/>
           </a:xfrm>
           <a:custGeom>
             <a:avLst/>
@@ -15418,14 +15276,14 @@
       </p:sp>
       <p:sp>
         <p:nvSpPr>
-          <p:cNvPr id="586" name="Shape 30"/>
+          <p:cNvPr id="587" name="Shape 30"/>
           <p:cNvSpPr/>
           <p:nvPr/>
         </p:nvSpPr>
         <p:spPr>
           <a:xfrm>
             <a:off x="7611480" y="1895400"/>
-            <a:ext cx="197280" cy="225720"/>
+            <a:ext cx="195480" cy="223920"/>
           </a:xfrm>
           <a:custGeom>
             <a:avLst/>
@@ -15573,14 +15431,14 @@
       </p:sp>
       <p:sp>
         <p:nvSpPr>
-          <p:cNvPr id="587" name="Text 31"/>
+          <p:cNvPr id="588" name="Text 31"/>
           <p:cNvSpPr/>
           <p:nvPr/>
         </p:nvSpPr>
         <p:spPr>
           <a:xfrm>
             <a:off x="7968600" y="1876320"/>
-            <a:ext cx="1540080" cy="263880"/>
+            <a:ext cx="1538280" cy="262080"/>
           </a:xfrm>
           <a:prstGeom prst="rect">
             <a:avLst/>
@@ -15625,14 +15483,14 @@
       </p:sp>
       <p:sp>
         <p:nvSpPr>
-          <p:cNvPr id="588" name="Shape 32"/>
+          <p:cNvPr id="589" name="Shape 32"/>
           <p:cNvSpPr/>
           <p:nvPr/>
         </p:nvSpPr>
         <p:spPr>
           <a:xfrm>
             <a:off x="7587720" y="2295360"/>
-            <a:ext cx="3978720" cy="1082880"/>
+            <a:ext cx="3976920" cy="1081080"/>
           </a:xfrm>
           <a:custGeom>
             <a:avLst/>
@@ -15696,14 +15554,14 @@
       </p:sp>
       <p:sp>
         <p:nvSpPr>
-          <p:cNvPr id="589" name="Shape 33"/>
+          <p:cNvPr id="590" name="Shape 33"/>
           <p:cNvSpPr/>
           <p:nvPr/>
         </p:nvSpPr>
         <p:spPr>
           <a:xfrm>
             <a:off x="7587720" y="2295360"/>
-            <a:ext cx="35280" cy="1082880"/>
+            <a:ext cx="33480" cy="1081080"/>
           </a:xfrm>
           <a:custGeom>
             <a:avLst/>
@@ -15757,14 +15615,14 @@
       </p:sp>
       <p:sp>
         <p:nvSpPr>
-          <p:cNvPr id="590" name="Text 34"/>
+          <p:cNvPr id="591" name="Text 34"/>
           <p:cNvSpPr/>
           <p:nvPr/>
         </p:nvSpPr>
         <p:spPr>
           <a:xfrm>
             <a:off x="7759080" y="2448000"/>
-            <a:ext cx="3740400" cy="263880"/>
+            <a:ext cx="3738600" cy="262080"/>
           </a:xfrm>
           <a:prstGeom prst="rect">
             <a:avLst/>
@@ -15809,14 +15667,14 @@
       </p:sp>
       <p:sp>
         <p:nvSpPr>
-          <p:cNvPr id="591" name="Text 35"/>
+          <p:cNvPr id="592" name="Text 35"/>
           <p:cNvSpPr/>
           <p:nvPr/>
         </p:nvSpPr>
         <p:spPr>
           <a:xfrm>
             <a:off x="7759080" y="2790720"/>
-            <a:ext cx="3721320" cy="435240"/>
+            <a:ext cx="3719520" cy="433440"/>
           </a:xfrm>
           <a:prstGeom prst="rect">
             <a:avLst/>
@@ -15861,14 +15719,14 @@
       </p:sp>
       <p:sp>
         <p:nvSpPr>
-          <p:cNvPr id="592" name="Shape 36"/>
+          <p:cNvPr id="593" name="Shape 36"/>
           <p:cNvSpPr/>
           <p:nvPr/>
         </p:nvSpPr>
         <p:spPr>
           <a:xfrm>
             <a:off x="7568640" y="3529080"/>
-            <a:ext cx="302040" cy="302040"/>
+            <a:ext cx="300240" cy="300240"/>
           </a:xfrm>
           <a:custGeom>
             <a:avLst/>
@@ -15934,14 +15792,14 @@
       </p:sp>
       <p:sp>
         <p:nvSpPr>
-          <p:cNvPr id="593" name="Shape 37"/>
+          <p:cNvPr id="594" name="Shape 37"/>
           <p:cNvSpPr/>
           <p:nvPr/>
         </p:nvSpPr>
         <p:spPr>
           <a:xfrm>
             <a:off x="7673400" y="3614760"/>
-            <a:ext cx="97200" cy="130320"/>
+            <a:ext cx="95400" cy="128520"/>
           </a:xfrm>
           <a:custGeom>
             <a:avLst/>
@@ -16066,14 +15924,14 @@
       </p:sp>
       <p:sp>
         <p:nvSpPr>
-          <p:cNvPr id="594" name="Text 38"/>
+          <p:cNvPr id="595" name="Text 38"/>
           <p:cNvSpPr/>
           <p:nvPr/>
         </p:nvSpPr>
         <p:spPr>
           <a:xfrm>
             <a:off x="7987680" y="3586320"/>
-            <a:ext cx="1016280" cy="187560"/>
+            <a:ext cx="1014480" cy="185760"/>
           </a:xfrm>
           <a:prstGeom prst="rect">
             <a:avLst/>
@@ -16118,14 +15976,14 @@
       </p:sp>
       <p:sp>
         <p:nvSpPr>
-          <p:cNvPr id="595" name="Shape 39"/>
+          <p:cNvPr id="596" name="Shape 39"/>
           <p:cNvSpPr/>
           <p:nvPr/>
         </p:nvSpPr>
         <p:spPr>
           <a:xfrm>
             <a:off x="7568640" y="3948120"/>
-            <a:ext cx="302040" cy="302040"/>
+            <a:ext cx="300240" cy="300240"/>
           </a:xfrm>
           <a:custGeom>
             <a:avLst/>
@@ -16191,14 +16049,14 @@
       </p:sp>
       <p:sp>
         <p:nvSpPr>
-          <p:cNvPr id="596" name="Shape 40"/>
+          <p:cNvPr id="597" name="Shape 40"/>
           <p:cNvSpPr/>
           <p:nvPr/>
         </p:nvSpPr>
         <p:spPr>
           <a:xfrm>
             <a:off x="7639920" y="4033800"/>
-            <a:ext cx="163800" cy="130320"/>
+            <a:ext cx="162000" cy="128520"/>
           </a:xfrm>
           <a:custGeom>
             <a:avLst/>
@@ -16407,14 +16265,14 @@
       </p:sp>
       <p:sp>
         <p:nvSpPr>
-          <p:cNvPr id="597" name="Text 41"/>
+          <p:cNvPr id="598" name="Text 41"/>
           <p:cNvSpPr/>
           <p:nvPr/>
         </p:nvSpPr>
         <p:spPr>
           <a:xfrm>
             <a:off x="7987680" y="4005360"/>
-            <a:ext cx="2159280" cy="187560"/>
+            <a:ext cx="2157480" cy="185760"/>
           </a:xfrm>
           <a:prstGeom prst="rect">
             <a:avLst/>
@@ -16459,14 +16317,14 @@
       </p:sp>
       <p:sp>
         <p:nvSpPr>
-          <p:cNvPr id="598" name="Shape 42"/>
+          <p:cNvPr id="599" name="Shape 42"/>
           <p:cNvSpPr/>
           <p:nvPr/>
         </p:nvSpPr>
         <p:spPr>
           <a:xfrm>
             <a:off x="7568640" y="4367160"/>
-            <a:ext cx="302040" cy="302040"/>
+            <a:ext cx="300240" cy="300240"/>
           </a:xfrm>
           <a:custGeom>
             <a:avLst/>
@@ -16532,14 +16390,14 @@
       </p:sp>
       <p:sp>
         <p:nvSpPr>
-          <p:cNvPr id="599" name="Shape 43"/>
+          <p:cNvPr id="600" name="Shape 43"/>
           <p:cNvSpPr/>
           <p:nvPr/>
         </p:nvSpPr>
         <p:spPr>
           <a:xfrm>
             <a:off x="7656840" y="4452840"/>
-            <a:ext cx="130320" cy="130320"/>
+            <a:ext cx="128520" cy="128520"/>
           </a:xfrm>
           <a:custGeom>
             <a:avLst/>
@@ -16709,14 +16567,14 @@
       </p:sp>
       <p:sp>
         <p:nvSpPr>
-          <p:cNvPr id="600" name="Text 44"/>
+          <p:cNvPr id="601" name="Text 44"/>
           <p:cNvSpPr/>
           <p:nvPr/>
         </p:nvSpPr>
         <p:spPr>
           <a:xfrm>
             <a:off x="7987680" y="4424400"/>
-            <a:ext cx="2492640" cy="187560"/>
+            <a:ext cx="2490840" cy="185760"/>
           </a:xfrm>
           <a:prstGeom prst="rect">
             <a:avLst/>
@@ -16761,14 +16619,14 @@
       </p:sp>
       <p:sp>
         <p:nvSpPr>
-          <p:cNvPr id="601" name="Shape 45"/>
+          <p:cNvPr id="602" name="Shape 45"/>
           <p:cNvSpPr/>
           <p:nvPr/>
         </p:nvSpPr>
         <p:spPr>
           <a:xfrm>
             <a:off x="7335360" y="5676840"/>
-            <a:ext cx="4464360" cy="1111680"/>
+            <a:ext cx="4462560" cy="1109880"/>
           </a:xfrm>
           <a:custGeom>
             <a:avLst/>
@@ -16837,14 +16695,14 @@
       </p:sp>
       <p:sp>
         <p:nvSpPr>
-          <p:cNvPr id="602" name="Text 46"/>
+          <p:cNvPr id="603" name="Text 46"/>
           <p:cNvSpPr/>
           <p:nvPr/>
         </p:nvSpPr>
         <p:spPr>
           <a:xfrm>
             <a:off x="7497000" y="5872320"/>
-            <a:ext cx="4140360" cy="187560"/>
+            <a:ext cx="4138560" cy="185760"/>
           </a:xfrm>
           <a:prstGeom prst="rect">
             <a:avLst/>
@@ -16889,14 +16747,14 @@
       </p:sp>
       <p:sp>
         <p:nvSpPr>
-          <p:cNvPr id="603" name="Text 47"/>
+          <p:cNvPr id="604" name="Text 47"/>
           <p:cNvSpPr/>
           <p:nvPr/>
         </p:nvSpPr>
         <p:spPr>
           <a:xfrm>
             <a:off x="7492320" y="6138720"/>
-            <a:ext cx="4150080" cy="225720"/>
+            <a:ext cx="4148280" cy="223920"/>
           </a:xfrm>
           <a:prstGeom prst="rect">
             <a:avLst/>
@@ -16941,14 +16799,14 @@
       </p:sp>
       <p:sp>
         <p:nvSpPr>
-          <p:cNvPr id="604" name="Text 48"/>
+          <p:cNvPr id="605" name="Text 48"/>
           <p:cNvSpPr/>
           <p:nvPr/>
         </p:nvSpPr>
         <p:spPr>
           <a:xfrm>
             <a:off x="7497000" y="6405480"/>
-            <a:ext cx="4140360" cy="187560"/>
+            <a:ext cx="4138560" cy="185760"/>
           </a:xfrm>
           <a:prstGeom prst="rect">
             <a:avLst/>
@@ -17037,7 +16895,7 @@
         <p:spPr>
           <a:xfrm>
             <a:off x="380880" y="380880"/>
-            <a:ext cx="11493720" cy="187560"/>
+            <a:ext cx="11491920" cy="185760"/>
           </a:xfrm>
           <a:prstGeom prst="rect">
             <a:avLst/>
@@ -17065,7 +16923,7 @@
               <a:buNone/>
             </a:pPr>
             <a:r>
-              <a:rPr b="1" lang="en-US" sz="1050" spc="32" strike="noStrike">
+              <a:rPr b="1" lang="en-US" sz="1050" spc="18" strike="noStrike">
                 <a:solidFill>
                   <a:srgbClr val="6366f1"/>
                 </a:solidFill>
@@ -17089,7 +16947,7 @@
         <p:spPr>
           <a:xfrm>
             <a:off x="380880" y="647640"/>
-            <a:ext cx="11655720" cy="454320"/>
+            <a:ext cx="11653920" cy="452520"/>
           </a:xfrm>
           <a:prstGeom prst="rect">
             <a:avLst/>
@@ -17141,7 +16999,7 @@
         <p:spPr>
           <a:xfrm>
             <a:off x="385920" y="1414440"/>
-            <a:ext cx="3673800" cy="1797480"/>
+            <a:ext cx="3672000" cy="1795680"/>
           </a:xfrm>
           <a:custGeom>
             <a:avLst/>
@@ -17215,7 +17073,7 @@
         <p:spPr>
           <a:xfrm>
             <a:off x="619200" y="1647720"/>
-            <a:ext cx="454320" cy="454320"/>
+            <a:ext cx="452520" cy="452520"/>
           </a:xfrm>
           <a:custGeom>
             <a:avLst/>
@@ -17288,7 +17146,7 @@
         <p:spPr>
           <a:xfrm>
             <a:off x="748800" y="1743120"/>
-            <a:ext cx="292320" cy="263880"/>
+            <a:ext cx="290520" cy="262080"/>
           </a:xfrm>
           <a:prstGeom prst="rect">
             <a:avLst/>
@@ -17340,7 +17198,7 @@
         <p:spPr>
           <a:xfrm>
             <a:off x="619200" y="2257560"/>
-            <a:ext cx="3302280" cy="263880"/>
+            <a:ext cx="3300480" cy="262080"/>
           </a:xfrm>
           <a:prstGeom prst="rect">
             <a:avLst/>
@@ -17392,7 +17250,7 @@
         <p:spPr>
           <a:xfrm>
             <a:off x="619200" y="2600280"/>
-            <a:ext cx="3273840" cy="378000"/>
+            <a:ext cx="3272040" cy="376200"/>
           </a:xfrm>
           <a:prstGeom prst="rect">
             <a:avLst/>
@@ -17444,7 +17302,7 @@
         <p:spPr>
           <a:xfrm>
             <a:off x="4259160" y="1414440"/>
-            <a:ext cx="3673800" cy="1797480"/>
+            <a:ext cx="3672000" cy="1795680"/>
           </a:xfrm>
           <a:custGeom>
             <a:avLst/>
@@ -17518,7 +17376,7 @@
         <p:spPr>
           <a:xfrm>
             <a:off x="4492440" y="1647720"/>
-            <a:ext cx="454320" cy="454320"/>
+            <a:ext cx="452520" cy="452520"/>
           </a:xfrm>
           <a:custGeom>
             <a:avLst/>
@@ -17591,7 +17449,7 @@
         <p:spPr>
           <a:xfrm>
             <a:off x="4605120" y="1743120"/>
-            <a:ext cx="321120" cy="263880"/>
+            <a:ext cx="319320" cy="262080"/>
           </a:xfrm>
           <a:prstGeom prst="rect">
             <a:avLst/>
@@ -17643,7 +17501,7 @@
         <p:spPr>
           <a:xfrm>
             <a:off x="4492440" y="2257560"/>
-            <a:ext cx="3302280" cy="263880"/>
+            <a:ext cx="3300480" cy="262080"/>
           </a:xfrm>
           <a:prstGeom prst="rect">
             <a:avLst/>
@@ -17695,7 +17553,7 @@
         <p:spPr>
           <a:xfrm>
             <a:off x="4492440" y="2600280"/>
-            <a:ext cx="3273840" cy="187560"/>
+            <a:ext cx="3272040" cy="185760"/>
           </a:xfrm>
           <a:prstGeom prst="rect">
             <a:avLst/>
@@ -17747,7 +17605,7 @@
         <p:spPr>
           <a:xfrm>
             <a:off x="8132760" y="1414440"/>
-            <a:ext cx="3673800" cy="1797480"/>
+            <a:ext cx="3672000" cy="1795680"/>
           </a:xfrm>
           <a:custGeom>
             <a:avLst/>
@@ -17821,7 +17679,7 @@
         <p:spPr>
           <a:xfrm>
             <a:off x="8366040" y="1647720"/>
-            <a:ext cx="454320" cy="454320"/>
+            <a:ext cx="452520" cy="452520"/>
           </a:xfrm>
           <a:custGeom>
             <a:avLst/>
@@ -17894,7 +17752,7 @@
         <p:spPr>
           <a:xfrm>
             <a:off x="8477640" y="1743120"/>
-            <a:ext cx="330480" cy="263880"/>
+            <a:ext cx="328680" cy="262080"/>
           </a:xfrm>
           <a:prstGeom prst="rect">
             <a:avLst/>
@@ -17946,7 +17804,7 @@
         <p:spPr>
           <a:xfrm>
             <a:off x="8366040" y="2257560"/>
-            <a:ext cx="3302280" cy="263880"/>
+            <a:ext cx="3300480" cy="262080"/>
           </a:xfrm>
           <a:prstGeom prst="rect">
             <a:avLst/>
@@ -17998,7 +17856,7 @@
         <p:spPr>
           <a:xfrm>
             <a:off x="8366040" y="2600280"/>
-            <a:ext cx="3273840" cy="187560"/>
+            <a:ext cx="3272040" cy="185760"/>
           </a:xfrm>
           <a:prstGeom prst="rect">
             <a:avLst/>
@@ -18050,7 +17908,7 @@
         <p:spPr>
           <a:xfrm>
             <a:off x="385920" y="3414600"/>
-            <a:ext cx="3673800" cy="1606680"/>
+            <a:ext cx="3672000" cy="1604880"/>
           </a:xfrm>
           <a:custGeom>
             <a:avLst/>
@@ -18124,7 +17982,7 @@
         <p:spPr>
           <a:xfrm>
             <a:off x="619200" y="3648240"/>
-            <a:ext cx="454320" cy="454320"/>
+            <a:ext cx="452520" cy="452520"/>
           </a:xfrm>
           <a:custGeom>
             <a:avLst/>
@@ -18197,7 +18055,7 @@
         <p:spPr>
           <a:xfrm>
             <a:off x="730800" y="3743280"/>
-            <a:ext cx="330480" cy="263880"/>
+            <a:ext cx="328680" cy="262080"/>
           </a:xfrm>
           <a:prstGeom prst="rect">
             <a:avLst/>
@@ -18249,7 +18107,7 @@
         <p:spPr>
           <a:xfrm>
             <a:off x="619200" y="4257720"/>
-            <a:ext cx="3302280" cy="263880"/>
+            <a:ext cx="3300480" cy="262080"/>
           </a:xfrm>
           <a:prstGeom prst="rect">
             <a:avLst/>
@@ -18301,7 +18159,7 @@
         <p:spPr>
           <a:xfrm>
             <a:off x="619200" y="4600440"/>
-            <a:ext cx="3273840" cy="187560"/>
+            <a:ext cx="3272040" cy="185760"/>
           </a:xfrm>
           <a:prstGeom prst="rect">
             <a:avLst/>
@@ -18353,7 +18211,7 @@
         <p:spPr>
           <a:xfrm>
             <a:off x="4259160" y="3414600"/>
-            <a:ext cx="3673800" cy="1606680"/>
+            <a:ext cx="3672000" cy="1604880"/>
           </a:xfrm>
           <a:custGeom>
             <a:avLst/>
@@ -18427,7 +18285,7 @@
         <p:spPr>
           <a:xfrm>
             <a:off x="4492440" y="3648240"/>
-            <a:ext cx="454320" cy="454320"/>
+            <a:ext cx="452520" cy="452520"/>
           </a:xfrm>
           <a:custGeom>
             <a:avLst/>
@@ -18500,7 +18358,7 @@
         <p:spPr>
           <a:xfrm>
             <a:off x="4605480" y="3743280"/>
-            <a:ext cx="321120" cy="263880"/>
+            <a:ext cx="319320" cy="262080"/>
           </a:xfrm>
           <a:prstGeom prst="rect">
             <a:avLst/>
@@ -18552,7 +18410,7 @@
         <p:spPr>
           <a:xfrm>
             <a:off x="4492440" y="4257720"/>
-            <a:ext cx="3302280" cy="263880"/>
+            <a:ext cx="3300480" cy="262080"/>
           </a:xfrm>
           <a:prstGeom prst="rect">
             <a:avLst/>
@@ -18604,7 +18462,7 @@
         <p:spPr>
           <a:xfrm>
             <a:off x="4492440" y="4600440"/>
-            <a:ext cx="3273840" cy="187560"/>
+            <a:ext cx="3272040" cy="185760"/>
           </a:xfrm>
           <a:prstGeom prst="rect">
             <a:avLst/>
@@ -18656,7 +18514,7 @@
         <p:spPr>
           <a:xfrm>
             <a:off x="8132760" y="3414600"/>
-            <a:ext cx="3673800" cy="1606680"/>
+            <a:ext cx="3672000" cy="1604880"/>
           </a:xfrm>
           <a:custGeom>
             <a:avLst/>
@@ -18730,7 +18588,7 @@
         <p:spPr>
           <a:xfrm>
             <a:off x="8366040" y="3648240"/>
-            <a:ext cx="454320" cy="454320"/>
+            <a:ext cx="452520" cy="452520"/>
           </a:xfrm>
           <a:custGeom>
             <a:avLst/>
@@ -18803,7 +18661,7 @@
         <p:spPr>
           <a:xfrm>
             <a:off x="8476920" y="3743280"/>
-            <a:ext cx="330480" cy="263880"/>
+            <a:ext cx="328680" cy="262080"/>
           </a:xfrm>
           <a:prstGeom prst="rect">
             <a:avLst/>
@@ -18855,7 +18713,7 @@
         <p:spPr>
           <a:xfrm>
             <a:off x="8366040" y="4257720"/>
-            <a:ext cx="3302280" cy="263880"/>
+            <a:ext cx="3300480" cy="262080"/>
           </a:xfrm>
           <a:prstGeom prst="rect">
             <a:avLst/>
@@ -18907,7 +18765,7 @@
         <p:spPr>
           <a:xfrm>
             <a:off x="8366040" y="4600440"/>
-            <a:ext cx="3273840" cy="187560"/>
+            <a:ext cx="3272040" cy="185760"/>
           </a:xfrm>
           <a:prstGeom prst="rect">
             <a:avLst/>
@@ -18959,7 +18817,7 @@
         <p:spPr>
           <a:xfrm>
             <a:off x="385920" y="5224320"/>
-            <a:ext cx="3673800" cy="1606680"/>
+            <a:ext cx="3672000" cy="1604880"/>
           </a:xfrm>
           <a:custGeom>
             <a:avLst/>
@@ -19033,7 +18891,7 @@
         <p:spPr>
           <a:xfrm>
             <a:off x="619200" y="5457960"/>
-            <a:ext cx="454320" cy="454320"/>
+            <a:ext cx="452520" cy="452520"/>
           </a:xfrm>
           <a:custGeom>
             <a:avLst/>
@@ -19106,7 +18964,7 @@
         <p:spPr>
           <a:xfrm>
             <a:off x="738360" y="5553000"/>
-            <a:ext cx="311400" cy="263880"/>
+            <a:ext cx="309600" cy="262080"/>
           </a:xfrm>
           <a:prstGeom prst="rect">
             <a:avLst/>
@@ -19158,7 +19016,7 @@
         <p:spPr>
           <a:xfrm>
             <a:off x="619200" y="6067440"/>
-            <a:ext cx="3302280" cy="263880"/>
+            <a:ext cx="3300480" cy="262080"/>
           </a:xfrm>
           <a:prstGeom prst="rect">
             <a:avLst/>
@@ -19210,7 +19068,7 @@
         <p:spPr>
           <a:xfrm>
             <a:off x="619200" y="6410160"/>
-            <a:ext cx="3273840" cy="187560"/>
+            <a:ext cx="3272040" cy="185760"/>
           </a:xfrm>
           <a:prstGeom prst="rect">
             <a:avLst/>
@@ -19262,7 +19120,7 @@
         <p:spPr>
           <a:xfrm>
             <a:off x="4259160" y="5224320"/>
-            <a:ext cx="3673800" cy="1606680"/>
+            <a:ext cx="3672000" cy="1604880"/>
           </a:xfrm>
           <a:custGeom>
             <a:avLst/>
@@ -19336,7 +19194,7 @@
         <p:spPr>
           <a:xfrm>
             <a:off x="4492440" y="5457960"/>
-            <a:ext cx="454320" cy="454320"/>
+            <a:ext cx="452520" cy="452520"/>
           </a:xfrm>
           <a:custGeom>
             <a:avLst/>
@@ -19409,7 +19267,7 @@
         <p:spPr>
           <a:xfrm>
             <a:off x="4601880" y="5553000"/>
-            <a:ext cx="330480" cy="263880"/>
+            <a:ext cx="328680" cy="262080"/>
           </a:xfrm>
           <a:prstGeom prst="rect">
             <a:avLst/>
@@ -19461,7 +19319,7 @@
         <p:spPr>
           <a:xfrm>
             <a:off x="4492440" y="6067440"/>
-            <a:ext cx="3302280" cy="263880"/>
+            <a:ext cx="3300480" cy="262080"/>
           </a:xfrm>
           <a:prstGeom prst="rect">
             <a:avLst/>
@@ -19513,7 +19371,7 @@
         <p:spPr>
           <a:xfrm>
             <a:off x="4492440" y="6410160"/>
-            <a:ext cx="3273840" cy="187560"/>
+            <a:ext cx="3272040" cy="185760"/>
           </a:xfrm>
           <a:prstGeom prst="rect">
             <a:avLst/>
@@ -19565,7 +19423,7 @@
         <p:spPr>
           <a:xfrm>
             <a:off x="8132760" y="5224320"/>
-            <a:ext cx="3673800" cy="1606680"/>
+            <a:ext cx="3672000" cy="1604880"/>
           </a:xfrm>
           <a:custGeom>
             <a:avLst/>
@@ -19639,7 +19497,7 @@
         <p:spPr>
           <a:xfrm>
             <a:off x="8366040" y="5457960"/>
-            <a:ext cx="454320" cy="454320"/>
+            <a:ext cx="452520" cy="452520"/>
           </a:xfrm>
           <a:custGeom>
             <a:avLst/>
@@ -19712,7 +19570,7 @@
         <p:spPr>
           <a:xfrm>
             <a:off x="8476920" y="5553000"/>
-            <a:ext cx="330480" cy="263880"/>
+            <a:ext cx="328680" cy="262080"/>
           </a:xfrm>
           <a:prstGeom prst="rect">
             <a:avLst/>
@@ -19764,7 +19622,7 @@
         <p:spPr>
           <a:xfrm>
             <a:off x="8366040" y="6067440"/>
-            <a:ext cx="3302280" cy="263880"/>
+            <a:ext cx="3300480" cy="262080"/>
           </a:xfrm>
           <a:prstGeom prst="rect">
             <a:avLst/>
@@ -19816,7 +19674,7 @@
         <p:spPr>
           <a:xfrm>
             <a:off x="8366040" y="6410160"/>
-            <a:ext cx="3273840" cy="187560"/>
+            <a:ext cx="3272040" cy="185760"/>
           </a:xfrm>
           <a:prstGeom prst="rect">
             <a:avLst/>
@@ -19905,7 +19763,7 @@
         <p:spPr>
           <a:xfrm>
             <a:off x="379080" y="379080"/>
-            <a:ext cx="11497680" cy="186480"/>
+            <a:ext cx="11495880" cy="184680"/>
           </a:xfrm>
           <a:prstGeom prst="rect">
             <a:avLst/>
@@ -19933,7 +19791,7 @@
               <a:buNone/>
             </a:pPr>
             <a:r>
-              <a:rPr b="1" lang="en-US" sz="1050" spc="29" strike="noStrike">
+              <a:rPr b="1" lang="en-US" sz="1050" spc="15" strike="noStrike">
                 <a:solidFill>
                   <a:srgbClr val="6366f1"/>
                 </a:solidFill>
@@ -19957,7 +19815,7 @@
         <p:spPr>
           <a:xfrm>
             <a:off x="379080" y="644040"/>
-            <a:ext cx="11601720" cy="376200"/>
+            <a:ext cx="11599920" cy="374400"/>
           </a:xfrm>
           <a:prstGeom prst="rect">
             <a:avLst/>
@@ -20009,7 +19867,7 @@
         <p:spPr>
           <a:xfrm>
             <a:off x="383760" y="1255320"/>
-            <a:ext cx="6647400" cy="1730880"/>
+            <a:ext cx="6645600" cy="1729080"/>
           </a:xfrm>
           <a:custGeom>
             <a:avLst/>
@@ -20083,7 +19941,7 @@
         <p:spPr>
           <a:xfrm>
             <a:off x="615600" y="1487160"/>
-            <a:ext cx="376200" cy="376200"/>
+            <a:ext cx="374400" cy="374400"/>
           </a:xfrm>
           <a:custGeom>
             <a:avLst/>
@@ -20156,7 +20014,7 @@
         <p:spPr>
           <a:xfrm>
             <a:off x="729360" y="1600920"/>
-            <a:ext cx="148680" cy="148680"/>
+            <a:ext cx="146880" cy="146880"/>
           </a:xfrm>
           <a:custGeom>
             <a:avLst/>
@@ -20280,7 +20138,7 @@
         <p:spPr>
           <a:xfrm>
             <a:off x="1108440" y="1544040"/>
-            <a:ext cx="2412720" cy="262440"/>
+            <a:ext cx="2410920" cy="260640"/>
           </a:xfrm>
           <a:prstGeom prst="rect">
             <a:avLst/>
@@ -20332,7 +20190,7 @@
         <p:spPr>
           <a:xfrm>
             <a:off x="615600" y="2017800"/>
-            <a:ext cx="6258960" cy="736200"/>
+            <a:ext cx="6257160" cy="734400"/>
           </a:xfrm>
           <a:prstGeom prst="rect">
             <a:avLst/>
@@ -20424,7 +20282,7 @@
         <p:spPr>
           <a:xfrm>
             <a:off x="383760" y="3187800"/>
-            <a:ext cx="6647400" cy="1730880"/>
+            <a:ext cx="6645600" cy="1729080"/>
           </a:xfrm>
           <a:custGeom>
             <a:avLst/>
@@ -20498,7 +20356,7 @@
         <p:spPr>
           <a:xfrm>
             <a:off x="615600" y="3420000"/>
-            <a:ext cx="376200" cy="376200"/>
+            <a:ext cx="374400" cy="374400"/>
           </a:xfrm>
           <a:custGeom>
             <a:avLst/>
@@ -20571,7 +20429,7 @@
         <p:spPr>
           <a:xfrm>
             <a:off x="710640" y="3533400"/>
-            <a:ext cx="186480" cy="148680"/>
+            <a:ext cx="184680" cy="146880"/>
           </a:xfrm>
           <a:custGeom>
             <a:avLst/>
@@ -20752,7 +20610,7 @@
         <p:spPr>
           <a:xfrm>
             <a:off x="1108440" y="3476520"/>
-            <a:ext cx="1645560" cy="262440"/>
+            <a:ext cx="1643760" cy="260640"/>
           </a:xfrm>
           <a:prstGeom prst="rect">
             <a:avLst/>
@@ -20804,7 +20662,7 @@
         <p:spPr>
           <a:xfrm>
             <a:off x="615600" y="3950280"/>
-            <a:ext cx="6258960" cy="736200"/>
+            <a:ext cx="6257160" cy="734400"/>
           </a:xfrm>
           <a:prstGeom prst="rect">
             <a:avLst/>
@@ -20896,7 +20754,7 @@
         <p:spPr>
           <a:xfrm>
             <a:off x="383760" y="5120280"/>
-            <a:ext cx="6647400" cy="1730880"/>
+            <a:ext cx="6645600" cy="1729080"/>
           </a:xfrm>
           <a:custGeom>
             <a:avLst/>
@@ -20970,7 +20828,7 @@
         <p:spPr>
           <a:xfrm>
             <a:off x="615600" y="5352480"/>
-            <a:ext cx="376200" cy="376200"/>
+            <a:ext cx="374400" cy="374400"/>
           </a:xfrm>
           <a:custGeom>
             <a:avLst/>
@@ -21043,7 +20901,7 @@
         <p:spPr>
           <a:xfrm>
             <a:off x="729360" y="5465880"/>
-            <a:ext cx="148680" cy="148680"/>
+            <a:ext cx="146880" cy="146880"/>
           </a:xfrm>
           <a:custGeom>
             <a:avLst/>
@@ -21266,7 +21124,7 @@
         <p:spPr>
           <a:xfrm>
             <a:off x="1108440" y="5409360"/>
-            <a:ext cx="1977120" cy="262440"/>
+            <a:ext cx="1975320" cy="260640"/>
           </a:xfrm>
           <a:prstGeom prst="rect">
             <a:avLst/>
@@ -21318,7 +21176,7 @@
         <p:spPr>
           <a:xfrm>
             <a:off x="615600" y="5882760"/>
-            <a:ext cx="6258960" cy="736200"/>
+            <a:ext cx="6257160" cy="734400"/>
           </a:xfrm>
           <a:prstGeom prst="rect">
             <a:avLst/>
@@ -21390,7 +21248,7 @@
         <p:spPr>
           <a:xfrm>
             <a:off x="7271640" y="1255320"/>
-            <a:ext cx="4534920" cy="5595840"/>
+            <a:ext cx="4533120" cy="5594040"/>
           </a:xfrm>
           <a:custGeom>
             <a:avLst/>
@@ -21464,7 +21322,7 @@
         <p:spPr>
           <a:xfrm>
             <a:off x="7503840" y="1487160"/>
-            <a:ext cx="376200" cy="376200"/>
+            <a:ext cx="374400" cy="374400"/>
           </a:xfrm>
           <a:custGeom>
             <a:avLst/>
@@ -21537,7 +21395,7 @@
         <p:spPr>
           <a:xfrm>
             <a:off x="7626960" y="1600920"/>
-            <a:ext cx="129600" cy="148680"/>
+            <a:ext cx="127800" cy="146880"/>
           </a:xfrm>
           <a:custGeom>
             <a:avLst/>
@@ -21692,7 +21550,7 @@
         <p:spPr>
           <a:xfrm>
             <a:off x="7996320" y="1544040"/>
-            <a:ext cx="1938960" cy="262440"/>
+            <a:ext cx="1937160" cy="260640"/>
           </a:xfrm>
           <a:prstGeom prst="rect">
             <a:avLst/>
@@ -21744,7 +21602,7 @@
         <p:spPr>
           <a:xfrm>
             <a:off x="7522920" y="2017800"/>
-            <a:ext cx="4051800" cy="3331800"/>
+            <a:ext cx="4050000" cy="3330000"/>
           </a:xfrm>
           <a:custGeom>
             <a:avLst/>
@@ -21815,7 +21673,7 @@
         <p:spPr>
           <a:xfrm>
             <a:off x="7522920" y="2017800"/>
-            <a:ext cx="34920" cy="3331800"/>
+            <a:ext cx="33120" cy="3330000"/>
           </a:xfrm>
           <a:custGeom>
             <a:avLst/>
@@ -21876,7 +21734,7 @@
         <p:spPr>
           <a:xfrm>
             <a:off x="7731000" y="2821680"/>
-            <a:ext cx="3738960" cy="1380240"/>
+            <a:ext cx="3737160" cy="1378440"/>
           </a:xfrm>
           <a:prstGeom prst="rect">
             <a:avLst/>
@@ -21928,7 +21786,7 @@
         <p:spPr>
           <a:xfrm>
             <a:off x="7731000" y="4358880"/>
-            <a:ext cx="3720240" cy="186480"/>
+            <a:ext cx="3718440" cy="184680"/>
           </a:xfrm>
           <a:prstGeom prst="rect">
             <a:avLst/>
@@ -21990,7 +21848,7 @@
         <p:spPr>
           <a:xfrm>
             <a:off x="7508520" y="5546520"/>
-            <a:ext cx="1948680" cy="1067760"/>
+            <a:ext cx="1946880" cy="1065960"/>
           </a:xfrm>
           <a:custGeom>
             <a:avLst/>
@@ -22064,7 +21922,7 @@
         <p:spPr>
           <a:xfrm>
             <a:off x="7631640" y="5702760"/>
-            <a:ext cx="1702440" cy="186480"/>
+            <a:ext cx="1700640" cy="184680"/>
           </a:xfrm>
           <a:prstGeom prst="rect">
             <a:avLst/>
@@ -22116,7 +21974,7 @@
         <p:spPr>
           <a:xfrm>
             <a:off x="7593840" y="5930280"/>
-            <a:ext cx="1778040" cy="338040"/>
+            <a:ext cx="1776240" cy="336240"/>
           </a:xfrm>
           <a:prstGeom prst="rect">
             <a:avLst/>
@@ -22168,7 +22026,7 @@
         <p:spPr>
           <a:xfrm>
             <a:off x="7636320" y="6309000"/>
-            <a:ext cx="1692720" cy="148680"/>
+            <a:ext cx="1690920" cy="146880"/>
           </a:xfrm>
           <a:prstGeom prst="rect">
             <a:avLst/>
@@ -22220,7 +22078,7 @@
         <p:spPr>
           <a:xfrm>
             <a:off x="9621000" y="5546520"/>
-            <a:ext cx="1948680" cy="1067760"/>
+            <a:ext cx="1946880" cy="1065960"/>
           </a:xfrm>
           <a:custGeom>
             <a:avLst/>
@@ -22294,7 +22152,7 @@
         <p:spPr>
           <a:xfrm>
             <a:off x="9744120" y="5702760"/>
-            <a:ext cx="1702440" cy="186480"/>
+            <a:ext cx="1700640" cy="184680"/>
           </a:xfrm>
           <a:prstGeom prst="rect">
             <a:avLst/>
@@ -22346,7 +22204,7 @@
         <p:spPr>
           <a:xfrm>
             <a:off x="9706320" y="5930280"/>
-            <a:ext cx="1778040" cy="338040"/>
+            <a:ext cx="1776240" cy="336240"/>
           </a:xfrm>
           <a:prstGeom prst="rect">
             <a:avLst/>
@@ -22398,7 +22256,7 @@
         <p:spPr>
           <a:xfrm>
             <a:off x="9748800" y="6309000"/>
-            <a:ext cx="1692720" cy="148680"/>
+            <a:ext cx="1690920" cy="146880"/>
           </a:xfrm>
           <a:prstGeom prst="rect">
             <a:avLst/>
@@ -22436,6 +22294,42 @@
               <a:t>+4pp YoY</a:t>
             </a:r>
             <a:endParaRPr b="0" lang="en-HK" sz="900" spc="-1" strike="noStrike">
+              <a:latin typeface="Arial"/>
+            </a:endParaRPr>
+          </a:p>
+        </p:txBody>
+      </p:sp>
+      <p:sp>
+        <p:nvSpPr>
+          <p:cNvPr id="137" name=""/>
+          <p:cNvSpPr txBox="1"/>
+          <p:nvPr/>
+        </p:nvSpPr>
+        <p:spPr>
+          <a:xfrm>
+            <a:off x="7556040" y="4860000"/>
+            <a:ext cx="3963960" cy="1114200"/>
+          </a:xfrm>
+          <a:prstGeom prst="rect">
+            <a:avLst/>
+          </a:prstGeom>
+          <a:noFill/>
+          <a:ln w="0">
+            <a:noFill/>
+          </a:ln>
+        </p:spPr>
+        <p:txBody>
+          <a:bodyPr lIns="90000" rIns="90000" tIns="45000" bIns="45000" anchor="t">
+            <a:noAutofit/>
+          </a:bodyPr>
+          <a:p>
+            <a:r>
+              <a:rPr b="0" lang="en-HK" sz="1800" spc="-1" strike="noStrike">
+                <a:latin typeface="Arial"/>
+              </a:rPr>
+              <a:t>Emphasis: 15% revenue growth demonstrates continued monetization strength. WeChat MAU milestone of 1.41 billion users.</a:t>
+            </a:r>
+            <a:endParaRPr b="0" lang="en-HK" sz="1800" spc="-1" strike="noStrike">
               <a:latin typeface="Arial"/>
             </a:endParaRPr>
           </a:p>
@@ -22480,14 +22374,14 @@
       </p:grpSpPr>
       <p:sp>
         <p:nvSpPr>
-          <p:cNvPr id="137" name="Text 0"/>
+          <p:cNvPr id="138" name="Text 0"/>
           <p:cNvSpPr/>
           <p:nvPr/>
         </p:nvSpPr>
         <p:spPr>
           <a:xfrm>
             <a:off x="365400" y="365400"/>
-            <a:ext cx="11522520" cy="179640"/>
+            <a:ext cx="11520720" cy="177840"/>
           </a:xfrm>
           <a:prstGeom prst="rect">
             <a:avLst/>
@@ -22515,7 +22409,7 @@
               <a:buNone/>
             </a:pPr>
             <a:r>
-              <a:rPr b="1" lang="en-US" sz="1010" spc="29" strike="noStrike">
+              <a:rPr b="1" lang="en-US" sz="1010" spc="15" strike="noStrike">
                 <a:solidFill>
                   <a:srgbClr val="6366f1"/>
                 </a:solidFill>
@@ -22532,14 +22426,14 @@
       </p:sp>
       <p:sp>
         <p:nvSpPr>
-          <p:cNvPr id="138" name="Text 1"/>
+          <p:cNvPr id="139" name="Text 1"/>
           <p:cNvSpPr/>
           <p:nvPr/>
         </p:nvSpPr>
         <p:spPr>
           <a:xfrm>
             <a:off x="365400" y="621000"/>
-            <a:ext cx="11622960" cy="362520"/>
+            <a:ext cx="11621160" cy="360720"/>
           </a:xfrm>
           <a:prstGeom prst="rect">
             <a:avLst/>
@@ -22584,14 +22478,14 @@
       </p:sp>
       <p:sp>
         <p:nvSpPr>
-          <p:cNvPr id="139" name="Text 2"/>
+          <p:cNvPr id="140" name="Text 2"/>
           <p:cNvSpPr/>
           <p:nvPr/>
         </p:nvSpPr>
         <p:spPr>
           <a:xfrm>
             <a:off x="365400" y="1059480"/>
-            <a:ext cx="11531520" cy="216360"/>
+            <a:ext cx="11529720" cy="214560"/>
           </a:xfrm>
           <a:prstGeom prst="rect">
             <a:avLst/>
@@ -22636,14 +22530,14 @@
       </p:sp>
       <p:sp>
         <p:nvSpPr>
-          <p:cNvPr id="140" name="Shape 3"/>
+          <p:cNvPr id="141" name="Shape 3"/>
           <p:cNvSpPr/>
           <p:nvPr/>
         </p:nvSpPr>
         <p:spPr>
           <a:xfrm>
             <a:off x="369720" y="1356120"/>
-            <a:ext cx="3175200" cy="1248120"/>
+            <a:ext cx="3173400" cy="1246320"/>
           </a:xfrm>
           <a:custGeom>
             <a:avLst/>
@@ -22710,14 +22604,14 @@
       </p:sp>
       <p:sp>
         <p:nvSpPr>
-          <p:cNvPr id="141" name="Text 4"/>
+          <p:cNvPr id="142" name="Text 4"/>
           <p:cNvSpPr/>
           <p:nvPr/>
         </p:nvSpPr>
         <p:spPr>
           <a:xfrm>
             <a:off x="556920" y="1561680"/>
-            <a:ext cx="609120" cy="179640"/>
+            <a:ext cx="607320" cy="177840"/>
           </a:xfrm>
           <a:prstGeom prst="rect">
             <a:avLst/>
@@ -22762,14 +22656,14 @@
       </p:sp>
       <p:sp>
         <p:nvSpPr>
-          <p:cNvPr id="142" name="Shape 5"/>
+          <p:cNvPr id="143" name="Shape 5"/>
           <p:cNvSpPr/>
           <p:nvPr/>
         </p:nvSpPr>
         <p:spPr>
           <a:xfrm>
             <a:off x="2957760" y="1543320"/>
-            <a:ext cx="398880" cy="216360"/>
+            <a:ext cx="397080" cy="214560"/>
           </a:xfrm>
           <a:custGeom>
             <a:avLst/>
@@ -22835,14 +22729,14 @@
       </p:sp>
       <p:sp>
         <p:nvSpPr>
-          <p:cNvPr id="143" name="Text 6"/>
+          <p:cNvPr id="144" name="Text 6"/>
           <p:cNvSpPr/>
           <p:nvPr/>
         </p:nvSpPr>
         <p:spPr>
           <a:xfrm>
             <a:off x="2957760" y="1543320"/>
-            <a:ext cx="453600" cy="216360"/>
+            <a:ext cx="451800" cy="214560"/>
           </a:xfrm>
           <a:prstGeom prst="rect">
             <a:avLst/>
@@ -22887,14 +22781,14 @@
       </p:sp>
       <p:sp>
         <p:nvSpPr>
-          <p:cNvPr id="144" name="Text 7"/>
+          <p:cNvPr id="145" name="Text 7"/>
           <p:cNvSpPr/>
           <p:nvPr/>
         </p:nvSpPr>
         <p:spPr>
           <a:xfrm>
             <a:off x="556920" y="1872360"/>
-            <a:ext cx="2965320" cy="362520"/>
+            <a:ext cx="2963520" cy="360720"/>
           </a:xfrm>
           <a:prstGeom prst="rect">
             <a:avLst/>
@@ -22939,14 +22833,14 @@
       </p:sp>
       <p:sp>
         <p:nvSpPr>
-          <p:cNvPr id="145" name="Text 8"/>
+          <p:cNvPr id="146" name="Text 8"/>
           <p:cNvSpPr/>
           <p:nvPr/>
         </p:nvSpPr>
         <p:spPr>
           <a:xfrm>
             <a:off x="556920" y="2274120"/>
-            <a:ext cx="2855520" cy="143280"/>
+            <a:ext cx="2853720" cy="141480"/>
           </a:xfrm>
           <a:prstGeom prst="rect">
             <a:avLst/>
@@ -22991,14 +22885,14 @@
       </p:sp>
       <p:sp>
         <p:nvSpPr>
-          <p:cNvPr id="146" name="Shape 9"/>
+          <p:cNvPr id="147" name="Shape 9"/>
           <p:cNvSpPr/>
           <p:nvPr/>
         </p:nvSpPr>
         <p:spPr>
           <a:xfrm>
             <a:off x="3700800" y="1356120"/>
-            <a:ext cx="3175200" cy="1248120"/>
+            <a:ext cx="3173400" cy="1246320"/>
           </a:xfrm>
           <a:custGeom>
             <a:avLst/>
@@ -23065,14 +22959,14 @@
       </p:sp>
       <p:sp>
         <p:nvSpPr>
-          <p:cNvPr id="147" name="Text 10"/>
+          <p:cNvPr id="148" name="Text 10"/>
           <p:cNvSpPr/>
           <p:nvPr/>
         </p:nvSpPr>
         <p:spPr>
           <a:xfrm>
             <a:off x="3888000" y="1561680"/>
-            <a:ext cx="727560" cy="179640"/>
+            <a:ext cx="725760" cy="177840"/>
           </a:xfrm>
           <a:prstGeom prst="rect">
             <a:avLst/>
@@ -23117,14 +23011,14 @@
       </p:sp>
       <p:sp>
         <p:nvSpPr>
-          <p:cNvPr id="148" name="Shape 11"/>
+          <p:cNvPr id="149" name="Shape 11"/>
           <p:cNvSpPr/>
           <p:nvPr/>
         </p:nvSpPr>
         <p:spPr>
           <a:xfrm>
             <a:off x="6268320" y="1543320"/>
-            <a:ext cx="417240" cy="216360"/>
+            <a:ext cx="415440" cy="214560"/>
           </a:xfrm>
           <a:custGeom>
             <a:avLst/>
@@ -23190,14 +23084,14 @@
       </p:sp>
       <p:sp>
         <p:nvSpPr>
-          <p:cNvPr id="149" name="Text 12"/>
+          <p:cNvPr id="150" name="Text 12"/>
           <p:cNvSpPr/>
           <p:nvPr/>
         </p:nvSpPr>
         <p:spPr>
           <a:xfrm>
             <a:off x="6268320" y="1543320"/>
-            <a:ext cx="471960" cy="216360"/>
+            <a:ext cx="470160" cy="214560"/>
           </a:xfrm>
           <a:prstGeom prst="rect">
             <a:avLst/>
@@ -23242,14 +23136,14 @@
       </p:sp>
       <p:sp>
         <p:nvSpPr>
-          <p:cNvPr id="150" name="Text 13"/>
+          <p:cNvPr id="151" name="Text 13"/>
           <p:cNvSpPr/>
           <p:nvPr/>
         </p:nvSpPr>
         <p:spPr>
           <a:xfrm>
             <a:off x="3888000" y="1872360"/>
-            <a:ext cx="2965320" cy="362520"/>
+            <a:ext cx="2963520" cy="360720"/>
           </a:xfrm>
           <a:prstGeom prst="rect">
             <a:avLst/>
@@ -23294,14 +23188,14 @@
       </p:sp>
       <p:sp>
         <p:nvSpPr>
-          <p:cNvPr id="151" name="Text 14"/>
+          <p:cNvPr id="152" name="Text 14"/>
           <p:cNvSpPr/>
           <p:nvPr/>
         </p:nvSpPr>
         <p:spPr>
           <a:xfrm>
             <a:off x="3888000" y="2274120"/>
-            <a:ext cx="2855520" cy="143280"/>
+            <a:ext cx="2853720" cy="141480"/>
           </a:xfrm>
           <a:prstGeom prst="rect">
             <a:avLst/>
@@ -23346,14 +23240,14 @@
       </p:sp>
       <p:sp>
         <p:nvSpPr>
-          <p:cNvPr id="152" name="Shape 15"/>
+          <p:cNvPr id="153" name="Shape 15"/>
           <p:cNvSpPr/>
           <p:nvPr/>
         </p:nvSpPr>
         <p:spPr>
           <a:xfrm>
             <a:off x="369720" y="2762640"/>
-            <a:ext cx="3175200" cy="1248120"/>
+            <a:ext cx="3173400" cy="1246320"/>
           </a:xfrm>
           <a:custGeom>
             <a:avLst/>
@@ -23420,14 +23314,14 @@
       </p:sp>
       <p:sp>
         <p:nvSpPr>
-          <p:cNvPr id="153" name="Text 16"/>
+          <p:cNvPr id="154" name="Text 16"/>
           <p:cNvSpPr/>
           <p:nvPr/>
         </p:nvSpPr>
         <p:spPr>
           <a:xfrm>
             <a:off x="556920" y="2968200"/>
-            <a:ext cx="965160" cy="179640"/>
+            <a:ext cx="963360" cy="177840"/>
           </a:xfrm>
           <a:prstGeom prst="rect">
             <a:avLst/>
@@ -23472,14 +23366,14 @@
       </p:sp>
       <p:sp>
         <p:nvSpPr>
-          <p:cNvPr id="154" name="Shape 17"/>
+          <p:cNvPr id="155" name="Shape 17"/>
           <p:cNvSpPr/>
           <p:nvPr/>
         </p:nvSpPr>
         <p:spPr>
           <a:xfrm>
             <a:off x="2953440" y="2949840"/>
-            <a:ext cx="398880" cy="216360"/>
+            <a:ext cx="397080" cy="214560"/>
           </a:xfrm>
           <a:custGeom>
             <a:avLst/>
@@ -23545,14 +23439,14 @@
       </p:sp>
       <p:sp>
         <p:nvSpPr>
-          <p:cNvPr id="155" name="Text 18"/>
+          <p:cNvPr id="156" name="Text 18"/>
           <p:cNvSpPr/>
           <p:nvPr/>
         </p:nvSpPr>
         <p:spPr>
           <a:xfrm>
             <a:off x="2953440" y="2949840"/>
-            <a:ext cx="453600" cy="216360"/>
+            <a:ext cx="451800" cy="214560"/>
           </a:xfrm>
           <a:prstGeom prst="rect">
             <a:avLst/>
@@ -23597,14 +23491,14 @@
       </p:sp>
       <p:sp>
         <p:nvSpPr>
-          <p:cNvPr id="156" name="Text 19"/>
+          <p:cNvPr id="157" name="Text 19"/>
           <p:cNvSpPr/>
           <p:nvPr/>
         </p:nvSpPr>
         <p:spPr>
           <a:xfrm>
             <a:off x="556920" y="3278520"/>
-            <a:ext cx="2965320" cy="362520"/>
+            <a:ext cx="2963520" cy="360720"/>
           </a:xfrm>
           <a:prstGeom prst="rect">
             <a:avLst/>
@@ -23649,14 +23543,14 @@
       </p:sp>
       <p:sp>
         <p:nvSpPr>
-          <p:cNvPr id="157" name="Text 20"/>
+          <p:cNvPr id="158" name="Text 20"/>
           <p:cNvSpPr/>
           <p:nvPr/>
         </p:nvSpPr>
         <p:spPr>
           <a:xfrm>
             <a:off x="556920" y="3680280"/>
-            <a:ext cx="2855520" cy="143280"/>
+            <a:ext cx="2853720" cy="141480"/>
           </a:xfrm>
           <a:prstGeom prst="rect">
             <a:avLst/>
@@ -23701,14 +23595,14 @@
       </p:sp>
       <p:sp>
         <p:nvSpPr>
-          <p:cNvPr id="158" name="Shape 21"/>
+          <p:cNvPr id="159" name="Shape 21"/>
           <p:cNvSpPr/>
           <p:nvPr/>
         </p:nvSpPr>
         <p:spPr>
           <a:xfrm>
             <a:off x="3700800" y="2762640"/>
-            <a:ext cx="3175200" cy="1248120"/>
+            <a:ext cx="3173400" cy="1246320"/>
           </a:xfrm>
           <a:custGeom>
             <a:avLst/>
@@ -23775,14 +23669,14 @@
       </p:sp>
       <p:sp>
         <p:nvSpPr>
-          <p:cNvPr id="159" name="Text 22"/>
+          <p:cNvPr id="160" name="Text 22"/>
           <p:cNvSpPr/>
           <p:nvPr/>
         </p:nvSpPr>
         <p:spPr>
           <a:xfrm>
             <a:off x="3888000" y="2968200"/>
-            <a:ext cx="1065600" cy="179640"/>
+            <a:ext cx="1063800" cy="177840"/>
           </a:xfrm>
           <a:prstGeom prst="rect">
             <a:avLst/>
@@ -23827,14 +23721,14 @@
       </p:sp>
       <p:sp>
         <p:nvSpPr>
-          <p:cNvPr id="160" name="Shape 23"/>
+          <p:cNvPr id="161" name="Shape 23"/>
           <p:cNvSpPr/>
           <p:nvPr/>
         </p:nvSpPr>
         <p:spPr>
           <a:xfrm>
             <a:off x="6295680" y="2949840"/>
-            <a:ext cx="389880" cy="216360"/>
+            <a:ext cx="388080" cy="214560"/>
           </a:xfrm>
           <a:custGeom>
             <a:avLst/>
@@ -23900,14 +23794,14 @@
       </p:sp>
       <p:sp>
         <p:nvSpPr>
-          <p:cNvPr id="161" name="Text 24"/>
+          <p:cNvPr id="162" name="Text 24"/>
           <p:cNvSpPr/>
           <p:nvPr/>
         </p:nvSpPr>
         <p:spPr>
           <a:xfrm>
             <a:off x="6295680" y="2949840"/>
-            <a:ext cx="444600" cy="216360"/>
+            <a:ext cx="442800" cy="214560"/>
           </a:xfrm>
           <a:prstGeom prst="rect">
             <a:avLst/>
@@ -23952,14 +23846,14 @@
       </p:sp>
       <p:sp>
         <p:nvSpPr>
-          <p:cNvPr id="162" name="Text 25"/>
+          <p:cNvPr id="163" name="Text 25"/>
           <p:cNvSpPr/>
           <p:nvPr/>
         </p:nvSpPr>
         <p:spPr>
           <a:xfrm>
             <a:off x="3888000" y="3278520"/>
-            <a:ext cx="2965320" cy="362520"/>
+            <a:ext cx="2963520" cy="360720"/>
           </a:xfrm>
           <a:prstGeom prst="rect">
             <a:avLst/>
@@ -24004,14 +23898,14 @@
       </p:sp>
       <p:sp>
         <p:nvSpPr>
-          <p:cNvPr id="163" name="Text 26"/>
+          <p:cNvPr id="164" name="Text 26"/>
           <p:cNvSpPr/>
           <p:nvPr/>
         </p:nvSpPr>
         <p:spPr>
           <a:xfrm>
             <a:off x="3888000" y="3680280"/>
-            <a:ext cx="2855520" cy="143280"/>
+            <a:ext cx="2853720" cy="141480"/>
           </a:xfrm>
           <a:prstGeom prst="rect">
             <a:avLst/>
@@ -24056,14 +23950,14 @@
       </p:sp>
       <p:sp>
         <p:nvSpPr>
-          <p:cNvPr id="164" name="Shape 27"/>
+          <p:cNvPr id="165" name="Shape 27"/>
           <p:cNvSpPr/>
           <p:nvPr/>
         </p:nvSpPr>
         <p:spPr>
           <a:xfrm>
             <a:off x="369720" y="4169160"/>
-            <a:ext cx="6499440" cy="2682000"/>
+            <a:ext cx="6497640" cy="2680200"/>
           </a:xfrm>
           <a:custGeom>
             <a:avLst/>
@@ -24130,14 +24024,14 @@
       </p:sp>
       <p:sp>
         <p:nvSpPr>
-          <p:cNvPr id="165" name="Text 28"/>
+          <p:cNvPr id="166" name="Text 28"/>
           <p:cNvSpPr/>
           <p:nvPr/>
         </p:nvSpPr>
         <p:spPr>
           <a:xfrm>
             <a:off x="556920" y="4356360"/>
-            <a:ext cx="6207120" cy="252720"/>
+            <a:ext cx="6205320" cy="250920"/>
           </a:xfrm>
           <a:prstGeom prst="rect">
             <a:avLst/>
@@ -24182,14 +24076,14 @@
       </p:sp>
       <p:sp>
         <p:nvSpPr>
-          <p:cNvPr id="166" name="Shape 29"/>
+          <p:cNvPr id="167" name="Shape 29"/>
           <p:cNvSpPr/>
           <p:nvPr/>
         </p:nvSpPr>
         <p:spPr>
           <a:xfrm>
             <a:off x="556920" y="4721400"/>
-            <a:ext cx="2992680" cy="1056600"/>
+            <a:ext cx="2990880" cy="1054800"/>
           </a:xfrm>
           <a:custGeom>
             <a:avLst/>
@@ -24253,14 +24147,14 @@
       </p:sp>
       <p:sp>
         <p:nvSpPr>
-          <p:cNvPr id="167" name="Text 30"/>
+          <p:cNvPr id="168" name="Text 30"/>
           <p:cNvSpPr/>
           <p:nvPr/>
         </p:nvSpPr>
         <p:spPr>
           <a:xfrm>
             <a:off x="703080" y="4867560"/>
-            <a:ext cx="2764440" cy="179640"/>
+            <a:ext cx="2762640" cy="177840"/>
           </a:xfrm>
           <a:prstGeom prst="rect">
             <a:avLst/>
@@ -24305,14 +24199,14 @@
       </p:sp>
       <p:sp>
         <p:nvSpPr>
-          <p:cNvPr id="168" name="Text 31"/>
+          <p:cNvPr id="169" name="Text 31"/>
           <p:cNvSpPr/>
           <p:nvPr/>
         </p:nvSpPr>
         <p:spPr>
           <a:xfrm>
             <a:off x="703080" y="5123520"/>
-            <a:ext cx="2809800" cy="289440"/>
+            <a:ext cx="2808000" cy="287640"/>
           </a:xfrm>
           <a:prstGeom prst="rect">
             <a:avLst/>
@@ -24357,14 +24251,14 @@
       </p:sp>
       <p:sp>
         <p:nvSpPr>
-          <p:cNvPr id="169" name="Text 32"/>
+          <p:cNvPr id="170" name="Text 32"/>
           <p:cNvSpPr/>
           <p:nvPr/>
         </p:nvSpPr>
         <p:spPr>
           <a:xfrm>
             <a:off x="703080" y="5452200"/>
-            <a:ext cx="2764440" cy="179640"/>
+            <a:ext cx="2762640" cy="177840"/>
           </a:xfrm>
           <a:prstGeom prst="rect">
             <a:avLst/>
@@ -24409,14 +24303,14 @@
       </p:sp>
       <p:sp>
         <p:nvSpPr>
-          <p:cNvPr id="170" name="Shape 33"/>
+          <p:cNvPr id="171" name="Shape 33"/>
           <p:cNvSpPr/>
           <p:nvPr/>
         </p:nvSpPr>
         <p:spPr>
           <a:xfrm>
             <a:off x="3696120" y="4721400"/>
-            <a:ext cx="2992680" cy="1056600"/>
+            <a:ext cx="2990880" cy="1054800"/>
           </a:xfrm>
           <a:custGeom>
             <a:avLst/>
@@ -24480,14 +24374,14 @@
       </p:sp>
       <p:sp>
         <p:nvSpPr>
-          <p:cNvPr id="171" name="Text 34"/>
+          <p:cNvPr id="172" name="Text 34"/>
           <p:cNvSpPr/>
           <p:nvPr/>
         </p:nvSpPr>
         <p:spPr>
           <a:xfrm>
             <a:off x="3842280" y="4867560"/>
-            <a:ext cx="2764440" cy="179640"/>
+            <a:ext cx="2762640" cy="177840"/>
           </a:xfrm>
           <a:prstGeom prst="rect">
             <a:avLst/>
@@ -24532,14 +24426,14 @@
       </p:sp>
       <p:sp>
         <p:nvSpPr>
-          <p:cNvPr id="172" name="Text 35"/>
+          <p:cNvPr id="173" name="Text 35"/>
           <p:cNvSpPr/>
           <p:nvPr/>
         </p:nvSpPr>
         <p:spPr>
           <a:xfrm>
             <a:off x="3842280" y="5123520"/>
-            <a:ext cx="2809800" cy="289440"/>
+            <a:ext cx="2808000" cy="287640"/>
           </a:xfrm>
           <a:prstGeom prst="rect">
             <a:avLst/>
@@ -24584,14 +24478,14 @@
       </p:sp>
       <p:sp>
         <p:nvSpPr>
-          <p:cNvPr id="173" name="Text 36"/>
+          <p:cNvPr id="174" name="Text 36"/>
           <p:cNvSpPr/>
           <p:nvPr/>
         </p:nvSpPr>
         <p:spPr>
           <a:xfrm>
             <a:off x="3842280" y="5452200"/>
-            <a:ext cx="2764440" cy="179640"/>
+            <a:ext cx="2762640" cy="177840"/>
           </a:xfrm>
           <a:prstGeom prst="rect">
             <a:avLst/>
@@ -24636,14 +24530,14 @@
       </p:sp>
       <p:sp>
         <p:nvSpPr>
-          <p:cNvPr id="174" name="Shape 37"/>
+          <p:cNvPr id="175" name="Shape 37"/>
           <p:cNvSpPr/>
           <p:nvPr/>
         </p:nvSpPr>
         <p:spPr>
           <a:xfrm>
             <a:off x="556920" y="5931720"/>
-            <a:ext cx="6125040" cy="6120"/>
+            <a:ext cx="6123240" cy="4320"/>
           </a:xfrm>
           <a:custGeom>
             <a:avLst/>
@@ -24687,14 +24581,14 @@
       </p:sp>
       <p:sp>
         <p:nvSpPr>
-          <p:cNvPr id="175" name="Text 38"/>
+          <p:cNvPr id="176" name="Text 38"/>
           <p:cNvSpPr/>
           <p:nvPr/>
         </p:nvSpPr>
         <p:spPr>
           <a:xfrm>
             <a:off x="556920" y="6082200"/>
-            <a:ext cx="6189120" cy="179640"/>
+            <a:ext cx="6187320" cy="177840"/>
           </a:xfrm>
           <a:prstGeom prst="rect">
             <a:avLst/>
@@ -24739,14 +24633,14 @@
       </p:sp>
       <p:sp>
         <p:nvSpPr>
-          <p:cNvPr id="176" name="Text 39"/>
+          <p:cNvPr id="177" name="Text 39"/>
           <p:cNvSpPr/>
           <p:nvPr/>
         </p:nvSpPr>
         <p:spPr>
           <a:xfrm>
             <a:off x="556920" y="6338160"/>
-            <a:ext cx="1440000" cy="325800"/>
+            <a:ext cx="1438200" cy="324000"/>
           </a:xfrm>
           <a:prstGeom prst="rect">
             <a:avLst/>
@@ -24791,14 +24685,14 @@
       </p:sp>
       <p:sp>
         <p:nvSpPr>
-          <p:cNvPr id="177" name="Shape 40"/>
+          <p:cNvPr id="178" name="Shape 40"/>
           <p:cNvSpPr/>
           <p:nvPr/>
         </p:nvSpPr>
         <p:spPr>
           <a:xfrm>
             <a:off x="1974240" y="6447600"/>
-            <a:ext cx="627120" cy="216360"/>
+            <a:ext cx="625320" cy="214560"/>
           </a:xfrm>
           <a:custGeom>
             <a:avLst/>
@@ -24864,14 +24758,14 @@
       </p:sp>
       <p:sp>
         <p:nvSpPr>
-          <p:cNvPr id="178" name="Text 41"/>
+          <p:cNvPr id="179" name="Text 41"/>
           <p:cNvSpPr/>
           <p:nvPr/>
         </p:nvSpPr>
         <p:spPr>
           <a:xfrm>
             <a:off x="1974240" y="6447600"/>
-            <a:ext cx="682200" cy="216360"/>
+            <a:ext cx="680400" cy="214560"/>
           </a:xfrm>
           <a:prstGeom prst="rect">
             <a:avLst/>
@@ -24916,14 +24810,14 @@
       </p:sp>
       <p:sp>
         <p:nvSpPr>
-          <p:cNvPr id="179" name="Shape 42"/>
+          <p:cNvPr id="180" name="Shape 42"/>
           <p:cNvSpPr/>
           <p:nvPr/>
         </p:nvSpPr>
         <p:spPr>
           <a:xfrm>
             <a:off x="7104960" y="1356120"/>
-            <a:ext cx="4718520" cy="5495040"/>
+            <a:ext cx="4716720" cy="5493240"/>
           </a:xfrm>
           <a:custGeom>
             <a:avLst/>
@@ -24990,14 +24884,14 @@
       </p:sp>
       <p:sp>
         <p:nvSpPr>
-          <p:cNvPr id="180" name="Text 43"/>
+          <p:cNvPr id="181" name="Text 43"/>
           <p:cNvSpPr/>
           <p:nvPr/>
         </p:nvSpPr>
         <p:spPr>
           <a:xfrm>
             <a:off x="7292160" y="1543320"/>
-            <a:ext cx="4426560" cy="252720"/>
+            <a:ext cx="4424760" cy="250920"/>
           </a:xfrm>
           <a:prstGeom prst="rect">
             <a:avLst/>
@@ -25042,14 +24936,14 @@
       </p:sp>
       <p:sp>
         <p:nvSpPr>
-          <p:cNvPr id="181" name="Shape 44"/>
+          <p:cNvPr id="182" name="Shape 44"/>
           <p:cNvSpPr/>
           <p:nvPr/>
         </p:nvSpPr>
         <p:spPr>
           <a:xfrm>
             <a:off x="7292160" y="1945080"/>
-            <a:ext cx="4344120" cy="983520"/>
+            <a:ext cx="4342320" cy="981720"/>
           </a:xfrm>
           <a:custGeom>
             <a:avLst/>
@@ -25113,14 +25007,14 @@
       </p:sp>
       <p:sp>
         <p:nvSpPr>
-          <p:cNvPr id="182" name="Text 45"/>
+          <p:cNvPr id="183" name="Text 45"/>
           <p:cNvSpPr/>
           <p:nvPr/>
         </p:nvSpPr>
         <p:spPr>
           <a:xfrm>
             <a:off x="7438320" y="2091240"/>
-            <a:ext cx="609120" cy="179640"/>
+            <a:ext cx="607320" cy="177840"/>
           </a:xfrm>
           <a:prstGeom prst="rect">
             <a:avLst/>
@@ -25165,14 +25059,14 @@
       </p:sp>
       <p:sp>
         <p:nvSpPr>
-          <p:cNvPr id="183" name="Text 46"/>
+          <p:cNvPr id="184" name="Text 46"/>
           <p:cNvSpPr/>
           <p:nvPr/>
         </p:nvSpPr>
         <p:spPr>
           <a:xfrm>
             <a:off x="11243160" y="2091240"/>
-            <a:ext cx="307800" cy="179640"/>
+            <a:ext cx="306000" cy="177840"/>
           </a:xfrm>
           <a:prstGeom prst="rect">
             <a:avLst/>
@@ -25217,14 +25111,14 @@
       </p:sp>
       <p:sp>
         <p:nvSpPr>
-          <p:cNvPr id="184" name="Text 47"/>
+          <p:cNvPr id="185" name="Text 47"/>
           <p:cNvSpPr/>
           <p:nvPr/>
         </p:nvSpPr>
         <p:spPr>
           <a:xfrm>
             <a:off x="7438320" y="2347200"/>
-            <a:ext cx="4143240" cy="252720"/>
+            <a:ext cx="4141440" cy="250920"/>
           </a:xfrm>
           <a:prstGeom prst="rect">
             <a:avLst/>
@@ -25269,14 +25163,14 @@
       </p:sp>
       <p:sp>
         <p:nvSpPr>
-          <p:cNvPr id="185" name="Text 48"/>
+          <p:cNvPr id="186" name="Text 48"/>
           <p:cNvSpPr/>
           <p:nvPr/>
         </p:nvSpPr>
         <p:spPr>
           <a:xfrm>
             <a:off x="7438320" y="2639160"/>
-            <a:ext cx="4106880" cy="143280"/>
+            <a:ext cx="4105080" cy="141480"/>
           </a:xfrm>
           <a:prstGeom prst="rect">
             <a:avLst/>
@@ -25321,14 +25215,14 @@
       </p:sp>
       <p:sp>
         <p:nvSpPr>
-          <p:cNvPr id="186" name="Shape 49"/>
+          <p:cNvPr id="187" name="Shape 49"/>
           <p:cNvSpPr/>
           <p:nvPr/>
         </p:nvSpPr>
         <p:spPr>
           <a:xfrm>
             <a:off x="7292160" y="3077640"/>
-            <a:ext cx="4344120" cy="983520"/>
+            <a:ext cx="4342320" cy="981720"/>
           </a:xfrm>
           <a:custGeom>
             <a:avLst/>
@@ -25392,14 +25286,14 @@
       </p:sp>
       <p:sp>
         <p:nvSpPr>
-          <p:cNvPr id="187" name="Text 50"/>
+          <p:cNvPr id="188" name="Text 50"/>
           <p:cNvSpPr/>
           <p:nvPr/>
         </p:nvSpPr>
         <p:spPr>
           <a:xfrm>
             <a:off x="7438320" y="3223800"/>
-            <a:ext cx="727560" cy="179640"/>
+            <a:ext cx="725760" cy="177840"/>
           </a:xfrm>
           <a:prstGeom prst="rect">
             <a:avLst/>
@@ -25444,14 +25338,14 @@
       </p:sp>
       <p:sp>
         <p:nvSpPr>
-          <p:cNvPr id="188" name="Text 51"/>
+          <p:cNvPr id="189" name="Text 51"/>
           <p:cNvSpPr/>
           <p:nvPr/>
         </p:nvSpPr>
         <p:spPr>
           <a:xfrm>
             <a:off x="11242080" y="3223800"/>
-            <a:ext cx="307800" cy="179640"/>
+            <a:ext cx="306000" cy="177840"/>
           </a:xfrm>
           <a:prstGeom prst="rect">
             <a:avLst/>
@@ -25496,14 +25390,14 @@
       </p:sp>
       <p:sp>
         <p:nvSpPr>
-          <p:cNvPr id="189" name="Text 52"/>
+          <p:cNvPr id="190" name="Text 52"/>
           <p:cNvSpPr/>
           <p:nvPr/>
         </p:nvSpPr>
         <p:spPr>
           <a:xfrm>
             <a:off x="7438320" y="3479400"/>
-            <a:ext cx="4143240" cy="252720"/>
+            <a:ext cx="4141440" cy="250920"/>
           </a:xfrm>
           <a:prstGeom prst="rect">
             <a:avLst/>
@@ -25548,14 +25442,14 @@
       </p:sp>
       <p:sp>
         <p:nvSpPr>
-          <p:cNvPr id="190" name="Text 53"/>
+          <p:cNvPr id="191" name="Text 53"/>
           <p:cNvSpPr/>
           <p:nvPr/>
         </p:nvSpPr>
         <p:spPr>
           <a:xfrm>
             <a:off x="7438320" y="3771720"/>
-            <a:ext cx="4106880" cy="143280"/>
+            <a:ext cx="4105080" cy="141480"/>
           </a:xfrm>
           <a:prstGeom prst="rect">
             <a:avLst/>
@@ -25600,14 +25494,14 @@
       </p:sp>
       <p:sp>
         <p:nvSpPr>
-          <p:cNvPr id="191" name="Shape 54"/>
+          <p:cNvPr id="192" name="Shape 54"/>
           <p:cNvSpPr/>
           <p:nvPr/>
         </p:nvSpPr>
         <p:spPr>
           <a:xfrm>
             <a:off x="7292160" y="4210200"/>
-            <a:ext cx="4344120" cy="983520"/>
+            <a:ext cx="4342320" cy="981720"/>
           </a:xfrm>
           <a:custGeom>
             <a:avLst/>
@@ -25671,14 +25565,14 @@
       </p:sp>
       <p:sp>
         <p:nvSpPr>
-          <p:cNvPr id="192" name="Text 55"/>
+          <p:cNvPr id="193" name="Text 55"/>
           <p:cNvSpPr/>
           <p:nvPr/>
         </p:nvSpPr>
         <p:spPr>
           <a:xfrm>
             <a:off x="7438320" y="4356360"/>
-            <a:ext cx="965160" cy="179640"/>
+            <a:ext cx="963360" cy="177840"/>
           </a:xfrm>
           <a:prstGeom prst="rect">
             <a:avLst/>
@@ -25723,14 +25617,14 @@
       </p:sp>
       <p:sp>
         <p:nvSpPr>
-          <p:cNvPr id="193" name="Text 56"/>
+          <p:cNvPr id="194" name="Text 56"/>
           <p:cNvSpPr/>
           <p:nvPr/>
         </p:nvSpPr>
         <p:spPr>
           <a:xfrm>
             <a:off x="11242080" y="4356360"/>
-            <a:ext cx="307800" cy="179640"/>
+            <a:ext cx="306000" cy="177840"/>
           </a:xfrm>
           <a:prstGeom prst="rect">
             <a:avLst/>
@@ -25775,14 +25669,14 @@
       </p:sp>
       <p:sp>
         <p:nvSpPr>
-          <p:cNvPr id="194" name="Text 57"/>
+          <p:cNvPr id="195" name="Text 57"/>
           <p:cNvSpPr/>
           <p:nvPr/>
         </p:nvSpPr>
         <p:spPr>
           <a:xfrm>
             <a:off x="7438320" y="4611960"/>
-            <a:ext cx="4143240" cy="252720"/>
+            <a:ext cx="4141440" cy="250920"/>
           </a:xfrm>
           <a:prstGeom prst="rect">
             <a:avLst/>
@@ -25827,14 +25721,14 @@
       </p:sp>
       <p:sp>
         <p:nvSpPr>
-          <p:cNvPr id="195" name="Text 58"/>
+          <p:cNvPr id="196" name="Text 58"/>
           <p:cNvSpPr/>
           <p:nvPr/>
         </p:nvSpPr>
         <p:spPr>
           <a:xfrm>
             <a:off x="7438320" y="4904280"/>
-            <a:ext cx="4106880" cy="143280"/>
+            <a:ext cx="4105080" cy="141480"/>
           </a:xfrm>
           <a:prstGeom prst="rect">
             <a:avLst/>
@@ -25879,14 +25773,14 @@
       </p:sp>
       <p:sp>
         <p:nvSpPr>
-          <p:cNvPr id="196" name="Shape 59"/>
+          <p:cNvPr id="197" name="Shape 59"/>
           <p:cNvSpPr/>
           <p:nvPr/>
         </p:nvSpPr>
         <p:spPr>
           <a:xfrm>
             <a:off x="7292160" y="5342400"/>
-            <a:ext cx="4344120" cy="983520"/>
+            <a:ext cx="4342320" cy="981720"/>
           </a:xfrm>
           <a:custGeom>
             <a:avLst/>
@@ -25950,14 +25844,14 @@
       </p:sp>
       <p:sp>
         <p:nvSpPr>
-          <p:cNvPr id="197" name="Text 60"/>
+          <p:cNvPr id="198" name="Text 60"/>
           <p:cNvSpPr/>
           <p:nvPr/>
         </p:nvSpPr>
         <p:spPr>
           <a:xfrm>
             <a:off x="7438320" y="5488560"/>
-            <a:ext cx="1065600" cy="179640"/>
+            <a:ext cx="1063800" cy="177840"/>
           </a:xfrm>
           <a:prstGeom prst="rect">
             <a:avLst/>
@@ -26002,14 +25896,14 @@
       </p:sp>
       <p:sp>
         <p:nvSpPr>
-          <p:cNvPr id="198" name="Text 61"/>
+          <p:cNvPr id="199" name="Text 61"/>
           <p:cNvSpPr/>
           <p:nvPr/>
         </p:nvSpPr>
         <p:spPr>
           <a:xfrm>
             <a:off x="11189880" y="5488560"/>
-            <a:ext cx="362520" cy="179640"/>
+            <a:ext cx="360720" cy="177840"/>
           </a:xfrm>
           <a:prstGeom prst="rect">
             <a:avLst/>
@@ -26054,14 +25948,14 @@
       </p:sp>
       <p:sp>
         <p:nvSpPr>
-          <p:cNvPr id="199" name="Text 62"/>
+          <p:cNvPr id="200" name="Text 62"/>
           <p:cNvSpPr/>
           <p:nvPr/>
         </p:nvSpPr>
         <p:spPr>
           <a:xfrm>
             <a:off x="7438320" y="5744520"/>
-            <a:ext cx="4143240" cy="252720"/>
+            <a:ext cx="4141440" cy="250920"/>
           </a:xfrm>
           <a:prstGeom prst="rect">
             <a:avLst/>
@@ -26106,14 +26000,14 @@
       </p:sp>
       <p:sp>
         <p:nvSpPr>
-          <p:cNvPr id="200" name="Text 63"/>
+          <p:cNvPr id="201" name="Text 63"/>
           <p:cNvSpPr/>
           <p:nvPr/>
         </p:nvSpPr>
         <p:spPr>
           <a:xfrm>
             <a:off x="7438320" y="6036480"/>
-            <a:ext cx="4106880" cy="143280"/>
+            <a:ext cx="4105080" cy="141480"/>
           </a:xfrm>
           <a:prstGeom prst="rect">
             <a:avLst/>
@@ -26195,14 +26089,14 @@
       </p:grpSpPr>
       <p:sp>
         <p:nvSpPr>
-          <p:cNvPr id="201" name="Text 0"/>
+          <p:cNvPr id="202" name="Text 0"/>
           <p:cNvSpPr/>
           <p:nvPr/>
         </p:nvSpPr>
         <p:spPr>
           <a:xfrm>
             <a:off x="331200" y="331200"/>
-            <a:ext cx="11584440" cy="162720"/>
+            <a:ext cx="11582640" cy="160920"/>
           </a:xfrm>
           <a:prstGeom prst="rect">
             <a:avLst/>
@@ -26230,7 +26124,7 @@
               <a:buNone/>
             </a:pPr>
             <a:r>
-              <a:rPr b="1" lang="en-US" sz="920" spc="24" strike="noStrike">
+              <a:rPr b="1" lang="en-US" sz="920" spc="9" strike="noStrike">
                 <a:solidFill>
                   <a:srgbClr val="6366f1"/>
                 </a:solidFill>
@@ -26247,14 +26141,14 @@
       </p:sp>
       <p:sp>
         <p:nvSpPr>
-          <p:cNvPr id="202" name="Text 1"/>
+          <p:cNvPr id="203" name="Text 1"/>
           <p:cNvSpPr/>
           <p:nvPr/>
         </p:nvSpPr>
         <p:spPr>
           <a:xfrm>
             <a:off x="331200" y="563040"/>
-            <a:ext cx="11675520" cy="328320"/>
+            <a:ext cx="11673720" cy="326520"/>
           </a:xfrm>
           <a:prstGeom prst="rect">
             <a:avLst/>
@@ -26299,14 +26193,14 @@
       </p:sp>
       <p:sp>
         <p:nvSpPr>
-          <p:cNvPr id="203" name="Text 2"/>
+          <p:cNvPr id="204" name="Text 2"/>
           <p:cNvSpPr/>
           <p:nvPr/>
         </p:nvSpPr>
         <p:spPr>
           <a:xfrm>
             <a:off x="331200" y="960840"/>
-            <a:ext cx="11592720" cy="195840"/>
+            <a:ext cx="11590920" cy="194040"/>
           </a:xfrm>
           <a:prstGeom prst="rect">
             <a:avLst/>
@@ -26351,14 +26245,14 @@
       </p:sp>
       <p:sp>
         <p:nvSpPr>
-          <p:cNvPr id="204" name="Shape 3"/>
+          <p:cNvPr id="205" name="Shape 3"/>
           <p:cNvSpPr/>
           <p:nvPr/>
         </p:nvSpPr>
         <p:spPr>
           <a:xfrm>
             <a:off x="335520" y="1296360"/>
-            <a:ext cx="6217200" cy="5554800"/>
+            <a:ext cx="6215400" cy="5553000"/>
           </a:xfrm>
           <a:custGeom>
             <a:avLst/>
@@ -26425,14 +26319,14 @@
       </p:sp>
       <p:sp>
         <p:nvSpPr>
-          <p:cNvPr id="205" name="Image 0"/>
+          <p:cNvPr id="206" name="Image 0"/>
           <p:cNvSpPr/>
           <p:nvPr/>
         </p:nvSpPr>
         <p:spPr>
           <a:xfrm>
             <a:off x="538200" y="1499040"/>
-            <a:ext cx="4941720" cy="5149080"/>
+            <a:ext cx="4939920" cy="5147280"/>
           </a:xfrm>
           <a:prstGeom prst="roundRect">
             <a:avLst>
@@ -26457,14 +26351,14 @@
       </p:sp>
       <p:sp>
         <p:nvSpPr>
-          <p:cNvPr id="206" name="Shape 4"/>
+          <p:cNvPr id="207" name="Shape 4"/>
           <p:cNvSpPr/>
           <p:nvPr/>
         </p:nvSpPr>
         <p:spPr>
           <a:xfrm>
             <a:off x="6766200" y="1296360"/>
-            <a:ext cx="2473560" cy="1297440"/>
+            <a:ext cx="2471760" cy="1295640"/>
           </a:xfrm>
           <a:custGeom>
             <a:avLst/>
@@ -26531,14 +26425,14 @@
       </p:sp>
       <p:sp>
         <p:nvSpPr>
-          <p:cNvPr id="207" name="Text 5"/>
+          <p:cNvPr id="208" name="Text 5"/>
           <p:cNvSpPr/>
           <p:nvPr/>
         </p:nvSpPr>
         <p:spPr>
           <a:xfrm>
             <a:off x="6935760" y="1465920"/>
-            <a:ext cx="2192040" cy="162720"/>
+            <a:ext cx="2190240" cy="160920"/>
           </a:xfrm>
           <a:prstGeom prst="rect">
             <a:avLst/>
@@ -26583,14 +26477,14 @@
       </p:sp>
       <p:sp>
         <p:nvSpPr>
-          <p:cNvPr id="208" name="Text 6"/>
+          <p:cNvPr id="209" name="Text 6"/>
           <p:cNvSpPr/>
           <p:nvPr/>
         </p:nvSpPr>
         <p:spPr>
           <a:xfrm>
             <a:off x="6935760" y="1697760"/>
-            <a:ext cx="2258280" cy="295200"/>
+            <a:ext cx="2256480" cy="293400"/>
           </a:xfrm>
           <a:prstGeom prst="rect">
             <a:avLst/>
@@ -26635,14 +26529,14 @@
       </p:sp>
       <p:sp>
         <p:nvSpPr>
-          <p:cNvPr id="209" name="Shape 7"/>
+          <p:cNvPr id="210" name="Shape 7"/>
           <p:cNvSpPr/>
           <p:nvPr/>
         </p:nvSpPr>
         <p:spPr>
           <a:xfrm>
             <a:off x="6935760" y="2062440"/>
-            <a:ext cx="361440" cy="195840"/>
+            <a:ext cx="359640" cy="194040"/>
           </a:xfrm>
           <a:custGeom>
             <a:avLst/>
@@ -26708,14 +26602,14 @@
       </p:sp>
       <p:sp>
         <p:nvSpPr>
-          <p:cNvPr id="210" name="Text 8"/>
+          <p:cNvPr id="211" name="Text 8"/>
           <p:cNvSpPr/>
           <p:nvPr/>
         </p:nvSpPr>
         <p:spPr>
           <a:xfrm>
             <a:off x="6935760" y="2062440"/>
-            <a:ext cx="411120" cy="195840"/>
+            <a:ext cx="409320" cy="194040"/>
           </a:xfrm>
           <a:prstGeom prst="rect">
             <a:avLst/>
@@ -26760,14 +26654,14 @@
       </p:sp>
       <p:sp>
         <p:nvSpPr>
-          <p:cNvPr id="211" name="Text 9"/>
+          <p:cNvPr id="212" name="Text 9"/>
           <p:cNvSpPr/>
           <p:nvPr/>
         </p:nvSpPr>
         <p:spPr>
           <a:xfrm>
             <a:off x="7367040" y="2095560"/>
-            <a:ext cx="228960" cy="129600"/>
+            <a:ext cx="227160" cy="127800"/>
           </a:xfrm>
           <a:prstGeom prst="rect">
             <a:avLst/>
@@ -26812,14 +26706,14 @@
       </p:sp>
       <p:sp>
         <p:nvSpPr>
-          <p:cNvPr id="212" name="Text 10"/>
+          <p:cNvPr id="213" name="Text 10"/>
           <p:cNvSpPr/>
           <p:nvPr/>
         </p:nvSpPr>
         <p:spPr>
           <a:xfrm>
             <a:off x="6935760" y="2294280"/>
-            <a:ext cx="2183760" cy="129600"/>
+            <a:ext cx="2181960" cy="127800"/>
           </a:xfrm>
           <a:prstGeom prst="rect">
             <a:avLst/>
@@ -26864,14 +26758,14 @@
       </p:sp>
       <p:sp>
         <p:nvSpPr>
-          <p:cNvPr id="213" name="Shape 11"/>
+          <p:cNvPr id="214" name="Shape 11"/>
           <p:cNvSpPr/>
           <p:nvPr/>
         </p:nvSpPr>
         <p:spPr>
           <a:xfrm>
             <a:off x="9381600" y="1296360"/>
-            <a:ext cx="2473560" cy="1297440"/>
+            <a:ext cx="2471760" cy="1295640"/>
           </a:xfrm>
           <a:custGeom>
             <a:avLst/>
@@ -26938,14 +26832,14 @@
       </p:sp>
       <p:sp>
         <p:nvSpPr>
-          <p:cNvPr id="214" name="Text 12"/>
+          <p:cNvPr id="215" name="Text 12"/>
           <p:cNvSpPr/>
           <p:nvPr/>
         </p:nvSpPr>
         <p:spPr>
           <a:xfrm>
             <a:off x="9551520" y="1465920"/>
-            <a:ext cx="2192040" cy="162720"/>
+            <a:ext cx="2190240" cy="160920"/>
           </a:xfrm>
           <a:prstGeom prst="rect">
             <a:avLst/>
@@ -26990,14 +26884,14 @@
       </p:sp>
       <p:sp>
         <p:nvSpPr>
-          <p:cNvPr id="215" name="Text 13"/>
+          <p:cNvPr id="216" name="Text 13"/>
           <p:cNvSpPr/>
           <p:nvPr/>
         </p:nvSpPr>
         <p:spPr>
           <a:xfrm>
             <a:off x="9551520" y="1697760"/>
-            <a:ext cx="2258280" cy="295200"/>
+            <a:ext cx="2256480" cy="293400"/>
           </a:xfrm>
           <a:prstGeom prst="rect">
             <a:avLst/>
@@ -27042,14 +26936,14 @@
       </p:sp>
       <p:sp>
         <p:nvSpPr>
-          <p:cNvPr id="216" name="Shape 14"/>
+          <p:cNvPr id="217" name="Shape 14"/>
           <p:cNvSpPr/>
           <p:nvPr/>
         </p:nvSpPr>
         <p:spPr>
           <a:xfrm>
             <a:off x="9551520" y="2062440"/>
-            <a:ext cx="361440" cy="195840"/>
+            <a:ext cx="359640" cy="194040"/>
           </a:xfrm>
           <a:custGeom>
             <a:avLst/>
@@ -27115,14 +27009,14 @@
       </p:sp>
       <p:sp>
         <p:nvSpPr>
-          <p:cNvPr id="217" name="Text 15"/>
+          <p:cNvPr id="218" name="Text 15"/>
           <p:cNvSpPr/>
           <p:nvPr/>
         </p:nvSpPr>
         <p:spPr>
           <a:xfrm>
             <a:off x="9551520" y="2062440"/>
-            <a:ext cx="411120" cy="195840"/>
+            <a:ext cx="409320" cy="194040"/>
           </a:xfrm>
           <a:prstGeom prst="rect">
             <a:avLst/>
@@ -27167,14 +27061,14 @@
       </p:sp>
       <p:sp>
         <p:nvSpPr>
-          <p:cNvPr id="218" name="Text 16"/>
+          <p:cNvPr id="219" name="Text 16"/>
           <p:cNvSpPr/>
           <p:nvPr/>
         </p:nvSpPr>
         <p:spPr>
           <a:xfrm>
             <a:off x="9981720" y="2095560"/>
-            <a:ext cx="228960" cy="129600"/>
+            <a:ext cx="227160" cy="127800"/>
           </a:xfrm>
           <a:prstGeom prst="rect">
             <a:avLst/>
@@ -27219,14 +27113,14 @@
       </p:sp>
       <p:sp>
         <p:nvSpPr>
-          <p:cNvPr id="219" name="Text 17"/>
+          <p:cNvPr id="220" name="Text 17"/>
           <p:cNvSpPr/>
           <p:nvPr/>
         </p:nvSpPr>
         <p:spPr>
           <a:xfrm>
             <a:off x="9551520" y="2294280"/>
-            <a:ext cx="2183760" cy="129600"/>
+            <a:ext cx="2181960" cy="127800"/>
           </a:xfrm>
           <a:prstGeom prst="rect">
             <a:avLst/>
@@ -27271,14 +27165,14 @@
       </p:sp>
       <p:sp>
         <p:nvSpPr>
-          <p:cNvPr id="220" name="Shape 18"/>
+          <p:cNvPr id="221" name="Shape 18"/>
           <p:cNvSpPr/>
           <p:nvPr/>
         </p:nvSpPr>
         <p:spPr>
           <a:xfrm>
             <a:off x="6766200" y="2737440"/>
-            <a:ext cx="5090760" cy="1297440"/>
+            <a:ext cx="5088960" cy="1295640"/>
           </a:xfrm>
           <a:custGeom>
             <a:avLst/>
@@ -27345,14 +27239,14 @@
       </p:sp>
       <p:sp>
         <p:nvSpPr>
-          <p:cNvPr id="221" name="Text 19"/>
+          <p:cNvPr id="222" name="Text 19"/>
           <p:cNvSpPr/>
           <p:nvPr/>
         </p:nvSpPr>
         <p:spPr>
           <a:xfrm>
             <a:off x="6935760" y="2907360"/>
-            <a:ext cx="4809240" cy="162720"/>
+            <a:ext cx="4807440" cy="160920"/>
           </a:xfrm>
           <a:prstGeom prst="rect">
             <a:avLst/>
@@ -27397,14 +27291,14 @@
       </p:sp>
       <p:sp>
         <p:nvSpPr>
-          <p:cNvPr id="222" name="Text 20"/>
+          <p:cNvPr id="223" name="Text 20"/>
           <p:cNvSpPr/>
           <p:nvPr/>
         </p:nvSpPr>
         <p:spPr>
           <a:xfrm>
             <a:off x="6935760" y="3139200"/>
-            <a:ext cx="4875480" cy="295200"/>
+            <a:ext cx="4873680" cy="293400"/>
           </a:xfrm>
           <a:prstGeom prst="rect">
             <a:avLst/>
@@ -27449,14 +27343,14 @@
       </p:sp>
       <p:sp>
         <p:nvSpPr>
-          <p:cNvPr id="223" name="Shape 21"/>
+          <p:cNvPr id="224" name="Shape 21"/>
           <p:cNvSpPr/>
           <p:nvPr/>
         </p:nvSpPr>
         <p:spPr>
           <a:xfrm>
             <a:off x="6935760" y="3503520"/>
-            <a:ext cx="361440" cy="195840"/>
+            <a:ext cx="359640" cy="194040"/>
           </a:xfrm>
           <a:custGeom>
             <a:avLst/>
@@ -27522,14 +27416,14 @@
       </p:sp>
       <p:sp>
         <p:nvSpPr>
-          <p:cNvPr id="224" name="Text 22"/>
+          <p:cNvPr id="225" name="Text 22"/>
           <p:cNvSpPr/>
           <p:nvPr/>
         </p:nvSpPr>
         <p:spPr>
           <a:xfrm>
             <a:off x="6935760" y="3503520"/>
-            <a:ext cx="411120" cy="195840"/>
+            <a:ext cx="409320" cy="194040"/>
           </a:xfrm>
           <a:prstGeom prst="rect">
             <a:avLst/>
@@ -27574,14 +27468,14 @@
       </p:sp>
       <p:sp>
         <p:nvSpPr>
-          <p:cNvPr id="225" name="Text 23"/>
+          <p:cNvPr id="226" name="Text 23"/>
           <p:cNvSpPr/>
           <p:nvPr/>
         </p:nvSpPr>
         <p:spPr>
           <a:xfrm>
             <a:off x="7367040" y="3536640"/>
-            <a:ext cx="228960" cy="129600"/>
+            <a:ext cx="227160" cy="127800"/>
           </a:xfrm>
           <a:prstGeom prst="rect">
             <a:avLst/>
@@ -27626,14 +27520,14 @@
       </p:sp>
       <p:sp>
         <p:nvSpPr>
-          <p:cNvPr id="226" name="Text 24"/>
+          <p:cNvPr id="227" name="Text 24"/>
           <p:cNvSpPr/>
           <p:nvPr/>
         </p:nvSpPr>
         <p:spPr>
           <a:xfrm>
             <a:off x="6935760" y="3735360"/>
-            <a:ext cx="4800960" cy="129600"/>
+            <a:ext cx="4799160" cy="127800"/>
           </a:xfrm>
           <a:prstGeom prst="rect">
             <a:avLst/>
@@ -27678,14 +27572,14 @@
       </p:sp>
       <p:sp>
         <p:nvSpPr>
-          <p:cNvPr id="227" name="Shape 25"/>
+          <p:cNvPr id="228" name="Shape 25"/>
           <p:cNvSpPr/>
           <p:nvPr/>
         </p:nvSpPr>
         <p:spPr>
           <a:xfrm>
             <a:off x="6766200" y="4178520"/>
-            <a:ext cx="5090760" cy="1297440"/>
+            <a:ext cx="5088960" cy="1295640"/>
           </a:xfrm>
           <a:custGeom>
             <a:avLst/>
@@ -27752,14 +27646,14 @@
       </p:sp>
       <p:sp>
         <p:nvSpPr>
-          <p:cNvPr id="228" name="Text 26"/>
+          <p:cNvPr id="229" name="Text 26"/>
           <p:cNvSpPr/>
           <p:nvPr/>
         </p:nvSpPr>
         <p:spPr>
           <a:xfrm>
             <a:off x="6935760" y="4348440"/>
-            <a:ext cx="4809240" cy="162720"/>
+            <a:ext cx="4807440" cy="160920"/>
           </a:xfrm>
           <a:prstGeom prst="rect">
             <a:avLst/>
@@ -27804,14 +27698,14 @@
       </p:sp>
       <p:sp>
         <p:nvSpPr>
-          <p:cNvPr id="229" name="Text 27"/>
+          <p:cNvPr id="230" name="Text 27"/>
           <p:cNvSpPr/>
           <p:nvPr/>
         </p:nvSpPr>
         <p:spPr>
           <a:xfrm>
             <a:off x="6935760" y="4580280"/>
-            <a:ext cx="4875480" cy="295200"/>
+            <a:ext cx="4873680" cy="293400"/>
           </a:xfrm>
           <a:prstGeom prst="rect">
             <a:avLst/>
@@ -27856,14 +27750,14 @@
       </p:sp>
       <p:sp>
         <p:nvSpPr>
-          <p:cNvPr id="230" name="Shape 28"/>
+          <p:cNvPr id="231" name="Shape 28"/>
           <p:cNvSpPr/>
           <p:nvPr/>
         </p:nvSpPr>
         <p:spPr>
           <a:xfrm>
             <a:off x="6935760" y="4944600"/>
-            <a:ext cx="361440" cy="195840"/>
+            <a:ext cx="359640" cy="194040"/>
           </a:xfrm>
           <a:custGeom>
             <a:avLst/>
@@ -27929,14 +27823,14 @@
       </p:sp>
       <p:sp>
         <p:nvSpPr>
-          <p:cNvPr id="231" name="Text 29"/>
+          <p:cNvPr id="232" name="Text 29"/>
           <p:cNvSpPr/>
           <p:nvPr/>
         </p:nvSpPr>
         <p:spPr>
           <a:xfrm>
             <a:off x="6935760" y="4944600"/>
-            <a:ext cx="411120" cy="195840"/>
+            <a:ext cx="409320" cy="194040"/>
           </a:xfrm>
           <a:prstGeom prst="rect">
             <a:avLst/>
@@ -27981,14 +27875,14 @@
       </p:sp>
       <p:sp>
         <p:nvSpPr>
-          <p:cNvPr id="232" name="Text 30"/>
+          <p:cNvPr id="233" name="Text 30"/>
           <p:cNvSpPr/>
           <p:nvPr/>
         </p:nvSpPr>
         <p:spPr>
           <a:xfrm>
             <a:off x="7367760" y="4977720"/>
-            <a:ext cx="228960" cy="129600"/>
+            <a:ext cx="227160" cy="127800"/>
           </a:xfrm>
           <a:prstGeom prst="rect">
             <a:avLst/>
@@ -28033,14 +27927,14 @@
       </p:sp>
       <p:sp>
         <p:nvSpPr>
-          <p:cNvPr id="233" name="Text 31"/>
+          <p:cNvPr id="234" name="Text 31"/>
           <p:cNvSpPr/>
           <p:nvPr/>
         </p:nvSpPr>
         <p:spPr>
           <a:xfrm>
             <a:off x="6935760" y="5176800"/>
-            <a:ext cx="4800960" cy="129600"/>
+            <a:ext cx="4799160" cy="127800"/>
           </a:xfrm>
           <a:prstGeom prst="rect">
             <a:avLst/>
@@ -28085,14 +27979,14 @@
       </p:sp>
       <p:sp>
         <p:nvSpPr>
-          <p:cNvPr id="234" name="Shape 32"/>
+          <p:cNvPr id="235" name="Shape 32"/>
           <p:cNvSpPr/>
           <p:nvPr/>
         </p:nvSpPr>
         <p:spPr>
           <a:xfrm>
             <a:off x="6766200" y="5619600"/>
-            <a:ext cx="5090760" cy="1231200"/>
+            <a:ext cx="5088960" cy="1229400"/>
           </a:xfrm>
           <a:custGeom>
             <a:avLst/>
@@ -28159,14 +28053,14 @@
       </p:sp>
       <p:sp>
         <p:nvSpPr>
-          <p:cNvPr id="235" name="Text 33"/>
+          <p:cNvPr id="236" name="Text 33"/>
           <p:cNvSpPr/>
           <p:nvPr/>
         </p:nvSpPr>
         <p:spPr>
           <a:xfrm>
             <a:off x="6935760" y="5789520"/>
-            <a:ext cx="4825800" cy="228960"/>
+            <a:ext cx="4824000" cy="227160"/>
           </a:xfrm>
           <a:prstGeom prst="rect">
             <a:avLst/>
@@ -28211,14 +28105,14 @@
       </p:sp>
       <p:sp>
         <p:nvSpPr>
-          <p:cNvPr id="236" name="Text 34"/>
+          <p:cNvPr id="237" name="Text 34"/>
           <p:cNvSpPr/>
           <p:nvPr/>
         </p:nvSpPr>
         <p:spPr>
           <a:xfrm>
             <a:off x="6935760" y="6120720"/>
-            <a:ext cx="1057320" cy="162720"/>
+            <a:ext cx="1055520" cy="160920"/>
           </a:xfrm>
           <a:prstGeom prst="rect">
             <a:avLst/>
@@ -28263,14 +28157,14 @@
       </p:sp>
       <p:sp>
         <p:nvSpPr>
-          <p:cNvPr id="237" name="Text 35"/>
+          <p:cNvPr id="238" name="Text 35"/>
           <p:cNvSpPr/>
           <p:nvPr/>
         </p:nvSpPr>
         <p:spPr>
           <a:xfrm>
             <a:off x="6935760" y="6286680"/>
-            <a:ext cx="1098720" cy="262080"/>
+            <a:ext cx="1096920" cy="260280"/>
           </a:xfrm>
           <a:prstGeom prst="rect">
             <a:avLst/>
@@ -28315,14 +28209,14 @@
       </p:sp>
       <p:sp>
         <p:nvSpPr>
-          <p:cNvPr id="238" name="Text 36"/>
+          <p:cNvPr id="239" name="Text 36"/>
           <p:cNvSpPr/>
           <p:nvPr/>
         </p:nvSpPr>
         <p:spPr>
           <a:xfrm>
             <a:off x="6935760" y="6551640"/>
-            <a:ext cx="1049040" cy="129600"/>
+            <a:ext cx="1047240" cy="127800"/>
           </a:xfrm>
           <a:prstGeom prst="rect">
             <a:avLst/>
@@ -28367,14 +28261,14 @@
       </p:sp>
       <p:sp>
         <p:nvSpPr>
-          <p:cNvPr id="239" name="Text 37"/>
+          <p:cNvPr id="240" name="Text 37"/>
           <p:cNvSpPr/>
           <p:nvPr/>
         </p:nvSpPr>
         <p:spPr>
           <a:xfrm>
             <a:off x="10646640" y="6120720"/>
-            <a:ext cx="1040760" cy="162720"/>
+            <a:ext cx="1038960" cy="160920"/>
           </a:xfrm>
           <a:prstGeom prst="rect">
             <a:avLst/>
@@ -28419,14 +28313,14 @@
       </p:sp>
       <p:sp>
         <p:nvSpPr>
-          <p:cNvPr id="240" name="Text 38"/>
+          <p:cNvPr id="241" name="Text 38"/>
           <p:cNvSpPr/>
           <p:nvPr/>
         </p:nvSpPr>
         <p:spPr>
           <a:xfrm>
             <a:off x="10605240" y="6286680"/>
-            <a:ext cx="1082160" cy="262080"/>
+            <a:ext cx="1080360" cy="260280"/>
           </a:xfrm>
           <a:prstGeom prst="rect">
             <a:avLst/>
@@ -28471,14 +28365,14 @@
       </p:sp>
       <p:sp>
         <p:nvSpPr>
-          <p:cNvPr id="241" name="Text 39"/>
+          <p:cNvPr id="242" name="Text 39"/>
           <p:cNvSpPr/>
           <p:nvPr/>
         </p:nvSpPr>
         <p:spPr>
           <a:xfrm>
             <a:off x="10654920" y="6551640"/>
-            <a:ext cx="1032480" cy="129600"/>
+            <a:ext cx="1030680" cy="127800"/>
           </a:xfrm>
           <a:prstGeom prst="rect">
             <a:avLst/>
@@ -28560,14 +28454,14 @@
       </p:grpSpPr>
       <p:sp>
         <p:nvSpPr>
-          <p:cNvPr id="242" name="Text 0"/>
+          <p:cNvPr id="243" name="Text 0"/>
           <p:cNvSpPr/>
           <p:nvPr/>
         </p:nvSpPr>
         <p:spPr>
           <a:xfrm>
             <a:off x="380880" y="380880"/>
-            <a:ext cx="11493720" cy="187560"/>
+            <a:ext cx="11491920" cy="185760"/>
           </a:xfrm>
           <a:prstGeom prst="rect">
             <a:avLst/>
@@ -28595,7 +28489,7 @@
               <a:buNone/>
             </a:pPr>
             <a:r>
-              <a:rPr b="1" lang="en-US" sz="1050" spc="32" strike="noStrike">
+              <a:rPr b="1" lang="en-US" sz="1050" spc="18" strike="noStrike">
                 <a:solidFill>
                   <a:srgbClr val="6366f1"/>
                 </a:solidFill>
@@ -28612,14 +28506,14 @@
       </p:sp>
       <p:sp>
         <p:nvSpPr>
-          <p:cNvPr id="243" name="Text 1"/>
+          <p:cNvPr id="244" name="Text 1"/>
           <p:cNvSpPr/>
           <p:nvPr/>
         </p:nvSpPr>
         <p:spPr>
           <a:xfrm>
             <a:off x="380880" y="647640"/>
-            <a:ext cx="11598480" cy="378000"/>
+            <a:ext cx="11596680" cy="376200"/>
           </a:xfrm>
           <a:prstGeom prst="rect">
             <a:avLst/>
@@ -28664,14 +28558,14 @@
       </p:sp>
       <p:sp>
         <p:nvSpPr>
-          <p:cNvPr id="244" name="Text 2"/>
+          <p:cNvPr id="245" name="Text 2"/>
           <p:cNvSpPr/>
           <p:nvPr/>
         </p:nvSpPr>
         <p:spPr>
           <a:xfrm>
             <a:off x="380880" y="1104840"/>
-            <a:ext cx="11503440" cy="225720"/>
+            <a:ext cx="11501640" cy="223920"/>
           </a:xfrm>
           <a:prstGeom prst="rect">
             <a:avLst/>
@@ -28716,14 +28610,14 @@
       </p:sp>
       <p:sp>
         <p:nvSpPr>
-          <p:cNvPr id="245" name="Shape 3"/>
+          <p:cNvPr id="246" name="Shape 3"/>
           <p:cNvSpPr/>
           <p:nvPr/>
         </p:nvSpPr>
         <p:spPr>
           <a:xfrm>
             <a:off x="385920" y="1414440"/>
-            <a:ext cx="5788440" cy="5054760"/>
+            <a:ext cx="5786640" cy="5052960"/>
           </a:xfrm>
           <a:custGeom>
             <a:avLst/>
@@ -28790,14 +28684,14 @@
       </p:sp>
       <p:sp>
         <p:nvSpPr>
-          <p:cNvPr id="246" name="Image 0"/>
+          <p:cNvPr id="247" name="Image 0"/>
           <p:cNvSpPr/>
           <p:nvPr/>
         </p:nvSpPr>
         <p:spPr>
           <a:xfrm>
             <a:off x="581040" y="1609560"/>
-            <a:ext cx="5397840" cy="4664520"/>
+            <a:ext cx="5396040" cy="4662720"/>
           </a:xfrm>
           <a:prstGeom prst="roundRect">
             <a:avLst>
@@ -28822,14 +28716,14 @@
       </p:sp>
       <p:sp>
         <p:nvSpPr>
-          <p:cNvPr id="247" name="Shape 4"/>
+          <p:cNvPr id="248" name="Shape 4"/>
           <p:cNvSpPr/>
           <p:nvPr/>
         </p:nvSpPr>
         <p:spPr>
           <a:xfrm>
             <a:off x="6429240" y="1414440"/>
-            <a:ext cx="5374080" cy="2035440"/>
+            <a:ext cx="5372280" cy="2033640"/>
           </a:xfrm>
           <a:custGeom>
             <a:avLst/>
@@ -28896,14 +28790,14 @@
       </p:sp>
       <p:sp>
         <p:nvSpPr>
-          <p:cNvPr id="248" name="Text 5"/>
+          <p:cNvPr id="249" name="Text 5"/>
           <p:cNvSpPr/>
           <p:nvPr/>
         </p:nvSpPr>
         <p:spPr>
           <a:xfrm>
             <a:off x="6600960" y="1571760"/>
-            <a:ext cx="1768680" cy="263880"/>
+            <a:ext cx="1766880" cy="262080"/>
           </a:xfrm>
           <a:prstGeom prst="rect">
             <a:avLst/>
@@ -28948,14 +28842,14 @@
       </p:sp>
       <p:sp>
         <p:nvSpPr>
-          <p:cNvPr id="249" name="Shape 6"/>
+          <p:cNvPr id="250" name="Shape 6"/>
           <p:cNvSpPr/>
           <p:nvPr/>
         </p:nvSpPr>
         <p:spPr>
           <a:xfrm>
             <a:off x="11267280" y="1590840"/>
-            <a:ext cx="378000" cy="225720"/>
+            <a:ext cx="376200" cy="223920"/>
           </a:xfrm>
           <a:custGeom>
             <a:avLst/>
@@ -29021,14 +28915,14 @@
       </p:sp>
       <p:sp>
         <p:nvSpPr>
-          <p:cNvPr id="250" name="Text 7"/>
+          <p:cNvPr id="251" name="Text 7"/>
           <p:cNvSpPr/>
           <p:nvPr/>
         </p:nvSpPr>
         <p:spPr>
           <a:xfrm>
             <a:off x="11267280" y="1590840"/>
-            <a:ext cx="435240" cy="225720"/>
+            <a:ext cx="433440" cy="223920"/>
           </a:xfrm>
           <a:prstGeom prst="rect">
             <a:avLst/>
@@ -29073,14 +28967,14 @@
       </p:sp>
       <p:sp>
         <p:nvSpPr>
-          <p:cNvPr id="251" name="Text 8"/>
+          <p:cNvPr id="252" name="Text 8"/>
           <p:cNvSpPr/>
           <p:nvPr/>
         </p:nvSpPr>
         <p:spPr>
           <a:xfrm>
             <a:off x="6600960" y="1914480"/>
-            <a:ext cx="5188320" cy="340200"/>
+            <a:ext cx="5186520" cy="338400"/>
           </a:xfrm>
           <a:prstGeom prst="rect">
             <a:avLst/>
@@ -29125,14 +29019,14 @@
       </p:sp>
       <p:sp>
         <p:nvSpPr>
-          <p:cNvPr id="252" name="Text 9"/>
+          <p:cNvPr id="253" name="Text 9"/>
           <p:cNvSpPr/>
           <p:nvPr/>
         </p:nvSpPr>
         <p:spPr>
           <a:xfrm>
             <a:off x="6600960" y="2295360"/>
-            <a:ext cx="644760" cy="187560"/>
+            <a:ext cx="642960" cy="185760"/>
           </a:xfrm>
           <a:prstGeom prst="rect">
             <a:avLst/>
@@ -29177,14 +29071,14 @@
       </p:sp>
       <p:sp>
         <p:nvSpPr>
-          <p:cNvPr id="253" name="Text 10"/>
+          <p:cNvPr id="254" name="Text 10"/>
           <p:cNvSpPr/>
           <p:nvPr/>
         </p:nvSpPr>
         <p:spPr>
           <a:xfrm>
             <a:off x="7255440" y="2314440"/>
-            <a:ext cx="1330560" cy="149400"/>
+            <a:ext cx="1328760" cy="147600"/>
           </a:xfrm>
           <a:prstGeom prst="rect">
             <a:avLst/>
@@ -29229,14 +29123,14 @@
       </p:sp>
       <p:sp>
         <p:nvSpPr>
-          <p:cNvPr id="254" name="Shape 11"/>
+          <p:cNvPr id="255" name="Shape 11"/>
           <p:cNvSpPr/>
           <p:nvPr/>
         </p:nvSpPr>
         <p:spPr>
           <a:xfrm>
             <a:off x="6600960" y="2604960"/>
-            <a:ext cx="5045400" cy="6480"/>
+            <a:ext cx="5043600" cy="4680"/>
           </a:xfrm>
           <a:custGeom>
             <a:avLst/>
@@ -29280,14 +29174,14 @@
       </p:sp>
       <p:sp>
         <p:nvSpPr>
-          <p:cNvPr id="255" name="Text 12"/>
+          <p:cNvPr id="256" name="Text 12"/>
           <p:cNvSpPr/>
           <p:nvPr/>
         </p:nvSpPr>
         <p:spPr>
           <a:xfrm>
             <a:off x="6600960" y="2724120"/>
-            <a:ext cx="2521080" cy="149400"/>
+            <a:ext cx="2519280" cy="147600"/>
           </a:xfrm>
           <a:prstGeom prst="rect">
             <a:avLst/>
@@ -29332,14 +29226,14 @@
       </p:sp>
       <p:sp>
         <p:nvSpPr>
-          <p:cNvPr id="256" name="Text 13"/>
+          <p:cNvPr id="257" name="Text 13"/>
           <p:cNvSpPr/>
           <p:nvPr/>
         </p:nvSpPr>
         <p:spPr>
           <a:xfrm>
             <a:off x="6600960" y="2876400"/>
-            <a:ext cx="2549880" cy="263880"/>
+            <a:ext cx="2548080" cy="262080"/>
           </a:xfrm>
           <a:prstGeom prst="rect">
             <a:avLst/>
@@ -29384,14 +29278,14 @@
       </p:sp>
       <p:sp>
         <p:nvSpPr>
-          <p:cNvPr id="257" name="Text 14"/>
+          <p:cNvPr id="258" name="Text 14"/>
           <p:cNvSpPr/>
           <p:nvPr/>
         </p:nvSpPr>
         <p:spPr>
           <a:xfrm>
             <a:off x="6600960" y="3143160"/>
-            <a:ext cx="2521080" cy="149400"/>
+            <a:ext cx="2519280" cy="147600"/>
           </a:xfrm>
           <a:prstGeom prst="rect">
             <a:avLst/>
@@ -29436,14 +29330,14 @@
       </p:sp>
       <p:sp>
         <p:nvSpPr>
-          <p:cNvPr id="258" name="Text 15"/>
+          <p:cNvPr id="259" name="Text 15"/>
           <p:cNvSpPr/>
           <p:nvPr/>
         </p:nvSpPr>
         <p:spPr>
           <a:xfrm>
             <a:off x="9182160" y="2724120"/>
-            <a:ext cx="2521080" cy="149400"/>
+            <a:ext cx="2519280" cy="147600"/>
           </a:xfrm>
           <a:prstGeom prst="rect">
             <a:avLst/>
@@ -29488,14 +29382,14 @@
       </p:sp>
       <p:sp>
         <p:nvSpPr>
-          <p:cNvPr id="259" name="Text 16"/>
+          <p:cNvPr id="260" name="Text 16"/>
           <p:cNvSpPr/>
           <p:nvPr/>
         </p:nvSpPr>
         <p:spPr>
           <a:xfrm>
             <a:off x="9182160" y="2876400"/>
-            <a:ext cx="2549880" cy="263880"/>
+            <a:ext cx="2548080" cy="262080"/>
           </a:xfrm>
           <a:prstGeom prst="rect">
             <a:avLst/>
@@ -29540,14 +29434,14 @@
       </p:sp>
       <p:sp>
         <p:nvSpPr>
-          <p:cNvPr id="260" name="Text 17"/>
+          <p:cNvPr id="261" name="Text 17"/>
           <p:cNvSpPr/>
           <p:nvPr/>
         </p:nvSpPr>
         <p:spPr>
           <a:xfrm>
             <a:off x="9182160" y="3143160"/>
-            <a:ext cx="2521080" cy="149400"/>
+            <a:ext cx="2519280" cy="147600"/>
           </a:xfrm>
           <a:prstGeom prst="rect">
             <a:avLst/>
@@ -29592,14 +29486,14 @@
       </p:sp>
       <p:sp>
         <p:nvSpPr>
-          <p:cNvPr id="261" name="Shape 18"/>
+          <p:cNvPr id="262" name="Shape 18"/>
           <p:cNvSpPr/>
           <p:nvPr/>
         </p:nvSpPr>
         <p:spPr>
           <a:xfrm>
             <a:off x="6429240" y="3538440"/>
-            <a:ext cx="5374080" cy="1225800"/>
+            <a:ext cx="5372280" cy="1224000"/>
           </a:xfrm>
           <a:custGeom>
             <a:avLst/>
@@ -29666,14 +29560,14 @@
       </p:sp>
       <p:sp>
         <p:nvSpPr>
-          <p:cNvPr id="262" name="Text 19"/>
+          <p:cNvPr id="263" name="Text 19"/>
           <p:cNvSpPr/>
           <p:nvPr/>
         </p:nvSpPr>
         <p:spPr>
           <a:xfrm>
             <a:off x="6600960" y="3695760"/>
-            <a:ext cx="1540080" cy="263880"/>
+            <a:ext cx="1538280" cy="262080"/>
           </a:xfrm>
           <a:prstGeom prst="rect">
             <a:avLst/>
@@ -29718,14 +29612,14 @@
       </p:sp>
       <p:sp>
         <p:nvSpPr>
-          <p:cNvPr id="263" name="Shape 20"/>
+          <p:cNvPr id="264" name="Shape 20"/>
           <p:cNvSpPr/>
           <p:nvPr/>
         </p:nvSpPr>
         <p:spPr>
           <a:xfrm>
             <a:off x="11292120" y="3714840"/>
-            <a:ext cx="349560" cy="225720"/>
+            <a:ext cx="347760" cy="223920"/>
           </a:xfrm>
           <a:custGeom>
             <a:avLst/>
@@ -29791,14 +29685,14 @@
       </p:sp>
       <p:sp>
         <p:nvSpPr>
-          <p:cNvPr id="264" name="Text 21"/>
+          <p:cNvPr id="265" name="Text 21"/>
           <p:cNvSpPr/>
           <p:nvPr/>
         </p:nvSpPr>
         <p:spPr>
           <a:xfrm>
             <a:off x="11292120" y="3714840"/>
-            <a:ext cx="406800" cy="225720"/>
+            <a:ext cx="405000" cy="223920"/>
           </a:xfrm>
           <a:prstGeom prst="rect">
             <a:avLst/>
@@ -29843,14 +29737,14 @@
       </p:sp>
       <p:sp>
         <p:nvSpPr>
-          <p:cNvPr id="265" name="Text 22"/>
+          <p:cNvPr id="266" name="Text 22"/>
           <p:cNvSpPr/>
           <p:nvPr/>
         </p:nvSpPr>
         <p:spPr>
           <a:xfrm>
             <a:off x="6600960" y="4038480"/>
-            <a:ext cx="5188320" cy="340200"/>
+            <a:ext cx="5186520" cy="338400"/>
           </a:xfrm>
           <a:prstGeom prst="rect">
             <a:avLst/>
@@ -29895,14 +29789,14 @@
       </p:sp>
       <p:sp>
         <p:nvSpPr>
-          <p:cNvPr id="266" name="Text 23"/>
+          <p:cNvPr id="267" name="Text 23"/>
           <p:cNvSpPr/>
           <p:nvPr/>
         </p:nvSpPr>
         <p:spPr>
           <a:xfrm>
             <a:off x="6600960" y="4419720"/>
-            <a:ext cx="673560" cy="187560"/>
+            <a:ext cx="671760" cy="185760"/>
           </a:xfrm>
           <a:prstGeom prst="rect">
             <a:avLst/>
@@ -29947,14 +29841,14 @@
       </p:sp>
       <p:sp>
         <p:nvSpPr>
-          <p:cNvPr id="267" name="Text 24"/>
+          <p:cNvPr id="268" name="Text 24"/>
           <p:cNvSpPr/>
           <p:nvPr/>
         </p:nvSpPr>
         <p:spPr>
           <a:xfrm>
             <a:off x="7284960" y="4438800"/>
-            <a:ext cx="1683000" cy="149400"/>
+            <a:ext cx="1681200" cy="147600"/>
           </a:xfrm>
           <a:prstGeom prst="rect">
             <a:avLst/>
@@ -29999,14 +29893,14 @@
       </p:sp>
       <p:sp>
         <p:nvSpPr>
-          <p:cNvPr id="268" name="Shape 25"/>
+          <p:cNvPr id="269" name="Shape 25"/>
           <p:cNvSpPr/>
           <p:nvPr/>
         </p:nvSpPr>
         <p:spPr>
           <a:xfrm>
             <a:off x="6429240" y="4853160"/>
-            <a:ext cx="5374080" cy="1225800"/>
+            <a:ext cx="5372280" cy="1224000"/>
           </a:xfrm>
           <a:custGeom>
             <a:avLst/>
@@ -30073,14 +29967,14 @@
       </p:sp>
       <p:sp>
         <p:nvSpPr>
-          <p:cNvPr id="269" name="Text 26"/>
+          <p:cNvPr id="270" name="Text 26"/>
           <p:cNvSpPr/>
           <p:nvPr/>
         </p:nvSpPr>
         <p:spPr>
           <a:xfrm>
             <a:off x="6600960" y="5010120"/>
-            <a:ext cx="2254680" cy="263880"/>
+            <a:ext cx="2252880" cy="262080"/>
           </a:xfrm>
           <a:prstGeom prst="rect">
             <a:avLst/>
@@ -30125,14 +30019,14 @@
       </p:sp>
       <p:sp>
         <p:nvSpPr>
-          <p:cNvPr id="270" name="Shape 27"/>
+          <p:cNvPr id="271" name="Shape 27"/>
           <p:cNvSpPr/>
           <p:nvPr/>
         </p:nvSpPr>
         <p:spPr>
           <a:xfrm>
             <a:off x="11265480" y="5029200"/>
-            <a:ext cx="378000" cy="225720"/>
+            <a:ext cx="376200" cy="223920"/>
           </a:xfrm>
           <a:custGeom>
             <a:avLst/>
@@ -30198,14 +30092,14 @@
       </p:sp>
       <p:sp>
         <p:nvSpPr>
-          <p:cNvPr id="271" name="Text 28"/>
+          <p:cNvPr id="272" name="Text 28"/>
           <p:cNvSpPr/>
           <p:nvPr/>
         </p:nvSpPr>
         <p:spPr>
           <a:xfrm>
             <a:off x="11265480" y="5029200"/>
-            <a:ext cx="435240" cy="225720"/>
+            <a:ext cx="433440" cy="223920"/>
           </a:xfrm>
           <a:prstGeom prst="rect">
             <a:avLst/>
@@ -30250,14 +30144,14 @@
       </p:sp>
       <p:sp>
         <p:nvSpPr>
-          <p:cNvPr id="272" name="Text 29"/>
+          <p:cNvPr id="273" name="Text 29"/>
           <p:cNvSpPr/>
           <p:nvPr/>
         </p:nvSpPr>
         <p:spPr>
           <a:xfrm>
             <a:off x="6600960" y="5353200"/>
-            <a:ext cx="5188320" cy="340200"/>
+            <a:ext cx="5186520" cy="338400"/>
           </a:xfrm>
           <a:prstGeom prst="rect">
             <a:avLst/>
@@ -30302,14 +30196,14 @@
       </p:sp>
       <p:sp>
         <p:nvSpPr>
-          <p:cNvPr id="273" name="Text 30"/>
+          <p:cNvPr id="274" name="Text 30"/>
           <p:cNvSpPr/>
           <p:nvPr/>
         </p:nvSpPr>
         <p:spPr>
           <a:xfrm>
             <a:off x="6600960" y="5734080"/>
-            <a:ext cx="644760" cy="187560"/>
+            <a:ext cx="642960" cy="185760"/>
           </a:xfrm>
           <a:prstGeom prst="rect">
             <a:avLst/>
@@ -30354,14 +30248,14 @@
       </p:sp>
       <p:sp>
         <p:nvSpPr>
-          <p:cNvPr id="274" name="Text 31"/>
+          <p:cNvPr id="275" name="Text 31"/>
           <p:cNvSpPr/>
           <p:nvPr/>
         </p:nvSpPr>
         <p:spPr>
           <a:xfrm>
             <a:off x="7260840" y="5753160"/>
-            <a:ext cx="1568880" cy="149400"/>
+            <a:ext cx="1567080" cy="147600"/>
           </a:xfrm>
           <a:prstGeom prst="rect">
             <a:avLst/>
@@ -30443,14 +30337,14 @@
       </p:grpSpPr>
       <p:sp>
         <p:nvSpPr>
-          <p:cNvPr id="275" name="Text 0"/>
+          <p:cNvPr id="276" name="Text 0"/>
           <p:cNvSpPr/>
           <p:nvPr/>
         </p:nvSpPr>
         <p:spPr>
           <a:xfrm>
             <a:off x="380880" y="380880"/>
-            <a:ext cx="11493720" cy="187560"/>
+            <a:ext cx="11491920" cy="185760"/>
           </a:xfrm>
           <a:prstGeom prst="rect">
             <a:avLst/>
@@ -30478,7 +30372,7 @@
               <a:buNone/>
             </a:pPr>
             <a:r>
-              <a:rPr b="1" lang="en-US" sz="1050" spc="32" strike="noStrike">
+              <a:rPr b="1" lang="en-US" sz="1050" spc="18" strike="noStrike">
                 <a:solidFill>
                   <a:srgbClr val="6366f1"/>
                 </a:solidFill>
@@ -30495,14 +30389,14 @@
       </p:sp>
       <p:sp>
         <p:nvSpPr>
-          <p:cNvPr id="276" name="Text 1"/>
+          <p:cNvPr id="277" name="Text 1"/>
           <p:cNvSpPr/>
           <p:nvPr/>
         </p:nvSpPr>
         <p:spPr>
           <a:xfrm>
             <a:off x="380880" y="647640"/>
-            <a:ext cx="11598480" cy="378000"/>
+            <a:ext cx="11596680" cy="376200"/>
           </a:xfrm>
           <a:prstGeom prst="rect">
             <a:avLst/>
@@ -30547,14 +30441,14 @@
       </p:sp>
       <p:sp>
         <p:nvSpPr>
-          <p:cNvPr id="277" name="Text 2"/>
+          <p:cNvPr id="278" name="Text 2"/>
           <p:cNvSpPr/>
           <p:nvPr/>
         </p:nvSpPr>
         <p:spPr>
           <a:xfrm>
             <a:off x="380880" y="1104840"/>
-            <a:ext cx="11503440" cy="225720"/>
+            <a:ext cx="11501640" cy="223920"/>
           </a:xfrm>
           <a:prstGeom prst="rect">
             <a:avLst/>
@@ -30599,14 +30493,14 @@
       </p:sp>
       <p:sp>
         <p:nvSpPr>
-          <p:cNvPr id="278" name="Shape 3"/>
+          <p:cNvPr id="279" name="Shape 3"/>
           <p:cNvSpPr/>
           <p:nvPr/>
         </p:nvSpPr>
         <p:spPr>
           <a:xfrm>
             <a:off x="385920" y="1414440"/>
-            <a:ext cx="6331320" cy="5312160"/>
+            <a:ext cx="6329520" cy="5310360"/>
           </a:xfrm>
           <a:custGeom>
             <a:avLst/>
@@ -30673,14 +30567,14 @@
       </p:sp>
       <p:sp>
         <p:nvSpPr>
-          <p:cNvPr id="279" name="Image 0"/>
+          <p:cNvPr id="280" name="Image 0"/>
           <p:cNvSpPr/>
           <p:nvPr/>
         </p:nvSpPr>
         <p:spPr>
           <a:xfrm>
             <a:off x="581040" y="1609560"/>
-            <a:ext cx="5940720" cy="4921560"/>
+            <a:ext cx="5938920" cy="4919760"/>
           </a:xfrm>
           <a:prstGeom prst="roundRect">
             <a:avLst>
@@ -30705,14 +30599,14 @@
       </p:sp>
       <p:sp>
         <p:nvSpPr>
-          <p:cNvPr id="280" name="Shape 4"/>
+          <p:cNvPr id="281" name="Shape 4"/>
           <p:cNvSpPr/>
           <p:nvPr/>
         </p:nvSpPr>
         <p:spPr>
           <a:xfrm>
             <a:off x="6958080" y="1414440"/>
-            <a:ext cx="4845240" cy="2578320"/>
+            <a:ext cx="4843440" cy="2576520"/>
           </a:xfrm>
           <a:custGeom>
             <a:avLst/>
@@ -30779,14 +30673,14 @@
       </p:sp>
       <p:sp>
         <p:nvSpPr>
-          <p:cNvPr id="281" name="Shape 5"/>
+          <p:cNvPr id="282" name="Shape 5"/>
           <p:cNvSpPr/>
           <p:nvPr/>
         </p:nvSpPr>
         <p:spPr>
           <a:xfrm>
             <a:off x="7153200" y="1609560"/>
-            <a:ext cx="378000" cy="378000"/>
+            <a:ext cx="376200" cy="376200"/>
           </a:xfrm>
           <a:custGeom>
             <a:avLst/>
@@ -30852,14 +30746,14 @@
       </p:sp>
       <p:sp>
         <p:nvSpPr>
-          <p:cNvPr id="282" name="Shape 6"/>
+          <p:cNvPr id="283" name="Shape 6"/>
           <p:cNvSpPr/>
           <p:nvPr/>
         </p:nvSpPr>
         <p:spPr>
           <a:xfrm>
             <a:off x="7267680" y="1724040"/>
-            <a:ext cx="149400" cy="149400"/>
+            <a:ext cx="147600" cy="147600"/>
           </a:xfrm>
           <a:custGeom>
             <a:avLst/>
@@ -30985,14 +30879,14 @@
       </p:sp>
       <p:sp>
         <p:nvSpPr>
-          <p:cNvPr id="283" name="Text 7"/>
+          <p:cNvPr id="284" name="Text 7"/>
           <p:cNvSpPr/>
           <p:nvPr/>
         </p:nvSpPr>
         <p:spPr>
           <a:xfrm>
             <a:off x="7648560" y="1666800"/>
-            <a:ext cx="1845000" cy="263880"/>
+            <a:ext cx="1843200" cy="262080"/>
           </a:xfrm>
           <a:prstGeom prst="rect">
             <a:avLst/>
@@ -31037,14 +30931,14 @@
       </p:sp>
       <p:sp>
         <p:nvSpPr>
-          <p:cNvPr id="284" name="Text 8"/>
+          <p:cNvPr id="285" name="Text 8"/>
           <p:cNvSpPr/>
           <p:nvPr/>
         </p:nvSpPr>
         <p:spPr>
           <a:xfrm>
             <a:off x="7153200" y="2104920"/>
-            <a:ext cx="1082880" cy="454320"/>
+            <a:ext cx="1081080" cy="452520"/>
           </a:xfrm>
           <a:prstGeom prst="rect">
             <a:avLst/>
@@ -31089,14 +30983,14 @@
       </p:sp>
       <p:sp>
         <p:nvSpPr>
-          <p:cNvPr id="285" name="Shape 9"/>
+          <p:cNvPr id="286" name="Shape 9"/>
           <p:cNvSpPr/>
           <p:nvPr/>
         </p:nvSpPr>
         <p:spPr>
           <a:xfrm>
             <a:off x="8127720" y="2300400"/>
-            <a:ext cx="454320" cy="263880"/>
+            <a:ext cx="452520" cy="262080"/>
           </a:xfrm>
           <a:custGeom>
             <a:avLst/>
@@ -31162,14 +31056,14 @@
       </p:sp>
       <p:sp>
         <p:nvSpPr>
-          <p:cNvPr id="286" name="Text 10"/>
+          <p:cNvPr id="287" name="Text 10"/>
           <p:cNvSpPr/>
           <p:nvPr/>
         </p:nvSpPr>
         <p:spPr>
           <a:xfrm>
             <a:off x="8127720" y="2300400"/>
-            <a:ext cx="520920" cy="263880"/>
+            <a:ext cx="519120" cy="262080"/>
           </a:xfrm>
           <a:prstGeom prst="rect">
             <a:avLst/>
@@ -31214,14 +31108,14 @@
       </p:sp>
       <p:sp>
         <p:nvSpPr>
-          <p:cNvPr id="287" name="Text 11"/>
+          <p:cNvPr id="288" name="Text 11"/>
           <p:cNvSpPr/>
           <p:nvPr/>
         </p:nvSpPr>
         <p:spPr>
           <a:xfrm>
             <a:off x="7153200" y="2643120"/>
-            <a:ext cx="4521600" cy="187560"/>
+            <a:ext cx="4519800" cy="185760"/>
           </a:xfrm>
           <a:prstGeom prst="rect">
             <a:avLst/>
@@ -31266,14 +31160,14 @@
       </p:sp>
       <p:sp>
         <p:nvSpPr>
-          <p:cNvPr id="288" name="Shape 12"/>
+          <p:cNvPr id="289" name="Shape 12"/>
           <p:cNvSpPr/>
           <p:nvPr/>
         </p:nvSpPr>
         <p:spPr>
           <a:xfrm>
             <a:off x="7153200" y="2990880"/>
-            <a:ext cx="4455000" cy="6480"/>
+            <a:ext cx="4453200" cy="4680"/>
           </a:xfrm>
           <a:custGeom>
             <a:avLst/>
@@ -31317,14 +31211,14 @@
       </p:sp>
       <p:sp>
         <p:nvSpPr>
-          <p:cNvPr id="289" name="Text 13"/>
+          <p:cNvPr id="290" name="Text 13"/>
           <p:cNvSpPr/>
           <p:nvPr/>
         </p:nvSpPr>
         <p:spPr>
           <a:xfrm>
             <a:off x="7153200" y="3147840"/>
-            <a:ext cx="4521600" cy="644760"/>
+            <a:ext cx="4519800" cy="642960"/>
           </a:xfrm>
           <a:prstGeom prst="rect">
             <a:avLst/>
@@ -31369,14 +31263,14 @@
       </p:sp>
       <p:sp>
         <p:nvSpPr>
-          <p:cNvPr id="290" name="Shape 14"/>
+          <p:cNvPr id="291" name="Shape 14"/>
           <p:cNvSpPr/>
           <p:nvPr/>
         </p:nvSpPr>
         <p:spPr>
           <a:xfrm>
             <a:off x="6958080" y="4079160"/>
-            <a:ext cx="4845240" cy="2635560"/>
+            <a:ext cx="4843440" cy="2633760"/>
           </a:xfrm>
           <a:custGeom>
             <a:avLst/>
@@ -31443,14 +31337,14 @@
       </p:sp>
       <p:sp>
         <p:nvSpPr>
-          <p:cNvPr id="291" name="Text 15"/>
+          <p:cNvPr id="292" name="Text 15"/>
           <p:cNvSpPr/>
           <p:nvPr/>
         </p:nvSpPr>
         <p:spPr>
           <a:xfrm>
             <a:off x="7153200" y="4274280"/>
-            <a:ext cx="4540680" cy="263880"/>
+            <a:ext cx="4538880" cy="262080"/>
           </a:xfrm>
           <a:prstGeom prst="rect">
             <a:avLst/>
@@ -31495,14 +31389,14 @@
       </p:sp>
       <p:sp>
         <p:nvSpPr>
-          <p:cNvPr id="292" name="Text 16"/>
+          <p:cNvPr id="293" name="Text 16"/>
           <p:cNvSpPr/>
           <p:nvPr/>
         </p:nvSpPr>
         <p:spPr>
           <a:xfrm>
             <a:off x="7153200" y="4712400"/>
-            <a:ext cx="321120" cy="187560"/>
+            <a:ext cx="319320" cy="185760"/>
           </a:xfrm>
           <a:prstGeom prst="rect">
             <a:avLst/>
@@ -31547,14 +31441,14 @@
       </p:sp>
       <p:sp>
         <p:nvSpPr>
-          <p:cNvPr id="293" name="Text 17"/>
+          <p:cNvPr id="294" name="Text 17"/>
           <p:cNvSpPr/>
           <p:nvPr/>
         </p:nvSpPr>
         <p:spPr>
           <a:xfrm>
             <a:off x="11301840" y="4693320"/>
-            <a:ext cx="378000" cy="225720"/>
+            <a:ext cx="376200" cy="223920"/>
           </a:xfrm>
           <a:prstGeom prst="rect">
             <a:avLst/>
@@ -31599,14 +31493,14 @@
       </p:sp>
       <p:sp>
         <p:nvSpPr>
-          <p:cNvPr id="294" name="Shape 18"/>
+          <p:cNvPr id="295" name="Shape 18"/>
           <p:cNvSpPr/>
           <p:nvPr/>
         </p:nvSpPr>
         <p:spPr>
           <a:xfrm>
             <a:off x="7153200" y="4960080"/>
-            <a:ext cx="4455000" cy="73440"/>
+            <a:ext cx="4453200" cy="71640"/>
           </a:xfrm>
           <a:custGeom>
             <a:avLst/>
@@ -31670,14 +31564,14 @@
       </p:sp>
       <p:sp>
         <p:nvSpPr>
-          <p:cNvPr id="295" name="Shape 19"/>
+          <p:cNvPr id="296" name="Shape 19"/>
           <p:cNvSpPr/>
           <p:nvPr/>
         </p:nvSpPr>
         <p:spPr>
           <a:xfrm>
             <a:off x="7153200" y="4960080"/>
-            <a:ext cx="2673720" cy="73440"/>
+            <a:ext cx="2671920" cy="71640"/>
           </a:xfrm>
           <a:custGeom>
             <a:avLst/>
@@ -31741,14 +31635,14 @@
       </p:sp>
       <p:sp>
         <p:nvSpPr>
-          <p:cNvPr id="296" name="Text 20"/>
+          <p:cNvPr id="297" name="Text 20"/>
           <p:cNvSpPr/>
           <p:nvPr/>
         </p:nvSpPr>
         <p:spPr>
           <a:xfrm>
             <a:off x="7153200" y="5074560"/>
-            <a:ext cx="4511880" cy="149400"/>
+            <a:ext cx="4510080" cy="147600"/>
           </a:xfrm>
           <a:prstGeom prst="rect">
             <a:avLst/>
@@ -31793,14 +31687,14 @@
       </p:sp>
       <p:sp>
         <p:nvSpPr>
-          <p:cNvPr id="297" name="Text 21"/>
+          <p:cNvPr id="298" name="Text 21"/>
           <p:cNvSpPr/>
           <p:nvPr/>
         </p:nvSpPr>
         <p:spPr>
           <a:xfrm>
             <a:off x="7153200" y="5360040"/>
-            <a:ext cx="1197360" cy="187560"/>
+            <a:ext cx="1195560" cy="185760"/>
           </a:xfrm>
           <a:prstGeom prst="rect">
             <a:avLst/>
@@ -31845,14 +31739,14 @@
       </p:sp>
       <p:sp>
         <p:nvSpPr>
-          <p:cNvPr id="298" name="Text 22"/>
+          <p:cNvPr id="299" name="Text 22"/>
           <p:cNvSpPr/>
           <p:nvPr/>
         </p:nvSpPr>
         <p:spPr>
           <a:xfrm>
             <a:off x="11308680" y="5341320"/>
-            <a:ext cx="378000" cy="225720"/>
+            <a:ext cx="376200" cy="223920"/>
           </a:xfrm>
           <a:prstGeom prst="rect">
             <a:avLst/>
@@ -31897,14 +31791,14 @@
       </p:sp>
       <p:sp>
         <p:nvSpPr>
-          <p:cNvPr id="299" name="Shape 23"/>
+          <p:cNvPr id="300" name="Shape 23"/>
           <p:cNvSpPr/>
           <p:nvPr/>
         </p:nvSpPr>
         <p:spPr>
           <a:xfrm>
             <a:off x="7153200" y="5607720"/>
-            <a:ext cx="4455000" cy="73440"/>
+            <a:ext cx="4453200" cy="71640"/>
           </a:xfrm>
           <a:custGeom>
             <a:avLst/>
@@ -31968,14 +31862,14 @@
       </p:sp>
       <p:sp>
         <p:nvSpPr>
-          <p:cNvPr id="300" name="Shape 24"/>
+          <p:cNvPr id="301" name="Shape 24"/>
           <p:cNvSpPr/>
           <p:nvPr/>
         </p:nvSpPr>
         <p:spPr>
           <a:xfrm>
             <a:off x="7153200" y="5607720"/>
-            <a:ext cx="2578320" cy="73440"/>
+            <a:ext cx="2576520" cy="71640"/>
           </a:xfrm>
           <a:custGeom>
             <a:avLst/>
@@ -32039,14 +31933,14 @@
       </p:sp>
       <p:sp>
         <p:nvSpPr>
-          <p:cNvPr id="301" name="Text 25"/>
+          <p:cNvPr id="302" name="Text 25"/>
           <p:cNvSpPr/>
           <p:nvPr/>
         </p:nvSpPr>
         <p:spPr>
           <a:xfrm>
             <a:off x="7153200" y="5722200"/>
-            <a:ext cx="4511880" cy="149400"/>
+            <a:ext cx="4510080" cy="147600"/>
           </a:xfrm>
           <a:prstGeom prst="rect">
             <a:avLst/>
@@ -32091,14 +31985,14 @@
       </p:sp>
       <p:sp>
         <p:nvSpPr>
-          <p:cNvPr id="302" name="Text 26"/>
+          <p:cNvPr id="303" name="Text 26"/>
           <p:cNvSpPr/>
           <p:nvPr/>
         </p:nvSpPr>
         <p:spPr>
           <a:xfrm>
             <a:off x="7153200" y="6008040"/>
-            <a:ext cx="1216440" cy="187560"/>
+            <a:ext cx="1214640" cy="185760"/>
           </a:xfrm>
           <a:prstGeom prst="rect">
             <a:avLst/>
@@ -32143,14 +32037,14 @@
       </p:sp>
       <p:sp>
         <p:nvSpPr>
-          <p:cNvPr id="303" name="Text 27"/>
+          <p:cNvPr id="304" name="Text 27"/>
           <p:cNvSpPr/>
           <p:nvPr/>
         </p:nvSpPr>
         <p:spPr>
           <a:xfrm>
             <a:off x="11313720" y="5988960"/>
-            <a:ext cx="368640" cy="225720"/>
+            <a:ext cx="366840" cy="223920"/>
           </a:xfrm>
           <a:prstGeom prst="rect">
             <a:avLst/>
@@ -32195,14 +32089,14 @@
       </p:sp>
       <p:sp>
         <p:nvSpPr>
-          <p:cNvPr id="304" name="Shape 28"/>
+          <p:cNvPr id="305" name="Shape 28"/>
           <p:cNvSpPr/>
           <p:nvPr/>
         </p:nvSpPr>
         <p:spPr>
           <a:xfrm>
             <a:off x="7153200" y="6255720"/>
-            <a:ext cx="4455000" cy="73440"/>
+            <a:ext cx="4453200" cy="71640"/>
           </a:xfrm>
           <a:custGeom>
             <a:avLst/>
@@ -32266,14 +32160,14 @@
       </p:sp>
       <p:sp>
         <p:nvSpPr>
-          <p:cNvPr id="305" name="Shape 29"/>
+          <p:cNvPr id="306" name="Shape 29"/>
           <p:cNvSpPr/>
           <p:nvPr/>
         </p:nvSpPr>
         <p:spPr>
           <a:xfrm>
             <a:off x="7153200" y="6255720"/>
-            <a:ext cx="2311560" cy="73440"/>
+            <a:ext cx="2309760" cy="71640"/>
           </a:xfrm>
           <a:custGeom>
             <a:avLst/>
@@ -32337,14 +32231,14 @@
       </p:sp>
       <p:sp>
         <p:nvSpPr>
-          <p:cNvPr id="306" name="Text 30"/>
+          <p:cNvPr id="307" name="Text 30"/>
           <p:cNvSpPr/>
           <p:nvPr/>
         </p:nvSpPr>
         <p:spPr>
           <a:xfrm>
             <a:off x="7153200" y="6369840"/>
-            <a:ext cx="4511880" cy="149400"/>
+            <a:ext cx="4510080" cy="147600"/>
           </a:xfrm>
           <a:prstGeom prst="rect">
             <a:avLst/>
@@ -32426,14 +32320,14 @@
       </p:grpSpPr>
       <p:sp>
         <p:nvSpPr>
-          <p:cNvPr id="307" name="Text 0"/>
+          <p:cNvPr id="308" name="Text 0"/>
           <p:cNvSpPr/>
           <p:nvPr/>
         </p:nvSpPr>
         <p:spPr>
           <a:xfrm>
             <a:off x="370440" y="370440"/>
-            <a:ext cx="11513160" cy="182160"/>
+            <a:ext cx="11511360" cy="180360"/>
           </a:xfrm>
           <a:prstGeom prst="rect">
             <a:avLst/>
@@ -32461,7 +32355,7 @@
               <a:buNone/>
             </a:pPr>
             <a:r>
-              <a:rPr b="1" lang="en-US" sz="1020" spc="29" strike="noStrike">
+              <a:rPr b="1" lang="en-US" sz="1020" spc="15" strike="noStrike">
                 <a:solidFill>
                   <a:srgbClr val="6366f1"/>
                 </a:solidFill>
@@ -32478,14 +32372,14 @@
       </p:sp>
       <p:sp>
         <p:nvSpPr>
-          <p:cNvPr id="308" name="Text 1"/>
+          <p:cNvPr id="309" name="Text 1"/>
           <p:cNvSpPr/>
           <p:nvPr/>
         </p:nvSpPr>
         <p:spPr>
           <a:xfrm>
             <a:off x="370440" y="629640"/>
-            <a:ext cx="11615040" cy="367560"/>
+            <a:ext cx="11613240" cy="365760"/>
           </a:xfrm>
           <a:prstGeom prst="rect">
             <a:avLst/>
@@ -32530,14 +32424,14 @@
       </p:sp>
       <p:sp>
         <p:nvSpPr>
-          <p:cNvPr id="309" name="Text 2"/>
+          <p:cNvPr id="310" name="Text 2"/>
           <p:cNvSpPr/>
           <p:nvPr/>
         </p:nvSpPr>
         <p:spPr>
           <a:xfrm>
             <a:off x="370440" y="1073880"/>
-            <a:ext cx="11522520" cy="219240"/>
+            <a:ext cx="11520720" cy="217440"/>
           </a:xfrm>
           <a:prstGeom prst="rect">
             <a:avLst/>
@@ -32582,14 +32476,14 @@
       </p:sp>
       <p:sp>
         <p:nvSpPr>
-          <p:cNvPr id="310" name="Shape 3"/>
+          <p:cNvPr id="311" name="Shape 3"/>
           <p:cNvSpPr/>
           <p:nvPr/>
         </p:nvSpPr>
         <p:spPr>
           <a:xfrm>
             <a:off x="388800" y="1374840"/>
-            <a:ext cx="5630400" cy="3755520"/>
+            <a:ext cx="5628600" cy="3753720"/>
           </a:xfrm>
           <a:custGeom>
             <a:avLst/>
@@ -32656,14 +32550,14 @@
       </p:sp>
       <p:sp>
         <p:nvSpPr>
-          <p:cNvPr id="311" name="Shape 4"/>
+          <p:cNvPr id="312" name="Shape 4"/>
           <p:cNvSpPr/>
           <p:nvPr/>
         </p:nvSpPr>
         <p:spPr>
           <a:xfrm>
             <a:off x="592560" y="1564560"/>
-            <a:ext cx="441360" cy="441360"/>
+            <a:ext cx="439560" cy="439560"/>
           </a:xfrm>
           <a:custGeom>
             <a:avLst/>
@@ -32729,14 +32623,14 @@
       </p:sp>
       <p:sp>
         <p:nvSpPr>
-          <p:cNvPr id="312" name="Shape 5"/>
+          <p:cNvPr id="313" name="Shape 5"/>
           <p:cNvSpPr/>
           <p:nvPr/>
         </p:nvSpPr>
         <p:spPr>
           <a:xfrm>
             <a:off x="722160" y="1694160"/>
-            <a:ext cx="182160" cy="182160"/>
+            <a:ext cx="180360" cy="180360"/>
           </a:xfrm>
           <a:custGeom>
             <a:avLst/>
@@ -32850,14 +32744,14 @@
       </p:sp>
       <p:sp>
         <p:nvSpPr>
-          <p:cNvPr id="313" name="Text 6"/>
+          <p:cNvPr id="314" name="Text 6"/>
           <p:cNvSpPr/>
           <p:nvPr/>
         </p:nvSpPr>
         <p:spPr>
           <a:xfrm>
             <a:off x="1148040" y="1564560"/>
-            <a:ext cx="1478160" cy="256320"/>
+            <a:ext cx="1476360" cy="254520"/>
           </a:xfrm>
           <a:prstGeom prst="rect">
             <a:avLst/>
@@ -32902,14 +32796,14 @@
       </p:sp>
       <p:sp>
         <p:nvSpPr>
-          <p:cNvPr id="314" name="Text 7"/>
+          <p:cNvPr id="315" name="Text 7"/>
           <p:cNvSpPr/>
           <p:nvPr/>
         </p:nvSpPr>
         <p:spPr>
           <a:xfrm>
             <a:off x="1148040" y="1823760"/>
-            <a:ext cx="1450440" cy="182160"/>
+            <a:ext cx="1448640" cy="180360"/>
           </a:xfrm>
           <a:prstGeom prst="rect">
             <a:avLst/>
@@ -32954,14 +32848,14 @@
       </p:sp>
       <p:sp>
         <p:nvSpPr>
-          <p:cNvPr id="315" name="Text 8"/>
+          <p:cNvPr id="316" name="Text 8"/>
           <p:cNvSpPr/>
           <p:nvPr/>
         </p:nvSpPr>
         <p:spPr>
           <a:xfrm>
             <a:off x="592560" y="2157120"/>
-            <a:ext cx="5301720" cy="182160"/>
+            <a:ext cx="5299920" cy="180360"/>
           </a:xfrm>
           <a:prstGeom prst="rect">
             <a:avLst/>
@@ -33006,14 +32900,14 @@
       </p:sp>
       <p:sp>
         <p:nvSpPr>
-          <p:cNvPr id="316" name="Text 9"/>
+          <p:cNvPr id="317" name="Text 9"/>
           <p:cNvSpPr/>
           <p:nvPr/>
         </p:nvSpPr>
         <p:spPr>
           <a:xfrm>
             <a:off x="592560" y="2379240"/>
-            <a:ext cx="1830240" cy="367560"/>
+            <a:ext cx="1828440" cy="365760"/>
           </a:xfrm>
           <a:prstGeom prst="rect">
             <a:avLst/>
@@ -33058,14 +32952,14 @@
       </p:sp>
       <p:sp>
         <p:nvSpPr>
-          <p:cNvPr id="317" name="Shape 10"/>
+          <p:cNvPr id="318" name="Shape 10"/>
           <p:cNvSpPr/>
           <p:nvPr/>
         </p:nvSpPr>
         <p:spPr>
           <a:xfrm>
             <a:off x="2369880" y="2494800"/>
-            <a:ext cx="700560" cy="256320"/>
+            <a:ext cx="698760" cy="254520"/>
           </a:xfrm>
           <a:custGeom>
             <a:avLst/>
@@ -33131,14 +33025,14 @@
       </p:sp>
       <p:sp>
         <p:nvSpPr>
-          <p:cNvPr id="318" name="Text 11"/>
+          <p:cNvPr id="319" name="Text 11"/>
           <p:cNvSpPr/>
           <p:nvPr/>
         </p:nvSpPr>
         <p:spPr>
           <a:xfrm>
             <a:off x="2369880" y="2494800"/>
-            <a:ext cx="765360" cy="256320"/>
+            <a:ext cx="763560" cy="254520"/>
           </a:xfrm>
           <a:prstGeom prst="rect">
             <a:avLst/>
@@ -33183,14 +33077,14 @@
       </p:sp>
       <p:sp>
         <p:nvSpPr>
-          <p:cNvPr id="319" name="Shape 12"/>
+          <p:cNvPr id="320" name="Shape 12"/>
           <p:cNvSpPr/>
           <p:nvPr/>
         </p:nvSpPr>
         <p:spPr>
           <a:xfrm>
             <a:off x="592560" y="2902320"/>
-            <a:ext cx="5236920" cy="1145160"/>
+            <a:ext cx="5235120" cy="1143360"/>
           </a:xfrm>
           <a:custGeom>
             <a:avLst/>
@@ -33254,14 +33148,14 @@
       </p:sp>
       <p:sp>
         <p:nvSpPr>
-          <p:cNvPr id="320" name="Text 13"/>
+          <p:cNvPr id="321" name="Text 13"/>
           <p:cNvSpPr/>
           <p:nvPr/>
         </p:nvSpPr>
         <p:spPr>
           <a:xfrm>
             <a:off x="703440" y="3013200"/>
-            <a:ext cx="5088600" cy="219240"/>
+            <a:ext cx="5086800" cy="217440"/>
           </a:xfrm>
           <a:prstGeom prst="rect">
             <a:avLst/>
@@ -33306,14 +33200,14 @@
       </p:sp>
       <p:sp>
         <p:nvSpPr>
-          <p:cNvPr id="321" name="Text 14"/>
+          <p:cNvPr id="322" name="Text 14"/>
           <p:cNvSpPr/>
           <p:nvPr/>
         </p:nvSpPr>
         <p:spPr>
           <a:xfrm>
             <a:off x="703440" y="3272400"/>
-            <a:ext cx="5079600" cy="182160"/>
+            <a:ext cx="5077800" cy="180360"/>
           </a:xfrm>
           <a:prstGeom prst="rect">
             <a:avLst/>
@@ -33358,14 +33252,14 @@
       </p:sp>
       <p:sp>
         <p:nvSpPr>
-          <p:cNvPr id="322" name="Text 15"/>
+          <p:cNvPr id="323" name="Text 15"/>
           <p:cNvSpPr/>
           <p:nvPr/>
         </p:nvSpPr>
         <p:spPr>
           <a:xfrm>
             <a:off x="703440" y="3531600"/>
-            <a:ext cx="747000" cy="256320"/>
+            <a:ext cx="745200" cy="254520"/>
           </a:xfrm>
           <a:prstGeom prst="rect">
             <a:avLst/>
@@ -33410,14 +33304,14 @@
       </p:sp>
       <p:sp>
         <p:nvSpPr>
-          <p:cNvPr id="323" name="Text 16"/>
+          <p:cNvPr id="324" name="Text 16"/>
           <p:cNvSpPr/>
           <p:nvPr/>
         </p:nvSpPr>
         <p:spPr>
           <a:xfrm>
             <a:off x="703440" y="3790800"/>
-            <a:ext cx="709920" cy="145080"/>
+            <a:ext cx="708120" cy="143280"/>
           </a:xfrm>
           <a:prstGeom prst="rect">
             <a:avLst/>
@@ -33462,14 +33356,14 @@
       </p:sp>
       <p:sp>
         <p:nvSpPr>
-          <p:cNvPr id="324" name="Text 17"/>
+          <p:cNvPr id="325" name="Text 17"/>
           <p:cNvSpPr/>
           <p:nvPr/>
         </p:nvSpPr>
         <p:spPr>
           <a:xfrm>
             <a:off x="1508040" y="3531600"/>
-            <a:ext cx="1006200" cy="256320"/>
+            <a:ext cx="1004400" cy="254520"/>
           </a:xfrm>
           <a:prstGeom prst="rect">
             <a:avLst/>
@@ -33514,14 +33408,14 @@
       </p:sp>
       <p:sp>
         <p:nvSpPr>
-          <p:cNvPr id="325" name="Text 18"/>
+          <p:cNvPr id="326" name="Text 18"/>
           <p:cNvSpPr/>
           <p:nvPr/>
         </p:nvSpPr>
         <p:spPr>
           <a:xfrm>
             <a:off x="1508040" y="3790800"/>
-            <a:ext cx="969120" cy="145080"/>
+            <a:ext cx="967320" cy="143280"/>
           </a:xfrm>
           <a:prstGeom prst="rect">
             <a:avLst/>
@@ -33566,14 +33460,14 @@
       </p:sp>
       <p:sp>
         <p:nvSpPr>
-          <p:cNvPr id="326" name="Text 19"/>
+          <p:cNvPr id="327" name="Text 19"/>
           <p:cNvSpPr/>
           <p:nvPr/>
         </p:nvSpPr>
         <p:spPr>
           <a:xfrm>
             <a:off x="2575800" y="3531600"/>
-            <a:ext cx="1089360" cy="256320"/>
+            <a:ext cx="1087560" cy="254520"/>
           </a:xfrm>
           <a:prstGeom prst="rect">
             <a:avLst/>
@@ -33618,14 +33512,14 @@
       </p:sp>
       <p:sp>
         <p:nvSpPr>
-          <p:cNvPr id="327" name="Text 20"/>
+          <p:cNvPr id="328" name="Text 20"/>
           <p:cNvSpPr/>
           <p:nvPr/>
         </p:nvSpPr>
         <p:spPr>
           <a:xfrm>
             <a:off x="2575800" y="3790800"/>
-            <a:ext cx="1052640" cy="145080"/>
+            <a:ext cx="1050840" cy="143280"/>
           </a:xfrm>
           <a:prstGeom prst="rect">
             <a:avLst/>
@@ -33670,14 +33564,14 @@
       </p:sp>
       <p:sp>
         <p:nvSpPr>
-          <p:cNvPr id="328" name="Shape 21"/>
+          <p:cNvPr id="329" name="Shape 21"/>
           <p:cNvSpPr/>
           <p:nvPr/>
         </p:nvSpPr>
         <p:spPr>
           <a:xfrm>
             <a:off x="592560" y="4161240"/>
-            <a:ext cx="5236920" cy="774720"/>
+            <a:ext cx="5235120" cy="772920"/>
           </a:xfrm>
           <a:custGeom>
             <a:avLst/>
@@ -33741,14 +33635,14 @@
       </p:sp>
       <p:sp>
         <p:nvSpPr>
-          <p:cNvPr id="329" name="Text 22"/>
+          <p:cNvPr id="330" name="Text 22"/>
           <p:cNvSpPr/>
           <p:nvPr/>
         </p:nvSpPr>
         <p:spPr>
           <a:xfrm>
             <a:off x="703440" y="4272120"/>
-            <a:ext cx="5088600" cy="219240"/>
+            <a:ext cx="5086800" cy="217440"/>
           </a:xfrm>
           <a:prstGeom prst="rect">
             <a:avLst/>
@@ -33793,14 +33687,14 @@
       </p:sp>
       <p:sp>
         <p:nvSpPr>
-          <p:cNvPr id="330" name="Shape 23"/>
+          <p:cNvPr id="331" name="Shape 23"/>
           <p:cNvSpPr/>
           <p:nvPr/>
         </p:nvSpPr>
         <p:spPr>
           <a:xfrm>
             <a:off x="703440" y="4568400"/>
-            <a:ext cx="1061640" cy="256320"/>
+            <a:ext cx="1059840" cy="254520"/>
           </a:xfrm>
           <a:custGeom>
             <a:avLst/>
@@ -33866,14 +33760,14 @@
       </p:sp>
       <p:sp>
         <p:nvSpPr>
-          <p:cNvPr id="331" name="Text 24"/>
+          <p:cNvPr id="332" name="Text 24"/>
           <p:cNvSpPr/>
           <p:nvPr/>
         </p:nvSpPr>
         <p:spPr>
           <a:xfrm>
             <a:off x="703440" y="4568400"/>
-            <a:ext cx="1126440" cy="256320"/>
+            <a:ext cx="1124640" cy="254520"/>
           </a:xfrm>
           <a:prstGeom prst="rect">
             <a:avLst/>
@@ -33918,14 +33812,14 @@
       </p:sp>
       <p:sp>
         <p:nvSpPr>
-          <p:cNvPr id="332" name="Shape 25"/>
+          <p:cNvPr id="333" name="Shape 25"/>
           <p:cNvSpPr/>
           <p:nvPr/>
         </p:nvSpPr>
         <p:spPr>
           <a:xfrm>
             <a:off x="1843560" y="4568400"/>
-            <a:ext cx="1237680" cy="256320"/>
+            <a:ext cx="1235880" cy="254520"/>
           </a:xfrm>
           <a:custGeom>
             <a:avLst/>
@@ -33991,14 +33885,14 @@
       </p:sp>
       <p:sp>
         <p:nvSpPr>
-          <p:cNvPr id="333" name="Text 26"/>
+          <p:cNvPr id="334" name="Text 26"/>
           <p:cNvSpPr/>
           <p:nvPr/>
         </p:nvSpPr>
         <p:spPr>
           <a:xfrm>
             <a:off x="1843560" y="4568400"/>
-            <a:ext cx="1302480" cy="256320"/>
+            <a:ext cx="1300680" cy="254520"/>
           </a:xfrm>
           <a:prstGeom prst="rect">
             <a:avLst/>
@@ -34043,14 +33937,14 @@
       </p:sp>
       <p:sp>
         <p:nvSpPr>
-          <p:cNvPr id="334" name="Shape 27"/>
+          <p:cNvPr id="335" name="Shape 27"/>
           <p:cNvSpPr/>
           <p:nvPr/>
         </p:nvSpPr>
         <p:spPr>
           <a:xfrm>
             <a:off x="3161880" y="4568400"/>
-            <a:ext cx="894960" cy="256320"/>
+            <a:ext cx="893160" cy="254520"/>
           </a:xfrm>
           <a:custGeom>
             <a:avLst/>
@@ -34116,14 +34010,14 @@
       </p:sp>
       <p:sp>
         <p:nvSpPr>
-          <p:cNvPr id="335" name="Text 28"/>
+          <p:cNvPr id="336" name="Text 28"/>
           <p:cNvSpPr/>
           <p:nvPr/>
         </p:nvSpPr>
         <p:spPr>
           <a:xfrm>
             <a:off x="3161880" y="4568400"/>
-            <a:ext cx="959760" cy="256320"/>
+            <a:ext cx="957960" cy="254520"/>
           </a:xfrm>
           <a:prstGeom prst="rect">
             <a:avLst/>
@@ -34168,14 +34062,14 @@
       </p:sp>
       <p:sp>
         <p:nvSpPr>
-          <p:cNvPr id="336" name="Shape 29"/>
+          <p:cNvPr id="337" name="Shape 29"/>
           <p:cNvSpPr/>
           <p:nvPr/>
         </p:nvSpPr>
         <p:spPr>
           <a:xfrm>
             <a:off x="6190200" y="1374840"/>
-            <a:ext cx="5630400" cy="4125960"/>
+            <a:ext cx="5628600" cy="4124160"/>
           </a:xfrm>
           <a:custGeom>
             <a:avLst/>
@@ -34242,14 +34136,14 @@
       </p:sp>
       <p:sp>
         <p:nvSpPr>
-          <p:cNvPr id="337" name="Shape 30"/>
+          <p:cNvPr id="338" name="Shape 30"/>
           <p:cNvSpPr/>
           <p:nvPr/>
         </p:nvSpPr>
         <p:spPr>
           <a:xfrm>
             <a:off x="6393600" y="1564560"/>
-            <a:ext cx="441360" cy="441360"/>
+            <a:ext cx="439560" cy="439560"/>
           </a:xfrm>
           <a:custGeom>
             <a:avLst/>
@@ -34315,14 +34209,14 @@
       </p:sp>
       <p:sp>
         <p:nvSpPr>
-          <p:cNvPr id="338" name="Shape 31"/>
+          <p:cNvPr id="339" name="Shape 31"/>
           <p:cNvSpPr/>
           <p:nvPr/>
         </p:nvSpPr>
         <p:spPr>
           <a:xfrm>
             <a:off x="6523200" y="1694160"/>
-            <a:ext cx="182160" cy="182160"/>
+            <a:ext cx="180360" cy="180360"/>
           </a:xfrm>
           <a:custGeom>
             <a:avLst/>
@@ -34492,14 +34386,14 @@
       </p:sp>
       <p:sp>
         <p:nvSpPr>
-          <p:cNvPr id="339" name="Text 32"/>
+          <p:cNvPr id="340" name="Text 32"/>
           <p:cNvSpPr/>
           <p:nvPr/>
         </p:nvSpPr>
         <p:spPr>
           <a:xfrm>
             <a:off x="6949080" y="1564560"/>
-            <a:ext cx="1719000" cy="256320"/>
+            <a:ext cx="1717200" cy="254520"/>
           </a:xfrm>
           <a:prstGeom prst="rect">
             <a:avLst/>
@@ -34544,14 +34438,14 @@
       </p:sp>
       <p:sp>
         <p:nvSpPr>
-          <p:cNvPr id="340" name="Text 33"/>
+          <p:cNvPr id="341" name="Text 33"/>
           <p:cNvSpPr/>
           <p:nvPr/>
         </p:nvSpPr>
         <p:spPr>
           <a:xfrm>
             <a:off x="6949080" y="1823760"/>
-            <a:ext cx="1691280" cy="182160"/>
+            <a:ext cx="1689480" cy="180360"/>
           </a:xfrm>
           <a:prstGeom prst="rect">
             <a:avLst/>
@@ -34596,14 +34490,14 @@
       </p:sp>
       <p:sp>
         <p:nvSpPr>
-          <p:cNvPr id="341" name="Text 34"/>
+          <p:cNvPr id="342" name="Text 34"/>
           <p:cNvSpPr/>
           <p:nvPr/>
         </p:nvSpPr>
         <p:spPr>
           <a:xfrm>
             <a:off x="6393600" y="2157120"/>
-            <a:ext cx="5301720" cy="182160"/>
+            <a:ext cx="5299920" cy="180360"/>
           </a:xfrm>
           <a:prstGeom prst="rect">
             <a:avLst/>
@@ -34648,14 +34542,14 @@
       </p:sp>
       <p:sp>
         <p:nvSpPr>
-          <p:cNvPr id="342" name="Text 35"/>
+          <p:cNvPr id="343" name="Text 35"/>
           <p:cNvSpPr/>
           <p:nvPr/>
         </p:nvSpPr>
         <p:spPr>
           <a:xfrm>
             <a:off x="6393600" y="2379240"/>
-            <a:ext cx="1765440" cy="367560"/>
+            <a:ext cx="1763640" cy="365760"/>
           </a:xfrm>
           <a:prstGeom prst="rect">
             <a:avLst/>
@@ -34700,14 +34594,14 @@
       </p:sp>
       <p:sp>
         <p:nvSpPr>
-          <p:cNvPr id="343" name="Shape 36"/>
+          <p:cNvPr id="344" name="Shape 36"/>
           <p:cNvSpPr/>
           <p:nvPr/>
         </p:nvSpPr>
         <p:spPr>
           <a:xfrm>
             <a:off x="8108640" y="2494800"/>
-            <a:ext cx="728280" cy="256320"/>
+            <a:ext cx="726480" cy="254520"/>
           </a:xfrm>
           <a:custGeom>
             <a:avLst/>
@@ -34773,14 +34667,14 @@
       </p:sp>
       <p:sp>
         <p:nvSpPr>
-          <p:cNvPr id="344" name="Text 37"/>
+          <p:cNvPr id="345" name="Text 37"/>
           <p:cNvSpPr/>
           <p:nvPr/>
         </p:nvSpPr>
         <p:spPr>
           <a:xfrm>
             <a:off x="8108640" y="2494800"/>
-            <a:ext cx="793080" cy="256320"/>
+            <a:ext cx="791280" cy="254520"/>
           </a:xfrm>
           <a:prstGeom prst="rect">
             <a:avLst/>
@@ -34825,14 +34719,14 @@
       </p:sp>
       <p:sp>
         <p:nvSpPr>
-          <p:cNvPr id="345" name="Text 38"/>
+          <p:cNvPr id="346" name="Text 38"/>
           <p:cNvSpPr/>
           <p:nvPr/>
         </p:nvSpPr>
         <p:spPr>
           <a:xfrm>
             <a:off x="6393600" y="2791080"/>
-            <a:ext cx="5292360" cy="145080"/>
+            <a:ext cx="5290560" cy="143280"/>
           </a:xfrm>
           <a:prstGeom prst="rect">
             <a:avLst/>
@@ -34877,14 +34771,14 @@
       </p:sp>
       <p:sp>
         <p:nvSpPr>
-          <p:cNvPr id="346" name="Shape 39"/>
+          <p:cNvPr id="347" name="Shape 39"/>
           <p:cNvSpPr/>
           <p:nvPr/>
         </p:nvSpPr>
         <p:spPr>
           <a:xfrm>
             <a:off x="6393600" y="3087360"/>
-            <a:ext cx="5236920" cy="1218960"/>
+            <a:ext cx="5235120" cy="1217160"/>
           </a:xfrm>
           <a:custGeom>
             <a:avLst/>
@@ -34948,14 +34842,14 @@
       </p:sp>
       <p:sp>
         <p:nvSpPr>
-          <p:cNvPr id="347" name="Text 40"/>
+          <p:cNvPr id="348" name="Text 40"/>
           <p:cNvSpPr/>
           <p:nvPr/>
         </p:nvSpPr>
         <p:spPr>
           <a:xfrm>
             <a:off x="6504840" y="3198600"/>
-            <a:ext cx="5088600" cy="219240"/>
+            <a:ext cx="5086800" cy="217440"/>
           </a:xfrm>
           <a:prstGeom prst="rect">
             <a:avLst/>
@@ -35000,14 +34894,14 @@
       </p:sp>
       <p:sp>
         <p:nvSpPr>
-          <p:cNvPr id="348" name="Shape 41"/>
+          <p:cNvPr id="349" name="Shape 41"/>
           <p:cNvSpPr/>
           <p:nvPr/>
         </p:nvSpPr>
         <p:spPr>
           <a:xfrm>
             <a:off x="6523200" y="3513240"/>
-            <a:ext cx="145080" cy="145080"/>
+            <a:ext cx="143280" cy="143280"/>
           </a:xfrm>
           <a:custGeom>
             <a:avLst/>
@@ -35105,14 +34999,14 @@
       </p:sp>
       <p:sp>
         <p:nvSpPr>
-          <p:cNvPr id="349" name="Text 42"/>
+          <p:cNvPr id="350" name="Text 42"/>
           <p:cNvSpPr/>
           <p:nvPr/>
         </p:nvSpPr>
         <p:spPr>
           <a:xfrm>
             <a:off x="6764040" y="3494520"/>
-            <a:ext cx="1774440" cy="182160"/>
+            <a:ext cx="1772640" cy="180360"/>
           </a:xfrm>
           <a:prstGeom prst="rect">
             <a:avLst/>
@@ -35157,14 +35051,14 @@
       </p:sp>
       <p:sp>
         <p:nvSpPr>
-          <p:cNvPr id="350" name="Shape 43"/>
+          <p:cNvPr id="351" name="Shape 43"/>
           <p:cNvSpPr/>
           <p:nvPr/>
         </p:nvSpPr>
         <p:spPr>
           <a:xfrm>
             <a:off x="6523200" y="3772440"/>
-            <a:ext cx="145080" cy="145080"/>
+            <a:ext cx="143280" cy="143280"/>
           </a:xfrm>
           <a:custGeom>
             <a:avLst/>
@@ -35262,14 +35156,14 @@
       </p:sp>
       <p:sp>
         <p:nvSpPr>
-          <p:cNvPr id="351" name="Text 44"/>
+          <p:cNvPr id="352" name="Text 44"/>
           <p:cNvSpPr/>
           <p:nvPr/>
         </p:nvSpPr>
         <p:spPr>
           <a:xfrm>
             <a:off x="6764040" y="3753720"/>
-            <a:ext cx="1330200" cy="182160"/>
+            <a:ext cx="1328400" cy="180360"/>
           </a:xfrm>
           <a:prstGeom prst="rect">
             <a:avLst/>
@@ -35314,14 +35208,14 @@
       </p:sp>
       <p:sp>
         <p:nvSpPr>
-          <p:cNvPr id="352" name="Shape 45"/>
+          <p:cNvPr id="353" name="Shape 45"/>
           <p:cNvSpPr/>
           <p:nvPr/>
         </p:nvSpPr>
         <p:spPr>
           <a:xfrm>
             <a:off x="6523200" y="4031640"/>
-            <a:ext cx="145080" cy="145080"/>
+            <a:ext cx="143280" cy="143280"/>
           </a:xfrm>
           <a:custGeom>
             <a:avLst/>
@@ -35419,14 +35313,14 @@
       </p:sp>
       <p:sp>
         <p:nvSpPr>
-          <p:cNvPr id="353" name="Text 46"/>
+          <p:cNvPr id="354" name="Text 46"/>
           <p:cNvSpPr/>
           <p:nvPr/>
         </p:nvSpPr>
         <p:spPr>
           <a:xfrm>
             <a:off x="6764040" y="4012920"/>
-            <a:ext cx="1774440" cy="182160"/>
+            <a:ext cx="1772640" cy="180360"/>
           </a:xfrm>
           <a:prstGeom prst="rect">
             <a:avLst/>
@@ -35471,14 +35365,14 @@
       </p:sp>
       <p:sp>
         <p:nvSpPr>
-          <p:cNvPr id="354" name="Shape 47"/>
+          <p:cNvPr id="355" name="Shape 47"/>
           <p:cNvSpPr/>
           <p:nvPr/>
         </p:nvSpPr>
         <p:spPr>
           <a:xfrm>
             <a:off x="6393600" y="4420440"/>
-            <a:ext cx="5236920" cy="885960"/>
+            <a:ext cx="5235120" cy="884160"/>
           </a:xfrm>
           <a:custGeom>
             <a:avLst/>
@@ -35542,14 +35436,14 @@
       </p:sp>
       <p:sp>
         <p:nvSpPr>
-          <p:cNvPr id="355" name="Text 48"/>
+          <p:cNvPr id="356" name="Text 48"/>
           <p:cNvSpPr/>
           <p:nvPr/>
         </p:nvSpPr>
         <p:spPr>
           <a:xfrm>
             <a:off x="6504840" y="4531320"/>
-            <a:ext cx="5088600" cy="219240"/>
+            <a:ext cx="5086800" cy="217440"/>
           </a:xfrm>
           <a:prstGeom prst="rect">
             <a:avLst/>
@@ -35594,14 +35488,14 @@
       </p:sp>
       <p:sp>
         <p:nvSpPr>
-          <p:cNvPr id="356" name="Text 49"/>
+          <p:cNvPr id="357" name="Text 49"/>
           <p:cNvSpPr/>
           <p:nvPr/>
         </p:nvSpPr>
         <p:spPr>
           <a:xfrm>
             <a:off x="6504840" y="4827600"/>
-            <a:ext cx="5079600" cy="367560"/>
+            <a:ext cx="5077800" cy="365760"/>
           </a:xfrm>
           <a:prstGeom prst="rect">
             <a:avLst/>
@@ -35666,14 +35560,14 @@
       </p:sp>
       <p:sp>
         <p:nvSpPr>
-          <p:cNvPr id="357" name="Shape 50"/>
+          <p:cNvPr id="358" name="Shape 50"/>
           <p:cNvSpPr/>
           <p:nvPr/>
         </p:nvSpPr>
         <p:spPr>
           <a:xfrm>
             <a:off x="374760" y="5582160"/>
-            <a:ext cx="3709440" cy="1265400"/>
+            <a:ext cx="3707640" cy="1263600"/>
           </a:xfrm>
           <a:custGeom>
             <a:avLst/>
@@ -35740,14 +35634,14 @@
       </p:sp>
       <p:sp>
         <p:nvSpPr>
-          <p:cNvPr id="358" name="Shape 51"/>
+          <p:cNvPr id="359" name="Shape 51"/>
           <p:cNvSpPr/>
           <p:nvPr/>
         </p:nvSpPr>
         <p:spPr>
           <a:xfrm>
             <a:off x="2091240" y="5734800"/>
-            <a:ext cx="274680" cy="219240"/>
+            <a:ext cx="272880" cy="217440"/>
           </a:xfrm>
           <a:custGeom>
             <a:avLst/>
@@ -35921,14 +35815,14 @@
       </p:sp>
       <p:sp>
         <p:nvSpPr>
-          <p:cNvPr id="359" name="Text 52"/>
+          <p:cNvPr id="360" name="Text 52"/>
           <p:cNvSpPr/>
           <p:nvPr/>
         </p:nvSpPr>
         <p:spPr>
           <a:xfrm>
             <a:off x="495360" y="6031080"/>
-            <a:ext cx="3468600" cy="182160"/>
+            <a:ext cx="3466800" cy="180360"/>
           </a:xfrm>
           <a:prstGeom prst="rect">
             <a:avLst/>
@@ -35973,14 +35867,14 @@
       </p:sp>
       <p:sp>
         <p:nvSpPr>
-          <p:cNvPr id="360" name="Text 53"/>
+          <p:cNvPr id="361" name="Text 53"/>
           <p:cNvSpPr/>
           <p:nvPr/>
         </p:nvSpPr>
         <p:spPr>
           <a:xfrm>
             <a:off x="471960" y="6216480"/>
-            <a:ext cx="3515040" cy="293400"/>
+            <a:ext cx="3513240" cy="291600"/>
           </a:xfrm>
           <a:prstGeom prst="rect">
             <a:avLst/>
@@ -36025,14 +35919,14 @@
       </p:sp>
       <p:sp>
         <p:nvSpPr>
-          <p:cNvPr id="361" name="Text 54"/>
+          <p:cNvPr id="362" name="Text 54"/>
           <p:cNvSpPr/>
           <p:nvPr/>
         </p:nvSpPr>
         <p:spPr>
           <a:xfrm>
             <a:off x="495360" y="6512760"/>
-            <a:ext cx="3468600" cy="182160"/>
+            <a:ext cx="3466800" cy="180360"/>
           </a:xfrm>
           <a:prstGeom prst="rect">
             <a:avLst/>
@@ -36077,14 +35971,14 @@
       </p:sp>
       <p:sp>
         <p:nvSpPr>
-          <p:cNvPr id="362" name="Shape 55"/>
+          <p:cNvPr id="363" name="Shape 55"/>
           <p:cNvSpPr/>
           <p:nvPr/>
         </p:nvSpPr>
         <p:spPr>
           <a:xfrm>
             <a:off x="4242600" y="5582160"/>
-            <a:ext cx="3709440" cy="1265400"/>
+            <a:ext cx="3707640" cy="1263600"/>
           </a:xfrm>
           <a:custGeom>
             <a:avLst/>
@@ -36151,14 +36045,14 @@
       </p:sp>
       <p:sp>
         <p:nvSpPr>
-          <p:cNvPr id="363" name="Shape 56"/>
+          <p:cNvPr id="364" name="Shape 56"/>
           <p:cNvSpPr/>
           <p:nvPr/>
         </p:nvSpPr>
         <p:spPr>
           <a:xfrm>
             <a:off x="6014160" y="5734800"/>
-            <a:ext cx="163800" cy="219240"/>
+            <a:ext cx="162000" cy="217440"/>
           </a:xfrm>
           <a:custGeom>
             <a:avLst/>
@@ -36262,14 +36156,14 @@
       </p:sp>
       <p:sp>
         <p:nvSpPr>
-          <p:cNvPr id="364" name="Text 57"/>
+          <p:cNvPr id="365" name="Text 57"/>
           <p:cNvSpPr/>
           <p:nvPr/>
         </p:nvSpPr>
         <p:spPr>
           <a:xfrm>
             <a:off x="4362840" y="6031080"/>
-            <a:ext cx="3468600" cy="182160"/>
+            <a:ext cx="3466800" cy="180360"/>
           </a:xfrm>
           <a:prstGeom prst="rect">
             <a:avLst/>
@@ -36314,14 +36208,14 @@
       </p:sp>
       <p:sp>
         <p:nvSpPr>
-          <p:cNvPr id="365" name="Text 58"/>
+          <p:cNvPr id="366" name="Text 58"/>
           <p:cNvSpPr/>
           <p:nvPr/>
         </p:nvSpPr>
         <p:spPr>
           <a:xfrm>
             <a:off x="4339800" y="6216480"/>
-            <a:ext cx="3515040" cy="293400"/>
+            <a:ext cx="3513240" cy="291600"/>
           </a:xfrm>
           <a:prstGeom prst="rect">
             <a:avLst/>
@@ -36366,14 +36260,14 @@
       </p:sp>
       <p:sp>
         <p:nvSpPr>
-          <p:cNvPr id="366" name="Text 59"/>
+          <p:cNvPr id="367" name="Text 59"/>
           <p:cNvSpPr/>
           <p:nvPr/>
         </p:nvSpPr>
         <p:spPr>
           <a:xfrm>
             <a:off x="4362840" y="6512760"/>
-            <a:ext cx="3468600" cy="182160"/>
+            <a:ext cx="3466800" cy="180360"/>
           </a:xfrm>
           <a:prstGeom prst="rect">
             <a:avLst/>
@@ -36418,14 +36312,14 @@
       </p:sp>
       <p:sp>
         <p:nvSpPr>
-          <p:cNvPr id="367" name="Shape 60"/>
+          <p:cNvPr id="368" name="Shape 60"/>
           <p:cNvSpPr/>
           <p:nvPr/>
         </p:nvSpPr>
         <p:spPr>
           <a:xfrm>
             <a:off x="8110080" y="5582160"/>
-            <a:ext cx="3709440" cy="1265400"/>
+            <a:ext cx="3707640" cy="1263600"/>
           </a:xfrm>
           <a:custGeom>
             <a:avLst/>
@@ -36492,14 +36386,14 @@
       </p:sp>
       <p:sp>
         <p:nvSpPr>
-          <p:cNvPr id="368" name="Shape 61"/>
+          <p:cNvPr id="369" name="Shape 61"/>
           <p:cNvSpPr/>
           <p:nvPr/>
         </p:nvSpPr>
         <p:spPr>
           <a:xfrm>
             <a:off x="9826200" y="5734800"/>
-            <a:ext cx="274680" cy="219240"/>
+            <a:ext cx="272880" cy="217440"/>
           </a:xfrm>
           <a:custGeom>
             <a:avLst/>
@@ -36780,14 +36674,14 @@
       </p:sp>
       <p:sp>
         <p:nvSpPr>
-          <p:cNvPr id="369" name="Text 62"/>
+          <p:cNvPr id="370" name="Text 62"/>
           <p:cNvSpPr/>
           <p:nvPr/>
         </p:nvSpPr>
         <p:spPr>
           <a:xfrm>
             <a:off x="8230320" y="6031080"/>
-            <a:ext cx="3468600" cy="182160"/>
+            <a:ext cx="3466800" cy="180360"/>
           </a:xfrm>
           <a:prstGeom prst="rect">
             <a:avLst/>
@@ -36832,14 +36726,14 @@
       </p:sp>
       <p:sp>
         <p:nvSpPr>
-          <p:cNvPr id="370" name="Text 63"/>
+          <p:cNvPr id="371" name="Text 63"/>
           <p:cNvSpPr/>
           <p:nvPr/>
         </p:nvSpPr>
         <p:spPr>
           <a:xfrm>
             <a:off x="8207280" y="6216480"/>
-            <a:ext cx="3515040" cy="293400"/>
+            <a:ext cx="3513240" cy="291600"/>
           </a:xfrm>
           <a:prstGeom prst="rect">
             <a:avLst/>
@@ -36884,14 +36778,14 @@
       </p:sp>
       <p:sp>
         <p:nvSpPr>
-          <p:cNvPr id="371" name="Text 64"/>
+          <p:cNvPr id="372" name="Text 64"/>
           <p:cNvSpPr/>
           <p:nvPr/>
         </p:nvSpPr>
         <p:spPr>
           <a:xfrm>
             <a:off x="8230320" y="6512760"/>
-            <a:ext cx="3468600" cy="182160"/>
+            <a:ext cx="3466800" cy="180360"/>
           </a:xfrm>
           <a:prstGeom prst="rect">
             <a:avLst/>
@@ -36973,14 +36867,14 @@
       </p:grpSpPr>
       <p:sp>
         <p:nvSpPr>
-          <p:cNvPr id="372" name="Image 0"/>
+          <p:cNvPr id="373" name="Image 0"/>
           <p:cNvSpPr/>
           <p:nvPr/>
         </p:nvSpPr>
         <p:spPr>
           <a:xfrm>
             <a:off x="0" y="0"/>
-            <a:ext cx="12189240" cy="6855480"/>
+            <a:ext cx="12187440" cy="6853680"/>
           </a:xfrm>
           <a:prstGeom prst="roundRect">
             <a:avLst>
@@ -37005,14 +36899,14 @@
       </p:sp>
       <p:sp>
         <p:nvSpPr>
-          <p:cNvPr id="373" name="Shape 0"/>
+          <p:cNvPr id="374" name="Shape 0"/>
           <p:cNvSpPr/>
           <p:nvPr/>
         </p:nvSpPr>
         <p:spPr>
           <a:xfrm>
             <a:off x="0" y="0"/>
-            <a:ext cx="12189240" cy="6855480"/>
+            <a:ext cx="12187440" cy="6853680"/>
           </a:xfrm>
           <a:custGeom>
             <a:avLst/>
@@ -37068,14 +36962,14 @@
       </p:sp>
       <p:sp>
         <p:nvSpPr>
-          <p:cNvPr id="374" name="Text 1"/>
+          <p:cNvPr id="375" name="Text 1"/>
           <p:cNvSpPr/>
           <p:nvPr/>
         </p:nvSpPr>
         <p:spPr>
           <a:xfrm>
             <a:off x="344520" y="344520"/>
-            <a:ext cx="11559960" cy="169560"/>
+            <a:ext cx="11558160" cy="167760"/>
           </a:xfrm>
           <a:prstGeom prst="rect">
             <a:avLst/>
@@ -37103,7 +36997,7 @@
               <a:buNone/>
             </a:pPr>
             <a:r>
-              <a:rPr b="1" lang="en-US" sz="950" spc="26" strike="noStrike">
+              <a:rPr b="1" lang="en-US" sz="950" spc="12" strike="noStrike">
                 <a:solidFill>
                   <a:srgbClr val="6366f1"/>
                 </a:solidFill>
@@ -37120,14 +37014,14 @@
       </p:sp>
       <p:sp>
         <p:nvSpPr>
-          <p:cNvPr id="375" name="Text 2"/>
+          <p:cNvPr id="376" name="Text 2"/>
           <p:cNvSpPr/>
           <p:nvPr/>
         </p:nvSpPr>
         <p:spPr>
           <a:xfrm>
             <a:off x="344520" y="586080"/>
-            <a:ext cx="11655000" cy="341640"/>
+            <a:ext cx="11653200" cy="339840"/>
           </a:xfrm>
           <a:prstGeom prst="rect">
             <a:avLst/>
@@ -37172,14 +37066,14 @@
       </p:sp>
       <p:sp>
         <p:nvSpPr>
-          <p:cNvPr id="376" name="Text 3"/>
+          <p:cNvPr id="377" name="Text 3"/>
           <p:cNvSpPr/>
           <p:nvPr/>
         </p:nvSpPr>
         <p:spPr>
           <a:xfrm>
             <a:off x="344520" y="999360"/>
-            <a:ext cx="11568600" cy="203760"/>
+            <a:ext cx="11566800" cy="201960"/>
           </a:xfrm>
           <a:prstGeom prst="rect">
             <a:avLst/>
@@ -37224,14 +37118,14 @@
       </p:sp>
       <p:sp>
         <p:nvSpPr>
-          <p:cNvPr id="377" name="Shape 4"/>
+          <p:cNvPr id="378" name="Shape 4"/>
           <p:cNvSpPr/>
           <p:nvPr/>
         </p:nvSpPr>
         <p:spPr>
           <a:xfrm>
             <a:off x="348840" y="1348560"/>
-            <a:ext cx="5675400" cy="2763000"/>
+            <a:ext cx="5673600" cy="2761200"/>
           </a:xfrm>
           <a:custGeom>
             <a:avLst/>
@@ -37300,14 +37194,14 @@
       </p:sp>
       <p:sp>
         <p:nvSpPr>
-          <p:cNvPr id="378" name="Shape 5"/>
+          <p:cNvPr id="379" name="Shape 5"/>
           <p:cNvSpPr/>
           <p:nvPr/>
         </p:nvSpPr>
         <p:spPr>
           <a:xfrm>
             <a:off x="525600" y="1524960"/>
-            <a:ext cx="410760" cy="410760"/>
+            <a:ext cx="408960" cy="408960"/>
           </a:xfrm>
           <a:custGeom>
             <a:avLst/>
@@ -37373,14 +37267,14 @@
       </p:sp>
       <p:sp>
         <p:nvSpPr>
-          <p:cNvPr id="379" name="Shape 6"/>
+          <p:cNvPr id="380" name="Shape 6"/>
           <p:cNvSpPr/>
           <p:nvPr/>
         </p:nvSpPr>
         <p:spPr>
           <a:xfrm>
             <a:off x="635400" y="1645560"/>
-            <a:ext cx="191160" cy="169560"/>
+            <a:ext cx="189360" cy="167760"/>
           </a:xfrm>
           <a:custGeom>
             <a:avLst/>
@@ -37498,14 +37392,14 @@
       </p:sp>
       <p:sp>
         <p:nvSpPr>
-          <p:cNvPr id="380" name="Text 7"/>
+          <p:cNvPr id="381" name="Text 7"/>
           <p:cNvSpPr/>
           <p:nvPr/>
         </p:nvSpPr>
         <p:spPr>
           <a:xfrm>
             <a:off x="1042560" y="1611360"/>
-            <a:ext cx="1504800" cy="238320"/>
+            <a:ext cx="1503000" cy="236520"/>
           </a:xfrm>
           <a:prstGeom prst="rect">
             <a:avLst/>
@@ -37550,14 +37444,14 @@
       </p:sp>
       <p:sp>
         <p:nvSpPr>
-          <p:cNvPr id="381" name="Shape 8"/>
+          <p:cNvPr id="382" name="Shape 8"/>
           <p:cNvSpPr/>
           <p:nvPr/>
         </p:nvSpPr>
         <p:spPr>
           <a:xfrm>
             <a:off x="525600" y="2076480"/>
-            <a:ext cx="5321880" cy="548640"/>
+            <a:ext cx="5320080" cy="546840"/>
           </a:xfrm>
           <a:custGeom>
             <a:avLst/>
@@ -37621,14 +37515,14 @@
       </p:sp>
       <p:sp>
         <p:nvSpPr>
-          <p:cNvPr id="382" name="Shape 9"/>
+          <p:cNvPr id="383" name="Shape 9"/>
           <p:cNvSpPr/>
           <p:nvPr/>
         </p:nvSpPr>
         <p:spPr>
           <a:xfrm>
             <a:off x="654840" y="2214360"/>
-            <a:ext cx="117720" cy="135000"/>
+            <a:ext cx="115920" cy="133200"/>
           </a:xfrm>
           <a:custGeom>
             <a:avLst/>
@@ -37776,14 +37670,14 @@
       </p:sp>
       <p:sp>
         <p:nvSpPr>
-          <p:cNvPr id="383" name="Text 10"/>
+          <p:cNvPr id="384" name="Text 10"/>
           <p:cNvSpPr/>
           <p:nvPr/>
         </p:nvSpPr>
         <p:spPr>
           <a:xfrm>
             <a:off x="904680" y="2179800"/>
-            <a:ext cx="3262680" cy="169560"/>
+            <a:ext cx="3260880" cy="167760"/>
           </a:xfrm>
           <a:prstGeom prst="rect">
             <a:avLst/>
@@ -37828,14 +37722,14 @@
       </p:sp>
       <p:sp>
         <p:nvSpPr>
-          <p:cNvPr id="384" name="Text 11"/>
+          <p:cNvPr id="385" name="Text 11"/>
           <p:cNvSpPr/>
           <p:nvPr/>
         </p:nvSpPr>
         <p:spPr>
           <a:xfrm>
             <a:off x="904680" y="2352240"/>
-            <a:ext cx="3262680" cy="169560"/>
+            <a:ext cx="3260880" cy="167760"/>
           </a:xfrm>
           <a:prstGeom prst="rect">
             <a:avLst/>
@@ -37880,14 +37774,14 @@
       </p:sp>
       <p:sp>
         <p:nvSpPr>
-          <p:cNvPr id="385" name="Shape 12"/>
+          <p:cNvPr id="386" name="Shape 12"/>
           <p:cNvSpPr/>
           <p:nvPr/>
         </p:nvSpPr>
         <p:spPr>
           <a:xfrm>
             <a:off x="525600" y="2731320"/>
-            <a:ext cx="5321880" cy="548640"/>
+            <a:ext cx="5320080" cy="546840"/>
           </a:xfrm>
           <a:custGeom>
             <a:avLst/>
@@ -37951,14 +37845,14 @@
       </p:sp>
       <p:sp>
         <p:nvSpPr>
-          <p:cNvPr id="386" name="Shape 13"/>
+          <p:cNvPr id="387" name="Shape 13"/>
           <p:cNvSpPr/>
           <p:nvPr/>
         </p:nvSpPr>
         <p:spPr>
           <a:xfrm>
             <a:off x="646200" y="2869200"/>
-            <a:ext cx="135000" cy="135000"/>
+            <a:ext cx="133200" cy="133200"/>
           </a:xfrm>
           <a:custGeom>
             <a:avLst/>
@@ -38101,14 +37995,14 @@
       </p:sp>
       <p:sp>
         <p:nvSpPr>
-          <p:cNvPr id="387" name="Text 14"/>
+          <p:cNvPr id="388" name="Text 14"/>
           <p:cNvSpPr/>
           <p:nvPr/>
         </p:nvSpPr>
         <p:spPr>
           <a:xfrm>
             <a:off x="904680" y="2834640"/>
-            <a:ext cx="3168000" cy="169560"/>
+            <a:ext cx="3166200" cy="167760"/>
           </a:xfrm>
           <a:prstGeom prst="rect">
             <a:avLst/>
@@ -38153,14 +38047,14 @@
       </p:sp>
       <p:sp>
         <p:nvSpPr>
-          <p:cNvPr id="388" name="Text 15"/>
+          <p:cNvPr id="389" name="Text 15"/>
           <p:cNvSpPr/>
           <p:nvPr/>
         </p:nvSpPr>
         <p:spPr>
           <a:xfrm>
             <a:off x="904680" y="3007080"/>
-            <a:ext cx="3168000" cy="169560"/>
+            <a:ext cx="3166200" cy="167760"/>
           </a:xfrm>
           <a:prstGeom prst="rect">
             <a:avLst/>
@@ -38205,14 +38099,14 @@
       </p:sp>
       <p:sp>
         <p:nvSpPr>
-          <p:cNvPr id="389" name="Shape 16"/>
+          <p:cNvPr id="390" name="Shape 16"/>
           <p:cNvSpPr/>
           <p:nvPr/>
         </p:nvSpPr>
         <p:spPr>
           <a:xfrm>
             <a:off x="525600" y="3386160"/>
-            <a:ext cx="5321880" cy="548640"/>
+            <a:ext cx="5320080" cy="546840"/>
           </a:xfrm>
           <a:custGeom>
             <a:avLst/>
@@ -38276,14 +38170,14 @@
       </p:sp>
       <p:sp>
         <p:nvSpPr>
-          <p:cNvPr id="390" name="Shape 17"/>
+          <p:cNvPr id="391" name="Shape 17"/>
           <p:cNvSpPr/>
           <p:nvPr/>
         </p:nvSpPr>
         <p:spPr>
           <a:xfrm>
             <a:off x="637560" y="3524040"/>
-            <a:ext cx="152280" cy="135000"/>
+            <a:ext cx="150480" cy="133200"/>
           </a:xfrm>
           <a:custGeom>
             <a:avLst/>
@@ -38383,14 +38277,14 @@
       </p:sp>
       <p:sp>
         <p:nvSpPr>
-          <p:cNvPr id="391" name="Text 18"/>
+          <p:cNvPr id="392" name="Text 18"/>
           <p:cNvSpPr/>
           <p:nvPr/>
         </p:nvSpPr>
         <p:spPr>
           <a:xfrm>
             <a:off x="904680" y="3489480"/>
-            <a:ext cx="2805840" cy="169560"/>
+            <a:ext cx="2804040" cy="167760"/>
           </a:xfrm>
           <a:prstGeom prst="rect">
             <a:avLst/>
@@ -38435,14 +38329,14 @@
       </p:sp>
       <p:sp>
         <p:nvSpPr>
-          <p:cNvPr id="392" name="Text 19"/>
+          <p:cNvPr id="393" name="Text 19"/>
           <p:cNvSpPr/>
           <p:nvPr/>
         </p:nvSpPr>
         <p:spPr>
           <a:xfrm>
             <a:off x="904680" y="3661920"/>
-            <a:ext cx="2805840" cy="169560"/>
+            <a:ext cx="2804040" cy="167760"/>
           </a:xfrm>
           <a:prstGeom prst="rect">
             <a:avLst/>
@@ -38487,14 +38381,14 @@
       </p:sp>
       <p:sp>
         <p:nvSpPr>
-          <p:cNvPr id="393" name="Shape 20"/>
+          <p:cNvPr id="394" name="Shape 20"/>
           <p:cNvSpPr/>
           <p:nvPr/>
         </p:nvSpPr>
         <p:spPr>
           <a:xfrm>
             <a:off x="6169680" y="1348560"/>
-            <a:ext cx="5675400" cy="2763000"/>
+            <a:ext cx="5673600" cy="2761200"/>
           </a:xfrm>
           <a:custGeom>
             <a:avLst/>
@@ -38563,14 +38457,14 @@
       </p:sp>
       <p:sp>
         <p:nvSpPr>
-          <p:cNvPr id="394" name="Shape 21"/>
+          <p:cNvPr id="395" name="Shape 21"/>
           <p:cNvSpPr/>
           <p:nvPr/>
         </p:nvSpPr>
         <p:spPr>
           <a:xfrm>
             <a:off x="6346440" y="1524960"/>
-            <a:ext cx="410760" cy="410760"/>
+            <a:ext cx="408960" cy="408960"/>
           </a:xfrm>
           <a:custGeom>
             <a:avLst/>
@@ -38636,14 +38530,14 @@
       </p:sp>
       <p:sp>
         <p:nvSpPr>
-          <p:cNvPr id="395" name="Shape 22"/>
+          <p:cNvPr id="396" name="Shape 22"/>
           <p:cNvSpPr/>
           <p:nvPr/>
         </p:nvSpPr>
         <p:spPr>
           <a:xfrm>
             <a:off x="6445440" y="1645560"/>
-            <a:ext cx="212400" cy="169560"/>
+            <a:ext cx="210600" cy="167760"/>
           </a:xfrm>
           <a:custGeom>
             <a:avLst/>
@@ -38817,14 +38711,14 @@
       </p:sp>
       <p:sp>
         <p:nvSpPr>
-          <p:cNvPr id="396" name="Text 23"/>
+          <p:cNvPr id="397" name="Text 23"/>
           <p:cNvSpPr/>
           <p:nvPr/>
         </p:nvSpPr>
         <p:spPr>
           <a:xfrm>
             <a:off x="6863400" y="1611360"/>
-            <a:ext cx="1177560" cy="238320"/>
+            <a:ext cx="1175760" cy="236520"/>
           </a:xfrm>
           <a:prstGeom prst="rect">
             <a:avLst/>
@@ -38869,14 +38763,14 @@
       </p:sp>
       <p:sp>
         <p:nvSpPr>
-          <p:cNvPr id="397" name="Shape 24"/>
+          <p:cNvPr id="398" name="Shape 24"/>
           <p:cNvSpPr/>
           <p:nvPr/>
         </p:nvSpPr>
         <p:spPr>
           <a:xfrm>
             <a:off x="6346440" y="2076480"/>
-            <a:ext cx="5321880" cy="548640"/>
+            <a:ext cx="5320080" cy="546840"/>
           </a:xfrm>
           <a:custGeom>
             <a:avLst/>
@@ -38940,14 +38834,14 @@
       </p:sp>
       <p:sp>
         <p:nvSpPr>
-          <p:cNvPr id="398" name="Shape 25"/>
+          <p:cNvPr id="399" name="Shape 25"/>
           <p:cNvSpPr/>
           <p:nvPr/>
         </p:nvSpPr>
         <p:spPr>
           <a:xfrm>
             <a:off x="6475680" y="2214360"/>
-            <a:ext cx="117720" cy="135000"/>
+            <a:ext cx="115920" cy="133200"/>
           </a:xfrm>
           <a:custGeom>
             <a:avLst/>
@@ -39037,14 +38931,14 @@
       </p:sp>
       <p:sp>
         <p:nvSpPr>
-          <p:cNvPr id="399" name="Text 26"/>
+          <p:cNvPr id="400" name="Text 26"/>
           <p:cNvSpPr/>
           <p:nvPr/>
         </p:nvSpPr>
         <p:spPr>
           <a:xfrm>
             <a:off x="6725520" y="2179800"/>
-            <a:ext cx="2797560" cy="169560"/>
+            <a:ext cx="2795760" cy="167760"/>
           </a:xfrm>
           <a:prstGeom prst="rect">
             <a:avLst/>
@@ -39089,14 +38983,14 @@
       </p:sp>
       <p:sp>
         <p:nvSpPr>
-          <p:cNvPr id="400" name="Text 27"/>
+          <p:cNvPr id="401" name="Text 27"/>
           <p:cNvSpPr/>
           <p:nvPr/>
         </p:nvSpPr>
         <p:spPr>
           <a:xfrm>
             <a:off x="6725520" y="2352240"/>
-            <a:ext cx="2797560" cy="169560"/>
+            <a:ext cx="2795760" cy="167760"/>
           </a:xfrm>
           <a:prstGeom prst="rect">
             <a:avLst/>
@@ -39141,14 +39035,14 @@
       </p:sp>
       <p:sp>
         <p:nvSpPr>
-          <p:cNvPr id="401" name="Shape 28"/>
+          <p:cNvPr id="402" name="Shape 28"/>
           <p:cNvSpPr/>
           <p:nvPr/>
         </p:nvSpPr>
         <p:spPr>
           <a:xfrm>
             <a:off x="6346440" y="2731320"/>
-            <a:ext cx="5321880" cy="548640"/>
+            <a:ext cx="5320080" cy="546840"/>
           </a:xfrm>
           <a:custGeom>
             <a:avLst/>
@@ -39212,14 +39106,14 @@
       </p:sp>
       <p:sp>
         <p:nvSpPr>
-          <p:cNvPr id="402" name="Shape 29"/>
+          <p:cNvPr id="403" name="Shape 29"/>
           <p:cNvSpPr/>
           <p:nvPr/>
         </p:nvSpPr>
         <p:spPr>
           <a:xfrm>
             <a:off x="6449760" y="2869200"/>
-            <a:ext cx="169560" cy="135000"/>
+            <a:ext cx="167760" cy="133200"/>
           </a:xfrm>
           <a:custGeom>
             <a:avLst/>
@@ -39428,14 +39322,14 @@
       </p:sp>
       <p:sp>
         <p:nvSpPr>
-          <p:cNvPr id="403" name="Text 30"/>
+          <p:cNvPr id="404" name="Text 30"/>
           <p:cNvSpPr/>
           <p:nvPr/>
         </p:nvSpPr>
         <p:spPr>
           <a:xfrm>
             <a:off x="6725520" y="2834640"/>
-            <a:ext cx="2874960" cy="169560"/>
+            <a:ext cx="2873160" cy="167760"/>
           </a:xfrm>
           <a:prstGeom prst="rect">
             <a:avLst/>
@@ -39480,14 +39374,14 @@
       </p:sp>
       <p:sp>
         <p:nvSpPr>
-          <p:cNvPr id="404" name="Text 31"/>
+          <p:cNvPr id="405" name="Text 31"/>
           <p:cNvSpPr/>
           <p:nvPr/>
         </p:nvSpPr>
         <p:spPr>
           <a:xfrm>
             <a:off x="6725520" y="3007080"/>
-            <a:ext cx="2874960" cy="169560"/>
+            <a:ext cx="2873160" cy="167760"/>
           </a:xfrm>
           <a:prstGeom prst="rect">
             <a:avLst/>
@@ -39532,14 +39426,14 @@
       </p:sp>
       <p:sp>
         <p:nvSpPr>
-          <p:cNvPr id="405" name="Shape 32"/>
+          <p:cNvPr id="406" name="Shape 32"/>
           <p:cNvSpPr/>
           <p:nvPr/>
         </p:nvSpPr>
         <p:spPr>
           <a:xfrm>
             <a:off x="6346440" y="3386160"/>
-            <a:ext cx="5321880" cy="548640"/>
+            <a:ext cx="5320080" cy="546840"/>
           </a:xfrm>
           <a:custGeom>
             <a:avLst/>
@@ -39603,14 +39497,14 @@
       </p:sp>
       <p:sp>
         <p:nvSpPr>
-          <p:cNvPr id="406" name="Shape 33"/>
+          <p:cNvPr id="407" name="Shape 33"/>
           <p:cNvSpPr/>
           <p:nvPr/>
         </p:nvSpPr>
         <p:spPr>
           <a:xfrm>
             <a:off x="6467040" y="3524040"/>
-            <a:ext cx="135000" cy="135000"/>
+            <a:ext cx="133200" cy="133200"/>
           </a:xfrm>
           <a:custGeom>
             <a:avLst/>
@@ -39736,14 +39630,14 @@
       </p:sp>
       <p:sp>
         <p:nvSpPr>
-          <p:cNvPr id="407" name="Text 34"/>
+          <p:cNvPr id="408" name="Text 34"/>
           <p:cNvSpPr/>
           <p:nvPr/>
         </p:nvSpPr>
         <p:spPr>
           <a:xfrm>
             <a:off x="6725520" y="3489480"/>
-            <a:ext cx="2435400" cy="169560"/>
+            <a:ext cx="2433600" cy="167760"/>
           </a:xfrm>
           <a:prstGeom prst="rect">
             <a:avLst/>
@@ -39788,14 +39682,14 @@
       </p:sp>
       <p:sp>
         <p:nvSpPr>
-          <p:cNvPr id="408" name="Text 35"/>
+          <p:cNvPr id="409" name="Text 35"/>
           <p:cNvSpPr/>
           <p:nvPr/>
         </p:nvSpPr>
         <p:spPr>
           <a:xfrm>
             <a:off x="6725520" y="3661920"/>
-            <a:ext cx="2435400" cy="169560"/>
+            <a:ext cx="2433600" cy="167760"/>
           </a:xfrm>
           <a:prstGeom prst="rect">
             <a:avLst/>
@@ -39840,14 +39734,14 @@
       </p:sp>
       <p:sp>
         <p:nvSpPr>
-          <p:cNvPr id="409" name="Shape 36"/>
+          <p:cNvPr id="410" name="Shape 36"/>
           <p:cNvSpPr/>
           <p:nvPr/>
         </p:nvSpPr>
         <p:spPr>
           <a:xfrm>
             <a:off x="348840" y="4260600"/>
-            <a:ext cx="5675400" cy="2590560"/>
+            <a:ext cx="5673600" cy="2588760"/>
           </a:xfrm>
           <a:custGeom>
             <a:avLst/>
@@ -39916,14 +39810,14 @@
       </p:sp>
       <p:sp>
         <p:nvSpPr>
-          <p:cNvPr id="410" name="Shape 37"/>
+          <p:cNvPr id="411" name="Shape 37"/>
           <p:cNvSpPr/>
           <p:nvPr/>
         </p:nvSpPr>
         <p:spPr>
           <a:xfrm>
             <a:off x="525600" y="4437360"/>
-            <a:ext cx="410760" cy="410760"/>
+            <a:ext cx="408960" cy="408960"/>
           </a:xfrm>
           <a:custGeom>
             <a:avLst/>
@@ -39989,14 +39883,14 @@
       </p:sp>
       <p:sp>
         <p:nvSpPr>
-          <p:cNvPr id="411" name="Shape 38"/>
+          <p:cNvPr id="412" name="Shape 38"/>
           <p:cNvSpPr/>
           <p:nvPr/>
         </p:nvSpPr>
         <p:spPr>
           <a:xfrm>
             <a:off x="646200" y="4557960"/>
-            <a:ext cx="169560" cy="169560"/>
+            <a:ext cx="167760" cy="167760"/>
           </a:xfrm>
           <a:custGeom>
             <a:avLst/>
@@ -40212,14 +40106,14 @@
       </p:sp>
       <p:sp>
         <p:nvSpPr>
-          <p:cNvPr id="412" name="Text 39"/>
+          <p:cNvPr id="413" name="Text 39"/>
           <p:cNvSpPr/>
           <p:nvPr/>
         </p:nvSpPr>
         <p:spPr>
           <a:xfrm>
             <a:off x="1042560" y="4523400"/>
-            <a:ext cx="1642680" cy="238320"/>
+            <a:ext cx="1640880" cy="236520"/>
           </a:xfrm>
           <a:prstGeom prst="rect">
             <a:avLst/>
@@ -40264,14 +40158,14 @@
       </p:sp>
       <p:sp>
         <p:nvSpPr>
-          <p:cNvPr id="413" name="Shape 40"/>
+          <p:cNvPr id="414" name="Shape 40"/>
           <p:cNvSpPr/>
           <p:nvPr/>
         </p:nvSpPr>
         <p:spPr>
           <a:xfrm>
             <a:off x="525600" y="4988880"/>
-            <a:ext cx="5321880" cy="617400"/>
+            <a:ext cx="5320080" cy="615600"/>
           </a:xfrm>
           <a:custGeom>
             <a:avLst/>
@@ -40335,14 +40229,14 @@
       </p:sp>
       <p:sp>
         <p:nvSpPr>
-          <p:cNvPr id="414" name="Text 41"/>
+          <p:cNvPr id="415" name="Text 41"/>
           <p:cNvSpPr/>
           <p:nvPr/>
         </p:nvSpPr>
         <p:spPr>
           <a:xfrm>
             <a:off x="628920" y="5092200"/>
-            <a:ext cx="5175360" cy="169560"/>
+            <a:ext cx="5173560" cy="167760"/>
           </a:xfrm>
           <a:prstGeom prst="rect">
             <a:avLst/>
@@ -40387,14 +40281,14 @@
       </p:sp>
       <p:sp>
         <p:nvSpPr>
-          <p:cNvPr id="415" name="Text 42"/>
+          <p:cNvPr id="416" name="Text 42"/>
           <p:cNvSpPr/>
           <p:nvPr/>
         </p:nvSpPr>
         <p:spPr>
           <a:xfrm>
             <a:off x="628920" y="5333400"/>
-            <a:ext cx="5175360" cy="169560"/>
+            <a:ext cx="5173560" cy="167760"/>
           </a:xfrm>
           <a:prstGeom prst="rect">
             <a:avLst/>
@@ -40439,14 +40333,14 @@
       </p:sp>
       <p:sp>
         <p:nvSpPr>
-          <p:cNvPr id="416" name="Shape 43"/>
+          <p:cNvPr id="417" name="Shape 43"/>
           <p:cNvSpPr/>
           <p:nvPr/>
         </p:nvSpPr>
         <p:spPr>
           <a:xfrm>
             <a:off x="525600" y="5712480"/>
-            <a:ext cx="2607840" cy="617400"/>
+            <a:ext cx="2606040" cy="615600"/>
           </a:xfrm>
           <a:custGeom>
             <a:avLst/>
@@ -40510,14 +40404,14 @@
       </p:sp>
       <p:sp>
         <p:nvSpPr>
-          <p:cNvPr id="417" name="Text 44"/>
+          <p:cNvPr id="418" name="Text 44"/>
           <p:cNvSpPr/>
           <p:nvPr/>
         </p:nvSpPr>
         <p:spPr>
           <a:xfrm>
             <a:off x="577440" y="5815800"/>
-            <a:ext cx="2504520" cy="272880"/>
+            <a:ext cx="2502720" cy="271080"/>
           </a:xfrm>
           <a:prstGeom prst="rect">
             <a:avLst/>
@@ -40562,14 +40456,14 @@
       </p:sp>
       <p:sp>
         <p:nvSpPr>
-          <p:cNvPr id="418" name="Text 45"/>
+          <p:cNvPr id="419" name="Text 45"/>
           <p:cNvSpPr/>
           <p:nvPr/>
         </p:nvSpPr>
         <p:spPr>
           <a:xfrm>
             <a:off x="603000" y="6091560"/>
-            <a:ext cx="2452680" cy="135000"/>
+            <a:ext cx="2450880" cy="133200"/>
           </a:xfrm>
           <a:prstGeom prst="rect">
             <a:avLst/>
@@ -40614,14 +40508,14 @@
       </p:sp>
       <p:sp>
         <p:nvSpPr>
-          <p:cNvPr id="419" name="Shape 46"/>
+          <p:cNvPr id="420" name="Shape 46"/>
           <p:cNvSpPr/>
           <p:nvPr/>
         </p:nvSpPr>
         <p:spPr>
           <a:xfrm>
             <a:off x="3237840" y="5712480"/>
-            <a:ext cx="2607840" cy="617400"/>
+            <a:ext cx="2606040" cy="615600"/>
           </a:xfrm>
           <a:custGeom>
             <a:avLst/>
@@ -40685,14 +40579,14 @@
       </p:sp>
       <p:sp>
         <p:nvSpPr>
-          <p:cNvPr id="420" name="Text 47"/>
+          <p:cNvPr id="421" name="Text 47"/>
           <p:cNvSpPr/>
           <p:nvPr/>
         </p:nvSpPr>
         <p:spPr>
           <a:xfrm>
             <a:off x="3289320" y="5815800"/>
-            <a:ext cx="2504520" cy="272880"/>
+            <a:ext cx="2502720" cy="271080"/>
           </a:xfrm>
           <a:prstGeom prst="rect">
             <a:avLst/>
@@ -40737,14 +40631,14 @@
       </p:sp>
       <p:sp>
         <p:nvSpPr>
-          <p:cNvPr id="421" name="Text 48"/>
+          <p:cNvPr id="422" name="Text 48"/>
           <p:cNvSpPr/>
           <p:nvPr/>
         </p:nvSpPr>
         <p:spPr>
           <a:xfrm>
             <a:off x="3315240" y="6091560"/>
-            <a:ext cx="2452680" cy="135000"/>
+            <a:ext cx="2450880" cy="133200"/>
           </a:xfrm>
           <a:prstGeom prst="rect">
             <a:avLst/>
@@ -40789,14 +40683,14 @@
       </p:sp>
       <p:sp>
         <p:nvSpPr>
-          <p:cNvPr id="422" name="Shape 49"/>
+          <p:cNvPr id="423" name="Shape 49"/>
           <p:cNvSpPr/>
           <p:nvPr/>
         </p:nvSpPr>
         <p:spPr>
           <a:xfrm>
             <a:off x="6169680" y="4260600"/>
-            <a:ext cx="5675400" cy="2590560"/>
+            <a:ext cx="5673600" cy="2588760"/>
           </a:xfrm>
           <a:custGeom>
             <a:avLst/>
@@ -40865,14 +40759,14 @@
       </p:sp>
       <p:sp>
         <p:nvSpPr>
-          <p:cNvPr id="423" name="Shape 50"/>
+          <p:cNvPr id="424" name="Shape 50"/>
           <p:cNvSpPr/>
           <p:nvPr/>
         </p:nvSpPr>
         <p:spPr>
           <a:xfrm>
             <a:off x="6346440" y="4437360"/>
-            <a:ext cx="410760" cy="410760"/>
+            <a:ext cx="408960" cy="408960"/>
           </a:xfrm>
           <a:custGeom>
             <a:avLst/>
@@ -40938,14 +40832,14 @@
       </p:sp>
       <p:sp>
         <p:nvSpPr>
-          <p:cNvPr id="424" name="Shape 51"/>
+          <p:cNvPr id="425" name="Shape 51"/>
           <p:cNvSpPr/>
           <p:nvPr/>
         </p:nvSpPr>
         <p:spPr>
           <a:xfrm>
             <a:off x="6467040" y="4557960"/>
-            <a:ext cx="169560" cy="169560"/>
+            <a:ext cx="167760" cy="167760"/>
           </a:xfrm>
           <a:custGeom>
             <a:avLst/>
@@ -41041,14 +40935,14 @@
       </p:sp>
       <p:sp>
         <p:nvSpPr>
-          <p:cNvPr id="425" name="Text 52"/>
+          <p:cNvPr id="426" name="Text 52"/>
           <p:cNvSpPr/>
           <p:nvPr/>
         </p:nvSpPr>
         <p:spPr>
           <a:xfrm>
             <a:off x="6863400" y="4523400"/>
-            <a:ext cx="1384200" cy="238320"/>
+            <a:ext cx="1382400" cy="236520"/>
           </a:xfrm>
           <a:prstGeom prst="rect">
             <a:avLst/>
@@ -41093,14 +40987,14 @@
       </p:sp>
       <p:sp>
         <p:nvSpPr>
-          <p:cNvPr id="426" name="Shape 53"/>
+          <p:cNvPr id="427" name="Shape 53"/>
           <p:cNvSpPr/>
           <p:nvPr/>
         </p:nvSpPr>
         <p:spPr>
           <a:xfrm>
             <a:off x="6346440" y="4988880"/>
-            <a:ext cx="5321880" cy="789840"/>
+            <a:ext cx="5320080" cy="788040"/>
           </a:xfrm>
           <a:custGeom>
             <a:avLst/>
@@ -41164,14 +41058,14 @@
       </p:sp>
       <p:sp>
         <p:nvSpPr>
-          <p:cNvPr id="427" name="Shape 54"/>
+          <p:cNvPr id="428" name="Shape 54"/>
           <p:cNvSpPr/>
           <p:nvPr/>
         </p:nvSpPr>
         <p:spPr>
           <a:xfrm>
             <a:off x="6467040" y="5109480"/>
-            <a:ext cx="135000" cy="135000"/>
+            <a:ext cx="133200" cy="133200"/>
           </a:xfrm>
           <a:custGeom>
             <a:avLst/>
@@ -41341,14 +41235,14 @@
       </p:sp>
       <p:sp>
         <p:nvSpPr>
-          <p:cNvPr id="428" name="Text 55"/>
+          <p:cNvPr id="429" name="Text 55"/>
           <p:cNvSpPr/>
           <p:nvPr/>
         </p:nvSpPr>
         <p:spPr>
           <a:xfrm>
             <a:off x="6690960" y="5092200"/>
-            <a:ext cx="1737720" cy="169560"/>
+            <a:ext cx="1735920" cy="167760"/>
           </a:xfrm>
           <a:prstGeom prst="rect">
             <a:avLst/>
@@ -41393,14 +41287,14 @@
       </p:sp>
       <p:sp>
         <p:nvSpPr>
-          <p:cNvPr id="429" name="Text 56"/>
+          <p:cNvPr id="430" name="Text 56"/>
           <p:cNvSpPr/>
           <p:nvPr/>
         </p:nvSpPr>
         <p:spPr>
           <a:xfrm>
             <a:off x="6449760" y="5333400"/>
-            <a:ext cx="5175360" cy="341640"/>
+            <a:ext cx="5173560" cy="339840"/>
           </a:xfrm>
           <a:prstGeom prst="rect">
             <a:avLst/>
@@ -41445,14 +41339,14 @@
       </p:sp>
       <p:sp>
         <p:nvSpPr>
-          <p:cNvPr id="430" name="Shape 57"/>
+          <p:cNvPr id="431" name="Shape 57"/>
           <p:cNvSpPr/>
           <p:nvPr/>
         </p:nvSpPr>
         <p:spPr>
           <a:xfrm>
             <a:off x="6346440" y="5884920"/>
-            <a:ext cx="5321880" cy="789840"/>
+            <a:ext cx="5320080" cy="788040"/>
           </a:xfrm>
           <a:custGeom>
             <a:avLst/>
@@ -41516,14 +41410,14 @@
       </p:sp>
       <p:sp>
         <p:nvSpPr>
-          <p:cNvPr id="431" name="Text 58"/>
+          <p:cNvPr id="432" name="Text 58"/>
           <p:cNvSpPr/>
           <p:nvPr/>
         </p:nvSpPr>
         <p:spPr>
           <a:xfrm>
             <a:off x="6449760" y="5988240"/>
-            <a:ext cx="5175360" cy="169560"/>
+            <a:ext cx="5173560" cy="167760"/>
           </a:xfrm>
           <a:prstGeom prst="rect">
             <a:avLst/>
@@ -41568,14 +41462,14 @@
       </p:sp>
       <p:sp>
         <p:nvSpPr>
-          <p:cNvPr id="432" name="Text 59"/>
+          <p:cNvPr id="433" name="Text 59"/>
           <p:cNvSpPr/>
           <p:nvPr/>
         </p:nvSpPr>
         <p:spPr>
           <a:xfrm>
             <a:off x="6449760" y="6229440"/>
-            <a:ext cx="5175360" cy="341640"/>
+            <a:ext cx="5173560" cy="339840"/>
           </a:xfrm>
           <a:prstGeom prst="rect">
             <a:avLst/>
